--- a/downloads/presentations/modules/gov-310.pptx
+++ b/downloads/presentations/modules/gov-310.pptx
@@ -617,7 +617,8 @@
               <a:t>Core Concepts
 De-identification is the process of reducing the risk that data can be connected to a specific person. In public health practice, de-identification must be interpreted carefully because rare diseases, small communities, unusual dates, exact locations, and combinations of demographic fields may still make a record identifiable. A dataset can appear anonymous but still be linkable to individuals when combined with other information.
 Re-identification risk is the possibility that a person, household, provider, facility, or community can be identified from data that were intended to be de-identified or aggregated. AI can increase this risk by making patterns easier to discover, by generating detailed summaries, or by combining sources that were originally separated. Re-identification risk should be assessed before data are used for model development, vendor testing, public dashboards, or training exercises.
-Data minimization means using only the data elements necessary for the approved purpose. It is a practical guardrail because many AI tools perform better when given more context, but more context also increases privacy and confidentiality risk. A public health agency should document which fields are required, which are optional, which are prohibited, and which require special approval.</a:t>
+Data minimization means using only the data elements necessary for the approved purpose. It is a practical guardrail because many AI tools perform better when given more context, but more context also increases privacy and confidentiality risk. A public health agency should document which fields are required, which are optional, which are prohibited, and which require special approval.
+Application guidance: Identify what could go wrong, who could be affected, what safeguards are needed, and what evidence should be reviewed before use expands.</a:t>
             </a:r>
             <a:endParaRPr lang="en-US" dirty="0"/>
           </a:p>
@@ -706,7 +707,8 @@
             <a:r>
               <a:rPr lang="en-US" dirty="0"/>
               <a:t>Core Concepts
-Differential privacy is a statistical approach that adds carefully calibrated noise to outputs to reduce the risk that information about any one person can be inferred. It can be useful for public reporting or statistical release, but it does not solve all privacy problems. Public health staff need to understand that differential privacy involves tradeoffs between privacy protection and analytic utility.</a:t>
+Differential privacy is a statistical approach that adds carefully calibrated noise to outputs to reduce the risk that information about any one person can be inferred. It can be useful for public reporting or statistical release, but it does not solve all privacy problems. Public health staff need to understand that differential privacy involves tradeoffs between privacy protection and analytic utility.
+Application guidance: Identify what could go wrong, who could be affected, what safeguards are needed, and what evidence should be reviewed before use expands.</a:t>
             </a:r>
             <a:endParaRPr lang="en-US" dirty="0"/>
           </a:p>
@@ -796,7 +798,8 @@
               <a:rPr lang="en-US" dirty="0"/>
               <a:t>Public Health Example
 Consider a health department that wants to use AI to summarize disease investigation notes and identify common exposure settings across cases. The notes may include symptoms, dates, employer names, schools, shelters, correctional facilities, household details, immigration concerns, or other sensitive context. Even if the AI system is internal, the agency must define who can access the notes, whether the AI output can include names or exact locations, and how summaries will be reviewed before sharing.
-A privacy-preserving design might limit the AI tool to authorized case investigation staff, restrict the tool from using data outside the case management environment, require source traceability, and prevent output from including identifiers unless explicitly needed for the case workflow. Aggregated exposure summaries may require suppression rules for small counts, especially in rural areas or small communities. The goal is not to block useful analysis, but to ensure that sensitive information is used only in ways that are necessary, authorized, reviewed, and documented.</a:t>
+A privacy-preserving design might limit the AI tool to authorized case investigation staff, restrict the tool from using data outside the case management environment, require source traceability, and prevent output from including identifiers unless explicitly needed for the case workflow. Aggregated exposure summaries may require suppression rules for small counts, especially in rural areas or small communities. The goal is not to block useful analysis, but to ensure that sensitive information is used only in ways that are necessary, authorized, reviewed, and documented.
+Application guidance: Identify what could go wrong, who could be affected, what safeguards are needed, and what evidence should be reviewed before use expands.</a:t>
             </a:r>
             <a:endParaRPr lang="en-US" dirty="0"/>
           </a:p>
@@ -887,7 +890,8 @@
               <a:t>Technical Deep Dive
 Privacy-preserving AI begins with data classification. Staff should identify whether the workflow uses protected health information, personally identifiable information, confidential public health data, sensitive community data, operational data, or publicly available information. Classification should be tied to rules for storage, access, sharing, retention, and approved AI tools. A public AI tool may be acceptable for public guidance documents but inappropriate for case narratives or line lists.
 The next step is determining the minimum necessary data for the AI task. A model that classifies complaint topics may not need names or exact addresses. A tool that summarizes case notes for an assigned investigator may need identifiers inside the secure case system, but the same identifiers should not appear in evaluation exports or training examples. Data minimization should be built into data extracts, prompts, APIs, and reports.
-De-identification requires more than removing names. Dates, ZIP codes, facility names, employer names, exact locations, rare conditions, and free-text narratives can all create identification risk. Natural language processing and generative AI add additional complexity because sensitive details may be embedded in text. Agencies should consider automated redaction, structured review, suppression rules, and human spot checks before using text in AI workflows.</a:t>
+De-identification requires more than removing names. Dates, ZIP codes, facility names, employer names, exact locations, rare conditions, and free-text narratives can all create identification risk. Natural language processing and generative AI add additional complexity because sensitive details may be embedded in text. Agencies should consider automated redaction, structured review, suppression rules, and human spot checks before using text in AI workflows.
+Application guidance: Identify what could go wrong, who could be affected, what safeguards are needed, and what evidence should be reviewed before use expands.</a:t>
             </a:r>
             <a:endParaRPr lang="en-US" dirty="0"/>
           </a:p>
@@ -976,7 +980,8 @@
             <a:r>
               <a:rPr lang="en-US" dirty="0"/>
               <a:t>Technical Deep Dive
-Privacy controls must also apply to outputs. An AI-generated summary, risk score, cluster report, or dashboard can reveal sensitive information even if the input data were controlled. Output review should consider small cells, unusual combinations of attributes, identifiable narratives, and unintended inferences. Logs should document who generated outputs, what data were used, and whether the output was shared, edited, rejected, or escalated.</a:t>
+Privacy controls must also apply to outputs. An AI-generated summary, risk score, cluster report, or dashboard can reveal sensitive information even if the input data were controlled. Output review should consider small cells, unusual combinations of attributes, identifiable narratives, and unintended inferences. Logs should document who generated outputs, what data were used, and whether the output was shared, edited, rejected, or escalated.
+Application guidance: Identify what could go wrong, who could be affected, what safeguards are needed, and what evidence should be reviewed before use expands.</a:t>
             </a:r>
             <a:endParaRPr lang="en-US" dirty="0"/>
           </a:p>
@@ -1067,7 +1072,8 @@
               <a:t>Risks, Failure Modes, and Guardrails
 A major failure mode is assuming that de-identification is permanent. Data that are de-identified for one purpose may be re-identifiable in another context, especially when linked with other datasets. A guardrail is to perform use-case-specific privacy review and to document assumptions about data linkage, audience, geography, and release context.
 Another failure mode is exposing sensitive data to unapproved AI tools. Staff may paste text into a convenient tool without realizing that the data include protected or confidential information. A guardrail is to provide clear approved-tool lists, data-use tiers, technical blocking where possible, and training on prohibited uses.
-Output leakage is also a significant risk. A model may include more detail than needed or reveal rare combinations that point to an individual or small group. Guardrails include output templates, suppression thresholds, review workflows, redaction, access controls, and limits on copying or exporting results.</a:t>
+Output leakage is also a significant risk. A model may include more detail than needed or reveal rare combinations that point to an individual or small group. Guardrails include output templates, suppression thresholds, review workflows, redaction, access controls, and limits on copying or exporting results.
+Application guidance: Identify what could go wrong, who could be affected, what safeguards are needed, and what evidence should be reviewed before use expands.</a:t>
             </a:r>
             <a:endParaRPr lang="en-US" dirty="0"/>
           </a:p>
@@ -1156,7 +1162,8 @@
             <a:r>
               <a:rPr lang="en-US" dirty="0"/>
               <a:t>Risks, Failure Modes, and Guardrails
-Privacy risk can also arise from vendor relationships. Vendors may request sample data for testing or model tuning. Agencies should use synthetic, masked, or minimized data whenever possible and should require contractual controls for storage, reuse, subcontractors, breach notification, audit rights, and deletion.</a:t>
+Privacy risk can also arise from vendor relationships. Vendors may request sample data for testing or model tuning. Agencies should use synthetic, masked, or minimized data whenever possible and should require contractual controls for storage, reuse, subcontractors, breach notification, audit rights, and deletion.
+Application guidance: Identify what could go wrong, who could be affected, what safeguards are needed, and what evidence should be reviewed before use expands.</a:t>
             </a:r>
             <a:endParaRPr lang="en-US" dirty="0"/>
           </a:p>
@@ -1247,7 +1254,8 @@
               <a:t>Application to AI-Supported Workflows
 For generative AI, privacy-preserving design means controlling what data can be placed in prompts, what source documents are available to retrieval systems, how outputs are reviewed, and whether logs contain sensitive content. Prompt templates should make prohibited content clear and should encourage use of de-identified or aggregated inputs when possible.
 For predictive analytics, privacy concerns include which features are used, whether sensitive attributes are directly included or indirectly inferred, and whether outputs could stigmatize individuals or communities. Model evaluation should include privacy review as well as accuracy and equity review.
-For agentic workflows, privacy risk increases because the system may retrieve data, call tools, send messages, or update records. Privacy guardrails should include least-privilege permissions, approval checkpoints, output restrictions, audit logs, and the ability to suspend the workflow quickly if a concern arises.</a:t>
+For agentic workflows, privacy risk increases because the system may retrieve data, call tools, send messages, or update records. Privacy guardrails should include least-privilege permissions, approval checkpoints, output restrictions, audit logs, and the ability to suspend the workflow quickly if a concern arises.
+Application guidance: Identify what could go wrong, who could be affected, what safeguards are needed, and what evidence should be reviewed before use expands.</a:t>
             </a:r>
             <a:endParaRPr lang="en-US" dirty="0"/>
           </a:p>
@@ -1338,7 +1346,8 @@
               <a:t>Reflection Questions
 Which AI use cases in your agency require identifiable or sensitive data, and which could be completed with de-identified or aggregated data?
 What data elements create the greatest re-identification risk in your context?
-How are free-text fields reviewed before they are used in AI-supported workflows?</a:t>
+How are free-text fields reviewed before they are used in AI-supported workflows?
+Application guidance: Identify what could go wrong, who could be affected, what safeguards are needed, and what evidence should be reviewed before use expands.</a:t>
             </a:r>
             <a:endParaRPr lang="en-US" dirty="0"/>
           </a:p>
@@ -1428,7 +1437,8 @@
               <a:rPr lang="en-US" dirty="0"/>
               <a:t>Reflection Questions
 Which outputs could reveal sensitive information even if the input data are controlled?
-Who has authority to approve privacy-preserving AI controls for a workflow?</a:t>
+Who has authority to approve privacy-preserving AI controls for a workflow?
+Application guidance: Identify what could go wrong, who could be affected, what safeguards are needed, and what evidence should be reviewed before use expands.</a:t>
             </a:r>
             <a:endParaRPr lang="en-US" dirty="0"/>
           </a:p>
@@ -1610,7 +1620,8 @@
               <a:rPr lang="en-US" dirty="0"/>
               <a:t>Practical Exercise
 Create a privacy-preserving AI review worksheet for one proposed public health AI workflow. The worksheet should identify the data involved, the sensitivity level, the minimum necessary fields, the approved users, the AI task, the output type, and the privacy controls needed before implementation.
-The exercise should also identify residual risks and questions that need privacy, legal, security, or governance review. Learners should pay special attention to free text, small-area data, rare conditions, linked datasets, vendor access, and output sharing.</a:t>
+The exercise should also identify residual risks and questions that need privacy, legal, security, or governance review. Learners should pay special attention to free text, small-area data, rare conditions, linked datasets, vendor access, and output sharing.
+Application guidance: Use the assignment to test whether you can explain the concept, apply it to a realistic public health situation, and identify what would need review before the work moves forward.</a:t>
             </a:r>
             <a:endParaRPr lang="en-US" dirty="0"/>
           </a:p>
@@ -1699,7 +1710,8 @@
             <a:r>
               <a:rPr lang="en-US" dirty="0"/>
               <a:t>Expected Artifact or Evidence
-The expected artifact is a privacy-preserving AI review worksheet with a brief summary of the proposed workflow, data-use tier, approved data elements, prohibited data elements, access controls, output controls, audit requirements, and unresolved review questions.</a:t>
+The expected artifact is a privacy-preserving AI review worksheet with a brief summary of the proposed workflow, data-use tier, approved data elements, prohibited data elements, access controls, output controls, audit requirements, and unresolved review questions.
+Application guidance: Identify what could go wrong, who could be affected, what safeguards are needed, and what evidence should be reviewed before use expands.</a:t>
             </a:r>
             <a:endParaRPr lang="en-US" dirty="0"/>
           </a:p>
@@ -1788,7 +1800,8 @@
             <a:r>
               <a:rPr lang="en-US" dirty="0"/>
               <a:t>Expected Assignment
-The expected artifact is a privacy-preserving AI review worksheet with a brief summary of the proposed workflow, data-use tier, approved data elements, prohibited data elements, access controls, output controls, audit requirements, and unresolved review questions.</a:t>
+The expected artifact is a privacy-preserving AI review worksheet with a brief summary of the proposed workflow, data-use tier, approved data elements, prohibited data elements, access controls, output controls, audit requirements, and unresolved review questions.
+Application guidance: Use the assignment to test whether you can explain the concept, apply it to a realistic public health situation, and identify what would need review before the work moves forward.</a:t>
             </a:r>
             <a:endParaRPr lang="en-US" dirty="0"/>
           </a:p>
@@ -1881,7 +1894,8 @@
 2. Why can AI increase re-identification risk?
 3. What is a strong privacy guardrail for an AI workflow?
 4. When is de-identification alone insufficient?
-5. What is strong completion evidence for this module?</a:t>
+5. What is strong completion evidence for this module?
+Application guidance: Use the assignment to test whether you can explain the concept, apply it to a realistic public health situation, and identify what would need review before the work moves forward.</a:t>
             </a:r>
             <a:endParaRPr lang="en-US" dirty="0"/>
           </a:p>
@@ -1974,7 +1988,8 @@
 NIST AI Risk Management Framework: https://www.nist.gov/itl/ai-risk-management-framework
 HHS HIPAA de-identification guidance
 CDC data governance and public health data modernization resources
-Agency privacy, legal, security, and records management policies</a:t>
+Agency privacy, legal, security, and records management policies
+Application guidance: Identify what could go wrong, who could be affected, what safeguards are needed, and what evidence should be reviewed before use expands.</a:t>
             </a:r>
             <a:endParaRPr lang="en-US" dirty="0"/>
           </a:p>
@@ -2253,7 +2268,8 @@
 Distinguish between identifiable data, de-identified data, aggregated data, limited datasets, and synthetic data at a practical level.
 Identify technical and operational safeguards that reduce privacy risk, including data minimization, role-based access, aggregation, suppression, and secure analytic environments.
 Assess re-identification risk when public health data are linked, enriched, summarized, or shared for AI-supported use.
-Recognize when de-identification alone is not sufficient and additional governance, legal, or technical controls are needed.</a:t>
+Recognize when de-identification alone is not sufficient and additional governance, legal, or technical controls are needed.
+Application guidance: Use the assignment to test whether you can explain the concept, apply it to a realistic public health situation, and identify what would need review before the work moves forward.</a:t>
             </a:r>
             <a:endParaRPr lang="en-US" dirty="0"/>
           </a:p>
@@ -2342,7 +2358,8 @@
             <a:r>
               <a:rPr lang="en-US" dirty="0"/>
               <a:t>Learning Objectives
-Produce a privacy-preserving AI review worksheet for a real or realistic public health workflow.</a:t>
+Produce a privacy-preserving AI review worksheet for a real or realistic public health workflow.
+Application guidance: Use the assignment to test whether you can explain the concept, apply it to a realistic public health situation, and identify what would need review before the work moves forward.</a:t>
             </a:r>
             <a:endParaRPr lang="en-US" dirty="0"/>
           </a:p>
@@ -2433,7 +2450,8 @@
               <a:t>Module Overview
 Privacy-preserving AI is the set of technical, policy, and workflow practices that allow public health agencies to use data responsibly while reducing the risk that individuals, households, providers, or communities can be identified or harmed. This module focuses on how privacy protections must be built into AI planning before data are extracted, shared, used for model development, connected to a vendor platform, or summarized through a generative AI tool.
 Public health agencies often have legal authority to collect and use sensitive data, but authority to use data does not remove the obligation to protect privacy, confidentiality, public trust, and community relationships. AI can increase privacy risk because it may combine data sources, infer sensitive attributes, generate outputs that reveal source details, or make sensitive information easier to retrieve. Learners in this module examine how de-identification, access control, data minimization, aggregation, suppression, secure environments, and differential privacy can support safer AI use.
-This module is intended for informaticians, epidemiologists, technologists, privacy officers, data stewards, and AI governance participants. It does not replace legal review. It gives technical and program staff enough understanding to recognize privacy risk, ask better implementation questions, and design safeguards that can be reviewed by privacy, legal, security, and governance leaders.</a:t>
+This module is intended for informaticians, epidemiologists, technologists, privacy officers, data stewards, and AI governance participants. It does not replace legal review. It gives technical and program staff enough understanding to recognize privacy risk, ask better implementation questions, and design safeguards that can be reviewed by privacy, legal, security, and governance leaders.
+Application guidance: Identify what could go wrong, who could be affected, what safeguards are needed, and what evidence should be reviewed before use expands.</a:t>
             </a:r>
             <a:endParaRPr lang="en-US" dirty="0"/>
           </a:p>
@@ -2522,7 +2540,8 @@
             <a:r>
               <a:rPr lang="en-US" dirty="0"/>
               <a:t>Jurisdiction and Agency Policy Note
-This module provides national-level training guidance for public health agencies and partners. It is not legal advice and does not replace review by agency legal counsel, privacy officers, procurement officials, civil rights staff, records officers, or other authorized decision-makers. Requirements may vary by state, locality, territory, Tribe, agency, funding source, data-sharing agreement, emergency authority, and organizational policy. Learners should use this module to identify the issues that require review and should confirm applicable requirements before approving, procuring, deploying, or publicly communicating about AI-supported work.</a:t>
+This module provides national-level training guidance for public health agencies and partners. It is not legal advice and does not replace review by agency legal counsel, privacy officers, procurement officials, civil rights staff, records officers, or other authorized decision-makers. Requirements may vary by state, locality, territory, Tribe, agency, funding source, data-sharing agreement, emergency authority, and organizational policy. Learners should use this module to identify the issues that require review and should confirm applicable requirements before approving, procuring, deploying, or publicly communicating about AI-supported work.
+Application guidance: Translate this concept into clear decision rights, review steps, documentation expectations, and escalation paths before an AI-supported workflow is approved.</a:t>
             </a:r>
             <a:endParaRPr lang="en-US" dirty="0"/>
           </a:p>
@@ -2613,7 +2632,8 @@
               <a:t>Why This Topic Matters for Public Health AI
 AI can change the privacy risk profile of a public health dataset even when the source data were already collected lawfully. A dataset that seems low risk in one context may become more sensitive when linked to geospatial information, clinical history, social vulnerability indicators, case notes, or small-area counts. Generative AI and retrieval systems can also reveal sensitive details through summaries, citations, or unexpected responses. Privacy review must therefore consider not only the dataset itself, but also how the AI system accesses, transforms, combines, stores, and exposes information.
 Privacy risk is also a public trust issue. Public health agencies rely on communities, providers, laboratories, schools, and partners to share information. If AI use is perceived as opaque, excessive, or poorly controlled, communities may become less willing to participate in programs or share sensitive information. Technical safeguards support trust by showing that the agency has intentionally limited access, reduced unnecessary exposure, and retained human accountability.
-Privacy-preserving AI is not a single technique. It is a layered approach that combines data governance, data minimization, secure infrastructure, access control, audit logs, de-identification, aggregation, review of outputs, and limits on downstream use. Strong privacy protection depends on designing these controls into the workflow before implementation rather than adding them after a concern arises.</a:t>
+Privacy-preserving AI is not a single technique. It is a layered approach that combines data governance, data minimization, secure infrastructure, access control, audit logs, de-identification, aggregation, review of outputs, and limits on downstream use. Strong privacy protection depends on designing these controls into the workflow before implementation rather than adding them after a concern arises.
+Application guidance: Identify what could go wrong, who could be affected, what safeguards are needed, and what evidence should be reviewed before use expands.</a:t>
             </a:r>
             <a:endParaRPr lang="en-US" dirty="0"/>
           </a:p>
@@ -3384,8 +3404,8 @@
         </p:nvSpPr>
         <p:spPr>
           <a:xfrm>
-            <a:off x="9966960" y="6537960"/>
-            <a:ext cx="1645920" cy="201168"/>
+            <a:off x="9646920" y="6537960"/>
+            <a:ext cx="1965960" cy="201168"/>
           </a:xfrm>
           <a:prstGeom prst="rect">
             <a:avLst/>
@@ -3409,7 +3429,7 @@
                 <a:ea typeface="Aptos" pitchFamily="34" charset="-122"/>
                 <a:cs typeface="Aptos" pitchFamily="34" charset="-120"/>
               </a:rPr>
-              <a:t>Â© Paula Soper</a:t>
+              <a:t>Copyright Paula Soper</a:t>
             </a:r>
             <a:endParaRPr lang="en-US" sz="800" dirty="0"/>
           </a:p>
@@ -3456,77 +3476,13 @@
       </p:sp>
       <p:sp>
         <p:nvSpPr>
-          <p:cNvPr id="8" name="Shape 6"/>
+          <p:cNvPr id="8" name="Text 6"/>
           <p:cNvSpPr/>
           <p:nvPr/>
         </p:nvSpPr>
         <p:spPr>
           <a:xfrm>
             <a:off x="640080" y="658368"/>
-            <a:ext cx="420624" cy="420624"/>
-          </a:xfrm>
-          <a:prstGeom prst="ellipse">
-            <a:avLst/>
-          </a:prstGeom>
-          <a:solidFill>
-            <a:srgbClr val="0068B7"/>
-          </a:solidFill>
-          <a:ln w="12700">
-            <a:solidFill>
-              <a:srgbClr val="0068B7"/>
-            </a:solidFill>
-            <a:prstDash val="solid"/>
-          </a:ln>
-        </p:spPr>
-      </p:sp>
-      <p:sp>
-        <p:nvSpPr>
-          <p:cNvPr id="9" name="Text 7"/>
-          <p:cNvSpPr/>
-          <p:nvPr/>
-        </p:nvSpPr>
-        <p:spPr>
-          <a:xfrm>
-            <a:off x="640080" y="731520"/>
-            <a:ext cx="420624" cy="164592"/>
-          </a:xfrm>
-          <a:prstGeom prst="rect">
-            <a:avLst/>
-          </a:prstGeom>
-          <a:noFill/>
-          <a:ln/>
-        </p:spPr>
-        <p:txBody>
-          <a:bodyPr wrap="square" lIns="0" tIns="0" rIns="0" bIns="0" rtlCol="0" anchor="ctr"/>
-          <a:lstStyle/>
-          <a:p>
-            <a:pPr algn="ctr" indent="0" marL="0">
-              <a:buNone/>
-            </a:pPr>
-            <a:r>
-              <a:rPr lang="en-US" sz="1100" b="1" dirty="0">
-                <a:solidFill>
-                  <a:srgbClr val="FFFFFF"/>
-                </a:solidFill>
-                <a:latin typeface="Aptos" pitchFamily="34" charset="0"/>
-                <a:ea typeface="Aptos" pitchFamily="34" charset="-122"/>
-                <a:cs typeface="Aptos" pitchFamily="34" charset="-120"/>
-              </a:rPr>
-              <a:t>5</a:t>
-            </a:r>
-            <a:endParaRPr lang="en-US" sz="1100" dirty="0"/>
-          </a:p>
-        </p:txBody>
-      </p:sp>
-      <p:sp>
-        <p:nvSpPr>
-          <p:cNvPr id="10" name="Text 8"/>
-          <p:cNvSpPr/>
-          <p:nvPr/>
-        </p:nvSpPr>
-        <p:spPr>
-          <a:xfrm>
-            <a:off x="640080" y="621792"/>
             <a:ext cx="10881360" cy="713232"/>
           </a:xfrm>
           <a:prstGeom prst="rect">
@@ -3561,14 +3517,14 @@
       </p:sp>
       <p:sp>
         <p:nvSpPr>
-          <p:cNvPr id="11" name="Text 9"/>
+          <p:cNvPr id="9" name="Text 7"/>
           <p:cNvSpPr/>
           <p:nvPr/>
         </p:nvSpPr>
         <p:spPr>
           <a:xfrm>
             <a:off x="868680" y="1508760"/>
-            <a:ext cx="6537960" cy="4160520"/>
+            <a:ext cx="6309360" cy="4160520"/>
           </a:xfrm>
           <a:prstGeom prst="rect">
             <a:avLst/>
@@ -3627,18 +3583,18 @@
       </p:sp>
       <p:sp>
         <p:nvSpPr>
-          <p:cNvPr id="12" name="Shape 10"/>
-          <p:cNvSpPr/>
-          <p:nvPr/>
-        </p:nvSpPr>
-        <p:spPr>
-          <a:xfrm>
-            <a:off x="7909560" y="1417320"/>
-            <a:ext cx="3154680" cy="1828800"/>
+          <p:cNvPr id="10" name="Shape 8"/>
+          <p:cNvSpPr/>
+          <p:nvPr/>
+        </p:nvSpPr>
+        <p:spPr>
+          <a:xfrm>
+            <a:off x="7635240" y="1325880"/>
+            <a:ext cx="3474720" cy="1325880"/>
           </a:xfrm>
           <a:prstGeom prst="roundRect">
             <a:avLst>
-              <a:gd name="adj" fmla="val 6000"/>
+              <a:gd name="adj" fmla="val 8276"/>
             </a:avLst>
           </a:prstGeom>
           <a:solidFill>
@@ -3654,14 +3610,14 @@
       </p:sp>
       <p:sp>
         <p:nvSpPr>
-          <p:cNvPr id="13" name="Text 11"/>
-          <p:cNvSpPr/>
-          <p:nvPr/>
-        </p:nvSpPr>
-        <p:spPr>
-          <a:xfrm>
-            <a:off x="8074152" y="1563624"/>
-            <a:ext cx="2825496" cy="256032"/>
+          <p:cNvPr id="11" name="Text 9"/>
+          <p:cNvSpPr/>
+          <p:nvPr/>
+        </p:nvSpPr>
+        <p:spPr>
+          <a:xfrm>
+            <a:off x="7799832" y="1472184"/>
+            <a:ext cx="3145536" cy="256032"/>
           </a:xfrm>
           <a:prstGeom prst="rect">
             <a:avLst/>
@@ -3685,7 +3641,7 @@
                 <a:ea typeface="Aptos" pitchFamily="34" charset="-122"/>
                 <a:cs typeface="Aptos" pitchFamily="34" charset="-120"/>
               </a:rPr>
-              <a:t>Key idea</a:t>
+              <a:t>Risk check</a:t>
             </a:r>
             <a:endParaRPr lang="en-US" sz="1300" dirty="0"/>
           </a:p>
@@ -3693,14 +3649,14 @@
       </p:sp>
       <p:sp>
         <p:nvSpPr>
-          <p:cNvPr id="14" name="Text 12"/>
-          <p:cNvSpPr/>
-          <p:nvPr/>
-        </p:nvSpPr>
-        <p:spPr>
-          <a:xfrm>
-            <a:off x="8074152" y="1920240"/>
-            <a:ext cx="2825496" cy="1188720"/>
+          <p:cNvPr id="12" name="Text 10"/>
+          <p:cNvSpPr/>
+          <p:nvPr/>
+        </p:nvSpPr>
+        <p:spPr>
+          <a:xfrm>
+            <a:off x="7799832" y="1828800"/>
+            <a:ext cx="3145536" cy="685800"/>
           </a:xfrm>
           <a:prstGeom prst="rect">
             <a:avLst/>
@@ -3734,18 +3690,171 @@
       </p:sp>
       <p:sp>
         <p:nvSpPr>
-          <p:cNvPr id="15" name="Shape 13"/>
-          <p:cNvSpPr/>
-          <p:nvPr/>
-        </p:nvSpPr>
-        <p:spPr>
-          <a:xfrm>
-            <a:off x="7909560" y="3520440"/>
-            <a:ext cx="3154680" cy="1737360"/>
+          <p:cNvPr id="13" name="Shape 11"/>
+          <p:cNvSpPr/>
+          <p:nvPr/>
+        </p:nvSpPr>
+        <p:spPr>
+          <a:xfrm>
+            <a:off x="7635240" y="2788920"/>
+            <a:ext cx="3474720" cy="1536192"/>
           </a:xfrm>
           <a:prstGeom prst="roundRect">
             <a:avLst>
-              <a:gd name="adj" fmla="val 6316"/>
+              <a:gd name="adj" fmla="val 7143"/>
+            </a:avLst>
+          </a:prstGeom>
+          <a:solidFill>
+            <a:srgbClr val="FFFFFF">
+              <a:alpha val="88000"/>
+            </a:srgbClr>
+          </a:solidFill>
+          <a:ln w="12700">
+            <a:solidFill>
+              <a:srgbClr val="D6E8F2"/>
+            </a:solidFill>
+            <a:prstDash val="solid"/>
+          </a:ln>
+        </p:spPr>
+      </p:sp>
+      <p:sp>
+        <p:nvSpPr>
+          <p:cNvPr id="14" name="Shape 12"/>
+          <p:cNvSpPr/>
+          <p:nvPr/>
+        </p:nvSpPr>
+        <p:spPr>
+          <a:xfrm>
+            <a:off x="8046720" y="3108960"/>
+            <a:ext cx="2651760" cy="896112"/>
+          </a:xfrm>
+          <a:prstGeom prst="arc">
+            <a:avLst/>
+          </a:prstGeom>
+          <a:noFill/>
+          <a:ln w="25400">
+            <a:solidFill>
+              <a:srgbClr val="0068B7"/>
+            </a:solidFill>
+            <a:prstDash val="solid"/>
+          </a:ln>
+        </p:spPr>
+      </p:sp>
+      <p:sp>
+        <p:nvSpPr>
+          <p:cNvPr id="15" name="Text 13"/>
+          <p:cNvSpPr/>
+          <p:nvPr/>
+        </p:nvSpPr>
+        <p:spPr>
+          <a:xfrm>
+            <a:off x="7909560" y="3099816"/>
+            <a:ext cx="2926080" cy="256032"/>
+          </a:xfrm>
+          <a:prstGeom prst="rect">
+            <a:avLst/>
+          </a:prstGeom>
+          <a:noFill/>
+          <a:ln/>
+        </p:spPr>
+        <p:txBody>
+          <a:bodyPr wrap="square" lIns="0" tIns="0" rIns="0" bIns="0" rtlCol="0" anchor="ctr"/>
+          <a:lstStyle/>
+          <a:p>
+            <a:pPr algn="ctr" indent="0" marL="0">
+              <a:buNone/>
+            </a:pPr>
+            <a:r>
+              <a:rPr lang="en-US" sz="1500" b="1" dirty="0">
+                <a:solidFill>
+                  <a:srgbClr val="003A63"/>
+                </a:solidFill>
+                <a:latin typeface="Aptos" pitchFamily="34" charset="0"/>
+                <a:ea typeface="Aptos" pitchFamily="34" charset="-122"/>
+                <a:cs typeface="Aptos" pitchFamily="34" charset="-120"/>
+              </a:rPr>
+              <a:t>Risk</a:t>
+            </a:r>
+            <a:endParaRPr lang="en-US" sz="1500" dirty="0"/>
+          </a:p>
+        </p:txBody>
+      </p:sp>
+      <p:sp>
+        <p:nvSpPr>
+          <p:cNvPr id="16" name="Shape 14"/>
+          <p:cNvSpPr/>
+          <p:nvPr/>
+        </p:nvSpPr>
+        <p:spPr>
+          <a:xfrm>
+            <a:off x="8366760" y="3639312"/>
+            <a:ext cx="2011680" cy="0"/>
+          </a:xfrm>
+          <a:prstGeom prst="line">
+            <a:avLst/>
+          </a:prstGeom>
+          <a:noFill/>
+          <a:ln w="63500">
+            <a:solidFill>
+              <a:srgbClr val="2F8A28"/>
+            </a:solidFill>
+            <a:prstDash val="solid"/>
+          </a:ln>
+        </p:spPr>
+      </p:sp>
+      <p:sp>
+        <p:nvSpPr>
+          <p:cNvPr id="17" name="Text 15"/>
+          <p:cNvSpPr/>
+          <p:nvPr/>
+        </p:nvSpPr>
+        <p:spPr>
+          <a:xfrm>
+            <a:off x="7909560" y="3849624"/>
+            <a:ext cx="2926080" cy="164592"/>
+          </a:xfrm>
+          <a:prstGeom prst="rect">
+            <a:avLst/>
+          </a:prstGeom>
+          <a:noFill/>
+          <a:ln/>
+        </p:spPr>
+        <p:txBody>
+          <a:bodyPr wrap="square" lIns="0" tIns="0" rIns="0" bIns="0" rtlCol="0" anchor="ctr"/>
+          <a:lstStyle/>
+          <a:p>
+            <a:pPr algn="ctr" indent="0" marL="0">
+              <a:buNone/>
+            </a:pPr>
+            <a:r>
+              <a:rPr lang="en-US" sz="900" dirty="0">
+                <a:solidFill>
+                  <a:srgbClr val="003A63"/>
+                </a:solidFill>
+                <a:latin typeface="Aptos" pitchFamily="34" charset="0"/>
+                <a:ea typeface="Aptos" pitchFamily="34" charset="-122"/>
+                <a:cs typeface="Aptos" pitchFamily="34" charset="-120"/>
+              </a:rPr>
+              <a:t>Human review</a:t>
+            </a:r>
+            <a:endParaRPr lang="en-US" sz="900" dirty="0"/>
+          </a:p>
+        </p:txBody>
+      </p:sp>
+      <p:sp>
+        <p:nvSpPr>
+          <p:cNvPr id="18" name="Shape 16"/>
+          <p:cNvSpPr/>
+          <p:nvPr/>
+        </p:nvSpPr>
+        <p:spPr>
+          <a:xfrm>
+            <a:off x="7635240" y="4498848"/>
+            <a:ext cx="3474720" cy="1143000"/>
+          </a:xfrm>
+          <a:prstGeom prst="roundRect">
+            <a:avLst>
+              <a:gd name="adj" fmla="val 9600"/>
             </a:avLst>
           </a:prstGeom>
           <a:solidFill>
@@ -3761,14 +3870,14 @@
       </p:sp>
       <p:sp>
         <p:nvSpPr>
-          <p:cNvPr id="16" name="Text 14"/>
-          <p:cNvSpPr/>
-          <p:nvPr/>
-        </p:nvSpPr>
-        <p:spPr>
-          <a:xfrm>
-            <a:off x="8074152" y="3666744"/>
-            <a:ext cx="2825496" cy="256032"/>
+          <p:cNvPr id="19" name="Text 17"/>
+          <p:cNvSpPr/>
+          <p:nvPr/>
+        </p:nvSpPr>
+        <p:spPr>
+          <a:xfrm>
+            <a:off x="7799832" y="4645152"/>
+            <a:ext cx="3145536" cy="256032"/>
           </a:xfrm>
           <a:prstGeom prst="rect">
             <a:avLst/>
@@ -3792,7 +3901,7 @@
                 <a:ea typeface="Aptos" pitchFamily="34" charset="-122"/>
                 <a:cs typeface="Aptos" pitchFamily="34" charset="-120"/>
               </a:rPr>
-              <a:t>Use this for</a:t>
+              <a:t>Safeguard to plan</a:t>
             </a:r>
             <a:endParaRPr lang="en-US" sz="1300" dirty="0"/>
           </a:p>
@@ -3800,14 +3909,14 @@
       </p:sp>
       <p:sp>
         <p:nvSpPr>
-          <p:cNvPr id="17" name="Text 15"/>
-          <p:cNvSpPr/>
-          <p:nvPr/>
-        </p:nvSpPr>
-        <p:spPr>
-          <a:xfrm>
-            <a:off x="8074152" y="4023360"/>
-            <a:ext cx="2825496" cy="1097280"/>
+          <p:cNvPr id="20" name="Text 18"/>
+          <p:cNvSpPr/>
+          <p:nvPr/>
+        </p:nvSpPr>
+        <p:spPr>
+          <a:xfrm>
+            <a:off x="7799832" y="5001768"/>
+            <a:ext cx="3145536" cy="502920"/>
           </a:xfrm>
           <a:prstGeom prst="rect">
             <a:avLst/>
@@ -3833,7 +3942,7 @@
                 <a:ea typeface="Aptos" pitchFamily="34" charset="-122"/>
                 <a:cs typeface="Aptos" pitchFamily="34" charset="-120"/>
               </a:rPr>
-              <a:t>Connect the concept to public health decisions, safeguards, documentation, or implementation work.</a:t>
+              <a:t>Identify what could go wrong, who could be affected, what safeguards are needed, and what evidence should be reviewed before use expands.</a:t>
             </a:r>
             <a:endParaRPr lang="en-US" sz="1550" dirty="0"/>
           </a:p>
@@ -4007,8 +4116,8 @@
         </p:nvSpPr>
         <p:spPr>
           <a:xfrm>
-            <a:off x="9966960" y="6537960"/>
-            <a:ext cx="1645920" cy="201168"/>
+            <a:off x="9646920" y="6537960"/>
+            <a:ext cx="1965960" cy="201168"/>
           </a:xfrm>
           <a:prstGeom prst="rect">
             <a:avLst/>
@@ -4032,7 +4141,7 @@
                 <a:ea typeface="Aptos" pitchFamily="34" charset="-122"/>
                 <a:cs typeface="Aptos" pitchFamily="34" charset="-120"/>
               </a:rPr>
-              <a:t>Â© Paula Soper</a:t>
+              <a:t>Copyright Paula Soper</a:t>
             </a:r>
             <a:endParaRPr lang="en-US" sz="800" dirty="0"/>
           </a:p>
@@ -4127,7 +4236,7 @@
         <p:spPr>
           <a:xfrm>
             <a:off x="868680" y="1508760"/>
-            <a:ext cx="6537960" cy="4160520"/>
+            <a:ext cx="6309360" cy="4160520"/>
           </a:xfrm>
           <a:prstGeom prst="rect">
             <a:avLst/>
@@ -4192,12 +4301,12 @@
         </p:nvSpPr>
         <p:spPr>
           <a:xfrm>
-            <a:off x="7909560" y="1417320"/>
-            <a:ext cx="3154680" cy="1828800"/>
+            <a:off x="7635240" y="1325880"/>
+            <a:ext cx="3474720" cy="1325880"/>
           </a:xfrm>
           <a:prstGeom prst="roundRect">
             <a:avLst>
-              <a:gd name="adj" fmla="val 6000"/>
+              <a:gd name="adj" fmla="val 8276"/>
             </a:avLst>
           </a:prstGeom>
           <a:solidFill>
@@ -4219,8 +4328,8 @@
         </p:nvSpPr>
         <p:spPr>
           <a:xfrm>
-            <a:off x="8074152" y="1563624"/>
-            <a:ext cx="2825496" cy="256032"/>
+            <a:off x="7799832" y="1472184"/>
+            <a:ext cx="3145536" cy="256032"/>
           </a:xfrm>
           <a:prstGeom prst="rect">
             <a:avLst/>
@@ -4244,7 +4353,7 @@
                 <a:ea typeface="Aptos" pitchFamily="34" charset="-122"/>
                 <a:cs typeface="Aptos" pitchFamily="34" charset="-120"/>
               </a:rPr>
-              <a:t>Key idea</a:t>
+              <a:t>Risk check</a:t>
             </a:r>
             <a:endParaRPr lang="en-US" sz="1300" dirty="0"/>
           </a:p>
@@ -4258,8 +4367,8 @@
         </p:nvSpPr>
         <p:spPr>
           <a:xfrm>
-            <a:off x="8074152" y="1920240"/>
-            <a:ext cx="2825496" cy="1188720"/>
+            <a:off x="7799832" y="1828800"/>
+            <a:ext cx="3145536" cy="685800"/>
           </a:xfrm>
           <a:prstGeom prst="rect">
             <a:avLst/>
@@ -4299,12 +4408,165 @@
         </p:nvSpPr>
         <p:spPr>
           <a:xfrm>
-            <a:off x="7909560" y="3520440"/>
-            <a:ext cx="3154680" cy="1737360"/>
+            <a:off x="7635240" y="2788920"/>
+            <a:ext cx="3474720" cy="1536192"/>
           </a:xfrm>
           <a:prstGeom prst="roundRect">
             <a:avLst>
-              <a:gd name="adj" fmla="val 6316"/>
+              <a:gd name="adj" fmla="val 7143"/>
+            </a:avLst>
+          </a:prstGeom>
+          <a:solidFill>
+            <a:srgbClr val="FFFFFF">
+              <a:alpha val="88000"/>
+            </a:srgbClr>
+          </a:solidFill>
+          <a:ln w="12700">
+            <a:solidFill>
+              <a:srgbClr val="D6E8F2"/>
+            </a:solidFill>
+            <a:prstDash val="solid"/>
+          </a:ln>
+        </p:spPr>
+      </p:sp>
+      <p:sp>
+        <p:nvSpPr>
+          <p:cNvPr id="14" name="Shape 12"/>
+          <p:cNvSpPr/>
+          <p:nvPr/>
+        </p:nvSpPr>
+        <p:spPr>
+          <a:xfrm>
+            <a:off x="8046720" y="3108960"/>
+            <a:ext cx="2651760" cy="896112"/>
+          </a:xfrm>
+          <a:prstGeom prst="arc">
+            <a:avLst/>
+          </a:prstGeom>
+          <a:noFill/>
+          <a:ln w="25400">
+            <a:solidFill>
+              <a:srgbClr val="0068B7"/>
+            </a:solidFill>
+            <a:prstDash val="solid"/>
+          </a:ln>
+        </p:spPr>
+      </p:sp>
+      <p:sp>
+        <p:nvSpPr>
+          <p:cNvPr id="15" name="Text 13"/>
+          <p:cNvSpPr/>
+          <p:nvPr/>
+        </p:nvSpPr>
+        <p:spPr>
+          <a:xfrm>
+            <a:off x="7909560" y="3099816"/>
+            <a:ext cx="2926080" cy="256032"/>
+          </a:xfrm>
+          <a:prstGeom prst="rect">
+            <a:avLst/>
+          </a:prstGeom>
+          <a:noFill/>
+          <a:ln/>
+        </p:spPr>
+        <p:txBody>
+          <a:bodyPr wrap="square" lIns="0" tIns="0" rIns="0" bIns="0" rtlCol="0" anchor="ctr"/>
+          <a:lstStyle/>
+          <a:p>
+            <a:pPr algn="ctr" indent="0" marL="0">
+              <a:buNone/>
+            </a:pPr>
+            <a:r>
+              <a:rPr lang="en-US" sz="1500" b="1" dirty="0">
+                <a:solidFill>
+                  <a:srgbClr val="003A63"/>
+                </a:solidFill>
+                <a:latin typeface="Aptos" pitchFamily="34" charset="0"/>
+                <a:ea typeface="Aptos" pitchFamily="34" charset="-122"/>
+                <a:cs typeface="Aptos" pitchFamily="34" charset="-120"/>
+              </a:rPr>
+              <a:t>Risk</a:t>
+            </a:r>
+            <a:endParaRPr lang="en-US" sz="1500" dirty="0"/>
+          </a:p>
+        </p:txBody>
+      </p:sp>
+      <p:sp>
+        <p:nvSpPr>
+          <p:cNvPr id="16" name="Shape 14"/>
+          <p:cNvSpPr/>
+          <p:nvPr/>
+        </p:nvSpPr>
+        <p:spPr>
+          <a:xfrm>
+            <a:off x="8366760" y="3639312"/>
+            <a:ext cx="2011680" cy="0"/>
+          </a:xfrm>
+          <a:prstGeom prst="line">
+            <a:avLst/>
+          </a:prstGeom>
+          <a:noFill/>
+          <a:ln w="63500">
+            <a:solidFill>
+              <a:srgbClr val="2F8A28"/>
+            </a:solidFill>
+            <a:prstDash val="solid"/>
+          </a:ln>
+        </p:spPr>
+      </p:sp>
+      <p:sp>
+        <p:nvSpPr>
+          <p:cNvPr id="17" name="Text 15"/>
+          <p:cNvSpPr/>
+          <p:nvPr/>
+        </p:nvSpPr>
+        <p:spPr>
+          <a:xfrm>
+            <a:off x="7909560" y="3849624"/>
+            <a:ext cx="2926080" cy="164592"/>
+          </a:xfrm>
+          <a:prstGeom prst="rect">
+            <a:avLst/>
+          </a:prstGeom>
+          <a:noFill/>
+          <a:ln/>
+        </p:spPr>
+        <p:txBody>
+          <a:bodyPr wrap="square" lIns="0" tIns="0" rIns="0" bIns="0" rtlCol="0" anchor="ctr"/>
+          <a:lstStyle/>
+          <a:p>
+            <a:pPr algn="ctr" indent="0" marL="0">
+              <a:buNone/>
+            </a:pPr>
+            <a:r>
+              <a:rPr lang="en-US" sz="900" dirty="0">
+                <a:solidFill>
+                  <a:srgbClr val="003A63"/>
+                </a:solidFill>
+                <a:latin typeface="Aptos" pitchFamily="34" charset="0"/>
+                <a:ea typeface="Aptos" pitchFamily="34" charset="-122"/>
+                <a:cs typeface="Aptos" pitchFamily="34" charset="-120"/>
+              </a:rPr>
+              <a:t>Human review</a:t>
+            </a:r>
+            <a:endParaRPr lang="en-US" sz="900" dirty="0"/>
+          </a:p>
+        </p:txBody>
+      </p:sp>
+      <p:sp>
+        <p:nvSpPr>
+          <p:cNvPr id="18" name="Shape 16"/>
+          <p:cNvSpPr/>
+          <p:nvPr/>
+        </p:nvSpPr>
+        <p:spPr>
+          <a:xfrm>
+            <a:off x="7635240" y="4498848"/>
+            <a:ext cx="3474720" cy="1143000"/>
+          </a:xfrm>
+          <a:prstGeom prst="roundRect">
+            <a:avLst>
+              <a:gd name="adj" fmla="val 9600"/>
             </a:avLst>
           </a:prstGeom>
           <a:solidFill>
@@ -4320,14 +4582,14 @@
       </p:sp>
       <p:sp>
         <p:nvSpPr>
-          <p:cNvPr id="14" name="Text 12"/>
-          <p:cNvSpPr/>
-          <p:nvPr/>
-        </p:nvSpPr>
-        <p:spPr>
-          <a:xfrm>
-            <a:off x="8074152" y="3666744"/>
-            <a:ext cx="2825496" cy="256032"/>
+          <p:cNvPr id="19" name="Text 17"/>
+          <p:cNvSpPr/>
+          <p:nvPr/>
+        </p:nvSpPr>
+        <p:spPr>
+          <a:xfrm>
+            <a:off x="7799832" y="4645152"/>
+            <a:ext cx="3145536" cy="256032"/>
           </a:xfrm>
           <a:prstGeom prst="rect">
             <a:avLst/>
@@ -4351,7 +4613,7 @@
                 <a:ea typeface="Aptos" pitchFamily="34" charset="-122"/>
                 <a:cs typeface="Aptos" pitchFamily="34" charset="-120"/>
               </a:rPr>
-              <a:t>Use this for</a:t>
+              <a:t>Safeguard to plan</a:t>
             </a:r>
             <a:endParaRPr lang="en-US" sz="1300" dirty="0"/>
           </a:p>
@@ -4359,14 +4621,14 @@
       </p:sp>
       <p:sp>
         <p:nvSpPr>
-          <p:cNvPr id="15" name="Text 13"/>
-          <p:cNvSpPr/>
-          <p:nvPr/>
-        </p:nvSpPr>
-        <p:spPr>
-          <a:xfrm>
-            <a:off x="8074152" y="4023360"/>
-            <a:ext cx="2825496" cy="1097280"/>
+          <p:cNvPr id="20" name="Text 18"/>
+          <p:cNvSpPr/>
+          <p:nvPr/>
+        </p:nvSpPr>
+        <p:spPr>
+          <a:xfrm>
+            <a:off x="7799832" y="5001768"/>
+            <a:ext cx="3145536" cy="502920"/>
           </a:xfrm>
           <a:prstGeom prst="rect">
             <a:avLst/>
@@ -4392,7 +4654,7 @@
                 <a:ea typeface="Aptos" pitchFamily="34" charset="-122"/>
                 <a:cs typeface="Aptos" pitchFamily="34" charset="-120"/>
               </a:rPr>
-              <a:t>Connect the concept to public health decisions, safeguards, documentation, or implementation work.</a:t>
+              <a:t>Identify what could go wrong, who could be affected, what safeguards are needed, and what evidence should be reviewed before use expands.</a:t>
             </a:r>
             <a:endParaRPr lang="en-US" sz="1550" dirty="0"/>
           </a:p>
@@ -4566,8 +4828,8 @@
         </p:nvSpPr>
         <p:spPr>
           <a:xfrm>
-            <a:off x="9966960" y="6537960"/>
-            <a:ext cx="1645920" cy="201168"/>
+            <a:off x="9646920" y="6537960"/>
+            <a:ext cx="1965960" cy="201168"/>
           </a:xfrm>
           <a:prstGeom prst="rect">
             <a:avLst/>
@@ -4591,7 +4853,7 @@
                 <a:ea typeface="Aptos" pitchFamily="34" charset="-122"/>
                 <a:cs typeface="Aptos" pitchFamily="34" charset="-120"/>
               </a:rPr>
-              <a:t>Â© Paula Soper</a:t>
+              <a:t>Copyright Paula Soper</a:t>
             </a:r>
             <a:endParaRPr lang="en-US" sz="800" dirty="0"/>
           </a:p>
@@ -4638,77 +4900,13 @@
       </p:sp>
       <p:sp>
         <p:nvSpPr>
-          <p:cNvPr id="8" name="Shape 6"/>
+          <p:cNvPr id="8" name="Text 6"/>
           <p:cNvSpPr/>
           <p:nvPr/>
         </p:nvSpPr>
         <p:spPr>
           <a:xfrm>
             <a:off x="640080" y="658368"/>
-            <a:ext cx="420624" cy="420624"/>
-          </a:xfrm>
-          <a:prstGeom prst="ellipse">
-            <a:avLst/>
-          </a:prstGeom>
-          <a:solidFill>
-            <a:srgbClr val="0068B7"/>
-          </a:solidFill>
-          <a:ln w="12700">
-            <a:solidFill>
-              <a:srgbClr val="0068B7"/>
-            </a:solidFill>
-            <a:prstDash val="solid"/>
-          </a:ln>
-        </p:spPr>
-      </p:sp>
-      <p:sp>
-        <p:nvSpPr>
-          <p:cNvPr id="9" name="Text 7"/>
-          <p:cNvSpPr/>
-          <p:nvPr/>
-        </p:nvSpPr>
-        <p:spPr>
-          <a:xfrm>
-            <a:off x="640080" y="731520"/>
-            <a:ext cx="420624" cy="164592"/>
-          </a:xfrm>
-          <a:prstGeom prst="rect">
-            <a:avLst/>
-          </a:prstGeom>
-          <a:noFill/>
-          <a:ln/>
-        </p:spPr>
-        <p:txBody>
-          <a:bodyPr wrap="square" lIns="0" tIns="0" rIns="0" bIns="0" rtlCol="0" anchor="ctr"/>
-          <a:lstStyle/>
-          <a:p>
-            <a:pPr algn="ctr" indent="0" marL="0">
-              <a:buNone/>
-            </a:pPr>
-            <a:r>
-              <a:rPr lang="en-US" sz="1100" b="1" dirty="0">
-                <a:solidFill>
-                  <a:srgbClr val="FFFFFF"/>
-                </a:solidFill>
-                <a:latin typeface="Aptos" pitchFamily="34" charset="0"/>
-                <a:ea typeface="Aptos" pitchFamily="34" charset="-122"/>
-                <a:cs typeface="Aptos" pitchFamily="34" charset="-120"/>
-              </a:rPr>
-              <a:t>6</a:t>
-            </a:r>
-            <a:endParaRPr lang="en-US" sz="1100" dirty="0"/>
-          </a:p>
-        </p:txBody>
-      </p:sp>
-      <p:sp>
-        <p:nvSpPr>
-          <p:cNvPr id="10" name="Text 8"/>
-          <p:cNvSpPr/>
-          <p:nvPr/>
-        </p:nvSpPr>
-        <p:spPr>
-          <a:xfrm>
-            <a:off x="640080" y="621792"/>
             <a:ext cx="10881360" cy="713232"/>
           </a:xfrm>
           <a:prstGeom prst="rect">
@@ -4743,14 +4941,14 @@
       </p:sp>
       <p:sp>
         <p:nvSpPr>
-          <p:cNvPr id="11" name="Text 9"/>
+          <p:cNvPr id="9" name="Text 7"/>
           <p:cNvSpPr/>
           <p:nvPr/>
         </p:nvSpPr>
         <p:spPr>
           <a:xfrm>
             <a:off x="868680" y="1508760"/>
-            <a:ext cx="6537960" cy="4160520"/>
+            <a:ext cx="6309360" cy="4160520"/>
           </a:xfrm>
           <a:prstGeom prst="rect">
             <a:avLst/>
@@ -4809,18 +5007,18 @@
       </p:sp>
       <p:sp>
         <p:nvSpPr>
-          <p:cNvPr id="12" name="Shape 10"/>
-          <p:cNvSpPr/>
-          <p:nvPr/>
-        </p:nvSpPr>
-        <p:spPr>
-          <a:xfrm>
-            <a:off x="7909560" y="1417320"/>
-            <a:ext cx="3154680" cy="1828800"/>
+          <p:cNvPr id="10" name="Shape 8"/>
+          <p:cNvSpPr/>
+          <p:nvPr/>
+        </p:nvSpPr>
+        <p:spPr>
+          <a:xfrm>
+            <a:off x="7635240" y="1325880"/>
+            <a:ext cx="3474720" cy="1325880"/>
           </a:xfrm>
           <a:prstGeom prst="roundRect">
             <a:avLst>
-              <a:gd name="adj" fmla="val 6000"/>
+              <a:gd name="adj" fmla="val 8276"/>
             </a:avLst>
           </a:prstGeom>
           <a:solidFill>
@@ -4836,14 +5034,14 @@
       </p:sp>
       <p:sp>
         <p:nvSpPr>
-          <p:cNvPr id="13" name="Text 11"/>
-          <p:cNvSpPr/>
-          <p:nvPr/>
-        </p:nvSpPr>
-        <p:spPr>
-          <a:xfrm>
-            <a:off x="8074152" y="1563624"/>
-            <a:ext cx="2825496" cy="256032"/>
+          <p:cNvPr id="11" name="Text 9"/>
+          <p:cNvSpPr/>
+          <p:nvPr/>
+        </p:nvSpPr>
+        <p:spPr>
+          <a:xfrm>
+            <a:off x="7799832" y="1472184"/>
+            <a:ext cx="3145536" cy="256032"/>
           </a:xfrm>
           <a:prstGeom prst="rect">
             <a:avLst/>
@@ -4867,7 +5065,7 @@
                 <a:ea typeface="Aptos" pitchFamily="34" charset="-122"/>
                 <a:cs typeface="Aptos" pitchFamily="34" charset="-120"/>
               </a:rPr>
-              <a:t>Key idea</a:t>
+              <a:t>Risk check</a:t>
             </a:r>
             <a:endParaRPr lang="en-US" sz="1300" dirty="0"/>
           </a:p>
@@ -4875,14 +5073,14 @@
       </p:sp>
       <p:sp>
         <p:nvSpPr>
-          <p:cNvPr id="14" name="Text 12"/>
-          <p:cNvSpPr/>
-          <p:nvPr/>
-        </p:nvSpPr>
-        <p:spPr>
-          <a:xfrm>
-            <a:off x="8074152" y="1920240"/>
-            <a:ext cx="2825496" cy="1188720"/>
+          <p:cNvPr id="12" name="Text 10"/>
+          <p:cNvSpPr/>
+          <p:nvPr/>
+        </p:nvSpPr>
+        <p:spPr>
+          <a:xfrm>
+            <a:off x="7799832" y="1828800"/>
+            <a:ext cx="3145536" cy="685800"/>
           </a:xfrm>
           <a:prstGeom prst="rect">
             <a:avLst/>
@@ -4916,18 +5114,171 @@
       </p:sp>
       <p:sp>
         <p:nvSpPr>
-          <p:cNvPr id="15" name="Shape 13"/>
-          <p:cNvSpPr/>
-          <p:nvPr/>
-        </p:nvSpPr>
-        <p:spPr>
-          <a:xfrm>
-            <a:off x="7909560" y="3520440"/>
-            <a:ext cx="3154680" cy="1737360"/>
+          <p:cNvPr id="13" name="Shape 11"/>
+          <p:cNvSpPr/>
+          <p:nvPr/>
+        </p:nvSpPr>
+        <p:spPr>
+          <a:xfrm>
+            <a:off x="7635240" y="2788920"/>
+            <a:ext cx="3474720" cy="1536192"/>
           </a:xfrm>
           <a:prstGeom prst="roundRect">
             <a:avLst>
-              <a:gd name="adj" fmla="val 6316"/>
+              <a:gd name="adj" fmla="val 7143"/>
+            </a:avLst>
+          </a:prstGeom>
+          <a:solidFill>
+            <a:srgbClr val="FFFFFF">
+              <a:alpha val="88000"/>
+            </a:srgbClr>
+          </a:solidFill>
+          <a:ln w="12700">
+            <a:solidFill>
+              <a:srgbClr val="D6E8F2"/>
+            </a:solidFill>
+            <a:prstDash val="solid"/>
+          </a:ln>
+        </p:spPr>
+      </p:sp>
+      <p:sp>
+        <p:nvSpPr>
+          <p:cNvPr id="14" name="Shape 12"/>
+          <p:cNvSpPr/>
+          <p:nvPr/>
+        </p:nvSpPr>
+        <p:spPr>
+          <a:xfrm>
+            <a:off x="8046720" y="3108960"/>
+            <a:ext cx="2651760" cy="896112"/>
+          </a:xfrm>
+          <a:prstGeom prst="arc">
+            <a:avLst/>
+          </a:prstGeom>
+          <a:noFill/>
+          <a:ln w="25400">
+            <a:solidFill>
+              <a:srgbClr val="0068B7"/>
+            </a:solidFill>
+            <a:prstDash val="solid"/>
+          </a:ln>
+        </p:spPr>
+      </p:sp>
+      <p:sp>
+        <p:nvSpPr>
+          <p:cNvPr id="15" name="Text 13"/>
+          <p:cNvSpPr/>
+          <p:nvPr/>
+        </p:nvSpPr>
+        <p:spPr>
+          <a:xfrm>
+            <a:off x="7909560" y="3099816"/>
+            <a:ext cx="2926080" cy="256032"/>
+          </a:xfrm>
+          <a:prstGeom prst="rect">
+            <a:avLst/>
+          </a:prstGeom>
+          <a:noFill/>
+          <a:ln/>
+        </p:spPr>
+        <p:txBody>
+          <a:bodyPr wrap="square" lIns="0" tIns="0" rIns="0" bIns="0" rtlCol="0" anchor="ctr"/>
+          <a:lstStyle/>
+          <a:p>
+            <a:pPr algn="ctr" indent="0" marL="0">
+              <a:buNone/>
+            </a:pPr>
+            <a:r>
+              <a:rPr lang="en-US" sz="1500" b="1" dirty="0">
+                <a:solidFill>
+                  <a:srgbClr val="003A63"/>
+                </a:solidFill>
+                <a:latin typeface="Aptos" pitchFamily="34" charset="0"/>
+                <a:ea typeface="Aptos" pitchFamily="34" charset="-122"/>
+                <a:cs typeface="Aptos" pitchFamily="34" charset="-120"/>
+              </a:rPr>
+              <a:t>Risk</a:t>
+            </a:r>
+            <a:endParaRPr lang="en-US" sz="1500" dirty="0"/>
+          </a:p>
+        </p:txBody>
+      </p:sp>
+      <p:sp>
+        <p:nvSpPr>
+          <p:cNvPr id="16" name="Shape 14"/>
+          <p:cNvSpPr/>
+          <p:nvPr/>
+        </p:nvSpPr>
+        <p:spPr>
+          <a:xfrm>
+            <a:off x="8366760" y="3639312"/>
+            <a:ext cx="2011680" cy="0"/>
+          </a:xfrm>
+          <a:prstGeom prst="line">
+            <a:avLst/>
+          </a:prstGeom>
+          <a:noFill/>
+          <a:ln w="63500">
+            <a:solidFill>
+              <a:srgbClr val="2F8A28"/>
+            </a:solidFill>
+            <a:prstDash val="solid"/>
+          </a:ln>
+        </p:spPr>
+      </p:sp>
+      <p:sp>
+        <p:nvSpPr>
+          <p:cNvPr id="17" name="Text 15"/>
+          <p:cNvSpPr/>
+          <p:nvPr/>
+        </p:nvSpPr>
+        <p:spPr>
+          <a:xfrm>
+            <a:off x="7909560" y="3849624"/>
+            <a:ext cx="2926080" cy="164592"/>
+          </a:xfrm>
+          <a:prstGeom prst="rect">
+            <a:avLst/>
+          </a:prstGeom>
+          <a:noFill/>
+          <a:ln/>
+        </p:spPr>
+        <p:txBody>
+          <a:bodyPr wrap="square" lIns="0" tIns="0" rIns="0" bIns="0" rtlCol="0" anchor="ctr"/>
+          <a:lstStyle/>
+          <a:p>
+            <a:pPr algn="ctr" indent="0" marL="0">
+              <a:buNone/>
+            </a:pPr>
+            <a:r>
+              <a:rPr lang="en-US" sz="900" dirty="0">
+                <a:solidFill>
+                  <a:srgbClr val="003A63"/>
+                </a:solidFill>
+                <a:latin typeface="Aptos" pitchFamily="34" charset="0"/>
+                <a:ea typeface="Aptos" pitchFamily="34" charset="-122"/>
+                <a:cs typeface="Aptos" pitchFamily="34" charset="-120"/>
+              </a:rPr>
+              <a:t>Human review</a:t>
+            </a:r>
+            <a:endParaRPr lang="en-US" sz="900" dirty="0"/>
+          </a:p>
+        </p:txBody>
+      </p:sp>
+      <p:sp>
+        <p:nvSpPr>
+          <p:cNvPr id="18" name="Shape 16"/>
+          <p:cNvSpPr/>
+          <p:nvPr/>
+        </p:nvSpPr>
+        <p:spPr>
+          <a:xfrm>
+            <a:off x="7635240" y="4498848"/>
+            <a:ext cx="3474720" cy="1143000"/>
+          </a:xfrm>
+          <a:prstGeom prst="roundRect">
+            <a:avLst>
+              <a:gd name="adj" fmla="val 9600"/>
             </a:avLst>
           </a:prstGeom>
           <a:solidFill>
@@ -4943,14 +5294,14 @@
       </p:sp>
       <p:sp>
         <p:nvSpPr>
-          <p:cNvPr id="16" name="Text 14"/>
-          <p:cNvSpPr/>
-          <p:nvPr/>
-        </p:nvSpPr>
-        <p:spPr>
-          <a:xfrm>
-            <a:off x="8074152" y="3666744"/>
-            <a:ext cx="2825496" cy="256032"/>
+          <p:cNvPr id="19" name="Text 17"/>
+          <p:cNvSpPr/>
+          <p:nvPr/>
+        </p:nvSpPr>
+        <p:spPr>
+          <a:xfrm>
+            <a:off x="7799832" y="4645152"/>
+            <a:ext cx="3145536" cy="256032"/>
           </a:xfrm>
           <a:prstGeom prst="rect">
             <a:avLst/>
@@ -4974,7 +5325,7 @@
                 <a:ea typeface="Aptos" pitchFamily="34" charset="-122"/>
                 <a:cs typeface="Aptos" pitchFamily="34" charset="-120"/>
               </a:rPr>
-              <a:t>Use this for</a:t>
+              <a:t>Safeguard to plan</a:t>
             </a:r>
             <a:endParaRPr lang="en-US" sz="1300" dirty="0"/>
           </a:p>
@@ -4982,14 +5333,14 @@
       </p:sp>
       <p:sp>
         <p:nvSpPr>
-          <p:cNvPr id="17" name="Text 15"/>
-          <p:cNvSpPr/>
-          <p:nvPr/>
-        </p:nvSpPr>
-        <p:spPr>
-          <a:xfrm>
-            <a:off x="8074152" y="4023360"/>
-            <a:ext cx="2825496" cy="1097280"/>
+          <p:cNvPr id="20" name="Text 18"/>
+          <p:cNvSpPr/>
+          <p:nvPr/>
+        </p:nvSpPr>
+        <p:spPr>
+          <a:xfrm>
+            <a:off x="7799832" y="5001768"/>
+            <a:ext cx="3145536" cy="502920"/>
           </a:xfrm>
           <a:prstGeom prst="rect">
             <a:avLst/>
@@ -5015,7 +5366,7 @@
                 <a:ea typeface="Aptos" pitchFamily="34" charset="-122"/>
                 <a:cs typeface="Aptos" pitchFamily="34" charset="-120"/>
               </a:rPr>
-              <a:t>Connect the concept to public health decisions, safeguards, documentation, or implementation work.</a:t>
+              <a:t>Identify what could go wrong, who could be affected, what safeguards are needed, and what evidence should be reviewed before use expands.</a:t>
             </a:r>
             <a:endParaRPr lang="en-US" sz="1550" dirty="0"/>
           </a:p>
@@ -5189,8 +5540,8 @@
         </p:nvSpPr>
         <p:spPr>
           <a:xfrm>
-            <a:off x="9966960" y="6537960"/>
-            <a:ext cx="1645920" cy="201168"/>
+            <a:off x="9646920" y="6537960"/>
+            <a:ext cx="1965960" cy="201168"/>
           </a:xfrm>
           <a:prstGeom prst="rect">
             <a:avLst/>
@@ -5214,7 +5565,7 @@
                 <a:ea typeface="Aptos" pitchFamily="34" charset="-122"/>
                 <a:cs typeface="Aptos" pitchFamily="34" charset="-120"/>
               </a:rPr>
-              <a:t>Â© Paula Soper</a:t>
+              <a:t>Copyright Paula Soper</a:t>
             </a:r>
             <a:endParaRPr lang="en-US" sz="800" dirty="0"/>
           </a:p>
@@ -5261,77 +5612,13 @@
       </p:sp>
       <p:sp>
         <p:nvSpPr>
-          <p:cNvPr id="8" name="Shape 6"/>
+          <p:cNvPr id="8" name="Text 6"/>
           <p:cNvSpPr/>
           <p:nvPr/>
         </p:nvSpPr>
         <p:spPr>
           <a:xfrm>
             <a:off x="640080" y="658368"/>
-            <a:ext cx="420624" cy="420624"/>
-          </a:xfrm>
-          <a:prstGeom prst="ellipse">
-            <a:avLst/>
-          </a:prstGeom>
-          <a:solidFill>
-            <a:srgbClr val="0068B7"/>
-          </a:solidFill>
-          <a:ln w="12700">
-            <a:solidFill>
-              <a:srgbClr val="0068B7"/>
-            </a:solidFill>
-            <a:prstDash val="solid"/>
-          </a:ln>
-        </p:spPr>
-      </p:sp>
-      <p:sp>
-        <p:nvSpPr>
-          <p:cNvPr id="9" name="Text 7"/>
-          <p:cNvSpPr/>
-          <p:nvPr/>
-        </p:nvSpPr>
-        <p:spPr>
-          <a:xfrm>
-            <a:off x="640080" y="731520"/>
-            <a:ext cx="420624" cy="164592"/>
-          </a:xfrm>
-          <a:prstGeom prst="rect">
-            <a:avLst/>
-          </a:prstGeom>
-          <a:noFill/>
-          <a:ln/>
-        </p:spPr>
-        <p:txBody>
-          <a:bodyPr wrap="square" lIns="0" tIns="0" rIns="0" bIns="0" rtlCol="0" anchor="ctr"/>
-          <a:lstStyle/>
-          <a:p>
-            <a:pPr algn="ctr" indent="0" marL="0">
-              <a:buNone/>
-            </a:pPr>
-            <a:r>
-              <a:rPr lang="en-US" sz="1100" b="1" dirty="0">
-                <a:solidFill>
-                  <a:srgbClr val="FFFFFF"/>
-                </a:solidFill>
-                <a:latin typeface="Aptos" pitchFamily="34" charset="0"/>
-                <a:ea typeface="Aptos" pitchFamily="34" charset="-122"/>
-                <a:cs typeface="Aptos" pitchFamily="34" charset="-120"/>
-              </a:rPr>
-              <a:t>7</a:t>
-            </a:r>
-            <a:endParaRPr lang="en-US" sz="1100" dirty="0"/>
-          </a:p>
-        </p:txBody>
-      </p:sp>
-      <p:sp>
-        <p:nvSpPr>
-          <p:cNvPr id="10" name="Text 8"/>
-          <p:cNvSpPr/>
-          <p:nvPr/>
-        </p:nvSpPr>
-        <p:spPr>
-          <a:xfrm>
-            <a:off x="640080" y="621792"/>
             <a:ext cx="10881360" cy="713232"/>
           </a:xfrm>
           <a:prstGeom prst="rect">
@@ -5366,14 +5653,14 @@
       </p:sp>
       <p:sp>
         <p:nvSpPr>
-          <p:cNvPr id="11" name="Text 9"/>
+          <p:cNvPr id="9" name="Text 7"/>
           <p:cNvSpPr/>
           <p:nvPr/>
         </p:nvSpPr>
         <p:spPr>
           <a:xfrm>
             <a:off x="868680" y="1508760"/>
-            <a:ext cx="6537960" cy="4160520"/>
+            <a:ext cx="6309360" cy="4160520"/>
           </a:xfrm>
           <a:prstGeom prst="rect">
             <a:avLst/>
@@ -5432,18 +5719,18 @@
       </p:sp>
       <p:sp>
         <p:nvSpPr>
-          <p:cNvPr id="12" name="Shape 10"/>
-          <p:cNvSpPr/>
-          <p:nvPr/>
-        </p:nvSpPr>
-        <p:spPr>
-          <a:xfrm>
-            <a:off x="7909560" y="1417320"/>
-            <a:ext cx="3154680" cy="1828800"/>
+          <p:cNvPr id="10" name="Shape 8"/>
+          <p:cNvSpPr/>
+          <p:nvPr/>
+        </p:nvSpPr>
+        <p:spPr>
+          <a:xfrm>
+            <a:off x="7635240" y="1325880"/>
+            <a:ext cx="3474720" cy="1325880"/>
           </a:xfrm>
           <a:prstGeom prst="roundRect">
             <a:avLst>
-              <a:gd name="adj" fmla="val 6000"/>
+              <a:gd name="adj" fmla="val 8276"/>
             </a:avLst>
           </a:prstGeom>
           <a:solidFill>
@@ -5459,14 +5746,14 @@
       </p:sp>
       <p:sp>
         <p:nvSpPr>
-          <p:cNvPr id="13" name="Text 11"/>
-          <p:cNvSpPr/>
-          <p:nvPr/>
-        </p:nvSpPr>
-        <p:spPr>
-          <a:xfrm>
-            <a:off x="8074152" y="1563624"/>
-            <a:ext cx="2825496" cy="256032"/>
+          <p:cNvPr id="11" name="Text 9"/>
+          <p:cNvSpPr/>
+          <p:nvPr/>
+        </p:nvSpPr>
+        <p:spPr>
+          <a:xfrm>
+            <a:off x="7799832" y="1472184"/>
+            <a:ext cx="3145536" cy="256032"/>
           </a:xfrm>
           <a:prstGeom prst="rect">
             <a:avLst/>
@@ -5490,7 +5777,7 @@
                 <a:ea typeface="Aptos" pitchFamily="34" charset="-122"/>
                 <a:cs typeface="Aptos" pitchFamily="34" charset="-120"/>
               </a:rPr>
-              <a:t>Key idea</a:t>
+              <a:t>Risk check</a:t>
             </a:r>
             <a:endParaRPr lang="en-US" sz="1300" dirty="0"/>
           </a:p>
@@ -5498,14 +5785,14 @@
       </p:sp>
       <p:sp>
         <p:nvSpPr>
-          <p:cNvPr id="14" name="Text 12"/>
-          <p:cNvSpPr/>
-          <p:nvPr/>
-        </p:nvSpPr>
-        <p:spPr>
-          <a:xfrm>
-            <a:off x="8074152" y="1920240"/>
-            <a:ext cx="2825496" cy="1188720"/>
+          <p:cNvPr id="12" name="Text 10"/>
+          <p:cNvSpPr/>
+          <p:nvPr/>
+        </p:nvSpPr>
+        <p:spPr>
+          <a:xfrm>
+            <a:off x="7799832" y="1828800"/>
+            <a:ext cx="3145536" cy="685800"/>
           </a:xfrm>
           <a:prstGeom prst="rect">
             <a:avLst/>
@@ -5539,18 +5826,171 @@
       </p:sp>
       <p:sp>
         <p:nvSpPr>
-          <p:cNvPr id="15" name="Shape 13"/>
-          <p:cNvSpPr/>
-          <p:nvPr/>
-        </p:nvSpPr>
-        <p:spPr>
-          <a:xfrm>
-            <a:off x="7909560" y="3520440"/>
-            <a:ext cx="3154680" cy="1737360"/>
+          <p:cNvPr id="13" name="Shape 11"/>
+          <p:cNvSpPr/>
+          <p:nvPr/>
+        </p:nvSpPr>
+        <p:spPr>
+          <a:xfrm>
+            <a:off x="7635240" y="2788920"/>
+            <a:ext cx="3474720" cy="1536192"/>
           </a:xfrm>
           <a:prstGeom prst="roundRect">
             <a:avLst>
-              <a:gd name="adj" fmla="val 6316"/>
+              <a:gd name="adj" fmla="val 7143"/>
+            </a:avLst>
+          </a:prstGeom>
+          <a:solidFill>
+            <a:srgbClr val="FFFFFF">
+              <a:alpha val="88000"/>
+            </a:srgbClr>
+          </a:solidFill>
+          <a:ln w="12700">
+            <a:solidFill>
+              <a:srgbClr val="D6E8F2"/>
+            </a:solidFill>
+            <a:prstDash val="solid"/>
+          </a:ln>
+        </p:spPr>
+      </p:sp>
+      <p:sp>
+        <p:nvSpPr>
+          <p:cNvPr id="14" name="Shape 12"/>
+          <p:cNvSpPr/>
+          <p:nvPr/>
+        </p:nvSpPr>
+        <p:spPr>
+          <a:xfrm>
+            <a:off x="8046720" y="3108960"/>
+            <a:ext cx="2651760" cy="896112"/>
+          </a:xfrm>
+          <a:prstGeom prst="arc">
+            <a:avLst/>
+          </a:prstGeom>
+          <a:noFill/>
+          <a:ln w="25400">
+            <a:solidFill>
+              <a:srgbClr val="0068B7"/>
+            </a:solidFill>
+            <a:prstDash val="solid"/>
+          </a:ln>
+        </p:spPr>
+      </p:sp>
+      <p:sp>
+        <p:nvSpPr>
+          <p:cNvPr id="15" name="Text 13"/>
+          <p:cNvSpPr/>
+          <p:nvPr/>
+        </p:nvSpPr>
+        <p:spPr>
+          <a:xfrm>
+            <a:off x="7909560" y="3099816"/>
+            <a:ext cx="2926080" cy="256032"/>
+          </a:xfrm>
+          <a:prstGeom prst="rect">
+            <a:avLst/>
+          </a:prstGeom>
+          <a:noFill/>
+          <a:ln/>
+        </p:spPr>
+        <p:txBody>
+          <a:bodyPr wrap="square" lIns="0" tIns="0" rIns="0" bIns="0" rtlCol="0" anchor="ctr"/>
+          <a:lstStyle/>
+          <a:p>
+            <a:pPr algn="ctr" indent="0" marL="0">
+              <a:buNone/>
+            </a:pPr>
+            <a:r>
+              <a:rPr lang="en-US" sz="1500" b="1" dirty="0">
+                <a:solidFill>
+                  <a:srgbClr val="003A63"/>
+                </a:solidFill>
+                <a:latin typeface="Aptos" pitchFamily="34" charset="0"/>
+                <a:ea typeface="Aptos" pitchFamily="34" charset="-122"/>
+                <a:cs typeface="Aptos" pitchFamily="34" charset="-120"/>
+              </a:rPr>
+              <a:t>Risk</a:t>
+            </a:r>
+            <a:endParaRPr lang="en-US" sz="1500" dirty="0"/>
+          </a:p>
+        </p:txBody>
+      </p:sp>
+      <p:sp>
+        <p:nvSpPr>
+          <p:cNvPr id="16" name="Shape 14"/>
+          <p:cNvSpPr/>
+          <p:nvPr/>
+        </p:nvSpPr>
+        <p:spPr>
+          <a:xfrm>
+            <a:off x="8366760" y="3639312"/>
+            <a:ext cx="2011680" cy="0"/>
+          </a:xfrm>
+          <a:prstGeom prst="line">
+            <a:avLst/>
+          </a:prstGeom>
+          <a:noFill/>
+          <a:ln w="63500">
+            <a:solidFill>
+              <a:srgbClr val="2F8A28"/>
+            </a:solidFill>
+            <a:prstDash val="solid"/>
+          </a:ln>
+        </p:spPr>
+      </p:sp>
+      <p:sp>
+        <p:nvSpPr>
+          <p:cNvPr id="17" name="Text 15"/>
+          <p:cNvSpPr/>
+          <p:nvPr/>
+        </p:nvSpPr>
+        <p:spPr>
+          <a:xfrm>
+            <a:off x="7909560" y="3849624"/>
+            <a:ext cx="2926080" cy="164592"/>
+          </a:xfrm>
+          <a:prstGeom prst="rect">
+            <a:avLst/>
+          </a:prstGeom>
+          <a:noFill/>
+          <a:ln/>
+        </p:spPr>
+        <p:txBody>
+          <a:bodyPr wrap="square" lIns="0" tIns="0" rIns="0" bIns="0" rtlCol="0" anchor="ctr"/>
+          <a:lstStyle/>
+          <a:p>
+            <a:pPr algn="ctr" indent="0" marL="0">
+              <a:buNone/>
+            </a:pPr>
+            <a:r>
+              <a:rPr lang="en-US" sz="900" dirty="0">
+                <a:solidFill>
+                  <a:srgbClr val="003A63"/>
+                </a:solidFill>
+                <a:latin typeface="Aptos" pitchFamily="34" charset="0"/>
+                <a:ea typeface="Aptos" pitchFamily="34" charset="-122"/>
+                <a:cs typeface="Aptos" pitchFamily="34" charset="-120"/>
+              </a:rPr>
+              <a:t>Human review</a:t>
+            </a:r>
+            <a:endParaRPr lang="en-US" sz="900" dirty="0"/>
+          </a:p>
+        </p:txBody>
+      </p:sp>
+      <p:sp>
+        <p:nvSpPr>
+          <p:cNvPr id="18" name="Shape 16"/>
+          <p:cNvSpPr/>
+          <p:nvPr/>
+        </p:nvSpPr>
+        <p:spPr>
+          <a:xfrm>
+            <a:off x="7635240" y="4498848"/>
+            <a:ext cx="3474720" cy="1143000"/>
+          </a:xfrm>
+          <a:prstGeom prst="roundRect">
+            <a:avLst>
+              <a:gd name="adj" fmla="val 9600"/>
             </a:avLst>
           </a:prstGeom>
           <a:solidFill>
@@ -5566,14 +6006,14 @@
       </p:sp>
       <p:sp>
         <p:nvSpPr>
-          <p:cNvPr id="16" name="Text 14"/>
-          <p:cNvSpPr/>
-          <p:nvPr/>
-        </p:nvSpPr>
-        <p:spPr>
-          <a:xfrm>
-            <a:off x="8074152" y="3666744"/>
-            <a:ext cx="2825496" cy="256032"/>
+          <p:cNvPr id="19" name="Text 17"/>
+          <p:cNvSpPr/>
+          <p:nvPr/>
+        </p:nvSpPr>
+        <p:spPr>
+          <a:xfrm>
+            <a:off x="7799832" y="4645152"/>
+            <a:ext cx="3145536" cy="256032"/>
           </a:xfrm>
           <a:prstGeom prst="rect">
             <a:avLst/>
@@ -5597,7 +6037,7 @@
                 <a:ea typeface="Aptos" pitchFamily="34" charset="-122"/>
                 <a:cs typeface="Aptos" pitchFamily="34" charset="-120"/>
               </a:rPr>
-              <a:t>Use this for</a:t>
+              <a:t>Safeguard to plan</a:t>
             </a:r>
             <a:endParaRPr lang="en-US" sz="1300" dirty="0"/>
           </a:p>
@@ -5605,14 +6045,14 @@
       </p:sp>
       <p:sp>
         <p:nvSpPr>
-          <p:cNvPr id="17" name="Text 15"/>
-          <p:cNvSpPr/>
-          <p:nvPr/>
-        </p:nvSpPr>
-        <p:spPr>
-          <a:xfrm>
-            <a:off x="8074152" y="4023360"/>
-            <a:ext cx="2825496" cy="1097280"/>
+          <p:cNvPr id="20" name="Text 18"/>
+          <p:cNvSpPr/>
+          <p:nvPr/>
+        </p:nvSpPr>
+        <p:spPr>
+          <a:xfrm>
+            <a:off x="7799832" y="5001768"/>
+            <a:ext cx="3145536" cy="502920"/>
           </a:xfrm>
           <a:prstGeom prst="rect">
             <a:avLst/>
@@ -5638,7 +6078,7 @@
                 <a:ea typeface="Aptos" pitchFamily="34" charset="-122"/>
                 <a:cs typeface="Aptos" pitchFamily="34" charset="-120"/>
               </a:rPr>
-              <a:t>Connect the concept to public health decisions, safeguards, documentation, or implementation work.</a:t>
+              <a:t>Identify what could go wrong, who could be affected, what safeguards are needed, and what evidence should be reviewed before use expands.</a:t>
             </a:r>
             <a:endParaRPr lang="en-US" sz="1550" dirty="0"/>
           </a:p>
@@ -5812,8 +6252,8 @@
         </p:nvSpPr>
         <p:spPr>
           <a:xfrm>
-            <a:off x="9966960" y="6537960"/>
-            <a:ext cx="1645920" cy="201168"/>
+            <a:off x="9646920" y="6537960"/>
+            <a:ext cx="1965960" cy="201168"/>
           </a:xfrm>
           <a:prstGeom prst="rect">
             <a:avLst/>
@@ -5837,7 +6277,7 @@
                 <a:ea typeface="Aptos" pitchFamily="34" charset="-122"/>
                 <a:cs typeface="Aptos" pitchFamily="34" charset="-120"/>
               </a:rPr>
-              <a:t>Â© Paula Soper</a:t>
+              <a:t>Copyright Paula Soper</a:t>
             </a:r>
             <a:endParaRPr lang="en-US" sz="800" dirty="0"/>
           </a:p>
@@ -5932,7 +6372,7 @@
         <p:spPr>
           <a:xfrm>
             <a:off x="868680" y="1508760"/>
-            <a:ext cx="6537960" cy="4160520"/>
+            <a:ext cx="6309360" cy="4160520"/>
           </a:xfrm>
           <a:prstGeom prst="rect">
             <a:avLst/>
@@ -5997,12 +6437,12 @@
         </p:nvSpPr>
         <p:spPr>
           <a:xfrm>
-            <a:off x="7909560" y="1417320"/>
-            <a:ext cx="3154680" cy="1828800"/>
+            <a:off x="7635240" y="1325880"/>
+            <a:ext cx="3474720" cy="1325880"/>
           </a:xfrm>
           <a:prstGeom prst="roundRect">
             <a:avLst>
-              <a:gd name="adj" fmla="val 6000"/>
+              <a:gd name="adj" fmla="val 8276"/>
             </a:avLst>
           </a:prstGeom>
           <a:solidFill>
@@ -6024,8 +6464,8 @@
         </p:nvSpPr>
         <p:spPr>
           <a:xfrm>
-            <a:off x="8074152" y="1563624"/>
-            <a:ext cx="2825496" cy="256032"/>
+            <a:off x="7799832" y="1472184"/>
+            <a:ext cx="3145536" cy="256032"/>
           </a:xfrm>
           <a:prstGeom prst="rect">
             <a:avLst/>
@@ -6049,7 +6489,7 @@
                 <a:ea typeface="Aptos" pitchFamily="34" charset="-122"/>
                 <a:cs typeface="Aptos" pitchFamily="34" charset="-120"/>
               </a:rPr>
-              <a:t>Key idea</a:t>
+              <a:t>Risk check</a:t>
             </a:r>
             <a:endParaRPr lang="en-US" sz="1300" dirty="0"/>
           </a:p>
@@ -6063,8 +6503,8 @@
         </p:nvSpPr>
         <p:spPr>
           <a:xfrm>
-            <a:off x="8074152" y="1920240"/>
-            <a:ext cx="2825496" cy="1188720"/>
+            <a:off x="7799832" y="1828800"/>
+            <a:ext cx="3145536" cy="685800"/>
           </a:xfrm>
           <a:prstGeom prst="rect">
             <a:avLst/>
@@ -6104,12 +6544,165 @@
         </p:nvSpPr>
         <p:spPr>
           <a:xfrm>
-            <a:off x="7909560" y="3520440"/>
-            <a:ext cx="3154680" cy="1737360"/>
+            <a:off x="7635240" y="2788920"/>
+            <a:ext cx="3474720" cy="1536192"/>
           </a:xfrm>
           <a:prstGeom prst="roundRect">
             <a:avLst>
-              <a:gd name="adj" fmla="val 6316"/>
+              <a:gd name="adj" fmla="val 7143"/>
+            </a:avLst>
+          </a:prstGeom>
+          <a:solidFill>
+            <a:srgbClr val="FFFFFF">
+              <a:alpha val="88000"/>
+            </a:srgbClr>
+          </a:solidFill>
+          <a:ln w="12700">
+            <a:solidFill>
+              <a:srgbClr val="D6E8F2"/>
+            </a:solidFill>
+            <a:prstDash val="solid"/>
+          </a:ln>
+        </p:spPr>
+      </p:sp>
+      <p:sp>
+        <p:nvSpPr>
+          <p:cNvPr id="14" name="Shape 12"/>
+          <p:cNvSpPr/>
+          <p:nvPr/>
+        </p:nvSpPr>
+        <p:spPr>
+          <a:xfrm>
+            <a:off x="8046720" y="3108960"/>
+            <a:ext cx="2651760" cy="896112"/>
+          </a:xfrm>
+          <a:prstGeom prst="arc">
+            <a:avLst/>
+          </a:prstGeom>
+          <a:noFill/>
+          <a:ln w="25400">
+            <a:solidFill>
+              <a:srgbClr val="0068B7"/>
+            </a:solidFill>
+            <a:prstDash val="solid"/>
+          </a:ln>
+        </p:spPr>
+      </p:sp>
+      <p:sp>
+        <p:nvSpPr>
+          <p:cNvPr id="15" name="Text 13"/>
+          <p:cNvSpPr/>
+          <p:nvPr/>
+        </p:nvSpPr>
+        <p:spPr>
+          <a:xfrm>
+            <a:off x="7909560" y="3099816"/>
+            <a:ext cx="2926080" cy="256032"/>
+          </a:xfrm>
+          <a:prstGeom prst="rect">
+            <a:avLst/>
+          </a:prstGeom>
+          <a:noFill/>
+          <a:ln/>
+        </p:spPr>
+        <p:txBody>
+          <a:bodyPr wrap="square" lIns="0" tIns="0" rIns="0" bIns="0" rtlCol="0" anchor="ctr"/>
+          <a:lstStyle/>
+          <a:p>
+            <a:pPr algn="ctr" indent="0" marL="0">
+              <a:buNone/>
+            </a:pPr>
+            <a:r>
+              <a:rPr lang="en-US" sz="1500" b="1" dirty="0">
+                <a:solidFill>
+                  <a:srgbClr val="003A63"/>
+                </a:solidFill>
+                <a:latin typeface="Aptos" pitchFamily="34" charset="0"/>
+                <a:ea typeface="Aptos" pitchFamily="34" charset="-122"/>
+                <a:cs typeface="Aptos" pitchFamily="34" charset="-120"/>
+              </a:rPr>
+              <a:t>Risk</a:t>
+            </a:r>
+            <a:endParaRPr lang="en-US" sz="1500" dirty="0"/>
+          </a:p>
+        </p:txBody>
+      </p:sp>
+      <p:sp>
+        <p:nvSpPr>
+          <p:cNvPr id="16" name="Shape 14"/>
+          <p:cNvSpPr/>
+          <p:nvPr/>
+        </p:nvSpPr>
+        <p:spPr>
+          <a:xfrm>
+            <a:off x="8366760" y="3639312"/>
+            <a:ext cx="2011680" cy="0"/>
+          </a:xfrm>
+          <a:prstGeom prst="line">
+            <a:avLst/>
+          </a:prstGeom>
+          <a:noFill/>
+          <a:ln w="63500">
+            <a:solidFill>
+              <a:srgbClr val="2F8A28"/>
+            </a:solidFill>
+            <a:prstDash val="solid"/>
+          </a:ln>
+        </p:spPr>
+      </p:sp>
+      <p:sp>
+        <p:nvSpPr>
+          <p:cNvPr id="17" name="Text 15"/>
+          <p:cNvSpPr/>
+          <p:nvPr/>
+        </p:nvSpPr>
+        <p:spPr>
+          <a:xfrm>
+            <a:off x="7909560" y="3849624"/>
+            <a:ext cx="2926080" cy="164592"/>
+          </a:xfrm>
+          <a:prstGeom prst="rect">
+            <a:avLst/>
+          </a:prstGeom>
+          <a:noFill/>
+          <a:ln/>
+        </p:spPr>
+        <p:txBody>
+          <a:bodyPr wrap="square" lIns="0" tIns="0" rIns="0" bIns="0" rtlCol="0" anchor="ctr"/>
+          <a:lstStyle/>
+          <a:p>
+            <a:pPr algn="ctr" indent="0" marL="0">
+              <a:buNone/>
+            </a:pPr>
+            <a:r>
+              <a:rPr lang="en-US" sz="900" dirty="0">
+                <a:solidFill>
+                  <a:srgbClr val="003A63"/>
+                </a:solidFill>
+                <a:latin typeface="Aptos" pitchFamily="34" charset="0"/>
+                <a:ea typeface="Aptos" pitchFamily="34" charset="-122"/>
+                <a:cs typeface="Aptos" pitchFamily="34" charset="-120"/>
+              </a:rPr>
+              <a:t>Human review</a:t>
+            </a:r>
+            <a:endParaRPr lang="en-US" sz="900" dirty="0"/>
+          </a:p>
+        </p:txBody>
+      </p:sp>
+      <p:sp>
+        <p:nvSpPr>
+          <p:cNvPr id="18" name="Shape 16"/>
+          <p:cNvSpPr/>
+          <p:nvPr/>
+        </p:nvSpPr>
+        <p:spPr>
+          <a:xfrm>
+            <a:off x="7635240" y="4498848"/>
+            <a:ext cx="3474720" cy="1143000"/>
+          </a:xfrm>
+          <a:prstGeom prst="roundRect">
+            <a:avLst>
+              <a:gd name="adj" fmla="val 9600"/>
             </a:avLst>
           </a:prstGeom>
           <a:solidFill>
@@ -6125,14 +6718,14 @@
       </p:sp>
       <p:sp>
         <p:nvSpPr>
-          <p:cNvPr id="14" name="Text 12"/>
-          <p:cNvSpPr/>
-          <p:nvPr/>
-        </p:nvSpPr>
-        <p:spPr>
-          <a:xfrm>
-            <a:off x="8074152" y="3666744"/>
-            <a:ext cx="2825496" cy="256032"/>
+          <p:cNvPr id="19" name="Text 17"/>
+          <p:cNvSpPr/>
+          <p:nvPr/>
+        </p:nvSpPr>
+        <p:spPr>
+          <a:xfrm>
+            <a:off x="7799832" y="4645152"/>
+            <a:ext cx="3145536" cy="256032"/>
           </a:xfrm>
           <a:prstGeom prst="rect">
             <a:avLst/>
@@ -6156,7 +6749,7 @@
                 <a:ea typeface="Aptos" pitchFamily="34" charset="-122"/>
                 <a:cs typeface="Aptos" pitchFamily="34" charset="-120"/>
               </a:rPr>
-              <a:t>Use this for</a:t>
+              <a:t>Safeguard to plan</a:t>
             </a:r>
             <a:endParaRPr lang="en-US" sz="1300" dirty="0"/>
           </a:p>
@@ -6164,14 +6757,14 @@
       </p:sp>
       <p:sp>
         <p:nvSpPr>
-          <p:cNvPr id="15" name="Text 13"/>
-          <p:cNvSpPr/>
-          <p:nvPr/>
-        </p:nvSpPr>
-        <p:spPr>
-          <a:xfrm>
-            <a:off x="8074152" y="4023360"/>
-            <a:ext cx="2825496" cy="1097280"/>
+          <p:cNvPr id="20" name="Text 18"/>
+          <p:cNvSpPr/>
+          <p:nvPr/>
+        </p:nvSpPr>
+        <p:spPr>
+          <a:xfrm>
+            <a:off x="7799832" y="5001768"/>
+            <a:ext cx="3145536" cy="502920"/>
           </a:xfrm>
           <a:prstGeom prst="rect">
             <a:avLst/>
@@ -6197,7 +6790,7 @@
                 <a:ea typeface="Aptos" pitchFamily="34" charset="-122"/>
                 <a:cs typeface="Aptos" pitchFamily="34" charset="-120"/>
               </a:rPr>
-              <a:t>Connect the concept to public health decisions, safeguards, documentation, or implementation work.</a:t>
+              <a:t>Identify what could go wrong, who could be affected, what safeguards are needed, and what evidence should be reviewed before use expands.</a:t>
             </a:r>
             <a:endParaRPr lang="en-US" sz="1550" dirty="0"/>
           </a:p>
@@ -6371,8 +6964,8 @@
         </p:nvSpPr>
         <p:spPr>
           <a:xfrm>
-            <a:off x="9966960" y="6537960"/>
-            <a:ext cx="1645920" cy="201168"/>
+            <a:off x="9646920" y="6537960"/>
+            <a:ext cx="1965960" cy="201168"/>
           </a:xfrm>
           <a:prstGeom prst="rect">
             <a:avLst/>
@@ -6396,7 +6989,7 @@
                 <a:ea typeface="Aptos" pitchFamily="34" charset="-122"/>
                 <a:cs typeface="Aptos" pitchFamily="34" charset="-120"/>
               </a:rPr>
-              <a:t>Â© Paula Soper</a:t>
+              <a:t>Copyright Paula Soper</a:t>
             </a:r>
             <a:endParaRPr lang="en-US" sz="800" dirty="0"/>
           </a:p>
@@ -6443,77 +7036,13 @@
       </p:sp>
       <p:sp>
         <p:nvSpPr>
-          <p:cNvPr id="8" name="Shape 6"/>
+          <p:cNvPr id="8" name="Text 6"/>
           <p:cNvSpPr/>
           <p:nvPr/>
         </p:nvSpPr>
         <p:spPr>
           <a:xfrm>
             <a:off x="640080" y="658368"/>
-            <a:ext cx="420624" cy="420624"/>
-          </a:xfrm>
-          <a:prstGeom prst="ellipse">
-            <a:avLst/>
-          </a:prstGeom>
-          <a:solidFill>
-            <a:srgbClr val="0068B7"/>
-          </a:solidFill>
-          <a:ln w="12700">
-            <a:solidFill>
-              <a:srgbClr val="0068B7"/>
-            </a:solidFill>
-            <a:prstDash val="solid"/>
-          </a:ln>
-        </p:spPr>
-      </p:sp>
-      <p:sp>
-        <p:nvSpPr>
-          <p:cNvPr id="9" name="Text 7"/>
-          <p:cNvSpPr/>
-          <p:nvPr/>
-        </p:nvSpPr>
-        <p:spPr>
-          <a:xfrm>
-            <a:off x="640080" y="731520"/>
-            <a:ext cx="420624" cy="164592"/>
-          </a:xfrm>
-          <a:prstGeom prst="rect">
-            <a:avLst/>
-          </a:prstGeom>
-          <a:noFill/>
-          <a:ln/>
-        </p:spPr>
-        <p:txBody>
-          <a:bodyPr wrap="square" lIns="0" tIns="0" rIns="0" bIns="0" rtlCol="0" anchor="ctr"/>
-          <a:lstStyle/>
-          <a:p>
-            <a:pPr algn="ctr" indent="0" marL="0">
-              <a:buNone/>
-            </a:pPr>
-            <a:r>
-              <a:rPr lang="en-US" sz="1100" b="1" dirty="0">
-                <a:solidFill>
-                  <a:srgbClr val="FFFFFF"/>
-                </a:solidFill>
-                <a:latin typeface="Aptos" pitchFamily="34" charset="0"/>
-                <a:ea typeface="Aptos" pitchFamily="34" charset="-122"/>
-                <a:cs typeface="Aptos" pitchFamily="34" charset="-120"/>
-              </a:rPr>
-              <a:t>8</a:t>
-            </a:r>
-            <a:endParaRPr lang="en-US" sz="1100" dirty="0"/>
-          </a:p>
-        </p:txBody>
-      </p:sp>
-      <p:sp>
-        <p:nvSpPr>
-          <p:cNvPr id="10" name="Text 8"/>
-          <p:cNvSpPr/>
-          <p:nvPr/>
-        </p:nvSpPr>
-        <p:spPr>
-          <a:xfrm>
-            <a:off x="640080" y="621792"/>
             <a:ext cx="10881360" cy="713232"/>
           </a:xfrm>
           <a:prstGeom prst="rect">
@@ -6548,14 +7077,14 @@
       </p:sp>
       <p:sp>
         <p:nvSpPr>
-          <p:cNvPr id="11" name="Text 9"/>
+          <p:cNvPr id="9" name="Text 7"/>
           <p:cNvSpPr/>
           <p:nvPr/>
         </p:nvSpPr>
         <p:spPr>
           <a:xfrm>
             <a:off x="868680" y="1508760"/>
-            <a:ext cx="6537960" cy="4160520"/>
+            <a:ext cx="6309360" cy="4160520"/>
           </a:xfrm>
           <a:prstGeom prst="rect">
             <a:avLst/>
@@ -6614,18 +7143,18 @@
       </p:sp>
       <p:sp>
         <p:nvSpPr>
-          <p:cNvPr id="12" name="Shape 10"/>
-          <p:cNvSpPr/>
-          <p:nvPr/>
-        </p:nvSpPr>
-        <p:spPr>
-          <a:xfrm>
-            <a:off x="7909560" y="1417320"/>
-            <a:ext cx="3154680" cy="1828800"/>
+          <p:cNvPr id="10" name="Shape 8"/>
+          <p:cNvSpPr/>
+          <p:nvPr/>
+        </p:nvSpPr>
+        <p:spPr>
+          <a:xfrm>
+            <a:off x="7635240" y="1325880"/>
+            <a:ext cx="3474720" cy="1325880"/>
           </a:xfrm>
           <a:prstGeom prst="roundRect">
             <a:avLst>
-              <a:gd name="adj" fmla="val 6000"/>
+              <a:gd name="adj" fmla="val 8276"/>
             </a:avLst>
           </a:prstGeom>
           <a:solidFill>
@@ -6641,14 +7170,14 @@
       </p:sp>
       <p:sp>
         <p:nvSpPr>
-          <p:cNvPr id="13" name="Text 11"/>
-          <p:cNvSpPr/>
-          <p:nvPr/>
-        </p:nvSpPr>
-        <p:spPr>
-          <a:xfrm>
-            <a:off x="8074152" y="1563624"/>
-            <a:ext cx="2825496" cy="256032"/>
+          <p:cNvPr id="11" name="Text 9"/>
+          <p:cNvSpPr/>
+          <p:nvPr/>
+        </p:nvSpPr>
+        <p:spPr>
+          <a:xfrm>
+            <a:off x="7799832" y="1472184"/>
+            <a:ext cx="3145536" cy="256032"/>
           </a:xfrm>
           <a:prstGeom prst="rect">
             <a:avLst/>
@@ -6672,7 +7201,7 @@
                 <a:ea typeface="Aptos" pitchFamily="34" charset="-122"/>
                 <a:cs typeface="Aptos" pitchFamily="34" charset="-120"/>
               </a:rPr>
-              <a:t>Key idea</a:t>
+              <a:t>Risk check</a:t>
             </a:r>
             <a:endParaRPr lang="en-US" sz="1300" dirty="0"/>
           </a:p>
@@ -6680,14 +7209,14 @@
       </p:sp>
       <p:sp>
         <p:nvSpPr>
-          <p:cNvPr id="14" name="Text 12"/>
-          <p:cNvSpPr/>
-          <p:nvPr/>
-        </p:nvSpPr>
-        <p:spPr>
-          <a:xfrm>
-            <a:off x="8074152" y="1920240"/>
-            <a:ext cx="2825496" cy="1188720"/>
+          <p:cNvPr id="12" name="Text 10"/>
+          <p:cNvSpPr/>
+          <p:nvPr/>
+        </p:nvSpPr>
+        <p:spPr>
+          <a:xfrm>
+            <a:off x="7799832" y="1828800"/>
+            <a:ext cx="3145536" cy="685800"/>
           </a:xfrm>
           <a:prstGeom prst="rect">
             <a:avLst/>
@@ -6721,18 +7250,171 @@
       </p:sp>
       <p:sp>
         <p:nvSpPr>
-          <p:cNvPr id="15" name="Shape 13"/>
-          <p:cNvSpPr/>
-          <p:nvPr/>
-        </p:nvSpPr>
-        <p:spPr>
-          <a:xfrm>
-            <a:off x="7909560" y="3520440"/>
-            <a:ext cx="3154680" cy="1737360"/>
+          <p:cNvPr id="13" name="Shape 11"/>
+          <p:cNvSpPr/>
+          <p:nvPr/>
+        </p:nvSpPr>
+        <p:spPr>
+          <a:xfrm>
+            <a:off x="7635240" y="2788920"/>
+            <a:ext cx="3474720" cy="1536192"/>
           </a:xfrm>
           <a:prstGeom prst="roundRect">
             <a:avLst>
-              <a:gd name="adj" fmla="val 6316"/>
+              <a:gd name="adj" fmla="val 7143"/>
+            </a:avLst>
+          </a:prstGeom>
+          <a:solidFill>
+            <a:srgbClr val="FFFFFF">
+              <a:alpha val="88000"/>
+            </a:srgbClr>
+          </a:solidFill>
+          <a:ln w="12700">
+            <a:solidFill>
+              <a:srgbClr val="D6E8F2"/>
+            </a:solidFill>
+            <a:prstDash val="solid"/>
+          </a:ln>
+        </p:spPr>
+      </p:sp>
+      <p:sp>
+        <p:nvSpPr>
+          <p:cNvPr id="14" name="Shape 12"/>
+          <p:cNvSpPr/>
+          <p:nvPr/>
+        </p:nvSpPr>
+        <p:spPr>
+          <a:xfrm>
+            <a:off x="8046720" y="3108960"/>
+            <a:ext cx="2651760" cy="896112"/>
+          </a:xfrm>
+          <a:prstGeom prst="arc">
+            <a:avLst/>
+          </a:prstGeom>
+          <a:noFill/>
+          <a:ln w="25400">
+            <a:solidFill>
+              <a:srgbClr val="0068B7"/>
+            </a:solidFill>
+            <a:prstDash val="solid"/>
+          </a:ln>
+        </p:spPr>
+      </p:sp>
+      <p:sp>
+        <p:nvSpPr>
+          <p:cNvPr id="15" name="Text 13"/>
+          <p:cNvSpPr/>
+          <p:nvPr/>
+        </p:nvSpPr>
+        <p:spPr>
+          <a:xfrm>
+            <a:off x="7909560" y="3099816"/>
+            <a:ext cx="2926080" cy="256032"/>
+          </a:xfrm>
+          <a:prstGeom prst="rect">
+            <a:avLst/>
+          </a:prstGeom>
+          <a:noFill/>
+          <a:ln/>
+        </p:spPr>
+        <p:txBody>
+          <a:bodyPr wrap="square" lIns="0" tIns="0" rIns="0" bIns="0" rtlCol="0" anchor="ctr"/>
+          <a:lstStyle/>
+          <a:p>
+            <a:pPr algn="ctr" indent="0" marL="0">
+              <a:buNone/>
+            </a:pPr>
+            <a:r>
+              <a:rPr lang="en-US" sz="1500" b="1" dirty="0">
+                <a:solidFill>
+                  <a:srgbClr val="003A63"/>
+                </a:solidFill>
+                <a:latin typeface="Aptos" pitchFamily="34" charset="0"/>
+                <a:ea typeface="Aptos" pitchFamily="34" charset="-122"/>
+                <a:cs typeface="Aptos" pitchFamily="34" charset="-120"/>
+              </a:rPr>
+              <a:t>Risk</a:t>
+            </a:r>
+            <a:endParaRPr lang="en-US" sz="1500" dirty="0"/>
+          </a:p>
+        </p:txBody>
+      </p:sp>
+      <p:sp>
+        <p:nvSpPr>
+          <p:cNvPr id="16" name="Shape 14"/>
+          <p:cNvSpPr/>
+          <p:nvPr/>
+        </p:nvSpPr>
+        <p:spPr>
+          <a:xfrm>
+            <a:off x="8366760" y="3639312"/>
+            <a:ext cx="2011680" cy="0"/>
+          </a:xfrm>
+          <a:prstGeom prst="line">
+            <a:avLst/>
+          </a:prstGeom>
+          <a:noFill/>
+          <a:ln w="63500">
+            <a:solidFill>
+              <a:srgbClr val="2F8A28"/>
+            </a:solidFill>
+            <a:prstDash val="solid"/>
+          </a:ln>
+        </p:spPr>
+      </p:sp>
+      <p:sp>
+        <p:nvSpPr>
+          <p:cNvPr id="17" name="Text 15"/>
+          <p:cNvSpPr/>
+          <p:nvPr/>
+        </p:nvSpPr>
+        <p:spPr>
+          <a:xfrm>
+            <a:off x="7909560" y="3849624"/>
+            <a:ext cx="2926080" cy="164592"/>
+          </a:xfrm>
+          <a:prstGeom prst="rect">
+            <a:avLst/>
+          </a:prstGeom>
+          <a:noFill/>
+          <a:ln/>
+        </p:spPr>
+        <p:txBody>
+          <a:bodyPr wrap="square" lIns="0" tIns="0" rIns="0" bIns="0" rtlCol="0" anchor="ctr"/>
+          <a:lstStyle/>
+          <a:p>
+            <a:pPr algn="ctr" indent="0" marL="0">
+              <a:buNone/>
+            </a:pPr>
+            <a:r>
+              <a:rPr lang="en-US" sz="900" dirty="0">
+                <a:solidFill>
+                  <a:srgbClr val="003A63"/>
+                </a:solidFill>
+                <a:latin typeface="Aptos" pitchFamily="34" charset="0"/>
+                <a:ea typeface="Aptos" pitchFamily="34" charset="-122"/>
+                <a:cs typeface="Aptos" pitchFamily="34" charset="-120"/>
+              </a:rPr>
+              <a:t>Human review</a:t>
+            </a:r>
+            <a:endParaRPr lang="en-US" sz="900" dirty="0"/>
+          </a:p>
+        </p:txBody>
+      </p:sp>
+      <p:sp>
+        <p:nvSpPr>
+          <p:cNvPr id="18" name="Shape 16"/>
+          <p:cNvSpPr/>
+          <p:nvPr/>
+        </p:nvSpPr>
+        <p:spPr>
+          <a:xfrm>
+            <a:off x="7635240" y="4498848"/>
+            <a:ext cx="3474720" cy="1143000"/>
+          </a:xfrm>
+          <a:prstGeom prst="roundRect">
+            <a:avLst>
+              <a:gd name="adj" fmla="val 9600"/>
             </a:avLst>
           </a:prstGeom>
           <a:solidFill>
@@ -6748,14 +7430,14 @@
       </p:sp>
       <p:sp>
         <p:nvSpPr>
-          <p:cNvPr id="16" name="Text 14"/>
-          <p:cNvSpPr/>
-          <p:nvPr/>
-        </p:nvSpPr>
-        <p:spPr>
-          <a:xfrm>
-            <a:off x="8074152" y="3666744"/>
-            <a:ext cx="2825496" cy="256032"/>
+          <p:cNvPr id="19" name="Text 17"/>
+          <p:cNvSpPr/>
+          <p:nvPr/>
+        </p:nvSpPr>
+        <p:spPr>
+          <a:xfrm>
+            <a:off x="7799832" y="4645152"/>
+            <a:ext cx="3145536" cy="256032"/>
           </a:xfrm>
           <a:prstGeom prst="rect">
             <a:avLst/>
@@ -6779,7 +7461,7 @@
                 <a:ea typeface="Aptos" pitchFamily="34" charset="-122"/>
                 <a:cs typeface="Aptos" pitchFamily="34" charset="-120"/>
               </a:rPr>
-              <a:t>Use this for</a:t>
+              <a:t>Safeguard to plan</a:t>
             </a:r>
             <a:endParaRPr lang="en-US" sz="1300" dirty="0"/>
           </a:p>
@@ -6787,14 +7469,14 @@
       </p:sp>
       <p:sp>
         <p:nvSpPr>
-          <p:cNvPr id="17" name="Text 15"/>
-          <p:cNvSpPr/>
-          <p:nvPr/>
-        </p:nvSpPr>
-        <p:spPr>
-          <a:xfrm>
-            <a:off x="8074152" y="4023360"/>
-            <a:ext cx="2825496" cy="1097280"/>
+          <p:cNvPr id="20" name="Text 18"/>
+          <p:cNvSpPr/>
+          <p:nvPr/>
+        </p:nvSpPr>
+        <p:spPr>
+          <a:xfrm>
+            <a:off x="7799832" y="5001768"/>
+            <a:ext cx="3145536" cy="502920"/>
           </a:xfrm>
           <a:prstGeom prst="rect">
             <a:avLst/>
@@ -6820,7 +7502,7 @@
                 <a:ea typeface="Aptos" pitchFamily="34" charset="-122"/>
                 <a:cs typeface="Aptos" pitchFamily="34" charset="-120"/>
               </a:rPr>
-              <a:t>Connect the concept to public health decisions, safeguards, documentation, or implementation work.</a:t>
+              <a:t>Identify what could go wrong, who could be affected, what safeguards are needed, and what evidence should be reviewed before use expands.</a:t>
             </a:r>
             <a:endParaRPr lang="en-US" sz="1550" dirty="0"/>
           </a:p>
@@ -6994,8 +7676,8 @@
         </p:nvSpPr>
         <p:spPr>
           <a:xfrm>
-            <a:off x="9966960" y="6537960"/>
-            <a:ext cx="1645920" cy="201168"/>
+            <a:off x="9646920" y="6537960"/>
+            <a:ext cx="1965960" cy="201168"/>
           </a:xfrm>
           <a:prstGeom prst="rect">
             <a:avLst/>
@@ -7019,7 +7701,7 @@
                 <a:ea typeface="Aptos" pitchFamily="34" charset="-122"/>
                 <a:cs typeface="Aptos" pitchFamily="34" charset="-120"/>
               </a:rPr>
-              <a:t>Â© Paula Soper</a:t>
+              <a:t>Copyright Paula Soper</a:t>
             </a:r>
             <a:endParaRPr lang="en-US" sz="800" dirty="0"/>
           </a:p>
@@ -7114,7 +7796,7 @@
         <p:spPr>
           <a:xfrm>
             <a:off x="868680" y="1508760"/>
-            <a:ext cx="6537960" cy="4160520"/>
+            <a:ext cx="6309360" cy="4160520"/>
           </a:xfrm>
           <a:prstGeom prst="rect">
             <a:avLst/>
@@ -7179,12 +7861,12 @@
         </p:nvSpPr>
         <p:spPr>
           <a:xfrm>
-            <a:off x="7909560" y="1417320"/>
-            <a:ext cx="3154680" cy="1828800"/>
+            <a:off x="7635240" y="1325880"/>
+            <a:ext cx="3474720" cy="1325880"/>
           </a:xfrm>
           <a:prstGeom prst="roundRect">
             <a:avLst>
-              <a:gd name="adj" fmla="val 6000"/>
+              <a:gd name="adj" fmla="val 8276"/>
             </a:avLst>
           </a:prstGeom>
           <a:solidFill>
@@ -7206,8 +7888,8 @@
         </p:nvSpPr>
         <p:spPr>
           <a:xfrm>
-            <a:off x="8074152" y="1563624"/>
-            <a:ext cx="2825496" cy="256032"/>
+            <a:off x="7799832" y="1472184"/>
+            <a:ext cx="3145536" cy="256032"/>
           </a:xfrm>
           <a:prstGeom prst="rect">
             <a:avLst/>
@@ -7231,7 +7913,7 @@
                 <a:ea typeface="Aptos" pitchFamily="34" charset="-122"/>
                 <a:cs typeface="Aptos" pitchFamily="34" charset="-120"/>
               </a:rPr>
-              <a:t>Key idea</a:t>
+              <a:t>Risk check</a:t>
             </a:r>
             <a:endParaRPr lang="en-US" sz="1300" dirty="0"/>
           </a:p>
@@ -7245,8 +7927,8 @@
         </p:nvSpPr>
         <p:spPr>
           <a:xfrm>
-            <a:off x="8074152" y="1920240"/>
-            <a:ext cx="2825496" cy="1188720"/>
+            <a:off x="7799832" y="1828800"/>
+            <a:ext cx="3145536" cy="685800"/>
           </a:xfrm>
           <a:prstGeom prst="rect">
             <a:avLst/>
@@ -7286,12 +7968,165 @@
         </p:nvSpPr>
         <p:spPr>
           <a:xfrm>
-            <a:off x="7909560" y="3520440"/>
-            <a:ext cx="3154680" cy="1737360"/>
+            <a:off x="7635240" y="2788920"/>
+            <a:ext cx="3474720" cy="1536192"/>
           </a:xfrm>
           <a:prstGeom prst="roundRect">
             <a:avLst>
-              <a:gd name="adj" fmla="val 6316"/>
+              <a:gd name="adj" fmla="val 7143"/>
+            </a:avLst>
+          </a:prstGeom>
+          <a:solidFill>
+            <a:srgbClr val="FFFFFF">
+              <a:alpha val="88000"/>
+            </a:srgbClr>
+          </a:solidFill>
+          <a:ln w="12700">
+            <a:solidFill>
+              <a:srgbClr val="D6E8F2"/>
+            </a:solidFill>
+            <a:prstDash val="solid"/>
+          </a:ln>
+        </p:spPr>
+      </p:sp>
+      <p:sp>
+        <p:nvSpPr>
+          <p:cNvPr id="14" name="Shape 12"/>
+          <p:cNvSpPr/>
+          <p:nvPr/>
+        </p:nvSpPr>
+        <p:spPr>
+          <a:xfrm>
+            <a:off x="8046720" y="3108960"/>
+            <a:ext cx="2651760" cy="896112"/>
+          </a:xfrm>
+          <a:prstGeom prst="arc">
+            <a:avLst/>
+          </a:prstGeom>
+          <a:noFill/>
+          <a:ln w="25400">
+            <a:solidFill>
+              <a:srgbClr val="0068B7"/>
+            </a:solidFill>
+            <a:prstDash val="solid"/>
+          </a:ln>
+        </p:spPr>
+      </p:sp>
+      <p:sp>
+        <p:nvSpPr>
+          <p:cNvPr id="15" name="Text 13"/>
+          <p:cNvSpPr/>
+          <p:nvPr/>
+        </p:nvSpPr>
+        <p:spPr>
+          <a:xfrm>
+            <a:off x="7909560" y="3099816"/>
+            <a:ext cx="2926080" cy="256032"/>
+          </a:xfrm>
+          <a:prstGeom prst="rect">
+            <a:avLst/>
+          </a:prstGeom>
+          <a:noFill/>
+          <a:ln/>
+        </p:spPr>
+        <p:txBody>
+          <a:bodyPr wrap="square" lIns="0" tIns="0" rIns="0" bIns="0" rtlCol="0" anchor="ctr"/>
+          <a:lstStyle/>
+          <a:p>
+            <a:pPr algn="ctr" indent="0" marL="0">
+              <a:buNone/>
+            </a:pPr>
+            <a:r>
+              <a:rPr lang="en-US" sz="1500" b="1" dirty="0">
+                <a:solidFill>
+                  <a:srgbClr val="003A63"/>
+                </a:solidFill>
+                <a:latin typeface="Aptos" pitchFamily="34" charset="0"/>
+                <a:ea typeface="Aptos" pitchFamily="34" charset="-122"/>
+                <a:cs typeface="Aptos" pitchFamily="34" charset="-120"/>
+              </a:rPr>
+              <a:t>Risk</a:t>
+            </a:r>
+            <a:endParaRPr lang="en-US" sz="1500" dirty="0"/>
+          </a:p>
+        </p:txBody>
+      </p:sp>
+      <p:sp>
+        <p:nvSpPr>
+          <p:cNvPr id="16" name="Shape 14"/>
+          <p:cNvSpPr/>
+          <p:nvPr/>
+        </p:nvSpPr>
+        <p:spPr>
+          <a:xfrm>
+            <a:off x="8366760" y="3639312"/>
+            <a:ext cx="2011680" cy="0"/>
+          </a:xfrm>
+          <a:prstGeom prst="line">
+            <a:avLst/>
+          </a:prstGeom>
+          <a:noFill/>
+          <a:ln w="63500">
+            <a:solidFill>
+              <a:srgbClr val="2F8A28"/>
+            </a:solidFill>
+            <a:prstDash val="solid"/>
+          </a:ln>
+        </p:spPr>
+      </p:sp>
+      <p:sp>
+        <p:nvSpPr>
+          <p:cNvPr id="17" name="Text 15"/>
+          <p:cNvSpPr/>
+          <p:nvPr/>
+        </p:nvSpPr>
+        <p:spPr>
+          <a:xfrm>
+            <a:off x="7909560" y="3849624"/>
+            <a:ext cx="2926080" cy="164592"/>
+          </a:xfrm>
+          <a:prstGeom prst="rect">
+            <a:avLst/>
+          </a:prstGeom>
+          <a:noFill/>
+          <a:ln/>
+        </p:spPr>
+        <p:txBody>
+          <a:bodyPr wrap="square" lIns="0" tIns="0" rIns="0" bIns="0" rtlCol="0" anchor="ctr"/>
+          <a:lstStyle/>
+          <a:p>
+            <a:pPr algn="ctr" indent="0" marL="0">
+              <a:buNone/>
+            </a:pPr>
+            <a:r>
+              <a:rPr lang="en-US" sz="900" dirty="0">
+                <a:solidFill>
+                  <a:srgbClr val="003A63"/>
+                </a:solidFill>
+                <a:latin typeface="Aptos" pitchFamily="34" charset="0"/>
+                <a:ea typeface="Aptos" pitchFamily="34" charset="-122"/>
+                <a:cs typeface="Aptos" pitchFamily="34" charset="-120"/>
+              </a:rPr>
+              <a:t>Human review</a:t>
+            </a:r>
+            <a:endParaRPr lang="en-US" sz="900" dirty="0"/>
+          </a:p>
+        </p:txBody>
+      </p:sp>
+      <p:sp>
+        <p:nvSpPr>
+          <p:cNvPr id="18" name="Shape 16"/>
+          <p:cNvSpPr/>
+          <p:nvPr/>
+        </p:nvSpPr>
+        <p:spPr>
+          <a:xfrm>
+            <a:off x="7635240" y="4498848"/>
+            <a:ext cx="3474720" cy="1143000"/>
+          </a:xfrm>
+          <a:prstGeom prst="roundRect">
+            <a:avLst>
+              <a:gd name="adj" fmla="val 9600"/>
             </a:avLst>
           </a:prstGeom>
           <a:solidFill>
@@ -7307,14 +8142,14 @@
       </p:sp>
       <p:sp>
         <p:nvSpPr>
-          <p:cNvPr id="14" name="Text 12"/>
-          <p:cNvSpPr/>
-          <p:nvPr/>
-        </p:nvSpPr>
-        <p:spPr>
-          <a:xfrm>
-            <a:off x="8074152" y="3666744"/>
-            <a:ext cx="2825496" cy="256032"/>
+          <p:cNvPr id="19" name="Text 17"/>
+          <p:cNvSpPr/>
+          <p:nvPr/>
+        </p:nvSpPr>
+        <p:spPr>
+          <a:xfrm>
+            <a:off x="7799832" y="4645152"/>
+            <a:ext cx="3145536" cy="256032"/>
           </a:xfrm>
           <a:prstGeom prst="rect">
             <a:avLst/>
@@ -7338,7 +8173,7 @@
                 <a:ea typeface="Aptos" pitchFamily="34" charset="-122"/>
                 <a:cs typeface="Aptos" pitchFamily="34" charset="-120"/>
               </a:rPr>
-              <a:t>Use this for</a:t>
+              <a:t>Safeguard to plan</a:t>
             </a:r>
             <a:endParaRPr lang="en-US" sz="1300" dirty="0"/>
           </a:p>
@@ -7346,14 +8181,14 @@
       </p:sp>
       <p:sp>
         <p:nvSpPr>
-          <p:cNvPr id="15" name="Text 13"/>
-          <p:cNvSpPr/>
-          <p:nvPr/>
-        </p:nvSpPr>
-        <p:spPr>
-          <a:xfrm>
-            <a:off x="8074152" y="4023360"/>
-            <a:ext cx="2825496" cy="1097280"/>
+          <p:cNvPr id="20" name="Text 18"/>
+          <p:cNvSpPr/>
+          <p:nvPr/>
+        </p:nvSpPr>
+        <p:spPr>
+          <a:xfrm>
+            <a:off x="7799832" y="5001768"/>
+            <a:ext cx="3145536" cy="502920"/>
           </a:xfrm>
           <a:prstGeom prst="rect">
             <a:avLst/>
@@ -7379,7 +8214,7 @@
                 <a:ea typeface="Aptos" pitchFamily="34" charset="-122"/>
                 <a:cs typeface="Aptos" pitchFamily="34" charset="-120"/>
               </a:rPr>
-              <a:t>Connect the concept to public health decisions, safeguards, documentation, or implementation work.</a:t>
+              <a:t>Identify what could go wrong, who could be affected, what safeguards are needed, and what evidence should be reviewed before use expands.</a:t>
             </a:r>
             <a:endParaRPr lang="en-US" sz="1550" dirty="0"/>
           </a:p>
@@ -7553,8 +8388,8 @@
         </p:nvSpPr>
         <p:spPr>
           <a:xfrm>
-            <a:off x="9966960" y="6537960"/>
-            <a:ext cx="1645920" cy="201168"/>
+            <a:off x="9646920" y="6537960"/>
+            <a:ext cx="1965960" cy="201168"/>
           </a:xfrm>
           <a:prstGeom prst="rect">
             <a:avLst/>
@@ -7578,7 +8413,7 @@
                 <a:ea typeface="Aptos" pitchFamily="34" charset="-122"/>
                 <a:cs typeface="Aptos" pitchFamily="34" charset="-120"/>
               </a:rPr>
-              <a:t>Â© Paula Soper</a:t>
+              <a:t>Copyright Paula Soper</a:t>
             </a:r>
             <a:endParaRPr lang="en-US" sz="800" dirty="0"/>
           </a:p>
@@ -7625,77 +8460,13 @@
       </p:sp>
       <p:sp>
         <p:nvSpPr>
-          <p:cNvPr id="8" name="Shape 6"/>
+          <p:cNvPr id="8" name="Text 6"/>
           <p:cNvSpPr/>
           <p:nvPr/>
         </p:nvSpPr>
         <p:spPr>
           <a:xfrm>
             <a:off x="640080" y="658368"/>
-            <a:ext cx="420624" cy="420624"/>
-          </a:xfrm>
-          <a:prstGeom prst="ellipse">
-            <a:avLst/>
-          </a:prstGeom>
-          <a:solidFill>
-            <a:srgbClr val="0068B7"/>
-          </a:solidFill>
-          <a:ln w="12700">
-            <a:solidFill>
-              <a:srgbClr val="0068B7"/>
-            </a:solidFill>
-            <a:prstDash val="solid"/>
-          </a:ln>
-        </p:spPr>
-      </p:sp>
-      <p:sp>
-        <p:nvSpPr>
-          <p:cNvPr id="9" name="Text 7"/>
-          <p:cNvSpPr/>
-          <p:nvPr/>
-        </p:nvSpPr>
-        <p:spPr>
-          <a:xfrm>
-            <a:off x="640080" y="731520"/>
-            <a:ext cx="420624" cy="164592"/>
-          </a:xfrm>
-          <a:prstGeom prst="rect">
-            <a:avLst/>
-          </a:prstGeom>
-          <a:noFill/>
-          <a:ln/>
-        </p:spPr>
-        <p:txBody>
-          <a:bodyPr wrap="square" lIns="0" tIns="0" rIns="0" bIns="0" rtlCol="0" anchor="ctr"/>
-          <a:lstStyle/>
-          <a:p>
-            <a:pPr algn="ctr" indent="0" marL="0">
-              <a:buNone/>
-            </a:pPr>
-            <a:r>
-              <a:rPr lang="en-US" sz="1100" b="1" dirty="0">
-                <a:solidFill>
-                  <a:srgbClr val="FFFFFF"/>
-                </a:solidFill>
-                <a:latin typeface="Aptos" pitchFamily="34" charset="0"/>
-                <a:ea typeface="Aptos" pitchFamily="34" charset="-122"/>
-                <a:cs typeface="Aptos" pitchFamily="34" charset="-120"/>
-              </a:rPr>
-              <a:t>9</a:t>
-            </a:r>
-            <a:endParaRPr lang="en-US" sz="1100" dirty="0"/>
-          </a:p>
-        </p:txBody>
-      </p:sp>
-      <p:sp>
-        <p:nvSpPr>
-          <p:cNvPr id="10" name="Text 8"/>
-          <p:cNvSpPr/>
-          <p:nvPr/>
-        </p:nvSpPr>
-        <p:spPr>
-          <a:xfrm>
-            <a:off x="640080" y="621792"/>
             <a:ext cx="10881360" cy="713232"/>
           </a:xfrm>
           <a:prstGeom prst="rect">
@@ -7730,14 +8501,14 @@
       </p:sp>
       <p:sp>
         <p:nvSpPr>
-          <p:cNvPr id="11" name="Text 9"/>
+          <p:cNvPr id="9" name="Text 7"/>
           <p:cNvSpPr/>
           <p:nvPr/>
         </p:nvSpPr>
         <p:spPr>
           <a:xfrm>
             <a:off x="868680" y="1508760"/>
-            <a:ext cx="6537960" cy="4160520"/>
+            <a:ext cx="6309360" cy="4160520"/>
           </a:xfrm>
           <a:prstGeom prst="rect">
             <a:avLst/>
@@ -7796,18 +8567,18 @@
       </p:sp>
       <p:sp>
         <p:nvSpPr>
-          <p:cNvPr id="12" name="Shape 10"/>
-          <p:cNvSpPr/>
-          <p:nvPr/>
-        </p:nvSpPr>
-        <p:spPr>
-          <a:xfrm>
-            <a:off x="7909560" y="1417320"/>
-            <a:ext cx="3154680" cy="1828800"/>
+          <p:cNvPr id="10" name="Shape 8"/>
+          <p:cNvSpPr/>
+          <p:nvPr/>
+        </p:nvSpPr>
+        <p:spPr>
+          <a:xfrm>
+            <a:off x="7635240" y="1325880"/>
+            <a:ext cx="3474720" cy="1325880"/>
           </a:xfrm>
           <a:prstGeom prst="roundRect">
             <a:avLst>
-              <a:gd name="adj" fmla="val 6000"/>
+              <a:gd name="adj" fmla="val 8276"/>
             </a:avLst>
           </a:prstGeom>
           <a:solidFill>
@@ -7823,14 +8594,14 @@
       </p:sp>
       <p:sp>
         <p:nvSpPr>
-          <p:cNvPr id="13" name="Text 11"/>
-          <p:cNvSpPr/>
-          <p:nvPr/>
-        </p:nvSpPr>
-        <p:spPr>
-          <a:xfrm>
-            <a:off x="8074152" y="1563624"/>
-            <a:ext cx="2825496" cy="256032"/>
+          <p:cNvPr id="11" name="Text 9"/>
+          <p:cNvSpPr/>
+          <p:nvPr/>
+        </p:nvSpPr>
+        <p:spPr>
+          <a:xfrm>
+            <a:off x="7799832" y="1472184"/>
+            <a:ext cx="3145536" cy="256032"/>
           </a:xfrm>
           <a:prstGeom prst="rect">
             <a:avLst/>
@@ -7854,7 +8625,7 @@
                 <a:ea typeface="Aptos" pitchFamily="34" charset="-122"/>
                 <a:cs typeface="Aptos" pitchFamily="34" charset="-120"/>
               </a:rPr>
-              <a:t>Key idea</a:t>
+              <a:t>Risk check</a:t>
             </a:r>
             <a:endParaRPr lang="en-US" sz="1300" dirty="0"/>
           </a:p>
@@ -7862,14 +8633,14 @@
       </p:sp>
       <p:sp>
         <p:nvSpPr>
-          <p:cNvPr id="14" name="Text 12"/>
-          <p:cNvSpPr/>
-          <p:nvPr/>
-        </p:nvSpPr>
-        <p:spPr>
-          <a:xfrm>
-            <a:off x="8074152" y="1920240"/>
-            <a:ext cx="2825496" cy="1188720"/>
+          <p:cNvPr id="12" name="Text 10"/>
+          <p:cNvSpPr/>
+          <p:nvPr/>
+        </p:nvSpPr>
+        <p:spPr>
+          <a:xfrm>
+            <a:off x="7799832" y="1828800"/>
+            <a:ext cx="3145536" cy="685800"/>
           </a:xfrm>
           <a:prstGeom prst="rect">
             <a:avLst/>
@@ -7903,18 +8674,171 @@
       </p:sp>
       <p:sp>
         <p:nvSpPr>
-          <p:cNvPr id="15" name="Shape 13"/>
-          <p:cNvSpPr/>
-          <p:nvPr/>
-        </p:nvSpPr>
-        <p:spPr>
-          <a:xfrm>
-            <a:off x="7909560" y="3520440"/>
-            <a:ext cx="3154680" cy="1737360"/>
+          <p:cNvPr id="13" name="Shape 11"/>
+          <p:cNvSpPr/>
+          <p:nvPr/>
+        </p:nvSpPr>
+        <p:spPr>
+          <a:xfrm>
+            <a:off x="7635240" y="2788920"/>
+            <a:ext cx="3474720" cy="1536192"/>
           </a:xfrm>
           <a:prstGeom prst="roundRect">
             <a:avLst>
-              <a:gd name="adj" fmla="val 6316"/>
+              <a:gd name="adj" fmla="val 7143"/>
+            </a:avLst>
+          </a:prstGeom>
+          <a:solidFill>
+            <a:srgbClr val="FFFFFF">
+              <a:alpha val="88000"/>
+            </a:srgbClr>
+          </a:solidFill>
+          <a:ln w="12700">
+            <a:solidFill>
+              <a:srgbClr val="D6E8F2"/>
+            </a:solidFill>
+            <a:prstDash val="solid"/>
+          </a:ln>
+        </p:spPr>
+      </p:sp>
+      <p:sp>
+        <p:nvSpPr>
+          <p:cNvPr id="14" name="Shape 12"/>
+          <p:cNvSpPr/>
+          <p:nvPr/>
+        </p:nvSpPr>
+        <p:spPr>
+          <a:xfrm>
+            <a:off x="8046720" y="3108960"/>
+            <a:ext cx="2651760" cy="896112"/>
+          </a:xfrm>
+          <a:prstGeom prst="arc">
+            <a:avLst/>
+          </a:prstGeom>
+          <a:noFill/>
+          <a:ln w="25400">
+            <a:solidFill>
+              <a:srgbClr val="0068B7"/>
+            </a:solidFill>
+            <a:prstDash val="solid"/>
+          </a:ln>
+        </p:spPr>
+      </p:sp>
+      <p:sp>
+        <p:nvSpPr>
+          <p:cNvPr id="15" name="Text 13"/>
+          <p:cNvSpPr/>
+          <p:nvPr/>
+        </p:nvSpPr>
+        <p:spPr>
+          <a:xfrm>
+            <a:off x="7909560" y="3099816"/>
+            <a:ext cx="2926080" cy="256032"/>
+          </a:xfrm>
+          <a:prstGeom prst="rect">
+            <a:avLst/>
+          </a:prstGeom>
+          <a:noFill/>
+          <a:ln/>
+        </p:spPr>
+        <p:txBody>
+          <a:bodyPr wrap="square" lIns="0" tIns="0" rIns="0" bIns="0" rtlCol="0" anchor="ctr"/>
+          <a:lstStyle/>
+          <a:p>
+            <a:pPr algn="ctr" indent="0" marL="0">
+              <a:buNone/>
+            </a:pPr>
+            <a:r>
+              <a:rPr lang="en-US" sz="1500" b="1" dirty="0">
+                <a:solidFill>
+                  <a:srgbClr val="003A63"/>
+                </a:solidFill>
+                <a:latin typeface="Aptos" pitchFamily="34" charset="0"/>
+                <a:ea typeface="Aptos" pitchFamily="34" charset="-122"/>
+                <a:cs typeface="Aptos" pitchFamily="34" charset="-120"/>
+              </a:rPr>
+              <a:t>Risk</a:t>
+            </a:r>
+            <a:endParaRPr lang="en-US" sz="1500" dirty="0"/>
+          </a:p>
+        </p:txBody>
+      </p:sp>
+      <p:sp>
+        <p:nvSpPr>
+          <p:cNvPr id="16" name="Shape 14"/>
+          <p:cNvSpPr/>
+          <p:nvPr/>
+        </p:nvSpPr>
+        <p:spPr>
+          <a:xfrm>
+            <a:off x="8366760" y="3639312"/>
+            <a:ext cx="2011680" cy="0"/>
+          </a:xfrm>
+          <a:prstGeom prst="line">
+            <a:avLst/>
+          </a:prstGeom>
+          <a:noFill/>
+          <a:ln w="63500">
+            <a:solidFill>
+              <a:srgbClr val="2F8A28"/>
+            </a:solidFill>
+            <a:prstDash val="solid"/>
+          </a:ln>
+        </p:spPr>
+      </p:sp>
+      <p:sp>
+        <p:nvSpPr>
+          <p:cNvPr id="17" name="Text 15"/>
+          <p:cNvSpPr/>
+          <p:nvPr/>
+        </p:nvSpPr>
+        <p:spPr>
+          <a:xfrm>
+            <a:off x="7909560" y="3849624"/>
+            <a:ext cx="2926080" cy="164592"/>
+          </a:xfrm>
+          <a:prstGeom prst="rect">
+            <a:avLst/>
+          </a:prstGeom>
+          <a:noFill/>
+          <a:ln/>
+        </p:spPr>
+        <p:txBody>
+          <a:bodyPr wrap="square" lIns="0" tIns="0" rIns="0" bIns="0" rtlCol="0" anchor="ctr"/>
+          <a:lstStyle/>
+          <a:p>
+            <a:pPr algn="ctr" indent="0" marL="0">
+              <a:buNone/>
+            </a:pPr>
+            <a:r>
+              <a:rPr lang="en-US" sz="900" dirty="0">
+                <a:solidFill>
+                  <a:srgbClr val="003A63"/>
+                </a:solidFill>
+                <a:latin typeface="Aptos" pitchFamily="34" charset="0"/>
+                <a:ea typeface="Aptos" pitchFamily="34" charset="-122"/>
+                <a:cs typeface="Aptos" pitchFamily="34" charset="-120"/>
+              </a:rPr>
+              <a:t>Human review</a:t>
+            </a:r>
+            <a:endParaRPr lang="en-US" sz="900" dirty="0"/>
+          </a:p>
+        </p:txBody>
+      </p:sp>
+      <p:sp>
+        <p:nvSpPr>
+          <p:cNvPr id="18" name="Shape 16"/>
+          <p:cNvSpPr/>
+          <p:nvPr/>
+        </p:nvSpPr>
+        <p:spPr>
+          <a:xfrm>
+            <a:off x="7635240" y="4498848"/>
+            <a:ext cx="3474720" cy="1143000"/>
+          </a:xfrm>
+          <a:prstGeom prst="roundRect">
+            <a:avLst>
+              <a:gd name="adj" fmla="val 9600"/>
             </a:avLst>
           </a:prstGeom>
           <a:solidFill>
@@ -7930,14 +8854,14 @@
       </p:sp>
       <p:sp>
         <p:nvSpPr>
-          <p:cNvPr id="16" name="Text 14"/>
-          <p:cNvSpPr/>
-          <p:nvPr/>
-        </p:nvSpPr>
-        <p:spPr>
-          <a:xfrm>
-            <a:off x="8074152" y="3666744"/>
-            <a:ext cx="2825496" cy="256032"/>
+          <p:cNvPr id="19" name="Text 17"/>
+          <p:cNvSpPr/>
+          <p:nvPr/>
+        </p:nvSpPr>
+        <p:spPr>
+          <a:xfrm>
+            <a:off x="7799832" y="4645152"/>
+            <a:ext cx="3145536" cy="256032"/>
           </a:xfrm>
           <a:prstGeom prst="rect">
             <a:avLst/>
@@ -7961,7 +8885,7 @@
                 <a:ea typeface="Aptos" pitchFamily="34" charset="-122"/>
                 <a:cs typeface="Aptos" pitchFamily="34" charset="-120"/>
               </a:rPr>
-              <a:t>Use this for</a:t>
+              <a:t>Safeguard to plan</a:t>
             </a:r>
             <a:endParaRPr lang="en-US" sz="1300" dirty="0"/>
           </a:p>
@@ -7969,14 +8893,14 @@
       </p:sp>
       <p:sp>
         <p:nvSpPr>
-          <p:cNvPr id="17" name="Text 15"/>
-          <p:cNvSpPr/>
-          <p:nvPr/>
-        </p:nvSpPr>
-        <p:spPr>
-          <a:xfrm>
-            <a:off x="8074152" y="4023360"/>
-            <a:ext cx="2825496" cy="1097280"/>
+          <p:cNvPr id="20" name="Text 18"/>
+          <p:cNvSpPr/>
+          <p:nvPr/>
+        </p:nvSpPr>
+        <p:spPr>
+          <a:xfrm>
+            <a:off x="7799832" y="5001768"/>
+            <a:ext cx="3145536" cy="502920"/>
           </a:xfrm>
           <a:prstGeom prst="rect">
             <a:avLst/>
@@ -8002,7 +8926,7 @@
                 <a:ea typeface="Aptos" pitchFamily="34" charset="-122"/>
                 <a:cs typeface="Aptos" pitchFamily="34" charset="-120"/>
               </a:rPr>
-              <a:t>Connect the concept to public health decisions, safeguards, documentation, or implementation work.</a:t>
+              <a:t>Identify what could go wrong, who could be affected, what safeguards are needed, and what evidence should be reviewed before use expands.</a:t>
             </a:r>
             <a:endParaRPr lang="en-US" sz="1550" dirty="0"/>
           </a:p>
@@ -8176,8 +9100,8 @@
         </p:nvSpPr>
         <p:spPr>
           <a:xfrm>
-            <a:off x="9966960" y="6537960"/>
-            <a:ext cx="1645920" cy="201168"/>
+            <a:off x="9646920" y="6537960"/>
+            <a:ext cx="1965960" cy="201168"/>
           </a:xfrm>
           <a:prstGeom prst="rect">
             <a:avLst/>
@@ -8201,7 +9125,7 @@
                 <a:ea typeface="Aptos" pitchFamily="34" charset="-122"/>
                 <a:cs typeface="Aptos" pitchFamily="34" charset="-120"/>
               </a:rPr>
-              <a:t>Â© Paula Soper</a:t>
+              <a:t>Copyright Paula Soper</a:t>
             </a:r>
             <a:endParaRPr lang="en-US" sz="800" dirty="0"/>
           </a:p>
@@ -8248,77 +9172,13 @@
       </p:sp>
       <p:sp>
         <p:nvSpPr>
-          <p:cNvPr id="8" name="Shape 6"/>
+          <p:cNvPr id="8" name="Text 6"/>
           <p:cNvSpPr/>
           <p:nvPr/>
         </p:nvSpPr>
         <p:spPr>
           <a:xfrm>
             <a:off x="640080" y="658368"/>
-            <a:ext cx="420624" cy="420624"/>
-          </a:xfrm>
-          <a:prstGeom prst="ellipse">
-            <a:avLst/>
-          </a:prstGeom>
-          <a:solidFill>
-            <a:srgbClr val="0068B7"/>
-          </a:solidFill>
-          <a:ln w="12700">
-            <a:solidFill>
-              <a:srgbClr val="0068B7"/>
-            </a:solidFill>
-            <a:prstDash val="solid"/>
-          </a:ln>
-        </p:spPr>
-      </p:sp>
-      <p:sp>
-        <p:nvSpPr>
-          <p:cNvPr id="9" name="Text 7"/>
-          <p:cNvSpPr/>
-          <p:nvPr/>
-        </p:nvSpPr>
-        <p:spPr>
-          <a:xfrm>
-            <a:off x="640080" y="731520"/>
-            <a:ext cx="420624" cy="164592"/>
-          </a:xfrm>
-          <a:prstGeom prst="rect">
-            <a:avLst/>
-          </a:prstGeom>
-          <a:noFill/>
-          <a:ln/>
-        </p:spPr>
-        <p:txBody>
-          <a:bodyPr wrap="square" lIns="0" tIns="0" rIns="0" bIns="0" rtlCol="0" anchor="ctr"/>
-          <a:lstStyle/>
-          <a:p>
-            <a:pPr algn="ctr" indent="0" marL="0">
-              <a:buNone/>
-            </a:pPr>
-            <a:r>
-              <a:rPr lang="en-US" sz="1100" b="1" dirty="0">
-                <a:solidFill>
-                  <a:srgbClr val="FFFFFF"/>
-                </a:solidFill>
-                <a:latin typeface="Aptos" pitchFamily="34" charset="0"/>
-                <a:ea typeface="Aptos" pitchFamily="34" charset="-122"/>
-                <a:cs typeface="Aptos" pitchFamily="34" charset="-120"/>
-              </a:rPr>
-              <a:t>10</a:t>
-            </a:r>
-            <a:endParaRPr lang="en-US" sz="1100" dirty="0"/>
-          </a:p>
-        </p:txBody>
-      </p:sp>
-      <p:sp>
-        <p:nvSpPr>
-          <p:cNvPr id="10" name="Text 8"/>
-          <p:cNvSpPr/>
-          <p:nvPr/>
-        </p:nvSpPr>
-        <p:spPr>
-          <a:xfrm>
-            <a:off x="640080" y="621792"/>
             <a:ext cx="10881360" cy="713232"/>
           </a:xfrm>
           <a:prstGeom prst="rect">
@@ -8353,14 +9213,14 @@
       </p:sp>
       <p:sp>
         <p:nvSpPr>
-          <p:cNvPr id="11" name="Text 9"/>
+          <p:cNvPr id="9" name="Text 7"/>
           <p:cNvSpPr/>
           <p:nvPr/>
         </p:nvSpPr>
         <p:spPr>
           <a:xfrm>
             <a:off x="868680" y="1508760"/>
-            <a:ext cx="6537960" cy="4160520"/>
+            <a:ext cx="6309360" cy="4160520"/>
           </a:xfrm>
           <a:prstGeom prst="rect">
             <a:avLst/>
@@ -8419,18 +9279,18 @@
       </p:sp>
       <p:sp>
         <p:nvSpPr>
-          <p:cNvPr id="12" name="Shape 10"/>
-          <p:cNvSpPr/>
-          <p:nvPr/>
-        </p:nvSpPr>
-        <p:spPr>
-          <a:xfrm>
-            <a:off x="7909560" y="1417320"/>
-            <a:ext cx="3154680" cy="1828800"/>
+          <p:cNvPr id="10" name="Shape 8"/>
+          <p:cNvSpPr/>
+          <p:nvPr/>
+        </p:nvSpPr>
+        <p:spPr>
+          <a:xfrm>
+            <a:off x="7635240" y="1325880"/>
+            <a:ext cx="3474720" cy="1325880"/>
           </a:xfrm>
           <a:prstGeom prst="roundRect">
             <a:avLst>
-              <a:gd name="adj" fmla="val 6000"/>
+              <a:gd name="adj" fmla="val 8276"/>
             </a:avLst>
           </a:prstGeom>
           <a:solidFill>
@@ -8446,14 +9306,14 @@
       </p:sp>
       <p:sp>
         <p:nvSpPr>
-          <p:cNvPr id="13" name="Text 11"/>
-          <p:cNvSpPr/>
-          <p:nvPr/>
-        </p:nvSpPr>
-        <p:spPr>
-          <a:xfrm>
-            <a:off x="8074152" y="1563624"/>
-            <a:ext cx="2825496" cy="256032"/>
+          <p:cNvPr id="11" name="Text 9"/>
+          <p:cNvSpPr/>
+          <p:nvPr/>
+        </p:nvSpPr>
+        <p:spPr>
+          <a:xfrm>
+            <a:off x="7799832" y="1472184"/>
+            <a:ext cx="3145536" cy="256032"/>
           </a:xfrm>
           <a:prstGeom prst="rect">
             <a:avLst/>
@@ -8477,7 +9337,7 @@
                 <a:ea typeface="Aptos" pitchFamily="34" charset="-122"/>
                 <a:cs typeface="Aptos" pitchFamily="34" charset="-120"/>
               </a:rPr>
-              <a:t>Key idea</a:t>
+              <a:t>Risk check</a:t>
             </a:r>
             <a:endParaRPr lang="en-US" sz="1300" dirty="0"/>
           </a:p>
@@ -8485,14 +9345,14 @@
       </p:sp>
       <p:sp>
         <p:nvSpPr>
-          <p:cNvPr id="14" name="Text 12"/>
-          <p:cNvSpPr/>
-          <p:nvPr/>
-        </p:nvSpPr>
-        <p:spPr>
-          <a:xfrm>
-            <a:off x="8074152" y="1920240"/>
-            <a:ext cx="2825496" cy="1188720"/>
+          <p:cNvPr id="12" name="Text 10"/>
+          <p:cNvSpPr/>
+          <p:nvPr/>
+        </p:nvSpPr>
+        <p:spPr>
+          <a:xfrm>
+            <a:off x="7799832" y="1828800"/>
+            <a:ext cx="3145536" cy="685800"/>
           </a:xfrm>
           <a:prstGeom prst="rect">
             <a:avLst/>
@@ -8526,18 +9386,171 @@
       </p:sp>
       <p:sp>
         <p:nvSpPr>
-          <p:cNvPr id="15" name="Shape 13"/>
-          <p:cNvSpPr/>
-          <p:nvPr/>
-        </p:nvSpPr>
-        <p:spPr>
-          <a:xfrm>
-            <a:off x="7909560" y="3520440"/>
-            <a:ext cx="3154680" cy="1737360"/>
+          <p:cNvPr id="13" name="Shape 11"/>
+          <p:cNvSpPr/>
+          <p:nvPr/>
+        </p:nvSpPr>
+        <p:spPr>
+          <a:xfrm>
+            <a:off x="7635240" y="2788920"/>
+            <a:ext cx="3474720" cy="1536192"/>
           </a:xfrm>
           <a:prstGeom prst="roundRect">
             <a:avLst>
-              <a:gd name="adj" fmla="val 6316"/>
+              <a:gd name="adj" fmla="val 7143"/>
+            </a:avLst>
+          </a:prstGeom>
+          <a:solidFill>
+            <a:srgbClr val="FFFFFF">
+              <a:alpha val="88000"/>
+            </a:srgbClr>
+          </a:solidFill>
+          <a:ln w="12700">
+            <a:solidFill>
+              <a:srgbClr val="D6E8F2"/>
+            </a:solidFill>
+            <a:prstDash val="solid"/>
+          </a:ln>
+        </p:spPr>
+      </p:sp>
+      <p:sp>
+        <p:nvSpPr>
+          <p:cNvPr id="14" name="Shape 12"/>
+          <p:cNvSpPr/>
+          <p:nvPr/>
+        </p:nvSpPr>
+        <p:spPr>
+          <a:xfrm>
+            <a:off x="8046720" y="3108960"/>
+            <a:ext cx="2651760" cy="896112"/>
+          </a:xfrm>
+          <a:prstGeom prst="arc">
+            <a:avLst/>
+          </a:prstGeom>
+          <a:noFill/>
+          <a:ln w="25400">
+            <a:solidFill>
+              <a:srgbClr val="0068B7"/>
+            </a:solidFill>
+            <a:prstDash val="solid"/>
+          </a:ln>
+        </p:spPr>
+      </p:sp>
+      <p:sp>
+        <p:nvSpPr>
+          <p:cNvPr id="15" name="Text 13"/>
+          <p:cNvSpPr/>
+          <p:nvPr/>
+        </p:nvSpPr>
+        <p:spPr>
+          <a:xfrm>
+            <a:off x="7909560" y="3099816"/>
+            <a:ext cx="2926080" cy="256032"/>
+          </a:xfrm>
+          <a:prstGeom prst="rect">
+            <a:avLst/>
+          </a:prstGeom>
+          <a:noFill/>
+          <a:ln/>
+        </p:spPr>
+        <p:txBody>
+          <a:bodyPr wrap="square" lIns="0" tIns="0" rIns="0" bIns="0" rtlCol="0" anchor="ctr"/>
+          <a:lstStyle/>
+          <a:p>
+            <a:pPr algn="ctr" indent="0" marL="0">
+              <a:buNone/>
+            </a:pPr>
+            <a:r>
+              <a:rPr lang="en-US" sz="1500" b="1" dirty="0">
+                <a:solidFill>
+                  <a:srgbClr val="003A63"/>
+                </a:solidFill>
+                <a:latin typeface="Aptos" pitchFamily="34" charset="0"/>
+                <a:ea typeface="Aptos" pitchFamily="34" charset="-122"/>
+                <a:cs typeface="Aptos" pitchFamily="34" charset="-120"/>
+              </a:rPr>
+              <a:t>Risk</a:t>
+            </a:r>
+            <a:endParaRPr lang="en-US" sz="1500" dirty="0"/>
+          </a:p>
+        </p:txBody>
+      </p:sp>
+      <p:sp>
+        <p:nvSpPr>
+          <p:cNvPr id="16" name="Shape 14"/>
+          <p:cNvSpPr/>
+          <p:nvPr/>
+        </p:nvSpPr>
+        <p:spPr>
+          <a:xfrm>
+            <a:off x="8366760" y="3639312"/>
+            <a:ext cx="2011680" cy="0"/>
+          </a:xfrm>
+          <a:prstGeom prst="line">
+            <a:avLst/>
+          </a:prstGeom>
+          <a:noFill/>
+          <a:ln w="63500">
+            <a:solidFill>
+              <a:srgbClr val="2F8A28"/>
+            </a:solidFill>
+            <a:prstDash val="solid"/>
+          </a:ln>
+        </p:spPr>
+      </p:sp>
+      <p:sp>
+        <p:nvSpPr>
+          <p:cNvPr id="17" name="Text 15"/>
+          <p:cNvSpPr/>
+          <p:nvPr/>
+        </p:nvSpPr>
+        <p:spPr>
+          <a:xfrm>
+            <a:off x="7909560" y="3849624"/>
+            <a:ext cx="2926080" cy="164592"/>
+          </a:xfrm>
+          <a:prstGeom prst="rect">
+            <a:avLst/>
+          </a:prstGeom>
+          <a:noFill/>
+          <a:ln/>
+        </p:spPr>
+        <p:txBody>
+          <a:bodyPr wrap="square" lIns="0" tIns="0" rIns="0" bIns="0" rtlCol="0" anchor="ctr"/>
+          <a:lstStyle/>
+          <a:p>
+            <a:pPr algn="ctr" indent="0" marL="0">
+              <a:buNone/>
+            </a:pPr>
+            <a:r>
+              <a:rPr lang="en-US" sz="900" dirty="0">
+                <a:solidFill>
+                  <a:srgbClr val="003A63"/>
+                </a:solidFill>
+                <a:latin typeface="Aptos" pitchFamily="34" charset="0"/>
+                <a:ea typeface="Aptos" pitchFamily="34" charset="-122"/>
+                <a:cs typeface="Aptos" pitchFamily="34" charset="-120"/>
+              </a:rPr>
+              <a:t>Human review</a:t>
+            </a:r>
+            <a:endParaRPr lang="en-US" sz="900" dirty="0"/>
+          </a:p>
+        </p:txBody>
+      </p:sp>
+      <p:sp>
+        <p:nvSpPr>
+          <p:cNvPr id="18" name="Shape 16"/>
+          <p:cNvSpPr/>
+          <p:nvPr/>
+        </p:nvSpPr>
+        <p:spPr>
+          <a:xfrm>
+            <a:off x="7635240" y="4498848"/>
+            <a:ext cx="3474720" cy="1143000"/>
+          </a:xfrm>
+          <a:prstGeom prst="roundRect">
+            <a:avLst>
+              <a:gd name="adj" fmla="val 9600"/>
             </a:avLst>
           </a:prstGeom>
           <a:solidFill>
@@ -8553,14 +9566,14 @@
       </p:sp>
       <p:sp>
         <p:nvSpPr>
-          <p:cNvPr id="16" name="Text 14"/>
-          <p:cNvSpPr/>
-          <p:nvPr/>
-        </p:nvSpPr>
-        <p:spPr>
-          <a:xfrm>
-            <a:off x="8074152" y="3666744"/>
-            <a:ext cx="2825496" cy="256032"/>
+          <p:cNvPr id="19" name="Text 17"/>
+          <p:cNvSpPr/>
+          <p:nvPr/>
+        </p:nvSpPr>
+        <p:spPr>
+          <a:xfrm>
+            <a:off x="7799832" y="4645152"/>
+            <a:ext cx="3145536" cy="256032"/>
           </a:xfrm>
           <a:prstGeom prst="rect">
             <a:avLst/>
@@ -8584,7 +9597,7 @@
                 <a:ea typeface="Aptos" pitchFamily="34" charset="-122"/>
                 <a:cs typeface="Aptos" pitchFamily="34" charset="-120"/>
               </a:rPr>
-              <a:t>Use this for</a:t>
+              <a:t>Safeguard to plan</a:t>
             </a:r>
             <a:endParaRPr lang="en-US" sz="1300" dirty="0"/>
           </a:p>
@@ -8592,14 +9605,14 @@
       </p:sp>
       <p:sp>
         <p:nvSpPr>
-          <p:cNvPr id="17" name="Text 15"/>
-          <p:cNvSpPr/>
-          <p:nvPr/>
-        </p:nvSpPr>
-        <p:spPr>
-          <a:xfrm>
-            <a:off x="8074152" y="4023360"/>
-            <a:ext cx="2825496" cy="1097280"/>
+          <p:cNvPr id="20" name="Text 18"/>
+          <p:cNvSpPr/>
+          <p:nvPr/>
+        </p:nvSpPr>
+        <p:spPr>
+          <a:xfrm>
+            <a:off x="7799832" y="5001768"/>
+            <a:ext cx="3145536" cy="502920"/>
           </a:xfrm>
           <a:prstGeom prst="rect">
             <a:avLst/>
@@ -8625,7 +9638,7 @@
                 <a:ea typeface="Aptos" pitchFamily="34" charset="-122"/>
                 <a:cs typeface="Aptos" pitchFamily="34" charset="-120"/>
               </a:rPr>
-              <a:t>Connect the concept to public health decisions, safeguards, documentation, or implementation work.</a:t>
+              <a:t>Identify what could go wrong, who could be affected, what safeguards are needed, and what evidence should be reviewed before use expands.</a:t>
             </a:r>
             <a:endParaRPr lang="en-US" sz="1550" dirty="0"/>
           </a:p>
@@ -8799,8 +9812,8 @@
         </p:nvSpPr>
         <p:spPr>
           <a:xfrm>
-            <a:off x="9966960" y="6537960"/>
-            <a:ext cx="1645920" cy="201168"/>
+            <a:off x="9646920" y="6537960"/>
+            <a:ext cx="1965960" cy="201168"/>
           </a:xfrm>
           <a:prstGeom prst="rect">
             <a:avLst/>
@@ -8824,7 +9837,7 @@
                 <a:ea typeface="Aptos" pitchFamily="34" charset="-122"/>
                 <a:cs typeface="Aptos" pitchFamily="34" charset="-120"/>
               </a:rPr>
-              <a:t>Â© Paula Soper</a:t>
+              <a:t>Copyright Paula Soper</a:t>
             </a:r>
             <a:endParaRPr lang="en-US" sz="800" dirty="0"/>
           </a:p>
@@ -8919,7 +9932,7 @@
         <p:spPr>
           <a:xfrm>
             <a:off x="868680" y="1508760"/>
-            <a:ext cx="6537960" cy="4160520"/>
+            <a:ext cx="6309360" cy="4160520"/>
           </a:xfrm>
           <a:prstGeom prst="rect">
             <a:avLst/>
@@ -8970,12 +9983,12 @@
         </p:nvSpPr>
         <p:spPr>
           <a:xfrm>
-            <a:off x="7909560" y="1417320"/>
-            <a:ext cx="3154680" cy="1828800"/>
+            <a:off x="7635240" y="1325880"/>
+            <a:ext cx="3474720" cy="1325880"/>
           </a:xfrm>
           <a:prstGeom prst="roundRect">
             <a:avLst>
-              <a:gd name="adj" fmla="val 6000"/>
+              <a:gd name="adj" fmla="val 8276"/>
             </a:avLst>
           </a:prstGeom>
           <a:solidFill>
@@ -8997,8 +10010,8 @@
         </p:nvSpPr>
         <p:spPr>
           <a:xfrm>
-            <a:off x="8074152" y="1563624"/>
-            <a:ext cx="2825496" cy="256032"/>
+            <a:off x="7799832" y="1472184"/>
+            <a:ext cx="3145536" cy="256032"/>
           </a:xfrm>
           <a:prstGeom prst="rect">
             <a:avLst/>
@@ -9022,7 +10035,7 @@
                 <a:ea typeface="Aptos" pitchFamily="34" charset="-122"/>
                 <a:cs typeface="Aptos" pitchFamily="34" charset="-120"/>
               </a:rPr>
-              <a:t>Key idea</a:t>
+              <a:t>Risk check</a:t>
             </a:r>
             <a:endParaRPr lang="en-US" sz="1300" dirty="0"/>
           </a:p>
@@ -9036,8 +10049,8 @@
         </p:nvSpPr>
         <p:spPr>
           <a:xfrm>
-            <a:off x="8074152" y="1920240"/>
-            <a:ext cx="2825496" cy="1188720"/>
+            <a:off x="7799832" y="1828800"/>
+            <a:ext cx="3145536" cy="685800"/>
           </a:xfrm>
           <a:prstGeom prst="rect">
             <a:avLst/>
@@ -9077,12 +10090,165 @@
         </p:nvSpPr>
         <p:spPr>
           <a:xfrm>
-            <a:off x="7909560" y="3520440"/>
-            <a:ext cx="3154680" cy="1737360"/>
+            <a:off x="7635240" y="2788920"/>
+            <a:ext cx="3474720" cy="1536192"/>
           </a:xfrm>
           <a:prstGeom prst="roundRect">
             <a:avLst>
-              <a:gd name="adj" fmla="val 6316"/>
+              <a:gd name="adj" fmla="val 7143"/>
+            </a:avLst>
+          </a:prstGeom>
+          <a:solidFill>
+            <a:srgbClr val="FFFFFF">
+              <a:alpha val="88000"/>
+            </a:srgbClr>
+          </a:solidFill>
+          <a:ln w="12700">
+            <a:solidFill>
+              <a:srgbClr val="D6E8F2"/>
+            </a:solidFill>
+            <a:prstDash val="solid"/>
+          </a:ln>
+        </p:spPr>
+      </p:sp>
+      <p:sp>
+        <p:nvSpPr>
+          <p:cNvPr id="14" name="Shape 12"/>
+          <p:cNvSpPr/>
+          <p:nvPr/>
+        </p:nvSpPr>
+        <p:spPr>
+          <a:xfrm>
+            <a:off x="8046720" y="3108960"/>
+            <a:ext cx="2651760" cy="896112"/>
+          </a:xfrm>
+          <a:prstGeom prst="arc">
+            <a:avLst/>
+          </a:prstGeom>
+          <a:noFill/>
+          <a:ln w="25400">
+            <a:solidFill>
+              <a:srgbClr val="0068B7"/>
+            </a:solidFill>
+            <a:prstDash val="solid"/>
+          </a:ln>
+        </p:spPr>
+      </p:sp>
+      <p:sp>
+        <p:nvSpPr>
+          <p:cNvPr id="15" name="Text 13"/>
+          <p:cNvSpPr/>
+          <p:nvPr/>
+        </p:nvSpPr>
+        <p:spPr>
+          <a:xfrm>
+            <a:off x="7909560" y="3099816"/>
+            <a:ext cx="2926080" cy="256032"/>
+          </a:xfrm>
+          <a:prstGeom prst="rect">
+            <a:avLst/>
+          </a:prstGeom>
+          <a:noFill/>
+          <a:ln/>
+        </p:spPr>
+        <p:txBody>
+          <a:bodyPr wrap="square" lIns="0" tIns="0" rIns="0" bIns="0" rtlCol="0" anchor="ctr"/>
+          <a:lstStyle/>
+          <a:p>
+            <a:pPr algn="ctr" indent="0" marL="0">
+              <a:buNone/>
+            </a:pPr>
+            <a:r>
+              <a:rPr lang="en-US" sz="1500" b="1" dirty="0">
+                <a:solidFill>
+                  <a:srgbClr val="003A63"/>
+                </a:solidFill>
+                <a:latin typeface="Aptos" pitchFamily="34" charset="0"/>
+                <a:ea typeface="Aptos" pitchFamily="34" charset="-122"/>
+                <a:cs typeface="Aptos" pitchFamily="34" charset="-120"/>
+              </a:rPr>
+              <a:t>Risk</a:t>
+            </a:r>
+            <a:endParaRPr lang="en-US" sz="1500" dirty="0"/>
+          </a:p>
+        </p:txBody>
+      </p:sp>
+      <p:sp>
+        <p:nvSpPr>
+          <p:cNvPr id="16" name="Shape 14"/>
+          <p:cNvSpPr/>
+          <p:nvPr/>
+        </p:nvSpPr>
+        <p:spPr>
+          <a:xfrm>
+            <a:off x="8366760" y="3639312"/>
+            <a:ext cx="2011680" cy="0"/>
+          </a:xfrm>
+          <a:prstGeom prst="line">
+            <a:avLst/>
+          </a:prstGeom>
+          <a:noFill/>
+          <a:ln w="63500">
+            <a:solidFill>
+              <a:srgbClr val="2F8A28"/>
+            </a:solidFill>
+            <a:prstDash val="solid"/>
+          </a:ln>
+        </p:spPr>
+      </p:sp>
+      <p:sp>
+        <p:nvSpPr>
+          <p:cNvPr id="17" name="Text 15"/>
+          <p:cNvSpPr/>
+          <p:nvPr/>
+        </p:nvSpPr>
+        <p:spPr>
+          <a:xfrm>
+            <a:off x="7909560" y="3849624"/>
+            <a:ext cx="2926080" cy="164592"/>
+          </a:xfrm>
+          <a:prstGeom prst="rect">
+            <a:avLst/>
+          </a:prstGeom>
+          <a:noFill/>
+          <a:ln/>
+        </p:spPr>
+        <p:txBody>
+          <a:bodyPr wrap="square" lIns="0" tIns="0" rIns="0" bIns="0" rtlCol="0" anchor="ctr"/>
+          <a:lstStyle/>
+          <a:p>
+            <a:pPr algn="ctr" indent="0" marL="0">
+              <a:buNone/>
+            </a:pPr>
+            <a:r>
+              <a:rPr lang="en-US" sz="900" dirty="0">
+                <a:solidFill>
+                  <a:srgbClr val="003A63"/>
+                </a:solidFill>
+                <a:latin typeface="Aptos" pitchFamily="34" charset="0"/>
+                <a:ea typeface="Aptos" pitchFamily="34" charset="-122"/>
+                <a:cs typeface="Aptos" pitchFamily="34" charset="-120"/>
+              </a:rPr>
+              <a:t>Human review</a:t>
+            </a:r>
+            <a:endParaRPr lang="en-US" sz="900" dirty="0"/>
+          </a:p>
+        </p:txBody>
+      </p:sp>
+      <p:sp>
+        <p:nvSpPr>
+          <p:cNvPr id="18" name="Shape 16"/>
+          <p:cNvSpPr/>
+          <p:nvPr/>
+        </p:nvSpPr>
+        <p:spPr>
+          <a:xfrm>
+            <a:off x="7635240" y="4498848"/>
+            <a:ext cx="3474720" cy="1143000"/>
+          </a:xfrm>
+          <a:prstGeom prst="roundRect">
+            <a:avLst>
+              <a:gd name="adj" fmla="val 9600"/>
             </a:avLst>
           </a:prstGeom>
           <a:solidFill>
@@ -9098,14 +10264,14 @@
       </p:sp>
       <p:sp>
         <p:nvSpPr>
-          <p:cNvPr id="14" name="Text 12"/>
-          <p:cNvSpPr/>
-          <p:nvPr/>
-        </p:nvSpPr>
-        <p:spPr>
-          <a:xfrm>
-            <a:off x="8074152" y="3666744"/>
-            <a:ext cx="2825496" cy="256032"/>
+          <p:cNvPr id="19" name="Text 17"/>
+          <p:cNvSpPr/>
+          <p:nvPr/>
+        </p:nvSpPr>
+        <p:spPr>
+          <a:xfrm>
+            <a:off x="7799832" y="4645152"/>
+            <a:ext cx="3145536" cy="256032"/>
           </a:xfrm>
           <a:prstGeom prst="rect">
             <a:avLst/>
@@ -9129,7 +10295,7 @@
                 <a:ea typeface="Aptos" pitchFamily="34" charset="-122"/>
                 <a:cs typeface="Aptos" pitchFamily="34" charset="-120"/>
               </a:rPr>
-              <a:t>Use this for</a:t>
+              <a:t>Safeguard to plan</a:t>
             </a:r>
             <a:endParaRPr lang="en-US" sz="1300" dirty="0"/>
           </a:p>
@@ -9137,14 +10303,14 @@
       </p:sp>
       <p:sp>
         <p:nvSpPr>
-          <p:cNvPr id="15" name="Text 13"/>
-          <p:cNvSpPr/>
-          <p:nvPr/>
-        </p:nvSpPr>
-        <p:spPr>
-          <a:xfrm>
-            <a:off x="8074152" y="4023360"/>
-            <a:ext cx="2825496" cy="1097280"/>
+          <p:cNvPr id="20" name="Text 18"/>
+          <p:cNvSpPr/>
+          <p:nvPr/>
+        </p:nvSpPr>
+        <p:spPr>
+          <a:xfrm>
+            <a:off x="7799832" y="5001768"/>
+            <a:ext cx="3145536" cy="502920"/>
           </a:xfrm>
           <a:prstGeom prst="rect">
             <a:avLst/>
@@ -9170,7 +10336,7 @@
                 <a:ea typeface="Aptos" pitchFamily="34" charset="-122"/>
                 <a:cs typeface="Aptos" pitchFamily="34" charset="-120"/>
               </a:rPr>
-              <a:t>Connect the concept to public health decisions, safeguards, documentation, or implementation work.</a:t>
+              <a:t>Identify what could go wrong, who could be affected, what safeguards are needed, and what evidence should be reviewed before use expands.</a:t>
             </a:r>
             <a:endParaRPr lang="en-US" sz="1550" dirty="0"/>
           </a:p>
@@ -9344,8 +10510,8 @@
         </p:nvSpPr>
         <p:spPr>
           <a:xfrm>
-            <a:off x="9966960" y="6537960"/>
-            <a:ext cx="1645920" cy="201168"/>
+            <a:off x="9646920" y="6537960"/>
+            <a:ext cx="1965960" cy="201168"/>
           </a:xfrm>
           <a:prstGeom prst="rect">
             <a:avLst/>
@@ -9369,7 +10535,7 @@
                 <a:ea typeface="Aptos" pitchFamily="34" charset="-122"/>
                 <a:cs typeface="Aptos" pitchFamily="34" charset="-120"/>
               </a:rPr>
-              <a:t>Â© Paula Soper</a:t>
+              <a:t>Copyright Paula Soper</a:t>
             </a:r>
             <a:endParaRPr lang="en-US" sz="800" dirty="0"/>
           </a:p>
@@ -9732,46 +10898,7 @@
       </p:sp>
       <p:sp>
         <p:nvSpPr>
-          <p:cNvPr id="15" name="Text 13"/>
-          <p:cNvSpPr/>
-          <p:nvPr/>
-        </p:nvSpPr>
-        <p:spPr>
-          <a:xfrm>
-            <a:off x="8695944" y="3941064"/>
-            <a:ext cx="201168" cy="256032"/>
-          </a:xfrm>
-          <a:prstGeom prst="rect">
-            <a:avLst/>
-          </a:prstGeom>
-          <a:noFill/>
-          <a:ln/>
-        </p:spPr>
-        <p:txBody>
-          <a:bodyPr wrap="square" lIns="0" tIns="0" rIns="0" bIns="0" rtlCol="0" anchor="ctr"/>
-          <a:lstStyle/>
-          <a:p>
-            <a:pPr algn="ctr" indent="0" marL="0">
-              <a:buNone/>
-            </a:pPr>
-            <a:r>
-              <a:rPr lang="en-US" sz="1800" b="1" dirty="0">
-                <a:solidFill>
-                  <a:srgbClr val="0068B7"/>
-                </a:solidFill>
-                <a:latin typeface="Aptos" pitchFamily="34" charset="0"/>
-                <a:ea typeface="Aptos" pitchFamily="34" charset="-122"/>
-                <a:cs typeface="Aptos" pitchFamily="34" charset="-120"/>
-              </a:rPr>
-              <a:t>â†’</a:t>
-            </a:r>
-            <a:endParaRPr lang="en-US" sz="1800" dirty="0"/>
-          </a:p>
-        </p:txBody>
-      </p:sp>
-      <p:sp>
-        <p:nvSpPr>
-          <p:cNvPr id="16" name="Shape 14"/>
+          <p:cNvPr id="15" name="Shape 13"/>
           <p:cNvSpPr/>
           <p:nvPr/>
         </p:nvSpPr>
@@ -9798,7 +10925,7 @@
       </p:sp>
       <p:sp>
         <p:nvSpPr>
-          <p:cNvPr id="17" name="Text 15"/>
+          <p:cNvPr id="16" name="Text 14"/>
           <p:cNvSpPr/>
           <p:nvPr/>
         </p:nvSpPr>
@@ -9839,46 +10966,7 @@
       </p:sp>
       <p:sp>
         <p:nvSpPr>
-          <p:cNvPr id="18" name="Text 16"/>
-          <p:cNvSpPr/>
-          <p:nvPr/>
-        </p:nvSpPr>
-        <p:spPr>
-          <a:xfrm>
-            <a:off x="9985248" y="3941064"/>
-            <a:ext cx="201168" cy="256032"/>
-          </a:xfrm>
-          <a:prstGeom prst="rect">
-            <a:avLst/>
-          </a:prstGeom>
-          <a:noFill/>
-          <a:ln/>
-        </p:spPr>
-        <p:txBody>
-          <a:bodyPr wrap="square" lIns="0" tIns="0" rIns="0" bIns="0" rtlCol="0" anchor="ctr"/>
-          <a:lstStyle/>
-          <a:p>
-            <a:pPr algn="ctr" indent="0" marL="0">
-              <a:buNone/>
-            </a:pPr>
-            <a:r>
-              <a:rPr lang="en-US" sz="1800" b="1" dirty="0">
-                <a:solidFill>
-                  <a:srgbClr val="0068B7"/>
-                </a:solidFill>
-                <a:latin typeface="Aptos" pitchFamily="34" charset="0"/>
-                <a:ea typeface="Aptos" pitchFamily="34" charset="-122"/>
-                <a:cs typeface="Aptos" pitchFamily="34" charset="-120"/>
-              </a:rPr>
-              <a:t>â†’</a:t>
-            </a:r>
-            <a:endParaRPr lang="en-US" sz="1800" dirty="0"/>
-          </a:p>
-        </p:txBody>
-      </p:sp>
-      <p:sp>
-        <p:nvSpPr>
-          <p:cNvPr id="19" name="Shape 17"/>
+          <p:cNvPr id="17" name="Shape 15"/>
           <p:cNvSpPr/>
           <p:nvPr/>
         </p:nvSpPr>
@@ -9905,7 +10993,7 @@
       </p:sp>
       <p:sp>
         <p:nvSpPr>
-          <p:cNvPr id="20" name="Text 18"/>
+          <p:cNvPr id="18" name="Text 16"/>
           <p:cNvSpPr/>
           <p:nvPr/>
         </p:nvSpPr>
@@ -10112,8 +11200,8 @@
         </p:nvSpPr>
         <p:spPr>
           <a:xfrm>
-            <a:off x="9966960" y="6537960"/>
-            <a:ext cx="1645920" cy="201168"/>
+            <a:off x="9646920" y="6537960"/>
+            <a:ext cx="1965960" cy="201168"/>
           </a:xfrm>
           <a:prstGeom prst="rect">
             <a:avLst/>
@@ -10137,7 +11225,7 @@
                 <a:ea typeface="Aptos" pitchFamily="34" charset="-122"/>
                 <a:cs typeface="Aptos" pitchFamily="34" charset="-120"/>
               </a:rPr>
-              <a:t>Â© Paula Soper</a:t>
+              <a:t>Copyright Paula Soper</a:t>
             </a:r>
             <a:endParaRPr lang="en-US" sz="800" dirty="0"/>
           </a:p>
@@ -10184,77 +11272,13 @@
       </p:sp>
       <p:sp>
         <p:nvSpPr>
-          <p:cNvPr id="8" name="Shape 6"/>
+          <p:cNvPr id="8" name="Text 6"/>
           <p:cNvSpPr/>
           <p:nvPr/>
         </p:nvSpPr>
         <p:spPr>
           <a:xfrm>
             <a:off x="640080" y="658368"/>
-            <a:ext cx="420624" cy="420624"/>
-          </a:xfrm>
-          <a:prstGeom prst="ellipse">
-            <a:avLst/>
-          </a:prstGeom>
-          <a:solidFill>
-            <a:srgbClr val="0068B7"/>
-          </a:solidFill>
-          <a:ln w="12700">
-            <a:solidFill>
-              <a:srgbClr val="0068B7"/>
-            </a:solidFill>
-            <a:prstDash val="solid"/>
-          </a:ln>
-        </p:spPr>
-      </p:sp>
-      <p:sp>
-        <p:nvSpPr>
-          <p:cNvPr id="9" name="Text 7"/>
-          <p:cNvSpPr/>
-          <p:nvPr/>
-        </p:nvSpPr>
-        <p:spPr>
-          <a:xfrm>
-            <a:off x="640080" y="731520"/>
-            <a:ext cx="420624" cy="164592"/>
-          </a:xfrm>
-          <a:prstGeom prst="rect">
-            <a:avLst/>
-          </a:prstGeom>
-          <a:noFill/>
-          <a:ln/>
-        </p:spPr>
-        <p:txBody>
-          <a:bodyPr wrap="square" lIns="0" tIns="0" rIns="0" bIns="0" rtlCol="0" anchor="ctr"/>
-          <a:lstStyle/>
-          <a:p>
-            <a:pPr algn="ctr" indent="0" marL="0">
-              <a:buNone/>
-            </a:pPr>
-            <a:r>
-              <a:rPr lang="en-US" sz="1100" b="1" dirty="0">
-                <a:solidFill>
-                  <a:srgbClr val="FFFFFF"/>
-                </a:solidFill>
-                <a:latin typeface="Aptos" pitchFamily="34" charset="0"/>
-                <a:ea typeface="Aptos" pitchFamily="34" charset="-122"/>
-                <a:cs typeface="Aptos" pitchFamily="34" charset="-120"/>
-              </a:rPr>
-              <a:t>11</a:t>
-            </a:r>
-            <a:endParaRPr lang="en-US" sz="1100" dirty="0"/>
-          </a:p>
-        </p:txBody>
-      </p:sp>
-      <p:sp>
-        <p:nvSpPr>
-          <p:cNvPr id="10" name="Text 8"/>
-          <p:cNvSpPr/>
-          <p:nvPr/>
-        </p:nvSpPr>
-        <p:spPr>
-          <a:xfrm>
-            <a:off x="640080" y="621792"/>
             <a:ext cx="10881360" cy="713232"/>
           </a:xfrm>
           <a:prstGeom prst="rect">
@@ -10289,14 +11313,14 @@
       </p:sp>
       <p:sp>
         <p:nvSpPr>
-          <p:cNvPr id="11" name="Text 9"/>
+          <p:cNvPr id="9" name="Text 7"/>
           <p:cNvSpPr/>
           <p:nvPr/>
         </p:nvSpPr>
         <p:spPr>
           <a:xfrm>
             <a:off x="868680" y="1508760"/>
-            <a:ext cx="6537960" cy="4160520"/>
+            <a:ext cx="6309360" cy="4160520"/>
           </a:xfrm>
           <a:prstGeom prst="rect">
             <a:avLst/>
@@ -10355,18 +11379,18 @@
       </p:sp>
       <p:sp>
         <p:nvSpPr>
-          <p:cNvPr id="12" name="Shape 10"/>
-          <p:cNvSpPr/>
-          <p:nvPr/>
-        </p:nvSpPr>
-        <p:spPr>
-          <a:xfrm>
-            <a:off x="7909560" y="1417320"/>
-            <a:ext cx="3154680" cy="1828800"/>
+          <p:cNvPr id="10" name="Shape 8"/>
+          <p:cNvSpPr/>
+          <p:nvPr/>
+        </p:nvSpPr>
+        <p:spPr>
+          <a:xfrm>
+            <a:off x="7635240" y="1325880"/>
+            <a:ext cx="3474720" cy="1325880"/>
           </a:xfrm>
           <a:prstGeom prst="roundRect">
             <a:avLst>
-              <a:gd name="adj" fmla="val 6000"/>
+              <a:gd name="adj" fmla="val 8276"/>
             </a:avLst>
           </a:prstGeom>
           <a:solidFill>
@@ -10382,14 +11406,14 @@
       </p:sp>
       <p:sp>
         <p:nvSpPr>
-          <p:cNvPr id="13" name="Text 11"/>
-          <p:cNvSpPr/>
-          <p:nvPr/>
-        </p:nvSpPr>
-        <p:spPr>
-          <a:xfrm>
-            <a:off x="8074152" y="1563624"/>
-            <a:ext cx="2825496" cy="256032"/>
+          <p:cNvPr id="11" name="Text 9"/>
+          <p:cNvSpPr/>
+          <p:nvPr/>
+        </p:nvSpPr>
+        <p:spPr>
+          <a:xfrm>
+            <a:off x="7799832" y="1472184"/>
+            <a:ext cx="3145536" cy="256032"/>
           </a:xfrm>
           <a:prstGeom prst="rect">
             <a:avLst/>
@@ -10413,7 +11437,7 @@
                 <a:ea typeface="Aptos" pitchFamily="34" charset="-122"/>
                 <a:cs typeface="Aptos" pitchFamily="34" charset="-120"/>
               </a:rPr>
-              <a:t>Key idea</a:t>
+              <a:t>Risk check</a:t>
             </a:r>
             <a:endParaRPr lang="en-US" sz="1300" dirty="0"/>
           </a:p>
@@ -10421,14 +11445,14 @@
       </p:sp>
       <p:sp>
         <p:nvSpPr>
-          <p:cNvPr id="14" name="Text 12"/>
-          <p:cNvSpPr/>
-          <p:nvPr/>
-        </p:nvSpPr>
-        <p:spPr>
-          <a:xfrm>
-            <a:off x="8074152" y="1920240"/>
-            <a:ext cx="2825496" cy="1188720"/>
+          <p:cNvPr id="12" name="Text 10"/>
+          <p:cNvSpPr/>
+          <p:nvPr/>
+        </p:nvSpPr>
+        <p:spPr>
+          <a:xfrm>
+            <a:off x="7799832" y="1828800"/>
+            <a:ext cx="3145536" cy="685800"/>
           </a:xfrm>
           <a:prstGeom prst="rect">
             <a:avLst/>
@@ -10462,18 +11486,171 @@
       </p:sp>
       <p:sp>
         <p:nvSpPr>
-          <p:cNvPr id="15" name="Shape 13"/>
-          <p:cNvSpPr/>
-          <p:nvPr/>
-        </p:nvSpPr>
-        <p:spPr>
-          <a:xfrm>
-            <a:off x="7909560" y="3520440"/>
-            <a:ext cx="3154680" cy="1737360"/>
+          <p:cNvPr id="13" name="Shape 11"/>
+          <p:cNvSpPr/>
+          <p:nvPr/>
+        </p:nvSpPr>
+        <p:spPr>
+          <a:xfrm>
+            <a:off x="7635240" y="2788920"/>
+            <a:ext cx="3474720" cy="1536192"/>
           </a:xfrm>
           <a:prstGeom prst="roundRect">
             <a:avLst>
-              <a:gd name="adj" fmla="val 6316"/>
+              <a:gd name="adj" fmla="val 7143"/>
+            </a:avLst>
+          </a:prstGeom>
+          <a:solidFill>
+            <a:srgbClr val="FFFFFF">
+              <a:alpha val="88000"/>
+            </a:srgbClr>
+          </a:solidFill>
+          <a:ln w="12700">
+            <a:solidFill>
+              <a:srgbClr val="D6E8F2"/>
+            </a:solidFill>
+            <a:prstDash val="solid"/>
+          </a:ln>
+        </p:spPr>
+      </p:sp>
+      <p:sp>
+        <p:nvSpPr>
+          <p:cNvPr id="14" name="Shape 12"/>
+          <p:cNvSpPr/>
+          <p:nvPr/>
+        </p:nvSpPr>
+        <p:spPr>
+          <a:xfrm>
+            <a:off x="8046720" y="3108960"/>
+            <a:ext cx="2651760" cy="896112"/>
+          </a:xfrm>
+          <a:prstGeom prst="arc">
+            <a:avLst/>
+          </a:prstGeom>
+          <a:noFill/>
+          <a:ln w="25400">
+            <a:solidFill>
+              <a:srgbClr val="0068B7"/>
+            </a:solidFill>
+            <a:prstDash val="solid"/>
+          </a:ln>
+        </p:spPr>
+      </p:sp>
+      <p:sp>
+        <p:nvSpPr>
+          <p:cNvPr id="15" name="Text 13"/>
+          <p:cNvSpPr/>
+          <p:nvPr/>
+        </p:nvSpPr>
+        <p:spPr>
+          <a:xfrm>
+            <a:off x="7909560" y="3099816"/>
+            <a:ext cx="2926080" cy="256032"/>
+          </a:xfrm>
+          <a:prstGeom prst="rect">
+            <a:avLst/>
+          </a:prstGeom>
+          <a:noFill/>
+          <a:ln/>
+        </p:spPr>
+        <p:txBody>
+          <a:bodyPr wrap="square" lIns="0" tIns="0" rIns="0" bIns="0" rtlCol="0" anchor="ctr"/>
+          <a:lstStyle/>
+          <a:p>
+            <a:pPr algn="ctr" indent="0" marL="0">
+              <a:buNone/>
+            </a:pPr>
+            <a:r>
+              <a:rPr lang="en-US" sz="1500" b="1" dirty="0">
+                <a:solidFill>
+                  <a:srgbClr val="003A63"/>
+                </a:solidFill>
+                <a:latin typeface="Aptos" pitchFamily="34" charset="0"/>
+                <a:ea typeface="Aptos" pitchFamily="34" charset="-122"/>
+                <a:cs typeface="Aptos" pitchFamily="34" charset="-120"/>
+              </a:rPr>
+              <a:t>Risk</a:t>
+            </a:r>
+            <a:endParaRPr lang="en-US" sz="1500" dirty="0"/>
+          </a:p>
+        </p:txBody>
+      </p:sp>
+      <p:sp>
+        <p:nvSpPr>
+          <p:cNvPr id="16" name="Shape 14"/>
+          <p:cNvSpPr/>
+          <p:nvPr/>
+        </p:nvSpPr>
+        <p:spPr>
+          <a:xfrm>
+            <a:off x="8366760" y="3639312"/>
+            <a:ext cx="2011680" cy="0"/>
+          </a:xfrm>
+          <a:prstGeom prst="line">
+            <a:avLst/>
+          </a:prstGeom>
+          <a:noFill/>
+          <a:ln w="63500">
+            <a:solidFill>
+              <a:srgbClr val="2F8A28"/>
+            </a:solidFill>
+            <a:prstDash val="solid"/>
+          </a:ln>
+        </p:spPr>
+      </p:sp>
+      <p:sp>
+        <p:nvSpPr>
+          <p:cNvPr id="17" name="Text 15"/>
+          <p:cNvSpPr/>
+          <p:nvPr/>
+        </p:nvSpPr>
+        <p:spPr>
+          <a:xfrm>
+            <a:off x="7909560" y="3849624"/>
+            <a:ext cx="2926080" cy="164592"/>
+          </a:xfrm>
+          <a:prstGeom prst="rect">
+            <a:avLst/>
+          </a:prstGeom>
+          <a:noFill/>
+          <a:ln/>
+        </p:spPr>
+        <p:txBody>
+          <a:bodyPr wrap="square" lIns="0" tIns="0" rIns="0" bIns="0" rtlCol="0" anchor="ctr"/>
+          <a:lstStyle/>
+          <a:p>
+            <a:pPr algn="ctr" indent="0" marL="0">
+              <a:buNone/>
+            </a:pPr>
+            <a:r>
+              <a:rPr lang="en-US" sz="900" dirty="0">
+                <a:solidFill>
+                  <a:srgbClr val="003A63"/>
+                </a:solidFill>
+                <a:latin typeface="Aptos" pitchFamily="34" charset="0"/>
+                <a:ea typeface="Aptos" pitchFamily="34" charset="-122"/>
+                <a:cs typeface="Aptos" pitchFamily="34" charset="-120"/>
+              </a:rPr>
+              <a:t>Human review</a:t>
+            </a:r>
+            <a:endParaRPr lang="en-US" sz="900" dirty="0"/>
+          </a:p>
+        </p:txBody>
+      </p:sp>
+      <p:sp>
+        <p:nvSpPr>
+          <p:cNvPr id="18" name="Shape 16"/>
+          <p:cNvSpPr/>
+          <p:nvPr/>
+        </p:nvSpPr>
+        <p:spPr>
+          <a:xfrm>
+            <a:off x="7635240" y="4498848"/>
+            <a:ext cx="3474720" cy="1143000"/>
+          </a:xfrm>
+          <a:prstGeom prst="roundRect">
+            <a:avLst>
+              <a:gd name="adj" fmla="val 9600"/>
             </a:avLst>
           </a:prstGeom>
           <a:solidFill>
@@ -10489,14 +11666,14 @@
       </p:sp>
       <p:sp>
         <p:nvSpPr>
-          <p:cNvPr id="16" name="Text 14"/>
-          <p:cNvSpPr/>
-          <p:nvPr/>
-        </p:nvSpPr>
-        <p:spPr>
-          <a:xfrm>
-            <a:off x="8074152" y="3666744"/>
-            <a:ext cx="2825496" cy="256032"/>
+          <p:cNvPr id="19" name="Text 17"/>
+          <p:cNvSpPr/>
+          <p:nvPr/>
+        </p:nvSpPr>
+        <p:spPr>
+          <a:xfrm>
+            <a:off x="7799832" y="4645152"/>
+            <a:ext cx="3145536" cy="256032"/>
           </a:xfrm>
           <a:prstGeom prst="rect">
             <a:avLst/>
@@ -10520,7 +11697,7 @@
                 <a:ea typeface="Aptos" pitchFamily="34" charset="-122"/>
                 <a:cs typeface="Aptos" pitchFamily="34" charset="-120"/>
               </a:rPr>
-              <a:t>Use this for</a:t>
+              <a:t>Safeguard to plan</a:t>
             </a:r>
             <a:endParaRPr lang="en-US" sz="1300" dirty="0"/>
           </a:p>
@@ -10528,14 +11705,14 @@
       </p:sp>
       <p:sp>
         <p:nvSpPr>
-          <p:cNvPr id="17" name="Text 15"/>
-          <p:cNvSpPr/>
-          <p:nvPr/>
-        </p:nvSpPr>
-        <p:spPr>
-          <a:xfrm>
-            <a:off x="8074152" y="4023360"/>
-            <a:ext cx="2825496" cy="1097280"/>
+          <p:cNvPr id="20" name="Text 18"/>
+          <p:cNvSpPr/>
+          <p:nvPr/>
+        </p:nvSpPr>
+        <p:spPr>
+          <a:xfrm>
+            <a:off x="7799832" y="5001768"/>
+            <a:ext cx="3145536" cy="502920"/>
           </a:xfrm>
           <a:prstGeom prst="rect">
             <a:avLst/>
@@ -10561,7 +11738,7 @@
                 <a:ea typeface="Aptos" pitchFamily="34" charset="-122"/>
                 <a:cs typeface="Aptos" pitchFamily="34" charset="-120"/>
               </a:rPr>
-              <a:t>Connect the concept to public health decisions, safeguards, documentation, or implementation work.</a:t>
+              <a:t>Use the assignment to test whether you can explain the concept, apply it to a realistic public health situation, and identify what would need review before the work moves forward.</a:t>
             </a:r>
             <a:endParaRPr lang="en-US" sz="1550" dirty="0"/>
           </a:p>
@@ -10735,8 +11912,8 @@
         </p:nvSpPr>
         <p:spPr>
           <a:xfrm>
-            <a:off x="9966960" y="6537960"/>
-            <a:ext cx="1645920" cy="201168"/>
+            <a:off x="9646920" y="6537960"/>
+            <a:ext cx="1965960" cy="201168"/>
           </a:xfrm>
           <a:prstGeom prst="rect">
             <a:avLst/>
@@ -10760,7 +11937,7 @@
                 <a:ea typeface="Aptos" pitchFamily="34" charset="-122"/>
                 <a:cs typeface="Aptos" pitchFamily="34" charset="-120"/>
               </a:rPr>
-              <a:t>Â© Paula Soper</a:t>
+              <a:t>Copyright Paula Soper</a:t>
             </a:r>
             <a:endParaRPr lang="en-US" sz="800" dirty="0"/>
           </a:p>
@@ -10807,77 +11984,13 @@
       </p:sp>
       <p:sp>
         <p:nvSpPr>
-          <p:cNvPr id="8" name="Shape 6"/>
+          <p:cNvPr id="8" name="Text 6"/>
           <p:cNvSpPr/>
           <p:nvPr/>
         </p:nvSpPr>
         <p:spPr>
           <a:xfrm>
             <a:off x="640080" y="658368"/>
-            <a:ext cx="420624" cy="420624"/>
-          </a:xfrm>
-          <a:prstGeom prst="ellipse">
-            <a:avLst/>
-          </a:prstGeom>
-          <a:solidFill>
-            <a:srgbClr val="0068B7"/>
-          </a:solidFill>
-          <a:ln w="12700">
-            <a:solidFill>
-              <a:srgbClr val="0068B7"/>
-            </a:solidFill>
-            <a:prstDash val="solid"/>
-          </a:ln>
-        </p:spPr>
-      </p:sp>
-      <p:sp>
-        <p:nvSpPr>
-          <p:cNvPr id="9" name="Text 7"/>
-          <p:cNvSpPr/>
-          <p:nvPr/>
-        </p:nvSpPr>
-        <p:spPr>
-          <a:xfrm>
-            <a:off x="640080" y="731520"/>
-            <a:ext cx="420624" cy="164592"/>
-          </a:xfrm>
-          <a:prstGeom prst="rect">
-            <a:avLst/>
-          </a:prstGeom>
-          <a:noFill/>
-          <a:ln/>
-        </p:spPr>
-        <p:txBody>
-          <a:bodyPr wrap="square" lIns="0" tIns="0" rIns="0" bIns="0" rtlCol="0" anchor="ctr"/>
-          <a:lstStyle/>
-          <a:p>
-            <a:pPr algn="ctr" indent="0" marL="0">
-              <a:buNone/>
-            </a:pPr>
-            <a:r>
-              <a:rPr lang="en-US" sz="1100" b="1" dirty="0">
-                <a:solidFill>
-                  <a:srgbClr val="FFFFFF"/>
-                </a:solidFill>
-                <a:latin typeface="Aptos" pitchFamily="34" charset="0"/>
-                <a:ea typeface="Aptos" pitchFamily="34" charset="-122"/>
-                <a:cs typeface="Aptos" pitchFamily="34" charset="-120"/>
-              </a:rPr>
-              <a:t>12</a:t>
-            </a:r>
-            <a:endParaRPr lang="en-US" sz="1100" dirty="0"/>
-          </a:p>
-        </p:txBody>
-      </p:sp>
-      <p:sp>
-        <p:nvSpPr>
-          <p:cNvPr id="10" name="Text 8"/>
-          <p:cNvSpPr/>
-          <p:nvPr/>
-        </p:nvSpPr>
-        <p:spPr>
-          <a:xfrm>
-            <a:off x="640080" y="621792"/>
             <a:ext cx="10881360" cy="713232"/>
           </a:xfrm>
           <a:prstGeom prst="rect">
@@ -10912,14 +12025,14 @@
       </p:sp>
       <p:sp>
         <p:nvSpPr>
-          <p:cNvPr id="11" name="Text 9"/>
+          <p:cNvPr id="9" name="Text 7"/>
           <p:cNvSpPr/>
           <p:nvPr/>
         </p:nvSpPr>
         <p:spPr>
           <a:xfrm>
             <a:off x="868680" y="1508760"/>
-            <a:ext cx="6537960" cy="4160520"/>
+            <a:ext cx="6309360" cy="4160520"/>
           </a:xfrm>
           <a:prstGeom prst="rect">
             <a:avLst/>
@@ -10950,18 +12063,18 @@
       </p:sp>
       <p:sp>
         <p:nvSpPr>
-          <p:cNvPr id="12" name="Shape 10"/>
-          <p:cNvSpPr/>
-          <p:nvPr/>
-        </p:nvSpPr>
-        <p:spPr>
-          <a:xfrm>
-            <a:off x="7909560" y="1417320"/>
-            <a:ext cx="3154680" cy="1828800"/>
+          <p:cNvPr id="10" name="Shape 8"/>
+          <p:cNvSpPr/>
+          <p:nvPr/>
+        </p:nvSpPr>
+        <p:spPr>
+          <a:xfrm>
+            <a:off x="7635240" y="1325880"/>
+            <a:ext cx="3474720" cy="1325880"/>
           </a:xfrm>
           <a:prstGeom prst="roundRect">
             <a:avLst>
-              <a:gd name="adj" fmla="val 6000"/>
+              <a:gd name="adj" fmla="val 8276"/>
             </a:avLst>
           </a:prstGeom>
           <a:solidFill>
@@ -10977,14 +12090,14 @@
       </p:sp>
       <p:sp>
         <p:nvSpPr>
-          <p:cNvPr id="13" name="Text 11"/>
-          <p:cNvSpPr/>
-          <p:nvPr/>
-        </p:nvSpPr>
-        <p:spPr>
-          <a:xfrm>
-            <a:off x="8074152" y="1563624"/>
-            <a:ext cx="2825496" cy="256032"/>
+          <p:cNvPr id="11" name="Text 9"/>
+          <p:cNvSpPr/>
+          <p:nvPr/>
+        </p:nvSpPr>
+        <p:spPr>
+          <a:xfrm>
+            <a:off x="7799832" y="1472184"/>
+            <a:ext cx="3145536" cy="256032"/>
           </a:xfrm>
           <a:prstGeom prst="rect">
             <a:avLst/>
@@ -11008,7 +12121,7 @@
                 <a:ea typeface="Aptos" pitchFamily="34" charset="-122"/>
                 <a:cs typeface="Aptos" pitchFamily="34" charset="-120"/>
               </a:rPr>
-              <a:t>Key idea</a:t>
+              <a:t>Risk check</a:t>
             </a:r>
             <a:endParaRPr lang="en-US" sz="1300" dirty="0"/>
           </a:p>
@@ -11016,14 +12129,14 @@
       </p:sp>
       <p:sp>
         <p:nvSpPr>
-          <p:cNvPr id="14" name="Text 12"/>
-          <p:cNvSpPr/>
-          <p:nvPr/>
-        </p:nvSpPr>
-        <p:spPr>
-          <a:xfrm>
-            <a:off x="8074152" y="1920240"/>
-            <a:ext cx="2825496" cy="1188720"/>
+          <p:cNvPr id="12" name="Text 10"/>
+          <p:cNvSpPr/>
+          <p:nvPr/>
+        </p:nvSpPr>
+        <p:spPr>
+          <a:xfrm>
+            <a:off x="7799832" y="1828800"/>
+            <a:ext cx="3145536" cy="685800"/>
           </a:xfrm>
           <a:prstGeom prst="rect">
             <a:avLst/>
@@ -11057,18 +12170,171 @@
       </p:sp>
       <p:sp>
         <p:nvSpPr>
-          <p:cNvPr id="15" name="Shape 13"/>
-          <p:cNvSpPr/>
-          <p:nvPr/>
-        </p:nvSpPr>
-        <p:spPr>
-          <a:xfrm>
-            <a:off x="7909560" y="3520440"/>
-            <a:ext cx="3154680" cy="1737360"/>
+          <p:cNvPr id="13" name="Shape 11"/>
+          <p:cNvSpPr/>
+          <p:nvPr/>
+        </p:nvSpPr>
+        <p:spPr>
+          <a:xfrm>
+            <a:off x="7635240" y="2788920"/>
+            <a:ext cx="3474720" cy="1536192"/>
           </a:xfrm>
           <a:prstGeom prst="roundRect">
             <a:avLst>
-              <a:gd name="adj" fmla="val 6316"/>
+              <a:gd name="adj" fmla="val 7143"/>
+            </a:avLst>
+          </a:prstGeom>
+          <a:solidFill>
+            <a:srgbClr val="FFFFFF">
+              <a:alpha val="88000"/>
+            </a:srgbClr>
+          </a:solidFill>
+          <a:ln w="12700">
+            <a:solidFill>
+              <a:srgbClr val="D6E8F2"/>
+            </a:solidFill>
+            <a:prstDash val="solid"/>
+          </a:ln>
+        </p:spPr>
+      </p:sp>
+      <p:sp>
+        <p:nvSpPr>
+          <p:cNvPr id="14" name="Shape 12"/>
+          <p:cNvSpPr/>
+          <p:nvPr/>
+        </p:nvSpPr>
+        <p:spPr>
+          <a:xfrm>
+            <a:off x="8046720" y="3108960"/>
+            <a:ext cx="2651760" cy="896112"/>
+          </a:xfrm>
+          <a:prstGeom prst="arc">
+            <a:avLst/>
+          </a:prstGeom>
+          <a:noFill/>
+          <a:ln w="25400">
+            <a:solidFill>
+              <a:srgbClr val="0068B7"/>
+            </a:solidFill>
+            <a:prstDash val="solid"/>
+          </a:ln>
+        </p:spPr>
+      </p:sp>
+      <p:sp>
+        <p:nvSpPr>
+          <p:cNvPr id="15" name="Text 13"/>
+          <p:cNvSpPr/>
+          <p:nvPr/>
+        </p:nvSpPr>
+        <p:spPr>
+          <a:xfrm>
+            <a:off x="7909560" y="3099816"/>
+            <a:ext cx="2926080" cy="256032"/>
+          </a:xfrm>
+          <a:prstGeom prst="rect">
+            <a:avLst/>
+          </a:prstGeom>
+          <a:noFill/>
+          <a:ln/>
+        </p:spPr>
+        <p:txBody>
+          <a:bodyPr wrap="square" lIns="0" tIns="0" rIns="0" bIns="0" rtlCol="0" anchor="ctr"/>
+          <a:lstStyle/>
+          <a:p>
+            <a:pPr algn="ctr" indent="0" marL="0">
+              <a:buNone/>
+            </a:pPr>
+            <a:r>
+              <a:rPr lang="en-US" sz="1500" b="1" dirty="0">
+                <a:solidFill>
+                  <a:srgbClr val="003A63"/>
+                </a:solidFill>
+                <a:latin typeface="Aptos" pitchFamily="34" charset="0"/>
+                <a:ea typeface="Aptos" pitchFamily="34" charset="-122"/>
+                <a:cs typeface="Aptos" pitchFamily="34" charset="-120"/>
+              </a:rPr>
+              <a:t>Risk</a:t>
+            </a:r>
+            <a:endParaRPr lang="en-US" sz="1500" dirty="0"/>
+          </a:p>
+        </p:txBody>
+      </p:sp>
+      <p:sp>
+        <p:nvSpPr>
+          <p:cNvPr id="16" name="Shape 14"/>
+          <p:cNvSpPr/>
+          <p:nvPr/>
+        </p:nvSpPr>
+        <p:spPr>
+          <a:xfrm>
+            <a:off x="8366760" y="3639312"/>
+            <a:ext cx="2011680" cy="0"/>
+          </a:xfrm>
+          <a:prstGeom prst="line">
+            <a:avLst/>
+          </a:prstGeom>
+          <a:noFill/>
+          <a:ln w="63500">
+            <a:solidFill>
+              <a:srgbClr val="2F8A28"/>
+            </a:solidFill>
+            <a:prstDash val="solid"/>
+          </a:ln>
+        </p:spPr>
+      </p:sp>
+      <p:sp>
+        <p:nvSpPr>
+          <p:cNvPr id="17" name="Text 15"/>
+          <p:cNvSpPr/>
+          <p:nvPr/>
+        </p:nvSpPr>
+        <p:spPr>
+          <a:xfrm>
+            <a:off x="7909560" y="3849624"/>
+            <a:ext cx="2926080" cy="164592"/>
+          </a:xfrm>
+          <a:prstGeom prst="rect">
+            <a:avLst/>
+          </a:prstGeom>
+          <a:noFill/>
+          <a:ln/>
+        </p:spPr>
+        <p:txBody>
+          <a:bodyPr wrap="square" lIns="0" tIns="0" rIns="0" bIns="0" rtlCol="0" anchor="ctr"/>
+          <a:lstStyle/>
+          <a:p>
+            <a:pPr algn="ctr" indent="0" marL="0">
+              <a:buNone/>
+            </a:pPr>
+            <a:r>
+              <a:rPr lang="en-US" sz="900" dirty="0">
+                <a:solidFill>
+                  <a:srgbClr val="003A63"/>
+                </a:solidFill>
+                <a:latin typeface="Aptos" pitchFamily="34" charset="0"/>
+                <a:ea typeface="Aptos" pitchFamily="34" charset="-122"/>
+                <a:cs typeface="Aptos" pitchFamily="34" charset="-120"/>
+              </a:rPr>
+              <a:t>Human review</a:t>
+            </a:r>
+            <a:endParaRPr lang="en-US" sz="900" dirty="0"/>
+          </a:p>
+        </p:txBody>
+      </p:sp>
+      <p:sp>
+        <p:nvSpPr>
+          <p:cNvPr id="18" name="Shape 16"/>
+          <p:cNvSpPr/>
+          <p:nvPr/>
+        </p:nvSpPr>
+        <p:spPr>
+          <a:xfrm>
+            <a:off x="7635240" y="4498848"/>
+            <a:ext cx="3474720" cy="1143000"/>
+          </a:xfrm>
+          <a:prstGeom prst="roundRect">
+            <a:avLst>
+              <a:gd name="adj" fmla="val 9600"/>
             </a:avLst>
           </a:prstGeom>
           <a:solidFill>
@@ -11084,14 +12350,14 @@
       </p:sp>
       <p:sp>
         <p:nvSpPr>
-          <p:cNvPr id="16" name="Text 14"/>
-          <p:cNvSpPr/>
-          <p:nvPr/>
-        </p:nvSpPr>
-        <p:spPr>
-          <a:xfrm>
-            <a:off x="8074152" y="3666744"/>
-            <a:ext cx="2825496" cy="256032"/>
+          <p:cNvPr id="19" name="Text 17"/>
+          <p:cNvSpPr/>
+          <p:nvPr/>
+        </p:nvSpPr>
+        <p:spPr>
+          <a:xfrm>
+            <a:off x="7799832" y="4645152"/>
+            <a:ext cx="3145536" cy="256032"/>
           </a:xfrm>
           <a:prstGeom prst="rect">
             <a:avLst/>
@@ -11115,7 +12381,7 @@
                 <a:ea typeface="Aptos" pitchFamily="34" charset="-122"/>
                 <a:cs typeface="Aptos" pitchFamily="34" charset="-120"/>
               </a:rPr>
-              <a:t>Use this for</a:t>
+              <a:t>Safeguard to plan</a:t>
             </a:r>
             <a:endParaRPr lang="en-US" sz="1300" dirty="0"/>
           </a:p>
@@ -11123,14 +12389,14 @@
       </p:sp>
       <p:sp>
         <p:nvSpPr>
-          <p:cNvPr id="17" name="Text 15"/>
-          <p:cNvSpPr/>
-          <p:nvPr/>
-        </p:nvSpPr>
-        <p:spPr>
-          <a:xfrm>
-            <a:off x="8074152" y="4023360"/>
-            <a:ext cx="2825496" cy="1097280"/>
+          <p:cNvPr id="20" name="Text 18"/>
+          <p:cNvSpPr/>
+          <p:nvPr/>
+        </p:nvSpPr>
+        <p:spPr>
+          <a:xfrm>
+            <a:off x="7799832" y="5001768"/>
+            <a:ext cx="3145536" cy="502920"/>
           </a:xfrm>
           <a:prstGeom prst="rect">
             <a:avLst/>
@@ -11156,7 +12422,7 @@
                 <a:ea typeface="Aptos" pitchFamily="34" charset="-122"/>
                 <a:cs typeface="Aptos" pitchFamily="34" charset="-120"/>
               </a:rPr>
-              <a:t>Connect the concept to public health decisions, safeguards, documentation, or implementation work.</a:t>
+              <a:t>Identify what could go wrong, who could be affected, what safeguards are needed, and what evidence should be reviewed before use expands.</a:t>
             </a:r>
             <a:endParaRPr lang="en-US" sz="1550" dirty="0"/>
           </a:p>
@@ -11330,8 +12596,8 @@
         </p:nvSpPr>
         <p:spPr>
           <a:xfrm>
-            <a:off x="9966960" y="6537960"/>
-            <a:ext cx="1645920" cy="201168"/>
+            <a:off x="9646920" y="6537960"/>
+            <a:ext cx="1965960" cy="201168"/>
           </a:xfrm>
           <a:prstGeom prst="rect">
             <a:avLst/>
@@ -11355,7 +12621,7 @@
                 <a:ea typeface="Aptos" pitchFamily="34" charset="-122"/>
                 <a:cs typeface="Aptos" pitchFamily="34" charset="-120"/>
               </a:rPr>
-              <a:t>Â© Paula Soper</a:t>
+              <a:t>Copyright Paula Soper</a:t>
             </a:r>
             <a:endParaRPr lang="en-US" sz="800" dirty="0"/>
           </a:p>
@@ -11402,77 +12668,13 @@
       </p:sp>
       <p:sp>
         <p:nvSpPr>
-          <p:cNvPr id="8" name="Shape 6"/>
+          <p:cNvPr id="8" name="Text 6"/>
           <p:cNvSpPr/>
           <p:nvPr/>
         </p:nvSpPr>
         <p:spPr>
           <a:xfrm>
             <a:off x="640080" y="658368"/>
-            <a:ext cx="420624" cy="420624"/>
-          </a:xfrm>
-          <a:prstGeom prst="ellipse">
-            <a:avLst/>
-          </a:prstGeom>
-          <a:solidFill>
-            <a:srgbClr val="0068B7"/>
-          </a:solidFill>
-          <a:ln w="12700">
-            <a:solidFill>
-              <a:srgbClr val="0068B7"/>
-            </a:solidFill>
-            <a:prstDash val="solid"/>
-          </a:ln>
-        </p:spPr>
-      </p:sp>
-      <p:sp>
-        <p:nvSpPr>
-          <p:cNvPr id="9" name="Text 7"/>
-          <p:cNvSpPr/>
-          <p:nvPr/>
-        </p:nvSpPr>
-        <p:spPr>
-          <a:xfrm>
-            <a:off x="640080" y="731520"/>
-            <a:ext cx="420624" cy="164592"/>
-          </a:xfrm>
-          <a:prstGeom prst="rect">
-            <a:avLst/>
-          </a:prstGeom>
-          <a:noFill/>
-          <a:ln/>
-        </p:spPr>
-        <p:txBody>
-          <a:bodyPr wrap="square" lIns="0" tIns="0" rIns="0" bIns="0" rtlCol="0" anchor="ctr"/>
-          <a:lstStyle/>
-          <a:p>
-            <a:pPr algn="ctr" indent="0" marL="0">
-              <a:buNone/>
-            </a:pPr>
-            <a:r>
-              <a:rPr lang="en-US" sz="1100" b="1" dirty="0">
-                <a:solidFill>
-                  <a:srgbClr val="FFFFFF"/>
-                </a:solidFill>
-                <a:latin typeface="Aptos" pitchFamily="34" charset="0"/>
-                <a:ea typeface="Aptos" pitchFamily="34" charset="-122"/>
-                <a:cs typeface="Aptos" pitchFamily="34" charset="-120"/>
-              </a:rPr>
-              <a:t>13</a:t>
-            </a:r>
-            <a:endParaRPr lang="en-US" sz="1100" dirty="0"/>
-          </a:p>
-        </p:txBody>
-      </p:sp>
-      <p:sp>
-        <p:nvSpPr>
-          <p:cNvPr id="10" name="Text 8"/>
-          <p:cNvSpPr/>
-          <p:nvPr/>
-        </p:nvSpPr>
-        <p:spPr>
-          <a:xfrm>
-            <a:off x="640080" y="621792"/>
             <a:ext cx="10881360" cy="713232"/>
           </a:xfrm>
           <a:prstGeom prst="rect">
@@ -11507,14 +12709,14 @@
       </p:sp>
       <p:sp>
         <p:nvSpPr>
-          <p:cNvPr id="11" name="Text 9"/>
+          <p:cNvPr id="9" name="Text 7"/>
           <p:cNvSpPr/>
           <p:nvPr/>
         </p:nvSpPr>
         <p:spPr>
           <a:xfrm>
             <a:off x="868680" y="1508760"/>
-            <a:ext cx="6537960" cy="4160520"/>
+            <a:ext cx="6309360" cy="4160520"/>
           </a:xfrm>
           <a:prstGeom prst="rect">
             <a:avLst/>
@@ -11545,18 +12747,18 @@
       </p:sp>
       <p:sp>
         <p:nvSpPr>
-          <p:cNvPr id="12" name="Shape 10"/>
-          <p:cNvSpPr/>
-          <p:nvPr/>
-        </p:nvSpPr>
-        <p:spPr>
-          <a:xfrm>
-            <a:off x="7909560" y="1417320"/>
-            <a:ext cx="3154680" cy="1828800"/>
+          <p:cNvPr id="10" name="Shape 8"/>
+          <p:cNvSpPr/>
+          <p:nvPr/>
+        </p:nvSpPr>
+        <p:spPr>
+          <a:xfrm>
+            <a:off x="7635240" y="1325880"/>
+            <a:ext cx="3474720" cy="1325880"/>
           </a:xfrm>
           <a:prstGeom prst="roundRect">
             <a:avLst>
-              <a:gd name="adj" fmla="val 6000"/>
+              <a:gd name="adj" fmla="val 8276"/>
             </a:avLst>
           </a:prstGeom>
           <a:solidFill>
@@ -11572,14 +12774,14 @@
       </p:sp>
       <p:sp>
         <p:nvSpPr>
-          <p:cNvPr id="13" name="Text 11"/>
-          <p:cNvSpPr/>
-          <p:nvPr/>
-        </p:nvSpPr>
-        <p:spPr>
-          <a:xfrm>
-            <a:off x="8074152" y="1563624"/>
-            <a:ext cx="2825496" cy="256032"/>
+          <p:cNvPr id="11" name="Text 9"/>
+          <p:cNvSpPr/>
+          <p:nvPr/>
+        </p:nvSpPr>
+        <p:spPr>
+          <a:xfrm>
+            <a:off x="7799832" y="1472184"/>
+            <a:ext cx="3145536" cy="256032"/>
           </a:xfrm>
           <a:prstGeom prst="rect">
             <a:avLst/>
@@ -11603,7 +12805,7 @@
                 <a:ea typeface="Aptos" pitchFamily="34" charset="-122"/>
                 <a:cs typeface="Aptos" pitchFamily="34" charset="-120"/>
               </a:rPr>
-              <a:t>Key idea</a:t>
+              <a:t>Risk check</a:t>
             </a:r>
             <a:endParaRPr lang="en-US" sz="1300" dirty="0"/>
           </a:p>
@@ -11611,14 +12813,14 @@
       </p:sp>
       <p:sp>
         <p:nvSpPr>
-          <p:cNvPr id="14" name="Text 12"/>
-          <p:cNvSpPr/>
-          <p:nvPr/>
-        </p:nvSpPr>
-        <p:spPr>
-          <a:xfrm>
-            <a:off x="8074152" y="1920240"/>
-            <a:ext cx="2825496" cy="1188720"/>
+          <p:cNvPr id="12" name="Text 10"/>
+          <p:cNvSpPr/>
+          <p:nvPr/>
+        </p:nvSpPr>
+        <p:spPr>
+          <a:xfrm>
+            <a:off x="7799832" y="1828800"/>
+            <a:ext cx="3145536" cy="685800"/>
           </a:xfrm>
           <a:prstGeom prst="rect">
             <a:avLst/>
@@ -11652,18 +12854,171 @@
       </p:sp>
       <p:sp>
         <p:nvSpPr>
-          <p:cNvPr id="15" name="Shape 13"/>
-          <p:cNvSpPr/>
-          <p:nvPr/>
-        </p:nvSpPr>
-        <p:spPr>
-          <a:xfrm>
-            <a:off x="7909560" y="3520440"/>
-            <a:ext cx="3154680" cy="1737360"/>
+          <p:cNvPr id="13" name="Shape 11"/>
+          <p:cNvSpPr/>
+          <p:nvPr/>
+        </p:nvSpPr>
+        <p:spPr>
+          <a:xfrm>
+            <a:off x="7635240" y="2788920"/>
+            <a:ext cx="3474720" cy="1536192"/>
           </a:xfrm>
           <a:prstGeom prst="roundRect">
             <a:avLst>
-              <a:gd name="adj" fmla="val 6316"/>
+              <a:gd name="adj" fmla="val 7143"/>
+            </a:avLst>
+          </a:prstGeom>
+          <a:solidFill>
+            <a:srgbClr val="FFFFFF">
+              <a:alpha val="88000"/>
+            </a:srgbClr>
+          </a:solidFill>
+          <a:ln w="12700">
+            <a:solidFill>
+              <a:srgbClr val="D6E8F2"/>
+            </a:solidFill>
+            <a:prstDash val="solid"/>
+          </a:ln>
+        </p:spPr>
+      </p:sp>
+      <p:sp>
+        <p:nvSpPr>
+          <p:cNvPr id="14" name="Shape 12"/>
+          <p:cNvSpPr/>
+          <p:nvPr/>
+        </p:nvSpPr>
+        <p:spPr>
+          <a:xfrm>
+            <a:off x="8046720" y="3108960"/>
+            <a:ext cx="2651760" cy="896112"/>
+          </a:xfrm>
+          <a:prstGeom prst="arc">
+            <a:avLst/>
+          </a:prstGeom>
+          <a:noFill/>
+          <a:ln w="25400">
+            <a:solidFill>
+              <a:srgbClr val="0068B7"/>
+            </a:solidFill>
+            <a:prstDash val="solid"/>
+          </a:ln>
+        </p:spPr>
+      </p:sp>
+      <p:sp>
+        <p:nvSpPr>
+          <p:cNvPr id="15" name="Text 13"/>
+          <p:cNvSpPr/>
+          <p:nvPr/>
+        </p:nvSpPr>
+        <p:spPr>
+          <a:xfrm>
+            <a:off x="7909560" y="3099816"/>
+            <a:ext cx="2926080" cy="256032"/>
+          </a:xfrm>
+          <a:prstGeom prst="rect">
+            <a:avLst/>
+          </a:prstGeom>
+          <a:noFill/>
+          <a:ln/>
+        </p:spPr>
+        <p:txBody>
+          <a:bodyPr wrap="square" lIns="0" tIns="0" rIns="0" bIns="0" rtlCol="0" anchor="ctr"/>
+          <a:lstStyle/>
+          <a:p>
+            <a:pPr algn="ctr" indent="0" marL="0">
+              <a:buNone/>
+            </a:pPr>
+            <a:r>
+              <a:rPr lang="en-US" sz="1500" b="1" dirty="0">
+                <a:solidFill>
+                  <a:srgbClr val="003A63"/>
+                </a:solidFill>
+                <a:latin typeface="Aptos" pitchFamily="34" charset="0"/>
+                <a:ea typeface="Aptos" pitchFamily="34" charset="-122"/>
+                <a:cs typeface="Aptos" pitchFamily="34" charset="-120"/>
+              </a:rPr>
+              <a:t>Risk</a:t>
+            </a:r>
+            <a:endParaRPr lang="en-US" sz="1500" dirty="0"/>
+          </a:p>
+        </p:txBody>
+      </p:sp>
+      <p:sp>
+        <p:nvSpPr>
+          <p:cNvPr id="16" name="Shape 14"/>
+          <p:cNvSpPr/>
+          <p:nvPr/>
+        </p:nvSpPr>
+        <p:spPr>
+          <a:xfrm>
+            <a:off x="8366760" y="3639312"/>
+            <a:ext cx="2011680" cy="0"/>
+          </a:xfrm>
+          <a:prstGeom prst="line">
+            <a:avLst/>
+          </a:prstGeom>
+          <a:noFill/>
+          <a:ln w="63500">
+            <a:solidFill>
+              <a:srgbClr val="2F8A28"/>
+            </a:solidFill>
+            <a:prstDash val="solid"/>
+          </a:ln>
+        </p:spPr>
+      </p:sp>
+      <p:sp>
+        <p:nvSpPr>
+          <p:cNvPr id="17" name="Text 15"/>
+          <p:cNvSpPr/>
+          <p:nvPr/>
+        </p:nvSpPr>
+        <p:spPr>
+          <a:xfrm>
+            <a:off x="7909560" y="3849624"/>
+            <a:ext cx="2926080" cy="164592"/>
+          </a:xfrm>
+          <a:prstGeom prst="rect">
+            <a:avLst/>
+          </a:prstGeom>
+          <a:noFill/>
+          <a:ln/>
+        </p:spPr>
+        <p:txBody>
+          <a:bodyPr wrap="square" lIns="0" tIns="0" rIns="0" bIns="0" rtlCol="0" anchor="ctr"/>
+          <a:lstStyle/>
+          <a:p>
+            <a:pPr algn="ctr" indent="0" marL="0">
+              <a:buNone/>
+            </a:pPr>
+            <a:r>
+              <a:rPr lang="en-US" sz="900" dirty="0">
+                <a:solidFill>
+                  <a:srgbClr val="003A63"/>
+                </a:solidFill>
+                <a:latin typeface="Aptos" pitchFamily="34" charset="0"/>
+                <a:ea typeface="Aptos" pitchFamily="34" charset="-122"/>
+                <a:cs typeface="Aptos" pitchFamily="34" charset="-120"/>
+              </a:rPr>
+              <a:t>Human review</a:t>
+            </a:r>
+            <a:endParaRPr lang="en-US" sz="900" dirty="0"/>
+          </a:p>
+        </p:txBody>
+      </p:sp>
+      <p:sp>
+        <p:nvSpPr>
+          <p:cNvPr id="18" name="Shape 16"/>
+          <p:cNvSpPr/>
+          <p:nvPr/>
+        </p:nvSpPr>
+        <p:spPr>
+          <a:xfrm>
+            <a:off x="7635240" y="4498848"/>
+            <a:ext cx="3474720" cy="1143000"/>
+          </a:xfrm>
+          <a:prstGeom prst="roundRect">
+            <a:avLst>
+              <a:gd name="adj" fmla="val 9600"/>
             </a:avLst>
           </a:prstGeom>
           <a:solidFill>
@@ -11679,14 +13034,14 @@
       </p:sp>
       <p:sp>
         <p:nvSpPr>
-          <p:cNvPr id="16" name="Text 14"/>
-          <p:cNvSpPr/>
-          <p:nvPr/>
-        </p:nvSpPr>
-        <p:spPr>
-          <a:xfrm>
-            <a:off x="8074152" y="3666744"/>
-            <a:ext cx="2825496" cy="256032"/>
+          <p:cNvPr id="19" name="Text 17"/>
+          <p:cNvSpPr/>
+          <p:nvPr/>
+        </p:nvSpPr>
+        <p:spPr>
+          <a:xfrm>
+            <a:off x="7799832" y="4645152"/>
+            <a:ext cx="3145536" cy="256032"/>
           </a:xfrm>
           <a:prstGeom prst="rect">
             <a:avLst/>
@@ -11710,7 +13065,7 @@
                 <a:ea typeface="Aptos" pitchFamily="34" charset="-122"/>
                 <a:cs typeface="Aptos" pitchFamily="34" charset="-120"/>
               </a:rPr>
-              <a:t>Use this for</a:t>
+              <a:t>Safeguard to plan</a:t>
             </a:r>
             <a:endParaRPr lang="en-US" sz="1300" dirty="0"/>
           </a:p>
@@ -11718,14 +13073,14 @@
       </p:sp>
       <p:sp>
         <p:nvSpPr>
-          <p:cNvPr id="17" name="Text 15"/>
-          <p:cNvSpPr/>
-          <p:nvPr/>
-        </p:nvSpPr>
-        <p:spPr>
-          <a:xfrm>
-            <a:off x="8074152" y="4023360"/>
-            <a:ext cx="2825496" cy="1097280"/>
+          <p:cNvPr id="20" name="Text 18"/>
+          <p:cNvSpPr/>
+          <p:nvPr/>
+        </p:nvSpPr>
+        <p:spPr>
+          <a:xfrm>
+            <a:off x="7799832" y="5001768"/>
+            <a:ext cx="3145536" cy="502920"/>
           </a:xfrm>
           <a:prstGeom prst="rect">
             <a:avLst/>
@@ -11751,7 +13106,7 @@
                 <a:ea typeface="Aptos" pitchFamily="34" charset="-122"/>
                 <a:cs typeface="Aptos" pitchFamily="34" charset="-120"/>
               </a:rPr>
-              <a:t>Connect the concept to public health decisions, safeguards, documentation, or implementation work.</a:t>
+              <a:t>Use the assignment to test whether you can explain the concept, apply it to a realistic public health situation, and identify what would need review before the work moves forward.</a:t>
             </a:r>
             <a:endParaRPr lang="en-US" sz="1550" dirty="0"/>
           </a:p>
@@ -11925,8 +13280,8 @@
         </p:nvSpPr>
         <p:spPr>
           <a:xfrm>
-            <a:off x="9966960" y="6537960"/>
-            <a:ext cx="1645920" cy="201168"/>
+            <a:off x="9646920" y="6537960"/>
+            <a:ext cx="1965960" cy="201168"/>
           </a:xfrm>
           <a:prstGeom prst="rect">
             <a:avLst/>
@@ -11950,7 +13305,7 @@
                 <a:ea typeface="Aptos" pitchFamily="34" charset="-122"/>
                 <a:cs typeface="Aptos" pitchFamily="34" charset="-120"/>
               </a:rPr>
-              <a:t>Â© Paula Soper</a:t>
+              <a:t>Copyright Paula Soper</a:t>
             </a:r>
             <a:endParaRPr lang="en-US" sz="800" dirty="0"/>
           </a:p>
@@ -11997,77 +13352,13 @@
       </p:sp>
       <p:sp>
         <p:nvSpPr>
-          <p:cNvPr id="8" name="Shape 6"/>
+          <p:cNvPr id="8" name="Text 6"/>
           <p:cNvSpPr/>
           <p:nvPr/>
         </p:nvSpPr>
         <p:spPr>
           <a:xfrm>
             <a:off x="640080" y="658368"/>
-            <a:ext cx="420624" cy="420624"/>
-          </a:xfrm>
-          <a:prstGeom prst="ellipse">
-            <a:avLst/>
-          </a:prstGeom>
-          <a:solidFill>
-            <a:srgbClr val="0068B7"/>
-          </a:solidFill>
-          <a:ln w="12700">
-            <a:solidFill>
-              <a:srgbClr val="0068B7"/>
-            </a:solidFill>
-            <a:prstDash val="solid"/>
-          </a:ln>
-        </p:spPr>
-      </p:sp>
-      <p:sp>
-        <p:nvSpPr>
-          <p:cNvPr id="9" name="Text 7"/>
-          <p:cNvSpPr/>
-          <p:nvPr/>
-        </p:nvSpPr>
-        <p:spPr>
-          <a:xfrm>
-            <a:off x="640080" y="731520"/>
-            <a:ext cx="420624" cy="164592"/>
-          </a:xfrm>
-          <a:prstGeom prst="rect">
-            <a:avLst/>
-          </a:prstGeom>
-          <a:noFill/>
-          <a:ln/>
-        </p:spPr>
-        <p:txBody>
-          <a:bodyPr wrap="square" lIns="0" tIns="0" rIns="0" bIns="0" rtlCol="0" anchor="ctr"/>
-          <a:lstStyle/>
-          <a:p>
-            <a:pPr algn="ctr" indent="0" marL="0">
-              <a:buNone/>
-            </a:pPr>
-            <a:r>
-              <a:rPr lang="en-US" sz="1100" b="1" dirty="0">
-                <a:solidFill>
-                  <a:srgbClr val="FFFFFF"/>
-                </a:solidFill>
-                <a:latin typeface="Aptos" pitchFamily="34" charset="0"/>
-                <a:ea typeface="Aptos" pitchFamily="34" charset="-122"/>
-                <a:cs typeface="Aptos" pitchFamily="34" charset="-120"/>
-              </a:rPr>
-              <a:t>14</a:t>
-            </a:r>
-            <a:endParaRPr lang="en-US" sz="1100" dirty="0"/>
-          </a:p>
-        </p:txBody>
-      </p:sp>
-      <p:sp>
-        <p:nvSpPr>
-          <p:cNvPr id="10" name="Text 8"/>
-          <p:cNvSpPr/>
-          <p:nvPr/>
-        </p:nvSpPr>
-        <p:spPr>
-          <a:xfrm>
-            <a:off x="640080" y="621792"/>
             <a:ext cx="10881360" cy="713232"/>
           </a:xfrm>
           <a:prstGeom prst="rect">
@@ -12102,14 +13393,14 @@
       </p:sp>
       <p:sp>
         <p:nvSpPr>
-          <p:cNvPr id="11" name="Text 9"/>
+          <p:cNvPr id="9" name="Text 7"/>
           <p:cNvSpPr/>
           <p:nvPr/>
         </p:nvSpPr>
         <p:spPr>
           <a:xfrm>
             <a:off x="868680" y="1508760"/>
-            <a:ext cx="6537960" cy="4160520"/>
+            <a:ext cx="6309360" cy="4160520"/>
           </a:xfrm>
           <a:prstGeom prst="rect">
             <a:avLst/>
@@ -12168,18 +13459,18 @@
       </p:sp>
       <p:sp>
         <p:nvSpPr>
-          <p:cNvPr id="12" name="Shape 10"/>
-          <p:cNvSpPr/>
-          <p:nvPr/>
-        </p:nvSpPr>
-        <p:spPr>
-          <a:xfrm>
-            <a:off x="7909560" y="1417320"/>
-            <a:ext cx="3154680" cy="1828800"/>
+          <p:cNvPr id="10" name="Shape 8"/>
+          <p:cNvSpPr/>
+          <p:nvPr/>
+        </p:nvSpPr>
+        <p:spPr>
+          <a:xfrm>
+            <a:off x="7635240" y="1325880"/>
+            <a:ext cx="3474720" cy="1325880"/>
           </a:xfrm>
           <a:prstGeom prst="roundRect">
             <a:avLst>
-              <a:gd name="adj" fmla="val 6000"/>
+              <a:gd name="adj" fmla="val 8276"/>
             </a:avLst>
           </a:prstGeom>
           <a:solidFill>
@@ -12195,14 +13486,14 @@
       </p:sp>
       <p:sp>
         <p:nvSpPr>
-          <p:cNvPr id="13" name="Text 11"/>
-          <p:cNvSpPr/>
-          <p:nvPr/>
-        </p:nvSpPr>
-        <p:spPr>
-          <a:xfrm>
-            <a:off x="8074152" y="1563624"/>
-            <a:ext cx="2825496" cy="256032"/>
+          <p:cNvPr id="11" name="Text 9"/>
+          <p:cNvSpPr/>
+          <p:nvPr/>
+        </p:nvSpPr>
+        <p:spPr>
+          <a:xfrm>
+            <a:off x="7799832" y="1472184"/>
+            <a:ext cx="3145536" cy="256032"/>
           </a:xfrm>
           <a:prstGeom prst="rect">
             <a:avLst/>
@@ -12226,7 +13517,7 @@
                 <a:ea typeface="Aptos" pitchFamily="34" charset="-122"/>
                 <a:cs typeface="Aptos" pitchFamily="34" charset="-120"/>
               </a:rPr>
-              <a:t>Key idea</a:t>
+              <a:t>Risk check</a:t>
             </a:r>
             <a:endParaRPr lang="en-US" sz="1300" dirty="0"/>
           </a:p>
@@ -12234,14 +13525,14 @@
       </p:sp>
       <p:sp>
         <p:nvSpPr>
-          <p:cNvPr id="14" name="Text 12"/>
-          <p:cNvSpPr/>
-          <p:nvPr/>
-        </p:nvSpPr>
-        <p:spPr>
-          <a:xfrm>
-            <a:off x="8074152" y="1920240"/>
-            <a:ext cx="2825496" cy="1188720"/>
+          <p:cNvPr id="12" name="Text 10"/>
+          <p:cNvSpPr/>
+          <p:nvPr/>
+        </p:nvSpPr>
+        <p:spPr>
+          <a:xfrm>
+            <a:off x="7799832" y="1828800"/>
+            <a:ext cx="3145536" cy="685800"/>
           </a:xfrm>
           <a:prstGeom prst="rect">
             <a:avLst/>
@@ -12275,18 +13566,171 @@
       </p:sp>
       <p:sp>
         <p:nvSpPr>
-          <p:cNvPr id="15" name="Shape 13"/>
-          <p:cNvSpPr/>
-          <p:nvPr/>
-        </p:nvSpPr>
-        <p:spPr>
-          <a:xfrm>
-            <a:off x="7909560" y="3520440"/>
-            <a:ext cx="3154680" cy="1737360"/>
+          <p:cNvPr id="13" name="Shape 11"/>
+          <p:cNvSpPr/>
+          <p:nvPr/>
+        </p:nvSpPr>
+        <p:spPr>
+          <a:xfrm>
+            <a:off x="7635240" y="2788920"/>
+            <a:ext cx="3474720" cy="1536192"/>
           </a:xfrm>
           <a:prstGeom prst="roundRect">
             <a:avLst>
-              <a:gd name="adj" fmla="val 6316"/>
+              <a:gd name="adj" fmla="val 7143"/>
+            </a:avLst>
+          </a:prstGeom>
+          <a:solidFill>
+            <a:srgbClr val="FFFFFF">
+              <a:alpha val="88000"/>
+            </a:srgbClr>
+          </a:solidFill>
+          <a:ln w="12700">
+            <a:solidFill>
+              <a:srgbClr val="D6E8F2"/>
+            </a:solidFill>
+            <a:prstDash val="solid"/>
+          </a:ln>
+        </p:spPr>
+      </p:sp>
+      <p:sp>
+        <p:nvSpPr>
+          <p:cNvPr id="14" name="Shape 12"/>
+          <p:cNvSpPr/>
+          <p:nvPr/>
+        </p:nvSpPr>
+        <p:spPr>
+          <a:xfrm>
+            <a:off x="8046720" y="3108960"/>
+            <a:ext cx="2651760" cy="896112"/>
+          </a:xfrm>
+          <a:prstGeom prst="arc">
+            <a:avLst/>
+          </a:prstGeom>
+          <a:noFill/>
+          <a:ln w="25400">
+            <a:solidFill>
+              <a:srgbClr val="0068B7"/>
+            </a:solidFill>
+            <a:prstDash val="solid"/>
+          </a:ln>
+        </p:spPr>
+      </p:sp>
+      <p:sp>
+        <p:nvSpPr>
+          <p:cNvPr id="15" name="Text 13"/>
+          <p:cNvSpPr/>
+          <p:nvPr/>
+        </p:nvSpPr>
+        <p:spPr>
+          <a:xfrm>
+            <a:off x="7909560" y="3099816"/>
+            <a:ext cx="2926080" cy="256032"/>
+          </a:xfrm>
+          <a:prstGeom prst="rect">
+            <a:avLst/>
+          </a:prstGeom>
+          <a:noFill/>
+          <a:ln/>
+        </p:spPr>
+        <p:txBody>
+          <a:bodyPr wrap="square" lIns="0" tIns="0" rIns="0" bIns="0" rtlCol="0" anchor="ctr"/>
+          <a:lstStyle/>
+          <a:p>
+            <a:pPr algn="ctr" indent="0" marL="0">
+              <a:buNone/>
+            </a:pPr>
+            <a:r>
+              <a:rPr lang="en-US" sz="1500" b="1" dirty="0">
+                <a:solidFill>
+                  <a:srgbClr val="003A63"/>
+                </a:solidFill>
+                <a:latin typeface="Aptos" pitchFamily="34" charset="0"/>
+                <a:ea typeface="Aptos" pitchFamily="34" charset="-122"/>
+                <a:cs typeface="Aptos" pitchFamily="34" charset="-120"/>
+              </a:rPr>
+              <a:t>Risk</a:t>
+            </a:r>
+            <a:endParaRPr lang="en-US" sz="1500" dirty="0"/>
+          </a:p>
+        </p:txBody>
+      </p:sp>
+      <p:sp>
+        <p:nvSpPr>
+          <p:cNvPr id="16" name="Shape 14"/>
+          <p:cNvSpPr/>
+          <p:nvPr/>
+        </p:nvSpPr>
+        <p:spPr>
+          <a:xfrm>
+            <a:off x="8366760" y="3639312"/>
+            <a:ext cx="2011680" cy="0"/>
+          </a:xfrm>
+          <a:prstGeom prst="line">
+            <a:avLst/>
+          </a:prstGeom>
+          <a:noFill/>
+          <a:ln w="63500">
+            <a:solidFill>
+              <a:srgbClr val="2F8A28"/>
+            </a:solidFill>
+            <a:prstDash val="solid"/>
+          </a:ln>
+        </p:spPr>
+      </p:sp>
+      <p:sp>
+        <p:nvSpPr>
+          <p:cNvPr id="17" name="Text 15"/>
+          <p:cNvSpPr/>
+          <p:nvPr/>
+        </p:nvSpPr>
+        <p:spPr>
+          <a:xfrm>
+            <a:off x="7909560" y="3849624"/>
+            <a:ext cx="2926080" cy="164592"/>
+          </a:xfrm>
+          <a:prstGeom prst="rect">
+            <a:avLst/>
+          </a:prstGeom>
+          <a:noFill/>
+          <a:ln/>
+        </p:spPr>
+        <p:txBody>
+          <a:bodyPr wrap="square" lIns="0" tIns="0" rIns="0" bIns="0" rtlCol="0" anchor="ctr"/>
+          <a:lstStyle/>
+          <a:p>
+            <a:pPr algn="ctr" indent="0" marL="0">
+              <a:buNone/>
+            </a:pPr>
+            <a:r>
+              <a:rPr lang="en-US" sz="900" dirty="0">
+                <a:solidFill>
+                  <a:srgbClr val="003A63"/>
+                </a:solidFill>
+                <a:latin typeface="Aptos" pitchFamily="34" charset="0"/>
+                <a:ea typeface="Aptos" pitchFamily="34" charset="-122"/>
+                <a:cs typeface="Aptos" pitchFamily="34" charset="-120"/>
+              </a:rPr>
+              <a:t>Human review</a:t>
+            </a:r>
+            <a:endParaRPr lang="en-US" sz="900" dirty="0"/>
+          </a:p>
+        </p:txBody>
+      </p:sp>
+      <p:sp>
+        <p:nvSpPr>
+          <p:cNvPr id="18" name="Shape 16"/>
+          <p:cNvSpPr/>
+          <p:nvPr/>
+        </p:nvSpPr>
+        <p:spPr>
+          <a:xfrm>
+            <a:off x="7635240" y="4498848"/>
+            <a:ext cx="3474720" cy="1143000"/>
+          </a:xfrm>
+          <a:prstGeom prst="roundRect">
+            <a:avLst>
+              <a:gd name="adj" fmla="val 9600"/>
             </a:avLst>
           </a:prstGeom>
           <a:solidFill>
@@ -12302,14 +13746,14 @@
       </p:sp>
       <p:sp>
         <p:nvSpPr>
-          <p:cNvPr id="16" name="Text 14"/>
-          <p:cNvSpPr/>
-          <p:nvPr/>
-        </p:nvSpPr>
-        <p:spPr>
-          <a:xfrm>
-            <a:off x="8074152" y="3666744"/>
-            <a:ext cx="2825496" cy="256032"/>
+          <p:cNvPr id="19" name="Text 17"/>
+          <p:cNvSpPr/>
+          <p:nvPr/>
+        </p:nvSpPr>
+        <p:spPr>
+          <a:xfrm>
+            <a:off x="7799832" y="4645152"/>
+            <a:ext cx="3145536" cy="256032"/>
           </a:xfrm>
           <a:prstGeom prst="rect">
             <a:avLst/>
@@ -12333,7 +13777,7 @@
                 <a:ea typeface="Aptos" pitchFamily="34" charset="-122"/>
                 <a:cs typeface="Aptos" pitchFamily="34" charset="-120"/>
               </a:rPr>
-              <a:t>Use this for</a:t>
+              <a:t>Safeguard to plan</a:t>
             </a:r>
             <a:endParaRPr lang="en-US" sz="1300" dirty="0"/>
           </a:p>
@@ -12341,14 +13785,14 @@
       </p:sp>
       <p:sp>
         <p:nvSpPr>
-          <p:cNvPr id="17" name="Text 15"/>
-          <p:cNvSpPr/>
-          <p:nvPr/>
-        </p:nvSpPr>
-        <p:spPr>
-          <a:xfrm>
-            <a:off x="8074152" y="4023360"/>
-            <a:ext cx="2825496" cy="1097280"/>
+          <p:cNvPr id="20" name="Text 18"/>
+          <p:cNvSpPr/>
+          <p:nvPr/>
+        </p:nvSpPr>
+        <p:spPr>
+          <a:xfrm>
+            <a:off x="7799832" y="5001768"/>
+            <a:ext cx="3145536" cy="502920"/>
           </a:xfrm>
           <a:prstGeom prst="rect">
             <a:avLst/>
@@ -12374,7 +13818,7 @@
                 <a:ea typeface="Aptos" pitchFamily="34" charset="-122"/>
                 <a:cs typeface="Aptos" pitchFamily="34" charset="-120"/>
               </a:rPr>
-              <a:t>Connect the concept to public health decisions, safeguards, documentation, or implementation work.</a:t>
+              <a:t>Use the assignment to test whether you can explain the concept, apply it to a realistic public health situation, and identify what would need review before the work moves forward.</a:t>
             </a:r>
             <a:endParaRPr lang="en-US" sz="1550" dirty="0"/>
           </a:p>
@@ -12548,8 +13992,8 @@
         </p:nvSpPr>
         <p:spPr>
           <a:xfrm>
-            <a:off x="9966960" y="6537960"/>
-            <a:ext cx="1645920" cy="201168"/>
+            <a:off x="9646920" y="6537960"/>
+            <a:ext cx="1965960" cy="201168"/>
           </a:xfrm>
           <a:prstGeom prst="rect">
             <a:avLst/>
@@ -12573,7 +14017,7 @@
                 <a:ea typeface="Aptos" pitchFamily="34" charset="-122"/>
                 <a:cs typeface="Aptos" pitchFamily="34" charset="-120"/>
               </a:rPr>
-              <a:t>Â© Paula Soper</a:t>
+              <a:t>Copyright Paula Soper</a:t>
             </a:r>
             <a:endParaRPr lang="en-US" sz="800" dirty="0"/>
           </a:p>
@@ -12620,77 +14064,13 @@
       </p:sp>
       <p:sp>
         <p:nvSpPr>
-          <p:cNvPr id="8" name="Shape 6"/>
+          <p:cNvPr id="8" name="Text 6"/>
           <p:cNvSpPr/>
           <p:nvPr/>
         </p:nvSpPr>
         <p:spPr>
           <a:xfrm>
             <a:off x="640080" y="658368"/>
-            <a:ext cx="420624" cy="420624"/>
-          </a:xfrm>
-          <a:prstGeom prst="ellipse">
-            <a:avLst/>
-          </a:prstGeom>
-          <a:solidFill>
-            <a:srgbClr val="0068B7"/>
-          </a:solidFill>
-          <a:ln w="12700">
-            <a:solidFill>
-              <a:srgbClr val="0068B7"/>
-            </a:solidFill>
-            <a:prstDash val="solid"/>
-          </a:ln>
-        </p:spPr>
-      </p:sp>
-      <p:sp>
-        <p:nvSpPr>
-          <p:cNvPr id="9" name="Text 7"/>
-          <p:cNvSpPr/>
-          <p:nvPr/>
-        </p:nvSpPr>
-        <p:spPr>
-          <a:xfrm>
-            <a:off x="640080" y="731520"/>
-            <a:ext cx="420624" cy="164592"/>
-          </a:xfrm>
-          <a:prstGeom prst="rect">
-            <a:avLst/>
-          </a:prstGeom>
-          <a:noFill/>
-          <a:ln/>
-        </p:spPr>
-        <p:txBody>
-          <a:bodyPr wrap="square" lIns="0" tIns="0" rIns="0" bIns="0" rtlCol="0" anchor="ctr"/>
-          <a:lstStyle/>
-          <a:p>
-            <a:pPr algn="ctr" indent="0" marL="0">
-              <a:buNone/>
-            </a:pPr>
-            <a:r>
-              <a:rPr lang="en-US" sz="1100" b="1" dirty="0">
-                <a:solidFill>
-                  <a:srgbClr val="FFFFFF"/>
-                </a:solidFill>
-                <a:latin typeface="Aptos" pitchFamily="34" charset="0"/>
-                <a:ea typeface="Aptos" pitchFamily="34" charset="-122"/>
-                <a:cs typeface="Aptos" pitchFamily="34" charset="-120"/>
-              </a:rPr>
-              <a:t>15</a:t>
-            </a:r>
-            <a:endParaRPr lang="en-US" sz="1100" dirty="0"/>
-          </a:p>
-        </p:txBody>
-      </p:sp>
-      <p:sp>
-        <p:nvSpPr>
-          <p:cNvPr id="10" name="Text 8"/>
-          <p:cNvSpPr/>
-          <p:nvPr/>
-        </p:nvSpPr>
-        <p:spPr>
-          <a:xfrm>
-            <a:off x="640080" y="621792"/>
             <a:ext cx="10881360" cy="713232"/>
           </a:xfrm>
           <a:prstGeom prst="rect">
@@ -12725,14 +14105,14 @@
       </p:sp>
       <p:sp>
         <p:nvSpPr>
-          <p:cNvPr id="11" name="Text 9"/>
+          <p:cNvPr id="9" name="Text 7"/>
           <p:cNvSpPr/>
           <p:nvPr/>
         </p:nvSpPr>
         <p:spPr>
           <a:xfrm>
             <a:off x="868680" y="1508760"/>
-            <a:ext cx="6537960" cy="4160520"/>
+            <a:ext cx="6309360" cy="4160520"/>
           </a:xfrm>
           <a:prstGeom prst="rect">
             <a:avLst/>
@@ -12791,18 +14171,18 @@
       </p:sp>
       <p:sp>
         <p:nvSpPr>
-          <p:cNvPr id="12" name="Shape 10"/>
-          <p:cNvSpPr/>
-          <p:nvPr/>
-        </p:nvSpPr>
-        <p:spPr>
-          <a:xfrm>
-            <a:off x="7909560" y="1417320"/>
-            <a:ext cx="3154680" cy="1828800"/>
+          <p:cNvPr id="10" name="Shape 8"/>
+          <p:cNvSpPr/>
+          <p:nvPr/>
+        </p:nvSpPr>
+        <p:spPr>
+          <a:xfrm>
+            <a:off x="7635240" y="1325880"/>
+            <a:ext cx="3474720" cy="1325880"/>
           </a:xfrm>
           <a:prstGeom prst="roundRect">
             <a:avLst>
-              <a:gd name="adj" fmla="val 6000"/>
+              <a:gd name="adj" fmla="val 8276"/>
             </a:avLst>
           </a:prstGeom>
           <a:solidFill>
@@ -12818,14 +14198,14 @@
       </p:sp>
       <p:sp>
         <p:nvSpPr>
-          <p:cNvPr id="13" name="Text 11"/>
-          <p:cNvSpPr/>
-          <p:nvPr/>
-        </p:nvSpPr>
-        <p:spPr>
-          <a:xfrm>
-            <a:off x="8074152" y="1563624"/>
-            <a:ext cx="2825496" cy="256032"/>
+          <p:cNvPr id="11" name="Text 9"/>
+          <p:cNvSpPr/>
+          <p:nvPr/>
+        </p:nvSpPr>
+        <p:spPr>
+          <a:xfrm>
+            <a:off x="7799832" y="1472184"/>
+            <a:ext cx="3145536" cy="256032"/>
           </a:xfrm>
           <a:prstGeom prst="rect">
             <a:avLst/>
@@ -12849,7 +14229,7 @@
                 <a:ea typeface="Aptos" pitchFamily="34" charset="-122"/>
                 <a:cs typeface="Aptos" pitchFamily="34" charset="-120"/>
               </a:rPr>
-              <a:t>Key idea</a:t>
+              <a:t>Risk check</a:t>
             </a:r>
             <a:endParaRPr lang="en-US" sz="1300" dirty="0"/>
           </a:p>
@@ -12857,14 +14237,14 @@
       </p:sp>
       <p:sp>
         <p:nvSpPr>
-          <p:cNvPr id="14" name="Text 12"/>
-          <p:cNvSpPr/>
-          <p:nvPr/>
-        </p:nvSpPr>
-        <p:spPr>
-          <a:xfrm>
-            <a:off x="8074152" y="1920240"/>
-            <a:ext cx="2825496" cy="1188720"/>
+          <p:cNvPr id="12" name="Text 10"/>
+          <p:cNvSpPr/>
+          <p:nvPr/>
+        </p:nvSpPr>
+        <p:spPr>
+          <a:xfrm>
+            <a:off x="7799832" y="1828800"/>
+            <a:ext cx="3145536" cy="685800"/>
           </a:xfrm>
           <a:prstGeom prst="rect">
             <a:avLst/>
@@ -12898,18 +14278,171 @@
       </p:sp>
       <p:sp>
         <p:nvSpPr>
-          <p:cNvPr id="15" name="Shape 13"/>
-          <p:cNvSpPr/>
-          <p:nvPr/>
-        </p:nvSpPr>
-        <p:spPr>
-          <a:xfrm>
-            <a:off x="7909560" y="3520440"/>
-            <a:ext cx="3154680" cy="1737360"/>
+          <p:cNvPr id="13" name="Shape 11"/>
+          <p:cNvSpPr/>
+          <p:nvPr/>
+        </p:nvSpPr>
+        <p:spPr>
+          <a:xfrm>
+            <a:off x="7635240" y="2788920"/>
+            <a:ext cx="3474720" cy="1536192"/>
           </a:xfrm>
           <a:prstGeom prst="roundRect">
             <a:avLst>
-              <a:gd name="adj" fmla="val 6316"/>
+              <a:gd name="adj" fmla="val 7143"/>
+            </a:avLst>
+          </a:prstGeom>
+          <a:solidFill>
+            <a:srgbClr val="FFFFFF">
+              <a:alpha val="88000"/>
+            </a:srgbClr>
+          </a:solidFill>
+          <a:ln w="12700">
+            <a:solidFill>
+              <a:srgbClr val="D6E8F2"/>
+            </a:solidFill>
+            <a:prstDash val="solid"/>
+          </a:ln>
+        </p:spPr>
+      </p:sp>
+      <p:sp>
+        <p:nvSpPr>
+          <p:cNvPr id="14" name="Shape 12"/>
+          <p:cNvSpPr/>
+          <p:nvPr/>
+        </p:nvSpPr>
+        <p:spPr>
+          <a:xfrm>
+            <a:off x="8046720" y="3108960"/>
+            <a:ext cx="2651760" cy="896112"/>
+          </a:xfrm>
+          <a:prstGeom prst="arc">
+            <a:avLst/>
+          </a:prstGeom>
+          <a:noFill/>
+          <a:ln w="25400">
+            <a:solidFill>
+              <a:srgbClr val="0068B7"/>
+            </a:solidFill>
+            <a:prstDash val="solid"/>
+          </a:ln>
+        </p:spPr>
+      </p:sp>
+      <p:sp>
+        <p:nvSpPr>
+          <p:cNvPr id="15" name="Text 13"/>
+          <p:cNvSpPr/>
+          <p:nvPr/>
+        </p:nvSpPr>
+        <p:spPr>
+          <a:xfrm>
+            <a:off x="7909560" y="3099816"/>
+            <a:ext cx="2926080" cy="256032"/>
+          </a:xfrm>
+          <a:prstGeom prst="rect">
+            <a:avLst/>
+          </a:prstGeom>
+          <a:noFill/>
+          <a:ln/>
+        </p:spPr>
+        <p:txBody>
+          <a:bodyPr wrap="square" lIns="0" tIns="0" rIns="0" bIns="0" rtlCol="0" anchor="ctr"/>
+          <a:lstStyle/>
+          <a:p>
+            <a:pPr algn="ctr" indent="0" marL="0">
+              <a:buNone/>
+            </a:pPr>
+            <a:r>
+              <a:rPr lang="en-US" sz="1500" b="1" dirty="0">
+                <a:solidFill>
+                  <a:srgbClr val="003A63"/>
+                </a:solidFill>
+                <a:latin typeface="Aptos" pitchFamily="34" charset="0"/>
+                <a:ea typeface="Aptos" pitchFamily="34" charset="-122"/>
+                <a:cs typeface="Aptos" pitchFamily="34" charset="-120"/>
+              </a:rPr>
+              <a:t>Risk</a:t>
+            </a:r>
+            <a:endParaRPr lang="en-US" sz="1500" dirty="0"/>
+          </a:p>
+        </p:txBody>
+      </p:sp>
+      <p:sp>
+        <p:nvSpPr>
+          <p:cNvPr id="16" name="Shape 14"/>
+          <p:cNvSpPr/>
+          <p:nvPr/>
+        </p:nvSpPr>
+        <p:spPr>
+          <a:xfrm>
+            <a:off x="8366760" y="3639312"/>
+            <a:ext cx="2011680" cy="0"/>
+          </a:xfrm>
+          <a:prstGeom prst="line">
+            <a:avLst/>
+          </a:prstGeom>
+          <a:noFill/>
+          <a:ln w="63500">
+            <a:solidFill>
+              <a:srgbClr val="2F8A28"/>
+            </a:solidFill>
+            <a:prstDash val="solid"/>
+          </a:ln>
+        </p:spPr>
+      </p:sp>
+      <p:sp>
+        <p:nvSpPr>
+          <p:cNvPr id="17" name="Text 15"/>
+          <p:cNvSpPr/>
+          <p:nvPr/>
+        </p:nvSpPr>
+        <p:spPr>
+          <a:xfrm>
+            <a:off x="7909560" y="3849624"/>
+            <a:ext cx="2926080" cy="164592"/>
+          </a:xfrm>
+          <a:prstGeom prst="rect">
+            <a:avLst/>
+          </a:prstGeom>
+          <a:noFill/>
+          <a:ln/>
+        </p:spPr>
+        <p:txBody>
+          <a:bodyPr wrap="square" lIns="0" tIns="0" rIns="0" bIns="0" rtlCol="0" anchor="ctr"/>
+          <a:lstStyle/>
+          <a:p>
+            <a:pPr algn="ctr" indent="0" marL="0">
+              <a:buNone/>
+            </a:pPr>
+            <a:r>
+              <a:rPr lang="en-US" sz="900" dirty="0">
+                <a:solidFill>
+                  <a:srgbClr val="003A63"/>
+                </a:solidFill>
+                <a:latin typeface="Aptos" pitchFamily="34" charset="0"/>
+                <a:ea typeface="Aptos" pitchFamily="34" charset="-122"/>
+                <a:cs typeface="Aptos" pitchFamily="34" charset="-120"/>
+              </a:rPr>
+              <a:t>Human review</a:t>
+            </a:r>
+            <a:endParaRPr lang="en-US" sz="900" dirty="0"/>
+          </a:p>
+        </p:txBody>
+      </p:sp>
+      <p:sp>
+        <p:nvSpPr>
+          <p:cNvPr id="18" name="Shape 16"/>
+          <p:cNvSpPr/>
+          <p:nvPr/>
+        </p:nvSpPr>
+        <p:spPr>
+          <a:xfrm>
+            <a:off x="7635240" y="4498848"/>
+            <a:ext cx="3474720" cy="1143000"/>
+          </a:xfrm>
+          <a:prstGeom prst="roundRect">
+            <a:avLst>
+              <a:gd name="adj" fmla="val 9600"/>
             </a:avLst>
           </a:prstGeom>
           <a:solidFill>
@@ -12925,14 +14458,14 @@
       </p:sp>
       <p:sp>
         <p:nvSpPr>
-          <p:cNvPr id="16" name="Text 14"/>
-          <p:cNvSpPr/>
-          <p:nvPr/>
-        </p:nvSpPr>
-        <p:spPr>
-          <a:xfrm>
-            <a:off x="8074152" y="3666744"/>
-            <a:ext cx="2825496" cy="256032"/>
+          <p:cNvPr id="19" name="Text 17"/>
+          <p:cNvSpPr/>
+          <p:nvPr/>
+        </p:nvSpPr>
+        <p:spPr>
+          <a:xfrm>
+            <a:off x="7799832" y="4645152"/>
+            <a:ext cx="3145536" cy="256032"/>
           </a:xfrm>
           <a:prstGeom prst="rect">
             <a:avLst/>
@@ -12956,7 +14489,7 @@
                 <a:ea typeface="Aptos" pitchFamily="34" charset="-122"/>
                 <a:cs typeface="Aptos" pitchFamily="34" charset="-120"/>
               </a:rPr>
-              <a:t>Use this for</a:t>
+              <a:t>Safeguard to plan</a:t>
             </a:r>
             <a:endParaRPr lang="en-US" sz="1300" dirty="0"/>
           </a:p>
@@ -12964,14 +14497,14 @@
       </p:sp>
       <p:sp>
         <p:nvSpPr>
-          <p:cNvPr id="17" name="Text 15"/>
-          <p:cNvSpPr/>
-          <p:nvPr/>
-        </p:nvSpPr>
-        <p:spPr>
-          <a:xfrm>
-            <a:off x="8074152" y="4023360"/>
-            <a:ext cx="2825496" cy="1097280"/>
+          <p:cNvPr id="20" name="Text 18"/>
+          <p:cNvSpPr/>
+          <p:nvPr/>
+        </p:nvSpPr>
+        <p:spPr>
+          <a:xfrm>
+            <a:off x="7799832" y="5001768"/>
+            <a:ext cx="3145536" cy="502920"/>
           </a:xfrm>
           <a:prstGeom prst="rect">
             <a:avLst/>
@@ -12997,7 +14530,7 @@
                 <a:ea typeface="Aptos" pitchFamily="34" charset="-122"/>
                 <a:cs typeface="Aptos" pitchFamily="34" charset="-120"/>
               </a:rPr>
-              <a:t>Connect the concept to public health decisions, safeguards, documentation, or implementation work.</a:t>
+              <a:t>Identify what could go wrong, who could be affected, what safeguards are needed, and what evidence should be reviewed before use expands.</a:t>
             </a:r>
             <a:endParaRPr lang="en-US" sz="1550" dirty="0"/>
           </a:p>
@@ -13171,8 +14704,8 @@
         </p:nvSpPr>
         <p:spPr>
           <a:xfrm>
-            <a:off x="9966960" y="6537960"/>
-            <a:ext cx="1645920" cy="201168"/>
+            <a:off x="9646920" y="6537960"/>
+            <a:ext cx="1965960" cy="201168"/>
           </a:xfrm>
           <a:prstGeom prst="rect">
             <a:avLst/>
@@ -13196,7 +14729,7 @@
                 <a:ea typeface="Aptos" pitchFamily="34" charset="-122"/>
                 <a:cs typeface="Aptos" pitchFamily="34" charset="-120"/>
               </a:rPr>
-              <a:t>Â© Paula Soper</a:t>
+              <a:t>Copyright Paula Soper</a:t>
             </a:r>
             <a:endParaRPr lang="en-US" sz="800" dirty="0"/>
           </a:p>
@@ -13539,46 +15072,7 @@
       </p:sp>
       <p:sp>
         <p:nvSpPr>
-          <p:cNvPr id="15" name="Text 13"/>
-          <p:cNvSpPr/>
-          <p:nvPr/>
-        </p:nvSpPr>
-        <p:spPr>
-          <a:xfrm>
-            <a:off x="8817864" y="4187952"/>
-            <a:ext cx="201168" cy="256032"/>
-          </a:xfrm>
-          <a:prstGeom prst="rect">
-            <a:avLst/>
-          </a:prstGeom>
-          <a:noFill/>
-          <a:ln/>
-        </p:spPr>
-        <p:txBody>
-          <a:bodyPr wrap="square" lIns="0" tIns="0" rIns="0" bIns="0" rtlCol="0" anchor="ctr"/>
-          <a:lstStyle/>
-          <a:p>
-            <a:pPr algn="ctr" indent="0" marL="0">
-              <a:buNone/>
-            </a:pPr>
-            <a:r>
-              <a:rPr lang="en-US" sz="1800" b="1" dirty="0">
-                <a:solidFill>
-                  <a:srgbClr val="0068B7"/>
-                </a:solidFill>
-                <a:latin typeface="Aptos" pitchFamily="34" charset="0"/>
-                <a:ea typeface="Aptos" pitchFamily="34" charset="-122"/>
-                <a:cs typeface="Aptos" pitchFamily="34" charset="-120"/>
-              </a:rPr>
-              <a:t>â†’</a:t>
-            </a:r>
-            <a:endParaRPr lang="en-US" sz="1800" dirty="0"/>
-          </a:p>
-        </p:txBody>
-      </p:sp>
-      <p:sp>
-        <p:nvSpPr>
-          <p:cNvPr id="16" name="Shape 14"/>
+          <p:cNvPr id="15" name="Shape 13"/>
           <p:cNvSpPr/>
           <p:nvPr/>
         </p:nvSpPr>
@@ -13605,7 +15099,7 @@
       </p:sp>
       <p:sp>
         <p:nvSpPr>
-          <p:cNvPr id="17" name="Text 15"/>
+          <p:cNvPr id="16" name="Text 14"/>
           <p:cNvSpPr/>
           <p:nvPr/>
         </p:nvSpPr>
@@ -13646,46 +15140,7 @@
       </p:sp>
       <p:sp>
         <p:nvSpPr>
-          <p:cNvPr id="18" name="Text 16"/>
-          <p:cNvSpPr/>
-          <p:nvPr/>
-        </p:nvSpPr>
-        <p:spPr>
-          <a:xfrm>
-            <a:off x="10046208" y="4187952"/>
-            <a:ext cx="201168" cy="256032"/>
-          </a:xfrm>
-          <a:prstGeom prst="rect">
-            <a:avLst/>
-          </a:prstGeom>
-          <a:noFill/>
-          <a:ln/>
-        </p:spPr>
-        <p:txBody>
-          <a:bodyPr wrap="square" lIns="0" tIns="0" rIns="0" bIns="0" rtlCol="0" anchor="ctr"/>
-          <a:lstStyle/>
-          <a:p>
-            <a:pPr algn="ctr" indent="0" marL="0">
-              <a:buNone/>
-            </a:pPr>
-            <a:r>
-              <a:rPr lang="en-US" sz="1800" b="1" dirty="0">
-                <a:solidFill>
-                  <a:srgbClr val="0068B7"/>
-                </a:solidFill>
-                <a:latin typeface="Aptos" pitchFamily="34" charset="0"/>
-                <a:ea typeface="Aptos" pitchFamily="34" charset="-122"/>
-                <a:cs typeface="Aptos" pitchFamily="34" charset="-120"/>
-              </a:rPr>
-              <a:t>â†’</a:t>
-            </a:r>
-            <a:endParaRPr lang="en-US" sz="1800" dirty="0"/>
-          </a:p>
-        </p:txBody>
-      </p:sp>
-      <p:sp>
-        <p:nvSpPr>
-          <p:cNvPr id="19" name="Shape 17"/>
+          <p:cNvPr id="17" name="Shape 15"/>
           <p:cNvSpPr/>
           <p:nvPr/>
         </p:nvSpPr>
@@ -13712,7 +15167,7 @@
       </p:sp>
       <p:sp>
         <p:nvSpPr>
-          <p:cNvPr id="20" name="Text 18"/>
+          <p:cNvPr id="18" name="Text 16"/>
           <p:cNvSpPr/>
           <p:nvPr/>
         </p:nvSpPr>
@@ -13919,8 +15374,8 @@
         </p:nvSpPr>
         <p:spPr>
           <a:xfrm>
-            <a:off x="9966960" y="6537960"/>
-            <a:ext cx="1645920" cy="201168"/>
+            <a:off x="9646920" y="6537960"/>
+            <a:ext cx="1965960" cy="201168"/>
           </a:xfrm>
           <a:prstGeom prst="rect">
             <a:avLst/>
@@ -13944,7 +15399,7 @@
                 <a:ea typeface="Aptos" pitchFamily="34" charset="-122"/>
                 <a:cs typeface="Aptos" pitchFamily="34" charset="-120"/>
               </a:rPr>
-              <a:t>Â© Paula Soper</a:t>
+              <a:t>Copyright Paula Soper</a:t>
             </a:r>
             <a:endParaRPr lang="en-US" sz="800" dirty="0"/>
           </a:p>
@@ -14287,46 +15742,7 @@
       </p:sp>
       <p:sp>
         <p:nvSpPr>
-          <p:cNvPr id="15" name="Text 13"/>
-          <p:cNvSpPr/>
-          <p:nvPr/>
-        </p:nvSpPr>
-        <p:spPr>
-          <a:xfrm>
-            <a:off x="8817864" y="4187952"/>
-            <a:ext cx="201168" cy="256032"/>
-          </a:xfrm>
-          <a:prstGeom prst="rect">
-            <a:avLst/>
-          </a:prstGeom>
-          <a:noFill/>
-          <a:ln/>
-        </p:spPr>
-        <p:txBody>
-          <a:bodyPr wrap="square" lIns="0" tIns="0" rIns="0" bIns="0" rtlCol="0" anchor="ctr"/>
-          <a:lstStyle/>
-          <a:p>
-            <a:pPr algn="ctr" indent="0" marL="0">
-              <a:buNone/>
-            </a:pPr>
-            <a:r>
-              <a:rPr lang="en-US" sz="1800" b="1" dirty="0">
-                <a:solidFill>
-                  <a:srgbClr val="0068B7"/>
-                </a:solidFill>
-                <a:latin typeface="Aptos" pitchFamily="34" charset="0"/>
-                <a:ea typeface="Aptos" pitchFamily="34" charset="-122"/>
-                <a:cs typeface="Aptos" pitchFamily="34" charset="-120"/>
-              </a:rPr>
-              <a:t>â†’</a:t>
-            </a:r>
-            <a:endParaRPr lang="en-US" sz="1800" dirty="0"/>
-          </a:p>
-        </p:txBody>
-      </p:sp>
-      <p:sp>
-        <p:nvSpPr>
-          <p:cNvPr id="16" name="Shape 14"/>
+          <p:cNvPr id="15" name="Shape 13"/>
           <p:cNvSpPr/>
           <p:nvPr/>
         </p:nvSpPr>
@@ -14353,7 +15769,7 @@
       </p:sp>
       <p:sp>
         <p:nvSpPr>
-          <p:cNvPr id="17" name="Text 15"/>
+          <p:cNvPr id="16" name="Text 14"/>
           <p:cNvSpPr/>
           <p:nvPr/>
         </p:nvSpPr>
@@ -14394,46 +15810,7 @@
       </p:sp>
       <p:sp>
         <p:nvSpPr>
-          <p:cNvPr id="18" name="Text 16"/>
-          <p:cNvSpPr/>
-          <p:nvPr/>
-        </p:nvSpPr>
-        <p:spPr>
-          <a:xfrm>
-            <a:off x="10046208" y="4187952"/>
-            <a:ext cx="201168" cy="256032"/>
-          </a:xfrm>
-          <a:prstGeom prst="rect">
-            <a:avLst/>
-          </a:prstGeom>
-          <a:noFill/>
-          <a:ln/>
-        </p:spPr>
-        <p:txBody>
-          <a:bodyPr wrap="square" lIns="0" tIns="0" rIns="0" bIns="0" rtlCol="0" anchor="ctr"/>
-          <a:lstStyle/>
-          <a:p>
-            <a:pPr algn="ctr" indent="0" marL="0">
-              <a:buNone/>
-            </a:pPr>
-            <a:r>
-              <a:rPr lang="en-US" sz="1800" b="1" dirty="0">
-                <a:solidFill>
-                  <a:srgbClr val="0068B7"/>
-                </a:solidFill>
-                <a:latin typeface="Aptos" pitchFamily="34" charset="0"/>
-                <a:ea typeface="Aptos" pitchFamily="34" charset="-122"/>
-                <a:cs typeface="Aptos" pitchFamily="34" charset="-120"/>
-              </a:rPr>
-              <a:t>â†’</a:t>
-            </a:r>
-            <a:endParaRPr lang="en-US" sz="1800" dirty="0"/>
-          </a:p>
-        </p:txBody>
-      </p:sp>
-      <p:sp>
-        <p:nvSpPr>
-          <p:cNvPr id="19" name="Shape 17"/>
+          <p:cNvPr id="17" name="Shape 15"/>
           <p:cNvSpPr/>
           <p:nvPr/>
         </p:nvSpPr>
@@ -14460,7 +15837,7 @@
       </p:sp>
       <p:sp>
         <p:nvSpPr>
-          <p:cNvPr id="20" name="Text 18"/>
+          <p:cNvPr id="18" name="Text 16"/>
           <p:cNvSpPr/>
           <p:nvPr/>
         </p:nvSpPr>
@@ -14667,8 +16044,8 @@
         </p:nvSpPr>
         <p:spPr>
           <a:xfrm>
-            <a:off x="9966960" y="6537960"/>
-            <a:ext cx="1645920" cy="201168"/>
+            <a:off x="9646920" y="6537960"/>
+            <a:ext cx="1965960" cy="201168"/>
           </a:xfrm>
           <a:prstGeom prst="rect">
             <a:avLst/>
@@ -14692,7 +16069,7 @@
                 <a:ea typeface="Aptos" pitchFamily="34" charset="-122"/>
                 <a:cs typeface="Aptos" pitchFamily="34" charset="-120"/>
               </a:rPr>
-              <a:t>Â© Paula Soper</a:t>
+              <a:t>Copyright Paula Soper</a:t>
             </a:r>
             <a:endParaRPr lang="en-US" sz="800" dirty="0"/>
           </a:p>
@@ -14739,77 +16116,13 @@
       </p:sp>
       <p:sp>
         <p:nvSpPr>
-          <p:cNvPr id="8" name="Shape 6"/>
+          <p:cNvPr id="8" name="Text 6"/>
           <p:cNvSpPr/>
           <p:nvPr/>
         </p:nvSpPr>
         <p:spPr>
           <a:xfrm>
             <a:off x="640080" y="658368"/>
-            <a:ext cx="420624" cy="420624"/>
-          </a:xfrm>
-          <a:prstGeom prst="ellipse">
-            <a:avLst/>
-          </a:prstGeom>
-          <a:solidFill>
-            <a:srgbClr val="0068B7"/>
-          </a:solidFill>
-          <a:ln w="12700">
-            <a:solidFill>
-              <a:srgbClr val="0068B7"/>
-            </a:solidFill>
-            <a:prstDash val="solid"/>
-          </a:ln>
-        </p:spPr>
-      </p:sp>
-      <p:sp>
-        <p:nvSpPr>
-          <p:cNvPr id="9" name="Text 7"/>
-          <p:cNvSpPr/>
-          <p:nvPr/>
-        </p:nvSpPr>
-        <p:spPr>
-          <a:xfrm>
-            <a:off x="640080" y="731520"/>
-            <a:ext cx="420624" cy="164592"/>
-          </a:xfrm>
-          <a:prstGeom prst="rect">
-            <a:avLst/>
-          </a:prstGeom>
-          <a:noFill/>
-          <a:ln/>
-        </p:spPr>
-        <p:txBody>
-          <a:bodyPr wrap="square" lIns="0" tIns="0" rIns="0" bIns="0" rtlCol="0" anchor="ctr"/>
-          <a:lstStyle/>
-          <a:p>
-            <a:pPr algn="ctr" indent="0" marL="0">
-              <a:buNone/>
-            </a:pPr>
-            <a:r>
-              <a:rPr lang="en-US" sz="1100" b="1" dirty="0">
-                <a:solidFill>
-                  <a:srgbClr val="FFFFFF"/>
-                </a:solidFill>
-                <a:latin typeface="Aptos" pitchFamily="34" charset="0"/>
-                <a:ea typeface="Aptos" pitchFamily="34" charset="-122"/>
-                <a:cs typeface="Aptos" pitchFamily="34" charset="-120"/>
-              </a:rPr>
-              <a:t>1</a:t>
-            </a:r>
-            <a:endParaRPr lang="en-US" sz="1100" dirty="0"/>
-          </a:p>
-        </p:txBody>
-      </p:sp>
-      <p:sp>
-        <p:nvSpPr>
-          <p:cNvPr id="10" name="Text 8"/>
-          <p:cNvSpPr/>
-          <p:nvPr/>
-        </p:nvSpPr>
-        <p:spPr>
-          <a:xfrm>
-            <a:off x="640080" y="621792"/>
             <a:ext cx="10881360" cy="713232"/>
           </a:xfrm>
           <a:prstGeom prst="rect">
@@ -14844,14 +16157,14 @@
       </p:sp>
       <p:sp>
         <p:nvSpPr>
-          <p:cNvPr id="11" name="Text 9"/>
+          <p:cNvPr id="9" name="Text 7"/>
           <p:cNvSpPr/>
           <p:nvPr/>
         </p:nvSpPr>
         <p:spPr>
           <a:xfrm>
             <a:off x="868680" y="1508760"/>
-            <a:ext cx="6537960" cy="4160520"/>
+            <a:ext cx="6309360" cy="4160520"/>
           </a:xfrm>
           <a:prstGeom prst="rect">
             <a:avLst/>
@@ -14910,18 +16223,18 @@
       </p:sp>
       <p:sp>
         <p:nvSpPr>
-          <p:cNvPr id="12" name="Shape 10"/>
-          <p:cNvSpPr/>
-          <p:nvPr/>
-        </p:nvSpPr>
-        <p:spPr>
-          <a:xfrm>
-            <a:off x="7909560" y="1417320"/>
-            <a:ext cx="3154680" cy="1828800"/>
+          <p:cNvPr id="10" name="Shape 8"/>
+          <p:cNvSpPr/>
+          <p:nvPr/>
+        </p:nvSpPr>
+        <p:spPr>
+          <a:xfrm>
+            <a:off x="7635240" y="1325880"/>
+            <a:ext cx="3474720" cy="1325880"/>
           </a:xfrm>
           <a:prstGeom prst="roundRect">
             <a:avLst>
-              <a:gd name="adj" fmla="val 6000"/>
+              <a:gd name="adj" fmla="val 8276"/>
             </a:avLst>
           </a:prstGeom>
           <a:solidFill>
@@ -14937,14 +16250,14 @@
       </p:sp>
       <p:sp>
         <p:nvSpPr>
-          <p:cNvPr id="13" name="Text 11"/>
-          <p:cNvSpPr/>
-          <p:nvPr/>
-        </p:nvSpPr>
-        <p:spPr>
-          <a:xfrm>
-            <a:off x="8074152" y="1563624"/>
-            <a:ext cx="2825496" cy="256032"/>
+          <p:cNvPr id="11" name="Text 9"/>
+          <p:cNvSpPr/>
+          <p:nvPr/>
+        </p:nvSpPr>
+        <p:spPr>
+          <a:xfrm>
+            <a:off x="7799832" y="1472184"/>
+            <a:ext cx="3145536" cy="256032"/>
           </a:xfrm>
           <a:prstGeom prst="rect">
             <a:avLst/>
@@ -14968,7 +16281,7 @@
                 <a:ea typeface="Aptos" pitchFamily="34" charset="-122"/>
                 <a:cs typeface="Aptos" pitchFamily="34" charset="-120"/>
               </a:rPr>
-              <a:t>Key idea</a:t>
+              <a:t>Risk check</a:t>
             </a:r>
             <a:endParaRPr lang="en-US" sz="1300" dirty="0"/>
           </a:p>
@@ -14976,14 +16289,14 @@
       </p:sp>
       <p:sp>
         <p:nvSpPr>
-          <p:cNvPr id="14" name="Text 12"/>
-          <p:cNvSpPr/>
-          <p:nvPr/>
-        </p:nvSpPr>
-        <p:spPr>
-          <a:xfrm>
-            <a:off x="8074152" y="1920240"/>
-            <a:ext cx="2825496" cy="1188720"/>
+          <p:cNvPr id="12" name="Text 10"/>
+          <p:cNvSpPr/>
+          <p:nvPr/>
+        </p:nvSpPr>
+        <p:spPr>
+          <a:xfrm>
+            <a:off x="7799832" y="1828800"/>
+            <a:ext cx="3145536" cy="685800"/>
           </a:xfrm>
           <a:prstGeom prst="rect">
             <a:avLst/>
@@ -15017,18 +16330,171 @@
       </p:sp>
       <p:sp>
         <p:nvSpPr>
-          <p:cNvPr id="15" name="Shape 13"/>
-          <p:cNvSpPr/>
-          <p:nvPr/>
-        </p:nvSpPr>
-        <p:spPr>
-          <a:xfrm>
-            <a:off x="7909560" y="3520440"/>
-            <a:ext cx="3154680" cy="1737360"/>
+          <p:cNvPr id="13" name="Shape 11"/>
+          <p:cNvSpPr/>
+          <p:nvPr/>
+        </p:nvSpPr>
+        <p:spPr>
+          <a:xfrm>
+            <a:off x="7635240" y="2788920"/>
+            <a:ext cx="3474720" cy="1536192"/>
           </a:xfrm>
           <a:prstGeom prst="roundRect">
             <a:avLst>
-              <a:gd name="adj" fmla="val 6316"/>
+              <a:gd name="adj" fmla="val 7143"/>
+            </a:avLst>
+          </a:prstGeom>
+          <a:solidFill>
+            <a:srgbClr val="FFFFFF">
+              <a:alpha val="88000"/>
+            </a:srgbClr>
+          </a:solidFill>
+          <a:ln w="12700">
+            <a:solidFill>
+              <a:srgbClr val="D6E8F2"/>
+            </a:solidFill>
+            <a:prstDash val="solid"/>
+          </a:ln>
+        </p:spPr>
+      </p:sp>
+      <p:sp>
+        <p:nvSpPr>
+          <p:cNvPr id="14" name="Shape 12"/>
+          <p:cNvSpPr/>
+          <p:nvPr/>
+        </p:nvSpPr>
+        <p:spPr>
+          <a:xfrm>
+            <a:off x="8046720" y="3108960"/>
+            <a:ext cx="2651760" cy="896112"/>
+          </a:xfrm>
+          <a:prstGeom prst="arc">
+            <a:avLst/>
+          </a:prstGeom>
+          <a:noFill/>
+          <a:ln w="25400">
+            <a:solidFill>
+              <a:srgbClr val="0068B7"/>
+            </a:solidFill>
+            <a:prstDash val="solid"/>
+          </a:ln>
+        </p:spPr>
+      </p:sp>
+      <p:sp>
+        <p:nvSpPr>
+          <p:cNvPr id="15" name="Text 13"/>
+          <p:cNvSpPr/>
+          <p:nvPr/>
+        </p:nvSpPr>
+        <p:spPr>
+          <a:xfrm>
+            <a:off x="7909560" y="3099816"/>
+            <a:ext cx="2926080" cy="256032"/>
+          </a:xfrm>
+          <a:prstGeom prst="rect">
+            <a:avLst/>
+          </a:prstGeom>
+          <a:noFill/>
+          <a:ln/>
+        </p:spPr>
+        <p:txBody>
+          <a:bodyPr wrap="square" lIns="0" tIns="0" rIns="0" bIns="0" rtlCol="0" anchor="ctr"/>
+          <a:lstStyle/>
+          <a:p>
+            <a:pPr algn="ctr" indent="0" marL="0">
+              <a:buNone/>
+            </a:pPr>
+            <a:r>
+              <a:rPr lang="en-US" sz="1500" b="1" dirty="0">
+                <a:solidFill>
+                  <a:srgbClr val="003A63"/>
+                </a:solidFill>
+                <a:latin typeface="Aptos" pitchFamily="34" charset="0"/>
+                <a:ea typeface="Aptos" pitchFamily="34" charset="-122"/>
+                <a:cs typeface="Aptos" pitchFamily="34" charset="-120"/>
+              </a:rPr>
+              <a:t>Risk</a:t>
+            </a:r>
+            <a:endParaRPr lang="en-US" sz="1500" dirty="0"/>
+          </a:p>
+        </p:txBody>
+      </p:sp>
+      <p:sp>
+        <p:nvSpPr>
+          <p:cNvPr id="16" name="Shape 14"/>
+          <p:cNvSpPr/>
+          <p:nvPr/>
+        </p:nvSpPr>
+        <p:spPr>
+          <a:xfrm>
+            <a:off x="8366760" y="3639312"/>
+            <a:ext cx="2011680" cy="0"/>
+          </a:xfrm>
+          <a:prstGeom prst="line">
+            <a:avLst/>
+          </a:prstGeom>
+          <a:noFill/>
+          <a:ln w="63500">
+            <a:solidFill>
+              <a:srgbClr val="2F8A28"/>
+            </a:solidFill>
+            <a:prstDash val="solid"/>
+          </a:ln>
+        </p:spPr>
+      </p:sp>
+      <p:sp>
+        <p:nvSpPr>
+          <p:cNvPr id="17" name="Text 15"/>
+          <p:cNvSpPr/>
+          <p:nvPr/>
+        </p:nvSpPr>
+        <p:spPr>
+          <a:xfrm>
+            <a:off x="7909560" y="3849624"/>
+            <a:ext cx="2926080" cy="164592"/>
+          </a:xfrm>
+          <a:prstGeom prst="rect">
+            <a:avLst/>
+          </a:prstGeom>
+          <a:noFill/>
+          <a:ln/>
+        </p:spPr>
+        <p:txBody>
+          <a:bodyPr wrap="square" lIns="0" tIns="0" rIns="0" bIns="0" rtlCol="0" anchor="ctr"/>
+          <a:lstStyle/>
+          <a:p>
+            <a:pPr algn="ctr" indent="0" marL="0">
+              <a:buNone/>
+            </a:pPr>
+            <a:r>
+              <a:rPr lang="en-US" sz="900" dirty="0">
+                <a:solidFill>
+                  <a:srgbClr val="003A63"/>
+                </a:solidFill>
+                <a:latin typeface="Aptos" pitchFamily="34" charset="0"/>
+                <a:ea typeface="Aptos" pitchFamily="34" charset="-122"/>
+                <a:cs typeface="Aptos" pitchFamily="34" charset="-120"/>
+              </a:rPr>
+              <a:t>Human review</a:t>
+            </a:r>
+            <a:endParaRPr lang="en-US" sz="900" dirty="0"/>
+          </a:p>
+        </p:txBody>
+      </p:sp>
+      <p:sp>
+        <p:nvSpPr>
+          <p:cNvPr id="18" name="Shape 16"/>
+          <p:cNvSpPr/>
+          <p:nvPr/>
+        </p:nvSpPr>
+        <p:spPr>
+          <a:xfrm>
+            <a:off x="7635240" y="4498848"/>
+            <a:ext cx="3474720" cy="1143000"/>
+          </a:xfrm>
+          <a:prstGeom prst="roundRect">
+            <a:avLst>
+              <a:gd name="adj" fmla="val 9600"/>
             </a:avLst>
           </a:prstGeom>
           <a:solidFill>
@@ -15044,14 +16510,14 @@
       </p:sp>
       <p:sp>
         <p:nvSpPr>
-          <p:cNvPr id="16" name="Text 14"/>
-          <p:cNvSpPr/>
-          <p:nvPr/>
-        </p:nvSpPr>
-        <p:spPr>
-          <a:xfrm>
-            <a:off x="8074152" y="3666744"/>
-            <a:ext cx="2825496" cy="256032"/>
+          <p:cNvPr id="19" name="Text 17"/>
+          <p:cNvSpPr/>
+          <p:nvPr/>
+        </p:nvSpPr>
+        <p:spPr>
+          <a:xfrm>
+            <a:off x="7799832" y="4645152"/>
+            <a:ext cx="3145536" cy="256032"/>
           </a:xfrm>
           <a:prstGeom prst="rect">
             <a:avLst/>
@@ -15075,7 +16541,7 @@
                 <a:ea typeface="Aptos" pitchFamily="34" charset="-122"/>
                 <a:cs typeface="Aptos" pitchFamily="34" charset="-120"/>
               </a:rPr>
-              <a:t>Use this for</a:t>
+              <a:t>Safeguard to plan</a:t>
             </a:r>
             <a:endParaRPr lang="en-US" sz="1300" dirty="0"/>
           </a:p>
@@ -15083,14 +16549,14 @@
       </p:sp>
       <p:sp>
         <p:nvSpPr>
-          <p:cNvPr id="17" name="Text 15"/>
-          <p:cNvSpPr/>
-          <p:nvPr/>
-        </p:nvSpPr>
-        <p:spPr>
-          <a:xfrm>
-            <a:off x="8074152" y="4023360"/>
-            <a:ext cx="2825496" cy="1097280"/>
+          <p:cNvPr id="20" name="Text 18"/>
+          <p:cNvSpPr/>
+          <p:nvPr/>
+        </p:nvSpPr>
+        <p:spPr>
+          <a:xfrm>
+            <a:off x="7799832" y="5001768"/>
+            <a:ext cx="3145536" cy="502920"/>
           </a:xfrm>
           <a:prstGeom prst="rect">
             <a:avLst/>
@@ -15116,7 +16582,7 @@
                 <a:ea typeface="Aptos" pitchFamily="34" charset="-122"/>
                 <a:cs typeface="Aptos" pitchFamily="34" charset="-120"/>
               </a:rPr>
-              <a:t>Connect the concept to public health decisions, safeguards, documentation, or implementation work.</a:t>
+              <a:t>Use the assignment to test whether you can explain the concept, apply it to a realistic public health situation, and identify what would need review before the work moves forward.</a:t>
             </a:r>
             <a:endParaRPr lang="en-US" sz="1550" dirty="0"/>
           </a:p>
@@ -15290,8 +16756,8 @@
         </p:nvSpPr>
         <p:spPr>
           <a:xfrm>
-            <a:off x="9966960" y="6537960"/>
-            <a:ext cx="1645920" cy="201168"/>
+            <a:off x="9646920" y="6537960"/>
+            <a:ext cx="1965960" cy="201168"/>
           </a:xfrm>
           <a:prstGeom prst="rect">
             <a:avLst/>
@@ -15315,7 +16781,7 @@
                 <a:ea typeface="Aptos" pitchFamily="34" charset="-122"/>
                 <a:cs typeface="Aptos" pitchFamily="34" charset="-120"/>
               </a:rPr>
-              <a:t>Â© Paula Soper</a:t>
+              <a:t>Copyright Paula Soper</a:t>
             </a:r>
             <a:endParaRPr lang="en-US" sz="800" dirty="0"/>
           </a:p>
@@ -15410,7 +16876,7 @@
         <p:spPr>
           <a:xfrm>
             <a:off x="868680" y="1508760"/>
-            <a:ext cx="6537960" cy="4160520"/>
+            <a:ext cx="6309360" cy="4160520"/>
           </a:xfrm>
           <a:prstGeom prst="rect">
             <a:avLst/>
@@ -15447,12 +16913,12 @@
         </p:nvSpPr>
         <p:spPr>
           <a:xfrm>
-            <a:off x="7909560" y="1417320"/>
-            <a:ext cx="3154680" cy="1828800"/>
+            <a:off x="7635240" y="1325880"/>
+            <a:ext cx="3474720" cy="1325880"/>
           </a:xfrm>
           <a:prstGeom prst="roundRect">
             <a:avLst>
-              <a:gd name="adj" fmla="val 6000"/>
+              <a:gd name="adj" fmla="val 8276"/>
             </a:avLst>
           </a:prstGeom>
           <a:solidFill>
@@ -15474,8 +16940,8 @@
         </p:nvSpPr>
         <p:spPr>
           <a:xfrm>
-            <a:off x="8074152" y="1563624"/>
-            <a:ext cx="2825496" cy="256032"/>
+            <a:off x="7799832" y="1472184"/>
+            <a:ext cx="3145536" cy="256032"/>
           </a:xfrm>
           <a:prstGeom prst="rect">
             <a:avLst/>
@@ -15499,7 +16965,7 @@
                 <a:ea typeface="Aptos" pitchFamily="34" charset="-122"/>
                 <a:cs typeface="Aptos" pitchFamily="34" charset="-120"/>
               </a:rPr>
-              <a:t>Key idea</a:t>
+              <a:t>Risk check</a:t>
             </a:r>
             <a:endParaRPr lang="en-US" sz="1300" dirty="0"/>
           </a:p>
@@ -15513,8 +16979,8 @@
         </p:nvSpPr>
         <p:spPr>
           <a:xfrm>
-            <a:off x="8074152" y="1920240"/>
-            <a:ext cx="2825496" cy="1188720"/>
+            <a:off x="7799832" y="1828800"/>
+            <a:ext cx="3145536" cy="685800"/>
           </a:xfrm>
           <a:prstGeom prst="rect">
             <a:avLst/>
@@ -15554,12 +17020,165 @@
         </p:nvSpPr>
         <p:spPr>
           <a:xfrm>
-            <a:off x="7909560" y="3520440"/>
-            <a:ext cx="3154680" cy="1737360"/>
+            <a:off x="7635240" y="2788920"/>
+            <a:ext cx="3474720" cy="1536192"/>
           </a:xfrm>
           <a:prstGeom prst="roundRect">
             <a:avLst>
-              <a:gd name="adj" fmla="val 6316"/>
+              <a:gd name="adj" fmla="val 7143"/>
+            </a:avLst>
+          </a:prstGeom>
+          <a:solidFill>
+            <a:srgbClr val="FFFFFF">
+              <a:alpha val="88000"/>
+            </a:srgbClr>
+          </a:solidFill>
+          <a:ln w="12700">
+            <a:solidFill>
+              <a:srgbClr val="D6E8F2"/>
+            </a:solidFill>
+            <a:prstDash val="solid"/>
+          </a:ln>
+        </p:spPr>
+      </p:sp>
+      <p:sp>
+        <p:nvSpPr>
+          <p:cNvPr id="14" name="Shape 12"/>
+          <p:cNvSpPr/>
+          <p:nvPr/>
+        </p:nvSpPr>
+        <p:spPr>
+          <a:xfrm>
+            <a:off x="8046720" y="3108960"/>
+            <a:ext cx="2651760" cy="896112"/>
+          </a:xfrm>
+          <a:prstGeom prst="arc">
+            <a:avLst/>
+          </a:prstGeom>
+          <a:noFill/>
+          <a:ln w="25400">
+            <a:solidFill>
+              <a:srgbClr val="0068B7"/>
+            </a:solidFill>
+            <a:prstDash val="solid"/>
+          </a:ln>
+        </p:spPr>
+      </p:sp>
+      <p:sp>
+        <p:nvSpPr>
+          <p:cNvPr id="15" name="Text 13"/>
+          <p:cNvSpPr/>
+          <p:nvPr/>
+        </p:nvSpPr>
+        <p:spPr>
+          <a:xfrm>
+            <a:off x="7909560" y="3099816"/>
+            <a:ext cx="2926080" cy="256032"/>
+          </a:xfrm>
+          <a:prstGeom prst="rect">
+            <a:avLst/>
+          </a:prstGeom>
+          <a:noFill/>
+          <a:ln/>
+        </p:spPr>
+        <p:txBody>
+          <a:bodyPr wrap="square" lIns="0" tIns="0" rIns="0" bIns="0" rtlCol="0" anchor="ctr"/>
+          <a:lstStyle/>
+          <a:p>
+            <a:pPr algn="ctr" indent="0" marL="0">
+              <a:buNone/>
+            </a:pPr>
+            <a:r>
+              <a:rPr lang="en-US" sz="1500" b="1" dirty="0">
+                <a:solidFill>
+                  <a:srgbClr val="003A63"/>
+                </a:solidFill>
+                <a:latin typeface="Aptos" pitchFamily="34" charset="0"/>
+                <a:ea typeface="Aptos" pitchFamily="34" charset="-122"/>
+                <a:cs typeface="Aptos" pitchFamily="34" charset="-120"/>
+              </a:rPr>
+              <a:t>Risk</a:t>
+            </a:r>
+            <a:endParaRPr lang="en-US" sz="1500" dirty="0"/>
+          </a:p>
+        </p:txBody>
+      </p:sp>
+      <p:sp>
+        <p:nvSpPr>
+          <p:cNvPr id="16" name="Shape 14"/>
+          <p:cNvSpPr/>
+          <p:nvPr/>
+        </p:nvSpPr>
+        <p:spPr>
+          <a:xfrm>
+            <a:off x="8366760" y="3639312"/>
+            <a:ext cx="2011680" cy="0"/>
+          </a:xfrm>
+          <a:prstGeom prst="line">
+            <a:avLst/>
+          </a:prstGeom>
+          <a:noFill/>
+          <a:ln w="63500">
+            <a:solidFill>
+              <a:srgbClr val="2F8A28"/>
+            </a:solidFill>
+            <a:prstDash val="solid"/>
+          </a:ln>
+        </p:spPr>
+      </p:sp>
+      <p:sp>
+        <p:nvSpPr>
+          <p:cNvPr id="17" name="Text 15"/>
+          <p:cNvSpPr/>
+          <p:nvPr/>
+        </p:nvSpPr>
+        <p:spPr>
+          <a:xfrm>
+            <a:off x="7909560" y="3849624"/>
+            <a:ext cx="2926080" cy="164592"/>
+          </a:xfrm>
+          <a:prstGeom prst="rect">
+            <a:avLst/>
+          </a:prstGeom>
+          <a:noFill/>
+          <a:ln/>
+        </p:spPr>
+        <p:txBody>
+          <a:bodyPr wrap="square" lIns="0" tIns="0" rIns="0" bIns="0" rtlCol="0" anchor="ctr"/>
+          <a:lstStyle/>
+          <a:p>
+            <a:pPr algn="ctr" indent="0" marL="0">
+              <a:buNone/>
+            </a:pPr>
+            <a:r>
+              <a:rPr lang="en-US" sz="900" dirty="0">
+                <a:solidFill>
+                  <a:srgbClr val="003A63"/>
+                </a:solidFill>
+                <a:latin typeface="Aptos" pitchFamily="34" charset="0"/>
+                <a:ea typeface="Aptos" pitchFamily="34" charset="-122"/>
+                <a:cs typeface="Aptos" pitchFamily="34" charset="-120"/>
+              </a:rPr>
+              <a:t>Human review</a:t>
+            </a:r>
+            <a:endParaRPr lang="en-US" sz="900" dirty="0"/>
+          </a:p>
+        </p:txBody>
+      </p:sp>
+      <p:sp>
+        <p:nvSpPr>
+          <p:cNvPr id="18" name="Shape 16"/>
+          <p:cNvSpPr/>
+          <p:nvPr/>
+        </p:nvSpPr>
+        <p:spPr>
+          <a:xfrm>
+            <a:off x="7635240" y="4498848"/>
+            <a:ext cx="3474720" cy="1143000"/>
+          </a:xfrm>
+          <a:prstGeom prst="roundRect">
+            <a:avLst>
+              <a:gd name="adj" fmla="val 9600"/>
             </a:avLst>
           </a:prstGeom>
           <a:solidFill>
@@ -15575,14 +17194,14 @@
       </p:sp>
       <p:sp>
         <p:nvSpPr>
-          <p:cNvPr id="14" name="Text 12"/>
-          <p:cNvSpPr/>
-          <p:nvPr/>
-        </p:nvSpPr>
-        <p:spPr>
-          <a:xfrm>
-            <a:off x="8074152" y="3666744"/>
-            <a:ext cx="2825496" cy="256032"/>
+          <p:cNvPr id="19" name="Text 17"/>
+          <p:cNvSpPr/>
+          <p:nvPr/>
+        </p:nvSpPr>
+        <p:spPr>
+          <a:xfrm>
+            <a:off x="7799832" y="4645152"/>
+            <a:ext cx="3145536" cy="256032"/>
           </a:xfrm>
           <a:prstGeom prst="rect">
             <a:avLst/>
@@ -15606,7 +17225,7 @@
                 <a:ea typeface="Aptos" pitchFamily="34" charset="-122"/>
                 <a:cs typeface="Aptos" pitchFamily="34" charset="-120"/>
               </a:rPr>
-              <a:t>Use this for</a:t>
+              <a:t>Safeguard to plan</a:t>
             </a:r>
             <a:endParaRPr lang="en-US" sz="1300" dirty="0"/>
           </a:p>
@@ -15614,14 +17233,14 @@
       </p:sp>
       <p:sp>
         <p:nvSpPr>
-          <p:cNvPr id="15" name="Text 13"/>
-          <p:cNvSpPr/>
-          <p:nvPr/>
-        </p:nvSpPr>
-        <p:spPr>
-          <a:xfrm>
-            <a:off x="8074152" y="4023360"/>
-            <a:ext cx="2825496" cy="1097280"/>
+          <p:cNvPr id="20" name="Text 18"/>
+          <p:cNvSpPr/>
+          <p:nvPr/>
+        </p:nvSpPr>
+        <p:spPr>
+          <a:xfrm>
+            <a:off x="7799832" y="5001768"/>
+            <a:ext cx="3145536" cy="502920"/>
           </a:xfrm>
           <a:prstGeom prst="rect">
             <a:avLst/>
@@ -15647,7 +17266,7 @@
                 <a:ea typeface="Aptos" pitchFamily="34" charset="-122"/>
                 <a:cs typeface="Aptos" pitchFamily="34" charset="-120"/>
               </a:rPr>
-              <a:t>Connect the concept to public health decisions, safeguards, documentation, or implementation work.</a:t>
+              <a:t>Use the assignment to test whether you can explain the concept, apply it to a realistic public health situation, and identify what would need review before the work moves forward.</a:t>
             </a:r>
             <a:endParaRPr lang="en-US" sz="1550" dirty="0"/>
           </a:p>
@@ -15821,8 +17440,8 @@
         </p:nvSpPr>
         <p:spPr>
           <a:xfrm>
-            <a:off x="9966960" y="6537960"/>
-            <a:ext cx="1645920" cy="201168"/>
+            <a:off x="9646920" y="6537960"/>
+            <a:ext cx="1965960" cy="201168"/>
           </a:xfrm>
           <a:prstGeom prst="rect">
             <a:avLst/>
@@ -15846,7 +17465,7 @@
                 <a:ea typeface="Aptos" pitchFamily="34" charset="-122"/>
                 <a:cs typeface="Aptos" pitchFamily="34" charset="-120"/>
               </a:rPr>
-              <a:t>Â© Paula Soper</a:t>
+              <a:t>Copyright Paula Soper</a:t>
             </a:r>
             <a:endParaRPr lang="en-US" sz="800" dirty="0"/>
           </a:p>
@@ -15893,77 +17512,13 @@
       </p:sp>
       <p:sp>
         <p:nvSpPr>
-          <p:cNvPr id="8" name="Shape 6"/>
+          <p:cNvPr id="8" name="Text 6"/>
           <p:cNvSpPr/>
           <p:nvPr/>
         </p:nvSpPr>
         <p:spPr>
           <a:xfrm>
             <a:off x="640080" y="658368"/>
-            <a:ext cx="420624" cy="420624"/>
-          </a:xfrm>
-          <a:prstGeom prst="ellipse">
-            <a:avLst/>
-          </a:prstGeom>
-          <a:solidFill>
-            <a:srgbClr val="0068B7"/>
-          </a:solidFill>
-          <a:ln w="12700">
-            <a:solidFill>
-              <a:srgbClr val="0068B7"/>
-            </a:solidFill>
-            <a:prstDash val="solid"/>
-          </a:ln>
-        </p:spPr>
-      </p:sp>
-      <p:sp>
-        <p:nvSpPr>
-          <p:cNvPr id="9" name="Text 7"/>
-          <p:cNvSpPr/>
-          <p:nvPr/>
-        </p:nvSpPr>
-        <p:spPr>
-          <a:xfrm>
-            <a:off x="640080" y="731520"/>
-            <a:ext cx="420624" cy="164592"/>
-          </a:xfrm>
-          <a:prstGeom prst="rect">
-            <a:avLst/>
-          </a:prstGeom>
-          <a:noFill/>
-          <a:ln/>
-        </p:spPr>
-        <p:txBody>
-          <a:bodyPr wrap="square" lIns="0" tIns="0" rIns="0" bIns="0" rtlCol="0" anchor="ctr"/>
-          <a:lstStyle/>
-          <a:p>
-            <a:pPr algn="ctr" indent="0" marL="0">
-              <a:buNone/>
-            </a:pPr>
-            <a:r>
-              <a:rPr lang="en-US" sz="1100" b="1" dirty="0">
-                <a:solidFill>
-                  <a:srgbClr val="FFFFFF"/>
-                </a:solidFill>
-                <a:latin typeface="Aptos" pitchFamily="34" charset="0"/>
-                <a:ea typeface="Aptos" pitchFamily="34" charset="-122"/>
-                <a:cs typeface="Aptos" pitchFamily="34" charset="-120"/>
-              </a:rPr>
-              <a:t>2</a:t>
-            </a:r>
-            <a:endParaRPr lang="en-US" sz="1100" dirty="0"/>
-          </a:p>
-        </p:txBody>
-      </p:sp>
-      <p:sp>
-        <p:nvSpPr>
-          <p:cNvPr id="10" name="Text 8"/>
-          <p:cNvSpPr/>
-          <p:nvPr/>
-        </p:nvSpPr>
-        <p:spPr>
-          <a:xfrm>
-            <a:off x="640080" y="621792"/>
             <a:ext cx="10881360" cy="713232"/>
           </a:xfrm>
           <a:prstGeom prst="rect">
@@ -15998,14 +17553,14 @@
       </p:sp>
       <p:sp>
         <p:nvSpPr>
-          <p:cNvPr id="11" name="Text 9"/>
+          <p:cNvPr id="9" name="Text 7"/>
           <p:cNvSpPr/>
           <p:nvPr/>
         </p:nvSpPr>
         <p:spPr>
           <a:xfrm>
             <a:off x="868680" y="1508760"/>
-            <a:ext cx="6537960" cy="4160520"/>
+            <a:ext cx="6309360" cy="4160520"/>
           </a:xfrm>
           <a:prstGeom prst="rect">
             <a:avLst/>
@@ -16064,18 +17619,18 @@
       </p:sp>
       <p:sp>
         <p:nvSpPr>
-          <p:cNvPr id="12" name="Shape 10"/>
-          <p:cNvSpPr/>
-          <p:nvPr/>
-        </p:nvSpPr>
-        <p:spPr>
-          <a:xfrm>
-            <a:off x="7909560" y="1417320"/>
-            <a:ext cx="3154680" cy="1828800"/>
+          <p:cNvPr id="10" name="Shape 8"/>
+          <p:cNvSpPr/>
+          <p:nvPr/>
+        </p:nvSpPr>
+        <p:spPr>
+          <a:xfrm>
+            <a:off x="7635240" y="1325880"/>
+            <a:ext cx="3474720" cy="1325880"/>
           </a:xfrm>
           <a:prstGeom prst="roundRect">
             <a:avLst>
-              <a:gd name="adj" fmla="val 6000"/>
+              <a:gd name="adj" fmla="val 8276"/>
             </a:avLst>
           </a:prstGeom>
           <a:solidFill>
@@ -16091,14 +17646,14 @@
       </p:sp>
       <p:sp>
         <p:nvSpPr>
-          <p:cNvPr id="13" name="Text 11"/>
-          <p:cNvSpPr/>
-          <p:nvPr/>
-        </p:nvSpPr>
-        <p:spPr>
-          <a:xfrm>
-            <a:off x="8074152" y="1563624"/>
-            <a:ext cx="2825496" cy="256032"/>
+          <p:cNvPr id="11" name="Text 9"/>
+          <p:cNvSpPr/>
+          <p:nvPr/>
+        </p:nvSpPr>
+        <p:spPr>
+          <a:xfrm>
+            <a:off x="7799832" y="1472184"/>
+            <a:ext cx="3145536" cy="256032"/>
           </a:xfrm>
           <a:prstGeom prst="rect">
             <a:avLst/>
@@ -16122,7 +17677,7 @@
                 <a:ea typeface="Aptos" pitchFamily="34" charset="-122"/>
                 <a:cs typeface="Aptos" pitchFamily="34" charset="-120"/>
               </a:rPr>
-              <a:t>Key idea</a:t>
+              <a:t>Risk check</a:t>
             </a:r>
             <a:endParaRPr lang="en-US" sz="1300" dirty="0"/>
           </a:p>
@@ -16130,14 +17685,14 @@
       </p:sp>
       <p:sp>
         <p:nvSpPr>
-          <p:cNvPr id="14" name="Text 12"/>
-          <p:cNvSpPr/>
-          <p:nvPr/>
-        </p:nvSpPr>
-        <p:spPr>
-          <a:xfrm>
-            <a:off x="8074152" y="1920240"/>
-            <a:ext cx="2825496" cy="1188720"/>
+          <p:cNvPr id="12" name="Text 10"/>
+          <p:cNvSpPr/>
+          <p:nvPr/>
+        </p:nvSpPr>
+        <p:spPr>
+          <a:xfrm>
+            <a:off x="7799832" y="1828800"/>
+            <a:ext cx="3145536" cy="685800"/>
           </a:xfrm>
           <a:prstGeom prst="rect">
             <a:avLst/>
@@ -16171,18 +17726,171 @@
       </p:sp>
       <p:sp>
         <p:nvSpPr>
-          <p:cNvPr id="15" name="Shape 13"/>
-          <p:cNvSpPr/>
-          <p:nvPr/>
-        </p:nvSpPr>
-        <p:spPr>
-          <a:xfrm>
-            <a:off x="7909560" y="3520440"/>
-            <a:ext cx="3154680" cy="1737360"/>
+          <p:cNvPr id="13" name="Shape 11"/>
+          <p:cNvSpPr/>
+          <p:nvPr/>
+        </p:nvSpPr>
+        <p:spPr>
+          <a:xfrm>
+            <a:off x="7635240" y="2788920"/>
+            <a:ext cx="3474720" cy="1536192"/>
           </a:xfrm>
           <a:prstGeom prst="roundRect">
             <a:avLst>
-              <a:gd name="adj" fmla="val 6316"/>
+              <a:gd name="adj" fmla="val 7143"/>
+            </a:avLst>
+          </a:prstGeom>
+          <a:solidFill>
+            <a:srgbClr val="FFFFFF">
+              <a:alpha val="88000"/>
+            </a:srgbClr>
+          </a:solidFill>
+          <a:ln w="12700">
+            <a:solidFill>
+              <a:srgbClr val="D6E8F2"/>
+            </a:solidFill>
+            <a:prstDash val="solid"/>
+          </a:ln>
+        </p:spPr>
+      </p:sp>
+      <p:sp>
+        <p:nvSpPr>
+          <p:cNvPr id="14" name="Shape 12"/>
+          <p:cNvSpPr/>
+          <p:nvPr/>
+        </p:nvSpPr>
+        <p:spPr>
+          <a:xfrm>
+            <a:off x="8046720" y="3108960"/>
+            <a:ext cx="2651760" cy="896112"/>
+          </a:xfrm>
+          <a:prstGeom prst="arc">
+            <a:avLst/>
+          </a:prstGeom>
+          <a:noFill/>
+          <a:ln w="25400">
+            <a:solidFill>
+              <a:srgbClr val="0068B7"/>
+            </a:solidFill>
+            <a:prstDash val="solid"/>
+          </a:ln>
+        </p:spPr>
+      </p:sp>
+      <p:sp>
+        <p:nvSpPr>
+          <p:cNvPr id="15" name="Text 13"/>
+          <p:cNvSpPr/>
+          <p:nvPr/>
+        </p:nvSpPr>
+        <p:spPr>
+          <a:xfrm>
+            <a:off x="7909560" y="3099816"/>
+            <a:ext cx="2926080" cy="256032"/>
+          </a:xfrm>
+          <a:prstGeom prst="rect">
+            <a:avLst/>
+          </a:prstGeom>
+          <a:noFill/>
+          <a:ln/>
+        </p:spPr>
+        <p:txBody>
+          <a:bodyPr wrap="square" lIns="0" tIns="0" rIns="0" bIns="0" rtlCol="0" anchor="ctr"/>
+          <a:lstStyle/>
+          <a:p>
+            <a:pPr algn="ctr" indent="0" marL="0">
+              <a:buNone/>
+            </a:pPr>
+            <a:r>
+              <a:rPr lang="en-US" sz="1500" b="1" dirty="0">
+                <a:solidFill>
+                  <a:srgbClr val="003A63"/>
+                </a:solidFill>
+                <a:latin typeface="Aptos" pitchFamily="34" charset="0"/>
+                <a:ea typeface="Aptos" pitchFamily="34" charset="-122"/>
+                <a:cs typeface="Aptos" pitchFamily="34" charset="-120"/>
+              </a:rPr>
+              <a:t>Risk</a:t>
+            </a:r>
+            <a:endParaRPr lang="en-US" sz="1500" dirty="0"/>
+          </a:p>
+        </p:txBody>
+      </p:sp>
+      <p:sp>
+        <p:nvSpPr>
+          <p:cNvPr id="16" name="Shape 14"/>
+          <p:cNvSpPr/>
+          <p:nvPr/>
+        </p:nvSpPr>
+        <p:spPr>
+          <a:xfrm>
+            <a:off x="8366760" y="3639312"/>
+            <a:ext cx="2011680" cy="0"/>
+          </a:xfrm>
+          <a:prstGeom prst="line">
+            <a:avLst/>
+          </a:prstGeom>
+          <a:noFill/>
+          <a:ln w="63500">
+            <a:solidFill>
+              <a:srgbClr val="2F8A28"/>
+            </a:solidFill>
+            <a:prstDash val="solid"/>
+          </a:ln>
+        </p:spPr>
+      </p:sp>
+      <p:sp>
+        <p:nvSpPr>
+          <p:cNvPr id="17" name="Text 15"/>
+          <p:cNvSpPr/>
+          <p:nvPr/>
+        </p:nvSpPr>
+        <p:spPr>
+          <a:xfrm>
+            <a:off x="7909560" y="3849624"/>
+            <a:ext cx="2926080" cy="164592"/>
+          </a:xfrm>
+          <a:prstGeom prst="rect">
+            <a:avLst/>
+          </a:prstGeom>
+          <a:noFill/>
+          <a:ln/>
+        </p:spPr>
+        <p:txBody>
+          <a:bodyPr wrap="square" lIns="0" tIns="0" rIns="0" bIns="0" rtlCol="0" anchor="ctr"/>
+          <a:lstStyle/>
+          <a:p>
+            <a:pPr algn="ctr" indent="0" marL="0">
+              <a:buNone/>
+            </a:pPr>
+            <a:r>
+              <a:rPr lang="en-US" sz="900" dirty="0">
+                <a:solidFill>
+                  <a:srgbClr val="003A63"/>
+                </a:solidFill>
+                <a:latin typeface="Aptos" pitchFamily="34" charset="0"/>
+                <a:ea typeface="Aptos" pitchFamily="34" charset="-122"/>
+                <a:cs typeface="Aptos" pitchFamily="34" charset="-120"/>
+              </a:rPr>
+              <a:t>Human review</a:t>
+            </a:r>
+            <a:endParaRPr lang="en-US" sz="900" dirty="0"/>
+          </a:p>
+        </p:txBody>
+      </p:sp>
+      <p:sp>
+        <p:nvSpPr>
+          <p:cNvPr id="18" name="Shape 16"/>
+          <p:cNvSpPr/>
+          <p:nvPr/>
+        </p:nvSpPr>
+        <p:spPr>
+          <a:xfrm>
+            <a:off x="7635240" y="4498848"/>
+            <a:ext cx="3474720" cy="1143000"/>
+          </a:xfrm>
+          <a:prstGeom prst="roundRect">
+            <a:avLst>
+              <a:gd name="adj" fmla="val 9600"/>
             </a:avLst>
           </a:prstGeom>
           <a:solidFill>
@@ -16198,14 +17906,14 @@
       </p:sp>
       <p:sp>
         <p:nvSpPr>
-          <p:cNvPr id="16" name="Text 14"/>
-          <p:cNvSpPr/>
-          <p:nvPr/>
-        </p:nvSpPr>
-        <p:spPr>
-          <a:xfrm>
-            <a:off x="8074152" y="3666744"/>
-            <a:ext cx="2825496" cy="256032"/>
+          <p:cNvPr id="19" name="Text 17"/>
+          <p:cNvSpPr/>
+          <p:nvPr/>
+        </p:nvSpPr>
+        <p:spPr>
+          <a:xfrm>
+            <a:off x="7799832" y="4645152"/>
+            <a:ext cx="3145536" cy="256032"/>
           </a:xfrm>
           <a:prstGeom prst="rect">
             <a:avLst/>
@@ -16229,7 +17937,7 @@
                 <a:ea typeface="Aptos" pitchFamily="34" charset="-122"/>
                 <a:cs typeface="Aptos" pitchFamily="34" charset="-120"/>
               </a:rPr>
-              <a:t>Use this for</a:t>
+              <a:t>Safeguard to plan</a:t>
             </a:r>
             <a:endParaRPr lang="en-US" sz="1300" dirty="0"/>
           </a:p>
@@ -16237,14 +17945,14 @@
       </p:sp>
       <p:sp>
         <p:nvSpPr>
-          <p:cNvPr id="17" name="Text 15"/>
-          <p:cNvSpPr/>
-          <p:nvPr/>
-        </p:nvSpPr>
-        <p:spPr>
-          <a:xfrm>
-            <a:off x="8074152" y="4023360"/>
-            <a:ext cx="2825496" cy="1097280"/>
+          <p:cNvPr id="20" name="Text 18"/>
+          <p:cNvSpPr/>
+          <p:nvPr/>
+        </p:nvSpPr>
+        <p:spPr>
+          <a:xfrm>
+            <a:off x="7799832" y="5001768"/>
+            <a:ext cx="3145536" cy="502920"/>
           </a:xfrm>
           <a:prstGeom prst="rect">
             <a:avLst/>
@@ -16270,7 +17978,7 @@
                 <a:ea typeface="Aptos" pitchFamily="34" charset="-122"/>
                 <a:cs typeface="Aptos" pitchFamily="34" charset="-120"/>
               </a:rPr>
-              <a:t>Connect the concept to public health decisions, safeguards, documentation, or implementation work.</a:t>
+              <a:t>Identify what could go wrong, who could be affected, what safeguards are needed, and what evidence should be reviewed before use expands.</a:t>
             </a:r>
             <a:endParaRPr lang="en-US" sz="1550" dirty="0"/>
           </a:p>
@@ -16444,8 +18152,8 @@
         </p:nvSpPr>
         <p:spPr>
           <a:xfrm>
-            <a:off x="9966960" y="6537960"/>
-            <a:ext cx="1645920" cy="201168"/>
+            <a:off x="9646920" y="6537960"/>
+            <a:ext cx="1965960" cy="201168"/>
           </a:xfrm>
           <a:prstGeom prst="rect">
             <a:avLst/>
@@ -16469,7 +18177,7 @@
                 <a:ea typeface="Aptos" pitchFamily="34" charset="-122"/>
                 <a:cs typeface="Aptos" pitchFamily="34" charset="-120"/>
               </a:rPr>
-              <a:t>Â© Paula Soper</a:t>
+              <a:t>Copyright Paula Soper</a:t>
             </a:r>
             <a:endParaRPr lang="en-US" sz="800" dirty="0"/>
           </a:p>
@@ -16516,14 +18224,257 @@
       </p:sp>
       <p:sp>
         <p:nvSpPr>
-          <p:cNvPr id="8" name="Shape 6"/>
+          <p:cNvPr id="8" name="Text 6"/>
           <p:cNvSpPr/>
           <p:nvPr/>
         </p:nvSpPr>
         <p:spPr>
           <a:xfrm>
             <a:off x="640080" y="658368"/>
-            <a:ext cx="420624" cy="420624"/>
+            <a:ext cx="10881360" cy="713232"/>
+          </a:xfrm>
+          <a:prstGeom prst="rect">
+            <a:avLst/>
+          </a:prstGeom>
+          <a:noFill/>
+          <a:ln/>
+        </p:spPr>
+        <p:txBody>
+          <a:bodyPr wrap="square" lIns="0" tIns="0" rIns="0" bIns="0" rtlCol="0" anchor="ctr">
+            <a:normAutofit/>
+          </a:bodyPr>
+          <a:lstStyle/>
+          <a:p>
+            <a:pPr indent="0" marL="0">
+              <a:buNone/>
+            </a:pPr>
+            <a:r>
+              <a:rPr lang="en-US" sz="3400" b="1" dirty="0">
+                <a:solidFill>
+                  <a:srgbClr val="003A63"/>
+                </a:solidFill>
+                <a:latin typeface="Aptos Display" pitchFamily="34" charset="0"/>
+                <a:ea typeface="Aptos Display" pitchFamily="34" charset="-122"/>
+                <a:cs typeface="Aptos Display" pitchFamily="34" charset="-120"/>
+              </a:rPr>
+              <a:t>Jurisdiction and Agency Policy Note</a:t>
+            </a:r>
+            <a:endParaRPr lang="en-US" sz="3400" dirty="0"/>
+          </a:p>
+        </p:txBody>
+      </p:sp>
+      <p:sp>
+        <p:nvSpPr>
+          <p:cNvPr id="9" name="Text 7"/>
+          <p:cNvSpPr/>
+          <p:nvPr/>
+        </p:nvSpPr>
+        <p:spPr>
+          <a:xfrm>
+            <a:off x="868680" y="1508760"/>
+            <a:ext cx="6309360" cy="4160520"/>
+          </a:xfrm>
+          <a:prstGeom prst="rect">
+            <a:avLst/>
+          </a:prstGeom>
+          <a:noFill/>
+          <a:ln/>
+        </p:spPr>
+        <p:txBody>
+          <a:bodyPr wrap="square" lIns="635" tIns="635" rIns="635" bIns="635" rtlCol="0" anchor="t">
+            <a:normAutofit/>
+          </a:bodyPr>
+          <a:lstStyle/>
+          <a:p>
+            <a:r>
+              <a:rPr lang="en-US" sz="2100" dirty="0">
+                <a:solidFill>
+                  <a:srgbClr val="17364A"/>
+                </a:solidFill>
+                <a:latin typeface="Aptos" pitchFamily="34" charset="0"/>
+                <a:ea typeface="Aptos" pitchFamily="34" charset="-122"/>
+                <a:cs typeface="Aptos" pitchFamily="34" charset="-120"/>
+              </a:rPr>
+              <a:t>This module provides national-level training guidance for public health agencies and partners.</a:t>
+            </a:r>
+            <a:endParaRPr lang="en-US" sz="2100" dirty="0"/>
+          </a:p>
+          <a:p>
+            <a:r>
+              <a:rPr lang="en-US" sz="2100" dirty="0">
+                <a:solidFill>
+                  <a:srgbClr val="17364A"/>
+                </a:solidFill>
+                <a:latin typeface="Aptos" pitchFamily="34" charset="0"/>
+                <a:ea typeface="Aptos" pitchFamily="34" charset="-122"/>
+                <a:cs typeface="Aptos" pitchFamily="34" charset="-120"/>
+              </a:rPr>
+              <a:t>It is not legal advice and does not replace review by agency legal counsel, privacy officers,.</a:t>
+            </a:r>
+            <a:endParaRPr lang="en-US" sz="2100" dirty="0"/>
+          </a:p>
+          <a:p>
+            <a:r>
+              <a:rPr lang="en-US" sz="2100" dirty="0">
+                <a:solidFill>
+                  <a:srgbClr val="17364A"/>
+                </a:solidFill>
+                <a:latin typeface="Aptos" pitchFamily="34" charset="0"/>
+                <a:ea typeface="Aptos" pitchFamily="34" charset="-122"/>
+                <a:cs typeface="Aptos" pitchFamily="34" charset="-120"/>
+              </a:rPr>
+              <a:t>Requirements may vary by state, locality, territory, Tribe, agency, funding source, data-sharing.</a:t>
+            </a:r>
+            <a:endParaRPr lang="en-US" sz="2100" dirty="0"/>
+          </a:p>
+        </p:txBody>
+      </p:sp>
+      <p:sp>
+        <p:nvSpPr>
+          <p:cNvPr id="10" name="Shape 8"/>
+          <p:cNvSpPr/>
+          <p:nvPr/>
+        </p:nvSpPr>
+        <p:spPr>
+          <a:xfrm>
+            <a:off x="7635240" y="1325880"/>
+            <a:ext cx="3474720" cy="1325880"/>
+          </a:xfrm>
+          <a:prstGeom prst="roundRect">
+            <a:avLst>
+              <a:gd name="adj" fmla="val 8276"/>
+            </a:avLst>
+          </a:prstGeom>
+          <a:solidFill>
+            <a:srgbClr val="EEF8ED"/>
+          </a:solidFill>
+          <a:ln w="12700">
+            <a:solidFill>
+              <a:srgbClr val="B9D7E6"/>
+            </a:solidFill>
+            <a:prstDash val="solid"/>
+          </a:ln>
+        </p:spPr>
+      </p:sp>
+      <p:sp>
+        <p:nvSpPr>
+          <p:cNvPr id="11" name="Text 9"/>
+          <p:cNvSpPr/>
+          <p:nvPr/>
+        </p:nvSpPr>
+        <p:spPr>
+          <a:xfrm>
+            <a:off x="7799832" y="1472184"/>
+            <a:ext cx="3145536" cy="256032"/>
+          </a:xfrm>
+          <a:prstGeom prst="rect">
+            <a:avLst/>
+          </a:prstGeom>
+          <a:noFill/>
+          <a:ln/>
+        </p:spPr>
+        <p:txBody>
+          <a:bodyPr wrap="square" lIns="0" tIns="0" rIns="0" bIns="0" rtlCol="0" anchor="ctr"/>
+          <a:lstStyle/>
+          <a:p>
+            <a:pPr indent="0" marL="0">
+              <a:buNone/>
+            </a:pPr>
+            <a:r>
+              <a:rPr lang="en-US" sz="1300" b="1" dirty="0">
+                <a:solidFill>
+                  <a:srgbClr val="0068B7"/>
+                </a:solidFill>
+                <a:latin typeface="Aptos" pitchFamily="34" charset="0"/>
+                <a:ea typeface="Aptos" pitchFamily="34" charset="-122"/>
+                <a:cs typeface="Aptos" pitchFamily="34" charset="-120"/>
+              </a:rPr>
+              <a:t>Governance lens</a:t>
+            </a:r>
+            <a:endParaRPr lang="en-US" sz="1300" dirty="0"/>
+          </a:p>
+        </p:txBody>
+      </p:sp>
+      <p:sp>
+        <p:nvSpPr>
+          <p:cNvPr id="12" name="Text 10"/>
+          <p:cNvSpPr/>
+          <p:nvPr/>
+        </p:nvSpPr>
+        <p:spPr>
+          <a:xfrm>
+            <a:off x="7799832" y="1828800"/>
+            <a:ext cx="3145536" cy="685800"/>
+          </a:xfrm>
+          <a:prstGeom prst="rect">
+            <a:avLst/>
+          </a:prstGeom>
+          <a:noFill/>
+          <a:ln/>
+        </p:spPr>
+        <p:txBody>
+          <a:bodyPr wrap="square" lIns="0" tIns="0" rIns="0" bIns="0" rtlCol="0" anchor="t">
+            <a:normAutofit/>
+          </a:bodyPr>
+          <a:lstStyle/>
+          <a:p>
+            <a:pPr indent="0" marL="0">
+              <a:buNone/>
+            </a:pPr>
+            <a:r>
+              <a:rPr lang="en-US" sz="1550" dirty="0">
+                <a:solidFill>
+                  <a:srgbClr val="17364A"/>
+                </a:solidFill>
+                <a:latin typeface="Aptos" pitchFamily="34" charset="0"/>
+                <a:ea typeface="Aptos" pitchFamily="34" charset="-122"/>
+                <a:cs typeface="Aptos" pitchFamily="34" charset="-120"/>
+              </a:rPr>
+              <a:t>This module provides national-level training guidance for public health agencies and partners.</a:t>
+            </a:r>
+            <a:endParaRPr lang="en-US" sz="1550" dirty="0"/>
+          </a:p>
+        </p:txBody>
+      </p:sp>
+      <p:sp>
+        <p:nvSpPr>
+          <p:cNvPr id="13" name="Shape 11"/>
+          <p:cNvSpPr/>
+          <p:nvPr/>
+        </p:nvSpPr>
+        <p:spPr>
+          <a:xfrm>
+            <a:off x="7635240" y="2788920"/>
+            <a:ext cx="3474720" cy="1536192"/>
+          </a:xfrm>
+          <a:prstGeom prst="roundRect">
+            <a:avLst>
+              <a:gd name="adj" fmla="val 7143"/>
+            </a:avLst>
+          </a:prstGeom>
+          <a:solidFill>
+            <a:srgbClr val="FFFFFF">
+              <a:alpha val="88000"/>
+            </a:srgbClr>
+          </a:solidFill>
+          <a:ln w="12700">
+            <a:solidFill>
+              <a:srgbClr val="D6E8F2"/>
+            </a:solidFill>
+            <a:prstDash val="solid"/>
+          </a:ln>
+        </p:spPr>
+      </p:sp>
+      <p:sp>
+        <p:nvSpPr>
+          <p:cNvPr id="14" name="Shape 12"/>
+          <p:cNvSpPr/>
+          <p:nvPr/>
+        </p:nvSpPr>
+        <p:spPr>
+          <a:xfrm>
+            <a:off x="7891272" y="3108960"/>
+            <a:ext cx="566928" cy="566928"/>
           </a:xfrm>
           <a:prstGeom prst="ellipse">
             <a:avLst/>
@@ -16541,172 +18492,24 @@
       </p:sp>
       <p:sp>
         <p:nvSpPr>
-          <p:cNvPr id="9" name="Text 7"/>
-          <p:cNvSpPr/>
-          <p:nvPr/>
-        </p:nvSpPr>
-        <p:spPr>
-          <a:xfrm>
-            <a:off x="640080" y="731520"/>
-            <a:ext cx="420624" cy="164592"/>
-          </a:xfrm>
-          <a:prstGeom prst="rect">
-            <a:avLst/>
-          </a:prstGeom>
-          <a:noFill/>
-          <a:ln/>
-        </p:spPr>
-        <p:txBody>
-          <a:bodyPr wrap="square" lIns="0" tIns="0" rIns="0" bIns="0" rtlCol="0" anchor="ctr"/>
-          <a:lstStyle/>
-          <a:p>
-            <a:pPr algn="ctr" indent="0" marL="0">
-              <a:buNone/>
-            </a:pPr>
-            <a:r>
-              <a:rPr lang="en-US" sz="1100" b="1" dirty="0">
-                <a:solidFill>
-                  <a:srgbClr val="FFFFFF"/>
-                </a:solidFill>
-                <a:latin typeface="Aptos" pitchFamily="34" charset="0"/>
-                <a:ea typeface="Aptos" pitchFamily="34" charset="-122"/>
-                <a:cs typeface="Aptos" pitchFamily="34" charset="-120"/>
-              </a:rPr>
-              <a:t>3</a:t>
-            </a:r>
-            <a:endParaRPr lang="en-US" sz="1100" dirty="0"/>
-          </a:p>
-        </p:txBody>
-      </p:sp>
-      <p:sp>
-        <p:nvSpPr>
-          <p:cNvPr id="10" name="Text 8"/>
-          <p:cNvSpPr/>
-          <p:nvPr/>
-        </p:nvSpPr>
-        <p:spPr>
-          <a:xfrm>
-            <a:off x="640080" y="621792"/>
-            <a:ext cx="10881360" cy="713232"/>
-          </a:xfrm>
-          <a:prstGeom prst="rect">
-            <a:avLst/>
-          </a:prstGeom>
-          <a:noFill/>
-          <a:ln/>
-        </p:spPr>
-        <p:txBody>
-          <a:bodyPr wrap="square" lIns="0" tIns="0" rIns="0" bIns="0" rtlCol="0" anchor="ctr">
-            <a:normAutofit/>
-          </a:bodyPr>
-          <a:lstStyle/>
-          <a:p>
-            <a:pPr indent="0" marL="0">
-              <a:buNone/>
-            </a:pPr>
-            <a:r>
-              <a:rPr lang="en-US" sz="3400" b="1" dirty="0">
-                <a:solidFill>
-                  <a:srgbClr val="003A63"/>
-                </a:solidFill>
-                <a:latin typeface="Aptos Display" pitchFamily="34" charset="0"/>
-                <a:ea typeface="Aptos Display" pitchFamily="34" charset="-122"/>
-                <a:cs typeface="Aptos Display" pitchFamily="34" charset="-120"/>
-              </a:rPr>
-              <a:t>Jurisdiction and Agency Policy Note</a:t>
-            </a:r>
-            <a:endParaRPr lang="en-US" sz="3400" dirty="0"/>
-          </a:p>
-        </p:txBody>
-      </p:sp>
-      <p:sp>
-        <p:nvSpPr>
-          <p:cNvPr id="11" name="Text 9"/>
-          <p:cNvSpPr/>
-          <p:nvPr/>
-        </p:nvSpPr>
-        <p:spPr>
-          <a:xfrm>
-            <a:off x="868680" y="1508760"/>
-            <a:ext cx="6537960" cy="4160520"/>
-          </a:xfrm>
-          <a:prstGeom prst="rect">
-            <a:avLst/>
-          </a:prstGeom>
-          <a:noFill/>
-          <a:ln/>
-        </p:spPr>
-        <p:txBody>
-          <a:bodyPr wrap="square" lIns="635" tIns="635" rIns="635" bIns="635" rtlCol="0" anchor="t">
-            <a:normAutofit/>
-          </a:bodyPr>
-          <a:lstStyle/>
-          <a:p>
-            <a:r>
-              <a:rPr lang="en-US" sz="2100" dirty="0">
-                <a:solidFill>
-                  <a:srgbClr val="17364A"/>
-                </a:solidFill>
-                <a:latin typeface="Aptos" pitchFamily="34" charset="0"/>
-                <a:ea typeface="Aptos" pitchFamily="34" charset="-122"/>
-                <a:cs typeface="Aptos" pitchFamily="34" charset="-120"/>
-              </a:rPr>
-              <a:t>This module provides national-level training guidance for public health agencies and partners.</a:t>
-            </a:r>
-            <a:endParaRPr lang="en-US" sz="2100" dirty="0"/>
-          </a:p>
-          <a:p>
-            <a:r>
-              <a:rPr lang="en-US" sz="2100" dirty="0">
-                <a:solidFill>
-                  <a:srgbClr val="17364A"/>
-                </a:solidFill>
-                <a:latin typeface="Aptos" pitchFamily="34" charset="0"/>
-                <a:ea typeface="Aptos" pitchFamily="34" charset="-122"/>
-                <a:cs typeface="Aptos" pitchFamily="34" charset="-120"/>
-              </a:rPr>
-              <a:t>It is not legal advice and does not replace review by agency legal counsel, privacy officers,.</a:t>
-            </a:r>
-            <a:endParaRPr lang="en-US" sz="2100" dirty="0"/>
-          </a:p>
-          <a:p>
-            <a:r>
-              <a:rPr lang="en-US" sz="2100" dirty="0">
-                <a:solidFill>
-                  <a:srgbClr val="17364A"/>
-                </a:solidFill>
-                <a:latin typeface="Aptos" pitchFamily="34" charset="0"/>
-                <a:ea typeface="Aptos" pitchFamily="34" charset="-122"/>
-                <a:cs typeface="Aptos" pitchFamily="34" charset="-120"/>
-              </a:rPr>
-              <a:t>Requirements may vary by state, locality, territory, Tribe, agency, funding source, data-sharing.</a:t>
-            </a:r>
-            <a:endParaRPr lang="en-US" sz="2100" dirty="0"/>
-          </a:p>
-        </p:txBody>
-      </p:sp>
-      <p:sp>
-        <p:nvSpPr>
-          <p:cNvPr id="12" name="Shape 10"/>
-          <p:cNvSpPr/>
-          <p:nvPr/>
-        </p:nvSpPr>
-        <p:spPr>
-          <a:xfrm>
-            <a:off x="7909560" y="1417320"/>
-            <a:ext cx="3154680" cy="1828800"/>
-          </a:xfrm>
-          <a:prstGeom prst="roundRect">
-            <a:avLst>
-              <a:gd name="adj" fmla="val 6000"/>
-            </a:avLst>
+          <p:cNvPr id="15" name="Shape 13"/>
+          <p:cNvSpPr/>
+          <p:nvPr/>
+        </p:nvSpPr>
+        <p:spPr>
+          <a:xfrm>
+            <a:off x="10287000" y="3108960"/>
+            <a:ext cx="566928" cy="566928"/>
+          </a:xfrm>
+          <a:prstGeom prst="ellipse">
+            <a:avLst/>
           </a:prstGeom>
           <a:solidFill>
-            <a:srgbClr val="EEF8ED"/>
+            <a:srgbClr val="2F8A28"/>
           </a:solidFill>
           <a:ln w="12700">
             <a:solidFill>
-              <a:srgbClr val="B9D7E6"/>
+              <a:srgbClr val="2F8A28"/>
             </a:solidFill>
             <a:prstDash val="solid"/>
           </a:ln>
@@ -16714,14 +18517,108 @@
       </p:sp>
       <p:sp>
         <p:nvSpPr>
-          <p:cNvPr id="13" name="Text 11"/>
-          <p:cNvSpPr/>
-          <p:nvPr/>
-        </p:nvSpPr>
-        <p:spPr>
-          <a:xfrm>
-            <a:off x="8074152" y="1563624"/>
-            <a:ext cx="2825496" cy="256032"/>
+          <p:cNvPr id="16" name="Shape 14"/>
+          <p:cNvSpPr/>
+          <p:nvPr/>
+        </p:nvSpPr>
+        <p:spPr>
+          <a:xfrm>
+            <a:off x="9089136" y="3456432"/>
+            <a:ext cx="566928" cy="566928"/>
+          </a:xfrm>
+          <a:prstGeom prst="ellipse">
+            <a:avLst/>
+          </a:prstGeom>
+          <a:solidFill>
+            <a:srgbClr val="6A4CA3"/>
+          </a:solidFill>
+          <a:ln w="12700">
+            <a:solidFill>
+              <a:srgbClr val="6A4CA3"/>
+            </a:solidFill>
+            <a:prstDash val="solid"/>
+          </a:ln>
+        </p:spPr>
+      </p:sp>
+      <p:sp>
+        <p:nvSpPr>
+          <p:cNvPr id="17" name="Shape 15"/>
+          <p:cNvSpPr/>
+          <p:nvPr/>
+        </p:nvSpPr>
+        <p:spPr>
+          <a:xfrm>
+            <a:off x="8385048" y="3419856"/>
+            <a:ext cx="1975104" cy="0"/>
+          </a:xfrm>
+          <a:prstGeom prst="line">
+            <a:avLst/>
+          </a:prstGeom>
+          <a:noFill/>
+          <a:ln w="25400">
+            <a:solidFill>
+              <a:srgbClr val="8ABBD8"/>
+            </a:solidFill>
+            <a:prstDash val="solid"/>
+          </a:ln>
+        </p:spPr>
+      </p:sp>
+      <p:sp>
+        <p:nvSpPr>
+          <p:cNvPr id="18" name="Shape 16"/>
+          <p:cNvSpPr/>
+          <p:nvPr/>
+        </p:nvSpPr>
+        <p:spPr>
+          <a:xfrm>
+            <a:off x="8202168" y="3630168"/>
+            <a:ext cx="1170432" cy="118872"/>
+          </a:xfrm>
+          <a:prstGeom prst="line">
+            <a:avLst/>
+          </a:prstGeom>
+          <a:noFill/>
+          <a:ln w="25400">
+            <a:solidFill>
+              <a:srgbClr val="8ABBD8"/>
+            </a:solidFill>
+            <a:prstDash val="solid"/>
+          </a:ln>
+        </p:spPr>
+      </p:sp>
+      <p:sp>
+        <p:nvSpPr>
+          <p:cNvPr id="19" name="Shape 17"/>
+          <p:cNvSpPr/>
+          <p:nvPr/>
+        </p:nvSpPr>
+        <p:spPr>
+          <a:xfrm>
+            <a:off x="10543032" y="3630168"/>
+            <a:ext cx="-1170432" cy="118872"/>
+          </a:xfrm>
+          <a:prstGeom prst="line">
+            <a:avLst/>
+          </a:prstGeom>
+          <a:noFill/>
+          <a:ln w="25400">
+            <a:solidFill>
+              <a:srgbClr val="8ABBD8"/>
+            </a:solidFill>
+            <a:prstDash val="solid"/>
+          </a:ln>
+        </p:spPr>
+      </p:sp>
+      <p:sp>
+        <p:nvSpPr>
+          <p:cNvPr id="20" name="Text 18"/>
+          <p:cNvSpPr/>
+          <p:nvPr/>
+        </p:nvSpPr>
+        <p:spPr>
+          <a:xfrm>
+            <a:off x="7863840" y="4069080"/>
+            <a:ext cx="3017520" cy="164592"/>
           </a:xfrm>
           <a:prstGeom prst="rect">
             <a:avLst/>
@@ -16733,79 +18630,38 @@
           <a:bodyPr wrap="square" lIns="0" tIns="0" rIns="0" bIns="0" rtlCol="0" anchor="ctr"/>
           <a:lstStyle/>
           <a:p>
-            <a:pPr indent="0" marL="0">
-              <a:buNone/>
-            </a:pPr>
-            <a:r>
-              <a:rPr lang="en-US" sz="1300" b="1" dirty="0">
-                <a:solidFill>
-                  <a:srgbClr val="0068B7"/>
-                </a:solidFill>
-                <a:latin typeface="Aptos" pitchFamily="34" charset="0"/>
-                <a:ea typeface="Aptos" pitchFamily="34" charset="-122"/>
-                <a:cs typeface="Aptos" pitchFamily="34" charset="-120"/>
-              </a:rPr>
-              <a:t>Key idea</a:t>
-            </a:r>
-            <a:endParaRPr lang="en-US" sz="1300" dirty="0"/>
-          </a:p>
-        </p:txBody>
-      </p:sp>
-      <p:sp>
-        <p:nvSpPr>
-          <p:cNvPr id="14" name="Text 12"/>
-          <p:cNvSpPr/>
-          <p:nvPr/>
-        </p:nvSpPr>
-        <p:spPr>
-          <a:xfrm>
-            <a:off x="8074152" y="1920240"/>
-            <a:ext cx="2825496" cy="1188720"/>
-          </a:xfrm>
-          <a:prstGeom prst="rect">
-            <a:avLst/>
-          </a:prstGeom>
-          <a:noFill/>
-          <a:ln/>
-        </p:spPr>
-        <p:txBody>
-          <a:bodyPr wrap="square" lIns="0" tIns="0" rIns="0" bIns="0" rtlCol="0" anchor="t">
-            <a:normAutofit/>
-          </a:bodyPr>
-          <a:lstStyle/>
-          <a:p>
-            <a:pPr indent="0" marL="0">
-              <a:buNone/>
-            </a:pPr>
-            <a:r>
-              <a:rPr lang="en-US" sz="1550" dirty="0">
-                <a:solidFill>
-                  <a:srgbClr val="17364A"/>
-                </a:solidFill>
-                <a:latin typeface="Aptos" pitchFamily="34" charset="0"/>
-                <a:ea typeface="Aptos" pitchFamily="34" charset="-122"/>
-                <a:cs typeface="Aptos" pitchFamily="34" charset="-120"/>
-              </a:rPr>
-              <a:t>This module provides national-level training guidance for public health agencies and partners.</a:t>
-            </a:r>
-            <a:endParaRPr lang="en-US" sz="1550" dirty="0"/>
-          </a:p>
-        </p:txBody>
-      </p:sp>
-      <p:sp>
-        <p:nvSpPr>
-          <p:cNvPr id="15" name="Shape 13"/>
-          <p:cNvSpPr/>
-          <p:nvPr/>
-        </p:nvSpPr>
-        <p:spPr>
-          <a:xfrm>
-            <a:off x="7909560" y="3520440"/>
-            <a:ext cx="3154680" cy="1737360"/>
+            <a:pPr algn="ctr" indent="0" marL="0">
+              <a:buNone/>
+            </a:pPr>
+            <a:r>
+              <a:rPr lang="en-US" sz="900" b="1" dirty="0">
+                <a:solidFill>
+                  <a:srgbClr val="003A63"/>
+                </a:solidFill>
+                <a:latin typeface="Aptos" pitchFamily="34" charset="0"/>
+                <a:ea typeface="Aptos" pitchFamily="34" charset="-122"/>
+                <a:cs typeface="Aptos" pitchFamily="34" charset="-120"/>
+              </a:rPr>
+              <a:t>Decision rights</a:t>
+            </a:r>
+            <a:endParaRPr lang="en-US" sz="900" dirty="0"/>
+          </a:p>
+        </p:txBody>
+      </p:sp>
+      <p:sp>
+        <p:nvSpPr>
+          <p:cNvPr id="21" name="Shape 19"/>
+          <p:cNvSpPr/>
+          <p:nvPr/>
+        </p:nvSpPr>
+        <p:spPr>
+          <a:xfrm>
+            <a:off x="7635240" y="4498848"/>
+            <a:ext cx="3474720" cy="1143000"/>
           </a:xfrm>
           <a:prstGeom prst="roundRect">
             <a:avLst>
-              <a:gd name="adj" fmla="val 6316"/>
+              <a:gd name="adj" fmla="val 9600"/>
             </a:avLst>
           </a:prstGeom>
           <a:solidFill>
@@ -16821,14 +18677,14 @@
       </p:sp>
       <p:sp>
         <p:nvSpPr>
-          <p:cNvPr id="16" name="Text 14"/>
-          <p:cNvSpPr/>
-          <p:nvPr/>
-        </p:nvSpPr>
-        <p:spPr>
-          <a:xfrm>
-            <a:off x="8074152" y="3666744"/>
-            <a:ext cx="2825496" cy="256032"/>
+          <p:cNvPr id="22" name="Text 20"/>
+          <p:cNvSpPr/>
+          <p:nvPr/>
+        </p:nvSpPr>
+        <p:spPr>
+          <a:xfrm>
+            <a:off x="7799832" y="4645152"/>
+            <a:ext cx="3145536" cy="256032"/>
           </a:xfrm>
           <a:prstGeom prst="rect">
             <a:avLst/>
@@ -16852,7 +18708,7 @@
                 <a:ea typeface="Aptos" pitchFamily="34" charset="-122"/>
                 <a:cs typeface="Aptos" pitchFamily="34" charset="-120"/>
               </a:rPr>
-              <a:t>Use this for</a:t>
+              <a:t>What to document</a:t>
             </a:r>
             <a:endParaRPr lang="en-US" sz="1300" dirty="0"/>
           </a:p>
@@ -16860,14 +18716,14 @@
       </p:sp>
       <p:sp>
         <p:nvSpPr>
-          <p:cNvPr id="17" name="Text 15"/>
-          <p:cNvSpPr/>
-          <p:nvPr/>
-        </p:nvSpPr>
-        <p:spPr>
-          <a:xfrm>
-            <a:off x="8074152" y="4023360"/>
-            <a:ext cx="2825496" cy="1097280"/>
+          <p:cNvPr id="23" name="Text 21"/>
+          <p:cNvSpPr/>
+          <p:nvPr/>
+        </p:nvSpPr>
+        <p:spPr>
+          <a:xfrm>
+            <a:off x="7799832" y="5001768"/>
+            <a:ext cx="3145536" cy="502920"/>
           </a:xfrm>
           <a:prstGeom prst="rect">
             <a:avLst/>
@@ -16893,7 +18749,7 @@
                 <a:ea typeface="Aptos" pitchFamily="34" charset="-122"/>
                 <a:cs typeface="Aptos" pitchFamily="34" charset="-120"/>
               </a:rPr>
-              <a:t>Connect the concept to public health decisions, safeguards, documentation, or implementation work.</a:t>
+              <a:t>Translate this concept into clear decision rights, review steps, documentation expectations, and escalation paths before an AI-supported workflow is approved.</a:t>
             </a:r>
             <a:endParaRPr lang="en-US" sz="1550" dirty="0"/>
           </a:p>
@@ -17067,8 +18923,8 @@
         </p:nvSpPr>
         <p:spPr>
           <a:xfrm>
-            <a:off x="9966960" y="6537960"/>
-            <a:ext cx="1645920" cy="201168"/>
+            <a:off x="9646920" y="6537960"/>
+            <a:ext cx="1965960" cy="201168"/>
           </a:xfrm>
           <a:prstGeom prst="rect">
             <a:avLst/>
@@ -17092,7 +18948,7 @@
                 <a:ea typeface="Aptos" pitchFamily="34" charset="-122"/>
                 <a:cs typeface="Aptos" pitchFamily="34" charset="-120"/>
               </a:rPr>
-              <a:t>Â© Paula Soper</a:t>
+              <a:t>Copyright Paula Soper</a:t>
             </a:r>
             <a:endParaRPr lang="en-US" sz="800" dirty="0"/>
           </a:p>
@@ -17139,77 +18995,13 @@
       </p:sp>
       <p:sp>
         <p:nvSpPr>
-          <p:cNvPr id="8" name="Shape 6"/>
+          <p:cNvPr id="8" name="Text 6"/>
           <p:cNvSpPr/>
           <p:nvPr/>
         </p:nvSpPr>
         <p:spPr>
           <a:xfrm>
             <a:off x="640080" y="658368"/>
-            <a:ext cx="420624" cy="420624"/>
-          </a:xfrm>
-          <a:prstGeom prst="ellipse">
-            <a:avLst/>
-          </a:prstGeom>
-          <a:solidFill>
-            <a:srgbClr val="0068B7"/>
-          </a:solidFill>
-          <a:ln w="12700">
-            <a:solidFill>
-              <a:srgbClr val="0068B7"/>
-            </a:solidFill>
-            <a:prstDash val="solid"/>
-          </a:ln>
-        </p:spPr>
-      </p:sp>
-      <p:sp>
-        <p:nvSpPr>
-          <p:cNvPr id="9" name="Text 7"/>
-          <p:cNvSpPr/>
-          <p:nvPr/>
-        </p:nvSpPr>
-        <p:spPr>
-          <a:xfrm>
-            <a:off x="640080" y="731520"/>
-            <a:ext cx="420624" cy="164592"/>
-          </a:xfrm>
-          <a:prstGeom prst="rect">
-            <a:avLst/>
-          </a:prstGeom>
-          <a:noFill/>
-          <a:ln/>
-        </p:spPr>
-        <p:txBody>
-          <a:bodyPr wrap="square" lIns="0" tIns="0" rIns="0" bIns="0" rtlCol="0" anchor="ctr"/>
-          <a:lstStyle/>
-          <a:p>
-            <a:pPr algn="ctr" indent="0" marL="0">
-              <a:buNone/>
-            </a:pPr>
-            <a:r>
-              <a:rPr lang="en-US" sz="1100" b="1" dirty="0">
-                <a:solidFill>
-                  <a:srgbClr val="FFFFFF"/>
-                </a:solidFill>
-                <a:latin typeface="Aptos" pitchFamily="34" charset="0"/>
-                <a:ea typeface="Aptos" pitchFamily="34" charset="-122"/>
-                <a:cs typeface="Aptos" pitchFamily="34" charset="-120"/>
-              </a:rPr>
-              <a:t>4</a:t>
-            </a:r>
-            <a:endParaRPr lang="en-US" sz="1100" dirty="0"/>
-          </a:p>
-        </p:txBody>
-      </p:sp>
-      <p:sp>
-        <p:nvSpPr>
-          <p:cNvPr id="10" name="Text 8"/>
-          <p:cNvSpPr/>
-          <p:nvPr/>
-        </p:nvSpPr>
-        <p:spPr>
-          <a:xfrm>
-            <a:off x="640080" y="621792"/>
             <a:ext cx="10881360" cy="713232"/>
           </a:xfrm>
           <a:prstGeom prst="rect">
@@ -17244,14 +19036,14 @@
       </p:sp>
       <p:sp>
         <p:nvSpPr>
-          <p:cNvPr id="11" name="Text 9"/>
+          <p:cNvPr id="9" name="Text 7"/>
           <p:cNvSpPr/>
           <p:nvPr/>
         </p:nvSpPr>
         <p:spPr>
           <a:xfrm>
             <a:off x="868680" y="1508760"/>
-            <a:ext cx="6537960" cy="4160520"/>
+            <a:ext cx="6309360" cy="4160520"/>
           </a:xfrm>
           <a:prstGeom prst="rect">
             <a:avLst/>
@@ -17310,18 +19102,18 @@
       </p:sp>
       <p:sp>
         <p:nvSpPr>
-          <p:cNvPr id="12" name="Shape 10"/>
-          <p:cNvSpPr/>
-          <p:nvPr/>
-        </p:nvSpPr>
-        <p:spPr>
-          <a:xfrm>
-            <a:off x="7909560" y="1417320"/>
-            <a:ext cx="3154680" cy="1828800"/>
+          <p:cNvPr id="10" name="Shape 8"/>
+          <p:cNvSpPr/>
+          <p:nvPr/>
+        </p:nvSpPr>
+        <p:spPr>
+          <a:xfrm>
+            <a:off x="7635240" y="1325880"/>
+            <a:ext cx="3474720" cy="1325880"/>
           </a:xfrm>
           <a:prstGeom prst="roundRect">
             <a:avLst>
-              <a:gd name="adj" fmla="val 6000"/>
+              <a:gd name="adj" fmla="val 8276"/>
             </a:avLst>
           </a:prstGeom>
           <a:solidFill>
@@ -17337,14 +19129,14 @@
       </p:sp>
       <p:sp>
         <p:nvSpPr>
-          <p:cNvPr id="13" name="Text 11"/>
-          <p:cNvSpPr/>
-          <p:nvPr/>
-        </p:nvSpPr>
-        <p:spPr>
-          <a:xfrm>
-            <a:off x="8074152" y="1563624"/>
-            <a:ext cx="2825496" cy="256032"/>
+          <p:cNvPr id="11" name="Text 9"/>
+          <p:cNvSpPr/>
+          <p:nvPr/>
+        </p:nvSpPr>
+        <p:spPr>
+          <a:xfrm>
+            <a:off x="7799832" y="1472184"/>
+            <a:ext cx="3145536" cy="256032"/>
           </a:xfrm>
           <a:prstGeom prst="rect">
             <a:avLst/>
@@ -17368,7 +19160,7 @@
                 <a:ea typeface="Aptos" pitchFamily="34" charset="-122"/>
                 <a:cs typeface="Aptos" pitchFamily="34" charset="-120"/>
               </a:rPr>
-              <a:t>Key idea</a:t>
+              <a:t>Risk check</a:t>
             </a:r>
             <a:endParaRPr lang="en-US" sz="1300" dirty="0"/>
           </a:p>
@@ -17376,14 +19168,14 @@
       </p:sp>
       <p:sp>
         <p:nvSpPr>
-          <p:cNvPr id="14" name="Text 12"/>
-          <p:cNvSpPr/>
-          <p:nvPr/>
-        </p:nvSpPr>
-        <p:spPr>
-          <a:xfrm>
-            <a:off x="8074152" y="1920240"/>
-            <a:ext cx="2825496" cy="1188720"/>
+          <p:cNvPr id="12" name="Text 10"/>
+          <p:cNvSpPr/>
+          <p:nvPr/>
+        </p:nvSpPr>
+        <p:spPr>
+          <a:xfrm>
+            <a:off x="7799832" y="1828800"/>
+            <a:ext cx="3145536" cy="685800"/>
           </a:xfrm>
           <a:prstGeom prst="rect">
             <a:avLst/>
@@ -17417,18 +19209,171 @@
       </p:sp>
       <p:sp>
         <p:nvSpPr>
-          <p:cNvPr id="15" name="Shape 13"/>
-          <p:cNvSpPr/>
-          <p:nvPr/>
-        </p:nvSpPr>
-        <p:spPr>
-          <a:xfrm>
-            <a:off x="7909560" y="3520440"/>
-            <a:ext cx="3154680" cy="1737360"/>
+          <p:cNvPr id="13" name="Shape 11"/>
+          <p:cNvSpPr/>
+          <p:nvPr/>
+        </p:nvSpPr>
+        <p:spPr>
+          <a:xfrm>
+            <a:off x="7635240" y="2788920"/>
+            <a:ext cx="3474720" cy="1536192"/>
           </a:xfrm>
           <a:prstGeom prst="roundRect">
             <a:avLst>
-              <a:gd name="adj" fmla="val 6316"/>
+              <a:gd name="adj" fmla="val 7143"/>
+            </a:avLst>
+          </a:prstGeom>
+          <a:solidFill>
+            <a:srgbClr val="FFFFFF">
+              <a:alpha val="88000"/>
+            </a:srgbClr>
+          </a:solidFill>
+          <a:ln w="12700">
+            <a:solidFill>
+              <a:srgbClr val="D6E8F2"/>
+            </a:solidFill>
+            <a:prstDash val="solid"/>
+          </a:ln>
+        </p:spPr>
+      </p:sp>
+      <p:sp>
+        <p:nvSpPr>
+          <p:cNvPr id="14" name="Shape 12"/>
+          <p:cNvSpPr/>
+          <p:nvPr/>
+        </p:nvSpPr>
+        <p:spPr>
+          <a:xfrm>
+            <a:off x="8046720" y="3108960"/>
+            <a:ext cx="2651760" cy="896112"/>
+          </a:xfrm>
+          <a:prstGeom prst="arc">
+            <a:avLst/>
+          </a:prstGeom>
+          <a:noFill/>
+          <a:ln w="25400">
+            <a:solidFill>
+              <a:srgbClr val="0068B7"/>
+            </a:solidFill>
+            <a:prstDash val="solid"/>
+          </a:ln>
+        </p:spPr>
+      </p:sp>
+      <p:sp>
+        <p:nvSpPr>
+          <p:cNvPr id="15" name="Text 13"/>
+          <p:cNvSpPr/>
+          <p:nvPr/>
+        </p:nvSpPr>
+        <p:spPr>
+          <a:xfrm>
+            <a:off x="7909560" y="3099816"/>
+            <a:ext cx="2926080" cy="256032"/>
+          </a:xfrm>
+          <a:prstGeom prst="rect">
+            <a:avLst/>
+          </a:prstGeom>
+          <a:noFill/>
+          <a:ln/>
+        </p:spPr>
+        <p:txBody>
+          <a:bodyPr wrap="square" lIns="0" tIns="0" rIns="0" bIns="0" rtlCol="0" anchor="ctr"/>
+          <a:lstStyle/>
+          <a:p>
+            <a:pPr algn="ctr" indent="0" marL="0">
+              <a:buNone/>
+            </a:pPr>
+            <a:r>
+              <a:rPr lang="en-US" sz="1500" b="1" dirty="0">
+                <a:solidFill>
+                  <a:srgbClr val="003A63"/>
+                </a:solidFill>
+                <a:latin typeface="Aptos" pitchFamily="34" charset="0"/>
+                <a:ea typeface="Aptos" pitchFamily="34" charset="-122"/>
+                <a:cs typeface="Aptos" pitchFamily="34" charset="-120"/>
+              </a:rPr>
+              <a:t>Risk</a:t>
+            </a:r>
+            <a:endParaRPr lang="en-US" sz="1500" dirty="0"/>
+          </a:p>
+        </p:txBody>
+      </p:sp>
+      <p:sp>
+        <p:nvSpPr>
+          <p:cNvPr id="16" name="Shape 14"/>
+          <p:cNvSpPr/>
+          <p:nvPr/>
+        </p:nvSpPr>
+        <p:spPr>
+          <a:xfrm>
+            <a:off x="8366760" y="3639312"/>
+            <a:ext cx="2011680" cy="0"/>
+          </a:xfrm>
+          <a:prstGeom prst="line">
+            <a:avLst/>
+          </a:prstGeom>
+          <a:noFill/>
+          <a:ln w="63500">
+            <a:solidFill>
+              <a:srgbClr val="2F8A28"/>
+            </a:solidFill>
+            <a:prstDash val="solid"/>
+          </a:ln>
+        </p:spPr>
+      </p:sp>
+      <p:sp>
+        <p:nvSpPr>
+          <p:cNvPr id="17" name="Text 15"/>
+          <p:cNvSpPr/>
+          <p:nvPr/>
+        </p:nvSpPr>
+        <p:spPr>
+          <a:xfrm>
+            <a:off x="7909560" y="3849624"/>
+            <a:ext cx="2926080" cy="164592"/>
+          </a:xfrm>
+          <a:prstGeom prst="rect">
+            <a:avLst/>
+          </a:prstGeom>
+          <a:noFill/>
+          <a:ln/>
+        </p:spPr>
+        <p:txBody>
+          <a:bodyPr wrap="square" lIns="0" tIns="0" rIns="0" bIns="0" rtlCol="0" anchor="ctr"/>
+          <a:lstStyle/>
+          <a:p>
+            <a:pPr algn="ctr" indent="0" marL="0">
+              <a:buNone/>
+            </a:pPr>
+            <a:r>
+              <a:rPr lang="en-US" sz="900" dirty="0">
+                <a:solidFill>
+                  <a:srgbClr val="003A63"/>
+                </a:solidFill>
+                <a:latin typeface="Aptos" pitchFamily="34" charset="0"/>
+                <a:ea typeface="Aptos" pitchFamily="34" charset="-122"/>
+                <a:cs typeface="Aptos" pitchFamily="34" charset="-120"/>
+              </a:rPr>
+              <a:t>Human review</a:t>
+            </a:r>
+            <a:endParaRPr lang="en-US" sz="900" dirty="0"/>
+          </a:p>
+        </p:txBody>
+      </p:sp>
+      <p:sp>
+        <p:nvSpPr>
+          <p:cNvPr id="18" name="Shape 16"/>
+          <p:cNvSpPr/>
+          <p:nvPr/>
+        </p:nvSpPr>
+        <p:spPr>
+          <a:xfrm>
+            <a:off x="7635240" y="4498848"/>
+            <a:ext cx="3474720" cy="1143000"/>
+          </a:xfrm>
+          <a:prstGeom prst="roundRect">
+            <a:avLst>
+              <a:gd name="adj" fmla="val 9600"/>
             </a:avLst>
           </a:prstGeom>
           <a:solidFill>
@@ -17444,14 +19389,14 @@
       </p:sp>
       <p:sp>
         <p:nvSpPr>
-          <p:cNvPr id="16" name="Text 14"/>
-          <p:cNvSpPr/>
-          <p:nvPr/>
-        </p:nvSpPr>
-        <p:spPr>
-          <a:xfrm>
-            <a:off x="8074152" y="3666744"/>
-            <a:ext cx="2825496" cy="256032"/>
+          <p:cNvPr id="19" name="Text 17"/>
+          <p:cNvSpPr/>
+          <p:nvPr/>
+        </p:nvSpPr>
+        <p:spPr>
+          <a:xfrm>
+            <a:off x="7799832" y="4645152"/>
+            <a:ext cx="3145536" cy="256032"/>
           </a:xfrm>
           <a:prstGeom prst="rect">
             <a:avLst/>
@@ -17475,7 +19420,7 @@
                 <a:ea typeface="Aptos" pitchFamily="34" charset="-122"/>
                 <a:cs typeface="Aptos" pitchFamily="34" charset="-120"/>
               </a:rPr>
-              <a:t>Use this for</a:t>
+              <a:t>Safeguard to plan</a:t>
             </a:r>
             <a:endParaRPr lang="en-US" sz="1300" dirty="0"/>
           </a:p>
@@ -17483,14 +19428,14 @@
       </p:sp>
       <p:sp>
         <p:nvSpPr>
-          <p:cNvPr id="17" name="Text 15"/>
-          <p:cNvSpPr/>
-          <p:nvPr/>
-        </p:nvSpPr>
-        <p:spPr>
-          <a:xfrm>
-            <a:off x="8074152" y="4023360"/>
-            <a:ext cx="2825496" cy="1097280"/>
+          <p:cNvPr id="20" name="Text 18"/>
+          <p:cNvSpPr/>
+          <p:nvPr/>
+        </p:nvSpPr>
+        <p:spPr>
+          <a:xfrm>
+            <a:off x="7799832" y="5001768"/>
+            <a:ext cx="3145536" cy="502920"/>
           </a:xfrm>
           <a:prstGeom prst="rect">
             <a:avLst/>
@@ -17516,7 +19461,7 @@
                 <a:ea typeface="Aptos" pitchFamily="34" charset="-122"/>
                 <a:cs typeface="Aptos" pitchFamily="34" charset="-120"/>
               </a:rPr>
-              <a:t>Connect the concept to public health decisions, safeguards, documentation, or implementation work.</a:t>
+              <a:t>Identify what could go wrong, who could be affected, what safeguards are needed, and what evidence should be reviewed before use expands.</a:t>
             </a:r>
             <a:endParaRPr lang="en-US" sz="1550" dirty="0"/>
           </a:p>

--- a/downloads/presentations/modules/gov-310.pptx
+++ b/downloads/presentations/modules/gov-310.pptx
@@ -3705,13 +3705,11 @@
             </a:avLst>
           </a:prstGeom>
           <a:solidFill>
-            <a:srgbClr val="FFFFFF">
-              <a:alpha val="88000"/>
-            </a:srgbClr>
+            <a:srgbClr val="FFFFFF"/>
           </a:solidFill>
           <a:ln w="12700">
             <a:solidFill>
-              <a:srgbClr val="D6E8F2"/>
+              <a:srgbClr val="B9D7E6"/>
             </a:solidFill>
             <a:prstDash val="solid"/>
           </a:ln>
@@ -3719,26 +3717,42 @@
       </p:sp>
       <p:sp>
         <p:nvSpPr>
-          <p:cNvPr id="14" name="Shape 12"/>
-          <p:cNvSpPr/>
-          <p:nvPr/>
-        </p:nvSpPr>
-        <p:spPr>
-          <a:xfrm>
-            <a:off x="8046720" y="3108960"/>
-            <a:ext cx="2651760" cy="896112"/>
-          </a:xfrm>
-          <a:prstGeom prst="arc">
-            <a:avLst/>
-          </a:prstGeom>
-          <a:noFill/>
-          <a:ln w="25400">
-            <a:solidFill>
-              <a:srgbClr val="0068B7"/>
-            </a:solidFill>
-            <a:prstDash val="solid"/>
-          </a:ln>
-        </p:spPr>
+          <p:cNvPr id="14" name="Text 12"/>
+          <p:cNvSpPr/>
+          <p:nvPr/>
+        </p:nvSpPr>
+        <p:spPr>
+          <a:xfrm>
+            <a:off x="7799832" y="2935224"/>
+            <a:ext cx="3145536" cy="256032"/>
+          </a:xfrm>
+          <a:prstGeom prst="rect">
+            <a:avLst/>
+          </a:prstGeom>
+          <a:noFill/>
+          <a:ln/>
+        </p:spPr>
+        <p:txBody>
+          <a:bodyPr wrap="square" lIns="0" tIns="0" rIns="0" bIns="0" rtlCol="0" anchor="ctr"/>
+          <a:lstStyle/>
+          <a:p>
+            <a:pPr indent="0" marL="0">
+              <a:buNone/>
+            </a:pPr>
+            <a:r>
+              <a:rPr lang="en-US" sz="1300" b="1" dirty="0">
+                <a:solidFill>
+                  <a:srgbClr val="0068B7"/>
+                </a:solidFill>
+                <a:latin typeface="Aptos" pitchFamily="34" charset="0"/>
+                <a:ea typeface="Aptos" pitchFamily="34" charset="-122"/>
+                <a:cs typeface="Aptos" pitchFamily="34" charset="-120"/>
+              </a:rPr>
+              <a:t>Concept checkpoints</a:t>
+            </a:r>
+            <a:endParaRPr lang="en-US" sz="1300" dirty="0"/>
+          </a:p>
+        </p:txBody>
       </p:sp>
       <p:sp>
         <p:nvSpPr>
@@ -3748,102 +3762,67 @@
         </p:nvSpPr>
         <p:spPr>
           <a:xfrm>
-            <a:off x="7909560" y="3099816"/>
-            <a:ext cx="2926080" cy="256032"/>
-          </a:xfrm>
-          <a:prstGeom prst="rect">
-            <a:avLst/>
-          </a:prstGeom>
-          <a:noFill/>
-          <a:ln/>
-        </p:spPr>
-        <p:txBody>
-          <a:bodyPr wrap="square" lIns="0" tIns="0" rIns="0" bIns="0" rtlCol="0" anchor="ctr"/>
-          <a:lstStyle/>
-          <a:p>
-            <a:pPr algn="ctr" indent="0" marL="0">
-              <a:buNone/>
-            </a:pPr>
-            <a:r>
-              <a:rPr lang="en-US" sz="1500" b="1" dirty="0">
-                <a:solidFill>
-                  <a:srgbClr val="003A63"/>
-                </a:solidFill>
-                <a:latin typeface="Aptos" pitchFamily="34" charset="0"/>
-                <a:ea typeface="Aptos" pitchFamily="34" charset="-122"/>
-                <a:cs typeface="Aptos" pitchFamily="34" charset="-120"/>
-              </a:rPr>
-              <a:t>Risk</a:t>
-            </a:r>
-            <a:endParaRPr lang="en-US" sz="1500" dirty="0"/>
+            <a:off x="7818120" y="3300984"/>
+            <a:ext cx="3090672" cy="877824"/>
+          </a:xfrm>
+          <a:prstGeom prst="rect">
+            <a:avLst/>
+          </a:prstGeom>
+          <a:noFill/>
+          <a:ln/>
+        </p:spPr>
+        <p:txBody>
+          <a:bodyPr wrap="square" lIns="254" tIns="254" rIns="254" bIns="254" rtlCol="0" anchor="t">
+            <a:normAutofit/>
+          </a:bodyPr>
+          <a:lstStyle/>
+          <a:p>
+            <a:r>
+              <a:rPr lang="en-US" sz="1380" dirty="0">
+                <a:solidFill>
+                  <a:srgbClr val="17364A"/>
+                </a:solidFill>
+                <a:latin typeface="Aptos" pitchFamily="34" charset="0"/>
+                <a:ea typeface="Aptos" pitchFamily="34" charset="-122"/>
+                <a:cs typeface="Aptos" pitchFamily="34" charset="-120"/>
+              </a:rPr>
+              <a:t>In public health practice, de-identification must be interpreted carefully because rare.</a:t>
+            </a:r>
+            <a:endParaRPr lang="en-US" sz="1380" dirty="0"/>
+          </a:p>
+          <a:p>
+            <a:r>
+              <a:rPr lang="en-US" sz="1380" dirty="0">
+                <a:solidFill>
+                  <a:srgbClr val="17364A"/>
+                </a:solidFill>
+                <a:latin typeface="Aptos" pitchFamily="34" charset="0"/>
+                <a:ea typeface="Aptos" pitchFamily="34" charset="-122"/>
+                <a:cs typeface="Aptos" pitchFamily="34" charset="-120"/>
+              </a:rPr>
+              <a:t>Re-identification risk is the possibility that a person, household, provider, facility, or.</a:t>
+            </a:r>
+            <a:endParaRPr lang="en-US" sz="1380" dirty="0"/>
+          </a:p>
+          <a:p>
+            <a:r>
+              <a:rPr lang="en-US" sz="1380" dirty="0">
+                <a:solidFill>
+                  <a:srgbClr val="17364A"/>
+                </a:solidFill>
+                <a:latin typeface="Aptos" pitchFamily="34" charset="0"/>
+                <a:ea typeface="Aptos" pitchFamily="34" charset="-122"/>
+                <a:cs typeface="Aptos" pitchFamily="34" charset="-120"/>
+              </a:rPr>
+              <a:t>AI can increase this risk by making patterns easier to discover, by generating detailed.</a:t>
+            </a:r>
+            <a:endParaRPr lang="en-US" sz="1380" dirty="0"/>
           </a:p>
         </p:txBody>
       </p:sp>
       <p:sp>
         <p:nvSpPr>
           <p:cNvPr id="16" name="Shape 14"/>
-          <p:cNvSpPr/>
-          <p:nvPr/>
-        </p:nvSpPr>
-        <p:spPr>
-          <a:xfrm>
-            <a:off x="8366760" y="3639312"/>
-            <a:ext cx="2011680" cy="0"/>
-          </a:xfrm>
-          <a:prstGeom prst="line">
-            <a:avLst/>
-          </a:prstGeom>
-          <a:noFill/>
-          <a:ln w="63500">
-            <a:solidFill>
-              <a:srgbClr val="2F8A28"/>
-            </a:solidFill>
-            <a:prstDash val="solid"/>
-          </a:ln>
-        </p:spPr>
-      </p:sp>
-      <p:sp>
-        <p:nvSpPr>
-          <p:cNvPr id="17" name="Text 15"/>
-          <p:cNvSpPr/>
-          <p:nvPr/>
-        </p:nvSpPr>
-        <p:spPr>
-          <a:xfrm>
-            <a:off x="7909560" y="3849624"/>
-            <a:ext cx="2926080" cy="164592"/>
-          </a:xfrm>
-          <a:prstGeom prst="rect">
-            <a:avLst/>
-          </a:prstGeom>
-          <a:noFill/>
-          <a:ln/>
-        </p:spPr>
-        <p:txBody>
-          <a:bodyPr wrap="square" lIns="0" tIns="0" rIns="0" bIns="0" rtlCol="0" anchor="ctr"/>
-          <a:lstStyle/>
-          <a:p>
-            <a:pPr algn="ctr" indent="0" marL="0">
-              <a:buNone/>
-            </a:pPr>
-            <a:r>
-              <a:rPr lang="en-US" sz="900" dirty="0">
-                <a:solidFill>
-                  <a:srgbClr val="003A63"/>
-                </a:solidFill>
-                <a:latin typeface="Aptos" pitchFamily="34" charset="0"/>
-                <a:ea typeface="Aptos" pitchFamily="34" charset="-122"/>
-                <a:cs typeface="Aptos" pitchFamily="34" charset="-120"/>
-              </a:rPr>
-              <a:t>Human review</a:t>
-            </a:r>
-            <a:endParaRPr lang="en-US" sz="900" dirty="0"/>
-          </a:p>
-        </p:txBody>
-      </p:sp>
-      <p:sp>
-        <p:nvSpPr>
-          <p:cNvPr id="18" name="Shape 16"/>
           <p:cNvSpPr/>
           <p:nvPr/>
         </p:nvSpPr>
@@ -3870,7 +3849,7 @@
       </p:sp>
       <p:sp>
         <p:nvSpPr>
-          <p:cNvPr id="19" name="Text 17"/>
+          <p:cNvPr id="17" name="Text 15"/>
           <p:cNvSpPr/>
           <p:nvPr/>
         </p:nvSpPr>
@@ -3909,7 +3888,7 @@
       </p:sp>
       <p:sp>
         <p:nvSpPr>
-          <p:cNvPr id="20" name="Text 18"/>
+          <p:cNvPr id="18" name="Text 16"/>
           <p:cNvSpPr/>
           <p:nvPr/>
         </p:nvSpPr>
@@ -4417,13 +4396,11 @@
             </a:avLst>
           </a:prstGeom>
           <a:solidFill>
-            <a:srgbClr val="FFFFFF">
-              <a:alpha val="88000"/>
-            </a:srgbClr>
+            <a:srgbClr val="FFFFFF"/>
           </a:solidFill>
           <a:ln w="12700">
             <a:solidFill>
-              <a:srgbClr val="D6E8F2"/>
+              <a:srgbClr val="B9D7E6"/>
             </a:solidFill>
             <a:prstDash val="solid"/>
           </a:ln>
@@ -4431,26 +4408,42 @@
       </p:sp>
       <p:sp>
         <p:nvSpPr>
-          <p:cNvPr id="14" name="Shape 12"/>
-          <p:cNvSpPr/>
-          <p:nvPr/>
-        </p:nvSpPr>
-        <p:spPr>
-          <a:xfrm>
-            <a:off x="8046720" y="3108960"/>
-            <a:ext cx="2651760" cy="896112"/>
-          </a:xfrm>
-          <a:prstGeom prst="arc">
-            <a:avLst/>
-          </a:prstGeom>
-          <a:noFill/>
-          <a:ln w="25400">
-            <a:solidFill>
-              <a:srgbClr val="0068B7"/>
-            </a:solidFill>
-            <a:prstDash val="solid"/>
-          </a:ln>
-        </p:spPr>
+          <p:cNvPr id="14" name="Text 12"/>
+          <p:cNvSpPr/>
+          <p:nvPr/>
+        </p:nvSpPr>
+        <p:spPr>
+          <a:xfrm>
+            <a:off x="7799832" y="2935224"/>
+            <a:ext cx="3145536" cy="256032"/>
+          </a:xfrm>
+          <a:prstGeom prst="rect">
+            <a:avLst/>
+          </a:prstGeom>
+          <a:noFill/>
+          <a:ln/>
+        </p:spPr>
+        <p:txBody>
+          <a:bodyPr wrap="square" lIns="0" tIns="0" rIns="0" bIns="0" rtlCol="0" anchor="ctr"/>
+          <a:lstStyle/>
+          <a:p>
+            <a:pPr indent="0" marL="0">
+              <a:buNone/>
+            </a:pPr>
+            <a:r>
+              <a:rPr lang="en-US" sz="1300" b="1" dirty="0">
+                <a:solidFill>
+                  <a:srgbClr val="0068B7"/>
+                </a:solidFill>
+                <a:latin typeface="Aptos" pitchFamily="34" charset="0"/>
+                <a:ea typeface="Aptos" pitchFamily="34" charset="-122"/>
+                <a:cs typeface="Aptos" pitchFamily="34" charset="-120"/>
+              </a:rPr>
+              <a:t>Concept checkpoints</a:t>
+            </a:r>
+            <a:endParaRPr lang="en-US" sz="1300" dirty="0"/>
+          </a:p>
+        </p:txBody>
       </p:sp>
       <p:sp>
         <p:nvSpPr>
@@ -4460,102 +4453,53 @@
         </p:nvSpPr>
         <p:spPr>
           <a:xfrm>
-            <a:off x="7909560" y="3099816"/>
-            <a:ext cx="2926080" cy="256032"/>
-          </a:xfrm>
-          <a:prstGeom prst="rect">
-            <a:avLst/>
-          </a:prstGeom>
-          <a:noFill/>
-          <a:ln/>
-        </p:spPr>
-        <p:txBody>
-          <a:bodyPr wrap="square" lIns="0" tIns="0" rIns="0" bIns="0" rtlCol="0" anchor="ctr"/>
-          <a:lstStyle/>
-          <a:p>
-            <a:pPr algn="ctr" indent="0" marL="0">
-              <a:buNone/>
-            </a:pPr>
-            <a:r>
-              <a:rPr lang="en-US" sz="1500" b="1" dirty="0">
-                <a:solidFill>
-                  <a:srgbClr val="003A63"/>
-                </a:solidFill>
-                <a:latin typeface="Aptos" pitchFamily="34" charset="0"/>
-                <a:ea typeface="Aptos" pitchFamily="34" charset="-122"/>
-                <a:cs typeface="Aptos" pitchFamily="34" charset="-120"/>
-              </a:rPr>
-              <a:t>Risk</a:t>
-            </a:r>
-            <a:endParaRPr lang="en-US" sz="1500" dirty="0"/>
+            <a:off x="7818120" y="3300984"/>
+            <a:ext cx="3090672" cy="877824"/>
+          </a:xfrm>
+          <a:prstGeom prst="rect">
+            <a:avLst/>
+          </a:prstGeom>
+          <a:noFill/>
+          <a:ln/>
+        </p:spPr>
+        <p:txBody>
+          <a:bodyPr wrap="square" lIns="254" tIns="254" rIns="254" bIns="254" rtlCol="0" anchor="t">
+            <a:normAutofit/>
+          </a:bodyPr>
+          <a:lstStyle/>
+          <a:p>
+            <a:r>
+              <a:rPr lang="en-US" sz="1380" dirty="0">
+                <a:solidFill>
+                  <a:srgbClr val="17364A"/>
+                </a:solidFill>
+                <a:latin typeface="Aptos" pitchFamily="34" charset="0"/>
+                <a:ea typeface="Aptos" pitchFamily="34" charset="-122"/>
+                <a:cs typeface="Aptos" pitchFamily="34" charset="-120"/>
+              </a:rPr>
+              <a:t>Differential privacy is a statistical approach that adds carefully calibrated noise to.</a:t>
+            </a:r>
+            <a:endParaRPr lang="en-US" sz="1380" dirty="0"/>
+          </a:p>
+          <a:p>
+            <a:r>
+              <a:rPr lang="en-US" sz="1380" dirty="0">
+                <a:solidFill>
+                  <a:srgbClr val="17364A"/>
+                </a:solidFill>
+                <a:latin typeface="Aptos" pitchFamily="34" charset="0"/>
+                <a:ea typeface="Aptos" pitchFamily="34" charset="-122"/>
+                <a:cs typeface="Aptos" pitchFamily="34" charset="-120"/>
+              </a:rPr>
+              <a:t>Public health staff need to understand that differential privacy involves tradeoffs.</a:t>
+            </a:r>
+            <a:endParaRPr lang="en-US" sz="1380" dirty="0"/>
           </a:p>
         </p:txBody>
       </p:sp>
       <p:sp>
         <p:nvSpPr>
           <p:cNvPr id="16" name="Shape 14"/>
-          <p:cNvSpPr/>
-          <p:nvPr/>
-        </p:nvSpPr>
-        <p:spPr>
-          <a:xfrm>
-            <a:off x="8366760" y="3639312"/>
-            <a:ext cx="2011680" cy="0"/>
-          </a:xfrm>
-          <a:prstGeom prst="line">
-            <a:avLst/>
-          </a:prstGeom>
-          <a:noFill/>
-          <a:ln w="63500">
-            <a:solidFill>
-              <a:srgbClr val="2F8A28"/>
-            </a:solidFill>
-            <a:prstDash val="solid"/>
-          </a:ln>
-        </p:spPr>
-      </p:sp>
-      <p:sp>
-        <p:nvSpPr>
-          <p:cNvPr id="17" name="Text 15"/>
-          <p:cNvSpPr/>
-          <p:nvPr/>
-        </p:nvSpPr>
-        <p:spPr>
-          <a:xfrm>
-            <a:off x="7909560" y="3849624"/>
-            <a:ext cx="2926080" cy="164592"/>
-          </a:xfrm>
-          <a:prstGeom prst="rect">
-            <a:avLst/>
-          </a:prstGeom>
-          <a:noFill/>
-          <a:ln/>
-        </p:spPr>
-        <p:txBody>
-          <a:bodyPr wrap="square" lIns="0" tIns="0" rIns="0" bIns="0" rtlCol="0" anchor="ctr"/>
-          <a:lstStyle/>
-          <a:p>
-            <a:pPr algn="ctr" indent="0" marL="0">
-              <a:buNone/>
-            </a:pPr>
-            <a:r>
-              <a:rPr lang="en-US" sz="900" dirty="0">
-                <a:solidFill>
-                  <a:srgbClr val="003A63"/>
-                </a:solidFill>
-                <a:latin typeface="Aptos" pitchFamily="34" charset="0"/>
-                <a:ea typeface="Aptos" pitchFamily="34" charset="-122"/>
-                <a:cs typeface="Aptos" pitchFamily="34" charset="-120"/>
-              </a:rPr>
-              <a:t>Human review</a:t>
-            </a:r>
-            <a:endParaRPr lang="en-US" sz="900" dirty="0"/>
-          </a:p>
-        </p:txBody>
-      </p:sp>
-      <p:sp>
-        <p:nvSpPr>
-          <p:cNvPr id="18" name="Shape 16"/>
           <p:cNvSpPr/>
           <p:nvPr/>
         </p:nvSpPr>
@@ -4582,7 +4526,7 @@
       </p:sp>
       <p:sp>
         <p:nvSpPr>
-          <p:cNvPr id="19" name="Text 17"/>
+          <p:cNvPr id="17" name="Text 15"/>
           <p:cNvSpPr/>
           <p:nvPr/>
         </p:nvSpPr>
@@ -4621,7 +4565,7 @@
       </p:sp>
       <p:sp>
         <p:nvSpPr>
-          <p:cNvPr id="20" name="Text 18"/>
+          <p:cNvPr id="18" name="Text 16"/>
           <p:cNvSpPr/>
           <p:nvPr/>
         </p:nvSpPr>
@@ -5129,13 +5073,11 @@
             </a:avLst>
           </a:prstGeom>
           <a:solidFill>
-            <a:srgbClr val="FFFFFF">
-              <a:alpha val="88000"/>
-            </a:srgbClr>
+            <a:srgbClr val="FFFFFF"/>
           </a:solidFill>
           <a:ln w="12700">
             <a:solidFill>
-              <a:srgbClr val="D6E8F2"/>
+              <a:srgbClr val="B9D7E6"/>
             </a:solidFill>
             <a:prstDash val="solid"/>
           </a:ln>
@@ -5143,26 +5085,42 @@
       </p:sp>
       <p:sp>
         <p:nvSpPr>
-          <p:cNvPr id="14" name="Shape 12"/>
-          <p:cNvSpPr/>
-          <p:nvPr/>
-        </p:nvSpPr>
-        <p:spPr>
-          <a:xfrm>
-            <a:off x="8046720" y="3108960"/>
-            <a:ext cx="2651760" cy="896112"/>
-          </a:xfrm>
-          <a:prstGeom prst="arc">
-            <a:avLst/>
-          </a:prstGeom>
-          <a:noFill/>
-          <a:ln w="25400">
-            <a:solidFill>
-              <a:srgbClr val="0068B7"/>
-            </a:solidFill>
-            <a:prstDash val="solid"/>
-          </a:ln>
-        </p:spPr>
+          <p:cNvPr id="14" name="Text 12"/>
+          <p:cNvSpPr/>
+          <p:nvPr/>
+        </p:nvSpPr>
+        <p:spPr>
+          <a:xfrm>
+            <a:off x="7799832" y="2935224"/>
+            <a:ext cx="3145536" cy="256032"/>
+          </a:xfrm>
+          <a:prstGeom prst="rect">
+            <a:avLst/>
+          </a:prstGeom>
+          <a:noFill/>
+          <a:ln/>
+        </p:spPr>
+        <p:txBody>
+          <a:bodyPr wrap="square" lIns="0" tIns="0" rIns="0" bIns="0" rtlCol="0" anchor="ctr"/>
+          <a:lstStyle/>
+          <a:p>
+            <a:pPr indent="0" marL="0">
+              <a:buNone/>
+            </a:pPr>
+            <a:r>
+              <a:rPr lang="en-US" sz="1300" b="1" dirty="0">
+                <a:solidFill>
+                  <a:srgbClr val="0068B7"/>
+                </a:solidFill>
+                <a:latin typeface="Aptos" pitchFamily="34" charset="0"/>
+                <a:ea typeface="Aptos" pitchFamily="34" charset="-122"/>
+                <a:cs typeface="Aptos" pitchFamily="34" charset="-120"/>
+              </a:rPr>
+              <a:t>Concept checkpoints</a:t>
+            </a:r>
+            <a:endParaRPr lang="en-US" sz="1300" dirty="0"/>
+          </a:p>
+        </p:txBody>
       </p:sp>
       <p:sp>
         <p:nvSpPr>
@@ -5172,102 +5130,67 @@
         </p:nvSpPr>
         <p:spPr>
           <a:xfrm>
-            <a:off x="7909560" y="3099816"/>
-            <a:ext cx="2926080" cy="256032"/>
-          </a:xfrm>
-          <a:prstGeom prst="rect">
-            <a:avLst/>
-          </a:prstGeom>
-          <a:noFill/>
-          <a:ln/>
-        </p:spPr>
-        <p:txBody>
-          <a:bodyPr wrap="square" lIns="0" tIns="0" rIns="0" bIns="0" rtlCol="0" anchor="ctr"/>
-          <a:lstStyle/>
-          <a:p>
-            <a:pPr algn="ctr" indent="0" marL="0">
-              <a:buNone/>
-            </a:pPr>
-            <a:r>
-              <a:rPr lang="en-US" sz="1500" b="1" dirty="0">
-                <a:solidFill>
-                  <a:srgbClr val="003A63"/>
-                </a:solidFill>
-                <a:latin typeface="Aptos" pitchFamily="34" charset="0"/>
-                <a:ea typeface="Aptos" pitchFamily="34" charset="-122"/>
-                <a:cs typeface="Aptos" pitchFamily="34" charset="-120"/>
-              </a:rPr>
-              <a:t>Risk</a:t>
-            </a:r>
-            <a:endParaRPr lang="en-US" sz="1500" dirty="0"/>
+            <a:off x="7818120" y="3300984"/>
+            <a:ext cx="3090672" cy="877824"/>
+          </a:xfrm>
+          <a:prstGeom prst="rect">
+            <a:avLst/>
+          </a:prstGeom>
+          <a:noFill/>
+          <a:ln/>
+        </p:spPr>
+        <p:txBody>
+          <a:bodyPr wrap="square" lIns="254" tIns="254" rIns="254" bIns="254" rtlCol="0" anchor="t">
+            <a:normAutofit/>
+          </a:bodyPr>
+          <a:lstStyle/>
+          <a:p>
+            <a:r>
+              <a:rPr lang="en-US" sz="1380" dirty="0">
+                <a:solidFill>
+                  <a:srgbClr val="17364A"/>
+                </a:solidFill>
+                <a:latin typeface="Aptos" pitchFamily="34" charset="0"/>
+                <a:ea typeface="Aptos" pitchFamily="34" charset="-122"/>
+                <a:cs typeface="Aptos" pitchFamily="34" charset="-120"/>
+              </a:rPr>
+              <a:t>Consider a health department that wants to use AI to summarize disease investigation notes.</a:t>
+            </a:r>
+            <a:endParaRPr lang="en-US" sz="1380" dirty="0"/>
+          </a:p>
+          <a:p>
+            <a:r>
+              <a:rPr lang="en-US" sz="1380" dirty="0">
+                <a:solidFill>
+                  <a:srgbClr val="17364A"/>
+                </a:solidFill>
+                <a:latin typeface="Aptos" pitchFamily="34" charset="0"/>
+                <a:ea typeface="Aptos" pitchFamily="34" charset="-122"/>
+                <a:cs typeface="Aptos" pitchFamily="34" charset="-120"/>
+              </a:rPr>
+              <a:t>The notes may include symptoms, dates, employer names, schools, shelters, correctional.</a:t>
+            </a:r>
+            <a:endParaRPr lang="en-US" sz="1380" dirty="0"/>
+          </a:p>
+          <a:p>
+            <a:r>
+              <a:rPr lang="en-US" sz="1380" dirty="0">
+                <a:solidFill>
+                  <a:srgbClr val="17364A"/>
+                </a:solidFill>
+                <a:latin typeface="Aptos" pitchFamily="34" charset="0"/>
+                <a:ea typeface="Aptos" pitchFamily="34" charset="-122"/>
+                <a:cs typeface="Aptos" pitchFamily="34" charset="-120"/>
+              </a:rPr>
+              <a:t>Even if the AI system is internal, the agency must define who can access the notes,.</a:t>
+            </a:r>
+            <a:endParaRPr lang="en-US" sz="1380" dirty="0"/>
           </a:p>
         </p:txBody>
       </p:sp>
       <p:sp>
         <p:nvSpPr>
           <p:cNvPr id="16" name="Shape 14"/>
-          <p:cNvSpPr/>
-          <p:nvPr/>
-        </p:nvSpPr>
-        <p:spPr>
-          <a:xfrm>
-            <a:off x="8366760" y="3639312"/>
-            <a:ext cx="2011680" cy="0"/>
-          </a:xfrm>
-          <a:prstGeom prst="line">
-            <a:avLst/>
-          </a:prstGeom>
-          <a:noFill/>
-          <a:ln w="63500">
-            <a:solidFill>
-              <a:srgbClr val="2F8A28"/>
-            </a:solidFill>
-            <a:prstDash val="solid"/>
-          </a:ln>
-        </p:spPr>
-      </p:sp>
-      <p:sp>
-        <p:nvSpPr>
-          <p:cNvPr id="17" name="Text 15"/>
-          <p:cNvSpPr/>
-          <p:nvPr/>
-        </p:nvSpPr>
-        <p:spPr>
-          <a:xfrm>
-            <a:off x="7909560" y="3849624"/>
-            <a:ext cx="2926080" cy="164592"/>
-          </a:xfrm>
-          <a:prstGeom prst="rect">
-            <a:avLst/>
-          </a:prstGeom>
-          <a:noFill/>
-          <a:ln/>
-        </p:spPr>
-        <p:txBody>
-          <a:bodyPr wrap="square" lIns="0" tIns="0" rIns="0" bIns="0" rtlCol="0" anchor="ctr"/>
-          <a:lstStyle/>
-          <a:p>
-            <a:pPr algn="ctr" indent="0" marL="0">
-              <a:buNone/>
-            </a:pPr>
-            <a:r>
-              <a:rPr lang="en-US" sz="900" dirty="0">
-                <a:solidFill>
-                  <a:srgbClr val="003A63"/>
-                </a:solidFill>
-                <a:latin typeface="Aptos" pitchFamily="34" charset="0"/>
-                <a:ea typeface="Aptos" pitchFamily="34" charset="-122"/>
-                <a:cs typeface="Aptos" pitchFamily="34" charset="-120"/>
-              </a:rPr>
-              <a:t>Human review</a:t>
-            </a:r>
-            <a:endParaRPr lang="en-US" sz="900" dirty="0"/>
-          </a:p>
-        </p:txBody>
-      </p:sp>
-      <p:sp>
-        <p:nvSpPr>
-          <p:cNvPr id="18" name="Shape 16"/>
           <p:cNvSpPr/>
           <p:nvPr/>
         </p:nvSpPr>
@@ -5294,7 +5217,7 @@
       </p:sp>
       <p:sp>
         <p:nvSpPr>
-          <p:cNvPr id="19" name="Text 17"/>
+          <p:cNvPr id="17" name="Text 15"/>
           <p:cNvSpPr/>
           <p:nvPr/>
         </p:nvSpPr>
@@ -5333,7 +5256,7 @@
       </p:sp>
       <p:sp>
         <p:nvSpPr>
-          <p:cNvPr id="20" name="Text 18"/>
+          <p:cNvPr id="18" name="Text 16"/>
           <p:cNvSpPr/>
           <p:nvPr/>
         </p:nvSpPr>
@@ -5841,13 +5764,11 @@
             </a:avLst>
           </a:prstGeom>
           <a:solidFill>
-            <a:srgbClr val="FFFFFF">
-              <a:alpha val="88000"/>
-            </a:srgbClr>
+            <a:srgbClr val="FFFFFF"/>
           </a:solidFill>
           <a:ln w="12700">
             <a:solidFill>
-              <a:srgbClr val="D6E8F2"/>
+              <a:srgbClr val="B9D7E6"/>
             </a:solidFill>
             <a:prstDash val="solid"/>
           </a:ln>
@@ -5855,26 +5776,42 @@
       </p:sp>
       <p:sp>
         <p:nvSpPr>
-          <p:cNvPr id="14" name="Shape 12"/>
-          <p:cNvSpPr/>
-          <p:nvPr/>
-        </p:nvSpPr>
-        <p:spPr>
-          <a:xfrm>
-            <a:off x="8046720" y="3108960"/>
-            <a:ext cx="2651760" cy="896112"/>
-          </a:xfrm>
-          <a:prstGeom prst="arc">
-            <a:avLst/>
-          </a:prstGeom>
-          <a:noFill/>
-          <a:ln w="25400">
-            <a:solidFill>
-              <a:srgbClr val="0068B7"/>
-            </a:solidFill>
-            <a:prstDash val="solid"/>
-          </a:ln>
-        </p:spPr>
+          <p:cNvPr id="14" name="Text 12"/>
+          <p:cNvSpPr/>
+          <p:nvPr/>
+        </p:nvSpPr>
+        <p:spPr>
+          <a:xfrm>
+            <a:off x="7799832" y="2935224"/>
+            <a:ext cx="3145536" cy="256032"/>
+          </a:xfrm>
+          <a:prstGeom prst="rect">
+            <a:avLst/>
+          </a:prstGeom>
+          <a:noFill/>
+          <a:ln/>
+        </p:spPr>
+        <p:txBody>
+          <a:bodyPr wrap="square" lIns="0" tIns="0" rIns="0" bIns="0" rtlCol="0" anchor="ctr"/>
+          <a:lstStyle/>
+          <a:p>
+            <a:pPr indent="0" marL="0">
+              <a:buNone/>
+            </a:pPr>
+            <a:r>
+              <a:rPr lang="en-US" sz="1300" b="1" dirty="0">
+                <a:solidFill>
+                  <a:srgbClr val="0068B7"/>
+                </a:solidFill>
+                <a:latin typeface="Aptos" pitchFamily="34" charset="0"/>
+                <a:ea typeface="Aptos" pitchFamily="34" charset="-122"/>
+                <a:cs typeface="Aptos" pitchFamily="34" charset="-120"/>
+              </a:rPr>
+              <a:t>Concept checkpoints</a:t>
+            </a:r>
+            <a:endParaRPr lang="en-US" sz="1300" dirty="0"/>
+          </a:p>
+        </p:txBody>
       </p:sp>
       <p:sp>
         <p:nvSpPr>
@@ -5884,102 +5821,67 @@
         </p:nvSpPr>
         <p:spPr>
           <a:xfrm>
-            <a:off x="7909560" y="3099816"/>
-            <a:ext cx="2926080" cy="256032"/>
-          </a:xfrm>
-          <a:prstGeom prst="rect">
-            <a:avLst/>
-          </a:prstGeom>
-          <a:noFill/>
-          <a:ln/>
-        </p:spPr>
-        <p:txBody>
-          <a:bodyPr wrap="square" lIns="0" tIns="0" rIns="0" bIns="0" rtlCol="0" anchor="ctr"/>
-          <a:lstStyle/>
-          <a:p>
-            <a:pPr algn="ctr" indent="0" marL="0">
-              <a:buNone/>
-            </a:pPr>
-            <a:r>
-              <a:rPr lang="en-US" sz="1500" b="1" dirty="0">
-                <a:solidFill>
-                  <a:srgbClr val="003A63"/>
-                </a:solidFill>
-                <a:latin typeface="Aptos" pitchFamily="34" charset="0"/>
-                <a:ea typeface="Aptos" pitchFamily="34" charset="-122"/>
-                <a:cs typeface="Aptos" pitchFamily="34" charset="-120"/>
-              </a:rPr>
-              <a:t>Risk</a:t>
-            </a:r>
-            <a:endParaRPr lang="en-US" sz="1500" dirty="0"/>
+            <a:off x="7818120" y="3300984"/>
+            <a:ext cx="3090672" cy="877824"/>
+          </a:xfrm>
+          <a:prstGeom prst="rect">
+            <a:avLst/>
+          </a:prstGeom>
+          <a:noFill/>
+          <a:ln/>
+        </p:spPr>
+        <p:txBody>
+          <a:bodyPr wrap="square" lIns="254" tIns="254" rIns="254" bIns="254" rtlCol="0" anchor="t">
+            <a:normAutofit/>
+          </a:bodyPr>
+          <a:lstStyle/>
+          <a:p>
+            <a:r>
+              <a:rPr lang="en-US" sz="1380" dirty="0">
+                <a:solidFill>
+                  <a:srgbClr val="17364A"/>
+                </a:solidFill>
+                <a:latin typeface="Aptos" pitchFamily="34" charset="0"/>
+                <a:ea typeface="Aptos" pitchFamily="34" charset="-122"/>
+                <a:cs typeface="Aptos" pitchFamily="34" charset="-120"/>
+              </a:rPr>
+              <a:t>Staff should identify whether the workflow uses protected health information, personally.</a:t>
+            </a:r>
+            <a:endParaRPr lang="en-US" sz="1380" dirty="0"/>
+          </a:p>
+          <a:p>
+            <a:r>
+              <a:rPr lang="en-US" sz="1380" dirty="0">
+                <a:solidFill>
+                  <a:srgbClr val="17364A"/>
+                </a:solidFill>
+                <a:latin typeface="Aptos" pitchFamily="34" charset="0"/>
+                <a:ea typeface="Aptos" pitchFamily="34" charset="-122"/>
+                <a:cs typeface="Aptos" pitchFamily="34" charset="-120"/>
+              </a:rPr>
+              <a:t>A public AI tool may be acceptable for public guidance documents but inappropriate for.</a:t>
+            </a:r>
+            <a:endParaRPr lang="en-US" sz="1380" dirty="0"/>
+          </a:p>
+          <a:p>
+            <a:r>
+              <a:rPr lang="en-US" sz="1380" dirty="0">
+                <a:solidFill>
+                  <a:srgbClr val="17364A"/>
+                </a:solidFill>
+                <a:latin typeface="Aptos" pitchFamily="34" charset="0"/>
+                <a:ea typeface="Aptos" pitchFamily="34" charset="-122"/>
+                <a:cs typeface="Aptos" pitchFamily="34" charset="-120"/>
+              </a:rPr>
+              <a:t>The next step is determining the minimum necessary data for the AI task.</a:t>
+            </a:r>
+            <a:endParaRPr lang="en-US" sz="1380" dirty="0"/>
           </a:p>
         </p:txBody>
       </p:sp>
       <p:sp>
         <p:nvSpPr>
           <p:cNvPr id="16" name="Shape 14"/>
-          <p:cNvSpPr/>
-          <p:nvPr/>
-        </p:nvSpPr>
-        <p:spPr>
-          <a:xfrm>
-            <a:off x="8366760" y="3639312"/>
-            <a:ext cx="2011680" cy="0"/>
-          </a:xfrm>
-          <a:prstGeom prst="line">
-            <a:avLst/>
-          </a:prstGeom>
-          <a:noFill/>
-          <a:ln w="63500">
-            <a:solidFill>
-              <a:srgbClr val="2F8A28"/>
-            </a:solidFill>
-            <a:prstDash val="solid"/>
-          </a:ln>
-        </p:spPr>
-      </p:sp>
-      <p:sp>
-        <p:nvSpPr>
-          <p:cNvPr id="17" name="Text 15"/>
-          <p:cNvSpPr/>
-          <p:nvPr/>
-        </p:nvSpPr>
-        <p:spPr>
-          <a:xfrm>
-            <a:off x="7909560" y="3849624"/>
-            <a:ext cx="2926080" cy="164592"/>
-          </a:xfrm>
-          <a:prstGeom prst="rect">
-            <a:avLst/>
-          </a:prstGeom>
-          <a:noFill/>
-          <a:ln/>
-        </p:spPr>
-        <p:txBody>
-          <a:bodyPr wrap="square" lIns="0" tIns="0" rIns="0" bIns="0" rtlCol="0" anchor="ctr"/>
-          <a:lstStyle/>
-          <a:p>
-            <a:pPr algn="ctr" indent="0" marL="0">
-              <a:buNone/>
-            </a:pPr>
-            <a:r>
-              <a:rPr lang="en-US" sz="900" dirty="0">
-                <a:solidFill>
-                  <a:srgbClr val="003A63"/>
-                </a:solidFill>
-                <a:latin typeface="Aptos" pitchFamily="34" charset="0"/>
-                <a:ea typeface="Aptos" pitchFamily="34" charset="-122"/>
-                <a:cs typeface="Aptos" pitchFamily="34" charset="-120"/>
-              </a:rPr>
-              <a:t>Human review</a:t>
-            </a:r>
-            <a:endParaRPr lang="en-US" sz="900" dirty="0"/>
-          </a:p>
-        </p:txBody>
-      </p:sp>
-      <p:sp>
-        <p:nvSpPr>
-          <p:cNvPr id="18" name="Shape 16"/>
           <p:cNvSpPr/>
           <p:nvPr/>
         </p:nvSpPr>
@@ -6006,7 +5908,7 @@
       </p:sp>
       <p:sp>
         <p:nvSpPr>
-          <p:cNvPr id="19" name="Text 17"/>
+          <p:cNvPr id="17" name="Text 15"/>
           <p:cNvSpPr/>
           <p:nvPr/>
         </p:nvSpPr>
@@ -6045,7 +5947,7 @@
       </p:sp>
       <p:sp>
         <p:nvSpPr>
-          <p:cNvPr id="20" name="Text 18"/>
+          <p:cNvPr id="18" name="Text 16"/>
           <p:cNvSpPr/>
           <p:nvPr/>
         </p:nvSpPr>
@@ -6553,13 +6455,11 @@
             </a:avLst>
           </a:prstGeom>
           <a:solidFill>
-            <a:srgbClr val="FFFFFF">
-              <a:alpha val="88000"/>
-            </a:srgbClr>
+            <a:srgbClr val="FFFFFF"/>
           </a:solidFill>
           <a:ln w="12700">
             <a:solidFill>
-              <a:srgbClr val="D6E8F2"/>
+              <a:srgbClr val="B9D7E6"/>
             </a:solidFill>
             <a:prstDash val="solid"/>
           </a:ln>
@@ -6567,26 +6467,42 @@
       </p:sp>
       <p:sp>
         <p:nvSpPr>
-          <p:cNvPr id="14" name="Shape 12"/>
-          <p:cNvSpPr/>
-          <p:nvPr/>
-        </p:nvSpPr>
-        <p:spPr>
-          <a:xfrm>
-            <a:off x="8046720" y="3108960"/>
-            <a:ext cx="2651760" cy="896112"/>
-          </a:xfrm>
-          <a:prstGeom prst="arc">
-            <a:avLst/>
-          </a:prstGeom>
-          <a:noFill/>
-          <a:ln w="25400">
-            <a:solidFill>
-              <a:srgbClr val="0068B7"/>
-            </a:solidFill>
-            <a:prstDash val="solid"/>
-          </a:ln>
-        </p:spPr>
+          <p:cNvPr id="14" name="Text 12"/>
+          <p:cNvSpPr/>
+          <p:nvPr/>
+        </p:nvSpPr>
+        <p:spPr>
+          <a:xfrm>
+            <a:off x="7799832" y="2935224"/>
+            <a:ext cx="3145536" cy="256032"/>
+          </a:xfrm>
+          <a:prstGeom prst="rect">
+            <a:avLst/>
+          </a:prstGeom>
+          <a:noFill/>
+          <a:ln/>
+        </p:spPr>
+        <p:txBody>
+          <a:bodyPr wrap="square" lIns="0" tIns="0" rIns="0" bIns="0" rtlCol="0" anchor="ctr"/>
+          <a:lstStyle/>
+          <a:p>
+            <a:pPr indent="0" marL="0">
+              <a:buNone/>
+            </a:pPr>
+            <a:r>
+              <a:rPr lang="en-US" sz="1300" b="1" dirty="0">
+                <a:solidFill>
+                  <a:srgbClr val="0068B7"/>
+                </a:solidFill>
+                <a:latin typeface="Aptos" pitchFamily="34" charset="0"/>
+                <a:ea typeface="Aptos" pitchFamily="34" charset="-122"/>
+                <a:cs typeface="Aptos" pitchFamily="34" charset="-120"/>
+              </a:rPr>
+              <a:t>Concept checkpoints</a:t>
+            </a:r>
+            <a:endParaRPr lang="en-US" sz="1300" dirty="0"/>
+          </a:p>
+        </p:txBody>
       </p:sp>
       <p:sp>
         <p:nvSpPr>
@@ -6596,102 +6512,67 @@
         </p:nvSpPr>
         <p:spPr>
           <a:xfrm>
-            <a:off x="7909560" y="3099816"/>
-            <a:ext cx="2926080" cy="256032"/>
-          </a:xfrm>
-          <a:prstGeom prst="rect">
-            <a:avLst/>
-          </a:prstGeom>
-          <a:noFill/>
-          <a:ln/>
-        </p:spPr>
-        <p:txBody>
-          <a:bodyPr wrap="square" lIns="0" tIns="0" rIns="0" bIns="0" rtlCol="0" anchor="ctr"/>
-          <a:lstStyle/>
-          <a:p>
-            <a:pPr algn="ctr" indent="0" marL="0">
-              <a:buNone/>
-            </a:pPr>
-            <a:r>
-              <a:rPr lang="en-US" sz="1500" b="1" dirty="0">
-                <a:solidFill>
-                  <a:srgbClr val="003A63"/>
-                </a:solidFill>
-                <a:latin typeface="Aptos" pitchFamily="34" charset="0"/>
-                <a:ea typeface="Aptos" pitchFamily="34" charset="-122"/>
-                <a:cs typeface="Aptos" pitchFamily="34" charset="-120"/>
-              </a:rPr>
-              <a:t>Risk</a:t>
-            </a:r>
-            <a:endParaRPr lang="en-US" sz="1500" dirty="0"/>
+            <a:off x="7818120" y="3300984"/>
+            <a:ext cx="3090672" cy="877824"/>
+          </a:xfrm>
+          <a:prstGeom prst="rect">
+            <a:avLst/>
+          </a:prstGeom>
+          <a:noFill/>
+          <a:ln/>
+        </p:spPr>
+        <p:txBody>
+          <a:bodyPr wrap="square" lIns="254" tIns="254" rIns="254" bIns="254" rtlCol="0" anchor="t">
+            <a:normAutofit/>
+          </a:bodyPr>
+          <a:lstStyle/>
+          <a:p>
+            <a:r>
+              <a:rPr lang="en-US" sz="1380" dirty="0">
+                <a:solidFill>
+                  <a:srgbClr val="17364A"/>
+                </a:solidFill>
+                <a:latin typeface="Aptos" pitchFamily="34" charset="0"/>
+                <a:ea typeface="Aptos" pitchFamily="34" charset="-122"/>
+                <a:cs typeface="Aptos" pitchFamily="34" charset="-120"/>
+              </a:rPr>
+              <a:t>An AI-generated summary, risk score, cluster report, or dashboard can reveal sensitive.</a:t>
+            </a:r>
+            <a:endParaRPr lang="en-US" sz="1380" dirty="0"/>
+          </a:p>
+          <a:p>
+            <a:r>
+              <a:rPr lang="en-US" sz="1380" dirty="0">
+                <a:solidFill>
+                  <a:srgbClr val="17364A"/>
+                </a:solidFill>
+                <a:latin typeface="Aptos" pitchFamily="34" charset="0"/>
+                <a:ea typeface="Aptos" pitchFamily="34" charset="-122"/>
+                <a:cs typeface="Aptos" pitchFamily="34" charset="-120"/>
+              </a:rPr>
+              <a:t>Output review should consider small cells, unusual combinations of attributes,.</a:t>
+            </a:r>
+            <a:endParaRPr lang="en-US" sz="1380" dirty="0"/>
+          </a:p>
+          <a:p>
+            <a:r>
+              <a:rPr lang="en-US" sz="1380" dirty="0">
+                <a:solidFill>
+                  <a:srgbClr val="17364A"/>
+                </a:solidFill>
+                <a:latin typeface="Aptos" pitchFamily="34" charset="0"/>
+                <a:ea typeface="Aptos" pitchFamily="34" charset="-122"/>
+                <a:cs typeface="Aptos" pitchFamily="34" charset="-120"/>
+              </a:rPr>
+              <a:t>Logs should document who generated outputs, what data were used, and whether the output.</a:t>
+            </a:r>
+            <a:endParaRPr lang="en-US" sz="1380" dirty="0"/>
           </a:p>
         </p:txBody>
       </p:sp>
       <p:sp>
         <p:nvSpPr>
           <p:cNvPr id="16" name="Shape 14"/>
-          <p:cNvSpPr/>
-          <p:nvPr/>
-        </p:nvSpPr>
-        <p:spPr>
-          <a:xfrm>
-            <a:off x="8366760" y="3639312"/>
-            <a:ext cx="2011680" cy="0"/>
-          </a:xfrm>
-          <a:prstGeom prst="line">
-            <a:avLst/>
-          </a:prstGeom>
-          <a:noFill/>
-          <a:ln w="63500">
-            <a:solidFill>
-              <a:srgbClr val="2F8A28"/>
-            </a:solidFill>
-            <a:prstDash val="solid"/>
-          </a:ln>
-        </p:spPr>
-      </p:sp>
-      <p:sp>
-        <p:nvSpPr>
-          <p:cNvPr id="17" name="Text 15"/>
-          <p:cNvSpPr/>
-          <p:nvPr/>
-        </p:nvSpPr>
-        <p:spPr>
-          <a:xfrm>
-            <a:off x="7909560" y="3849624"/>
-            <a:ext cx="2926080" cy="164592"/>
-          </a:xfrm>
-          <a:prstGeom prst="rect">
-            <a:avLst/>
-          </a:prstGeom>
-          <a:noFill/>
-          <a:ln/>
-        </p:spPr>
-        <p:txBody>
-          <a:bodyPr wrap="square" lIns="0" tIns="0" rIns="0" bIns="0" rtlCol="0" anchor="ctr"/>
-          <a:lstStyle/>
-          <a:p>
-            <a:pPr algn="ctr" indent="0" marL="0">
-              <a:buNone/>
-            </a:pPr>
-            <a:r>
-              <a:rPr lang="en-US" sz="900" dirty="0">
-                <a:solidFill>
-                  <a:srgbClr val="003A63"/>
-                </a:solidFill>
-                <a:latin typeface="Aptos" pitchFamily="34" charset="0"/>
-                <a:ea typeface="Aptos" pitchFamily="34" charset="-122"/>
-                <a:cs typeface="Aptos" pitchFamily="34" charset="-120"/>
-              </a:rPr>
-              <a:t>Human review</a:t>
-            </a:r>
-            <a:endParaRPr lang="en-US" sz="900" dirty="0"/>
-          </a:p>
-        </p:txBody>
-      </p:sp>
-      <p:sp>
-        <p:nvSpPr>
-          <p:cNvPr id="18" name="Shape 16"/>
           <p:cNvSpPr/>
           <p:nvPr/>
         </p:nvSpPr>
@@ -6718,7 +6599,7 @@
       </p:sp>
       <p:sp>
         <p:nvSpPr>
-          <p:cNvPr id="19" name="Text 17"/>
+          <p:cNvPr id="17" name="Text 15"/>
           <p:cNvSpPr/>
           <p:nvPr/>
         </p:nvSpPr>
@@ -6757,7 +6638,7 @@
       </p:sp>
       <p:sp>
         <p:nvSpPr>
-          <p:cNvPr id="20" name="Text 18"/>
+          <p:cNvPr id="18" name="Text 16"/>
           <p:cNvSpPr/>
           <p:nvPr/>
         </p:nvSpPr>
@@ -7265,13 +7146,11 @@
             </a:avLst>
           </a:prstGeom>
           <a:solidFill>
-            <a:srgbClr val="FFFFFF">
-              <a:alpha val="88000"/>
-            </a:srgbClr>
+            <a:srgbClr val="FFFFFF"/>
           </a:solidFill>
           <a:ln w="12700">
             <a:solidFill>
-              <a:srgbClr val="D6E8F2"/>
+              <a:srgbClr val="B9D7E6"/>
             </a:solidFill>
             <a:prstDash val="solid"/>
           </a:ln>
@@ -7279,26 +7158,42 @@
       </p:sp>
       <p:sp>
         <p:nvSpPr>
-          <p:cNvPr id="14" name="Shape 12"/>
-          <p:cNvSpPr/>
-          <p:nvPr/>
-        </p:nvSpPr>
-        <p:spPr>
-          <a:xfrm>
-            <a:off x="8046720" y="3108960"/>
-            <a:ext cx="2651760" cy="896112"/>
-          </a:xfrm>
-          <a:prstGeom prst="arc">
-            <a:avLst/>
-          </a:prstGeom>
-          <a:noFill/>
-          <a:ln w="25400">
-            <a:solidFill>
-              <a:srgbClr val="0068B7"/>
-            </a:solidFill>
-            <a:prstDash val="solid"/>
-          </a:ln>
-        </p:spPr>
+          <p:cNvPr id="14" name="Text 12"/>
+          <p:cNvSpPr/>
+          <p:nvPr/>
+        </p:nvSpPr>
+        <p:spPr>
+          <a:xfrm>
+            <a:off x="7799832" y="2935224"/>
+            <a:ext cx="3145536" cy="256032"/>
+          </a:xfrm>
+          <a:prstGeom prst="rect">
+            <a:avLst/>
+          </a:prstGeom>
+          <a:noFill/>
+          <a:ln/>
+        </p:spPr>
+        <p:txBody>
+          <a:bodyPr wrap="square" lIns="0" tIns="0" rIns="0" bIns="0" rtlCol="0" anchor="ctr"/>
+          <a:lstStyle/>
+          <a:p>
+            <a:pPr indent="0" marL="0">
+              <a:buNone/>
+            </a:pPr>
+            <a:r>
+              <a:rPr lang="en-US" sz="1300" b="1" dirty="0">
+                <a:solidFill>
+                  <a:srgbClr val="0068B7"/>
+                </a:solidFill>
+                <a:latin typeface="Aptos" pitchFamily="34" charset="0"/>
+                <a:ea typeface="Aptos" pitchFamily="34" charset="-122"/>
+                <a:cs typeface="Aptos" pitchFamily="34" charset="-120"/>
+              </a:rPr>
+              <a:t>Concept checkpoints</a:t>
+            </a:r>
+            <a:endParaRPr lang="en-US" sz="1300" dirty="0"/>
+          </a:p>
+        </p:txBody>
       </p:sp>
       <p:sp>
         <p:nvSpPr>
@@ -7308,102 +7203,67 @@
         </p:nvSpPr>
         <p:spPr>
           <a:xfrm>
-            <a:off x="7909560" y="3099816"/>
-            <a:ext cx="2926080" cy="256032"/>
-          </a:xfrm>
-          <a:prstGeom prst="rect">
-            <a:avLst/>
-          </a:prstGeom>
-          <a:noFill/>
-          <a:ln/>
-        </p:spPr>
-        <p:txBody>
-          <a:bodyPr wrap="square" lIns="0" tIns="0" rIns="0" bIns="0" rtlCol="0" anchor="ctr"/>
-          <a:lstStyle/>
-          <a:p>
-            <a:pPr algn="ctr" indent="0" marL="0">
-              <a:buNone/>
-            </a:pPr>
-            <a:r>
-              <a:rPr lang="en-US" sz="1500" b="1" dirty="0">
-                <a:solidFill>
-                  <a:srgbClr val="003A63"/>
-                </a:solidFill>
-                <a:latin typeface="Aptos" pitchFamily="34" charset="0"/>
-                <a:ea typeface="Aptos" pitchFamily="34" charset="-122"/>
-                <a:cs typeface="Aptos" pitchFamily="34" charset="-120"/>
-              </a:rPr>
-              <a:t>Risk</a:t>
-            </a:r>
-            <a:endParaRPr lang="en-US" sz="1500" dirty="0"/>
+            <a:off x="7818120" y="3300984"/>
+            <a:ext cx="3090672" cy="877824"/>
+          </a:xfrm>
+          <a:prstGeom prst="rect">
+            <a:avLst/>
+          </a:prstGeom>
+          <a:noFill/>
+          <a:ln/>
+        </p:spPr>
+        <p:txBody>
+          <a:bodyPr wrap="square" lIns="254" tIns="254" rIns="254" bIns="254" rtlCol="0" anchor="t">
+            <a:normAutofit/>
+          </a:bodyPr>
+          <a:lstStyle/>
+          <a:p>
+            <a:r>
+              <a:rPr lang="en-US" sz="1380" dirty="0">
+                <a:solidFill>
+                  <a:srgbClr val="17364A"/>
+                </a:solidFill>
+                <a:latin typeface="Aptos" pitchFamily="34" charset="0"/>
+                <a:ea typeface="Aptos" pitchFamily="34" charset="-122"/>
+                <a:cs typeface="Aptos" pitchFamily="34" charset="-120"/>
+              </a:rPr>
+              <a:t>Data that are de-identified for one purpose may be re-identifiable in another context,.</a:t>
+            </a:r>
+            <a:endParaRPr lang="en-US" sz="1380" dirty="0"/>
+          </a:p>
+          <a:p>
+            <a:r>
+              <a:rPr lang="en-US" sz="1380" dirty="0">
+                <a:solidFill>
+                  <a:srgbClr val="17364A"/>
+                </a:solidFill>
+                <a:latin typeface="Aptos" pitchFamily="34" charset="0"/>
+                <a:ea typeface="Aptos" pitchFamily="34" charset="-122"/>
+                <a:cs typeface="Aptos" pitchFamily="34" charset="-120"/>
+              </a:rPr>
+              <a:t>A guardrail is to perform use-case-specific privacy review and to document assumptions.</a:t>
+            </a:r>
+            <a:endParaRPr lang="en-US" sz="1380" dirty="0"/>
+          </a:p>
+          <a:p>
+            <a:r>
+              <a:rPr lang="en-US" sz="1380" dirty="0">
+                <a:solidFill>
+                  <a:srgbClr val="17364A"/>
+                </a:solidFill>
+                <a:latin typeface="Aptos" pitchFamily="34" charset="0"/>
+                <a:ea typeface="Aptos" pitchFamily="34" charset="-122"/>
+                <a:cs typeface="Aptos" pitchFamily="34" charset="-120"/>
+              </a:rPr>
+              <a:t>Another failure mode is exposing sensitive data to unapproved AI tools.</a:t>
+            </a:r>
+            <a:endParaRPr lang="en-US" sz="1380" dirty="0"/>
           </a:p>
         </p:txBody>
       </p:sp>
       <p:sp>
         <p:nvSpPr>
           <p:cNvPr id="16" name="Shape 14"/>
-          <p:cNvSpPr/>
-          <p:nvPr/>
-        </p:nvSpPr>
-        <p:spPr>
-          <a:xfrm>
-            <a:off x="8366760" y="3639312"/>
-            <a:ext cx="2011680" cy="0"/>
-          </a:xfrm>
-          <a:prstGeom prst="line">
-            <a:avLst/>
-          </a:prstGeom>
-          <a:noFill/>
-          <a:ln w="63500">
-            <a:solidFill>
-              <a:srgbClr val="2F8A28"/>
-            </a:solidFill>
-            <a:prstDash val="solid"/>
-          </a:ln>
-        </p:spPr>
-      </p:sp>
-      <p:sp>
-        <p:nvSpPr>
-          <p:cNvPr id="17" name="Text 15"/>
-          <p:cNvSpPr/>
-          <p:nvPr/>
-        </p:nvSpPr>
-        <p:spPr>
-          <a:xfrm>
-            <a:off x="7909560" y="3849624"/>
-            <a:ext cx="2926080" cy="164592"/>
-          </a:xfrm>
-          <a:prstGeom prst="rect">
-            <a:avLst/>
-          </a:prstGeom>
-          <a:noFill/>
-          <a:ln/>
-        </p:spPr>
-        <p:txBody>
-          <a:bodyPr wrap="square" lIns="0" tIns="0" rIns="0" bIns="0" rtlCol="0" anchor="ctr"/>
-          <a:lstStyle/>
-          <a:p>
-            <a:pPr algn="ctr" indent="0" marL="0">
-              <a:buNone/>
-            </a:pPr>
-            <a:r>
-              <a:rPr lang="en-US" sz="900" dirty="0">
-                <a:solidFill>
-                  <a:srgbClr val="003A63"/>
-                </a:solidFill>
-                <a:latin typeface="Aptos" pitchFamily="34" charset="0"/>
-                <a:ea typeface="Aptos" pitchFamily="34" charset="-122"/>
-                <a:cs typeface="Aptos" pitchFamily="34" charset="-120"/>
-              </a:rPr>
-              <a:t>Human review</a:t>
-            </a:r>
-            <a:endParaRPr lang="en-US" sz="900" dirty="0"/>
-          </a:p>
-        </p:txBody>
-      </p:sp>
-      <p:sp>
-        <p:nvSpPr>
-          <p:cNvPr id="18" name="Shape 16"/>
           <p:cNvSpPr/>
           <p:nvPr/>
         </p:nvSpPr>
@@ -7430,7 +7290,7 @@
       </p:sp>
       <p:sp>
         <p:nvSpPr>
-          <p:cNvPr id="19" name="Text 17"/>
+          <p:cNvPr id="17" name="Text 15"/>
           <p:cNvSpPr/>
           <p:nvPr/>
         </p:nvSpPr>
@@ -7469,7 +7329,7 @@
       </p:sp>
       <p:sp>
         <p:nvSpPr>
-          <p:cNvPr id="20" name="Text 18"/>
+          <p:cNvPr id="18" name="Text 16"/>
           <p:cNvSpPr/>
           <p:nvPr/>
         </p:nvSpPr>
@@ -7977,13 +7837,11 @@
             </a:avLst>
           </a:prstGeom>
           <a:solidFill>
-            <a:srgbClr val="FFFFFF">
-              <a:alpha val="88000"/>
-            </a:srgbClr>
+            <a:srgbClr val="FFFFFF"/>
           </a:solidFill>
           <a:ln w="12700">
             <a:solidFill>
-              <a:srgbClr val="D6E8F2"/>
+              <a:srgbClr val="B9D7E6"/>
             </a:solidFill>
             <a:prstDash val="solid"/>
           </a:ln>
@@ -7991,26 +7849,42 @@
       </p:sp>
       <p:sp>
         <p:nvSpPr>
-          <p:cNvPr id="14" name="Shape 12"/>
-          <p:cNvSpPr/>
-          <p:nvPr/>
-        </p:nvSpPr>
-        <p:spPr>
-          <a:xfrm>
-            <a:off x="8046720" y="3108960"/>
-            <a:ext cx="2651760" cy="896112"/>
-          </a:xfrm>
-          <a:prstGeom prst="arc">
-            <a:avLst/>
-          </a:prstGeom>
-          <a:noFill/>
-          <a:ln w="25400">
-            <a:solidFill>
-              <a:srgbClr val="0068B7"/>
-            </a:solidFill>
-            <a:prstDash val="solid"/>
-          </a:ln>
-        </p:spPr>
+          <p:cNvPr id="14" name="Text 12"/>
+          <p:cNvSpPr/>
+          <p:nvPr/>
+        </p:nvSpPr>
+        <p:spPr>
+          <a:xfrm>
+            <a:off x="7799832" y="2935224"/>
+            <a:ext cx="3145536" cy="256032"/>
+          </a:xfrm>
+          <a:prstGeom prst="rect">
+            <a:avLst/>
+          </a:prstGeom>
+          <a:noFill/>
+          <a:ln/>
+        </p:spPr>
+        <p:txBody>
+          <a:bodyPr wrap="square" lIns="0" tIns="0" rIns="0" bIns="0" rtlCol="0" anchor="ctr"/>
+          <a:lstStyle/>
+          <a:p>
+            <a:pPr indent="0" marL="0">
+              <a:buNone/>
+            </a:pPr>
+            <a:r>
+              <a:rPr lang="en-US" sz="1300" b="1" dirty="0">
+                <a:solidFill>
+                  <a:srgbClr val="0068B7"/>
+                </a:solidFill>
+                <a:latin typeface="Aptos" pitchFamily="34" charset="0"/>
+                <a:ea typeface="Aptos" pitchFamily="34" charset="-122"/>
+                <a:cs typeface="Aptos" pitchFamily="34" charset="-120"/>
+              </a:rPr>
+              <a:t>Concept checkpoints</a:t>
+            </a:r>
+            <a:endParaRPr lang="en-US" sz="1300" dirty="0"/>
+          </a:p>
+        </p:txBody>
       </p:sp>
       <p:sp>
         <p:nvSpPr>
@@ -8020,102 +7894,67 @@
         </p:nvSpPr>
         <p:spPr>
           <a:xfrm>
-            <a:off x="7909560" y="3099816"/>
-            <a:ext cx="2926080" cy="256032"/>
-          </a:xfrm>
-          <a:prstGeom prst="rect">
-            <a:avLst/>
-          </a:prstGeom>
-          <a:noFill/>
-          <a:ln/>
-        </p:spPr>
-        <p:txBody>
-          <a:bodyPr wrap="square" lIns="0" tIns="0" rIns="0" bIns="0" rtlCol="0" anchor="ctr"/>
-          <a:lstStyle/>
-          <a:p>
-            <a:pPr algn="ctr" indent="0" marL="0">
-              <a:buNone/>
-            </a:pPr>
-            <a:r>
-              <a:rPr lang="en-US" sz="1500" b="1" dirty="0">
-                <a:solidFill>
-                  <a:srgbClr val="003A63"/>
-                </a:solidFill>
-                <a:latin typeface="Aptos" pitchFamily="34" charset="0"/>
-                <a:ea typeface="Aptos" pitchFamily="34" charset="-122"/>
-                <a:cs typeface="Aptos" pitchFamily="34" charset="-120"/>
-              </a:rPr>
-              <a:t>Risk</a:t>
-            </a:r>
-            <a:endParaRPr lang="en-US" sz="1500" dirty="0"/>
+            <a:off x="7818120" y="3300984"/>
+            <a:ext cx="3090672" cy="877824"/>
+          </a:xfrm>
+          <a:prstGeom prst="rect">
+            <a:avLst/>
+          </a:prstGeom>
+          <a:noFill/>
+          <a:ln/>
+        </p:spPr>
+        <p:txBody>
+          <a:bodyPr wrap="square" lIns="254" tIns="254" rIns="254" bIns="254" rtlCol="0" anchor="t">
+            <a:normAutofit/>
+          </a:bodyPr>
+          <a:lstStyle/>
+          <a:p>
+            <a:r>
+              <a:rPr lang="en-US" sz="1380" dirty="0">
+                <a:solidFill>
+                  <a:srgbClr val="17364A"/>
+                </a:solidFill>
+                <a:latin typeface="Aptos" pitchFamily="34" charset="0"/>
+                <a:ea typeface="Aptos" pitchFamily="34" charset="-122"/>
+                <a:cs typeface="Aptos" pitchFamily="34" charset="-120"/>
+              </a:rPr>
+              <a:t>Privacy risk can also arise from vendor relationships.</a:t>
+            </a:r>
+            <a:endParaRPr lang="en-US" sz="1380" dirty="0"/>
+          </a:p>
+          <a:p>
+            <a:r>
+              <a:rPr lang="en-US" sz="1380" dirty="0">
+                <a:solidFill>
+                  <a:srgbClr val="17364A"/>
+                </a:solidFill>
+                <a:latin typeface="Aptos" pitchFamily="34" charset="0"/>
+                <a:ea typeface="Aptos" pitchFamily="34" charset="-122"/>
+                <a:cs typeface="Aptos" pitchFamily="34" charset="-120"/>
+              </a:rPr>
+              <a:t>Vendors may request sample data for testing or model tuning.</a:t>
+            </a:r>
+            <a:endParaRPr lang="en-US" sz="1380" dirty="0"/>
+          </a:p>
+          <a:p>
+            <a:r>
+              <a:rPr lang="en-US" sz="1380" dirty="0">
+                <a:solidFill>
+                  <a:srgbClr val="17364A"/>
+                </a:solidFill>
+                <a:latin typeface="Aptos" pitchFamily="34" charset="0"/>
+                <a:ea typeface="Aptos" pitchFamily="34" charset="-122"/>
+                <a:cs typeface="Aptos" pitchFamily="34" charset="-120"/>
+              </a:rPr>
+              <a:t>Agencies should use synthetic, masked, or minimized data whenever possible and should.</a:t>
+            </a:r>
+            <a:endParaRPr lang="en-US" sz="1380" dirty="0"/>
           </a:p>
         </p:txBody>
       </p:sp>
       <p:sp>
         <p:nvSpPr>
           <p:cNvPr id="16" name="Shape 14"/>
-          <p:cNvSpPr/>
-          <p:nvPr/>
-        </p:nvSpPr>
-        <p:spPr>
-          <a:xfrm>
-            <a:off x="8366760" y="3639312"/>
-            <a:ext cx="2011680" cy="0"/>
-          </a:xfrm>
-          <a:prstGeom prst="line">
-            <a:avLst/>
-          </a:prstGeom>
-          <a:noFill/>
-          <a:ln w="63500">
-            <a:solidFill>
-              <a:srgbClr val="2F8A28"/>
-            </a:solidFill>
-            <a:prstDash val="solid"/>
-          </a:ln>
-        </p:spPr>
-      </p:sp>
-      <p:sp>
-        <p:nvSpPr>
-          <p:cNvPr id="17" name="Text 15"/>
-          <p:cNvSpPr/>
-          <p:nvPr/>
-        </p:nvSpPr>
-        <p:spPr>
-          <a:xfrm>
-            <a:off x="7909560" y="3849624"/>
-            <a:ext cx="2926080" cy="164592"/>
-          </a:xfrm>
-          <a:prstGeom prst="rect">
-            <a:avLst/>
-          </a:prstGeom>
-          <a:noFill/>
-          <a:ln/>
-        </p:spPr>
-        <p:txBody>
-          <a:bodyPr wrap="square" lIns="0" tIns="0" rIns="0" bIns="0" rtlCol="0" anchor="ctr"/>
-          <a:lstStyle/>
-          <a:p>
-            <a:pPr algn="ctr" indent="0" marL="0">
-              <a:buNone/>
-            </a:pPr>
-            <a:r>
-              <a:rPr lang="en-US" sz="900" dirty="0">
-                <a:solidFill>
-                  <a:srgbClr val="003A63"/>
-                </a:solidFill>
-                <a:latin typeface="Aptos" pitchFamily="34" charset="0"/>
-                <a:ea typeface="Aptos" pitchFamily="34" charset="-122"/>
-                <a:cs typeface="Aptos" pitchFamily="34" charset="-120"/>
-              </a:rPr>
-              <a:t>Human review</a:t>
-            </a:r>
-            <a:endParaRPr lang="en-US" sz="900" dirty="0"/>
-          </a:p>
-        </p:txBody>
-      </p:sp>
-      <p:sp>
-        <p:nvSpPr>
-          <p:cNvPr id="18" name="Shape 16"/>
           <p:cNvSpPr/>
           <p:nvPr/>
         </p:nvSpPr>
@@ -8142,7 +7981,7 @@
       </p:sp>
       <p:sp>
         <p:nvSpPr>
-          <p:cNvPr id="19" name="Text 17"/>
+          <p:cNvPr id="17" name="Text 15"/>
           <p:cNvSpPr/>
           <p:nvPr/>
         </p:nvSpPr>
@@ -8181,7 +8020,7 @@
       </p:sp>
       <p:sp>
         <p:nvSpPr>
-          <p:cNvPr id="20" name="Text 18"/>
+          <p:cNvPr id="18" name="Text 16"/>
           <p:cNvSpPr/>
           <p:nvPr/>
         </p:nvSpPr>
@@ -8689,13 +8528,11 @@
             </a:avLst>
           </a:prstGeom>
           <a:solidFill>
-            <a:srgbClr val="FFFFFF">
-              <a:alpha val="88000"/>
-            </a:srgbClr>
+            <a:srgbClr val="FFFFFF"/>
           </a:solidFill>
           <a:ln w="12700">
             <a:solidFill>
-              <a:srgbClr val="D6E8F2"/>
+              <a:srgbClr val="B9D7E6"/>
             </a:solidFill>
             <a:prstDash val="solid"/>
           </a:ln>
@@ -8703,26 +8540,42 @@
       </p:sp>
       <p:sp>
         <p:nvSpPr>
-          <p:cNvPr id="14" name="Shape 12"/>
-          <p:cNvSpPr/>
-          <p:nvPr/>
-        </p:nvSpPr>
-        <p:spPr>
-          <a:xfrm>
-            <a:off x="8046720" y="3108960"/>
-            <a:ext cx="2651760" cy="896112"/>
-          </a:xfrm>
-          <a:prstGeom prst="arc">
-            <a:avLst/>
-          </a:prstGeom>
-          <a:noFill/>
-          <a:ln w="25400">
-            <a:solidFill>
-              <a:srgbClr val="0068B7"/>
-            </a:solidFill>
-            <a:prstDash val="solid"/>
-          </a:ln>
-        </p:spPr>
+          <p:cNvPr id="14" name="Text 12"/>
+          <p:cNvSpPr/>
+          <p:nvPr/>
+        </p:nvSpPr>
+        <p:spPr>
+          <a:xfrm>
+            <a:off x="7799832" y="2935224"/>
+            <a:ext cx="3145536" cy="256032"/>
+          </a:xfrm>
+          <a:prstGeom prst="rect">
+            <a:avLst/>
+          </a:prstGeom>
+          <a:noFill/>
+          <a:ln/>
+        </p:spPr>
+        <p:txBody>
+          <a:bodyPr wrap="square" lIns="0" tIns="0" rIns="0" bIns="0" rtlCol="0" anchor="ctr"/>
+          <a:lstStyle/>
+          <a:p>
+            <a:pPr indent="0" marL="0">
+              <a:buNone/>
+            </a:pPr>
+            <a:r>
+              <a:rPr lang="en-US" sz="1300" b="1" dirty="0">
+                <a:solidFill>
+                  <a:srgbClr val="0068B7"/>
+                </a:solidFill>
+                <a:latin typeface="Aptos" pitchFamily="34" charset="0"/>
+                <a:ea typeface="Aptos" pitchFamily="34" charset="-122"/>
+                <a:cs typeface="Aptos" pitchFamily="34" charset="-120"/>
+              </a:rPr>
+              <a:t>Concept checkpoints</a:t>
+            </a:r>
+            <a:endParaRPr lang="en-US" sz="1300" dirty="0"/>
+          </a:p>
+        </p:txBody>
       </p:sp>
       <p:sp>
         <p:nvSpPr>
@@ -8732,102 +8585,67 @@
         </p:nvSpPr>
         <p:spPr>
           <a:xfrm>
-            <a:off x="7909560" y="3099816"/>
-            <a:ext cx="2926080" cy="256032"/>
-          </a:xfrm>
-          <a:prstGeom prst="rect">
-            <a:avLst/>
-          </a:prstGeom>
-          <a:noFill/>
-          <a:ln/>
-        </p:spPr>
-        <p:txBody>
-          <a:bodyPr wrap="square" lIns="0" tIns="0" rIns="0" bIns="0" rtlCol="0" anchor="ctr"/>
-          <a:lstStyle/>
-          <a:p>
-            <a:pPr algn="ctr" indent="0" marL="0">
-              <a:buNone/>
-            </a:pPr>
-            <a:r>
-              <a:rPr lang="en-US" sz="1500" b="1" dirty="0">
-                <a:solidFill>
-                  <a:srgbClr val="003A63"/>
-                </a:solidFill>
-                <a:latin typeface="Aptos" pitchFamily="34" charset="0"/>
-                <a:ea typeface="Aptos" pitchFamily="34" charset="-122"/>
-                <a:cs typeface="Aptos" pitchFamily="34" charset="-120"/>
-              </a:rPr>
-              <a:t>Risk</a:t>
-            </a:r>
-            <a:endParaRPr lang="en-US" sz="1500" dirty="0"/>
+            <a:off x="7818120" y="3300984"/>
+            <a:ext cx="3090672" cy="877824"/>
+          </a:xfrm>
+          <a:prstGeom prst="rect">
+            <a:avLst/>
+          </a:prstGeom>
+          <a:noFill/>
+          <a:ln/>
+        </p:spPr>
+        <p:txBody>
+          <a:bodyPr wrap="square" lIns="254" tIns="254" rIns="254" bIns="254" rtlCol="0" anchor="t">
+            <a:normAutofit/>
+          </a:bodyPr>
+          <a:lstStyle/>
+          <a:p>
+            <a:r>
+              <a:rPr lang="en-US" sz="1380" dirty="0">
+                <a:solidFill>
+                  <a:srgbClr val="17364A"/>
+                </a:solidFill>
+                <a:latin typeface="Aptos" pitchFamily="34" charset="0"/>
+                <a:ea typeface="Aptos" pitchFamily="34" charset="-122"/>
+                <a:cs typeface="Aptos" pitchFamily="34" charset="-120"/>
+              </a:rPr>
+              <a:t>For generative AI, privacy-preserving design means controlling what data can be placed in.</a:t>
+            </a:r>
+            <a:endParaRPr lang="en-US" sz="1380" dirty="0"/>
+          </a:p>
+          <a:p>
+            <a:r>
+              <a:rPr lang="en-US" sz="1380" dirty="0">
+                <a:solidFill>
+                  <a:srgbClr val="17364A"/>
+                </a:solidFill>
+                <a:latin typeface="Aptos" pitchFamily="34" charset="0"/>
+                <a:ea typeface="Aptos" pitchFamily="34" charset="-122"/>
+                <a:cs typeface="Aptos" pitchFamily="34" charset="-120"/>
+              </a:rPr>
+              <a:t>Prompt templates should make prohibited content clear and should encourage use of.</a:t>
+            </a:r>
+            <a:endParaRPr lang="en-US" sz="1380" dirty="0"/>
+          </a:p>
+          <a:p>
+            <a:r>
+              <a:rPr lang="en-US" sz="1380" dirty="0">
+                <a:solidFill>
+                  <a:srgbClr val="17364A"/>
+                </a:solidFill>
+                <a:latin typeface="Aptos" pitchFamily="34" charset="0"/>
+                <a:ea typeface="Aptos" pitchFamily="34" charset="-122"/>
+                <a:cs typeface="Aptos" pitchFamily="34" charset="-120"/>
+              </a:rPr>
+              <a:t>For predictive analytics, privacy concerns include which features are used, whether.</a:t>
+            </a:r>
+            <a:endParaRPr lang="en-US" sz="1380" dirty="0"/>
           </a:p>
         </p:txBody>
       </p:sp>
       <p:sp>
         <p:nvSpPr>
           <p:cNvPr id="16" name="Shape 14"/>
-          <p:cNvSpPr/>
-          <p:nvPr/>
-        </p:nvSpPr>
-        <p:spPr>
-          <a:xfrm>
-            <a:off x="8366760" y="3639312"/>
-            <a:ext cx="2011680" cy="0"/>
-          </a:xfrm>
-          <a:prstGeom prst="line">
-            <a:avLst/>
-          </a:prstGeom>
-          <a:noFill/>
-          <a:ln w="63500">
-            <a:solidFill>
-              <a:srgbClr val="2F8A28"/>
-            </a:solidFill>
-            <a:prstDash val="solid"/>
-          </a:ln>
-        </p:spPr>
-      </p:sp>
-      <p:sp>
-        <p:nvSpPr>
-          <p:cNvPr id="17" name="Text 15"/>
-          <p:cNvSpPr/>
-          <p:nvPr/>
-        </p:nvSpPr>
-        <p:spPr>
-          <a:xfrm>
-            <a:off x="7909560" y="3849624"/>
-            <a:ext cx="2926080" cy="164592"/>
-          </a:xfrm>
-          <a:prstGeom prst="rect">
-            <a:avLst/>
-          </a:prstGeom>
-          <a:noFill/>
-          <a:ln/>
-        </p:spPr>
-        <p:txBody>
-          <a:bodyPr wrap="square" lIns="0" tIns="0" rIns="0" bIns="0" rtlCol="0" anchor="ctr"/>
-          <a:lstStyle/>
-          <a:p>
-            <a:pPr algn="ctr" indent="0" marL="0">
-              <a:buNone/>
-            </a:pPr>
-            <a:r>
-              <a:rPr lang="en-US" sz="900" dirty="0">
-                <a:solidFill>
-                  <a:srgbClr val="003A63"/>
-                </a:solidFill>
-                <a:latin typeface="Aptos" pitchFamily="34" charset="0"/>
-                <a:ea typeface="Aptos" pitchFamily="34" charset="-122"/>
-                <a:cs typeface="Aptos" pitchFamily="34" charset="-120"/>
-              </a:rPr>
-              <a:t>Human review</a:t>
-            </a:r>
-            <a:endParaRPr lang="en-US" sz="900" dirty="0"/>
-          </a:p>
-        </p:txBody>
-      </p:sp>
-      <p:sp>
-        <p:nvSpPr>
-          <p:cNvPr id="18" name="Shape 16"/>
           <p:cNvSpPr/>
           <p:nvPr/>
         </p:nvSpPr>
@@ -8854,7 +8672,7 @@
       </p:sp>
       <p:sp>
         <p:nvSpPr>
-          <p:cNvPr id="19" name="Text 17"/>
+          <p:cNvPr id="17" name="Text 15"/>
           <p:cNvSpPr/>
           <p:nvPr/>
         </p:nvSpPr>
@@ -8893,7 +8711,7 @@
       </p:sp>
       <p:sp>
         <p:nvSpPr>
-          <p:cNvPr id="20" name="Text 18"/>
+          <p:cNvPr id="18" name="Text 16"/>
           <p:cNvSpPr/>
           <p:nvPr/>
         </p:nvSpPr>
@@ -9401,13 +9219,11 @@
             </a:avLst>
           </a:prstGeom>
           <a:solidFill>
-            <a:srgbClr val="FFFFFF">
-              <a:alpha val="88000"/>
-            </a:srgbClr>
+            <a:srgbClr val="FFFFFF"/>
           </a:solidFill>
           <a:ln w="12700">
             <a:solidFill>
-              <a:srgbClr val="D6E8F2"/>
+              <a:srgbClr val="B9D7E6"/>
             </a:solidFill>
             <a:prstDash val="solid"/>
           </a:ln>
@@ -9415,26 +9231,42 @@
       </p:sp>
       <p:sp>
         <p:nvSpPr>
-          <p:cNvPr id="14" name="Shape 12"/>
-          <p:cNvSpPr/>
-          <p:nvPr/>
-        </p:nvSpPr>
-        <p:spPr>
-          <a:xfrm>
-            <a:off x="8046720" y="3108960"/>
-            <a:ext cx="2651760" cy="896112"/>
-          </a:xfrm>
-          <a:prstGeom prst="arc">
-            <a:avLst/>
-          </a:prstGeom>
-          <a:noFill/>
-          <a:ln w="25400">
-            <a:solidFill>
-              <a:srgbClr val="0068B7"/>
-            </a:solidFill>
-            <a:prstDash val="solid"/>
-          </a:ln>
-        </p:spPr>
+          <p:cNvPr id="14" name="Text 12"/>
+          <p:cNvSpPr/>
+          <p:nvPr/>
+        </p:nvSpPr>
+        <p:spPr>
+          <a:xfrm>
+            <a:off x="7799832" y="2935224"/>
+            <a:ext cx="3145536" cy="256032"/>
+          </a:xfrm>
+          <a:prstGeom prst="rect">
+            <a:avLst/>
+          </a:prstGeom>
+          <a:noFill/>
+          <a:ln/>
+        </p:spPr>
+        <p:txBody>
+          <a:bodyPr wrap="square" lIns="0" tIns="0" rIns="0" bIns="0" rtlCol="0" anchor="ctr"/>
+          <a:lstStyle/>
+          <a:p>
+            <a:pPr indent="0" marL="0">
+              <a:buNone/>
+            </a:pPr>
+            <a:r>
+              <a:rPr lang="en-US" sz="1300" b="1" dirty="0">
+                <a:solidFill>
+                  <a:srgbClr val="0068B7"/>
+                </a:solidFill>
+                <a:latin typeface="Aptos" pitchFamily="34" charset="0"/>
+                <a:ea typeface="Aptos" pitchFamily="34" charset="-122"/>
+                <a:cs typeface="Aptos" pitchFamily="34" charset="-120"/>
+              </a:rPr>
+              <a:t>Concept checkpoints</a:t>
+            </a:r>
+            <a:endParaRPr lang="en-US" sz="1300" dirty="0"/>
+          </a:p>
+        </p:txBody>
       </p:sp>
       <p:sp>
         <p:nvSpPr>
@@ -9444,102 +9276,67 @@
         </p:nvSpPr>
         <p:spPr>
           <a:xfrm>
-            <a:off x="7909560" y="3099816"/>
-            <a:ext cx="2926080" cy="256032"/>
-          </a:xfrm>
-          <a:prstGeom prst="rect">
-            <a:avLst/>
-          </a:prstGeom>
-          <a:noFill/>
-          <a:ln/>
-        </p:spPr>
-        <p:txBody>
-          <a:bodyPr wrap="square" lIns="0" tIns="0" rIns="0" bIns="0" rtlCol="0" anchor="ctr"/>
-          <a:lstStyle/>
-          <a:p>
-            <a:pPr algn="ctr" indent="0" marL="0">
-              <a:buNone/>
-            </a:pPr>
-            <a:r>
-              <a:rPr lang="en-US" sz="1500" b="1" dirty="0">
-                <a:solidFill>
-                  <a:srgbClr val="003A63"/>
-                </a:solidFill>
-                <a:latin typeface="Aptos" pitchFamily="34" charset="0"/>
-                <a:ea typeface="Aptos" pitchFamily="34" charset="-122"/>
-                <a:cs typeface="Aptos" pitchFamily="34" charset="-120"/>
-              </a:rPr>
-              <a:t>Risk</a:t>
-            </a:r>
-            <a:endParaRPr lang="en-US" sz="1500" dirty="0"/>
+            <a:off x="7818120" y="3300984"/>
+            <a:ext cx="3090672" cy="877824"/>
+          </a:xfrm>
+          <a:prstGeom prst="rect">
+            <a:avLst/>
+          </a:prstGeom>
+          <a:noFill/>
+          <a:ln/>
+        </p:spPr>
+        <p:txBody>
+          <a:bodyPr wrap="square" lIns="254" tIns="254" rIns="254" bIns="254" rtlCol="0" anchor="t">
+            <a:normAutofit/>
+          </a:bodyPr>
+          <a:lstStyle/>
+          <a:p>
+            <a:r>
+              <a:rPr lang="en-US" sz="1380" dirty="0">
+                <a:solidFill>
+                  <a:srgbClr val="17364A"/>
+                </a:solidFill>
+                <a:latin typeface="Aptos" pitchFamily="34" charset="0"/>
+                <a:ea typeface="Aptos" pitchFamily="34" charset="-122"/>
+                <a:cs typeface="Aptos" pitchFamily="34" charset="-120"/>
+              </a:rPr>
+              <a:t>Which AI use cases in your agency require identifiable or sensitive data, and which could.</a:t>
+            </a:r>
+            <a:endParaRPr lang="en-US" sz="1380" dirty="0"/>
+          </a:p>
+          <a:p>
+            <a:r>
+              <a:rPr lang="en-US" sz="1380" dirty="0">
+                <a:solidFill>
+                  <a:srgbClr val="17364A"/>
+                </a:solidFill>
+                <a:latin typeface="Aptos" pitchFamily="34" charset="0"/>
+                <a:ea typeface="Aptos" pitchFamily="34" charset="-122"/>
+                <a:cs typeface="Aptos" pitchFamily="34" charset="-120"/>
+              </a:rPr>
+              <a:t>What data elements create the greatest re-identification risk in your context?</a:t>
+            </a:r>
+            <a:endParaRPr lang="en-US" sz="1380" dirty="0"/>
+          </a:p>
+          <a:p>
+            <a:r>
+              <a:rPr lang="en-US" sz="1380" dirty="0">
+                <a:solidFill>
+                  <a:srgbClr val="17364A"/>
+                </a:solidFill>
+                <a:latin typeface="Aptos" pitchFamily="34" charset="0"/>
+                <a:ea typeface="Aptos" pitchFamily="34" charset="-122"/>
+                <a:cs typeface="Aptos" pitchFamily="34" charset="-120"/>
+              </a:rPr>
+              <a:t>How are free-text fields reviewed before they are used in AI-supported workflows?</a:t>
+            </a:r>
+            <a:endParaRPr lang="en-US" sz="1380" dirty="0"/>
           </a:p>
         </p:txBody>
       </p:sp>
       <p:sp>
         <p:nvSpPr>
           <p:cNvPr id="16" name="Shape 14"/>
-          <p:cNvSpPr/>
-          <p:nvPr/>
-        </p:nvSpPr>
-        <p:spPr>
-          <a:xfrm>
-            <a:off x="8366760" y="3639312"/>
-            <a:ext cx="2011680" cy="0"/>
-          </a:xfrm>
-          <a:prstGeom prst="line">
-            <a:avLst/>
-          </a:prstGeom>
-          <a:noFill/>
-          <a:ln w="63500">
-            <a:solidFill>
-              <a:srgbClr val="2F8A28"/>
-            </a:solidFill>
-            <a:prstDash val="solid"/>
-          </a:ln>
-        </p:spPr>
-      </p:sp>
-      <p:sp>
-        <p:nvSpPr>
-          <p:cNvPr id="17" name="Text 15"/>
-          <p:cNvSpPr/>
-          <p:nvPr/>
-        </p:nvSpPr>
-        <p:spPr>
-          <a:xfrm>
-            <a:off x="7909560" y="3849624"/>
-            <a:ext cx="2926080" cy="164592"/>
-          </a:xfrm>
-          <a:prstGeom prst="rect">
-            <a:avLst/>
-          </a:prstGeom>
-          <a:noFill/>
-          <a:ln/>
-        </p:spPr>
-        <p:txBody>
-          <a:bodyPr wrap="square" lIns="0" tIns="0" rIns="0" bIns="0" rtlCol="0" anchor="ctr"/>
-          <a:lstStyle/>
-          <a:p>
-            <a:pPr algn="ctr" indent="0" marL="0">
-              <a:buNone/>
-            </a:pPr>
-            <a:r>
-              <a:rPr lang="en-US" sz="900" dirty="0">
-                <a:solidFill>
-                  <a:srgbClr val="003A63"/>
-                </a:solidFill>
-                <a:latin typeface="Aptos" pitchFamily="34" charset="0"/>
-                <a:ea typeface="Aptos" pitchFamily="34" charset="-122"/>
-                <a:cs typeface="Aptos" pitchFamily="34" charset="-120"/>
-              </a:rPr>
-              <a:t>Human review</a:t>
-            </a:r>
-            <a:endParaRPr lang="en-US" sz="900" dirty="0"/>
-          </a:p>
-        </p:txBody>
-      </p:sp>
-      <p:sp>
-        <p:nvSpPr>
-          <p:cNvPr id="18" name="Shape 16"/>
           <p:cNvSpPr/>
           <p:nvPr/>
         </p:nvSpPr>
@@ -9566,7 +9363,7 @@
       </p:sp>
       <p:sp>
         <p:nvSpPr>
-          <p:cNvPr id="19" name="Text 17"/>
+          <p:cNvPr id="17" name="Text 15"/>
           <p:cNvSpPr/>
           <p:nvPr/>
         </p:nvSpPr>
@@ -9605,7 +9402,7 @@
       </p:sp>
       <p:sp>
         <p:nvSpPr>
-          <p:cNvPr id="20" name="Text 18"/>
+          <p:cNvPr id="18" name="Text 16"/>
           <p:cNvSpPr/>
           <p:nvPr/>
         </p:nvSpPr>
@@ -10099,13 +9896,11 @@
             </a:avLst>
           </a:prstGeom>
           <a:solidFill>
-            <a:srgbClr val="FFFFFF">
-              <a:alpha val="88000"/>
-            </a:srgbClr>
+            <a:srgbClr val="FFFFFF"/>
           </a:solidFill>
           <a:ln w="12700">
             <a:solidFill>
-              <a:srgbClr val="D6E8F2"/>
+              <a:srgbClr val="B9D7E6"/>
             </a:solidFill>
             <a:prstDash val="solid"/>
           </a:ln>
@@ -10113,26 +9908,42 @@
       </p:sp>
       <p:sp>
         <p:nvSpPr>
-          <p:cNvPr id="14" name="Shape 12"/>
-          <p:cNvSpPr/>
-          <p:nvPr/>
-        </p:nvSpPr>
-        <p:spPr>
-          <a:xfrm>
-            <a:off x="8046720" y="3108960"/>
-            <a:ext cx="2651760" cy="896112"/>
-          </a:xfrm>
-          <a:prstGeom prst="arc">
-            <a:avLst/>
-          </a:prstGeom>
-          <a:noFill/>
-          <a:ln w="25400">
-            <a:solidFill>
-              <a:srgbClr val="0068B7"/>
-            </a:solidFill>
-            <a:prstDash val="solid"/>
-          </a:ln>
-        </p:spPr>
+          <p:cNvPr id="14" name="Text 12"/>
+          <p:cNvSpPr/>
+          <p:nvPr/>
+        </p:nvSpPr>
+        <p:spPr>
+          <a:xfrm>
+            <a:off x="7799832" y="2935224"/>
+            <a:ext cx="3145536" cy="256032"/>
+          </a:xfrm>
+          <a:prstGeom prst="rect">
+            <a:avLst/>
+          </a:prstGeom>
+          <a:noFill/>
+          <a:ln/>
+        </p:spPr>
+        <p:txBody>
+          <a:bodyPr wrap="square" lIns="0" tIns="0" rIns="0" bIns="0" rtlCol="0" anchor="ctr"/>
+          <a:lstStyle/>
+          <a:p>
+            <a:pPr indent="0" marL="0">
+              <a:buNone/>
+            </a:pPr>
+            <a:r>
+              <a:rPr lang="en-US" sz="1300" b="1" dirty="0">
+                <a:solidFill>
+                  <a:srgbClr val="0068B7"/>
+                </a:solidFill>
+                <a:latin typeface="Aptos" pitchFamily="34" charset="0"/>
+                <a:ea typeface="Aptos" pitchFamily="34" charset="-122"/>
+                <a:cs typeface="Aptos" pitchFamily="34" charset="-120"/>
+              </a:rPr>
+              <a:t>Concept checkpoints</a:t>
+            </a:r>
+            <a:endParaRPr lang="en-US" sz="1300" dirty="0"/>
+          </a:p>
+        </p:txBody>
       </p:sp>
       <p:sp>
         <p:nvSpPr>
@@ -10142,102 +9953,53 @@
         </p:nvSpPr>
         <p:spPr>
           <a:xfrm>
-            <a:off x="7909560" y="3099816"/>
-            <a:ext cx="2926080" cy="256032"/>
-          </a:xfrm>
-          <a:prstGeom prst="rect">
-            <a:avLst/>
-          </a:prstGeom>
-          <a:noFill/>
-          <a:ln/>
-        </p:spPr>
-        <p:txBody>
-          <a:bodyPr wrap="square" lIns="0" tIns="0" rIns="0" bIns="0" rtlCol="0" anchor="ctr"/>
-          <a:lstStyle/>
-          <a:p>
-            <a:pPr algn="ctr" indent="0" marL="0">
-              <a:buNone/>
-            </a:pPr>
-            <a:r>
-              <a:rPr lang="en-US" sz="1500" b="1" dirty="0">
-                <a:solidFill>
-                  <a:srgbClr val="003A63"/>
-                </a:solidFill>
-                <a:latin typeface="Aptos" pitchFamily="34" charset="0"/>
-                <a:ea typeface="Aptos" pitchFamily="34" charset="-122"/>
-                <a:cs typeface="Aptos" pitchFamily="34" charset="-120"/>
-              </a:rPr>
-              <a:t>Risk</a:t>
-            </a:r>
-            <a:endParaRPr lang="en-US" sz="1500" dirty="0"/>
+            <a:off x="7818120" y="3300984"/>
+            <a:ext cx="3090672" cy="877824"/>
+          </a:xfrm>
+          <a:prstGeom prst="rect">
+            <a:avLst/>
+          </a:prstGeom>
+          <a:noFill/>
+          <a:ln/>
+        </p:spPr>
+        <p:txBody>
+          <a:bodyPr wrap="square" lIns="254" tIns="254" rIns="254" bIns="254" rtlCol="0" anchor="t">
+            <a:normAutofit/>
+          </a:bodyPr>
+          <a:lstStyle/>
+          <a:p>
+            <a:r>
+              <a:rPr lang="en-US" sz="1380" dirty="0">
+                <a:solidFill>
+                  <a:srgbClr val="17364A"/>
+                </a:solidFill>
+                <a:latin typeface="Aptos" pitchFamily="34" charset="0"/>
+                <a:ea typeface="Aptos" pitchFamily="34" charset="-122"/>
+                <a:cs typeface="Aptos" pitchFamily="34" charset="-120"/>
+              </a:rPr>
+              <a:t>Which outputs could reveal sensitive information even if the input data are controlled?</a:t>
+            </a:r>
+            <a:endParaRPr lang="en-US" sz="1380" dirty="0"/>
+          </a:p>
+          <a:p>
+            <a:r>
+              <a:rPr lang="en-US" sz="1380" dirty="0">
+                <a:solidFill>
+                  <a:srgbClr val="17364A"/>
+                </a:solidFill>
+                <a:latin typeface="Aptos" pitchFamily="34" charset="0"/>
+                <a:ea typeface="Aptos" pitchFamily="34" charset="-122"/>
+                <a:cs typeface="Aptos" pitchFamily="34" charset="-120"/>
+              </a:rPr>
+              <a:t>Who has authority to approve privacy-preserving AI controls for a workflow?</a:t>
+            </a:r>
+            <a:endParaRPr lang="en-US" sz="1380" dirty="0"/>
           </a:p>
         </p:txBody>
       </p:sp>
       <p:sp>
         <p:nvSpPr>
           <p:cNvPr id="16" name="Shape 14"/>
-          <p:cNvSpPr/>
-          <p:nvPr/>
-        </p:nvSpPr>
-        <p:spPr>
-          <a:xfrm>
-            <a:off x="8366760" y="3639312"/>
-            <a:ext cx="2011680" cy="0"/>
-          </a:xfrm>
-          <a:prstGeom prst="line">
-            <a:avLst/>
-          </a:prstGeom>
-          <a:noFill/>
-          <a:ln w="63500">
-            <a:solidFill>
-              <a:srgbClr val="2F8A28"/>
-            </a:solidFill>
-            <a:prstDash val="solid"/>
-          </a:ln>
-        </p:spPr>
-      </p:sp>
-      <p:sp>
-        <p:nvSpPr>
-          <p:cNvPr id="17" name="Text 15"/>
-          <p:cNvSpPr/>
-          <p:nvPr/>
-        </p:nvSpPr>
-        <p:spPr>
-          <a:xfrm>
-            <a:off x="7909560" y="3849624"/>
-            <a:ext cx="2926080" cy="164592"/>
-          </a:xfrm>
-          <a:prstGeom prst="rect">
-            <a:avLst/>
-          </a:prstGeom>
-          <a:noFill/>
-          <a:ln/>
-        </p:spPr>
-        <p:txBody>
-          <a:bodyPr wrap="square" lIns="0" tIns="0" rIns="0" bIns="0" rtlCol="0" anchor="ctr"/>
-          <a:lstStyle/>
-          <a:p>
-            <a:pPr algn="ctr" indent="0" marL="0">
-              <a:buNone/>
-            </a:pPr>
-            <a:r>
-              <a:rPr lang="en-US" sz="900" dirty="0">
-                <a:solidFill>
-                  <a:srgbClr val="003A63"/>
-                </a:solidFill>
-                <a:latin typeface="Aptos" pitchFamily="34" charset="0"/>
-                <a:ea typeface="Aptos" pitchFamily="34" charset="-122"/>
-                <a:cs typeface="Aptos" pitchFamily="34" charset="-120"/>
-              </a:rPr>
-              <a:t>Human review</a:t>
-            </a:r>
-            <a:endParaRPr lang="en-US" sz="900" dirty="0"/>
-          </a:p>
-        </p:txBody>
-      </p:sp>
-      <p:sp>
-        <p:nvSpPr>
-          <p:cNvPr id="18" name="Shape 16"/>
           <p:cNvSpPr/>
           <p:nvPr/>
         </p:nvSpPr>
@@ -10264,7 +10026,7 @@
       </p:sp>
       <p:sp>
         <p:nvSpPr>
-          <p:cNvPr id="19" name="Text 17"/>
+          <p:cNvPr id="17" name="Text 15"/>
           <p:cNvSpPr/>
           <p:nvPr/>
         </p:nvSpPr>
@@ -10303,7 +10065,7 @@
       </p:sp>
       <p:sp>
         <p:nvSpPr>
-          <p:cNvPr id="20" name="Text 18"/>
+          <p:cNvPr id="18" name="Text 16"/>
           <p:cNvSpPr/>
           <p:nvPr/>
         </p:nvSpPr>
@@ -10836,20 +10598,20 @@
         </p:nvSpPr>
         <p:spPr>
           <a:xfrm>
-            <a:off x="7635240" y="3730752"/>
-            <a:ext cx="1033272" cy="749808"/>
+            <a:off x="7909560" y="3675888"/>
+            <a:ext cx="3154680" cy="1691640"/>
           </a:xfrm>
           <a:prstGeom prst="roundRect">
             <a:avLst>
-              <a:gd name="adj" fmla="val 14634"/>
+              <a:gd name="adj" fmla="val 6486"/>
             </a:avLst>
           </a:prstGeom>
           <a:solidFill>
-            <a:srgbClr val="0068B7"/>
+            <a:srgbClr val="FFFFFF"/>
           </a:solidFill>
           <a:ln w="12700">
             <a:solidFill>
-              <a:srgbClr val="0068B7"/>
+              <a:srgbClr val="B9D7E6"/>
             </a:solidFill>
             <a:prstDash val="solid"/>
           </a:ln>
@@ -10863,172 +10625,100 @@
         </p:nvSpPr>
         <p:spPr>
           <a:xfrm>
-            <a:off x="7708392" y="3922776"/>
-            <a:ext cx="886968" cy="310896"/>
-          </a:xfrm>
-          <a:prstGeom prst="rect">
-            <a:avLst/>
-          </a:prstGeom>
-          <a:noFill/>
-          <a:ln/>
-        </p:spPr>
-        <p:txBody>
-          <a:bodyPr wrap="square" lIns="0" tIns="0" rIns="0" bIns="0" rtlCol="0" anchor="ctr">
+            <a:off x="8074152" y="3822192"/>
+            <a:ext cx="2825496" cy="256032"/>
+          </a:xfrm>
+          <a:prstGeom prst="rect">
+            <a:avLst/>
+          </a:prstGeom>
+          <a:noFill/>
+          <a:ln/>
+        </p:spPr>
+        <p:txBody>
+          <a:bodyPr wrap="square" lIns="0" tIns="0" rIns="0" bIns="0" rtlCol="0" anchor="ctr"/>
+          <a:lstStyle/>
+          <a:p>
+            <a:pPr indent="0" marL="0">
+              <a:buNone/>
+            </a:pPr>
+            <a:r>
+              <a:rPr lang="en-US" sz="1300" b="1" dirty="0">
+                <a:solidFill>
+                  <a:srgbClr val="0068B7"/>
+                </a:solidFill>
+                <a:latin typeface="Aptos" pitchFamily="34" charset="0"/>
+                <a:ea typeface="Aptos" pitchFamily="34" charset="-122"/>
+                <a:cs typeface="Aptos" pitchFamily="34" charset="-120"/>
+              </a:rPr>
+              <a:t>Learning sequence</a:t>
+            </a:r>
+            <a:endParaRPr lang="en-US" sz="1300" dirty="0"/>
+          </a:p>
+        </p:txBody>
+      </p:sp>
+      <p:sp>
+        <p:nvSpPr>
+          <p:cNvPr id="15" name="Text 13"/>
+          <p:cNvSpPr/>
+          <p:nvPr/>
+        </p:nvSpPr>
+        <p:spPr>
+          <a:xfrm>
+            <a:off x="8092440" y="4187952"/>
+            <a:ext cx="2770632" cy="1033272"/>
+          </a:xfrm>
+          <a:prstGeom prst="rect">
+            <a:avLst/>
+          </a:prstGeom>
+          <a:noFill/>
+          <a:ln/>
+        </p:spPr>
+        <p:txBody>
+          <a:bodyPr wrap="square" lIns="254" tIns="254" rIns="254" bIns="254" rtlCol="0" anchor="t">
             <a:normAutofit/>
           </a:bodyPr>
           <a:lstStyle/>
           <a:p>
-            <a:pPr algn="ctr" indent="0" marL="0">
-              <a:buNone/>
-            </a:pPr>
-            <a:r>
-              <a:rPr lang="en-US" sz="1500" b="1" dirty="0">
-                <a:solidFill>
-                  <a:srgbClr val="FFFFFF"/>
-                </a:solidFill>
-                <a:latin typeface="Aptos" pitchFamily="34" charset="0"/>
-                <a:ea typeface="Aptos" pitchFamily="34" charset="-122"/>
-                <a:cs typeface="Aptos" pitchFamily="34" charset="-120"/>
-              </a:rPr>
-              <a:t>Learn</a:t>
-            </a:r>
-            <a:endParaRPr lang="en-US" sz="1500" dirty="0"/>
-          </a:p>
-        </p:txBody>
-      </p:sp>
-      <p:sp>
-        <p:nvSpPr>
-          <p:cNvPr id="15" name="Shape 13"/>
-          <p:cNvSpPr/>
-          <p:nvPr/>
-        </p:nvSpPr>
-        <p:spPr>
-          <a:xfrm>
-            <a:off x="8924544" y="3730752"/>
-            <a:ext cx="1033272" cy="749808"/>
-          </a:xfrm>
-          <a:prstGeom prst="roundRect">
-            <a:avLst>
-              <a:gd name="adj" fmla="val 14634"/>
-            </a:avLst>
-          </a:prstGeom>
-          <a:solidFill>
-            <a:srgbClr val="2F8A28"/>
-          </a:solidFill>
-          <a:ln w="12700">
-            <a:solidFill>
-              <a:srgbClr val="2F8A28"/>
-            </a:solidFill>
-            <a:prstDash val="solid"/>
-          </a:ln>
-        </p:spPr>
-      </p:sp>
-      <p:sp>
-        <p:nvSpPr>
-          <p:cNvPr id="16" name="Text 14"/>
-          <p:cNvSpPr/>
-          <p:nvPr/>
-        </p:nvSpPr>
-        <p:spPr>
-          <a:xfrm>
-            <a:off x="8997696" y="3922776"/>
-            <a:ext cx="886968" cy="310896"/>
-          </a:xfrm>
-          <a:prstGeom prst="rect">
-            <a:avLst/>
-          </a:prstGeom>
-          <a:noFill/>
-          <a:ln/>
-        </p:spPr>
-        <p:txBody>
-          <a:bodyPr wrap="square" lIns="0" tIns="0" rIns="0" bIns="0" rtlCol="0" anchor="ctr">
-            <a:normAutofit/>
-          </a:bodyPr>
-          <a:lstStyle/>
-          <a:p>
-            <a:pPr algn="ctr" indent="0" marL="0">
-              <a:buNone/>
-            </a:pPr>
-            <a:r>
-              <a:rPr lang="en-US" sz="1500" b="1" dirty="0">
-                <a:solidFill>
-                  <a:srgbClr val="FFFFFF"/>
-                </a:solidFill>
-                <a:latin typeface="Aptos" pitchFamily="34" charset="0"/>
-                <a:ea typeface="Aptos" pitchFamily="34" charset="-122"/>
-                <a:cs typeface="Aptos" pitchFamily="34" charset="-120"/>
-              </a:rPr>
-              <a:t>Apply</a:t>
-            </a:r>
-            <a:endParaRPr lang="en-US" sz="1500" dirty="0"/>
-          </a:p>
-        </p:txBody>
-      </p:sp>
-      <p:sp>
-        <p:nvSpPr>
-          <p:cNvPr id="17" name="Shape 15"/>
-          <p:cNvSpPr/>
-          <p:nvPr/>
-        </p:nvSpPr>
-        <p:spPr>
-          <a:xfrm>
-            <a:off x="10213848" y="3730752"/>
-            <a:ext cx="1033272" cy="749808"/>
-          </a:xfrm>
-          <a:prstGeom prst="roundRect">
-            <a:avLst>
-              <a:gd name="adj" fmla="val 14634"/>
-            </a:avLst>
-          </a:prstGeom>
-          <a:solidFill>
-            <a:srgbClr val="6A4CA3"/>
-          </a:solidFill>
-          <a:ln w="12700">
-            <a:solidFill>
-              <a:srgbClr val="6A4CA3"/>
-            </a:solidFill>
-            <a:prstDash val="solid"/>
-          </a:ln>
-        </p:spPr>
-      </p:sp>
-      <p:sp>
-        <p:nvSpPr>
-          <p:cNvPr id="18" name="Text 16"/>
-          <p:cNvSpPr/>
-          <p:nvPr/>
-        </p:nvSpPr>
-        <p:spPr>
-          <a:xfrm>
-            <a:off x="10287000" y="3922776"/>
-            <a:ext cx="886968" cy="310896"/>
-          </a:xfrm>
-          <a:prstGeom prst="rect">
-            <a:avLst/>
-          </a:prstGeom>
-          <a:noFill/>
-          <a:ln/>
-        </p:spPr>
-        <p:txBody>
-          <a:bodyPr wrap="square" lIns="0" tIns="0" rIns="0" bIns="0" rtlCol="0" anchor="ctr">
-            <a:normAutofit/>
-          </a:bodyPr>
-          <a:lstStyle/>
-          <a:p>
-            <a:pPr algn="ctr" indent="0" marL="0">
-              <a:buNone/>
-            </a:pPr>
-            <a:r>
-              <a:rPr lang="en-US" sz="1500" b="1" dirty="0">
-                <a:solidFill>
-                  <a:srgbClr val="FFFFFF"/>
-                </a:solidFill>
-                <a:latin typeface="Aptos" pitchFamily="34" charset="0"/>
-                <a:ea typeface="Aptos" pitchFamily="34" charset="-122"/>
-                <a:cs typeface="Aptos" pitchFamily="34" charset="-120"/>
-              </a:rPr>
-              <a:t>Document</a:t>
-            </a:r>
-            <a:endParaRPr lang="en-US" sz="1500" dirty="0"/>
+            <a:r>
+              <a:rPr lang="en-US" sz="1380" dirty="0">
+                <a:solidFill>
+                  <a:srgbClr val="17364A"/>
+                </a:solidFill>
+                <a:latin typeface="Aptos" pitchFamily="34" charset="0"/>
+                <a:ea typeface="Aptos" pitchFamily="34" charset="-122"/>
+                <a:cs typeface="Aptos" pitchFamily="34" charset="-120"/>
+              </a:rPr>
+              <a:t>Read the module for shared vocabulary and context.</a:t>
+            </a:r>
+            <a:endParaRPr lang="en-US" sz="1380" dirty="0"/>
+          </a:p>
+          <a:p>
+            <a:r>
+              <a:rPr lang="en-US" sz="1380" dirty="0">
+                <a:solidFill>
+                  <a:srgbClr val="17364A"/>
+                </a:solidFill>
+                <a:latin typeface="Aptos" pitchFamily="34" charset="0"/>
+                <a:ea typeface="Aptos" pitchFamily="34" charset="-122"/>
+                <a:cs typeface="Aptos" pitchFamily="34" charset="-120"/>
+              </a:rPr>
+              <a:t>Complete the practical exercise to apply the concept.</a:t>
+            </a:r>
+            <a:endParaRPr lang="en-US" sz="1380" dirty="0"/>
+          </a:p>
+          <a:p>
+            <a:r>
+              <a:rPr lang="en-US" sz="1380" dirty="0">
+                <a:solidFill>
+                  <a:srgbClr val="17364A"/>
+                </a:solidFill>
+                <a:latin typeface="Aptos" pitchFamily="34" charset="0"/>
+                <a:ea typeface="Aptos" pitchFamily="34" charset="-122"/>
+                <a:cs typeface="Aptos" pitchFamily="34" charset="-120"/>
+              </a:rPr>
+              <a:t>Use the notes and references for deeper review.</a:t>
+            </a:r>
+            <a:endParaRPr lang="en-US" sz="1380" dirty="0"/>
           </a:p>
         </p:txBody>
       </p:sp>
@@ -11501,13 +11191,11 @@
             </a:avLst>
           </a:prstGeom>
           <a:solidFill>
-            <a:srgbClr val="FFFFFF">
-              <a:alpha val="88000"/>
-            </a:srgbClr>
+            <a:srgbClr val="FFFFFF"/>
           </a:solidFill>
           <a:ln w="12700">
             <a:solidFill>
-              <a:srgbClr val="D6E8F2"/>
+              <a:srgbClr val="B9D7E6"/>
             </a:solidFill>
             <a:prstDash val="solid"/>
           </a:ln>
@@ -11515,26 +11203,42 @@
       </p:sp>
       <p:sp>
         <p:nvSpPr>
-          <p:cNvPr id="14" name="Shape 12"/>
-          <p:cNvSpPr/>
-          <p:nvPr/>
-        </p:nvSpPr>
-        <p:spPr>
-          <a:xfrm>
-            <a:off x="8046720" y="3108960"/>
-            <a:ext cx="2651760" cy="896112"/>
-          </a:xfrm>
-          <a:prstGeom prst="arc">
-            <a:avLst/>
-          </a:prstGeom>
-          <a:noFill/>
-          <a:ln w="25400">
-            <a:solidFill>
-              <a:srgbClr val="0068B7"/>
-            </a:solidFill>
-            <a:prstDash val="solid"/>
-          </a:ln>
-        </p:spPr>
+          <p:cNvPr id="14" name="Text 12"/>
+          <p:cNvSpPr/>
+          <p:nvPr/>
+        </p:nvSpPr>
+        <p:spPr>
+          <a:xfrm>
+            <a:off x="7799832" y="2935224"/>
+            <a:ext cx="3145536" cy="256032"/>
+          </a:xfrm>
+          <a:prstGeom prst="rect">
+            <a:avLst/>
+          </a:prstGeom>
+          <a:noFill/>
+          <a:ln/>
+        </p:spPr>
+        <p:txBody>
+          <a:bodyPr wrap="square" lIns="0" tIns="0" rIns="0" bIns="0" rtlCol="0" anchor="ctr"/>
+          <a:lstStyle/>
+          <a:p>
+            <a:pPr indent="0" marL="0">
+              <a:buNone/>
+            </a:pPr>
+            <a:r>
+              <a:rPr lang="en-US" sz="1300" b="1" dirty="0">
+                <a:solidFill>
+                  <a:srgbClr val="0068B7"/>
+                </a:solidFill>
+                <a:latin typeface="Aptos" pitchFamily="34" charset="0"/>
+                <a:ea typeface="Aptos" pitchFamily="34" charset="-122"/>
+                <a:cs typeface="Aptos" pitchFamily="34" charset="-120"/>
+              </a:rPr>
+              <a:t>Concept checkpoints</a:t>
+            </a:r>
+            <a:endParaRPr lang="en-US" sz="1300" dirty="0"/>
+          </a:p>
+        </p:txBody>
       </p:sp>
       <p:sp>
         <p:nvSpPr>
@@ -11544,102 +11248,67 @@
         </p:nvSpPr>
         <p:spPr>
           <a:xfrm>
-            <a:off x="7909560" y="3099816"/>
-            <a:ext cx="2926080" cy="256032"/>
-          </a:xfrm>
-          <a:prstGeom prst="rect">
-            <a:avLst/>
-          </a:prstGeom>
-          <a:noFill/>
-          <a:ln/>
-        </p:spPr>
-        <p:txBody>
-          <a:bodyPr wrap="square" lIns="0" tIns="0" rIns="0" bIns="0" rtlCol="0" anchor="ctr"/>
-          <a:lstStyle/>
-          <a:p>
-            <a:pPr algn="ctr" indent="0" marL="0">
-              <a:buNone/>
-            </a:pPr>
-            <a:r>
-              <a:rPr lang="en-US" sz="1500" b="1" dirty="0">
-                <a:solidFill>
-                  <a:srgbClr val="003A63"/>
-                </a:solidFill>
-                <a:latin typeface="Aptos" pitchFamily="34" charset="0"/>
-                <a:ea typeface="Aptos" pitchFamily="34" charset="-122"/>
-                <a:cs typeface="Aptos" pitchFamily="34" charset="-120"/>
-              </a:rPr>
-              <a:t>Risk</a:t>
-            </a:r>
-            <a:endParaRPr lang="en-US" sz="1500" dirty="0"/>
+            <a:off x="7818120" y="3300984"/>
+            <a:ext cx="3090672" cy="877824"/>
+          </a:xfrm>
+          <a:prstGeom prst="rect">
+            <a:avLst/>
+          </a:prstGeom>
+          <a:noFill/>
+          <a:ln/>
+        </p:spPr>
+        <p:txBody>
+          <a:bodyPr wrap="square" lIns="254" tIns="254" rIns="254" bIns="254" rtlCol="0" anchor="t">
+            <a:normAutofit/>
+          </a:bodyPr>
+          <a:lstStyle/>
+          <a:p>
+            <a:r>
+              <a:rPr lang="en-US" sz="1380" dirty="0">
+                <a:solidFill>
+                  <a:srgbClr val="17364A"/>
+                </a:solidFill>
+                <a:latin typeface="Aptos" pitchFamily="34" charset="0"/>
+                <a:ea typeface="Aptos" pitchFamily="34" charset="-122"/>
+                <a:cs typeface="Aptos" pitchFamily="34" charset="-120"/>
+              </a:rPr>
+              <a:t>The worksheet should identify the data involved, the sensitivity level, the minimum.</a:t>
+            </a:r>
+            <a:endParaRPr lang="en-US" sz="1380" dirty="0"/>
+          </a:p>
+          <a:p>
+            <a:r>
+              <a:rPr lang="en-US" sz="1380" dirty="0">
+                <a:solidFill>
+                  <a:srgbClr val="17364A"/>
+                </a:solidFill>
+                <a:latin typeface="Aptos" pitchFamily="34" charset="0"/>
+                <a:ea typeface="Aptos" pitchFamily="34" charset="-122"/>
+                <a:cs typeface="Aptos" pitchFamily="34" charset="-120"/>
+              </a:rPr>
+              <a:t>The exercise should also identify residual risks and questions that need privacy, legal,.</a:t>
+            </a:r>
+            <a:endParaRPr lang="en-US" sz="1380" dirty="0"/>
+          </a:p>
+          <a:p>
+            <a:r>
+              <a:rPr lang="en-US" sz="1380" dirty="0">
+                <a:solidFill>
+                  <a:srgbClr val="17364A"/>
+                </a:solidFill>
+                <a:latin typeface="Aptos" pitchFamily="34" charset="0"/>
+                <a:ea typeface="Aptos" pitchFamily="34" charset="-122"/>
+                <a:cs typeface="Aptos" pitchFamily="34" charset="-120"/>
+              </a:rPr>
+              <a:t>Learners should pay special attention to free text, small-area data, rare conditions,.</a:t>
+            </a:r>
+            <a:endParaRPr lang="en-US" sz="1380" dirty="0"/>
           </a:p>
         </p:txBody>
       </p:sp>
       <p:sp>
         <p:nvSpPr>
           <p:cNvPr id="16" name="Shape 14"/>
-          <p:cNvSpPr/>
-          <p:nvPr/>
-        </p:nvSpPr>
-        <p:spPr>
-          <a:xfrm>
-            <a:off x="8366760" y="3639312"/>
-            <a:ext cx="2011680" cy="0"/>
-          </a:xfrm>
-          <a:prstGeom prst="line">
-            <a:avLst/>
-          </a:prstGeom>
-          <a:noFill/>
-          <a:ln w="63500">
-            <a:solidFill>
-              <a:srgbClr val="2F8A28"/>
-            </a:solidFill>
-            <a:prstDash val="solid"/>
-          </a:ln>
-        </p:spPr>
-      </p:sp>
-      <p:sp>
-        <p:nvSpPr>
-          <p:cNvPr id="17" name="Text 15"/>
-          <p:cNvSpPr/>
-          <p:nvPr/>
-        </p:nvSpPr>
-        <p:spPr>
-          <a:xfrm>
-            <a:off x="7909560" y="3849624"/>
-            <a:ext cx="2926080" cy="164592"/>
-          </a:xfrm>
-          <a:prstGeom prst="rect">
-            <a:avLst/>
-          </a:prstGeom>
-          <a:noFill/>
-          <a:ln/>
-        </p:spPr>
-        <p:txBody>
-          <a:bodyPr wrap="square" lIns="0" tIns="0" rIns="0" bIns="0" rtlCol="0" anchor="ctr"/>
-          <a:lstStyle/>
-          <a:p>
-            <a:pPr algn="ctr" indent="0" marL="0">
-              <a:buNone/>
-            </a:pPr>
-            <a:r>
-              <a:rPr lang="en-US" sz="900" dirty="0">
-                <a:solidFill>
-                  <a:srgbClr val="003A63"/>
-                </a:solidFill>
-                <a:latin typeface="Aptos" pitchFamily="34" charset="0"/>
-                <a:ea typeface="Aptos" pitchFamily="34" charset="-122"/>
-                <a:cs typeface="Aptos" pitchFamily="34" charset="-120"/>
-              </a:rPr>
-              <a:t>Human review</a:t>
-            </a:r>
-            <a:endParaRPr lang="en-US" sz="900" dirty="0"/>
-          </a:p>
-        </p:txBody>
-      </p:sp>
-      <p:sp>
-        <p:nvSpPr>
-          <p:cNvPr id="18" name="Shape 16"/>
           <p:cNvSpPr/>
           <p:nvPr/>
         </p:nvSpPr>
@@ -11666,7 +11335,7 @@
       </p:sp>
       <p:sp>
         <p:nvSpPr>
-          <p:cNvPr id="19" name="Text 17"/>
+          <p:cNvPr id="17" name="Text 15"/>
           <p:cNvSpPr/>
           <p:nvPr/>
         </p:nvSpPr>
@@ -11705,7 +11374,7 @@
       </p:sp>
       <p:sp>
         <p:nvSpPr>
-          <p:cNvPr id="20" name="Text 18"/>
+          <p:cNvPr id="18" name="Text 16"/>
           <p:cNvSpPr/>
           <p:nvPr/>
         </p:nvSpPr>
@@ -12185,13 +11854,11 @@
             </a:avLst>
           </a:prstGeom>
           <a:solidFill>
-            <a:srgbClr val="FFFFFF">
-              <a:alpha val="88000"/>
-            </a:srgbClr>
+            <a:srgbClr val="FFFFFF"/>
           </a:solidFill>
           <a:ln w="12700">
             <a:solidFill>
-              <a:srgbClr val="D6E8F2"/>
+              <a:srgbClr val="B9D7E6"/>
             </a:solidFill>
             <a:prstDash val="solid"/>
           </a:ln>
@@ -12199,26 +11866,42 @@
       </p:sp>
       <p:sp>
         <p:nvSpPr>
-          <p:cNvPr id="14" name="Shape 12"/>
-          <p:cNvSpPr/>
-          <p:nvPr/>
-        </p:nvSpPr>
-        <p:spPr>
-          <a:xfrm>
-            <a:off x="8046720" y="3108960"/>
-            <a:ext cx="2651760" cy="896112"/>
-          </a:xfrm>
-          <a:prstGeom prst="arc">
-            <a:avLst/>
-          </a:prstGeom>
-          <a:noFill/>
-          <a:ln w="25400">
-            <a:solidFill>
-              <a:srgbClr val="0068B7"/>
-            </a:solidFill>
-            <a:prstDash val="solid"/>
-          </a:ln>
-        </p:spPr>
+          <p:cNvPr id="14" name="Text 12"/>
+          <p:cNvSpPr/>
+          <p:nvPr/>
+        </p:nvSpPr>
+        <p:spPr>
+          <a:xfrm>
+            <a:off x="7799832" y="2935224"/>
+            <a:ext cx="3145536" cy="256032"/>
+          </a:xfrm>
+          <a:prstGeom prst="rect">
+            <a:avLst/>
+          </a:prstGeom>
+          <a:noFill/>
+          <a:ln/>
+        </p:spPr>
+        <p:txBody>
+          <a:bodyPr wrap="square" lIns="0" tIns="0" rIns="0" bIns="0" rtlCol="0" anchor="ctr"/>
+          <a:lstStyle/>
+          <a:p>
+            <a:pPr indent="0" marL="0">
+              <a:buNone/>
+            </a:pPr>
+            <a:r>
+              <a:rPr lang="en-US" sz="1300" b="1" dirty="0">
+                <a:solidFill>
+                  <a:srgbClr val="0068B7"/>
+                </a:solidFill>
+                <a:latin typeface="Aptos" pitchFamily="34" charset="0"/>
+                <a:ea typeface="Aptos" pitchFamily="34" charset="-122"/>
+                <a:cs typeface="Aptos" pitchFamily="34" charset="-120"/>
+              </a:rPr>
+              <a:t>Concept checkpoints</a:t>
+            </a:r>
+            <a:endParaRPr lang="en-US" sz="1300" dirty="0"/>
+          </a:p>
+        </p:txBody>
       </p:sp>
       <p:sp>
         <p:nvSpPr>
@@ -12228,102 +11911,39 @@
         </p:nvSpPr>
         <p:spPr>
           <a:xfrm>
-            <a:off x="7909560" y="3099816"/>
-            <a:ext cx="2926080" cy="256032"/>
-          </a:xfrm>
-          <a:prstGeom prst="rect">
-            <a:avLst/>
-          </a:prstGeom>
-          <a:noFill/>
-          <a:ln/>
-        </p:spPr>
-        <p:txBody>
-          <a:bodyPr wrap="square" lIns="0" tIns="0" rIns="0" bIns="0" rtlCol="0" anchor="ctr"/>
-          <a:lstStyle/>
-          <a:p>
-            <a:pPr algn="ctr" indent="0" marL="0">
-              <a:buNone/>
-            </a:pPr>
-            <a:r>
-              <a:rPr lang="en-US" sz="1500" b="1" dirty="0">
-                <a:solidFill>
-                  <a:srgbClr val="003A63"/>
-                </a:solidFill>
-                <a:latin typeface="Aptos" pitchFamily="34" charset="0"/>
-                <a:ea typeface="Aptos" pitchFamily="34" charset="-122"/>
-                <a:cs typeface="Aptos" pitchFamily="34" charset="-120"/>
-              </a:rPr>
-              <a:t>Risk</a:t>
-            </a:r>
-            <a:endParaRPr lang="en-US" sz="1500" dirty="0"/>
+            <a:off x="7818120" y="3300984"/>
+            <a:ext cx="3090672" cy="877824"/>
+          </a:xfrm>
+          <a:prstGeom prst="rect">
+            <a:avLst/>
+          </a:prstGeom>
+          <a:noFill/>
+          <a:ln/>
+        </p:spPr>
+        <p:txBody>
+          <a:bodyPr wrap="square" lIns="254" tIns="254" rIns="254" bIns="254" rtlCol="0" anchor="t">
+            <a:normAutofit/>
+          </a:bodyPr>
+          <a:lstStyle/>
+          <a:p>
+            <a:r>
+              <a:rPr lang="en-US" sz="1380" dirty="0">
+                <a:solidFill>
+                  <a:srgbClr val="17364A"/>
+                </a:solidFill>
+                <a:latin typeface="Aptos" pitchFamily="34" charset="0"/>
+                <a:ea typeface="Aptos" pitchFamily="34" charset="-122"/>
+                <a:cs typeface="Aptos" pitchFamily="34" charset="-120"/>
+              </a:rPr>
+              <a:t>The expected artifact is a privacy-preserving AI review worksheet with a brief summary of.</a:t>
+            </a:r>
+            <a:endParaRPr lang="en-US" sz="1380" dirty="0"/>
           </a:p>
         </p:txBody>
       </p:sp>
       <p:sp>
         <p:nvSpPr>
           <p:cNvPr id="16" name="Shape 14"/>
-          <p:cNvSpPr/>
-          <p:nvPr/>
-        </p:nvSpPr>
-        <p:spPr>
-          <a:xfrm>
-            <a:off x="8366760" y="3639312"/>
-            <a:ext cx="2011680" cy="0"/>
-          </a:xfrm>
-          <a:prstGeom prst="line">
-            <a:avLst/>
-          </a:prstGeom>
-          <a:noFill/>
-          <a:ln w="63500">
-            <a:solidFill>
-              <a:srgbClr val="2F8A28"/>
-            </a:solidFill>
-            <a:prstDash val="solid"/>
-          </a:ln>
-        </p:spPr>
-      </p:sp>
-      <p:sp>
-        <p:nvSpPr>
-          <p:cNvPr id="17" name="Text 15"/>
-          <p:cNvSpPr/>
-          <p:nvPr/>
-        </p:nvSpPr>
-        <p:spPr>
-          <a:xfrm>
-            <a:off x="7909560" y="3849624"/>
-            <a:ext cx="2926080" cy="164592"/>
-          </a:xfrm>
-          <a:prstGeom prst="rect">
-            <a:avLst/>
-          </a:prstGeom>
-          <a:noFill/>
-          <a:ln/>
-        </p:spPr>
-        <p:txBody>
-          <a:bodyPr wrap="square" lIns="0" tIns="0" rIns="0" bIns="0" rtlCol="0" anchor="ctr"/>
-          <a:lstStyle/>
-          <a:p>
-            <a:pPr algn="ctr" indent="0" marL="0">
-              <a:buNone/>
-            </a:pPr>
-            <a:r>
-              <a:rPr lang="en-US" sz="900" dirty="0">
-                <a:solidFill>
-                  <a:srgbClr val="003A63"/>
-                </a:solidFill>
-                <a:latin typeface="Aptos" pitchFamily="34" charset="0"/>
-                <a:ea typeface="Aptos" pitchFamily="34" charset="-122"/>
-                <a:cs typeface="Aptos" pitchFamily="34" charset="-120"/>
-              </a:rPr>
-              <a:t>Human review</a:t>
-            </a:r>
-            <a:endParaRPr lang="en-US" sz="900" dirty="0"/>
-          </a:p>
-        </p:txBody>
-      </p:sp>
-      <p:sp>
-        <p:nvSpPr>
-          <p:cNvPr id="18" name="Shape 16"/>
           <p:cNvSpPr/>
           <p:nvPr/>
         </p:nvSpPr>
@@ -12350,7 +11970,7 @@
       </p:sp>
       <p:sp>
         <p:nvSpPr>
-          <p:cNvPr id="19" name="Text 17"/>
+          <p:cNvPr id="17" name="Text 15"/>
           <p:cNvSpPr/>
           <p:nvPr/>
         </p:nvSpPr>
@@ -12389,7 +12009,7 @@
       </p:sp>
       <p:sp>
         <p:nvSpPr>
-          <p:cNvPr id="20" name="Text 18"/>
+          <p:cNvPr id="18" name="Text 16"/>
           <p:cNvSpPr/>
           <p:nvPr/>
         </p:nvSpPr>
@@ -12869,13 +12489,11 @@
             </a:avLst>
           </a:prstGeom>
           <a:solidFill>
-            <a:srgbClr val="FFFFFF">
-              <a:alpha val="88000"/>
-            </a:srgbClr>
+            <a:srgbClr val="FFFFFF"/>
           </a:solidFill>
           <a:ln w="12700">
             <a:solidFill>
-              <a:srgbClr val="D6E8F2"/>
+              <a:srgbClr val="B9D7E6"/>
             </a:solidFill>
             <a:prstDash val="solid"/>
           </a:ln>
@@ -12883,26 +12501,42 @@
       </p:sp>
       <p:sp>
         <p:nvSpPr>
-          <p:cNvPr id="14" name="Shape 12"/>
-          <p:cNvSpPr/>
-          <p:nvPr/>
-        </p:nvSpPr>
-        <p:spPr>
-          <a:xfrm>
-            <a:off x="8046720" y="3108960"/>
-            <a:ext cx="2651760" cy="896112"/>
-          </a:xfrm>
-          <a:prstGeom prst="arc">
-            <a:avLst/>
-          </a:prstGeom>
-          <a:noFill/>
-          <a:ln w="25400">
-            <a:solidFill>
-              <a:srgbClr val="0068B7"/>
-            </a:solidFill>
-            <a:prstDash val="solid"/>
-          </a:ln>
-        </p:spPr>
+          <p:cNvPr id="14" name="Text 12"/>
+          <p:cNvSpPr/>
+          <p:nvPr/>
+        </p:nvSpPr>
+        <p:spPr>
+          <a:xfrm>
+            <a:off x="7799832" y="2935224"/>
+            <a:ext cx="3145536" cy="256032"/>
+          </a:xfrm>
+          <a:prstGeom prst="rect">
+            <a:avLst/>
+          </a:prstGeom>
+          <a:noFill/>
+          <a:ln/>
+        </p:spPr>
+        <p:txBody>
+          <a:bodyPr wrap="square" lIns="0" tIns="0" rIns="0" bIns="0" rtlCol="0" anchor="ctr"/>
+          <a:lstStyle/>
+          <a:p>
+            <a:pPr indent="0" marL="0">
+              <a:buNone/>
+            </a:pPr>
+            <a:r>
+              <a:rPr lang="en-US" sz="1300" b="1" dirty="0">
+                <a:solidFill>
+                  <a:srgbClr val="0068B7"/>
+                </a:solidFill>
+                <a:latin typeface="Aptos" pitchFamily="34" charset="0"/>
+                <a:ea typeface="Aptos" pitchFamily="34" charset="-122"/>
+                <a:cs typeface="Aptos" pitchFamily="34" charset="-120"/>
+              </a:rPr>
+              <a:t>Concept checkpoints</a:t>
+            </a:r>
+            <a:endParaRPr lang="en-US" sz="1300" dirty="0"/>
+          </a:p>
+        </p:txBody>
       </p:sp>
       <p:sp>
         <p:nvSpPr>
@@ -12912,102 +12546,39 @@
         </p:nvSpPr>
         <p:spPr>
           <a:xfrm>
-            <a:off x="7909560" y="3099816"/>
-            <a:ext cx="2926080" cy="256032"/>
-          </a:xfrm>
-          <a:prstGeom prst="rect">
-            <a:avLst/>
-          </a:prstGeom>
-          <a:noFill/>
-          <a:ln/>
-        </p:spPr>
-        <p:txBody>
-          <a:bodyPr wrap="square" lIns="0" tIns="0" rIns="0" bIns="0" rtlCol="0" anchor="ctr"/>
-          <a:lstStyle/>
-          <a:p>
-            <a:pPr algn="ctr" indent="0" marL="0">
-              <a:buNone/>
-            </a:pPr>
-            <a:r>
-              <a:rPr lang="en-US" sz="1500" b="1" dirty="0">
-                <a:solidFill>
-                  <a:srgbClr val="003A63"/>
-                </a:solidFill>
-                <a:latin typeface="Aptos" pitchFamily="34" charset="0"/>
-                <a:ea typeface="Aptos" pitchFamily="34" charset="-122"/>
-                <a:cs typeface="Aptos" pitchFamily="34" charset="-120"/>
-              </a:rPr>
-              <a:t>Risk</a:t>
-            </a:r>
-            <a:endParaRPr lang="en-US" sz="1500" dirty="0"/>
+            <a:off x="7818120" y="3300984"/>
+            <a:ext cx="3090672" cy="877824"/>
+          </a:xfrm>
+          <a:prstGeom prst="rect">
+            <a:avLst/>
+          </a:prstGeom>
+          <a:noFill/>
+          <a:ln/>
+        </p:spPr>
+        <p:txBody>
+          <a:bodyPr wrap="square" lIns="254" tIns="254" rIns="254" bIns="254" rtlCol="0" anchor="t">
+            <a:normAutofit/>
+          </a:bodyPr>
+          <a:lstStyle/>
+          <a:p>
+            <a:r>
+              <a:rPr lang="en-US" sz="1380" dirty="0">
+                <a:solidFill>
+                  <a:srgbClr val="17364A"/>
+                </a:solidFill>
+                <a:latin typeface="Aptos" pitchFamily="34" charset="0"/>
+                <a:ea typeface="Aptos" pitchFamily="34" charset="-122"/>
+                <a:cs typeface="Aptos" pitchFamily="34" charset="-120"/>
+              </a:rPr>
+              <a:t>The expected artifact is a privacy-preserving AI review worksheet with a brief summary of.</a:t>
+            </a:r>
+            <a:endParaRPr lang="en-US" sz="1380" dirty="0"/>
           </a:p>
         </p:txBody>
       </p:sp>
       <p:sp>
         <p:nvSpPr>
           <p:cNvPr id="16" name="Shape 14"/>
-          <p:cNvSpPr/>
-          <p:nvPr/>
-        </p:nvSpPr>
-        <p:spPr>
-          <a:xfrm>
-            <a:off x="8366760" y="3639312"/>
-            <a:ext cx="2011680" cy="0"/>
-          </a:xfrm>
-          <a:prstGeom prst="line">
-            <a:avLst/>
-          </a:prstGeom>
-          <a:noFill/>
-          <a:ln w="63500">
-            <a:solidFill>
-              <a:srgbClr val="2F8A28"/>
-            </a:solidFill>
-            <a:prstDash val="solid"/>
-          </a:ln>
-        </p:spPr>
-      </p:sp>
-      <p:sp>
-        <p:nvSpPr>
-          <p:cNvPr id="17" name="Text 15"/>
-          <p:cNvSpPr/>
-          <p:nvPr/>
-        </p:nvSpPr>
-        <p:spPr>
-          <a:xfrm>
-            <a:off x="7909560" y="3849624"/>
-            <a:ext cx="2926080" cy="164592"/>
-          </a:xfrm>
-          <a:prstGeom prst="rect">
-            <a:avLst/>
-          </a:prstGeom>
-          <a:noFill/>
-          <a:ln/>
-        </p:spPr>
-        <p:txBody>
-          <a:bodyPr wrap="square" lIns="0" tIns="0" rIns="0" bIns="0" rtlCol="0" anchor="ctr"/>
-          <a:lstStyle/>
-          <a:p>
-            <a:pPr algn="ctr" indent="0" marL="0">
-              <a:buNone/>
-            </a:pPr>
-            <a:r>
-              <a:rPr lang="en-US" sz="900" dirty="0">
-                <a:solidFill>
-                  <a:srgbClr val="003A63"/>
-                </a:solidFill>
-                <a:latin typeface="Aptos" pitchFamily="34" charset="0"/>
-                <a:ea typeface="Aptos" pitchFamily="34" charset="-122"/>
-                <a:cs typeface="Aptos" pitchFamily="34" charset="-120"/>
-              </a:rPr>
-              <a:t>Human review</a:t>
-            </a:r>
-            <a:endParaRPr lang="en-US" sz="900" dirty="0"/>
-          </a:p>
-        </p:txBody>
-      </p:sp>
-      <p:sp>
-        <p:nvSpPr>
-          <p:cNvPr id="18" name="Shape 16"/>
           <p:cNvSpPr/>
           <p:nvPr/>
         </p:nvSpPr>
@@ -13034,7 +12605,7 @@
       </p:sp>
       <p:sp>
         <p:nvSpPr>
-          <p:cNvPr id="19" name="Text 17"/>
+          <p:cNvPr id="17" name="Text 15"/>
           <p:cNvSpPr/>
           <p:nvPr/>
         </p:nvSpPr>
@@ -13073,7 +12644,7 @@
       </p:sp>
       <p:sp>
         <p:nvSpPr>
-          <p:cNvPr id="20" name="Text 18"/>
+          <p:cNvPr id="18" name="Text 16"/>
           <p:cNvSpPr/>
           <p:nvPr/>
         </p:nvSpPr>
@@ -13581,13 +13152,11 @@
             </a:avLst>
           </a:prstGeom>
           <a:solidFill>
-            <a:srgbClr val="FFFFFF">
-              <a:alpha val="88000"/>
-            </a:srgbClr>
+            <a:srgbClr val="FFFFFF"/>
           </a:solidFill>
           <a:ln w="12700">
             <a:solidFill>
-              <a:srgbClr val="D6E8F2"/>
+              <a:srgbClr val="B9D7E6"/>
             </a:solidFill>
             <a:prstDash val="solid"/>
           </a:ln>
@@ -13595,26 +13164,42 @@
       </p:sp>
       <p:sp>
         <p:nvSpPr>
-          <p:cNvPr id="14" name="Shape 12"/>
-          <p:cNvSpPr/>
-          <p:nvPr/>
-        </p:nvSpPr>
-        <p:spPr>
-          <a:xfrm>
-            <a:off x="8046720" y="3108960"/>
-            <a:ext cx="2651760" cy="896112"/>
-          </a:xfrm>
-          <a:prstGeom prst="arc">
-            <a:avLst/>
-          </a:prstGeom>
-          <a:noFill/>
-          <a:ln w="25400">
-            <a:solidFill>
-              <a:srgbClr val="0068B7"/>
-            </a:solidFill>
-            <a:prstDash val="solid"/>
-          </a:ln>
-        </p:spPr>
+          <p:cNvPr id="14" name="Text 12"/>
+          <p:cNvSpPr/>
+          <p:nvPr/>
+        </p:nvSpPr>
+        <p:spPr>
+          <a:xfrm>
+            <a:off x="7799832" y="2935224"/>
+            <a:ext cx="3145536" cy="256032"/>
+          </a:xfrm>
+          <a:prstGeom prst="rect">
+            <a:avLst/>
+          </a:prstGeom>
+          <a:noFill/>
+          <a:ln/>
+        </p:spPr>
+        <p:txBody>
+          <a:bodyPr wrap="square" lIns="0" tIns="0" rIns="0" bIns="0" rtlCol="0" anchor="ctr"/>
+          <a:lstStyle/>
+          <a:p>
+            <a:pPr indent="0" marL="0">
+              <a:buNone/>
+            </a:pPr>
+            <a:r>
+              <a:rPr lang="en-US" sz="1300" b="1" dirty="0">
+                <a:solidFill>
+                  <a:srgbClr val="0068B7"/>
+                </a:solidFill>
+                <a:latin typeface="Aptos" pitchFamily="34" charset="0"/>
+                <a:ea typeface="Aptos" pitchFamily="34" charset="-122"/>
+                <a:cs typeface="Aptos" pitchFamily="34" charset="-120"/>
+              </a:rPr>
+              <a:t>Concept checkpoints</a:t>
+            </a:r>
+            <a:endParaRPr lang="en-US" sz="1300" dirty="0"/>
+          </a:p>
+        </p:txBody>
       </p:sp>
       <p:sp>
         <p:nvSpPr>
@@ -13624,102 +13209,67 @@
         </p:nvSpPr>
         <p:spPr>
           <a:xfrm>
-            <a:off x="7909560" y="3099816"/>
-            <a:ext cx="2926080" cy="256032"/>
-          </a:xfrm>
-          <a:prstGeom prst="rect">
-            <a:avLst/>
-          </a:prstGeom>
-          <a:noFill/>
-          <a:ln/>
-        </p:spPr>
-        <p:txBody>
-          <a:bodyPr wrap="square" lIns="0" tIns="0" rIns="0" bIns="0" rtlCol="0" anchor="ctr"/>
-          <a:lstStyle/>
-          <a:p>
-            <a:pPr algn="ctr" indent="0" marL="0">
-              <a:buNone/>
-            </a:pPr>
-            <a:r>
-              <a:rPr lang="en-US" sz="1500" b="1" dirty="0">
-                <a:solidFill>
-                  <a:srgbClr val="003A63"/>
-                </a:solidFill>
-                <a:latin typeface="Aptos" pitchFamily="34" charset="0"/>
-                <a:ea typeface="Aptos" pitchFamily="34" charset="-122"/>
-                <a:cs typeface="Aptos" pitchFamily="34" charset="-120"/>
-              </a:rPr>
-              <a:t>Risk</a:t>
-            </a:r>
-            <a:endParaRPr lang="en-US" sz="1500" dirty="0"/>
+            <a:off x="7818120" y="3300984"/>
+            <a:ext cx="3090672" cy="877824"/>
+          </a:xfrm>
+          <a:prstGeom prst="rect">
+            <a:avLst/>
+          </a:prstGeom>
+          <a:noFill/>
+          <a:ln/>
+        </p:spPr>
+        <p:txBody>
+          <a:bodyPr wrap="square" lIns="254" tIns="254" rIns="254" bIns="254" rtlCol="0" anchor="t">
+            <a:normAutofit/>
+          </a:bodyPr>
+          <a:lstStyle/>
+          <a:p>
+            <a:r>
+              <a:rPr lang="en-US" sz="1380" dirty="0">
+                <a:solidFill>
+                  <a:srgbClr val="17364A"/>
+                </a:solidFill>
+                <a:latin typeface="Aptos" pitchFamily="34" charset="0"/>
+                <a:ea typeface="Aptos" pitchFamily="34" charset="-122"/>
+                <a:cs typeface="Aptos" pitchFamily="34" charset="-120"/>
+              </a:rPr>
+              <a:t>1.</a:t>
+            </a:r>
+            <a:endParaRPr lang="en-US" sz="1380" dirty="0"/>
+          </a:p>
+          <a:p>
+            <a:r>
+              <a:rPr lang="en-US" sz="1380" dirty="0">
+                <a:solidFill>
+                  <a:srgbClr val="17364A"/>
+                </a:solidFill>
+                <a:latin typeface="Aptos" pitchFamily="34" charset="0"/>
+                <a:ea typeface="Aptos" pitchFamily="34" charset="-122"/>
+                <a:cs typeface="Aptos" pitchFamily="34" charset="-120"/>
+              </a:rPr>
+              <a:t>Which statement best describes de-identification in public health AI?</a:t>
+            </a:r>
+            <a:endParaRPr lang="en-US" sz="1380" dirty="0"/>
+          </a:p>
+          <a:p>
+            <a:r>
+              <a:rPr lang="en-US" sz="1380" dirty="0">
+                <a:solidFill>
+                  <a:srgbClr val="17364A"/>
+                </a:solidFill>
+                <a:latin typeface="Aptos" pitchFamily="34" charset="0"/>
+                <a:ea typeface="Aptos" pitchFamily="34" charset="-122"/>
+                <a:cs typeface="Aptos" pitchFamily="34" charset="-120"/>
+              </a:rPr>
+              <a:t>2.</a:t>
+            </a:r>
+            <a:endParaRPr lang="en-US" sz="1380" dirty="0"/>
           </a:p>
         </p:txBody>
       </p:sp>
       <p:sp>
         <p:nvSpPr>
           <p:cNvPr id="16" name="Shape 14"/>
-          <p:cNvSpPr/>
-          <p:nvPr/>
-        </p:nvSpPr>
-        <p:spPr>
-          <a:xfrm>
-            <a:off x="8366760" y="3639312"/>
-            <a:ext cx="2011680" cy="0"/>
-          </a:xfrm>
-          <a:prstGeom prst="line">
-            <a:avLst/>
-          </a:prstGeom>
-          <a:noFill/>
-          <a:ln w="63500">
-            <a:solidFill>
-              <a:srgbClr val="2F8A28"/>
-            </a:solidFill>
-            <a:prstDash val="solid"/>
-          </a:ln>
-        </p:spPr>
-      </p:sp>
-      <p:sp>
-        <p:nvSpPr>
-          <p:cNvPr id="17" name="Text 15"/>
-          <p:cNvSpPr/>
-          <p:nvPr/>
-        </p:nvSpPr>
-        <p:spPr>
-          <a:xfrm>
-            <a:off x="7909560" y="3849624"/>
-            <a:ext cx="2926080" cy="164592"/>
-          </a:xfrm>
-          <a:prstGeom prst="rect">
-            <a:avLst/>
-          </a:prstGeom>
-          <a:noFill/>
-          <a:ln/>
-        </p:spPr>
-        <p:txBody>
-          <a:bodyPr wrap="square" lIns="0" tIns="0" rIns="0" bIns="0" rtlCol="0" anchor="ctr"/>
-          <a:lstStyle/>
-          <a:p>
-            <a:pPr algn="ctr" indent="0" marL="0">
-              <a:buNone/>
-            </a:pPr>
-            <a:r>
-              <a:rPr lang="en-US" sz="900" dirty="0">
-                <a:solidFill>
-                  <a:srgbClr val="003A63"/>
-                </a:solidFill>
-                <a:latin typeface="Aptos" pitchFamily="34" charset="0"/>
-                <a:ea typeface="Aptos" pitchFamily="34" charset="-122"/>
-                <a:cs typeface="Aptos" pitchFamily="34" charset="-120"/>
-              </a:rPr>
-              <a:t>Human review</a:t>
-            </a:r>
-            <a:endParaRPr lang="en-US" sz="900" dirty="0"/>
-          </a:p>
-        </p:txBody>
-      </p:sp>
-      <p:sp>
-        <p:nvSpPr>
-          <p:cNvPr id="18" name="Shape 16"/>
           <p:cNvSpPr/>
           <p:nvPr/>
         </p:nvSpPr>
@@ -13746,7 +13296,7 @@
       </p:sp>
       <p:sp>
         <p:nvSpPr>
-          <p:cNvPr id="19" name="Text 17"/>
+          <p:cNvPr id="17" name="Text 15"/>
           <p:cNvSpPr/>
           <p:nvPr/>
         </p:nvSpPr>
@@ -13785,7 +13335,7 @@
       </p:sp>
       <p:sp>
         <p:nvSpPr>
-          <p:cNvPr id="20" name="Text 18"/>
+          <p:cNvPr id="18" name="Text 16"/>
           <p:cNvSpPr/>
           <p:nvPr/>
         </p:nvSpPr>
@@ -14293,13 +13843,11 @@
             </a:avLst>
           </a:prstGeom>
           <a:solidFill>
-            <a:srgbClr val="FFFFFF">
-              <a:alpha val="88000"/>
-            </a:srgbClr>
+            <a:srgbClr val="FFFFFF"/>
           </a:solidFill>
           <a:ln w="12700">
             <a:solidFill>
-              <a:srgbClr val="D6E8F2"/>
+              <a:srgbClr val="B9D7E6"/>
             </a:solidFill>
             <a:prstDash val="solid"/>
           </a:ln>
@@ -14307,26 +13855,42 @@
       </p:sp>
       <p:sp>
         <p:nvSpPr>
-          <p:cNvPr id="14" name="Shape 12"/>
-          <p:cNvSpPr/>
-          <p:nvPr/>
-        </p:nvSpPr>
-        <p:spPr>
-          <a:xfrm>
-            <a:off x="8046720" y="3108960"/>
-            <a:ext cx="2651760" cy="896112"/>
-          </a:xfrm>
-          <a:prstGeom prst="arc">
-            <a:avLst/>
-          </a:prstGeom>
-          <a:noFill/>
-          <a:ln w="25400">
-            <a:solidFill>
-              <a:srgbClr val="0068B7"/>
-            </a:solidFill>
-            <a:prstDash val="solid"/>
-          </a:ln>
-        </p:spPr>
+          <p:cNvPr id="14" name="Text 12"/>
+          <p:cNvSpPr/>
+          <p:nvPr/>
+        </p:nvSpPr>
+        <p:spPr>
+          <a:xfrm>
+            <a:off x="7799832" y="2935224"/>
+            <a:ext cx="3145536" cy="256032"/>
+          </a:xfrm>
+          <a:prstGeom prst="rect">
+            <a:avLst/>
+          </a:prstGeom>
+          <a:noFill/>
+          <a:ln/>
+        </p:spPr>
+        <p:txBody>
+          <a:bodyPr wrap="square" lIns="0" tIns="0" rIns="0" bIns="0" rtlCol="0" anchor="ctr"/>
+          <a:lstStyle/>
+          <a:p>
+            <a:pPr indent="0" marL="0">
+              <a:buNone/>
+            </a:pPr>
+            <a:r>
+              <a:rPr lang="en-US" sz="1300" b="1" dirty="0">
+                <a:solidFill>
+                  <a:srgbClr val="0068B7"/>
+                </a:solidFill>
+                <a:latin typeface="Aptos" pitchFamily="34" charset="0"/>
+                <a:ea typeface="Aptos" pitchFamily="34" charset="-122"/>
+                <a:cs typeface="Aptos" pitchFamily="34" charset="-120"/>
+              </a:rPr>
+              <a:t>Concept checkpoints</a:t>
+            </a:r>
+            <a:endParaRPr lang="en-US" sz="1300" dirty="0"/>
+          </a:p>
+        </p:txBody>
       </p:sp>
       <p:sp>
         <p:nvSpPr>
@@ -14336,102 +13900,53 @@
         </p:nvSpPr>
         <p:spPr>
           <a:xfrm>
-            <a:off x="7909560" y="3099816"/>
-            <a:ext cx="2926080" cy="256032"/>
-          </a:xfrm>
-          <a:prstGeom prst="rect">
-            <a:avLst/>
-          </a:prstGeom>
-          <a:noFill/>
-          <a:ln/>
-        </p:spPr>
-        <p:txBody>
-          <a:bodyPr wrap="square" lIns="0" tIns="0" rIns="0" bIns="0" rtlCol="0" anchor="ctr"/>
-          <a:lstStyle/>
-          <a:p>
-            <a:pPr algn="ctr" indent="0" marL="0">
-              <a:buNone/>
-            </a:pPr>
-            <a:r>
-              <a:rPr lang="en-US" sz="1500" b="1" dirty="0">
-                <a:solidFill>
-                  <a:srgbClr val="003A63"/>
-                </a:solidFill>
-                <a:latin typeface="Aptos" pitchFamily="34" charset="0"/>
-                <a:ea typeface="Aptos" pitchFamily="34" charset="-122"/>
-                <a:cs typeface="Aptos" pitchFamily="34" charset="-120"/>
-              </a:rPr>
-              <a:t>Risk</a:t>
-            </a:r>
-            <a:endParaRPr lang="en-US" sz="1500" dirty="0"/>
+            <a:off x="7818120" y="3300984"/>
+            <a:ext cx="3090672" cy="877824"/>
+          </a:xfrm>
+          <a:prstGeom prst="rect">
+            <a:avLst/>
+          </a:prstGeom>
+          <a:noFill/>
+          <a:ln/>
+        </p:spPr>
+        <p:txBody>
+          <a:bodyPr wrap="square" lIns="254" tIns="254" rIns="254" bIns="254" rtlCol="0" anchor="t">
+            <a:normAutofit/>
+          </a:bodyPr>
+          <a:lstStyle/>
+          <a:p>
+            <a:r>
+              <a:rPr lang="en-US" sz="1380" dirty="0">
+                <a:solidFill>
+                  <a:srgbClr val="17364A"/>
+                </a:solidFill>
+                <a:latin typeface="Aptos" pitchFamily="34" charset="0"/>
+                <a:ea typeface="Aptos" pitchFamily="34" charset="-122"/>
+                <a:cs typeface="Aptos" pitchFamily="34" charset="-120"/>
+              </a:rPr>
+              <a:t>CDC data governance and public health data modernization resources</a:t>
+            </a:r>
+            <a:endParaRPr lang="en-US" sz="1380" dirty="0"/>
+          </a:p>
+          <a:p>
+            <a:r>
+              <a:rPr lang="en-US" sz="1380" dirty="0">
+                <a:solidFill>
+                  <a:srgbClr val="17364A"/>
+                </a:solidFill>
+                <a:latin typeface="Aptos" pitchFamily="34" charset="0"/>
+                <a:ea typeface="Aptos" pitchFamily="34" charset="-122"/>
+                <a:cs typeface="Aptos" pitchFamily="34" charset="-120"/>
+              </a:rPr>
+              <a:t>Agency privacy, legal, security, and records management policies</a:t>
+            </a:r>
+            <a:endParaRPr lang="en-US" sz="1380" dirty="0"/>
           </a:p>
         </p:txBody>
       </p:sp>
       <p:sp>
         <p:nvSpPr>
           <p:cNvPr id="16" name="Shape 14"/>
-          <p:cNvSpPr/>
-          <p:nvPr/>
-        </p:nvSpPr>
-        <p:spPr>
-          <a:xfrm>
-            <a:off x="8366760" y="3639312"/>
-            <a:ext cx="2011680" cy="0"/>
-          </a:xfrm>
-          <a:prstGeom prst="line">
-            <a:avLst/>
-          </a:prstGeom>
-          <a:noFill/>
-          <a:ln w="63500">
-            <a:solidFill>
-              <a:srgbClr val="2F8A28"/>
-            </a:solidFill>
-            <a:prstDash val="solid"/>
-          </a:ln>
-        </p:spPr>
-      </p:sp>
-      <p:sp>
-        <p:nvSpPr>
-          <p:cNvPr id="17" name="Text 15"/>
-          <p:cNvSpPr/>
-          <p:nvPr/>
-        </p:nvSpPr>
-        <p:spPr>
-          <a:xfrm>
-            <a:off x="7909560" y="3849624"/>
-            <a:ext cx="2926080" cy="164592"/>
-          </a:xfrm>
-          <a:prstGeom prst="rect">
-            <a:avLst/>
-          </a:prstGeom>
-          <a:noFill/>
-          <a:ln/>
-        </p:spPr>
-        <p:txBody>
-          <a:bodyPr wrap="square" lIns="0" tIns="0" rIns="0" bIns="0" rtlCol="0" anchor="ctr"/>
-          <a:lstStyle/>
-          <a:p>
-            <a:pPr algn="ctr" indent="0" marL="0">
-              <a:buNone/>
-            </a:pPr>
-            <a:r>
-              <a:rPr lang="en-US" sz="900" dirty="0">
-                <a:solidFill>
-                  <a:srgbClr val="003A63"/>
-                </a:solidFill>
-                <a:latin typeface="Aptos" pitchFamily="34" charset="0"/>
-                <a:ea typeface="Aptos" pitchFamily="34" charset="-122"/>
-                <a:cs typeface="Aptos" pitchFamily="34" charset="-120"/>
-              </a:rPr>
-              <a:t>Human review</a:t>
-            </a:r>
-            <a:endParaRPr lang="en-US" sz="900" dirty="0"/>
-          </a:p>
-        </p:txBody>
-      </p:sp>
-      <p:sp>
-        <p:nvSpPr>
-          <p:cNvPr id="18" name="Shape 16"/>
           <p:cNvSpPr/>
           <p:nvPr/>
         </p:nvSpPr>
@@ -14458,7 +13973,7 @@
       </p:sp>
       <p:sp>
         <p:nvSpPr>
-          <p:cNvPr id="19" name="Text 17"/>
+          <p:cNvPr id="17" name="Text 15"/>
           <p:cNvSpPr/>
           <p:nvPr/>
         </p:nvSpPr>
@@ -14497,7 +14012,7 @@
       </p:sp>
       <p:sp>
         <p:nvSpPr>
-          <p:cNvPr id="20" name="Text 18"/>
+          <p:cNvPr id="18" name="Text 16"/>
           <p:cNvSpPr/>
           <p:nvPr/>
         </p:nvSpPr>
@@ -15010,20 +14525,20 @@
         </p:nvSpPr>
         <p:spPr>
           <a:xfrm>
-            <a:off x="7818120" y="3977640"/>
-            <a:ext cx="972312" cy="749808"/>
+            <a:off x="8046720" y="3794760"/>
+            <a:ext cx="3063240" cy="1600200"/>
           </a:xfrm>
           <a:prstGeom prst="roundRect">
             <a:avLst>
-              <a:gd name="adj" fmla="val 14634"/>
+              <a:gd name="adj" fmla="val 6857"/>
             </a:avLst>
           </a:prstGeom>
           <a:solidFill>
-            <a:srgbClr val="0068B7"/>
+            <a:srgbClr val="FFFFFF"/>
           </a:solidFill>
           <a:ln w="12700">
             <a:solidFill>
-              <a:srgbClr val="0068B7"/>
+              <a:srgbClr val="B9D7E6"/>
             </a:solidFill>
             <a:prstDash val="solid"/>
           </a:ln>
@@ -15037,172 +14552,100 @@
         </p:nvSpPr>
         <p:spPr>
           <a:xfrm>
-            <a:off x="7891272" y="4169664"/>
-            <a:ext cx="826008" cy="310896"/>
-          </a:xfrm>
-          <a:prstGeom prst="rect">
-            <a:avLst/>
-          </a:prstGeom>
-          <a:noFill/>
-          <a:ln/>
-        </p:spPr>
-        <p:txBody>
-          <a:bodyPr wrap="square" lIns="0" tIns="0" rIns="0" bIns="0" rtlCol="0" anchor="ctr">
+            <a:off x="8211312" y="3941064"/>
+            <a:ext cx="2734056" cy="256032"/>
+          </a:xfrm>
+          <a:prstGeom prst="rect">
+            <a:avLst/>
+          </a:prstGeom>
+          <a:noFill/>
+          <a:ln/>
+        </p:spPr>
+        <p:txBody>
+          <a:bodyPr wrap="square" lIns="0" tIns="0" rIns="0" bIns="0" rtlCol="0" anchor="ctr"/>
+          <a:lstStyle/>
+          <a:p>
+            <a:pPr indent="0" marL="0">
+              <a:buNone/>
+            </a:pPr>
+            <a:r>
+              <a:rPr lang="en-US" sz="1300" b="1" dirty="0">
+                <a:solidFill>
+                  <a:srgbClr val="0068B7"/>
+                </a:solidFill>
+                <a:latin typeface="Aptos" pitchFamily="34" charset="0"/>
+                <a:ea typeface="Aptos" pitchFamily="34" charset="-122"/>
+                <a:cs typeface="Aptos" pitchFamily="34" charset="-120"/>
+              </a:rPr>
+              <a:t>Use the play links to</a:t>
+            </a:r>
+            <a:endParaRPr lang="en-US" sz="1300" dirty="0"/>
+          </a:p>
+        </p:txBody>
+      </p:sp>
+      <p:sp>
+        <p:nvSpPr>
+          <p:cNvPr id="15" name="Text 13"/>
+          <p:cNvSpPr/>
+          <p:nvPr/>
+        </p:nvSpPr>
+        <p:spPr>
+          <a:xfrm>
+            <a:off x="8229600" y="4306824"/>
+            <a:ext cx="2679192" cy="941832"/>
+          </a:xfrm>
+          <a:prstGeom prst="rect">
+            <a:avLst/>
+          </a:prstGeom>
+          <a:noFill/>
+          <a:ln/>
+        </p:spPr>
+        <p:txBody>
+          <a:bodyPr wrap="square" lIns="254" tIns="254" rIns="254" bIns="254" rtlCol="0" anchor="t">
             <a:normAutofit/>
           </a:bodyPr>
           <a:lstStyle/>
           <a:p>
-            <a:pPr algn="ctr" indent="0" marL="0">
-              <a:buNone/>
-            </a:pPr>
-            <a:r>
-              <a:rPr lang="en-US" sz="1500" b="1" dirty="0">
-                <a:solidFill>
-                  <a:srgbClr val="FFFFFF"/>
-                </a:solidFill>
-                <a:latin typeface="Aptos" pitchFamily="34" charset="0"/>
-                <a:ea typeface="Aptos" pitchFamily="34" charset="-122"/>
-                <a:cs typeface="Aptos" pitchFamily="34" charset="-120"/>
-              </a:rPr>
-              <a:t>Lesson</a:t>
-            </a:r>
-            <a:endParaRPr lang="en-US" sz="1500" dirty="0"/>
-          </a:p>
-        </p:txBody>
-      </p:sp>
-      <p:sp>
-        <p:nvSpPr>
-          <p:cNvPr id="15" name="Shape 13"/>
-          <p:cNvSpPr/>
-          <p:nvPr/>
-        </p:nvSpPr>
-        <p:spPr>
-          <a:xfrm>
-            <a:off x="9046464" y="3977640"/>
-            <a:ext cx="972312" cy="749808"/>
-          </a:xfrm>
-          <a:prstGeom prst="roundRect">
-            <a:avLst>
-              <a:gd name="adj" fmla="val 14634"/>
-            </a:avLst>
-          </a:prstGeom>
-          <a:solidFill>
-            <a:srgbClr val="2F8A28"/>
-          </a:solidFill>
-          <a:ln w="12700">
-            <a:solidFill>
-              <a:srgbClr val="2F8A28"/>
-            </a:solidFill>
-            <a:prstDash val="solid"/>
-          </a:ln>
-        </p:spPr>
-      </p:sp>
-      <p:sp>
-        <p:nvSpPr>
-          <p:cNvPr id="16" name="Text 14"/>
-          <p:cNvSpPr/>
-          <p:nvPr/>
-        </p:nvSpPr>
-        <p:spPr>
-          <a:xfrm>
-            <a:off x="9119616" y="4169664"/>
-            <a:ext cx="826008" cy="310896"/>
-          </a:xfrm>
-          <a:prstGeom prst="rect">
-            <a:avLst/>
-          </a:prstGeom>
-          <a:noFill/>
-          <a:ln/>
-        </p:spPr>
-        <p:txBody>
-          <a:bodyPr wrap="square" lIns="0" tIns="0" rIns="0" bIns="0" rtlCol="0" anchor="ctr">
-            <a:normAutofit/>
-          </a:bodyPr>
-          <a:lstStyle/>
-          <a:p>
-            <a:pPr algn="ctr" indent="0" marL="0">
-              <a:buNone/>
-            </a:pPr>
-            <a:r>
-              <a:rPr lang="en-US" sz="1500" b="1" dirty="0">
-                <a:solidFill>
-                  <a:srgbClr val="FFFFFF"/>
-                </a:solidFill>
-                <a:latin typeface="Aptos" pitchFamily="34" charset="0"/>
-                <a:ea typeface="Aptos" pitchFamily="34" charset="-122"/>
-                <a:cs typeface="Aptos" pitchFamily="34" charset="-120"/>
-              </a:rPr>
-              <a:t>Plays</a:t>
-            </a:r>
-            <a:endParaRPr lang="en-US" sz="1500" dirty="0"/>
-          </a:p>
-        </p:txBody>
-      </p:sp>
-      <p:sp>
-        <p:nvSpPr>
-          <p:cNvPr id="17" name="Shape 15"/>
-          <p:cNvSpPr/>
-          <p:nvPr/>
-        </p:nvSpPr>
-        <p:spPr>
-          <a:xfrm>
-            <a:off x="10274808" y="3977640"/>
-            <a:ext cx="972312" cy="749808"/>
-          </a:xfrm>
-          <a:prstGeom prst="roundRect">
-            <a:avLst>
-              <a:gd name="adj" fmla="val 14634"/>
-            </a:avLst>
-          </a:prstGeom>
-          <a:solidFill>
-            <a:srgbClr val="6A4CA3"/>
-          </a:solidFill>
-          <a:ln w="12700">
-            <a:solidFill>
-              <a:srgbClr val="6A4CA3"/>
-            </a:solidFill>
-            <a:prstDash val="solid"/>
-          </a:ln>
-        </p:spPr>
-      </p:sp>
-      <p:sp>
-        <p:nvSpPr>
-          <p:cNvPr id="18" name="Text 16"/>
-          <p:cNvSpPr/>
-          <p:nvPr/>
-        </p:nvSpPr>
-        <p:spPr>
-          <a:xfrm>
-            <a:off x="10347960" y="4169664"/>
-            <a:ext cx="826008" cy="310896"/>
-          </a:xfrm>
-          <a:prstGeom prst="rect">
-            <a:avLst/>
-          </a:prstGeom>
-          <a:noFill/>
-          <a:ln/>
-        </p:spPr>
-        <p:txBody>
-          <a:bodyPr wrap="square" lIns="0" tIns="0" rIns="0" bIns="0" rtlCol="0" anchor="ctr">
-            <a:normAutofit/>
-          </a:bodyPr>
-          <a:lstStyle/>
-          <a:p>
-            <a:pPr algn="ctr" indent="0" marL="0">
-              <a:buNone/>
-            </a:pPr>
-            <a:r>
-              <a:rPr lang="en-US" sz="1500" b="1" dirty="0">
-                <a:solidFill>
-                  <a:srgbClr val="FFFFFF"/>
-                </a:solidFill>
-                <a:latin typeface="Aptos" pitchFamily="34" charset="0"/>
-                <a:ea typeface="Aptos" pitchFamily="34" charset="-122"/>
-                <a:cs typeface="Aptos" pitchFamily="34" charset="-120"/>
-              </a:rPr>
-              <a:t>Action</a:t>
-            </a:r>
-            <a:endParaRPr lang="en-US" sz="1500" dirty="0"/>
+            <a:r>
+              <a:rPr lang="en-US" sz="1380" dirty="0">
+                <a:solidFill>
+                  <a:srgbClr val="17364A"/>
+                </a:solidFill>
+                <a:latin typeface="Aptos" pitchFamily="34" charset="0"/>
+                <a:ea typeface="Aptos" pitchFamily="34" charset="-122"/>
+                <a:cs typeface="Aptos" pitchFamily="34" charset="-120"/>
+              </a:rPr>
+              <a:t>Locate the decision point in the playbook sequence.</a:t>
+            </a:r>
+            <a:endParaRPr lang="en-US" sz="1380" dirty="0"/>
+          </a:p>
+          <a:p>
+            <a:r>
+              <a:rPr lang="en-US" sz="1380" dirty="0">
+                <a:solidFill>
+                  <a:srgbClr val="17364A"/>
+                </a:solidFill>
+                <a:latin typeface="Aptos" pitchFamily="34" charset="0"/>
+                <a:ea typeface="Aptos" pitchFamily="34" charset="-122"/>
+                <a:cs typeface="Aptos" pitchFamily="34" charset="-120"/>
+              </a:rPr>
+              <a:t>Identify who should participate in the work.</a:t>
+            </a:r>
+            <a:endParaRPr lang="en-US" sz="1380" dirty="0"/>
+          </a:p>
+          <a:p>
+            <a:r>
+              <a:rPr lang="en-US" sz="1380" dirty="0">
+                <a:solidFill>
+                  <a:srgbClr val="17364A"/>
+                </a:solidFill>
+                <a:latin typeface="Aptos" pitchFamily="34" charset="0"/>
+                <a:ea typeface="Aptos" pitchFamily="34" charset="-122"/>
+                <a:cs typeface="Aptos" pitchFamily="34" charset="-120"/>
+              </a:rPr>
+              <a:t>Document the review, approval, or implementation step.</a:t>
+            </a:r>
+            <a:endParaRPr lang="en-US" sz="1380" dirty="0"/>
           </a:p>
         </p:txBody>
       </p:sp>
@@ -15680,20 +15123,20 @@
         </p:nvSpPr>
         <p:spPr>
           <a:xfrm>
-            <a:off x="7818120" y="3977640"/>
-            <a:ext cx="972312" cy="749808"/>
+            <a:off x="8046720" y="3794760"/>
+            <a:ext cx="3063240" cy="1600200"/>
           </a:xfrm>
           <a:prstGeom prst="roundRect">
             <a:avLst>
-              <a:gd name="adj" fmla="val 14634"/>
+              <a:gd name="adj" fmla="val 6857"/>
             </a:avLst>
           </a:prstGeom>
           <a:solidFill>
-            <a:srgbClr val="0068B7"/>
+            <a:srgbClr val="FFFFFF"/>
           </a:solidFill>
           <a:ln w="12700">
             <a:solidFill>
-              <a:srgbClr val="0068B7"/>
+              <a:srgbClr val="B9D7E6"/>
             </a:solidFill>
             <a:prstDash val="solid"/>
           </a:ln>
@@ -15707,172 +15150,100 @@
         </p:nvSpPr>
         <p:spPr>
           <a:xfrm>
-            <a:off x="7891272" y="4169664"/>
-            <a:ext cx="826008" cy="310896"/>
-          </a:xfrm>
-          <a:prstGeom prst="rect">
-            <a:avLst/>
-          </a:prstGeom>
-          <a:noFill/>
-          <a:ln/>
-        </p:spPr>
-        <p:txBody>
-          <a:bodyPr wrap="square" lIns="0" tIns="0" rIns="0" bIns="0" rtlCol="0" anchor="ctr">
+            <a:off x="8211312" y="3941064"/>
+            <a:ext cx="2734056" cy="256032"/>
+          </a:xfrm>
+          <a:prstGeom prst="rect">
+            <a:avLst/>
+          </a:prstGeom>
+          <a:noFill/>
+          <a:ln/>
+        </p:spPr>
+        <p:txBody>
+          <a:bodyPr wrap="square" lIns="0" tIns="0" rIns="0" bIns="0" rtlCol="0" anchor="ctr"/>
+          <a:lstStyle/>
+          <a:p>
+            <a:pPr indent="0" marL="0">
+              <a:buNone/>
+            </a:pPr>
+            <a:r>
+              <a:rPr lang="en-US" sz="1300" b="1" dirty="0">
+                <a:solidFill>
+                  <a:srgbClr val="0068B7"/>
+                </a:solidFill>
+                <a:latin typeface="Aptos" pitchFamily="34" charset="0"/>
+                <a:ea typeface="Aptos" pitchFamily="34" charset="-122"/>
+                <a:cs typeface="Aptos" pitchFamily="34" charset="-120"/>
+              </a:rPr>
+              <a:t>Tool selection cues</a:t>
+            </a:r>
+            <a:endParaRPr lang="en-US" sz="1300" dirty="0"/>
+          </a:p>
+        </p:txBody>
+      </p:sp>
+      <p:sp>
+        <p:nvSpPr>
+          <p:cNvPr id="15" name="Text 13"/>
+          <p:cNvSpPr/>
+          <p:nvPr/>
+        </p:nvSpPr>
+        <p:spPr>
+          <a:xfrm>
+            <a:off x="8229600" y="4306824"/>
+            <a:ext cx="2679192" cy="941832"/>
+          </a:xfrm>
+          <a:prstGeom prst="rect">
+            <a:avLst/>
+          </a:prstGeom>
+          <a:noFill/>
+          <a:ln/>
+        </p:spPr>
+        <p:txBody>
+          <a:bodyPr wrap="square" lIns="254" tIns="254" rIns="254" bIns="254" rtlCol="0" anchor="t">
             <a:normAutofit/>
           </a:bodyPr>
           <a:lstStyle/>
           <a:p>
-            <a:pPr algn="ctr" indent="0" marL="0">
-              <a:buNone/>
-            </a:pPr>
-            <a:r>
-              <a:rPr lang="en-US" sz="1500" b="1" dirty="0">
-                <a:solidFill>
-                  <a:srgbClr val="FFFFFF"/>
-                </a:solidFill>
-                <a:latin typeface="Aptos" pitchFamily="34" charset="0"/>
-                <a:ea typeface="Aptos" pitchFamily="34" charset="-122"/>
-                <a:cs typeface="Aptos" pitchFamily="34" charset="-120"/>
-              </a:rPr>
-              <a:t>Concept</a:t>
-            </a:r>
-            <a:endParaRPr lang="en-US" sz="1500" dirty="0"/>
-          </a:p>
-        </p:txBody>
-      </p:sp>
-      <p:sp>
-        <p:nvSpPr>
-          <p:cNvPr id="15" name="Shape 13"/>
-          <p:cNvSpPr/>
-          <p:nvPr/>
-        </p:nvSpPr>
-        <p:spPr>
-          <a:xfrm>
-            <a:off x="9046464" y="3977640"/>
-            <a:ext cx="972312" cy="749808"/>
-          </a:xfrm>
-          <a:prstGeom prst="roundRect">
-            <a:avLst>
-              <a:gd name="adj" fmla="val 14634"/>
-            </a:avLst>
-          </a:prstGeom>
-          <a:solidFill>
-            <a:srgbClr val="2F8A28"/>
-          </a:solidFill>
-          <a:ln w="12700">
-            <a:solidFill>
-              <a:srgbClr val="2F8A28"/>
-            </a:solidFill>
-            <a:prstDash val="solid"/>
-          </a:ln>
-        </p:spPr>
-      </p:sp>
-      <p:sp>
-        <p:nvSpPr>
-          <p:cNvPr id="16" name="Text 14"/>
-          <p:cNvSpPr/>
-          <p:nvPr/>
-        </p:nvSpPr>
-        <p:spPr>
-          <a:xfrm>
-            <a:off x="9119616" y="4169664"/>
-            <a:ext cx="826008" cy="310896"/>
-          </a:xfrm>
-          <a:prstGeom prst="rect">
-            <a:avLst/>
-          </a:prstGeom>
-          <a:noFill/>
-          <a:ln/>
-        </p:spPr>
-        <p:txBody>
-          <a:bodyPr wrap="square" lIns="0" tIns="0" rIns="0" bIns="0" rtlCol="0" anchor="ctr">
-            <a:normAutofit/>
-          </a:bodyPr>
-          <a:lstStyle/>
-          <a:p>
-            <a:pPr algn="ctr" indent="0" marL="0">
-              <a:buNone/>
-            </a:pPr>
-            <a:r>
-              <a:rPr lang="en-US" sz="1500" b="1" dirty="0">
-                <a:solidFill>
-                  <a:srgbClr val="FFFFFF"/>
-                </a:solidFill>
-                <a:latin typeface="Aptos" pitchFamily="34" charset="0"/>
-                <a:ea typeface="Aptos" pitchFamily="34" charset="-122"/>
-                <a:cs typeface="Aptos" pitchFamily="34" charset="-120"/>
-              </a:rPr>
-              <a:t>Tool</a:t>
-            </a:r>
-            <a:endParaRPr lang="en-US" sz="1500" dirty="0"/>
-          </a:p>
-        </p:txBody>
-      </p:sp>
-      <p:sp>
-        <p:nvSpPr>
-          <p:cNvPr id="17" name="Shape 15"/>
-          <p:cNvSpPr/>
-          <p:nvPr/>
-        </p:nvSpPr>
-        <p:spPr>
-          <a:xfrm>
-            <a:off x="10274808" y="3977640"/>
-            <a:ext cx="972312" cy="749808"/>
-          </a:xfrm>
-          <a:prstGeom prst="roundRect">
-            <a:avLst>
-              <a:gd name="adj" fmla="val 14634"/>
-            </a:avLst>
-          </a:prstGeom>
-          <a:solidFill>
-            <a:srgbClr val="D69A2D"/>
-          </a:solidFill>
-          <a:ln w="12700">
-            <a:solidFill>
-              <a:srgbClr val="D69A2D"/>
-            </a:solidFill>
-            <a:prstDash val="solid"/>
-          </a:ln>
-        </p:spPr>
-      </p:sp>
-      <p:sp>
-        <p:nvSpPr>
-          <p:cNvPr id="18" name="Text 16"/>
-          <p:cNvSpPr/>
-          <p:nvPr/>
-        </p:nvSpPr>
-        <p:spPr>
-          <a:xfrm>
-            <a:off x="10347960" y="4169664"/>
-            <a:ext cx="826008" cy="310896"/>
-          </a:xfrm>
-          <a:prstGeom prst="rect">
-            <a:avLst/>
-          </a:prstGeom>
-          <a:noFill/>
-          <a:ln/>
-        </p:spPr>
-        <p:txBody>
-          <a:bodyPr wrap="square" lIns="0" tIns="0" rIns="0" bIns="0" rtlCol="0" anchor="ctr">
-            <a:normAutofit/>
-          </a:bodyPr>
-          <a:lstStyle/>
-          <a:p>
-            <a:pPr algn="ctr" indent="0" marL="0">
-              <a:buNone/>
-            </a:pPr>
-            <a:r>
-              <a:rPr lang="en-US" sz="1500" b="1" dirty="0">
-                <a:solidFill>
-                  <a:srgbClr val="FFFFFF"/>
-                </a:solidFill>
-                <a:latin typeface="Aptos" pitchFamily="34" charset="0"/>
-                <a:ea typeface="Aptos" pitchFamily="34" charset="-122"/>
-                <a:cs typeface="Aptos" pitchFamily="34" charset="-120"/>
-              </a:rPr>
-              <a:t>Artifact</a:t>
-            </a:r>
-            <a:endParaRPr lang="en-US" sz="1500" dirty="0"/>
+            <a:r>
+              <a:rPr lang="en-US" sz="1380" dirty="0">
+                <a:solidFill>
+                  <a:srgbClr val="17364A"/>
+                </a:solidFill>
+                <a:latin typeface="Aptos" pitchFamily="34" charset="0"/>
+                <a:ea typeface="Aptos" pitchFamily="34" charset="-122"/>
+                <a:cs typeface="Aptos" pitchFamily="34" charset="-120"/>
+              </a:rPr>
+              <a:t>Use a tool when no comparable local process exists.</a:t>
+            </a:r>
+            <a:endParaRPr lang="en-US" sz="1380" dirty="0"/>
+          </a:p>
+          <a:p>
+            <a:r>
+              <a:rPr lang="en-US" sz="1380" dirty="0">
+                <a:solidFill>
+                  <a:srgbClr val="17364A"/>
+                </a:solidFill>
+                <a:latin typeface="Aptos" pitchFamily="34" charset="0"/>
+                <a:ea typeface="Aptos" pitchFamily="34" charset="-122"/>
+                <a:cs typeface="Aptos" pitchFamily="34" charset="-120"/>
+              </a:rPr>
+              <a:t>Adapt existing department templates when they already fit the purpose.</a:t>
+            </a:r>
+            <a:endParaRPr lang="en-US" sz="1380" dirty="0"/>
+          </a:p>
+          <a:p>
+            <a:r>
+              <a:rPr lang="en-US" sz="1380" dirty="0">
+                <a:solidFill>
+                  <a:srgbClr val="17364A"/>
+                </a:solidFill>
+                <a:latin typeface="Aptos" pitchFamily="34" charset="0"/>
+                <a:ea typeface="Aptos" pitchFamily="34" charset="-122"/>
+                <a:cs typeface="Aptos" pitchFamily="34" charset="-120"/>
+              </a:rPr>
+              <a:t>Save the completed artifact as evidence of the decision.</a:t>
+            </a:r>
+            <a:endParaRPr lang="en-US" sz="1380" dirty="0"/>
           </a:p>
         </p:txBody>
       </p:sp>
@@ -16345,13 +15716,11 @@
             </a:avLst>
           </a:prstGeom>
           <a:solidFill>
-            <a:srgbClr val="FFFFFF">
-              <a:alpha val="88000"/>
-            </a:srgbClr>
+            <a:srgbClr val="FFFFFF"/>
           </a:solidFill>
           <a:ln w="12700">
             <a:solidFill>
-              <a:srgbClr val="D6E8F2"/>
+              <a:srgbClr val="B9D7E6"/>
             </a:solidFill>
             <a:prstDash val="solid"/>
           </a:ln>
@@ -16359,26 +15728,42 @@
       </p:sp>
       <p:sp>
         <p:nvSpPr>
-          <p:cNvPr id="14" name="Shape 12"/>
-          <p:cNvSpPr/>
-          <p:nvPr/>
-        </p:nvSpPr>
-        <p:spPr>
-          <a:xfrm>
-            <a:off x="8046720" y="3108960"/>
-            <a:ext cx="2651760" cy="896112"/>
-          </a:xfrm>
-          <a:prstGeom prst="arc">
-            <a:avLst/>
-          </a:prstGeom>
-          <a:noFill/>
-          <a:ln w="25400">
-            <a:solidFill>
-              <a:srgbClr val="0068B7"/>
-            </a:solidFill>
-            <a:prstDash val="solid"/>
-          </a:ln>
-        </p:spPr>
+          <p:cNvPr id="14" name="Text 12"/>
+          <p:cNvSpPr/>
+          <p:nvPr/>
+        </p:nvSpPr>
+        <p:spPr>
+          <a:xfrm>
+            <a:off x="7799832" y="2935224"/>
+            <a:ext cx="3145536" cy="256032"/>
+          </a:xfrm>
+          <a:prstGeom prst="rect">
+            <a:avLst/>
+          </a:prstGeom>
+          <a:noFill/>
+          <a:ln/>
+        </p:spPr>
+        <p:txBody>
+          <a:bodyPr wrap="square" lIns="0" tIns="0" rIns="0" bIns="0" rtlCol="0" anchor="ctr"/>
+          <a:lstStyle/>
+          <a:p>
+            <a:pPr indent="0" marL="0">
+              <a:buNone/>
+            </a:pPr>
+            <a:r>
+              <a:rPr lang="en-US" sz="1300" b="1" dirty="0">
+                <a:solidFill>
+                  <a:srgbClr val="0068B7"/>
+                </a:solidFill>
+                <a:latin typeface="Aptos" pitchFamily="34" charset="0"/>
+                <a:ea typeface="Aptos" pitchFamily="34" charset="-122"/>
+                <a:cs typeface="Aptos" pitchFamily="34" charset="-120"/>
+              </a:rPr>
+              <a:t>Concept checkpoints</a:t>
+            </a:r>
+            <a:endParaRPr lang="en-US" sz="1300" dirty="0"/>
+          </a:p>
+        </p:txBody>
       </p:sp>
       <p:sp>
         <p:nvSpPr>
@@ -16388,102 +15773,67 @@
         </p:nvSpPr>
         <p:spPr>
           <a:xfrm>
-            <a:off x="7909560" y="3099816"/>
-            <a:ext cx="2926080" cy="256032"/>
-          </a:xfrm>
-          <a:prstGeom prst="rect">
-            <a:avLst/>
-          </a:prstGeom>
-          <a:noFill/>
-          <a:ln/>
-        </p:spPr>
-        <p:txBody>
-          <a:bodyPr wrap="square" lIns="0" tIns="0" rIns="0" bIns="0" rtlCol="0" anchor="ctr"/>
-          <a:lstStyle/>
-          <a:p>
-            <a:pPr algn="ctr" indent="0" marL="0">
-              <a:buNone/>
-            </a:pPr>
-            <a:r>
-              <a:rPr lang="en-US" sz="1500" b="1" dirty="0">
-                <a:solidFill>
-                  <a:srgbClr val="003A63"/>
-                </a:solidFill>
-                <a:latin typeface="Aptos" pitchFamily="34" charset="0"/>
-                <a:ea typeface="Aptos" pitchFamily="34" charset="-122"/>
-                <a:cs typeface="Aptos" pitchFamily="34" charset="-120"/>
-              </a:rPr>
-              <a:t>Risk</a:t>
-            </a:r>
-            <a:endParaRPr lang="en-US" sz="1500" dirty="0"/>
+            <a:off x="7818120" y="3300984"/>
+            <a:ext cx="3090672" cy="877824"/>
+          </a:xfrm>
+          <a:prstGeom prst="rect">
+            <a:avLst/>
+          </a:prstGeom>
+          <a:noFill/>
+          <a:ln/>
+        </p:spPr>
+        <p:txBody>
+          <a:bodyPr wrap="square" lIns="254" tIns="254" rIns="254" bIns="254" rtlCol="0" anchor="t">
+            <a:normAutofit/>
+          </a:bodyPr>
+          <a:lstStyle/>
+          <a:p>
+            <a:r>
+              <a:rPr lang="en-US" sz="1380" dirty="0">
+                <a:solidFill>
+                  <a:srgbClr val="17364A"/>
+                </a:solidFill>
+                <a:latin typeface="Aptos" pitchFamily="34" charset="0"/>
+                <a:ea typeface="Aptos" pitchFamily="34" charset="-122"/>
+                <a:cs typeface="Aptos" pitchFamily="34" charset="-120"/>
+              </a:rPr>
+              <a:t>Distinguish between identifiable data, de-identified data, aggregated data, limited.</a:t>
+            </a:r>
+            <a:endParaRPr lang="en-US" sz="1380" dirty="0"/>
+          </a:p>
+          <a:p>
+            <a:r>
+              <a:rPr lang="en-US" sz="1380" dirty="0">
+                <a:solidFill>
+                  <a:srgbClr val="17364A"/>
+                </a:solidFill>
+                <a:latin typeface="Aptos" pitchFamily="34" charset="0"/>
+                <a:ea typeface="Aptos" pitchFamily="34" charset="-122"/>
+                <a:cs typeface="Aptos" pitchFamily="34" charset="-120"/>
+              </a:rPr>
+              <a:t>Identify technical and operational safeguards that reduce privacy risk, including data.</a:t>
+            </a:r>
+            <a:endParaRPr lang="en-US" sz="1380" dirty="0"/>
+          </a:p>
+          <a:p>
+            <a:r>
+              <a:rPr lang="en-US" sz="1380" dirty="0">
+                <a:solidFill>
+                  <a:srgbClr val="17364A"/>
+                </a:solidFill>
+                <a:latin typeface="Aptos" pitchFamily="34" charset="0"/>
+                <a:ea typeface="Aptos" pitchFamily="34" charset="-122"/>
+                <a:cs typeface="Aptos" pitchFamily="34" charset="-120"/>
+              </a:rPr>
+              <a:t>Assess re-identification risk when public health data are linked, enriched, summarized, or.</a:t>
+            </a:r>
+            <a:endParaRPr lang="en-US" sz="1380" dirty="0"/>
           </a:p>
         </p:txBody>
       </p:sp>
       <p:sp>
         <p:nvSpPr>
           <p:cNvPr id="16" name="Shape 14"/>
-          <p:cNvSpPr/>
-          <p:nvPr/>
-        </p:nvSpPr>
-        <p:spPr>
-          <a:xfrm>
-            <a:off x="8366760" y="3639312"/>
-            <a:ext cx="2011680" cy="0"/>
-          </a:xfrm>
-          <a:prstGeom prst="line">
-            <a:avLst/>
-          </a:prstGeom>
-          <a:noFill/>
-          <a:ln w="63500">
-            <a:solidFill>
-              <a:srgbClr val="2F8A28"/>
-            </a:solidFill>
-            <a:prstDash val="solid"/>
-          </a:ln>
-        </p:spPr>
-      </p:sp>
-      <p:sp>
-        <p:nvSpPr>
-          <p:cNvPr id="17" name="Text 15"/>
-          <p:cNvSpPr/>
-          <p:nvPr/>
-        </p:nvSpPr>
-        <p:spPr>
-          <a:xfrm>
-            <a:off x="7909560" y="3849624"/>
-            <a:ext cx="2926080" cy="164592"/>
-          </a:xfrm>
-          <a:prstGeom prst="rect">
-            <a:avLst/>
-          </a:prstGeom>
-          <a:noFill/>
-          <a:ln/>
-        </p:spPr>
-        <p:txBody>
-          <a:bodyPr wrap="square" lIns="0" tIns="0" rIns="0" bIns="0" rtlCol="0" anchor="ctr"/>
-          <a:lstStyle/>
-          <a:p>
-            <a:pPr algn="ctr" indent="0" marL="0">
-              <a:buNone/>
-            </a:pPr>
-            <a:r>
-              <a:rPr lang="en-US" sz="900" dirty="0">
-                <a:solidFill>
-                  <a:srgbClr val="003A63"/>
-                </a:solidFill>
-                <a:latin typeface="Aptos" pitchFamily="34" charset="0"/>
-                <a:ea typeface="Aptos" pitchFamily="34" charset="-122"/>
-                <a:cs typeface="Aptos" pitchFamily="34" charset="-120"/>
-              </a:rPr>
-              <a:t>Human review</a:t>
-            </a:r>
-            <a:endParaRPr lang="en-US" sz="900" dirty="0"/>
-          </a:p>
-        </p:txBody>
-      </p:sp>
-      <p:sp>
-        <p:nvSpPr>
-          <p:cNvPr id="18" name="Shape 16"/>
           <p:cNvSpPr/>
           <p:nvPr/>
         </p:nvSpPr>
@@ -16510,7 +15860,7 @@
       </p:sp>
       <p:sp>
         <p:nvSpPr>
-          <p:cNvPr id="19" name="Text 17"/>
+          <p:cNvPr id="17" name="Text 15"/>
           <p:cNvSpPr/>
           <p:nvPr/>
         </p:nvSpPr>
@@ -16549,7 +15899,7 @@
       </p:sp>
       <p:sp>
         <p:nvSpPr>
-          <p:cNvPr id="20" name="Text 18"/>
+          <p:cNvPr id="18" name="Text 16"/>
           <p:cNvSpPr/>
           <p:nvPr/>
         </p:nvSpPr>
@@ -17029,13 +16379,11 @@
             </a:avLst>
           </a:prstGeom>
           <a:solidFill>
-            <a:srgbClr val="FFFFFF">
-              <a:alpha val="88000"/>
-            </a:srgbClr>
+            <a:srgbClr val="FFFFFF"/>
           </a:solidFill>
           <a:ln w="12700">
             <a:solidFill>
-              <a:srgbClr val="D6E8F2"/>
+              <a:srgbClr val="B9D7E6"/>
             </a:solidFill>
             <a:prstDash val="solid"/>
           </a:ln>
@@ -17043,26 +16391,42 @@
       </p:sp>
       <p:sp>
         <p:nvSpPr>
-          <p:cNvPr id="14" name="Shape 12"/>
-          <p:cNvSpPr/>
-          <p:nvPr/>
-        </p:nvSpPr>
-        <p:spPr>
-          <a:xfrm>
-            <a:off x="8046720" y="3108960"/>
-            <a:ext cx="2651760" cy="896112"/>
-          </a:xfrm>
-          <a:prstGeom prst="arc">
-            <a:avLst/>
-          </a:prstGeom>
-          <a:noFill/>
-          <a:ln w="25400">
-            <a:solidFill>
-              <a:srgbClr val="0068B7"/>
-            </a:solidFill>
-            <a:prstDash val="solid"/>
-          </a:ln>
-        </p:spPr>
+          <p:cNvPr id="14" name="Text 12"/>
+          <p:cNvSpPr/>
+          <p:nvPr/>
+        </p:nvSpPr>
+        <p:spPr>
+          <a:xfrm>
+            <a:off x="7799832" y="2935224"/>
+            <a:ext cx="3145536" cy="256032"/>
+          </a:xfrm>
+          <a:prstGeom prst="rect">
+            <a:avLst/>
+          </a:prstGeom>
+          <a:noFill/>
+          <a:ln/>
+        </p:spPr>
+        <p:txBody>
+          <a:bodyPr wrap="square" lIns="0" tIns="0" rIns="0" bIns="0" rtlCol="0" anchor="ctr"/>
+          <a:lstStyle/>
+          <a:p>
+            <a:pPr indent="0" marL="0">
+              <a:buNone/>
+            </a:pPr>
+            <a:r>
+              <a:rPr lang="en-US" sz="1300" b="1" dirty="0">
+                <a:solidFill>
+                  <a:srgbClr val="0068B7"/>
+                </a:solidFill>
+                <a:latin typeface="Aptos" pitchFamily="34" charset="0"/>
+                <a:ea typeface="Aptos" pitchFamily="34" charset="-122"/>
+                <a:cs typeface="Aptos" pitchFamily="34" charset="-120"/>
+              </a:rPr>
+              <a:t>Concept checkpoints</a:t>
+            </a:r>
+            <a:endParaRPr lang="en-US" sz="1300" dirty="0"/>
+          </a:p>
+        </p:txBody>
       </p:sp>
       <p:sp>
         <p:nvSpPr>
@@ -17072,102 +16436,39 @@
         </p:nvSpPr>
         <p:spPr>
           <a:xfrm>
-            <a:off x="7909560" y="3099816"/>
-            <a:ext cx="2926080" cy="256032"/>
-          </a:xfrm>
-          <a:prstGeom prst="rect">
-            <a:avLst/>
-          </a:prstGeom>
-          <a:noFill/>
-          <a:ln/>
-        </p:spPr>
-        <p:txBody>
-          <a:bodyPr wrap="square" lIns="0" tIns="0" rIns="0" bIns="0" rtlCol="0" anchor="ctr"/>
-          <a:lstStyle/>
-          <a:p>
-            <a:pPr algn="ctr" indent="0" marL="0">
-              <a:buNone/>
-            </a:pPr>
-            <a:r>
-              <a:rPr lang="en-US" sz="1500" b="1" dirty="0">
-                <a:solidFill>
-                  <a:srgbClr val="003A63"/>
-                </a:solidFill>
-                <a:latin typeface="Aptos" pitchFamily="34" charset="0"/>
-                <a:ea typeface="Aptos" pitchFamily="34" charset="-122"/>
-                <a:cs typeface="Aptos" pitchFamily="34" charset="-120"/>
-              </a:rPr>
-              <a:t>Risk</a:t>
-            </a:r>
-            <a:endParaRPr lang="en-US" sz="1500" dirty="0"/>
+            <a:off x="7818120" y="3300984"/>
+            <a:ext cx="3090672" cy="877824"/>
+          </a:xfrm>
+          <a:prstGeom prst="rect">
+            <a:avLst/>
+          </a:prstGeom>
+          <a:noFill/>
+          <a:ln/>
+        </p:spPr>
+        <p:txBody>
+          <a:bodyPr wrap="square" lIns="254" tIns="254" rIns="254" bIns="254" rtlCol="0" anchor="t">
+            <a:normAutofit/>
+          </a:bodyPr>
+          <a:lstStyle/>
+          <a:p>
+            <a:r>
+              <a:rPr lang="en-US" sz="1380" dirty="0">
+                <a:solidFill>
+                  <a:srgbClr val="17364A"/>
+                </a:solidFill>
+                <a:latin typeface="Aptos" pitchFamily="34" charset="0"/>
+                <a:ea typeface="Aptos" pitchFamily="34" charset="-122"/>
+                <a:cs typeface="Aptos" pitchFamily="34" charset="-120"/>
+              </a:rPr>
+              <a:t>Produce a privacy-preserving AI review worksheet for a real or realistic public health.</a:t>
+            </a:r>
+            <a:endParaRPr lang="en-US" sz="1380" dirty="0"/>
           </a:p>
         </p:txBody>
       </p:sp>
       <p:sp>
         <p:nvSpPr>
           <p:cNvPr id="16" name="Shape 14"/>
-          <p:cNvSpPr/>
-          <p:nvPr/>
-        </p:nvSpPr>
-        <p:spPr>
-          <a:xfrm>
-            <a:off x="8366760" y="3639312"/>
-            <a:ext cx="2011680" cy="0"/>
-          </a:xfrm>
-          <a:prstGeom prst="line">
-            <a:avLst/>
-          </a:prstGeom>
-          <a:noFill/>
-          <a:ln w="63500">
-            <a:solidFill>
-              <a:srgbClr val="2F8A28"/>
-            </a:solidFill>
-            <a:prstDash val="solid"/>
-          </a:ln>
-        </p:spPr>
-      </p:sp>
-      <p:sp>
-        <p:nvSpPr>
-          <p:cNvPr id="17" name="Text 15"/>
-          <p:cNvSpPr/>
-          <p:nvPr/>
-        </p:nvSpPr>
-        <p:spPr>
-          <a:xfrm>
-            <a:off x="7909560" y="3849624"/>
-            <a:ext cx="2926080" cy="164592"/>
-          </a:xfrm>
-          <a:prstGeom prst="rect">
-            <a:avLst/>
-          </a:prstGeom>
-          <a:noFill/>
-          <a:ln/>
-        </p:spPr>
-        <p:txBody>
-          <a:bodyPr wrap="square" lIns="0" tIns="0" rIns="0" bIns="0" rtlCol="0" anchor="ctr"/>
-          <a:lstStyle/>
-          <a:p>
-            <a:pPr algn="ctr" indent="0" marL="0">
-              <a:buNone/>
-            </a:pPr>
-            <a:r>
-              <a:rPr lang="en-US" sz="900" dirty="0">
-                <a:solidFill>
-                  <a:srgbClr val="003A63"/>
-                </a:solidFill>
-                <a:latin typeface="Aptos" pitchFamily="34" charset="0"/>
-                <a:ea typeface="Aptos" pitchFamily="34" charset="-122"/>
-                <a:cs typeface="Aptos" pitchFamily="34" charset="-120"/>
-              </a:rPr>
-              <a:t>Human review</a:t>
-            </a:r>
-            <a:endParaRPr lang="en-US" sz="900" dirty="0"/>
-          </a:p>
-        </p:txBody>
-      </p:sp>
-      <p:sp>
-        <p:nvSpPr>
-          <p:cNvPr id="18" name="Shape 16"/>
           <p:cNvSpPr/>
           <p:nvPr/>
         </p:nvSpPr>
@@ -17194,7 +16495,7 @@
       </p:sp>
       <p:sp>
         <p:nvSpPr>
-          <p:cNvPr id="19" name="Text 17"/>
+          <p:cNvPr id="17" name="Text 15"/>
           <p:cNvSpPr/>
           <p:nvPr/>
         </p:nvSpPr>
@@ -17233,7 +16534,7 @@
       </p:sp>
       <p:sp>
         <p:nvSpPr>
-          <p:cNvPr id="20" name="Text 18"/>
+          <p:cNvPr id="18" name="Text 16"/>
           <p:cNvSpPr/>
           <p:nvPr/>
         </p:nvSpPr>
@@ -17741,13 +17042,11 @@
             </a:avLst>
           </a:prstGeom>
           <a:solidFill>
-            <a:srgbClr val="FFFFFF">
-              <a:alpha val="88000"/>
-            </a:srgbClr>
+            <a:srgbClr val="FFFFFF"/>
           </a:solidFill>
           <a:ln w="12700">
             <a:solidFill>
-              <a:srgbClr val="D6E8F2"/>
+              <a:srgbClr val="B9D7E6"/>
             </a:solidFill>
             <a:prstDash val="solid"/>
           </a:ln>
@@ -17755,26 +17054,42 @@
       </p:sp>
       <p:sp>
         <p:nvSpPr>
-          <p:cNvPr id="14" name="Shape 12"/>
-          <p:cNvSpPr/>
-          <p:nvPr/>
-        </p:nvSpPr>
-        <p:spPr>
-          <a:xfrm>
-            <a:off x="8046720" y="3108960"/>
-            <a:ext cx="2651760" cy="896112"/>
-          </a:xfrm>
-          <a:prstGeom prst="arc">
-            <a:avLst/>
-          </a:prstGeom>
-          <a:noFill/>
-          <a:ln w="25400">
-            <a:solidFill>
-              <a:srgbClr val="0068B7"/>
-            </a:solidFill>
-            <a:prstDash val="solid"/>
-          </a:ln>
-        </p:spPr>
+          <p:cNvPr id="14" name="Text 12"/>
+          <p:cNvSpPr/>
+          <p:nvPr/>
+        </p:nvSpPr>
+        <p:spPr>
+          <a:xfrm>
+            <a:off x="7799832" y="2935224"/>
+            <a:ext cx="3145536" cy="256032"/>
+          </a:xfrm>
+          <a:prstGeom prst="rect">
+            <a:avLst/>
+          </a:prstGeom>
+          <a:noFill/>
+          <a:ln/>
+        </p:spPr>
+        <p:txBody>
+          <a:bodyPr wrap="square" lIns="0" tIns="0" rIns="0" bIns="0" rtlCol="0" anchor="ctr"/>
+          <a:lstStyle/>
+          <a:p>
+            <a:pPr indent="0" marL="0">
+              <a:buNone/>
+            </a:pPr>
+            <a:r>
+              <a:rPr lang="en-US" sz="1300" b="1" dirty="0">
+                <a:solidFill>
+                  <a:srgbClr val="0068B7"/>
+                </a:solidFill>
+                <a:latin typeface="Aptos" pitchFamily="34" charset="0"/>
+                <a:ea typeface="Aptos" pitchFamily="34" charset="-122"/>
+                <a:cs typeface="Aptos" pitchFamily="34" charset="-120"/>
+              </a:rPr>
+              <a:t>Concept checkpoints</a:t>
+            </a:r>
+            <a:endParaRPr lang="en-US" sz="1300" dirty="0"/>
+          </a:p>
+        </p:txBody>
       </p:sp>
       <p:sp>
         <p:nvSpPr>
@@ -17784,102 +17099,67 @@
         </p:nvSpPr>
         <p:spPr>
           <a:xfrm>
-            <a:off x="7909560" y="3099816"/>
-            <a:ext cx="2926080" cy="256032"/>
-          </a:xfrm>
-          <a:prstGeom prst="rect">
-            <a:avLst/>
-          </a:prstGeom>
-          <a:noFill/>
-          <a:ln/>
-        </p:spPr>
-        <p:txBody>
-          <a:bodyPr wrap="square" lIns="0" tIns="0" rIns="0" bIns="0" rtlCol="0" anchor="ctr"/>
-          <a:lstStyle/>
-          <a:p>
-            <a:pPr algn="ctr" indent="0" marL="0">
-              <a:buNone/>
-            </a:pPr>
-            <a:r>
-              <a:rPr lang="en-US" sz="1500" b="1" dirty="0">
-                <a:solidFill>
-                  <a:srgbClr val="003A63"/>
-                </a:solidFill>
-                <a:latin typeface="Aptos" pitchFamily="34" charset="0"/>
-                <a:ea typeface="Aptos" pitchFamily="34" charset="-122"/>
-                <a:cs typeface="Aptos" pitchFamily="34" charset="-120"/>
-              </a:rPr>
-              <a:t>Risk</a:t>
-            </a:r>
-            <a:endParaRPr lang="en-US" sz="1500" dirty="0"/>
+            <a:off x="7818120" y="3300984"/>
+            <a:ext cx="3090672" cy="877824"/>
+          </a:xfrm>
+          <a:prstGeom prst="rect">
+            <a:avLst/>
+          </a:prstGeom>
+          <a:noFill/>
+          <a:ln/>
+        </p:spPr>
+        <p:txBody>
+          <a:bodyPr wrap="square" lIns="254" tIns="254" rIns="254" bIns="254" rtlCol="0" anchor="t">
+            <a:normAutofit/>
+          </a:bodyPr>
+          <a:lstStyle/>
+          <a:p>
+            <a:r>
+              <a:rPr lang="en-US" sz="1380" dirty="0">
+                <a:solidFill>
+                  <a:srgbClr val="17364A"/>
+                </a:solidFill>
+                <a:latin typeface="Aptos" pitchFamily="34" charset="0"/>
+                <a:ea typeface="Aptos" pitchFamily="34" charset="-122"/>
+                <a:cs typeface="Aptos" pitchFamily="34" charset="-120"/>
+              </a:rPr>
+              <a:t>Privacy-preserving AI is the set of technical, policy, and workflow practices that allow.</a:t>
+            </a:r>
+            <a:endParaRPr lang="en-US" sz="1380" dirty="0"/>
+          </a:p>
+          <a:p>
+            <a:r>
+              <a:rPr lang="en-US" sz="1380" dirty="0">
+                <a:solidFill>
+                  <a:srgbClr val="17364A"/>
+                </a:solidFill>
+                <a:latin typeface="Aptos" pitchFamily="34" charset="0"/>
+                <a:ea typeface="Aptos" pitchFamily="34" charset="-122"/>
+                <a:cs typeface="Aptos" pitchFamily="34" charset="-120"/>
+              </a:rPr>
+              <a:t>This module focuses on how privacy protections must be built into AI planning before data.</a:t>
+            </a:r>
+            <a:endParaRPr lang="en-US" sz="1380" dirty="0"/>
+          </a:p>
+          <a:p>
+            <a:r>
+              <a:rPr lang="en-US" sz="1380" dirty="0">
+                <a:solidFill>
+                  <a:srgbClr val="17364A"/>
+                </a:solidFill>
+                <a:latin typeface="Aptos" pitchFamily="34" charset="0"/>
+                <a:ea typeface="Aptos" pitchFamily="34" charset="-122"/>
+                <a:cs typeface="Aptos" pitchFamily="34" charset="-120"/>
+              </a:rPr>
+              <a:t>Public health agencies often have legal authority to collect and use sensitive data, but.</a:t>
+            </a:r>
+            <a:endParaRPr lang="en-US" sz="1380" dirty="0"/>
           </a:p>
         </p:txBody>
       </p:sp>
       <p:sp>
         <p:nvSpPr>
           <p:cNvPr id="16" name="Shape 14"/>
-          <p:cNvSpPr/>
-          <p:nvPr/>
-        </p:nvSpPr>
-        <p:spPr>
-          <a:xfrm>
-            <a:off x="8366760" y="3639312"/>
-            <a:ext cx="2011680" cy="0"/>
-          </a:xfrm>
-          <a:prstGeom prst="line">
-            <a:avLst/>
-          </a:prstGeom>
-          <a:noFill/>
-          <a:ln w="63500">
-            <a:solidFill>
-              <a:srgbClr val="2F8A28"/>
-            </a:solidFill>
-            <a:prstDash val="solid"/>
-          </a:ln>
-        </p:spPr>
-      </p:sp>
-      <p:sp>
-        <p:nvSpPr>
-          <p:cNvPr id="17" name="Text 15"/>
-          <p:cNvSpPr/>
-          <p:nvPr/>
-        </p:nvSpPr>
-        <p:spPr>
-          <a:xfrm>
-            <a:off x="7909560" y="3849624"/>
-            <a:ext cx="2926080" cy="164592"/>
-          </a:xfrm>
-          <a:prstGeom prst="rect">
-            <a:avLst/>
-          </a:prstGeom>
-          <a:noFill/>
-          <a:ln/>
-        </p:spPr>
-        <p:txBody>
-          <a:bodyPr wrap="square" lIns="0" tIns="0" rIns="0" bIns="0" rtlCol="0" anchor="ctr"/>
-          <a:lstStyle/>
-          <a:p>
-            <a:pPr algn="ctr" indent="0" marL="0">
-              <a:buNone/>
-            </a:pPr>
-            <a:r>
-              <a:rPr lang="en-US" sz="900" dirty="0">
-                <a:solidFill>
-                  <a:srgbClr val="003A63"/>
-                </a:solidFill>
-                <a:latin typeface="Aptos" pitchFamily="34" charset="0"/>
-                <a:ea typeface="Aptos" pitchFamily="34" charset="-122"/>
-                <a:cs typeface="Aptos" pitchFamily="34" charset="-120"/>
-              </a:rPr>
-              <a:t>Human review</a:t>
-            </a:r>
-            <a:endParaRPr lang="en-US" sz="900" dirty="0"/>
-          </a:p>
-        </p:txBody>
-      </p:sp>
-      <p:sp>
-        <p:nvSpPr>
-          <p:cNvPr id="18" name="Shape 16"/>
           <p:cNvSpPr/>
           <p:nvPr/>
         </p:nvSpPr>
@@ -17906,7 +17186,7 @@
       </p:sp>
       <p:sp>
         <p:nvSpPr>
-          <p:cNvPr id="19" name="Text 17"/>
+          <p:cNvPr id="17" name="Text 15"/>
           <p:cNvSpPr/>
           <p:nvPr/>
         </p:nvSpPr>
@@ -17945,7 +17225,7 @@
       </p:sp>
       <p:sp>
         <p:nvSpPr>
-          <p:cNvPr id="20" name="Text 18"/>
+          <p:cNvPr id="18" name="Text 16"/>
           <p:cNvSpPr/>
           <p:nvPr/>
         </p:nvSpPr>
@@ -18453,13 +17733,11 @@
             </a:avLst>
           </a:prstGeom>
           <a:solidFill>
-            <a:srgbClr val="FFFFFF">
-              <a:alpha val="88000"/>
-            </a:srgbClr>
+            <a:srgbClr val="FFFFFF"/>
           </a:solidFill>
           <a:ln w="12700">
             <a:solidFill>
-              <a:srgbClr val="D6E8F2"/>
+              <a:srgbClr val="B9D7E6"/>
             </a:solidFill>
             <a:prstDash val="solid"/>
           </a:ln>
@@ -18467,190 +17745,112 @@
       </p:sp>
       <p:sp>
         <p:nvSpPr>
-          <p:cNvPr id="14" name="Shape 12"/>
-          <p:cNvSpPr/>
-          <p:nvPr/>
-        </p:nvSpPr>
-        <p:spPr>
-          <a:xfrm>
-            <a:off x="7891272" y="3108960"/>
-            <a:ext cx="566928" cy="566928"/>
-          </a:xfrm>
-          <a:prstGeom prst="ellipse">
-            <a:avLst/>
-          </a:prstGeom>
-          <a:solidFill>
-            <a:srgbClr val="0068B7"/>
-          </a:solidFill>
-          <a:ln w="12700">
-            <a:solidFill>
-              <a:srgbClr val="0068B7"/>
-            </a:solidFill>
-            <a:prstDash val="solid"/>
-          </a:ln>
-        </p:spPr>
-      </p:sp>
-      <p:sp>
-        <p:nvSpPr>
-          <p:cNvPr id="15" name="Shape 13"/>
-          <p:cNvSpPr/>
-          <p:nvPr/>
-        </p:nvSpPr>
-        <p:spPr>
-          <a:xfrm>
-            <a:off x="10287000" y="3108960"/>
-            <a:ext cx="566928" cy="566928"/>
-          </a:xfrm>
-          <a:prstGeom prst="ellipse">
-            <a:avLst/>
-          </a:prstGeom>
-          <a:solidFill>
-            <a:srgbClr val="2F8A28"/>
-          </a:solidFill>
-          <a:ln w="12700">
-            <a:solidFill>
-              <a:srgbClr val="2F8A28"/>
-            </a:solidFill>
-            <a:prstDash val="solid"/>
-          </a:ln>
-        </p:spPr>
+          <p:cNvPr id="14" name="Text 12"/>
+          <p:cNvSpPr/>
+          <p:nvPr/>
+        </p:nvSpPr>
+        <p:spPr>
+          <a:xfrm>
+            <a:off x="7799832" y="2935224"/>
+            <a:ext cx="3145536" cy="256032"/>
+          </a:xfrm>
+          <a:prstGeom prst="rect">
+            <a:avLst/>
+          </a:prstGeom>
+          <a:noFill/>
+          <a:ln/>
+        </p:spPr>
+        <p:txBody>
+          <a:bodyPr wrap="square" lIns="0" tIns="0" rIns="0" bIns="0" rtlCol="0" anchor="ctr"/>
+          <a:lstStyle/>
+          <a:p>
+            <a:pPr indent="0" marL="0">
+              <a:buNone/>
+            </a:pPr>
+            <a:r>
+              <a:rPr lang="en-US" sz="1300" b="1" dirty="0">
+                <a:solidFill>
+                  <a:srgbClr val="0068B7"/>
+                </a:solidFill>
+                <a:latin typeface="Aptos" pitchFamily="34" charset="0"/>
+                <a:ea typeface="Aptos" pitchFamily="34" charset="-122"/>
+                <a:cs typeface="Aptos" pitchFamily="34" charset="-120"/>
+              </a:rPr>
+              <a:t>Concept checkpoints</a:t>
+            </a:r>
+            <a:endParaRPr lang="en-US" sz="1300" dirty="0"/>
+          </a:p>
+        </p:txBody>
+      </p:sp>
+      <p:sp>
+        <p:nvSpPr>
+          <p:cNvPr id="15" name="Text 13"/>
+          <p:cNvSpPr/>
+          <p:nvPr/>
+        </p:nvSpPr>
+        <p:spPr>
+          <a:xfrm>
+            <a:off x="7818120" y="3300984"/>
+            <a:ext cx="3090672" cy="877824"/>
+          </a:xfrm>
+          <a:prstGeom prst="rect">
+            <a:avLst/>
+          </a:prstGeom>
+          <a:noFill/>
+          <a:ln/>
+        </p:spPr>
+        <p:txBody>
+          <a:bodyPr wrap="square" lIns="254" tIns="254" rIns="254" bIns="254" rtlCol="0" anchor="t">
+            <a:normAutofit/>
+          </a:bodyPr>
+          <a:lstStyle/>
+          <a:p>
+            <a:r>
+              <a:rPr lang="en-US" sz="1380" dirty="0">
+                <a:solidFill>
+                  <a:srgbClr val="17364A"/>
+                </a:solidFill>
+                <a:latin typeface="Aptos" pitchFamily="34" charset="0"/>
+                <a:ea typeface="Aptos" pitchFamily="34" charset="-122"/>
+                <a:cs typeface="Aptos" pitchFamily="34" charset="-120"/>
+              </a:rPr>
+              <a:t>It is not legal advice and does not replace review by agency legal counsel, privacy.</a:t>
+            </a:r>
+            <a:endParaRPr lang="en-US" sz="1380" dirty="0"/>
+          </a:p>
+          <a:p>
+            <a:r>
+              <a:rPr lang="en-US" sz="1380" dirty="0">
+                <a:solidFill>
+                  <a:srgbClr val="17364A"/>
+                </a:solidFill>
+                <a:latin typeface="Aptos" pitchFamily="34" charset="0"/>
+                <a:ea typeface="Aptos" pitchFamily="34" charset="-122"/>
+                <a:cs typeface="Aptos" pitchFamily="34" charset="-120"/>
+              </a:rPr>
+              <a:t>Requirements may vary by state, locality, territory, Tribe, agency, funding source,.</a:t>
+            </a:r>
+            <a:endParaRPr lang="en-US" sz="1380" dirty="0"/>
+          </a:p>
+          <a:p>
+            <a:r>
+              <a:rPr lang="en-US" sz="1380" dirty="0">
+                <a:solidFill>
+                  <a:srgbClr val="17364A"/>
+                </a:solidFill>
+                <a:latin typeface="Aptos" pitchFamily="34" charset="0"/>
+                <a:ea typeface="Aptos" pitchFamily="34" charset="-122"/>
+                <a:cs typeface="Aptos" pitchFamily="34" charset="-120"/>
+              </a:rPr>
+              <a:t>Learners should use this module to identify the issues that require review and should.</a:t>
+            </a:r>
+            <a:endParaRPr lang="en-US" sz="1380" dirty="0"/>
+          </a:p>
+        </p:txBody>
       </p:sp>
       <p:sp>
         <p:nvSpPr>
           <p:cNvPr id="16" name="Shape 14"/>
-          <p:cNvSpPr/>
-          <p:nvPr/>
-        </p:nvSpPr>
-        <p:spPr>
-          <a:xfrm>
-            <a:off x="9089136" y="3456432"/>
-            <a:ext cx="566928" cy="566928"/>
-          </a:xfrm>
-          <a:prstGeom prst="ellipse">
-            <a:avLst/>
-          </a:prstGeom>
-          <a:solidFill>
-            <a:srgbClr val="6A4CA3"/>
-          </a:solidFill>
-          <a:ln w="12700">
-            <a:solidFill>
-              <a:srgbClr val="6A4CA3"/>
-            </a:solidFill>
-            <a:prstDash val="solid"/>
-          </a:ln>
-        </p:spPr>
-      </p:sp>
-      <p:sp>
-        <p:nvSpPr>
-          <p:cNvPr id="17" name="Shape 15"/>
-          <p:cNvSpPr/>
-          <p:nvPr/>
-        </p:nvSpPr>
-        <p:spPr>
-          <a:xfrm>
-            <a:off x="8385048" y="3419856"/>
-            <a:ext cx="1975104" cy="0"/>
-          </a:xfrm>
-          <a:prstGeom prst="line">
-            <a:avLst/>
-          </a:prstGeom>
-          <a:noFill/>
-          <a:ln w="25400">
-            <a:solidFill>
-              <a:srgbClr val="8ABBD8"/>
-            </a:solidFill>
-            <a:prstDash val="solid"/>
-          </a:ln>
-        </p:spPr>
-      </p:sp>
-      <p:sp>
-        <p:nvSpPr>
-          <p:cNvPr id="18" name="Shape 16"/>
-          <p:cNvSpPr/>
-          <p:nvPr/>
-        </p:nvSpPr>
-        <p:spPr>
-          <a:xfrm>
-            <a:off x="8202168" y="3630168"/>
-            <a:ext cx="1170432" cy="118872"/>
-          </a:xfrm>
-          <a:prstGeom prst="line">
-            <a:avLst/>
-          </a:prstGeom>
-          <a:noFill/>
-          <a:ln w="25400">
-            <a:solidFill>
-              <a:srgbClr val="8ABBD8"/>
-            </a:solidFill>
-            <a:prstDash val="solid"/>
-          </a:ln>
-        </p:spPr>
-      </p:sp>
-      <p:sp>
-        <p:nvSpPr>
-          <p:cNvPr id="19" name="Shape 17"/>
-          <p:cNvSpPr/>
-          <p:nvPr/>
-        </p:nvSpPr>
-        <p:spPr>
-          <a:xfrm>
-            <a:off x="10543032" y="3630168"/>
-            <a:ext cx="-1170432" cy="118872"/>
-          </a:xfrm>
-          <a:prstGeom prst="line">
-            <a:avLst/>
-          </a:prstGeom>
-          <a:noFill/>
-          <a:ln w="25400">
-            <a:solidFill>
-              <a:srgbClr val="8ABBD8"/>
-            </a:solidFill>
-            <a:prstDash val="solid"/>
-          </a:ln>
-        </p:spPr>
-      </p:sp>
-      <p:sp>
-        <p:nvSpPr>
-          <p:cNvPr id="20" name="Text 18"/>
-          <p:cNvSpPr/>
-          <p:nvPr/>
-        </p:nvSpPr>
-        <p:spPr>
-          <a:xfrm>
-            <a:off x="7863840" y="4069080"/>
-            <a:ext cx="3017520" cy="164592"/>
-          </a:xfrm>
-          <a:prstGeom prst="rect">
-            <a:avLst/>
-          </a:prstGeom>
-          <a:noFill/>
-          <a:ln/>
-        </p:spPr>
-        <p:txBody>
-          <a:bodyPr wrap="square" lIns="0" tIns="0" rIns="0" bIns="0" rtlCol="0" anchor="ctr"/>
-          <a:lstStyle/>
-          <a:p>
-            <a:pPr algn="ctr" indent="0" marL="0">
-              <a:buNone/>
-            </a:pPr>
-            <a:r>
-              <a:rPr lang="en-US" sz="900" b="1" dirty="0">
-                <a:solidFill>
-                  <a:srgbClr val="003A63"/>
-                </a:solidFill>
-                <a:latin typeface="Aptos" pitchFamily="34" charset="0"/>
-                <a:ea typeface="Aptos" pitchFamily="34" charset="-122"/>
-                <a:cs typeface="Aptos" pitchFamily="34" charset="-120"/>
-              </a:rPr>
-              <a:t>Decision rights</a:t>
-            </a:r>
-            <a:endParaRPr lang="en-US" sz="900" dirty="0"/>
-          </a:p>
-        </p:txBody>
-      </p:sp>
-      <p:sp>
-        <p:nvSpPr>
-          <p:cNvPr id="21" name="Shape 19"/>
           <p:cNvSpPr/>
           <p:nvPr/>
         </p:nvSpPr>
@@ -18677,7 +17877,7 @@
       </p:sp>
       <p:sp>
         <p:nvSpPr>
-          <p:cNvPr id="22" name="Text 20"/>
+          <p:cNvPr id="17" name="Text 15"/>
           <p:cNvSpPr/>
           <p:nvPr/>
         </p:nvSpPr>
@@ -18716,7 +17916,7 @@
       </p:sp>
       <p:sp>
         <p:nvSpPr>
-          <p:cNvPr id="23" name="Text 21"/>
+          <p:cNvPr id="18" name="Text 16"/>
           <p:cNvSpPr/>
           <p:nvPr/>
         </p:nvSpPr>
@@ -19224,13 +18424,11 @@
             </a:avLst>
           </a:prstGeom>
           <a:solidFill>
-            <a:srgbClr val="FFFFFF">
-              <a:alpha val="88000"/>
-            </a:srgbClr>
+            <a:srgbClr val="FFFFFF"/>
           </a:solidFill>
           <a:ln w="12700">
             <a:solidFill>
-              <a:srgbClr val="D6E8F2"/>
+              <a:srgbClr val="B9D7E6"/>
             </a:solidFill>
             <a:prstDash val="solid"/>
           </a:ln>
@@ -19238,26 +18436,42 @@
       </p:sp>
       <p:sp>
         <p:nvSpPr>
-          <p:cNvPr id="14" name="Shape 12"/>
-          <p:cNvSpPr/>
-          <p:nvPr/>
-        </p:nvSpPr>
-        <p:spPr>
-          <a:xfrm>
-            <a:off x="8046720" y="3108960"/>
-            <a:ext cx="2651760" cy="896112"/>
-          </a:xfrm>
-          <a:prstGeom prst="arc">
-            <a:avLst/>
-          </a:prstGeom>
-          <a:noFill/>
-          <a:ln w="25400">
-            <a:solidFill>
-              <a:srgbClr val="0068B7"/>
-            </a:solidFill>
-            <a:prstDash val="solid"/>
-          </a:ln>
-        </p:spPr>
+          <p:cNvPr id="14" name="Text 12"/>
+          <p:cNvSpPr/>
+          <p:nvPr/>
+        </p:nvSpPr>
+        <p:spPr>
+          <a:xfrm>
+            <a:off x="7799832" y="2935224"/>
+            <a:ext cx="3145536" cy="256032"/>
+          </a:xfrm>
+          <a:prstGeom prst="rect">
+            <a:avLst/>
+          </a:prstGeom>
+          <a:noFill/>
+          <a:ln/>
+        </p:spPr>
+        <p:txBody>
+          <a:bodyPr wrap="square" lIns="0" tIns="0" rIns="0" bIns="0" rtlCol="0" anchor="ctr"/>
+          <a:lstStyle/>
+          <a:p>
+            <a:pPr indent="0" marL="0">
+              <a:buNone/>
+            </a:pPr>
+            <a:r>
+              <a:rPr lang="en-US" sz="1300" b="1" dirty="0">
+                <a:solidFill>
+                  <a:srgbClr val="0068B7"/>
+                </a:solidFill>
+                <a:latin typeface="Aptos" pitchFamily="34" charset="0"/>
+                <a:ea typeface="Aptos" pitchFamily="34" charset="-122"/>
+                <a:cs typeface="Aptos" pitchFamily="34" charset="-120"/>
+              </a:rPr>
+              <a:t>Concept checkpoints</a:t>
+            </a:r>
+            <a:endParaRPr lang="en-US" sz="1300" dirty="0"/>
+          </a:p>
+        </p:txBody>
       </p:sp>
       <p:sp>
         <p:nvSpPr>
@@ -19267,102 +18481,67 @@
         </p:nvSpPr>
         <p:spPr>
           <a:xfrm>
-            <a:off x="7909560" y="3099816"/>
-            <a:ext cx="2926080" cy="256032"/>
-          </a:xfrm>
-          <a:prstGeom prst="rect">
-            <a:avLst/>
-          </a:prstGeom>
-          <a:noFill/>
-          <a:ln/>
-        </p:spPr>
-        <p:txBody>
-          <a:bodyPr wrap="square" lIns="0" tIns="0" rIns="0" bIns="0" rtlCol="0" anchor="ctr"/>
-          <a:lstStyle/>
-          <a:p>
-            <a:pPr algn="ctr" indent="0" marL="0">
-              <a:buNone/>
-            </a:pPr>
-            <a:r>
-              <a:rPr lang="en-US" sz="1500" b="1" dirty="0">
-                <a:solidFill>
-                  <a:srgbClr val="003A63"/>
-                </a:solidFill>
-                <a:latin typeface="Aptos" pitchFamily="34" charset="0"/>
-                <a:ea typeface="Aptos" pitchFamily="34" charset="-122"/>
-                <a:cs typeface="Aptos" pitchFamily="34" charset="-120"/>
-              </a:rPr>
-              <a:t>Risk</a:t>
-            </a:r>
-            <a:endParaRPr lang="en-US" sz="1500" dirty="0"/>
+            <a:off x="7818120" y="3300984"/>
+            <a:ext cx="3090672" cy="877824"/>
+          </a:xfrm>
+          <a:prstGeom prst="rect">
+            <a:avLst/>
+          </a:prstGeom>
+          <a:noFill/>
+          <a:ln/>
+        </p:spPr>
+        <p:txBody>
+          <a:bodyPr wrap="square" lIns="254" tIns="254" rIns="254" bIns="254" rtlCol="0" anchor="t">
+            <a:normAutofit/>
+          </a:bodyPr>
+          <a:lstStyle/>
+          <a:p>
+            <a:r>
+              <a:rPr lang="en-US" sz="1380" dirty="0">
+                <a:solidFill>
+                  <a:srgbClr val="17364A"/>
+                </a:solidFill>
+                <a:latin typeface="Aptos" pitchFamily="34" charset="0"/>
+                <a:ea typeface="Aptos" pitchFamily="34" charset="-122"/>
+                <a:cs typeface="Aptos" pitchFamily="34" charset="-120"/>
+              </a:rPr>
+              <a:t>AI can change the privacy risk profile of a public health dataset even when the source.</a:t>
+            </a:r>
+            <a:endParaRPr lang="en-US" sz="1380" dirty="0"/>
+          </a:p>
+          <a:p>
+            <a:r>
+              <a:rPr lang="en-US" sz="1380" dirty="0">
+                <a:solidFill>
+                  <a:srgbClr val="17364A"/>
+                </a:solidFill>
+                <a:latin typeface="Aptos" pitchFamily="34" charset="0"/>
+                <a:ea typeface="Aptos" pitchFamily="34" charset="-122"/>
+                <a:cs typeface="Aptos" pitchFamily="34" charset="-120"/>
+              </a:rPr>
+              <a:t>A dataset that seems low risk in one context may become more sensitive when linked to.</a:t>
+            </a:r>
+            <a:endParaRPr lang="en-US" sz="1380" dirty="0"/>
+          </a:p>
+          <a:p>
+            <a:r>
+              <a:rPr lang="en-US" sz="1380" dirty="0">
+                <a:solidFill>
+                  <a:srgbClr val="17364A"/>
+                </a:solidFill>
+                <a:latin typeface="Aptos" pitchFamily="34" charset="0"/>
+                <a:ea typeface="Aptos" pitchFamily="34" charset="-122"/>
+                <a:cs typeface="Aptos" pitchFamily="34" charset="-120"/>
+              </a:rPr>
+              <a:t>Generative AI and retrieval systems can also reveal sensitive details through summaries,.</a:t>
+            </a:r>
+            <a:endParaRPr lang="en-US" sz="1380" dirty="0"/>
           </a:p>
         </p:txBody>
       </p:sp>
       <p:sp>
         <p:nvSpPr>
           <p:cNvPr id="16" name="Shape 14"/>
-          <p:cNvSpPr/>
-          <p:nvPr/>
-        </p:nvSpPr>
-        <p:spPr>
-          <a:xfrm>
-            <a:off x="8366760" y="3639312"/>
-            <a:ext cx="2011680" cy="0"/>
-          </a:xfrm>
-          <a:prstGeom prst="line">
-            <a:avLst/>
-          </a:prstGeom>
-          <a:noFill/>
-          <a:ln w="63500">
-            <a:solidFill>
-              <a:srgbClr val="2F8A28"/>
-            </a:solidFill>
-            <a:prstDash val="solid"/>
-          </a:ln>
-        </p:spPr>
-      </p:sp>
-      <p:sp>
-        <p:nvSpPr>
-          <p:cNvPr id="17" name="Text 15"/>
-          <p:cNvSpPr/>
-          <p:nvPr/>
-        </p:nvSpPr>
-        <p:spPr>
-          <a:xfrm>
-            <a:off x="7909560" y="3849624"/>
-            <a:ext cx="2926080" cy="164592"/>
-          </a:xfrm>
-          <a:prstGeom prst="rect">
-            <a:avLst/>
-          </a:prstGeom>
-          <a:noFill/>
-          <a:ln/>
-        </p:spPr>
-        <p:txBody>
-          <a:bodyPr wrap="square" lIns="0" tIns="0" rIns="0" bIns="0" rtlCol="0" anchor="ctr"/>
-          <a:lstStyle/>
-          <a:p>
-            <a:pPr algn="ctr" indent="0" marL="0">
-              <a:buNone/>
-            </a:pPr>
-            <a:r>
-              <a:rPr lang="en-US" sz="900" dirty="0">
-                <a:solidFill>
-                  <a:srgbClr val="003A63"/>
-                </a:solidFill>
-                <a:latin typeface="Aptos" pitchFamily="34" charset="0"/>
-                <a:ea typeface="Aptos" pitchFamily="34" charset="-122"/>
-                <a:cs typeface="Aptos" pitchFamily="34" charset="-120"/>
-              </a:rPr>
-              <a:t>Human review</a:t>
-            </a:r>
-            <a:endParaRPr lang="en-US" sz="900" dirty="0"/>
-          </a:p>
-        </p:txBody>
-      </p:sp>
-      <p:sp>
-        <p:nvSpPr>
-          <p:cNvPr id="18" name="Shape 16"/>
           <p:cNvSpPr/>
           <p:nvPr/>
         </p:nvSpPr>
@@ -19389,7 +18568,7 @@
       </p:sp>
       <p:sp>
         <p:nvSpPr>
-          <p:cNvPr id="19" name="Text 17"/>
+          <p:cNvPr id="17" name="Text 15"/>
           <p:cNvSpPr/>
           <p:nvPr/>
         </p:nvSpPr>
@@ -19428,7 +18607,7 @@
       </p:sp>
       <p:sp>
         <p:nvSpPr>
-          <p:cNvPr id="20" name="Text 18"/>
+          <p:cNvPr id="18" name="Text 16"/>
           <p:cNvSpPr/>
           <p:nvPr/>
         </p:nvSpPr>

--- a/downloads/presentations/modules/gov-310.pptx
+++ b/downloads/presentations/modules/gov-310.pptx
@@ -3533,49 +3533,58 @@
           <a:ln/>
         </p:spPr>
         <p:txBody>
-          <a:bodyPr wrap="square" lIns="635" tIns="635" rIns="635" bIns="635" rtlCol="0" anchor="t">
+          <a:bodyPr wrap="square" lIns="1016" tIns="1016" rIns="1016" bIns="1016" rtlCol="0" anchor="t">
             <a:normAutofit/>
           </a:bodyPr>
           <a:lstStyle/>
           <a:p>
+            <a:pPr indent="0" marL="0">
+              <a:buNone/>
+            </a:pPr>
             <a:r>
               <a:rPr lang="en-US" sz="2100" dirty="0">
                 <a:solidFill>
-                  <a:srgbClr val="17364A"/>
-                </a:solidFill>
-                <a:latin typeface="Aptos" pitchFamily="34" charset="0"/>
-                <a:ea typeface="Aptos" pitchFamily="34" charset="-122"/>
-                <a:cs typeface="Aptos" pitchFamily="34" charset="-120"/>
-              </a:rPr>
-              <a:t>De-identification is the process of reducing the risk that data can be connected to a specific person.</a:t>
+                  <a:srgbClr val="003A63"/>
+                </a:solidFill>
+                <a:latin typeface="Aptos" pitchFamily="34" charset="0"/>
+                <a:ea typeface="Aptos" pitchFamily="34" charset="-122"/>
+                <a:cs typeface="Aptos" pitchFamily="34" charset="-120"/>
+              </a:rPr>
+              <a:t>• De-identification is the process of reducing the risk that data can be connected to a specific.</a:t>
             </a:r>
             <a:endParaRPr lang="en-US" sz="2100" dirty="0"/>
           </a:p>
           <a:p>
+            <a:pPr indent="0" marL="0">
+              <a:buNone/>
+            </a:pPr>
             <a:r>
               <a:rPr lang="en-US" sz="2100" dirty="0">
                 <a:solidFill>
-                  <a:srgbClr val="17364A"/>
-                </a:solidFill>
-                <a:latin typeface="Aptos" pitchFamily="34" charset="0"/>
-                <a:ea typeface="Aptos" pitchFamily="34" charset="-122"/>
-                <a:cs typeface="Aptos" pitchFamily="34" charset="-120"/>
-              </a:rPr>
-              <a:t>In public health practice, de-identification must be interpreted carefully because rare diseases, small.</a:t>
+                  <a:srgbClr val="003A63"/>
+                </a:solidFill>
+                <a:latin typeface="Aptos" pitchFamily="34" charset="0"/>
+                <a:ea typeface="Aptos" pitchFamily="34" charset="-122"/>
+                <a:cs typeface="Aptos" pitchFamily="34" charset="-120"/>
+              </a:rPr>
+              <a:t>• In public health practice, de-identification must be interpreted carefully because rare.</a:t>
             </a:r>
             <a:endParaRPr lang="en-US" sz="2100" dirty="0"/>
           </a:p>
           <a:p>
+            <a:pPr indent="0" marL="0">
+              <a:buNone/>
+            </a:pPr>
             <a:r>
               <a:rPr lang="en-US" sz="2100" dirty="0">
                 <a:solidFill>
-                  <a:srgbClr val="17364A"/>
-                </a:solidFill>
-                <a:latin typeface="Aptos" pitchFamily="34" charset="0"/>
-                <a:ea typeface="Aptos" pitchFamily="34" charset="-122"/>
-                <a:cs typeface="Aptos" pitchFamily="34" charset="-120"/>
-              </a:rPr>
-              <a:t>A dataset can appear anonymous but still be linkable to individuals when combined with other information.</a:t>
+                  <a:srgbClr val="003A63"/>
+                </a:solidFill>
+                <a:latin typeface="Aptos" pitchFamily="34" charset="0"/>
+                <a:ea typeface="Aptos" pitchFamily="34" charset="-122"/>
+                <a:cs typeface="Aptos" pitchFamily="34" charset="-120"/>
+              </a:rPr>
+              <a:t>• A dataset can appear anonymous but still be linkable to individuals when combined with other.</a:t>
             </a:r>
             <a:endParaRPr lang="en-US" sz="2100" dirty="0"/>
           </a:p>
@@ -3655,17 +3664,17 @@
         </p:nvSpPr>
         <p:spPr>
           <a:xfrm>
-            <a:off x="7799832" y="1828800"/>
-            <a:ext cx="3145536" cy="685800"/>
-          </a:xfrm>
-          <a:prstGeom prst="rect">
-            <a:avLst/>
-          </a:prstGeom>
-          <a:noFill/>
-          <a:ln/>
-        </p:spPr>
-        <p:txBody>
-          <a:bodyPr wrap="square" lIns="0" tIns="0" rIns="0" bIns="0" rtlCol="0" anchor="t">
+            <a:off x="7799832" y="1801368"/>
+            <a:ext cx="3145536" cy="758952"/>
+          </a:xfrm>
+          <a:prstGeom prst="rect">
+            <a:avLst/>
+          </a:prstGeom>
+          <a:noFill/>
+          <a:ln/>
+        </p:spPr>
+        <p:txBody>
+          <a:bodyPr wrap="square" lIns="254" tIns="254" rIns="254" bIns="254" rtlCol="0" anchor="t">
             <a:normAutofit/>
           </a:bodyPr>
           <a:lstStyle/>
@@ -3674,7 +3683,7 @@
               <a:buNone/>
             </a:pPr>
             <a:r>
-              <a:rPr lang="en-US" sz="1550" dirty="0">
+              <a:rPr lang="en-US" sz="1320" dirty="0">
                 <a:solidFill>
                   <a:srgbClr val="17364A"/>
                 </a:solidFill>
@@ -3684,7 +3693,7 @@
               </a:rPr>
               <a:t>De-identification is the process of reducing the risk that data can be connected to a specific person.</a:t>
             </a:r>
-            <a:endParaRPr lang="en-US" sz="1550" dirty="0"/>
+            <a:endParaRPr lang="en-US" sz="1320" dirty="0"/>
           </a:p>
         </p:txBody>
       </p:sp>
@@ -3772,13 +3781,16 @@
           <a:ln/>
         </p:spPr>
         <p:txBody>
-          <a:bodyPr wrap="square" lIns="254" tIns="254" rIns="254" bIns="254" rtlCol="0" anchor="t">
+          <a:bodyPr wrap="square" lIns="508" tIns="508" rIns="508" bIns="508" rtlCol="0" anchor="t">
             <a:normAutofit/>
           </a:bodyPr>
           <a:lstStyle/>
           <a:p>
-            <a:r>
-              <a:rPr lang="en-US" sz="1380" dirty="0">
+            <a:pPr indent="0" marL="0">
+              <a:buNone/>
+            </a:pPr>
+            <a:r>
+              <a:rPr lang="en-US" sz="1220" dirty="0">
                 <a:solidFill>
                   <a:srgbClr val="17364A"/>
                 </a:solidFill>
@@ -3786,13 +3798,16 @@
                 <a:ea typeface="Aptos" pitchFamily="34" charset="-122"/>
                 <a:cs typeface="Aptos" pitchFamily="34" charset="-120"/>
               </a:rPr>
-              <a:t>In public health practice, de-identification must be interpreted carefully because rare.</a:t>
-            </a:r>
-            <a:endParaRPr lang="en-US" sz="1380" dirty="0"/>
-          </a:p>
-          <a:p>
-            <a:r>
-              <a:rPr lang="en-US" sz="1380" dirty="0">
+              <a:t>In public health practice, de-identification must be interpreted.</a:t>
+            </a:r>
+            <a:endParaRPr lang="en-US" sz="1220" dirty="0"/>
+          </a:p>
+          <a:p>
+            <a:pPr indent="0" marL="0">
+              <a:buNone/>
+            </a:pPr>
+            <a:r>
+              <a:rPr lang="en-US" sz="1220" dirty="0">
                 <a:solidFill>
                   <a:srgbClr val="17364A"/>
                 </a:solidFill>
@@ -3800,13 +3815,16 @@
                 <a:ea typeface="Aptos" pitchFamily="34" charset="-122"/>
                 <a:cs typeface="Aptos" pitchFamily="34" charset="-120"/>
               </a:rPr>
-              <a:t>Re-identification risk is the possibility that a person, household, provider, facility, or.</a:t>
-            </a:r>
-            <a:endParaRPr lang="en-US" sz="1380" dirty="0"/>
-          </a:p>
-          <a:p>
-            <a:r>
-              <a:rPr lang="en-US" sz="1380" dirty="0">
+              <a:t>Re-identification risk is the possibility that a person,.</a:t>
+            </a:r>
+            <a:endParaRPr lang="en-US" sz="1220" dirty="0"/>
+          </a:p>
+          <a:p>
+            <a:pPr indent="0" marL="0">
+              <a:buNone/>
+            </a:pPr>
+            <a:r>
+              <a:rPr lang="en-US" sz="1220" dirty="0">
                 <a:solidFill>
                   <a:srgbClr val="17364A"/>
                 </a:solidFill>
@@ -3814,9 +3832,9 @@
                 <a:ea typeface="Aptos" pitchFamily="34" charset="-122"/>
                 <a:cs typeface="Aptos" pitchFamily="34" charset="-120"/>
               </a:rPr>
-              <a:t>AI can increase this risk by making patterns easier to discover, by generating detailed.</a:t>
-            </a:r>
-            <a:endParaRPr lang="en-US" sz="1380" dirty="0"/>
+              <a:t>AI can increase this risk by making patterns easier to discover,.</a:t>
+            </a:r>
+            <a:endParaRPr lang="en-US" sz="1220" dirty="0"/>
           </a:p>
         </p:txBody>
       </p:sp>
@@ -3894,17 +3912,17 @@
         </p:nvSpPr>
         <p:spPr>
           <a:xfrm>
-            <a:off x="7799832" y="5001768"/>
-            <a:ext cx="3145536" cy="502920"/>
-          </a:xfrm>
-          <a:prstGeom prst="rect">
-            <a:avLst/>
-          </a:prstGeom>
-          <a:noFill/>
-          <a:ln/>
-        </p:spPr>
-        <p:txBody>
-          <a:bodyPr wrap="square" lIns="0" tIns="0" rIns="0" bIns="0" rtlCol="0" anchor="t">
+            <a:off x="7799832" y="4974336"/>
+            <a:ext cx="3145536" cy="576072"/>
+          </a:xfrm>
+          <a:prstGeom prst="rect">
+            <a:avLst/>
+          </a:prstGeom>
+          <a:noFill/>
+          <a:ln/>
+        </p:spPr>
+        <p:txBody>
+          <a:bodyPr wrap="square" lIns="254" tIns="254" rIns="254" bIns="254" rtlCol="0" anchor="t">
             <a:normAutofit/>
           </a:bodyPr>
           <a:lstStyle/>
@@ -3913,7 +3931,7 @@
               <a:buNone/>
             </a:pPr>
             <a:r>
-              <a:rPr lang="en-US" sz="1550" dirty="0">
+              <a:rPr lang="en-US" sz="1320" dirty="0">
                 <a:solidFill>
                   <a:srgbClr val="17364A"/>
                 </a:solidFill>
@@ -3921,9 +3939,9 @@
                 <a:ea typeface="Aptos" pitchFamily="34" charset="-122"/>
                 <a:cs typeface="Aptos" pitchFamily="34" charset="-120"/>
               </a:rPr>
-              <a:t>Identify what could go wrong, who could be affected, what safeguards are needed, and what evidence should be reviewed before use expands.</a:t>
-            </a:r>
-            <a:endParaRPr lang="en-US" sz="1550" dirty="0"/>
+              <a:t>Identify what could go wrong, who could be affected, what safeguards are needed, and what evidence should be reviewed.</a:t>
+            </a:r>
+            <a:endParaRPr lang="en-US" sz="1320" dirty="0"/>
           </a:p>
         </p:txBody>
       </p:sp>
@@ -4224,49 +4242,58 @@
           <a:ln/>
         </p:spPr>
         <p:txBody>
-          <a:bodyPr wrap="square" lIns="635" tIns="635" rIns="635" bIns="635" rtlCol="0" anchor="t">
+          <a:bodyPr wrap="square" lIns="1016" tIns="1016" rIns="1016" bIns="1016" rtlCol="0" anchor="t">
             <a:normAutofit/>
           </a:bodyPr>
           <a:lstStyle/>
           <a:p>
+            <a:pPr indent="0" marL="0">
+              <a:buNone/>
+            </a:pPr>
             <a:r>
               <a:rPr lang="en-US" sz="2100" dirty="0">
                 <a:solidFill>
-                  <a:srgbClr val="17364A"/>
-                </a:solidFill>
-                <a:latin typeface="Aptos" pitchFamily="34" charset="0"/>
-                <a:ea typeface="Aptos" pitchFamily="34" charset="-122"/>
-                <a:cs typeface="Aptos" pitchFamily="34" charset="-120"/>
-              </a:rPr>
-              <a:t>Differential privacy is a statistical approach that adds carefully calibrated noise to outputs to.</a:t>
+                  <a:srgbClr val="003A63"/>
+                </a:solidFill>
+                <a:latin typeface="Aptos" pitchFamily="34" charset="0"/>
+                <a:ea typeface="Aptos" pitchFamily="34" charset="-122"/>
+                <a:cs typeface="Aptos" pitchFamily="34" charset="-120"/>
+              </a:rPr>
+              <a:t>• Differential privacy is a statistical approach that adds carefully calibrated noise to outputs.</a:t>
             </a:r>
             <a:endParaRPr lang="en-US" sz="2100" dirty="0"/>
           </a:p>
           <a:p>
+            <a:pPr indent="0" marL="0">
+              <a:buNone/>
+            </a:pPr>
             <a:r>
               <a:rPr lang="en-US" sz="2100" dirty="0">
                 <a:solidFill>
-                  <a:srgbClr val="17364A"/>
-                </a:solidFill>
-                <a:latin typeface="Aptos" pitchFamily="34" charset="0"/>
-                <a:ea typeface="Aptos" pitchFamily="34" charset="-122"/>
-                <a:cs typeface="Aptos" pitchFamily="34" charset="-120"/>
-              </a:rPr>
-              <a:t>It can be useful for public reporting or statistical release, but it does not solve all privacy problems.</a:t>
+                  <a:srgbClr val="003A63"/>
+                </a:solidFill>
+                <a:latin typeface="Aptos" pitchFamily="34" charset="0"/>
+                <a:ea typeface="Aptos" pitchFamily="34" charset="-122"/>
+                <a:cs typeface="Aptos" pitchFamily="34" charset="-120"/>
+              </a:rPr>
+              <a:t>• It can be useful for public reporting or statistical release, but it does not solve all.</a:t>
             </a:r>
             <a:endParaRPr lang="en-US" sz="2100" dirty="0"/>
           </a:p>
           <a:p>
+            <a:pPr indent="0" marL="0">
+              <a:buNone/>
+            </a:pPr>
             <a:r>
               <a:rPr lang="en-US" sz="2100" dirty="0">
                 <a:solidFill>
-                  <a:srgbClr val="17364A"/>
-                </a:solidFill>
-                <a:latin typeface="Aptos" pitchFamily="34" charset="0"/>
-                <a:ea typeface="Aptos" pitchFamily="34" charset="-122"/>
-                <a:cs typeface="Aptos" pitchFamily="34" charset="-120"/>
-              </a:rPr>
-              <a:t>Public health staff need to understand that differential privacy involves tradeoffs between privacy.</a:t>
+                  <a:srgbClr val="003A63"/>
+                </a:solidFill>
+                <a:latin typeface="Aptos" pitchFamily="34" charset="0"/>
+                <a:ea typeface="Aptos" pitchFamily="34" charset="-122"/>
+                <a:cs typeface="Aptos" pitchFamily="34" charset="-120"/>
+              </a:rPr>
+              <a:t>• Public health staff need to understand that differential privacy involves tradeoffs between.</a:t>
             </a:r>
             <a:endParaRPr lang="en-US" sz="2100" dirty="0"/>
           </a:p>
@@ -4346,17 +4373,17 @@
         </p:nvSpPr>
         <p:spPr>
           <a:xfrm>
-            <a:off x="7799832" y="1828800"/>
-            <a:ext cx="3145536" cy="685800"/>
-          </a:xfrm>
-          <a:prstGeom prst="rect">
-            <a:avLst/>
-          </a:prstGeom>
-          <a:noFill/>
-          <a:ln/>
-        </p:spPr>
-        <p:txBody>
-          <a:bodyPr wrap="square" lIns="0" tIns="0" rIns="0" bIns="0" rtlCol="0" anchor="t">
+            <a:off x="7799832" y="1801368"/>
+            <a:ext cx="3145536" cy="758952"/>
+          </a:xfrm>
+          <a:prstGeom prst="rect">
+            <a:avLst/>
+          </a:prstGeom>
+          <a:noFill/>
+          <a:ln/>
+        </p:spPr>
+        <p:txBody>
+          <a:bodyPr wrap="square" lIns="254" tIns="254" rIns="254" bIns="254" rtlCol="0" anchor="t">
             <a:normAutofit/>
           </a:bodyPr>
           <a:lstStyle/>
@@ -4365,7 +4392,7 @@
               <a:buNone/>
             </a:pPr>
             <a:r>
-              <a:rPr lang="en-US" sz="1550" dirty="0">
+              <a:rPr lang="en-US" sz="1320" dirty="0">
                 <a:solidFill>
                   <a:srgbClr val="17364A"/>
                 </a:solidFill>
@@ -4375,7 +4402,7 @@
               </a:rPr>
               <a:t>Differential privacy is a statistical approach that adds carefully calibrated noise to outputs to.</a:t>
             </a:r>
-            <a:endParaRPr lang="en-US" sz="1550" dirty="0"/>
+            <a:endParaRPr lang="en-US" sz="1320" dirty="0"/>
           </a:p>
         </p:txBody>
       </p:sp>
@@ -4463,13 +4490,16 @@
           <a:ln/>
         </p:spPr>
         <p:txBody>
-          <a:bodyPr wrap="square" lIns="254" tIns="254" rIns="254" bIns="254" rtlCol="0" anchor="t">
+          <a:bodyPr wrap="square" lIns="508" tIns="508" rIns="508" bIns="508" rtlCol="0" anchor="t">
             <a:normAutofit/>
           </a:bodyPr>
           <a:lstStyle/>
           <a:p>
-            <a:r>
-              <a:rPr lang="en-US" sz="1380" dirty="0">
+            <a:pPr indent="0" marL="0">
+              <a:buNone/>
+            </a:pPr>
+            <a:r>
+              <a:rPr lang="en-US" sz="1220" dirty="0">
                 <a:solidFill>
                   <a:srgbClr val="17364A"/>
                 </a:solidFill>
@@ -4477,13 +4507,16 @@
                 <a:ea typeface="Aptos" pitchFamily="34" charset="-122"/>
                 <a:cs typeface="Aptos" pitchFamily="34" charset="-120"/>
               </a:rPr>
-              <a:t>Differential privacy is a statistical approach that adds carefully calibrated noise to.</a:t>
-            </a:r>
-            <a:endParaRPr lang="en-US" sz="1380" dirty="0"/>
-          </a:p>
-          <a:p>
-            <a:r>
-              <a:rPr lang="en-US" sz="1380" dirty="0">
+              <a:t>Differential privacy is a statistical approach that adds carefully.</a:t>
+            </a:r>
+            <a:endParaRPr lang="en-US" sz="1220" dirty="0"/>
+          </a:p>
+          <a:p>
+            <a:pPr indent="0" marL="0">
+              <a:buNone/>
+            </a:pPr>
+            <a:r>
+              <a:rPr lang="en-US" sz="1220" dirty="0">
                 <a:solidFill>
                   <a:srgbClr val="17364A"/>
                 </a:solidFill>
@@ -4491,9 +4524,9 @@
                 <a:ea typeface="Aptos" pitchFamily="34" charset="-122"/>
                 <a:cs typeface="Aptos" pitchFamily="34" charset="-120"/>
               </a:rPr>
-              <a:t>Public health staff need to understand that differential privacy involves tradeoffs.</a:t>
-            </a:r>
-            <a:endParaRPr lang="en-US" sz="1380" dirty="0"/>
+              <a:t>Public health staff need to understand that differential privacy.</a:t>
+            </a:r>
+            <a:endParaRPr lang="en-US" sz="1220" dirty="0"/>
           </a:p>
         </p:txBody>
       </p:sp>
@@ -4571,17 +4604,17 @@
         </p:nvSpPr>
         <p:spPr>
           <a:xfrm>
-            <a:off x="7799832" y="5001768"/>
-            <a:ext cx="3145536" cy="502920"/>
-          </a:xfrm>
-          <a:prstGeom prst="rect">
-            <a:avLst/>
-          </a:prstGeom>
-          <a:noFill/>
-          <a:ln/>
-        </p:spPr>
-        <p:txBody>
-          <a:bodyPr wrap="square" lIns="0" tIns="0" rIns="0" bIns="0" rtlCol="0" anchor="t">
+            <a:off x="7799832" y="4974336"/>
+            <a:ext cx="3145536" cy="576072"/>
+          </a:xfrm>
+          <a:prstGeom prst="rect">
+            <a:avLst/>
+          </a:prstGeom>
+          <a:noFill/>
+          <a:ln/>
+        </p:spPr>
+        <p:txBody>
+          <a:bodyPr wrap="square" lIns="254" tIns="254" rIns="254" bIns="254" rtlCol="0" anchor="t">
             <a:normAutofit/>
           </a:bodyPr>
           <a:lstStyle/>
@@ -4590,7 +4623,7 @@
               <a:buNone/>
             </a:pPr>
             <a:r>
-              <a:rPr lang="en-US" sz="1550" dirty="0">
+              <a:rPr lang="en-US" sz="1320" dirty="0">
                 <a:solidFill>
                   <a:srgbClr val="17364A"/>
                 </a:solidFill>
@@ -4598,9 +4631,9 @@
                 <a:ea typeface="Aptos" pitchFamily="34" charset="-122"/>
                 <a:cs typeface="Aptos" pitchFamily="34" charset="-120"/>
               </a:rPr>
-              <a:t>Identify what could go wrong, who could be affected, what safeguards are needed, and what evidence should be reviewed before use expands.</a:t>
-            </a:r>
-            <a:endParaRPr lang="en-US" sz="1550" dirty="0"/>
+              <a:t>Identify what could go wrong, who could be affected, what safeguards are needed, and what evidence should be reviewed.</a:t>
+            </a:r>
+            <a:endParaRPr lang="en-US" sz="1320" dirty="0"/>
           </a:p>
         </p:txBody>
       </p:sp>
@@ -4901,49 +4934,58 @@
           <a:ln/>
         </p:spPr>
         <p:txBody>
-          <a:bodyPr wrap="square" lIns="635" tIns="635" rIns="635" bIns="635" rtlCol="0" anchor="t">
+          <a:bodyPr wrap="square" lIns="1016" tIns="1016" rIns="1016" bIns="1016" rtlCol="0" anchor="t">
             <a:normAutofit/>
           </a:bodyPr>
           <a:lstStyle/>
           <a:p>
+            <a:pPr indent="0" marL="0">
+              <a:buNone/>
+            </a:pPr>
             <a:r>
               <a:rPr lang="en-US" sz="2100" dirty="0">
                 <a:solidFill>
-                  <a:srgbClr val="17364A"/>
-                </a:solidFill>
-                <a:latin typeface="Aptos" pitchFamily="34" charset="0"/>
-                <a:ea typeface="Aptos" pitchFamily="34" charset="-122"/>
-                <a:cs typeface="Aptos" pitchFamily="34" charset="-120"/>
-              </a:rPr>
-              <a:t>Consider a health department that wants to use AI to summarize disease investigation notes and identify.</a:t>
+                  <a:srgbClr val="003A63"/>
+                </a:solidFill>
+                <a:latin typeface="Aptos" pitchFamily="34" charset="0"/>
+                <a:ea typeface="Aptos" pitchFamily="34" charset="-122"/>
+                <a:cs typeface="Aptos" pitchFamily="34" charset="-120"/>
+              </a:rPr>
+              <a:t>• Consider a health department that wants to use AI to summarize disease investigation notes and.</a:t>
             </a:r>
             <a:endParaRPr lang="en-US" sz="2100" dirty="0"/>
           </a:p>
           <a:p>
+            <a:pPr indent="0" marL="0">
+              <a:buNone/>
+            </a:pPr>
             <a:r>
               <a:rPr lang="en-US" sz="2100" dirty="0">
                 <a:solidFill>
-                  <a:srgbClr val="17364A"/>
-                </a:solidFill>
-                <a:latin typeface="Aptos" pitchFamily="34" charset="0"/>
-                <a:ea typeface="Aptos" pitchFamily="34" charset="-122"/>
-                <a:cs typeface="Aptos" pitchFamily="34" charset="-120"/>
-              </a:rPr>
-              <a:t>The notes may include symptoms, dates, employer names, schools, shelters, correctional facilities,.</a:t>
+                  <a:srgbClr val="003A63"/>
+                </a:solidFill>
+                <a:latin typeface="Aptos" pitchFamily="34" charset="0"/>
+                <a:ea typeface="Aptos" pitchFamily="34" charset="-122"/>
+                <a:cs typeface="Aptos" pitchFamily="34" charset="-120"/>
+              </a:rPr>
+              <a:t>• The notes may include symptoms, dates, employer names, schools, shelters, correctional.</a:t>
             </a:r>
             <a:endParaRPr lang="en-US" sz="2100" dirty="0"/>
           </a:p>
           <a:p>
+            <a:pPr indent="0" marL="0">
+              <a:buNone/>
+            </a:pPr>
             <a:r>
               <a:rPr lang="en-US" sz="2100" dirty="0">
                 <a:solidFill>
-                  <a:srgbClr val="17364A"/>
-                </a:solidFill>
-                <a:latin typeface="Aptos" pitchFamily="34" charset="0"/>
-                <a:ea typeface="Aptos" pitchFamily="34" charset="-122"/>
-                <a:cs typeface="Aptos" pitchFamily="34" charset="-120"/>
-              </a:rPr>
-              <a:t>Even if the AI system is internal, the agency must define who can access the notes, whether the AI.</a:t>
+                  <a:srgbClr val="003A63"/>
+                </a:solidFill>
+                <a:latin typeface="Aptos" pitchFamily="34" charset="0"/>
+                <a:ea typeface="Aptos" pitchFamily="34" charset="-122"/>
+                <a:cs typeface="Aptos" pitchFamily="34" charset="-120"/>
+              </a:rPr>
+              <a:t>• Even if the AI system is internal, the agency must define who can access the notes, whether.</a:t>
             </a:r>
             <a:endParaRPr lang="en-US" sz="2100" dirty="0"/>
           </a:p>
@@ -5023,17 +5065,17 @@
         </p:nvSpPr>
         <p:spPr>
           <a:xfrm>
-            <a:off x="7799832" y="1828800"/>
-            <a:ext cx="3145536" cy="685800"/>
-          </a:xfrm>
-          <a:prstGeom prst="rect">
-            <a:avLst/>
-          </a:prstGeom>
-          <a:noFill/>
-          <a:ln/>
-        </p:spPr>
-        <p:txBody>
-          <a:bodyPr wrap="square" lIns="0" tIns="0" rIns="0" bIns="0" rtlCol="0" anchor="t">
+            <a:off x="7799832" y="1801368"/>
+            <a:ext cx="3145536" cy="758952"/>
+          </a:xfrm>
+          <a:prstGeom prst="rect">
+            <a:avLst/>
+          </a:prstGeom>
+          <a:noFill/>
+          <a:ln/>
+        </p:spPr>
+        <p:txBody>
+          <a:bodyPr wrap="square" lIns="254" tIns="254" rIns="254" bIns="254" rtlCol="0" anchor="t">
             <a:normAutofit/>
           </a:bodyPr>
           <a:lstStyle/>
@@ -5042,7 +5084,7 @@
               <a:buNone/>
             </a:pPr>
             <a:r>
-              <a:rPr lang="en-US" sz="1550" dirty="0">
+              <a:rPr lang="en-US" sz="1320" dirty="0">
                 <a:solidFill>
                   <a:srgbClr val="17364A"/>
                 </a:solidFill>
@@ -5052,7 +5094,7 @@
               </a:rPr>
               <a:t>Consider a health department that wants to use AI to summarize disease investigation notes and identify.</a:t>
             </a:r>
-            <a:endParaRPr lang="en-US" sz="1550" dirty="0"/>
+            <a:endParaRPr lang="en-US" sz="1320" dirty="0"/>
           </a:p>
         </p:txBody>
       </p:sp>
@@ -5140,13 +5182,16 @@
           <a:ln/>
         </p:spPr>
         <p:txBody>
-          <a:bodyPr wrap="square" lIns="254" tIns="254" rIns="254" bIns="254" rtlCol="0" anchor="t">
+          <a:bodyPr wrap="square" lIns="508" tIns="508" rIns="508" bIns="508" rtlCol="0" anchor="t">
             <a:normAutofit/>
           </a:bodyPr>
           <a:lstStyle/>
           <a:p>
-            <a:r>
-              <a:rPr lang="en-US" sz="1380" dirty="0">
+            <a:pPr indent="0" marL="0">
+              <a:buNone/>
+            </a:pPr>
+            <a:r>
+              <a:rPr lang="en-US" sz="1220" dirty="0">
                 <a:solidFill>
                   <a:srgbClr val="17364A"/>
                 </a:solidFill>
@@ -5154,13 +5199,16 @@
                 <a:ea typeface="Aptos" pitchFamily="34" charset="-122"/>
                 <a:cs typeface="Aptos" pitchFamily="34" charset="-120"/>
               </a:rPr>
-              <a:t>Consider a health department that wants to use AI to summarize disease investigation notes.</a:t>
-            </a:r>
-            <a:endParaRPr lang="en-US" sz="1380" dirty="0"/>
-          </a:p>
-          <a:p>
-            <a:r>
-              <a:rPr lang="en-US" sz="1380" dirty="0">
+              <a:t>Consider a health department that wants to use AI to summarize.</a:t>
+            </a:r>
+            <a:endParaRPr lang="en-US" sz="1220" dirty="0"/>
+          </a:p>
+          <a:p>
+            <a:pPr indent="0" marL="0">
+              <a:buNone/>
+            </a:pPr>
+            <a:r>
+              <a:rPr lang="en-US" sz="1220" dirty="0">
                 <a:solidFill>
                   <a:srgbClr val="17364A"/>
                 </a:solidFill>
@@ -5168,13 +5216,16 @@
                 <a:ea typeface="Aptos" pitchFamily="34" charset="-122"/>
                 <a:cs typeface="Aptos" pitchFamily="34" charset="-120"/>
               </a:rPr>
-              <a:t>The notes may include symptoms, dates, employer names, schools, shelters, correctional.</a:t>
-            </a:r>
-            <a:endParaRPr lang="en-US" sz="1380" dirty="0"/>
-          </a:p>
-          <a:p>
-            <a:r>
-              <a:rPr lang="en-US" sz="1380" dirty="0">
+              <a:t>The notes may include symptoms, dates, employer names, schools,.</a:t>
+            </a:r>
+            <a:endParaRPr lang="en-US" sz="1220" dirty="0"/>
+          </a:p>
+          <a:p>
+            <a:pPr indent="0" marL="0">
+              <a:buNone/>
+            </a:pPr>
+            <a:r>
+              <a:rPr lang="en-US" sz="1220" dirty="0">
                 <a:solidFill>
                   <a:srgbClr val="17364A"/>
                 </a:solidFill>
@@ -5182,9 +5233,9 @@
                 <a:ea typeface="Aptos" pitchFamily="34" charset="-122"/>
                 <a:cs typeface="Aptos" pitchFamily="34" charset="-120"/>
               </a:rPr>
-              <a:t>Even if the AI system is internal, the agency must define who can access the notes,.</a:t>
-            </a:r>
-            <a:endParaRPr lang="en-US" sz="1380" dirty="0"/>
+              <a:t>Even if the AI system is internal, the agency must define who can.</a:t>
+            </a:r>
+            <a:endParaRPr lang="en-US" sz="1220" dirty="0"/>
           </a:p>
         </p:txBody>
       </p:sp>
@@ -5262,17 +5313,17 @@
         </p:nvSpPr>
         <p:spPr>
           <a:xfrm>
-            <a:off x="7799832" y="5001768"/>
-            <a:ext cx="3145536" cy="502920"/>
-          </a:xfrm>
-          <a:prstGeom prst="rect">
-            <a:avLst/>
-          </a:prstGeom>
-          <a:noFill/>
-          <a:ln/>
-        </p:spPr>
-        <p:txBody>
-          <a:bodyPr wrap="square" lIns="0" tIns="0" rIns="0" bIns="0" rtlCol="0" anchor="t">
+            <a:off x="7799832" y="4974336"/>
+            <a:ext cx="3145536" cy="576072"/>
+          </a:xfrm>
+          <a:prstGeom prst="rect">
+            <a:avLst/>
+          </a:prstGeom>
+          <a:noFill/>
+          <a:ln/>
+        </p:spPr>
+        <p:txBody>
+          <a:bodyPr wrap="square" lIns="254" tIns="254" rIns="254" bIns="254" rtlCol="0" anchor="t">
             <a:normAutofit/>
           </a:bodyPr>
           <a:lstStyle/>
@@ -5281,7 +5332,7 @@
               <a:buNone/>
             </a:pPr>
             <a:r>
-              <a:rPr lang="en-US" sz="1550" dirty="0">
+              <a:rPr lang="en-US" sz="1320" dirty="0">
                 <a:solidFill>
                   <a:srgbClr val="17364A"/>
                 </a:solidFill>
@@ -5289,9 +5340,9 @@
                 <a:ea typeface="Aptos" pitchFamily="34" charset="-122"/>
                 <a:cs typeface="Aptos" pitchFamily="34" charset="-120"/>
               </a:rPr>
-              <a:t>Identify what could go wrong, who could be affected, what safeguards are needed, and what evidence should be reviewed before use expands.</a:t>
-            </a:r>
-            <a:endParaRPr lang="en-US" sz="1550" dirty="0"/>
+              <a:t>Identify what could go wrong, who could be affected, what safeguards are needed, and what evidence should be reviewed.</a:t>
+            </a:r>
+            <a:endParaRPr lang="en-US" sz="1320" dirty="0"/>
           </a:p>
         </p:txBody>
       </p:sp>
@@ -5592,49 +5643,58 @@
           <a:ln/>
         </p:spPr>
         <p:txBody>
-          <a:bodyPr wrap="square" lIns="635" tIns="635" rIns="635" bIns="635" rtlCol="0" anchor="t">
+          <a:bodyPr wrap="square" lIns="1016" tIns="1016" rIns="1016" bIns="1016" rtlCol="0" anchor="t">
             <a:normAutofit/>
           </a:bodyPr>
           <a:lstStyle/>
           <a:p>
+            <a:pPr indent="0" marL="0">
+              <a:buNone/>
+            </a:pPr>
             <a:r>
               <a:rPr lang="en-US" sz="2100" dirty="0">
                 <a:solidFill>
-                  <a:srgbClr val="17364A"/>
-                </a:solidFill>
-                <a:latin typeface="Aptos" pitchFamily="34" charset="0"/>
-                <a:ea typeface="Aptos" pitchFamily="34" charset="-122"/>
-                <a:cs typeface="Aptos" pitchFamily="34" charset="-120"/>
-              </a:rPr>
-              <a:t>Privacy-preserving AI begins with data classification.</a:t>
+                  <a:srgbClr val="003A63"/>
+                </a:solidFill>
+                <a:latin typeface="Aptos" pitchFamily="34" charset="0"/>
+                <a:ea typeface="Aptos" pitchFamily="34" charset="-122"/>
+                <a:cs typeface="Aptos" pitchFamily="34" charset="-120"/>
+              </a:rPr>
+              <a:t>• Privacy-preserving AI begins with data classification.</a:t>
             </a:r>
             <a:endParaRPr lang="en-US" sz="2100" dirty="0"/>
           </a:p>
           <a:p>
+            <a:pPr indent="0" marL="0">
+              <a:buNone/>
+            </a:pPr>
             <a:r>
               <a:rPr lang="en-US" sz="2100" dirty="0">
                 <a:solidFill>
-                  <a:srgbClr val="17364A"/>
-                </a:solidFill>
-                <a:latin typeface="Aptos" pitchFamily="34" charset="0"/>
-                <a:ea typeface="Aptos" pitchFamily="34" charset="-122"/>
-                <a:cs typeface="Aptos" pitchFamily="34" charset="-120"/>
-              </a:rPr>
-              <a:t>Staff should identify whether the workflow uses protected health information, personally identifiable.</a:t>
+                  <a:srgbClr val="003A63"/>
+                </a:solidFill>
+                <a:latin typeface="Aptos" pitchFamily="34" charset="0"/>
+                <a:ea typeface="Aptos" pitchFamily="34" charset="-122"/>
+                <a:cs typeface="Aptos" pitchFamily="34" charset="-120"/>
+              </a:rPr>
+              <a:t>• Staff should identify whether the workflow uses protected health information, personally.</a:t>
             </a:r>
             <a:endParaRPr lang="en-US" sz="2100" dirty="0"/>
           </a:p>
           <a:p>
+            <a:pPr indent="0" marL="0">
+              <a:buNone/>
+            </a:pPr>
             <a:r>
               <a:rPr lang="en-US" sz="2100" dirty="0">
                 <a:solidFill>
-                  <a:srgbClr val="17364A"/>
-                </a:solidFill>
-                <a:latin typeface="Aptos" pitchFamily="34" charset="0"/>
-                <a:ea typeface="Aptos" pitchFamily="34" charset="-122"/>
-                <a:cs typeface="Aptos" pitchFamily="34" charset="-120"/>
-              </a:rPr>
-              <a:t>Classification should be tied to rules for storage, access, sharing, retention, and approved AI tools.</a:t>
+                  <a:srgbClr val="003A63"/>
+                </a:solidFill>
+                <a:latin typeface="Aptos" pitchFamily="34" charset="0"/>
+                <a:ea typeface="Aptos" pitchFamily="34" charset="-122"/>
+                <a:cs typeface="Aptos" pitchFamily="34" charset="-120"/>
+              </a:rPr>
+              <a:t>• Classification should be tied to rules for storage, access, sharing, retention, and approved.</a:t>
             </a:r>
             <a:endParaRPr lang="en-US" sz="2100" dirty="0"/>
           </a:p>
@@ -5714,17 +5774,17 @@
         </p:nvSpPr>
         <p:spPr>
           <a:xfrm>
-            <a:off x="7799832" y="1828800"/>
-            <a:ext cx="3145536" cy="685800"/>
-          </a:xfrm>
-          <a:prstGeom prst="rect">
-            <a:avLst/>
-          </a:prstGeom>
-          <a:noFill/>
-          <a:ln/>
-        </p:spPr>
-        <p:txBody>
-          <a:bodyPr wrap="square" lIns="0" tIns="0" rIns="0" bIns="0" rtlCol="0" anchor="t">
+            <a:off x="7799832" y="1801368"/>
+            <a:ext cx="3145536" cy="758952"/>
+          </a:xfrm>
+          <a:prstGeom prst="rect">
+            <a:avLst/>
+          </a:prstGeom>
+          <a:noFill/>
+          <a:ln/>
+        </p:spPr>
+        <p:txBody>
+          <a:bodyPr wrap="square" lIns="254" tIns="254" rIns="254" bIns="254" rtlCol="0" anchor="t">
             <a:normAutofit/>
           </a:bodyPr>
           <a:lstStyle/>
@@ -5733,7 +5793,7 @@
               <a:buNone/>
             </a:pPr>
             <a:r>
-              <a:rPr lang="en-US" sz="1550" dirty="0">
+              <a:rPr lang="en-US" sz="1320" dirty="0">
                 <a:solidFill>
                   <a:srgbClr val="17364A"/>
                 </a:solidFill>
@@ -5743,7 +5803,7 @@
               </a:rPr>
               <a:t>Privacy-preserving AI begins with data classification.</a:t>
             </a:r>
-            <a:endParaRPr lang="en-US" sz="1550" dirty="0"/>
+            <a:endParaRPr lang="en-US" sz="1320" dirty="0"/>
           </a:p>
         </p:txBody>
       </p:sp>
@@ -5831,13 +5891,16 @@
           <a:ln/>
         </p:spPr>
         <p:txBody>
-          <a:bodyPr wrap="square" lIns="254" tIns="254" rIns="254" bIns="254" rtlCol="0" anchor="t">
+          <a:bodyPr wrap="square" lIns="508" tIns="508" rIns="508" bIns="508" rtlCol="0" anchor="t">
             <a:normAutofit/>
           </a:bodyPr>
           <a:lstStyle/>
           <a:p>
-            <a:r>
-              <a:rPr lang="en-US" sz="1380" dirty="0">
+            <a:pPr indent="0" marL="0">
+              <a:buNone/>
+            </a:pPr>
+            <a:r>
+              <a:rPr lang="en-US" sz="1220" dirty="0">
                 <a:solidFill>
                   <a:srgbClr val="17364A"/>
                 </a:solidFill>
@@ -5845,13 +5908,16 @@
                 <a:ea typeface="Aptos" pitchFamily="34" charset="-122"/>
                 <a:cs typeface="Aptos" pitchFamily="34" charset="-120"/>
               </a:rPr>
-              <a:t>Staff should identify whether the workflow uses protected health information, personally.</a:t>
-            </a:r>
-            <a:endParaRPr lang="en-US" sz="1380" dirty="0"/>
-          </a:p>
-          <a:p>
-            <a:r>
-              <a:rPr lang="en-US" sz="1380" dirty="0">
+              <a:t>Staff should identify whether the workflow uses protected health.</a:t>
+            </a:r>
+            <a:endParaRPr lang="en-US" sz="1220" dirty="0"/>
+          </a:p>
+          <a:p>
+            <a:pPr indent="0" marL="0">
+              <a:buNone/>
+            </a:pPr>
+            <a:r>
+              <a:rPr lang="en-US" sz="1220" dirty="0">
                 <a:solidFill>
                   <a:srgbClr val="17364A"/>
                 </a:solidFill>
@@ -5859,13 +5925,16 @@
                 <a:ea typeface="Aptos" pitchFamily="34" charset="-122"/>
                 <a:cs typeface="Aptos" pitchFamily="34" charset="-120"/>
               </a:rPr>
-              <a:t>A public AI tool may be acceptable for public guidance documents but inappropriate for.</a:t>
-            </a:r>
-            <a:endParaRPr lang="en-US" sz="1380" dirty="0"/>
-          </a:p>
-          <a:p>
-            <a:r>
-              <a:rPr lang="en-US" sz="1380" dirty="0">
+              <a:t>A public AI tool may be acceptable for public guidance documents.</a:t>
+            </a:r>
+            <a:endParaRPr lang="en-US" sz="1220" dirty="0"/>
+          </a:p>
+          <a:p>
+            <a:pPr indent="0" marL="0">
+              <a:buNone/>
+            </a:pPr>
+            <a:r>
+              <a:rPr lang="en-US" sz="1220" dirty="0">
                 <a:solidFill>
                   <a:srgbClr val="17364A"/>
                 </a:solidFill>
@@ -5873,9 +5942,9 @@
                 <a:ea typeface="Aptos" pitchFamily="34" charset="-122"/>
                 <a:cs typeface="Aptos" pitchFamily="34" charset="-120"/>
               </a:rPr>
-              <a:t>The next step is determining the minimum necessary data for the AI task.</a:t>
-            </a:r>
-            <a:endParaRPr lang="en-US" sz="1380" dirty="0"/>
+              <a:t>The next step is determining the minimum necessary data for the AI.</a:t>
+            </a:r>
+            <a:endParaRPr lang="en-US" sz="1220" dirty="0"/>
           </a:p>
         </p:txBody>
       </p:sp>
@@ -5953,17 +6022,17 @@
         </p:nvSpPr>
         <p:spPr>
           <a:xfrm>
-            <a:off x="7799832" y="5001768"/>
-            <a:ext cx="3145536" cy="502920"/>
-          </a:xfrm>
-          <a:prstGeom prst="rect">
-            <a:avLst/>
-          </a:prstGeom>
-          <a:noFill/>
-          <a:ln/>
-        </p:spPr>
-        <p:txBody>
-          <a:bodyPr wrap="square" lIns="0" tIns="0" rIns="0" bIns="0" rtlCol="0" anchor="t">
+            <a:off x="7799832" y="4974336"/>
+            <a:ext cx="3145536" cy="576072"/>
+          </a:xfrm>
+          <a:prstGeom prst="rect">
+            <a:avLst/>
+          </a:prstGeom>
+          <a:noFill/>
+          <a:ln/>
+        </p:spPr>
+        <p:txBody>
+          <a:bodyPr wrap="square" lIns="254" tIns="254" rIns="254" bIns="254" rtlCol="0" anchor="t">
             <a:normAutofit/>
           </a:bodyPr>
           <a:lstStyle/>
@@ -5972,7 +6041,7 @@
               <a:buNone/>
             </a:pPr>
             <a:r>
-              <a:rPr lang="en-US" sz="1550" dirty="0">
+              <a:rPr lang="en-US" sz="1320" dirty="0">
                 <a:solidFill>
                   <a:srgbClr val="17364A"/>
                 </a:solidFill>
@@ -5980,9 +6049,9 @@
                 <a:ea typeface="Aptos" pitchFamily="34" charset="-122"/>
                 <a:cs typeface="Aptos" pitchFamily="34" charset="-120"/>
               </a:rPr>
-              <a:t>Identify what could go wrong, who could be affected, what safeguards are needed, and what evidence should be reviewed before use expands.</a:t>
-            </a:r>
-            <a:endParaRPr lang="en-US" sz="1550" dirty="0"/>
+              <a:t>Identify what could go wrong, who could be affected, what safeguards are needed, and what evidence should be reviewed.</a:t>
+            </a:r>
+            <a:endParaRPr lang="en-US" sz="1320" dirty="0"/>
           </a:p>
         </p:txBody>
       </p:sp>
@@ -6283,49 +6352,58 @@
           <a:ln/>
         </p:spPr>
         <p:txBody>
-          <a:bodyPr wrap="square" lIns="635" tIns="635" rIns="635" bIns="635" rtlCol="0" anchor="t">
+          <a:bodyPr wrap="square" lIns="1016" tIns="1016" rIns="1016" bIns="1016" rtlCol="0" anchor="t">
             <a:normAutofit/>
           </a:bodyPr>
           <a:lstStyle/>
           <a:p>
+            <a:pPr indent="0" marL="0">
+              <a:buNone/>
+            </a:pPr>
             <a:r>
               <a:rPr lang="en-US" sz="2100" dirty="0">
                 <a:solidFill>
-                  <a:srgbClr val="17364A"/>
-                </a:solidFill>
-                <a:latin typeface="Aptos" pitchFamily="34" charset="0"/>
-                <a:ea typeface="Aptos" pitchFamily="34" charset="-122"/>
-                <a:cs typeface="Aptos" pitchFamily="34" charset="-120"/>
-              </a:rPr>
-              <a:t>Privacy controls must also apply to outputs.</a:t>
+                  <a:srgbClr val="003A63"/>
+                </a:solidFill>
+                <a:latin typeface="Aptos" pitchFamily="34" charset="0"/>
+                <a:ea typeface="Aptos" pitchFamily="34" charset="-122"/>
+                <a:cs typeface="Aptos" pitchFamily="34" charset="-120"/>
+              </a:rPr>
+              <a:t>• Privacy controls must also apply to outputs.</a:t>
             </a:r>
             <a:endParaRPr lang="en-US" sz="2100" dirty="0"/>
           </a:p>
           <a:p>
+            <a:pPr indent="0" marL="0">
+              <a:buNone/>
+            </a:pPr>
             <a:r>
               <a:rPr lang="en-US" sz="2100" dirty="0">
                 <a:solidFill>
-                  <a:srgbClr val="17364A"/>
-                </a:solidFill>
-                <a:latin typeface="Aptos" pitchFamily="34" charset="0"/>
-                <a:ea typeface="Aptos" pitchFamily="34" charset="-122"/>
-                <a:cs typeface="Aptos" pitchFamily="34" charset="-120"/>
-              </a:rPr>
-              <a:t>An AI-generated summary, risk score, cluster report, or dashboard can reveal sensitive information even.</a:t>
+                  <a:srgbClr val="003A63"/>
+                </a:solidFill>
+                <a:latin typeface="Aptos" pitchFamily="34" charset="0"/>
+                <a:ea typeface="Aptos" pitchFamily="34" charset="-122"/>
+                <a:cs typeface="Aptos" pitchFamily="34" charset="-120"/>
+              </a:rPr>
+              <a:t>• An AI-generated summary, risk score, cluster report, or dashboard can reveal sensitive.</a:t>
             </a:r>
             <a:endParaRPr lang="en-US" sz="2100" dirty="0"/>
           </a:p>
           <a:p>
+            <a:pPr indent="0" marL="0">
+              <a:buNone/>
+            </a:pPr>
             <a:r>
               <a:rPr lang="en-US" sz="2100" dirty="0">
                 <a:solidFill>
-                  <a:srgbClr val="17364A"/>
-                </a:solidFill>
-                <a:latin typeface="Aptos" pitchFamily="34" charset="0"/>
-                <a:ea typeface="Aptos" pitchFamily="34" charset="-122"/>
-                <a:cs typeface="Aptos" pitchFamily="34" charset="-120"/>
-              </a:rPr>
-              <a:t>Output review should consider small cells, unusual combinations of attributes, identifiable narratives,.</a:t>
+                  <a:srgbClr val="003A63"/>
+                </a:solidFill>
+                <a:latin typeface="Aptos" pitchFamily="34" charset="0"/>
+                <a:ea typeface="Aptos" pitchFamily="34" charset="-122"/>
+                <a:cs typeface="Aptos" pitchFamily="34" charset="-120"/>
+              </a:rPr>
+              <a:t>• Output review should consider small cells, unusual combinations of attributes, identifiable.</a:t>
             </a:r>
             <a:endParaRPr lang="en-US" sz="2100" dirty="0"/>
           </a:p>
@@ -6405,17 +6483,17 @@
         </p:nvSpPr>
         <p:spPr>
           <a:xfrm>
-            <a:off x="7799832" y="1828800"/>
-            <a:ext cx="3145536" cy="685800"/>
-          </a:xfrm>
-          <a:prstGeom prst="rect">
-            <a:avLst/>
-          </a:prstGeom>
-          <a:noFill/>
-          <a:ln/>
-        </p:spPr>
-        <p:txBody>
-          <a:bodyPr wrap="square" lIns="0" tIns="0" rIns="0" bIns="0" rtlCol="0" anchor="t">
+            <a:off x="7799832" y="1801368"/>
+            <a:ext cx="3145536" cy="758952"/>
+          </a:xfrm>
+          <a:prstGeom prst="rect">
+            <a:avLst/>
+          </a:prstGeom>
+          <a:noFill/>
+          <a:ln/>
+        </p:spPr>
+        <p:txBody>
+          <a:bodyPr wrap="square" lIns="254" tIns="254" rIns="254" bIns="254" rtlCol="0" anchor="t">
             <a:normAutofit/>
           </a:bodyPr>
           <a:lstStyle/>
@@ -6424,7 +6502,7 @@
               <a:buNone/>
             </a:pPr>
             <a:r>
-              <a:rPr lang="en-US" sz="1550" dirty="0">
+              <a:rPr lang="en-US" sz="1320" dirty="0">
                 <a:solidFill>
                   <a:srgbClr val="17364A"/>
                 </a:solidFill>
@@ -6434,7 +6512,7 @@
               </a:rPr>
               <a:t>Privacy controls must also apply to outputs.</a:t>
             </a:r>
-            <a:endParaRPr lang="en-US" sz="1550" dirty="0"/>
+            <a:endParaRPr lang="en-US" sz="1320" dirty="0"/>
           </a:p>
         </p:txBody>
       </p:sp>
@@ -6522,13 +6600,16 @@
           <a:ln/>
         </p:spPr>
         <p:txBody>
-          <a:bodyPr wrap="square" lIns="254" tIns="254" rIns="254" bIns="254" rtlCol="0" anchor="t">
+          <a:bodyPr wrap="square" lIns="508" tIns="508" rIns="508" bIns="508" rtlCol="0" anchor="t">
             <a:normAutofit/>
           </a:bodyPr>
           <a:lstStyle/>
           <a:p>
-            <a:r>
-              <a:rPr lang="en-US" sz="1380" dirty="0">
+            <a:pPr indent="0" marL="0">
+              <a:buNone/>
+            </a:pPr>
+            <a:r>
+              <a:rPr lang="en-US" sz="1220" dirty="0">
                 <a:solidFill>
                   <a:srgbClr val="17364A"/>
                 </a:solidFill>
@@ -6536,13 +6617,16 @@
                 <a:ea typeface="Aptos" pitchFamily="34" charset="-122"/>
                 <a:cs typeface="Aptos" pitchFamily="34" charset="-120"/>
               </a:rPr>
-              <a:t>An AI-generated summary, risk score, cluster report, or dashboard can reveal sensitive.</a:t>
-            </a:r>
-            <a:endParaRPr lang="en-US" sz="1380" dirty="0"/>
-          </a:p>
-          <a:p>
-            <a:r>
-              <a:rPr lang="en-US" sz="1380" dirty="0">
+              <a:t>An AI-generated summary, risk score, cluster report, or dashboard.</a:t>
+            </a:r>
+            <a:endParaRPr lang="en-US" sz="1220" dirty="0"/>
+          </a:p>
+          <a:p>
+            <a:pPr indent="0" marL="0">
+              <a:buNone/>
+            </a:pPr>
+            <a:r>
+              <a:rPr lang="en-US" sz="1220" dirty="0">
                 <a:solidFill>
                   <a:srgbClr val="17364A"/>
                 </a:solidFill>
@@ -6550,13 +6634,16 @@
                 <a:ea typeface="Aptos" pitchFamily="34" charset="-122"/>
                 <a:cs typeface="Aptos" pitchFamily="34" charset="-120"/>
               </a:rPr>
-              <a:t>Output review should consider small cells, unusual combinations of attributes,.</a:t>
-            </a:r>
-            <a:endParaRPr lang="en-US" sz="1380" dirty="0"/>
-          </a:p>
-          <a:p>
-            <a:r>
-              <a:rPr lang="en-US" sz="1380" dirty="0">
+              <a:t>Output review should consider small cells, unusual combinations of.</a:t>
+            </a:r>
+            <a:endParaRPr lang="en-US" sz="1220" dirty="0"/>
+          </a:p>
+          <a:p>
+            <a:pPr indent="0" marL="0">
+              <a:buNone/>
+            </a:pPr>
+            <a:r>
+              <a:rPr lang="en-US" sz="1220" dirty="0">
                 <a:solidFill>
                   <a:srgbClr val="17364A"/>
                 </a:solidFill>
@@ -6564,9 +6651,9 @@
                 <a:ea typeface="Aptos" pitchFamily="34" charset="-122"/>
                 <a:cs typeface="Aptos" pitchFamily="34" charset="-120"/>
               </a:rPr>
-              <a:t>Logs should document who generated outputs, what data were used, and whether the output.</a:t>
-            </a:r>
-            <a:endParaRPr lang="en-US" sz="1380" dirty="0"/>
+              <a:t>Logs should document who generated outputs, what data were used,.</a:t>
+            </a:r>
+            <a:endParaRPr lang="en-US" sz="1220" dirty="0"/>
           </a:p>
         </p:txBody>
       </p:sp>
@@ -6644,17 +6731,17 @@
         </p:nvSpPr>
         <p:spPr>
           <a:xfrm>
-            <a:off x="7799832" y="5001768"/>
-            <a:ext cx="3145536" cy="502920"/>
-          </a:xfrm>
-          <a:prstGeom prst="rect">
-            <a:avLst/>
-          </a:prstGeom>
-          <a:noFill/>
-          <a:ln/>
-        </p:spPr>
-        <p:txBody>
-          <a:bodyPr wrap="square" lIns="0" tIns="0" rIns="0" bIns="0" rtlCol="0" anchor="t">
+            <a:off x="7799832" y="4974336"/>
+            <a:ext cx="3145536" cy="576072"/>
+          </a:xfrm>
+          <a:prstGeom prst="rect">
+            <a:avLst/>
+          </a:prstGeom>
+          <a:noFill/>
+          <a:ln/>
+        </p:spPr>
+        <p:txBody>
+          <a:bodyPr wrap="square" lIns="254" tIns="254" rIns="254" bIns="254" rtlCol="0" anchor="t">
             <a:normAutofit/>
           </a:bodyPr>
           <a:lstStyle/>
@@ -6663,7 +6750,7 @@
               <a:buNone/>
             </a:pPr>
             <a:r>
-              <a:rPr lang="en-US" sz="1550" dirty="0">
+              <a:rPr lang="en-US" sz="1320" dirty="0">
                 <a:solidFill>
                   <a:srgbClr val="17364A"/>
                 </a:solidFill>
@@ -6671,9 +6758,9 @@
                 <a:ea typeface="Aptos" pitchFamily="34" charset="-122"/>
                 <a:cs typeface="Aptos" pitchFamily="34" charset="-120"/>
               </a:rPr>
-              <a:t>Identify what could go wrong, who could be affected, what safeguards are needed, and what evidence should be reviewed before use expands.</a:t>
-            </a:r>
-            <a:endParaRPr lang="en-US" sz="1550" dirty="0"/>
+              <a:t>Identify what could go wrong, who could be affected, what safeguards are needed, and what evidence should be reviewed.</a:t>
+            </a:r>
+            <a:endParaRPr lang="en-US" sz="1320" dirty="0"/>
           </a:p>
         </p:txBody>
       </p:sp>
@@ -6974,49 +7061,58 @@
           <a:ln/>
         </p:spPr>
         <p:txBody>
-          <a:bodyPr wrap="square" lIns="635" tIns="635" rIns="635" bIns="635" rtlCol="0" anchor="t">
+          <a:bodyPr wrap="square" lIns="1016" tIns="1016" rIns="1016" bIns="1016" rtlCol="0" anchor="t">
             <a:normAutofit/>
           </a:bodyPr>
           <a:lstStyle/>
           <a:p>
+            <a:pPr indent="0" marL="0">
+              <a:buNone/>
+            </a:pPr>
             <a:r>
               <a:rPr lang="en-US" sz="2100" dirty="0">
                 <a:solidFill>
-                  <a:srgbClr val="17364A"/>
-                </a:solidFill>
-                <a:latin typeface="Aptos" pitchFamily="34" charset="0"/>
-                <a:ea typeface="Aptos" pitchFamily="34" charset="-122"/>
-                <a:cs typeface="Aptos" pitchFamily="34" charset="-120"/>
-              </a:rPr>
-              <a:t>A major failure mode is assuming that de-identification is permanent.</a:t>
+                  <a:srgbClr val="003A63"/>
+                </a:solidFill>
+                <a:latin typeface="Aptos" pitchFamily="34" charset="0"/>
+                <a:ea typeface="Aptos" pitchFamily="34" charset="-122"/>
+                <a:cs typeface="Aptos" pitchFamily="34" charset="-120"/>
+              </a:rPr>
+              <a:t>• A major failure mode is assuming that de-identification is permanent.</a:t>
             </a:r>
             <a:endParaRPr lang="en-US" sz="2100" dirty="0"/>
           </a:p>
           <a:p>
+            <a:pPr indent="0" marL="0">
+              <a:buNone/>
+            </a:pPr>
             <a:r>
               <a:rPr lang="en-US" sz="2100" dirty="0">
                 <a:solidFill>
-                  <a:srgbClr val="17364A"/>
-                </a:solidFill>
-                <a:latin typeface="Aptos" pitchFamily="34" charset="0"/>
-                <a:ea typeface="Aptos" pitchFamily="34" charset="-122"/>
-                <a:cs typeface="Aptos" pitchFamily="34" charset="-120"/>
-              </a:rPr>
-              <a:t>Data that are de-identified for one purpose may be re-identifiable in another context, especially when.</a:t>
+                  <a:srgbClr val="003A63"/>
+                </a:solidFill>
+                <a:latin typeface="Aptos" pitchFamily="34" charset="0"/>
+                <a:ea typeface="Aptos" pitchFamily="34" charset="-122"/>
+                <a:cs typeface="Aptos" pitchFamily="34" charset="-120"/>
+              </a:rPr>
+              <a:t>• Data that are de-identified for one purpose may be re-identifiable in another context,.</a:t>
             </a:r>
             <a:endParaRPr lang="en-US" sz="2100" dirty="0"/>
           </a:p>
           <a:p>
+            <a:pPr indent="0" marL="0">
+              <a:buNone/>
+            </a:pPr>
             <a:r>
               <a:rPr lang="en-US" sz="2100" dirty="0">
                 <a:solidFill>
-                  <a:srgbClr val="17364A"/>
-                </a:solidFill>
-                <a:latin typeface="Aptos" pitchFamily="34" charset="0"/>
-                <a:ea typeface="Aptos" pitchFamily="34" charset="-122"/>
-                <a:cs typeface="Aptos" pitchFamily="34" charset="-120"/>
-              </a:rPr>
-              <a:t>A guardrail is to perform use-case-specific privacy review and to document assumptions about data.</a:t>
+                  <a:srgbClr val="003A63"/>
+                </a:solidFill>
+                <a:latin typeface="Aptos" pitchFamily="34" charset="0"/>
+                <a:ea typeface="Aptos" pitchFamily="34" charset="-122"/>
+                <a:cs typeface="Aptos" pitchFamily="34" charset="-120"/>
+              </a:rPr>
+              <a:t>• A guardrail is to perform use-case-specific privacy review and to document assumptions about.</a:t>
             </a:r>
             <a:endParaRPr lang="en-US" sz="2100" dirty="0"/>
           </a:p>
@@ -7096,17 +7192,17 @@
         </p:nvSpPr>
         <p:spPr>
           <a:xfrm>
-            <a:off x="7799832" y="1828800"/>
-            <a:ext cx="3145536" cy="685800"/>
-          </a:xfrm>
-          <a:prstGeom prst="rect">
-            <a:avLst/>
-          </a:prstGeom>
-          <a:noFill/>
-          <a:ln/>
-        </p:spPr>
-        <p:txBody>
-          <a:bodyPr wrap="square" lIns="0" tIns="0" rIns="0" bIns="0" rtlCol="0" anchor="t">
+            <a:off x="7799832" y="1801368"/>
+            <a:ext cx="3145536" cy="758952"/>
+          </a:xfrm>
+          <a:prstGeom prst="rect">
+            <a:avLst/>
+          </a:prstGeom>
+          <a:noFill/>
+          <a:ln/>
+        </p:spPr>
+        <p:txBody>
+          <a:bodyPr wrap="square" lIns="254" tIns="254" rIns="254" bIns="254" rtlCol="0" anchor="t">
             <a:normAutofit/>
           </a:bodyPr>
           <a:lstStyle/>
@@ -7115,7 +7211,7 @@
               <a:buNone/>
             </a:pPr>
             <a:r>
-              <a:rPr lang="en-US" sz="1550" dirty="0">
+              <a:rPr lang="en-US" sz="1320" dirty="0">
                 <a:solidFill>
                   <a:srgbClr val="17364A"/>
                 </a:solidFill>
@@ -7125,7 +7221,7 @@
               </a:rPr>
               <a:t>A major failure mode is assuming that de-identification is permanent.</a:t>
             </a:r>
-            <a:endParaRPr lang="en-US" sz="1550" dirty="0"/>
+            <a:endParaRPr lang="en-US" sz="1320" dirty="0"/>
           </a:p>
         </p:txBody>
       </p:sp>
@@ -7213,13 +7309,16 @@
           <a:ln/>
         </p:spPr>
         <p:txBody>
-          <a:bodyPr wrap="square" lIns="254" tIns="254" rIns="254" bIns="254" rtlCol="0" anchor="t">
+          <a:bodyPr wrap="square" lIns="508" tIns="508" rIns="508" bIns="508" rtlCol="0" anchor="t">
             <a:normAutofit/>
           </a:bodyPr>
           <a:lstStyle/>
           <a:p>
-            <a:r>
-              <a:rPr lang="en-US" sz="1380" dirty="0">
+            <a:pPr indent="0" marL="0">
+              <a:buNone/>
+            </a:pPr>
+            <a:r>
+              <a:rPr lang="en-US" sz="1220" dirty="0">
                 <a:solidFill>
                   <a:srgbClr val="17364A"/>
                 </a:solidFill>
@@ -7227,13 +7326,16 @@
                 <a:ea typeface="Aptos" pitchFamily="34" charset="-122"/>
                 <a:cs typeface="Aptos" pitchFamily="34" charset="-120"/>
               </a:rPr>
-              <a:t>Data that are de-identified for one purpose may be re-identifiable in another context,.</a:t>
-            </a:r>
-            <a:endParaRPr lang="en-US" sz="1380" dirty="0"/>
-          </a:p>
-          <a:p>
-            <a:r>
-              <a:rPr lang="en-US" sz="1380" dirty="0">
+              <a:t>Data that are de-identified for one purpose may be re-identifiable.</a:t>
+            </a:r>
+            <a:endParaRPr lang="en-US" sz="1220" dirty="0"/>
+          </a:p>
+          <a:p>
+            <a:pPr indent="0" marL="0">
+              <a:buNone/>
+            </a:pPr>
+            <a:r>
+              <a:rPr lang="en-US" sz="1220" dirty="0">
                 <a:solidFill>
                   <a:srgbClr val="17364A"/>
                 </a:solidFill>
@@ -7241,13 +7343,16 @@
                 <a:ea typeface="Aptos" pitchFamily="34" charset="-122"/>
                 <a:cs typeface="Aptos" pitchFamily="34" charset="-120"/>
               </a:rPr>
-              <a:t>A guardrail is to perform use-case-specific privacy review and to document assumptions.</a:t>
-            </a:r>
-            <a:endParaRPr lang="en-US" sz="1380" dirty="0"/>
-          </a:p>
-          <a:p>
-            <a:r>
-              <a:rPr lang="en-US" sz="1380" dirty="0">
+              <a:t>A guardrail is to perform use-case-specific privacy review and to.</a:t>
+            </a:r>
+            <a:endParaRPr lang="en-US" sz="1220" dirty="0"/>
+          </a:p>
+          <a:p>
+            <a:pPr indent="0" marL="0">
+              <a:buNone/>
+            </a:pPr>
+            <a:r>
+              <a:rPr lang="en-US" sz="1220" dirty="0">
                 <a:solidFill>
                   <a:srgbClr val="17364A"/>
                 </a:solidFill>
@@ -7255,9 +7360,9 @@
                 <a:ea typeface="Aptos" pitchFamily="34" charset="-122"/>
                 <a:cs typeface="Aptos" pitchFamily="34" charset="-120"/>
               </a:rPr>
-              <a:t>Another failure mode is exposing sensitive data to unapproved AI tools.</a:t>
-            </a:r>
-            <a:endParaRPr lang="en-US" sz="1380" dirty="0"/>
+              <a:t>Another failure mode is exposing sensitive data to unapproved AI.</a:t>
+            </a:r>
+            <a:endParaRPr lang="en-US" sz="1220" dirty="0"/>
           </a:p>
         </p:txBody>
       </p:sp>
@@ -7335,17 +7440,17 @@
         </p:nvSpPr>
         <p:spPr>
           <a:xfrm>
-            <a:off x="7799832" y="5001768"/>
-            <a:ext cx="3145536" cy="502920"/>
-          </a:xfrm>
-          <a:prstGeom prst="rect">
-            <a:avLst/>
-          </a:prstGeom>
-          <a:noFill/>
-          <a:ln/>
-        </p:spPr>
-        <p:txBody>
-          <a:bodyPr wrap="square" lIns="0" tIns="0" rIns="0" bIns="0" rtlCol="0" anchor="t">
+            <a:off x="7799832" y="4974336"/>
+            <a:ext cx="3145536" cy="576072"/>
+          </a:xfrm>
+          <a:prstGeom prst="rect">
+            <a:avLst/>
+          </a:prstGeom>
+          <a:noFill/>
+          <a:ln/>
+        </p:spPr>
+        <p:txBody>
+          <a:bodyPr wrap="square" lIns="254" tIns="254" rIns="254" bIns="254" rtlCol="0" anchor="t">
             <a:normAutofit/>
           </a:bodyPr>
           <a:lstStyle/>
@@ -7354,7 +7459,7 @@
               <a:buNone/>
             </a:pPr>
             <a:r>
-              <a:rPr lang="en-US" sz="1550" dirty="0">
+              <a:rPr lang="en-US" sz="1320" dirty="0">
                 <a:solidFill>
                   <a:srgbClr val="17364A"/>
                 </a:solidFill>
@@ -7362,9 +7467,9 @@
                 <a:ea typeface="Aptos" pitchFamily="34" charset="-122"/>
                 <a:cs typeface="Aptos" pitchFamily="34" charset="-120"/>
               </a:rPr>
-              <a:t>Identify what could go wrong, who could be affected, what safeguards are needed, and what evidence should be reviewed before use expands.</a:t>
-            </a:r>
-            <a:endParaRPr lang="en-US" sz="1550" dirty="0"/>
+              <a:t>Identify what could go wrong, who could be affected, what safeguards are needed, and what evidence should be reviewed.</a:t>
+            </a:r>
+            <a:endParaRPr lang="en-US" sz="1320" dirty="0"/>
           </a:p>
         </p:txBody>
       </p:sp>
@@ -7665,49 +7770,58 @@
           <a:ln/>
         </p:spPr>
         <p:txBody>
-          <a:bodyPr wrap="square" lIns="635" tIns="635" rIns="635" bIns="635" rtlCol="0" anchor="t">
+          <a:bodyPr wrap="square" lIns="1016" tIns="1016" rIns="1016" bIns="1016" rtlCol="0" anchor="t">
             <a:normAutofit/>
           </a:bodyPr>
           <a:lstStyle/>
           <a:p>
+            <a:pPr indent="0" marL="0">
+              <a:buNone/>
+            </a:pPr>
             <a:r>
               <a:rPr lang="en-US" sz="2100" dirty="0">
                 <a:solidFill>
-                  <a:srgbClr val="17364A"/>
-                </a:solidFill>
-                <a:latin typeface="Aptos" pitchFamily="34" charset="0"/>
-                <a:ea typeface="Aptos" pitchFamily="34" charset="-122"/>
-                <a:cs typeface="Aptos" pitchFamily="34" charset="-120"/>
-              </a:rPr>
-              <a:t>Privacy risk can also arise from vendor relationships.</a:t>
+                  <a:srgbClr val="003A63"/>
+                </a:solidFill>
+                <a:latin typeface="Aptos" pitchFamily="34" charset="0"/>
+                <a:ea typeface="Aptos" pitchFamily="34" charset="-122"/>
+                <a:cs typeface="Aptos" pitchFamily="34" charset="-120"/>
+              </a:rPr>
+              <a:t>• Privacy risk can also arise from vendor relationships.</a:t>
             </a:r>
             <a:endParaRPr lang="en-US" sz="2100" dirty="0"/>
           </a:p>
           <a:p>
+            <a:pPr indent="0" marL="0">
+              <a:buNone/>
+            </a:pPr>
             <a:r>
               <a:rPr lang="en-US" sz="2100" dirty="0">
                 <a:solidFill>
-                  <a:srgbClr val="17364A"/>
-                </a:solidFill>
-                <a:latin typeface="Aptos" pitchFamily="34" charset="0"/>
-                <a:ea typeface="Aptos" pitchFamily="34" charset="-122"/>
-                <a:cs typeface="Aptos" pitchFamily="34" charset="-120"/>
-              </a:rPr>
-              <a:t>Vendors may request sample data for testing or model tuning.</a:t>
+                  <a:srgbClr val="003A63"/>
+                </a:solidFill>
+                <a:latin typeface="Aptos" pitchFamily="34" charset="0"/>
+                <a:ea typeface="Aptos" pitchFamily="34" charset="-122"/>
+                <a:cs typeface="Aptos" pitchFamily="34" charset="-120"/>
+              </a:rPr>
+              <a:t>• Vendors may request sample data for testing or model tuning.</a:t>
             </a:r>
             <a:endParaRPr lang="en-US" sz="2100" dirty="0"/>
           </a:p>
           <a:p>
+            <a:pPr indent="0" marL="0">
+              <a:buNone/>
+            </a:pPr>
             <a:r>
               <a:rPr lang="en-US" sz="2100" dirty="0">
                 <a:solidFill>
-                  <a:srgbClr val="17364A"/>
-                </a:solidFill>
-                <a:latin typeface="Aptos" pitchFamily="34" charset="0"/>
-                <a:ea typeface="Aptos" pitchFamily="34" charset="-122"/>
-                <a:cs typeface="Aptos" pitchFamily="34" charset="-120"/>
-              </a:rPr>
-              <a:t>Agencies should use synthetic, masked, or minimized data whenever possible and should require.</a:t>
+                  <a:srgbClr val="003A63"/>
+                </a:solidFill>
+                <a:latin typeface="Aptos" pitchFamily="34" charset="0"/>
+                <a:ea typeface="Aptos" pitchFamily="34" charset="-122"/>
+                <a:cs typeface="Aptos" pitchFamily="34" charset="-120"/>
+              </a:rPr>
+              <a:t>• Agencies should use synthetic, masked, or minimized data whenever possible and should require.</a:t>
             </a:r>
             <a:endParaRPr lang="en-US" sz="2100" dirty="0"/>
           </a:p>
@@ -7787,17 +7901,17 @@
         </p:nvSpPr>
         <p:spPr>
           <a:xfrm>
-            <a:off x="7799832" y="1828800"/>
-            <a:ext cx="3145536" cy="685800"/>
-          </a:xfrm>
-          <a:prstGeom prst="rect">
-            <a:avLst/>
-          </a:prstGeom>
-          <a:noFill/>
-          <a:ln/>
-        </p:spPr>
-        <p:txBody>
-          <a:bodyPr wrap="square" lIns="0" tIns="0" rIns="0" bIns="0" rtlCol="0" anchor="t">
+            <a:off x="7799832" y="1801368"/>
+            <a:ext cx="3145536" cy="758952"/>
+          </a:xfrm>
+          <a:prstGeom prst="rect">
+            <a:avLst/>
+          </a:prstGeom>
+          <a:noFill/>
+          <a:ln/>
+        </p:spPr>
+        <p:txBody>
+          <a:bodyPr wrap="square" lIns="254" tIns="254" rIns="254" bIns="254" rtlCol="0" anchor="t">
             <a:normAutofit/>
           </a:bodyPr>
           <a:lstStyle/>
@@ -7806,7 +7920,7 @@
               <a:buNone/>
             </a:pPr>
             <a:r>
-              <a:rPr lang="en-US" sz="1550" dirty="0">
+              <a:rPr lang="en-US" sz="1320" dirty="0">
                 <a:solidFill>
                   <a:srgbClr val="17364A"/>
                 </a:solidFill>
@@ -7816,7 +7930,7 @@
               </a:rPr>
               <a:t>Privacy risk can also arise from vendor relationships.</a:t>
             </a:r>
-            <a:endParaRPr lang="en-US" sz="1550" dirty="0"/>
+            <a:endParaRPr lang="en-US" sz="1320" dirty="0"/>
           </a:p>
         </p:txBody>
       </p:sp>
@@ -7904,13 +8018,16 @@
           <a:ln/>
         </p:spPr>
         <p:txBody>
-          <a:bodyPr wrap="square" lIns="254" tIns="254" rIns="254" bIns="254" rtlCol="0" anchor="t">
+          <a:bodyPr wrap="square" lIns="508" tIns="508" rIns="508" bIns="508" rtlCol="0" anchor="t">
             <a:normAutofit/>
           </a:bodyPr>
           <a:lstStyle/>
           <a:p>
-            <a:r>
-              <a:rPr lang="en-US" sz="1380" dirty="0">
+            <a:pPr indent="0" marL="0">
+              <a:buNone/>
+            </a:pPr>
+            <a:r>
+              <a:rPr lang="en-US" sz="1220" dirty="0">
                 <a:solidFill>
                   <a:srgbClr val="17364A"/>
                 </a:solidFill>
@@ -7920,11 +8037,14 @@
               </a:rPr>
               <a:t>Privacy risk can also arise from vendor relationships.</a:t>
             </a:r>
-            <a:endParaRPr lang="en-US" sz="1380" dirty="0"/>
-          </a:p>
-          <a:p>
-            <a:r>
-              <a:rPr lang="en-US" sz="1380" dirty="0">
+            <a:endParaRPr lang="en-US" sz="1220" dirty="0"/>
+          </a:p>
+          <a:p>
+            <a:pPr indent="0" marL="0">
+              <a:buNone/>
+            </a:pPr>
+            <a:r>
+              <a:rPr lang="en-US" sz="1220" dirty="0">
                 <a:solidFill>
                   <a:srgbClr val="17364A"/>
                 </a:solidFill>
@@ -7934,11 +8054,14 @@
               </a:rPr>
               <a:t>Vendors may request sample data for testing or model tuning.</a:t>
             </a:r>
-            <a:endParaRPr lang="en-US" sz="1380" dirty="0"/>
-          </a:p>
-          <a:p>
-            <a:r>
-              <a:rPr lang="en-US" sz="1380" dirty="0">
+            <a:endParaRPr lang="en-US" sz="1220" dirty="0"/>
+          </a:p>
+          <a:p>
+            <a:pPr indent="0" marL="0">
+              <a:buNone/>
+            </a:pPr>
+            <a:r>
+              <a:rPr lang="en-US" sz="1220" dirty="0">
                 <a:solidFill>
                   <a:srgbClr val="17364A"/>
                 </a:solidFill>
@@ -7946,9 +8069,9 @@
                 <a:ea typeface="Aptos" pitchFamily="34" charset="-122"/>
                 <a:cs typeface="Aptos" pitchFamily="34" charset="-120"/>
               </a:rPr>
-              <a:t>Agencies should use synthetic, masked, or minimized data whenever possible and should.</a:t>
-            </a:r>
-            <a:endParaRPr lang="en-US" sz="1380" dirty="0"/>
+              <a:t>Agencies should use synthetic, masked, or minimized data whenever.</a:t>
+            </a:r>
+            <a:endParaRPr lang="en-US" sz="1220" dirty="0"/>
           </a:p>
         </p:txBody>
       </p:sp>
@@ -8026,17 +8149,17 @@
         </p:nvSpPr>
         <p:spPr>
           <a:xfrm>
-            <a:off x="7799832" y="5001768"/>
-            <a:ext cx="3145536" cy="502920"/>
-          </a:xfrm>
-          <a:prstGeom prst="rect">
-            <a:avLst/>
-          </a:prstGeom>
-          <a:noFill/>
-          <a:ln/>
-        </p:spPr>
-        <p:txBody>
-          <a:bodyPr wrap="square" lIns="0" tIns="0" rIns="0" bIns="0" rtlCol="0" anchor="t">
+            <a:off x="7799832" y="4974336"/>
+            <a:ext cx="3145536" cy="576072"/>
+          </a:xfrm>
+          <a:prstGeom prst="rect">
+            <a:avLst/>
+          </a:prstGeom>
+          <a:noFill/>
+          <a:ln/>
+        </p:spPr>
+        <p:txBody>
+          <a:bodyPr wrap="square" lIns="254" tIns="254" rIns="254" bIns="254" rtlCol="0" anchor="t">
             <a:normAutofit/>
           </a:bodyPr>
           <a:lstStyle/>
@@ -8045,7 +8168,7 @@
               <a:buNone/>
             </a:pPr>
             <a:r>
-              <a:rPr lang="en-US" sz="1550" dirty="0">
+              <a:rPr lang="en-US" sz="1320" dirty="0">
                 <a:solidFill>
                   <a:srgbClr val="17364A"/>
                 </a:solidFill>
@@ -8053,9 +8176,9 @@
                 <a:ea typeface="Aptos" pitchFamily="34" charset="-122"/>
                 <a:cs typeface="Aptos" pitchFamily="34" charset="-120"/>
               </a:rPr>
-              <a:t>Identify what could go wrong, who could be affected, what safeguards are needed, and what evidence should be reviewed before use expands.</a:t>
-            </a:r>
-            <a:endParaRPr lang="en-US" sz="1550" dirty="0"/>
+              <a:t>Identify what could go wrong, who could be affected, what safeguards are needed, and what evidence should be reviewed.</a:t>
+            </a:r>
+            <a:endParaRPr lang="en-US" sz="1320" dirty="0"/>
           </a:p>
         </p:txBody>
       </p:sp>
@@ -8356,49 +8479,58 @@
           <a:ln/>
         </p:spPr>
         <p:txBody>
-          <a:bodyPr wrap="square" lIns="635" tIns="635" rIns="635" bIns="635" rtlCol="0" anchor="t">
+          <a:bodyPr wrap="square" lIns="1016" tIns="1016" rIns="1016" bIns="1016" rtlCol="0" anchor="t">
             <a:normAutofit/>
           </a:bodyPr>
           <a:lstStyle/>
           <a:p>
+            <a:pPr indent="0" marL="0">
+              <a:buNone/>
+            </a:pPr>
             <a:r>
               <a:rPr lang="en-US" sz="2100" dirty="0">
                 <a:solidFill>
-                  <a:srgbClr val="17364A"/>
-                </a:solidFill>
-                <a:latin typeface="Aptos" pitchFamily="34" charset="0"/>
-                <a:ea typeface="Aptos" pitchFamily="34" charset="-122"/>
-                <a:cs typeface="Aptos" pitchFamily="34" charset="-120"/>
-              </a:rPr>
-              <a:t>For generative AI, privacy-preserving design means controlling what data can be placed in prompts, what.</a:t>
+                  <a:srgbClr val="003A63"/>
+                </a:solidFill>
+                <a:latin typeface="Aptos" pitchFamily="34" charset="0"/>
+                <a:ea typeface="Aptos" pitchFamily="34" charset="-122"/>
+                <a:cs typeface="Aptos" pitchFamily="34" charset="-120"/>
+              </a:rPr>
+              <a:t>• For generative AI, privacy-preserving design means controlling what data can be placed in.</a:t>
             </a:r>
             <a:endParaRPr lang="en-US" sz="2100" dirty="0"/>
           </a:p>
           <a:p>
+            <a:pPr indent="0" marL="0">
+              <a:buNone/>
+            </a:pPr>
             <a:r>
               <a:rPr lang="en-US" sz="2100" dirty="0">
                 <a:solidFill>
-                  <a:srgbClr val="17364A"/>
-                </a:solidFill>
-                <a:latin typeface="Aptos" pitchFamily="34" charset="0"/>
-                <a:ea typeface="Aptos" pitchFamily="34" charset="-122"/>
-                <a:cs typeface="Aptos" pitchFamily="34" charset="-120"/>
-              </a:rPr>
-              <a:t>Prompt templates should make prohibited content clear and should encourage use of de-identified or.</a:t>
+                  <a:srgbClr val="003A63"/>
+                </a:solidFill>
+                <a:latin typeface="Aptos" pitchFamily="34" charset="0"/>
+                <a:ea typeface="Aptos" pitchFamily="34" charset="-122"/>
+                <a:cs typeface="Aptos" pitchFamily="34" charset="-120"/>
+              </a:rPr>
+              <a:t>• Prompt templates should make prohibited content clear and should encourage use of.</a:t>
             </a:r>
             <a:endParaRPr lang="en-US" sz="2100" dirty="0"/>
           </a:p>
           <a:p>
+            <a:pPr indent="0" marL="0">
+              <a:buNone/>
+            </a:pPr>
             <a:r>
               <a:rPr lang="en-US" sz="2100" dirty="0">
                 <a:solidFill>
-                  <a:srgbClr val="17364A"/>
-                </a:solidFill>
-                <a:latin typeface="Aptos" pitchFamily="34" charset="0"/>
-                <a:ea typeface="Aptos" pitchFamily="34" charset="-122"/>
-                <a:cs typeface="Aptos" pitchFamily="34" charset="-120"/>
-              </a:rPr>
-              <a:t>For predictive analytics, privacy concerns include which features are used, whether sensitive.</a:t>
+                  <a:srgbClr val="003A63"/>
+                </a:solidFill>
+                <a:latin typeface="Aptos" pitchFamily="34" charset="0"/>
+                <a:ea typeface="Aptos" pitchFamily="34" charset="-122"/>
+                <a:cs typeface="Aptos" pitchFamily="34" charset="-120"/>
+              </a:rPr>
+              <a:t>• For predictive analytics, privacy concerns include which features are used, whether sensitive.</a:t>
             </a:r>
             <a:endParaRPr lang="en-US" sz="2100" dirty="0"/>
           </a:p>
@@ -8478,17 +8610,17 @@
         </p:nvSpPr>
         <p:spPr>
           <a:xfrm>
-            <a:off x="7799832" y="1828800"/>
-            <a:ext cx="3145536" cy="685800"/>
-          </a:xfrm>
-          <a:prstGeom prst="rect">
-            <a:avLst/>
-          </a:prstGeom>
-          <a:noFill/>
-          <a:ln/>
-        </p:spPr>
-        <p:txBody>
-          <a:bodyPr wrap="square" lIns="0" tIns="0" rIns="0" bIns="0" rtlCol="0" anchor="t">
+            <a:off x="7799832" y="1801368"/>
+            <a:ext cx="3145536" cy="758952"/>
+          </a:xfrm>
+          <a:prstGeom prst="rect">
+            <a:avLst/>
+          </a:prstGeom>
+          <a:noFill/>
+          <a:ln/>
+        </p:spPr>
+        <p:txBody>
+          <a:bodyPr wrap="square" lIns="254" tIns="254" rIns="254" bIns="254" rtlCol="0" anchor="t">
             <a:normAutofit/>
           </a:bodyPr>
           <a:lstStyle/>
@@ -8497,7 +8629,7 @@
               <a:buNone/>
             </a:pPr>
             <a:r>
-              <a:rPr lang="en-US" sz="1550" dirty="0">
+              <a:rPr lang="en-US" sz="1320" dirty="0">
                 <a:solidFill>
                   <a:srgbClr val="17364A"/>
                 </a:solidFill>
@@ -8507,7 +8639,7 @@
               </a:rPr>
               <a:t>For generative AI, privacy-preserving design means controlling what data can be placed in prompts, what.</a:t>
             </a:r>
-            <a:endParaRPr lang="en-US" sz="1550" dirty="0"/>
+            <a:endParaRPr lang="en-US" sz="1320" dirty="0"/>
           </a:p>
         </p:txBody>
       </p:sp>
@@ -8595,13 +8727,16 @@
           <a:ln/>
         </p:spPr>
         <p:txBody>
-          <a:bodyPr wrap="square" lIns="254" tIns="254" rIns="254" bIns="254" rtlCol="0" anchor="t">
+          <a:bodyPr wrap="square" lIns="508" tIns="508" rIns="508" bIns="508" rtlCol="0" anchor="t">
             <a:normAutofit/>
           </a:bodyPr>
           <a:lstStyle/>
           <a:p>
-            <a:r>
-              <a:rPr lang="en-US" sz="1380" dirty="0">
+            <a:pPr indent="0" marL="0">
+              <a:buNone/>
+            </a:pPr>
+            <a:r>
+              <a:rPr lang="en-US" sz="1220" dirty="0">
                 <a:solidFill>
                   <a:srgbClr val="17364A"/>
                 </a:solidFill>
@@ -8609,13 +8744,16 @@
                 <a:ea typeface="Aptos" pitchFamily="34" charset="-122"/>
                 <a:cs typeface="Aptos" pitchFamily="34" charset="-120"/>
               </a:rPr>
-              <a:t>For generative AI, privacy-preserving design means controlling what data can be placed in.</a:t>
-            </a:r>
-            <a:endParaRPr lang="en-US" sz="1380" dirty="0"/>
-          </a:p>
-          <a:p>
-            <a:r>
-              <a:rPr lang="en-US" sz="1380" dirty="0">
+              <a:t>For generative AI, privacy-preserving design means controlling.</a:t>
+            </a:r>
+            <a:endParaRPr lang="en-US" sz="1220" dirty="0"/>
+          </a:p>
+          <a:p>
+            <a:pPr indent="0" marL="0">
+              <a:buNone/>
+            </a:pPr>
+            <a:r>
+              <a:rPr lang="en-US" sz="1220" dirty="0">
                 <a:solidFill>
                   <a:srgbClr val="17364A"/>
                 </a:solidFill>
@@ -8623,13 +8761,16 @@
                 <a:ea typeface="Aptos" pitchFamily="34" charset="-122"/>
                 <a:cs typeface="Aptos" pitchFamily="34" charset="-120"/>
               </a:rPr>
-              <a:t>Prompt templates should make prohibited content clear and should encourage use of.</a:t>
-            </a:r>
-            <a:endParaRPr lang="en-US" sz="1380" dirty="0"/>
-          </a:p>
-          <a:p>
-            <a:r>
-              <a:rPr lang="en-US" sz="1380" dirty="0">
+              <a:t>Prompt templates should make prohibited content clear and should.</a:t>
+            </a:r>
+            <a:endParaRPr lang="en-US" sz="1220" dirty="0"/>
+          </a:p>
+          <a:p>
+            <a:pPr indent="0" marL="0">
+              <a:buNone/>
+            </a:pPr>
+            <a:r>
+              <a:rPr lang="en-US" sz="1220" dirty="0">
                 <a:solidFill>
                   <a:srgbClr val="17364A"/>
                 </a:solidFill>
@@ -8637,9 +8778,9 @@
                 <a:ea typeface="Aptos" pitchFamily="34" charset="-122"/>
                 <a:cs typeface="Aptos" pitchFamily="34" charset="-120"/>
               </a:rPr>
-              <a:t>For predictive analytics, privacy concerns include which features are used, whether.</a:t>
-            </a:r>
-            <a:endParaRPr lang="en-US" sz="1380" dirty="0"/>
+              <a:t>For predictive analytics, privacy concerns include which features.</a:t>
+            </a:r>
+            <a:endParaRPr lang="en-US" sz="1220" dirty="0"/>
           </a:p>
         </p:txBody>
       </p:sp>
@@ -8717,17 +8858,17 @@
         </p:nvSpPr>
         <p:spPr>
           <a:xfrm>
-            <a:off x="7799832" y="5001768"/>
-            <a:ext cx="3145536" cy="502920"/>
-          </a:xfrm>
-          <a:prstGeom prst="rect">
-            <a:avLst/>
-          </a:prstGeom>
-          <a:noFill/>
-          <a:ln/>
-        </p:spPr>
-        <p:txBody>
-          <a:bodyPr wrap="square" lIns="0" tIns="0" rIns="0" bIns="0" rtlCol="0" anchor="t">
+            <a:off x="7799832" y="4974336"/>
+            <a:ext cx="3145536" cy="576072"/>
+          </a:xfrm>
+          <a:prstGeom prst="rect">
+            <a:avLst/>
+          </a:prstGeom>
+          <a:noFill/>
+          <a:ln/>
+        </p:spPr>
+        <p:txBody>
+          <a:bodyPr wrap="square" lIns="254" tIns="254" rIns="254" bIns="254" rtlCol="0" anchor="t">
             <a:normAutofit/>
           </a:bodyPr>
           <a:lstStyle/>
@@ -8736,7 +8877,7 @@
               <a:buNone/>
             </a:pPr>
             <a:r>
-              <a:rPr lang="en-US" sz="1550" dirty="0">
+              <a:rPr lang="en-US" sz="1320" dirty="0">
                 <a:solidFill>
                   <a:srgbClr val="17364A"/>
                 </a:solidFill>
@@ -8744,9 +8885,9 @@
                 <a:ea typeface="Aptos" pitchFamily="34" charset="-122"/>
                 <a:cs typeface="Aptos" pitchFamily="34" charset="-120"/>
               </a:rPr>
-              <a:t>Identify what could go wrong, who could be affected, what safeguards are needed, and what evidence should be reviewed before use expands.</a:t>
-            </a:r>
-            <a:endParaRPr lang="en-US" sz="1550" dirty="0"/>
+              <a:t>Identify what could go wrong, who could be affected, what safeguards are needed, and what evidence should be reviewed.</a:t>
+            </a:r>
+            <a:endParaRPr lang="en-US" sz="1320" dirty="0"/>
           </a:p>
         </p:txBody>
       </p:sp>
@@ -9047,49 +9188,58 @@
           <a:ln/>
         </p:spPr>
         <p:txBody>
-          <a:bodyPr wrap="square" lIns="635" tIns="635" rIns="635" bIns="635" rtlCol="0" anchor="t">
+          <a:bodyPr wrap="square" lIns="1016" tIns="1016" rIns="1016" bIns="1016" rtlCol="0" anchor="t">
             <a:normAutofit/>
           </a:bodyPr>
           <a:lstStyle/>
           <a:p>
+            <a:pPr indent="0" marL="0">
+              <a:buNone/>
+            </a:pPr>
             <a:r>
               <a:rPr lang="en-US" sz="2100" dirty="0">
                 <a:solidFill>
-                  <a:srgbClr val="17364A"/>
-                </a:solidFill>
-                <a:latin typeface="Aptos" pitchFamily="34" charset="0"/>
-                <a:ea typeface="Aptos" pitchFamily="34" charset="-122"/>
-                <a:cs typeface="Aptos" pitchFamily="34" charset="-120"/>
-              </a:rPr>
-              <a:t>Which AI use cases in your agency require identifiable or sensitive data, and which could be completed.</a:t>
+                  <a:srgbClr val="003A63"/>
+                </a:solidFill>
+                <a:latin typeface="Aptos" pitchFamily="34" charset="0"/>
+                <a:ea typeface="Aptos" pitchFamily="34" charset="-122"/>
+                <a:cs typeface="Aptos" pitchFamily="34" charset="-120"/>
+              </a:rPr>
+              <a:t>• Which AI use cases in your agency require identifiable or sensitive data, and which could be.</a:t>
             </a:r>
             <a:endParaRPr lang="en-US" sz="2100" dirty="0"/>
           </a:p>
           <a:p>
+            <a:pPr indent="0" marL="0">
+              <a:buNone/>
+            </a:pPr>
             <a:r>
               <a:rPr lang="en-US" sz="2100" dirty="0">
                 <a:solidFill>
-                  <a:srgbClr val="17364A"/>
-                </a:solidFill>
-                <a:latin typeface="Aptos" pitchFamily="34" charset="0"/>
-                <a:ea typeface="Aptos" pitchFamily="34" charset="-122"/>
-                <a:cs typeface="Aptos" pitchFamily="34" charset="-120"/>
-              </a:rPr>
-              <a:t>What data elements create the greatest re-identification risk in your context?</a:t>
+                  <a:srgbClr val="003A63"/>
+                </a:solidFill>
+                <a:latin typeface="Aptos" pitchFamily="34" charset="0"/>
+                <a:ea typeface="Aptos" pitchFamily="34" charset="-122"/>
+                <a:cs typeface="Aptos" pitchFamily="34" charset="-120"/>
+              </a:rPr>
+              <a:t>• What data elements create the greatest re-identification risk in your context?</a:t>
             </a:r>
             <a:endParaRPr lang="en-US" sz="2100" dirty="0"/>
           </a:p>
           <a:p>
+            <a:pPr indent="0" marL="0">
+              <a:buNone/>
+            </a:pPr>
             <a:r>
               <a:rPr lang="en-US" sz="2100" dirty="0">
                 <a:solidFill>
-                  <a:srgbClr val="17364A"/>
-                </a:solidFill>
-                <a:latin typeface="Aptos" pitchFamily="34" charset="0"/>
-                <a:ea typeface="Aptos" pitchFamily="34" charset="-122"/>
-                <a:cs typeface="Aptos" pitchFamily="34" charset="-120"/>
-              </a:rPr>
-              <a:t>How are free-text fields reviewed before they are used in AI-supported workflows?</a:t>
+                  <a:srgbClr val="003A63"/>
+                </a:solidFill>
+                <a:latin typeface="Aptos" pitchFamily="34" charset="0"/>
+                <a:ea typeface="Aptos" pitchFamily="34" charset="-122"/>
+                <a:cs typeface="Aptos" pitchFamily="34" charset="-120"/>
+              </a:rPr>
+              <a:t>• How are free-text fields reviewed before they are used in AI-supported workflows?</a:t>
             </a:r>
             <a:endParaRPr lang="en-US" sz="2100" dirty="0"/>
           </a:p>
@@ -9169,17 +9319,17 @@
         </p:nvSpPr>
         <p:spPr>
           <a:xfrm>
-            <a:off x="7799832" y="1828800"/>
-            <a:ext cx="3145536" cy="685800"/>
-          </a:xfrm>
-          <a:prstGeom prst="rect">
-            <a:avLst/>
-          </a:prstGeom>
-          <a:noFill/>
-          <a:ln/>
-        </p:spPr>
-        <p:txBody>
-          <a:bodyPr wrap="square" lIns="0" tIns="0" rIns="0" bIns="0" rtlCol="0" anchor="t">
+            <a:off x="7799832" y="1801368"/>
+            <a:ext cx="3145536" cy="758952"/>
+          </a:xfrm>
+          <a:prstGeom prst="rect">
+            <a:avLst/>
+          </a:prstGeom>
+          <a:noFill/>
+          <a:ln/>
+        </p:spPr>
+        <p:txBody>
+          <a:bodyPr wrap="square" lIns="254" tIns="254" rIns="254" bIns="254" rtlCol="0" anchor="t">
             <a:normAutofit/>
           </a:bodyPr>
           <a:lstStyle/>
@@ -9188,7 +9338,7 @@
               <a:buNone/>
             </a:pPr>
             <a:r>
-              <a:rPr lang="en-US" sz="1550" dirty="0">
+              <a:rPr lang="en-US" sz="1320" dirty="0">
                 <a:solidFill>
                   <a:srgbClr val="17364A"/>
                 </a:solidFill>
@@ -9198,7 +9348,7 @@
               </a:rPr>
               <a:t>Which AI use cases in your agency require identifiable or sensitive data, and which could be completed.</a:t>
             </a:r>
-            <a:endParaRPr lang="en-US" sz="1550" dirty="0"/>
+            <a:endParaRPr lang="en-US" sz="1320" dirty="0"/>
           </a:p>
         </p:txBody>
       </p:sp>
@@ -9286,13 +9436,16 @@
           <a:ln/>
         </p:spPr>
         <p:txBody>
-          <a:bodyPr wrap="square" lIns="254" tIns="254" rIns="254" bIns="254" rtlCol="0" anchor="t">
+          <a:bodyPr wrap="square" lIns="508" tIns="508" rIns="508" bIns="508" rtlCol="0" anchor="t">
             <a:normAutofit/>
           </a:bodyPr>
           <a:lstStyle/>
           <a:p>
-            <a:r>
-              <a:rPr lang="en-US" sz="1380" dirty="0">
+            <a:pPr indent="0" marL="0">
+              <a:buNone/>
+            </a:pPr>
+            <a:r>
+              <a:rPr lang="en-US" sz="1220" dirty="0">
                 <a:solidFill>
                   <a:srgbClr val="17364A"/>
                 </a:solidFill>
@@ -9300,13 +9453,16 @@
                 <a:ea typeface="Aptos" pitchFamily="34" charset="-122"/>
                 <a:cs typeface="Aptos" pitchFamily="34" charset="-120"/>
               </a:rPr>
-              <a:t>Which AI use cases in your agency require identifiable or sensitive data, and which could.</a:t>
-            </a:r>
-            <a:endParaRPr lang="en-US" sz="1380" dirty="0"/>
-          </a:p>
-          <a:p>
-            <a:r>
-              <a:rPr lang="en-US" sz="1380" dirty="0">
+              <a:t>Which AI use cases in your agency require identifiable or.</a:t>
+            </a:r>
+            <a:endParaRPr lang="en-US" sz="1220" dirty="0"/>
+          </a:p>
+          <a:p>
+            <a:pPr indent="0" marL="0">
+              <a:buNone/>
+            </a:pPr>
+            <a:r>
+              <a:rPr lang="en-US" sz="1220" dirty="0">
                 <a:solidFill>
                   <a:srgbClr val="17364A"/>
                 </a:solidFill>
@@ -9314,13 +9470,16 @@
                 <a:ea typeface="Aptos" pitchFamily="34" charset="-122"/>
                 <a:cs typeface="Aptos" pitchFamily="34" charset="-120"/>
               </a:rPr>
-              <a:t>What data elements create the greatest re-identification risk in your context?</a:t>
-            </a:r>
-            <a:endParaRPr lang="en-US" sz="1380" dirty="0"/>
-          </a:p>
-          <a:p>
-            <a:r>
-              <a:rPr lang="en-US" sz="1380" dirty="0">
+              <a:t>What data elements create the greatest re-identification risk in.</a:t>
+            </a:r>
+            <a:endParaRPr lang="en-US" sz="1220" dirty="0"/>
+          </a:p>
+          <a:p>
+            <a:pPr indent="0" marL="0">
+              <a:buNone/>
+            </a:pPr>
+            <a:r>
+              <a:rPr lang="en-US" sz="1220" dirty="0">
                 <a:solidFill>
                   <a:srgbClr val="17364A"/>
                 </a:solidFill>
@@ -9328,9 +9487,9 @@
                 <a:ea typeface="Aptos" pitchFamily="34" charset="-122"/>
                 <a:cs typeface="Aptos" pitchFamily="34" charset="-120"/>
               </a:rPr>
-              <a:t>How are free-text fields reviewed before they are used in AI-supported workflows?</a:t>
-            </a:r>
-            <a:endParaRPr lang="en-US" sz="1380" dirty="0"/>
+              <a:t>How are free-text fields reviewed before they are used in.</a:t>
+            </a:r>
+            <a:endParaRPr lang="en-US" sz="1220" dirty="0"/>
           </a:p>
         </p:txBody>
       </p:sp>
@@ -9408,17 +9567,17 @@
         </p:nvSpPr>
         <p:spPr>
           <a:xfrm>
-            <a:off x="7799832" y="5001768"/>
-            <a:ext cx="3145536" cy="502920"/>
-          </a:xfrm>
-          <a:prstGeom prst="rect">
-            <a:avLst/>
-          </a:prstGeom>
-          <a:noFill/>
-          <a:ln/>
-        </p:spPr>
-        <p:txBody>
-          <a:bodyPr wrap="square" lIns="0" tIns="0" rIns="0" bIns="0" rtlCol="0" anchor="t">
+            <a:off x="7799832" y="4974336"/>
+            <a:ext cx="3145536" cy="576072"/>
+          </a:xfrm>
+          <a:prstGeom prst="rect">
+            <a:avLst/>
+          </a:prstGeom>
+          <a:noFill/>
+          <a:ln/>
+        </p:spPr>
+        <p:txBody>
+          <a:bodyPr wrap="square" lIns="254" tIns="254" rIns="254" bIns="254" rtlCol="0" anchor="t">
             <a:normAutofit/>
           </a:bodyPr>
           <a:lstStyle/>
@@ -9427,7 +9586,7 @@
               <a:buNone/>
             </a:pPr>
             <a:r>
-              <a:rPr lang="en-US" sz="1550" dirty="0">
+              <a:rPr lang="en-US" sz="1320" dirty="0">
                 <a:solidFill>
                   <a:srgbClr val="17364A"/>
                 </a:solidFill>
@@ -9435,9 +9594,9 @@
                 <a:ea typeface="Aptos" pitchFamily="34" charset="-122"/>
                 <a:cs typeface="Aptos" pitchFamily="34" charset="-120"/>
               </a:rPr>
-              <a:t>Identify what could go wrong, who could be affected, what safeguards are needed, and what evidence should be reviewed before use expands.</a:t>
-            </a:r>
-            <a:endParaRPr lang="en-US" sz="1550" dirty="0"/>
+              <a:t>Identify what could go wrong, who could be affected, what safeguards are needed, and what evidence should be reviewed.</a:t>
+            </a:r>
+            <a:endParaRPr lang="en-US" sz="1320" dirty="0"/>
           </a:p>
         </p:txBody>
       </p:sp>
@@ -9738,35 +9897,41 @@
           <a:ln/>
         </p:spPr>
         <p:txBody>
-          <a:bodyPr wrap="square" lIns="635" tIns="635" rIns="635" bIns="635" rtlCol="0" anchor="t">
+          <a:bodyPr wrap="square" lIns="1016" tIns="1016" rIns="1016" bIns="1016" rtlCol="0" anchor="t">
             <a:normAutofit/>
           </a:bodyPr>
           <a:lstStyle/>
           <a:p>
+            <a:pPr indent="0" marL="0">
+              <a:buNone/>
+            </a:pPr>
             <a:r>
               <a:rPr lang="en-US" sz="2100" dirty="0">
                 <a:solidFill>
-                  <a:srgbClr val="17364A"/>
-                </a:solidFill>
-                <a:latin typeface="Aptos" pitchFamily="34" charset="0"/>
-                <a:ea typeface="Aptos" pitchFamily="34" charset="-122"/>
-                <a:cs typeface="Aptos" pitchFamily="34" charset="-120"/>
-              </a:rPr>
-              <a:t>Which outputs could reveal sensitive information even if the input data are controlled?</a:t>
+                  <a:srgbClr val="003A63"/>
+                </a:solidFill>
+                <a:latin typeface="Aptos" pitchFamily="34" charset="0"/>
+                <a:ea typeface="Aptos" pitchFamily="34" charset="-122"/>
+                <a:cs typeface="Aptos" pitchFamily="34" charset="-120"/>
+              </a:rPr>
+              <a:t>• Which outputs could reveal sensitive information even if the input data are controlled?</a:t>
             </a:r>
             <a:endParaRPr lang="en-US" sz="2100" dirty="0"/>
           </a:p>
           <a:p>
+            <a:pPr indent="0" marL="0">
+              <a:buNone/>
+            </a:pPr>
             <a:r>
               <a:rPr lang="en-US" sz="2100" dirty="0">
                 <a:solidFill>
-                  <a:srgbClr val="17364A"/>
-                </a:solidFill>
-                <a:latin typeface="Aptos" pitchFamily="34" charset="0"/>
-                <a:ea typeface="Aptos" pitchFamily="34" charset="-122"/>
-                <a:cs typeface="Aptos" pitchFamily="34" charset="-120"/>
-              </a:rPr>
-              <a:t>Who has authority to approve privacy-preserving AI controls for a workflow?</a:t>
+                  <a:srgbClr val="003A63"/>
+                </a:solidFill>
+                <a:latin typeface="Aptos" pitchFamily="34" charset="0"/>
+                <a:ea typeface="Aptos" pitchFamily="34" charset="-122"/>
+                <a:cs typeface="Aptos" pitchFamily="34" charset="-120"/>
+              </a:rPr>
+              <a:t>• Who has authority to approve privacy-preserving AI controls for a workflow?</a:t>
             </a:r>
             <a:endParaRPr lang="en-US" sz="2100" dirty="0"/>
           </a:p>
@@ -9846,17 +10011,17 @@
         </p:nvSpPr>
         <p:spPr>
           <a:xfrm>
-            <a:off x="7799832" y="1828800"/>
-            <a:ext cx="3145536" cy="685800"/>
-          </a:xfrm>
-          <a:prstGeom prst="rect">
-            <a:avLst/>
-          </a:prstGeom>
-          <a:noFill/>
-          <a:ln/>
-        </p:spPr>
-        <p:txBody>
-          <a:bodyPr wrap="square" lIns="0" tIns="0" rIns="0" bIns="0" rtlCol="0" anchor="t">
+            <a:off x="7799832" y="1801368"/>
+            <a:ext cx="3145536" cy="758952"/>
+          </a:xfrm>
+          <a:prstGeom prst="rect">
+            <a:avLst/>
+          </a:prstGeom>
+          <a:noFill/>
+          <a:ln/>
+        </p:spPr>
+        <p:txBody>
+          <a:bodyPr wrap="square" lIns="254" tIns="254" rIns="254" bIns="254" rtlCol="0" anchor="t">
             <a:normAutofit/>
           </a:bodyPr>
           <a:lstStyle/>
@@ -9865,7 +10030,7 @@
               <a:buNone/>
             </a:pPr>
             <a:r>
-              <a:rPr lang="en-US" sz="1550" dirty="0">
+              <a:rPr lang="en-US" sz="1320" dirty="0">
                 <a:solidFill>
                   <a:srgbClr val="17364A"/>
                 </a:solidFill>
@@ -9875,7 +10040,7 @@
               </a:rPr>
               <a:t>Which outputs could reveal sensitive information even if the input data are controlled?</a:t>
             </a:r>
-            <a:endParaRPr lang="en-US" sz="1550" dirty="0"/>
+            <a:endParaRPr lang="en-US" sz="1320" dirty="0"/>
           </a:p>
         </p:txBody>
       </p:sp>
@@ -9963,13 +10128,16 @@
           <a:ln/>
         </p:spPr>
         <p:txBody>
-          <a:bodyPr wrap="square" lIns="254" tIns="254" rIns="254" bIns="254" rtlCol="0" anchor="t">
+          <a:bodyPr wrap="square" lIns="508" tIns="508" rIns="508" bIns="508" rtlCol="0" anchor="t">
             <a:normAutofit/>
           </a:bodyPr>
           <a:lstStyle/>
           <a:p>
-            <a:r>
-              <a:rPr lang="en-US" sz="1380" dirty="0">
+            <a:pPr indent="0" marL="0">
+              <a:buNone/>
+            </a:pPr>
+            <a:r>
+              <a:rPr lang="en-US" sz="1220" dirty="0">
                 <a:solidFill>
                   <a:srgbClr val="17364A"/>
                 </a:solidFill>
@@ -9977,13 +10145,16 @@
                 <a:ea typeface="Aptos" pitchFamily="34" charset="-122"/>
                 <a:cs typeface="Aptos" pitchFamily="34" charset="-120"/>
               </a:rPr>
-              <a:t>Which outputs could reveal sensitive information even if the input data are controlled?</a:t>
-            </a:r>
-            <a:endParaRPr lang="en-US" sz="1380" dirty="0"/>
-          </a:p>
-          <a:p>
-            <a:r>
-              <a:rPr lang="en-US" sz="1380" dirty="0">
+              <a:t>Which outputs could reveal sensitive information even if the input.</a:t>
+            </a:r>
+            <a:endParaRPr lang="en-US" sz="1220" dirty="0"/>
+          </a:p>
+          <a:p>
+            <a:pPr indent="0" marL="0">
+              <a:buNone/>
+            </a:pPr>
+            <a:r>
+              <a:rPr lang="en-US" sz="1220" dirty="0">
                 <a:solidFill>
                   <a:srgbClr val="17364A"/>
                 </a:solidFill>
@@ -9991,9 +10162,9 @@
                 <a:ea typeface="Aptos" pitchFamily="34" charset="-122"/>
                 <a:cs typeface="Aptos" pitchFamily="34" charset="-120"/>
               </a:rPr>
-              <a:t>Who has authority to approve privacy-preserving AI controls for a workflow?</a:t>
-            </a:r>
-            <a:endParaRPr lang="en-US" sz="1380" dirty="0"/>
+              <a:t>Who has authority to approve privacy-preserving AI controls for a.</a:t>
+            </a:r>
+            <a:endParaRPr lang="en-US" sz="1220" dirty="0"/>
           </a:p>
         </p:txBody>
       </p:sp>
@@ -10071,17 +10242,17 @@
         </p:nvSpPr>
         <p:spPr>
           <a:xfrm>
-            <a:off x="7799832" y="5001768"/>
-            <a:ext cx="3145536" cy="502920"/>
-          </a:xfrm>
-          <a:prstGeom prst="rect">
-            <a:avLst/>
-          </a:prstGeom>
-          <a:noFill/>
-          <a:ln/>
-        </p:spPr>
-        <p:txBody>
-          <a:bodyPr wrap="square" lIns="0" tIns="0" rIns="0" bIns="0" rtlCol="0" anchor="t">
+            <a:off x="7799832" y="4974336"/>
+            <a:ext cx="3145536" cy="576072"/>
+          </a:xfrm>
+          <a:prstGeom prst="rect">
+            <a:avLst/>
+          </a:prstGeom>
+          <a:noFill/>
+          <a:ln/>
+        </p:spPr>
+        <p:txBody>
+          <a:bodyPr wrap="square" lIns="254" tIns="254" rIns="254" bIns="254" rtlCol="0" anchor="t">
             <a:normAutofit/>
           </a:bodyPr>
           <a:lstStyle/>
@@ -10090,7 +10261,7 @@
               <a:buNone/>
             </a:pPr>
             <a:r>
-              <a:rPr lang="en-US" sz="1550" dirty="0">
+              <a:rPr lang="en-US" sz="1320" dirty="0">
                 <a:solidFill>
                   <a:srgbClr val="17364A"/>
                 </a:solidFill>
@@ -10098,9 +10269,9 @@
                 <a:ea typeface="Aptos" pitchFamily="34" charset="-122"/>
                 <a:cs typeface="Aptos" pitchFamily="34" charset="-120"/>
               </a:rPr>
-              <a:t>Identify what could go wrong, who could be affected, what safeguards are needed, and what evidence should be reviewed before use expands.</a:t>
-            </a:r>
-            <a:endParaRPr lang="en-US" sz="1550" dirty="0"/>
+              <a:t>Identify what could go wrong, who could be affected, what safeguards are needed, and what evidence should be reviewed.</a:t>
+            </a:r>
+            <a:endParaRPr lang="en-US" sz="1320" dirty="0"/>
           </a:p>
         </p:txBody>
       </p:sp>
@@ -10401,49 +10572,58 @@
           <a:ln/>
         </p:spPr>
         <p:txBody>
-          <a:bodyPr wrap="square" lIns="635" tIns="635" rIns="635" bIns="635" rtlCol="0" anchor="t">
+          <a:bodyPr wrap="square" lIns="1016" tIns="1016" rIns="1016" bIns="1016" rtlCol="0" anchor="t">
             <a:normAutofit/>
           </a:bodyPr>
           <a:lstStyle/>
           <a:p>
+            <a:pPr indent="0" marL="0">
+              <a:buNone/>
+            </a:pPr>
             <a:r>
               <a:rPr lang="en-US" sz="2100" dirty="0">
                 <a:solidFill>
-                  <a:srgbClr val="17364A"/>
-                </a:solidFill>
-                <a:latin typeface="Aptos" pitchFamily="34" charset="0"/>
-                <a:ea typeface="Aptos" pitchFamily="34" charset="-122"/>
-                <a:cs typeface="Aptos" pitchFamily="34" charset="-120"/>
-              </a:rPr>
-              <a:t>Privacy-preserving AI is the set of technical, policy, and workflow practices that allow public health agencies.</a:t>
+                  <a:srgbClr val="003A63"/>
+                </a:solidFill>
+                <a:latin typeface="Aptos" pitchFamily="34" charset="0"/>
+                <a:ea typeface="Aptos" pitchFamily="34" charset="-122"/>
+                <a:cs typeface="Aptos" pitchFamily="34" charset="-120"/>
+              </a:rPr>
+              <a:t>• Privacy-preserving AI is the set of technical, policy, and workflow practices that allow.</a:t>
             </a:r>
             <a:endParaRPr lang="en-US" sz="2100" dirty="0"/>
           </a:p>
           <a:p>
+            <a:pPr indent="0" marL="0">
+              <a:buNone/>
+            </a:pPr>
             <a:r>
               <a:rPr lang="en-US" sz="2100" dirty="0">
                 <a:solidFill>
-                  <a:srgbClr val="17364A"/>
-                </a:solidFill>
-                <a:latin typeface="Aptos" pitchFamily="34" charset="0"/>
-                <a:ea typeface="Aptos" pitchFamily="34" charset="-122"/>
-                <a:cs typeface="Aptos" pitchFamily="34" charset="-120"/>
-              </a:rPr>
-              <a:t>This module focuses on how privacy protections must be built into AI planning before data are extracted, shared,.</a:t>
+                  <a:srgbClr val="003A63"/>
+                </a:solidFill>
+                <a:latin typeface="Aptos" pitchFamily="34" charset="0"/>
+                <a:ea typeface="Aptos" pitchFamily="34" charset="-122"/>
+                <a:cs typeface="Aptos" pitchFamily="34" charset="-120"/>
+              </a:rPr>
+              <a:t>• This module focuses on how privacy protections must be built into AI planning before data are.</a:t>
             </a:r>
             <a:endParaRPr lang="en-US" sz="2100" dirty="0"/>
           </a:p>
           <a:p>
+            <a:pPr indent="0" marL="0">
+              <a:buNone/>
+            </a:pPr>
             <a:r>
               <a:rPr lang="en-US" sz="2100" dirty="0">
                 <a:solidFill>
-                  <a:srgbClr val="17364A"/>
-                </a:solidFill>
-                <a:latin typeface="Aptos" pitchFamily="34" charset="0"/>
-                <a:ea typeface="Aptos" pitchFamily="34" charset="-122"/>
-                <a:cs typeface="Aptos" pitchFamily="34" charset="-120"/>
-              </a:rPr>
-              <a:t>Public health agencies often have legal authority to collect and use sensitive data, but authority to use data.</a:t>
+                  <a:srgbClr val="003A63"/>
+                </a:solidFill>
+                <a:latin typeface="Aptos" pitchFamily="34" charset="0"/>
+                <a:ea typeface="Aptos" pitchFamily="34" charset="-122"/>
+                <a:cs typeface="Aptos" pitchFamily="34" charset="-120"/>
+              </a:rPr>
+              <a:t>• Public health agencies often have legal authority to collect and use sensitive data, but.</a:t>
             </a:r>
             <a:endParaRPr lang="en-US" sz="2100" dirty="0"/>
           </a:p>
@@ -10523,17 +10703,17 @@
         </p:nvSpPr>
         <p:spPr>
           <a:xfrm>
-            <a:off x="8074152" y="1920240"/>
-            <a:ext cx="2825496" cy="1280160"/>
-          </a:xfrm>
-          <a:prstGeom prst="rect">
-            <a:avLst/>
-          </a:prstGeom>
-          <a:noFill/>
-          <a:ln/>
-        </p:spPr>
-        <p:txBody>
-          <a:bodyPr wrap="square" lIns="0" tIns="0" rIns="0" bIns="0" rtlCol="0" anchor="t">
+            <a:off x="8074152" y="1892808"/>
+            <a:ext cx="2825496" cy="1353312"/>
+          </a:xfrm>
+          <a:prstGeom prst="rect">
+            <a:avLst/>
+          </a:prstGeom>
+          <a:noFill/>
+          <a:ln/>
+        </p:spPr>
+        <p:txBody>
+          <a:bodyPr wrap="square" lIns="254" tIns="254" rIns="254" bIns="254" rtlCol="0" anchor="t">
             <a:normAutofit/>
           </a:bodyPr>
           <a:lstStyle/>
@@ -10542,7 +10722,7 @@
               <a:buNone/>
             </a:pPr>
             <a:r>
-              <a:rPr lang="en-US" sz="1550" dirty="0">
+              <a:rPr lang="en-US" sz="1320" dirty="0">
                 <a:solidFill>
                   <a:srgbClr val="17364A"/>
                 </a:solidFill>
@@ -10550,43 +10730,9 @@
                 <a:ea typeface="Aptos" pitchFamily="34" charset="-122"/>
                 <a:cs typeface="Aptos" pitchFamily="34" charset="-120"/>
               </a:rPr>
-              <a:t>Level: intermediate/practitioner</a:t>
-            </a:r>
-            <a:endParaRPr lang="en-US" sz="1550" dirty="0"/>
-          </a:p>
-          <a:p>
-            <a:pPr indent="0" marL="0">
-              <a:buNone/>
-            </a:pPr>
-            <a:r>
-              <a:rPr lang="en-US" sz="1550" dirty="0">
-                <a:solidFill>
-                  <a:srgbClr val="17364A"/>
-                </a:solidFill>
-                <a:latin typeface="Aptos" pitchFamily="34" charset="0"/>
-                <a:ea typeface="Aptos" pitchFamily="34" charset="-122"/>
-                <a:cs typeface="Aptos" pitchFamily="34" charset="-120"/>
-              </a:rPr>
-              <a:t>Primary track: Governance and Security Track</a:t>
-            </a:r>
-            <a:endParaRPr lang="en-US" sz="1550" dirty="0"/>
-          </a:p>
-          <a:p>
-            <a:pPr indent="0" marL="0">
-              <a:buNone/>
-            </a:pPr>
-            <a:r>
-              <a:rPr lang="en-US" sz="1550" dirty="0">
-                <a:solidFill>
-                  <a:srgbClr val="17364A"/>
-                </a:solidFill>
-                <a:latin typeface="Aptos" pitchFamily="34" charset="0"/>
-                <a:ea typeface="Aptos" pitchFamily="34" charset="-122"/>
-                <a:cs typeface="Aptos" pitchFamily="34" charset="-120"/>
-              </a:rPr>
-              <a:t>Appears in tracks: operations-data-quality</a:t>
-            </a:r>
-            <a:endParaRPr lang="en-US" sz="1550" dirty="0"/>
+              <a:t>Level: intermediate/practitioner Primary track: Governance and Security Track Appears in tracks: operations-data-quality</a:t>
+            </a:r>
+            <a:endParaRPr lang="en-US" sz="1320" dirty="0"/>
           </a:p>
         </p:txBody>
       </p:sp>
@@ -10674,13 +10820,16 @@
           <a:ln/>
         </p:spPr>
         <p:txBody>
-          <a:bodyPr wrap="square" lIns="254" tIns="254" rIns="254" bIns="254" rtlCol="0" anchor="t">
+          <a:bodyPr wrap="square" lIns="508" tIns="508" rIns="508" bIns="508" rtlCol="0" anchor="t">
             <a:normAutofit/>
           </a:bodyPr>
           <a:lstStyle/>
           <a:p>
-            <a:r>
-              <a:rPr lang="en-US" sz="1380" dirty="0">
+            <a:pPr indent="0" marL="0">
+              <a:buNone/>
+            </a:pPr>
+            <a:r>
+              <a:rPr lang="en-US" sz="1220" dirty="0">
                 <a:solidFill>
                   <a:srgbClr val="17364A"/>
                 </a:solidFill>
@@ -10690,11 +10839,14 @@
               </a:rPr>
               <a:t>Read the module for shared vocabulary and context.</a:t>
             </a:r>
-            <a:endParaRPr lang="en-US" sz="1380" dirty="0"/>
-          </a:p>
-          <a:p>
-            <a:r>
-              <a:rPr lang="en-US" sz="1380" dirty="0">
+            <a:endParaRPr lang="en-US" sz="1220" dirty="0"/>
+          </a:p>
+          <a:p>
+            <a:pPr indent="0" marL="0">
+              <a:buNone/>
+            </a:pPr>
+            <a:r>
+              <a:rPr lang="en-US" sz="1220" dirty="0">
                 <a:solidFill>
                   <a:srgbClr val="17364A"/>
                 </a:solidFill>
@@ -10704,11 +10856,14 @@
               </a:rPr>
               <a:t>Complete the practical exercise to apply the concept.</a:t>
             </a:r>
-            <a:endParaRPr lang="en-US" sz="1380" dirty="0"/>
-          </a:p>
-          <a:p>
-            <a:r>
-              <a:rPr lang="en-US" sz="1380" dirty="0">
+            <a:endParaRPr lang="en-US" sz="1220" dirty="0"/>
+          </a:p>
+          <a:p>
+            <a:pPr indent="0" marL="0">
+              <a:buNone/>
+            </a:pPr>
+            <a:r>
+              <a:rPr lang="en-US" sz="1220" dirty="0">
                 <a:solidFill>
                   <a:srgbClr val="17364A"/>
                 </a:solidFill>
@@ -10718,7 +10873,7 @@
               </a:rPr>
               <a:t>Use the notes and references for deeper review.</a:t>
             </a:r>
-            <a:endParaRPr lang="en-US" sz="1380" dirty="0"/>
+            <a:endParaRPr lang="en-US" sz="1220" dirty="0"/>
           </a:p>
         </p:txBody>
       </p:sp>
@@ -11019,49 +11174,58 @@
           <a:ln/>
         </p:spPr>
         <p:txBody>
-          <a:bodyPr wrap="square" lIns="635" tIns="635" rIns="635" bIns="635" rtlCol="0" anchor="t">
+          <a:bodyPr wrap="square" lIns="1016" tIns="1016" rIns="1016" bIns="1016" rtlCol="0" anchor="t">
             <a:normAutofit/>
           </a:bodyPr>
           <a:lstStyle/>
           <a:p>
+            <a:pPr indent="0" marL="0">
+              <a:buNone/>
+            </a:pPr>
             <a:r>
               <a:rPr lang="en-US" sz="2100" dirty="0">
                 <a:solidFill>
-                  <a:srgbClr val="17364A"/>
-                </a:solidFill>
-                <a:latin typeface="Aptos" pitchFamily="34" charset="0"/>
-                <a:ea typeface="Aptos" pitchFamily="34" charset="-122"/>
-                <a:cs typeface="Aptos" pitchFamily="34" charset="-120"/>
-              </a:rPr>
-              <a:t>Create a privacy-preserving AI review worksheet for one proposed public health AI workflow.</a:t>
+                  <a:srgbClr val="003A63"/>
+                </a:solidFill>
+                <a:latin typeface="Aptos" pitchFamily="34" charset="0"/>
+                <a:ea typeface="Aptos" pitchFamily="34" charset="-122"/>
+                <a:cs typeface="Aptos" pitchFamily="34" charset="-120"/>
+              </a:rPr>
+              <a:t>• Create a privacy-preserving AI review worksheet for one proposed public health AI workflow.</a:t>
             </a:r>
             <a:endParaRPr lang="en-US" sz="2100" dirty="0"/>
           </a:p>
           <a:p>
+            <a:pPr indent="0" marL="0">
+              <a:buNone/>
+            </a:pPr>
             <a:r>
               <a:rPr lang="en-US" sz="2100" dirty="0">
                 <a:solidFill>
-                  <a:srgbClr val="17364A"/>
-                </a:solidFill>
-                <a:latin typeface="Aptos" pitchFamily="34" charset="0"/>
-                <a:ea typeface="Aptos" pitchFamily="34" charset="-122"/>
-                <a:cs typeface="Aptos" pitchFamily="34" charset="-120"/>
-              </a:rPr>
-              <a:t>The worksheet should identify the data involved, the sensitivity level, the minimum necessary fields,.</a:t>
+                  <a:srgbClr val="003A63"/>
+                </a:solidFill>
+                <a:latin typeface="Aptos" pitchFamily="34" charset="0"/>
+                <a:ea typeface="Aptos" pitchFamily="34" charset="-122"/>
+                <a:cs typeface="Aptos" pitchFamily="34" charset="-120"/>
+              </a:rPr>
+              <a:t>• The worksheet should identify the data involved, the sensitivity level, the minimum necessary.</a:t>
             </a:r>
             <a:endParaRPr lang="en-US" sz="2100" dirty="0"/>
           </a:p>
           <a:p>
+            <a:pPr indent="0" marL="0">
+              <a:buNone/>
+            </a:pPr>
             <a:r>
               <a:rPr lang="en-US" sz="2100" dirty="0">
                 <a:solidFill>
-                  <a:srgbClr val="17364A"/>
-                </a:solidFill>
-                <a:latin typeface="Aptos" pitchFamily="34" charset="0"/>
-                <a:ea typeface="Aptos" pitchFamily="34" charset="-122"/>
-                <a:cs typeface="Aptos" pitchFamily="34" charset="-120"/>
-              </a:rPr>
-              <a:t>The exercise should also identify residual risks and questions that need privacy, legal, security, or.</a:t>
+                  <a:srgbClr val="003A63"/>
+                </a:solidFill>
+                <a:latin typeface="Aptos" pitchFamily="34" charset="0"/>
+                <a:ea typeface="Aptos" pitchFamily="34" charset="-122"/>
+                <a:cs typeface="Aptos" pitchFamily="34" charset="-120"/>
+              </a:rPr>
+              <a:t>• The exercise should also identify residual risks and questions that need privacy, legal,.</a:t>
             </a:r>
             <a:endParaRPr lang="en-US" sz="2100" dirty="0"/>
           </a:p>
@@ -11141,17 +11305,17 @@
         </p:nvSpPr>
         <p:spPr>
           <a:xfrm>
-            <a:off x="7799832" y="1828800"/>
-            <a:ext cx="3145536" cy="685800"/>
-          </a:xfrm>
-          <a:prstGeom prst="rect">
-            <a:avLst/>
-          </a:prstGeom>
-          <a:noFill/>
-          <a:ln/>
-        </p:spPr>
-        <p:txBody>
-          <a:bodyPr wrap="square" lIns="0" tIns="0" rIns="0" bIns="0" rtlCol="0" anchor="t">
+            <a:off x="7799832" y="1801368"/>
+            <a:ext cx="3145536" cy="758952"/>
+          </a:xfrm>
+          <a:prstGeom prst="rect">
+            <a:avLst/>
+          </a:prstGeom>
+          <a:noFill/>
+          <a:ln/>
+        </p:spPr>
+        <p:txBody>
+          <a:bodyPr wrap="square" lIns="254" tIns="254" rIns="254" bIns="254" rtlCol="0" anchor="t">
             <a:normAutofit/>
           </a:bodyPr>
           <a:lstStyle/>
@@ -11160,7 +11324,7 @@
               <a:buNone/>
             </a:pPr>
             <a:r>
-              <a:rPr lang="en-US" sz="1550" dirty="0">
+              <a:rPr lang="en-US" sz="1320" dirty="0">
                 <a:solidFill>
                   <a:srgbClr val="17364A"/>
                 </a:solidFill>
@@ -11170,7 +11334,7 @@
               </a:rPr>
               <a:t>Create a privacy-preserving AI review worksheet for one proposed public health AI workflow.</a:t>
             </a:r>
-            <a:endParaRPr lang="en-US" sz="1550" dirty="0"/>
+            <a:endParaRPr lang="en-US" sz="1320" dirty="0"/>
           </a:p>
         </p:txBody>
       </p:sp>
@@ -11258,13 +11422,16 @@
           <a:ln/>
         </p:spPr>
         <p:txBody>
-          <a:bodyPr wrap="square" lIns="254" tIns="254" rIns="254" bIns="254" rtlCol="0" anchor="t">
+          <a:bodyPr wrap="square" lIns="508" tIns="508" rIns="508" bIns="508" rtlCol="0" anchor="t">
             <a:normAutofit/>
           </a:bodyPr>
           <a:lstStyle/>
           <a:p>
-            <a:r>
-              <a:rPr lang="en-US" sz="1380" dirty="0">
+            <a:pPr indent="0" marL="0">
+              <a:buNone/>
+            </a:pPr>
+            <a:r>
+              <a:rPr lang="en-US" sz="1220" dirty="0">
                 <a:solidFill>
                   <a:srgbClr val="17364A"/>
                 </a:solidFill>
@@ -11272,13 +11439,16 @@
                 <a:ea typeface="Aptos" pitchFamily="34" charset="-122"/>
                 <a:cs typeface="Aptos" pitchFamily="34" charset="-120"/>
               </a:rPr>
-              <a:t>The worksheet should identify the data involved, the sensitivity level, the minimum.</a:t>
-            </a:r>
-            <a:endParaRPr lang="en-US" sz="1380" dirty="0"/>
-          </a:p>
-          <a:p>
-            <a:r>
-              <a:rPr lang="en-US" sz="1380" dirty="0">
+              <a:t>The worksheet should identify the data involved, the sensitivity.</a:t>
+            </a:r>
+            <a:endParaRPr lang="en-US" sz="1220" dirty="0"/>
+          </a:p>
+          <a:p>
+            <a:pPr indent="0" marL="0">
+              <a:buNone/>
+            </a:pPr>
+            <a:r>
+              <a:rPr lang="en-US" sz="1220" dirty="0">
                 <a:solidFill>
                   <a:srgbClr val="17364A"/>
                 </a:solidFill>
@@ -11286,13 +11456,16 @@
                 <a:ea typeface="Aptos" pitchFamily="34" charset="-122"/>
                 <a:cs typeface="Aptos" pitchFamily="34" charset="-120"/>
               </a:rPr>
-              <a:t>The exercise should also identify residual risks and questions that need privacy, legal,.</a:t>
-            </a:r>
-            <a:endParaRPr lang="en-US" sz="1380" dirty="0"/>
-          </a:p>
-          <a:p>
-            <a:r>
-              <a:rPr lang="en-US" sz="1380" dirty="0">
+              <a:t>The exercise should also identify residual risks and questions.</a:t>
+            </a:r>
+            <a:endParaRPr lang="en-US" sz="1220" dirty="0"/>
+          </a:p>
+          <a:p>
+            <a:pPr indent="0" marL="0">
+              <a:buNone/>
+            </a:pPr>
+            <a:r>
+              <a:rPr lang="en-US" sz="1220" dirty="0">
                 <a:solidFill>
                   <a:srgbClr val="17364A"/>
                 </a:solidFill>
@@ -11300,9 +11473,9 @@
                 <a:ea typeface="Aptos" pitchFamily="34" charset="-122"/>
                 <a:cs typeface="Aptos" pitchFamily="34" charset="-120"/>
               </a:rPr>
-              <a:t>Learners should pay special attention to free text, small-area data, rare conditions,.</a:t>
-            </a:r>
-            <a:endParaRPr lang="en-US" sz="1380" dirty="0"/>
+              <a:t>Learners should pay special attention to free text, small-area.</a:t>
+            </a:r>
+            <a:endParaRPr lang="en-US" sz="1220" dirty="0"/>
           </a:p>
         </p:txBody>
       </p:sp>
@@ -11380,17 +11553,17 @@
         </p:nvSpPr>
         <p:spPr>
           <a:xfrm>
-            <a:off x="7799832" y="5001768"/>
-            <a:ext cx="3145536" cy="502920"/>
-          </a:xfrm>
-          <a:prstGeom prst="rect">
-            <a:avLst/>
-          </a:prstGeom>
-          <a:noFill/>
-          <a:ln/>
-        </p:spPr>
-        <p:txBody>
-          <a:bodyPr wrap="square" lIns="0" tIns="0" rIns="0" bIns="0" rtlCol="0" anchor="t">
+            <a:off x="7799832" y="4974336"/>
+            <a:ext cx="3145536" cy="576072"/>
+          </a:xfrm>
+          <a:prstGeom prst="rect">
+            <a:avLst/>
+          </a:prstGeom>
+          <a:noFill/>
+          <a:ln/>
+        </p:spPr>
+        <p:txBody>
+          <a:bodyPr wrap="square" lIns="254" tIns="254" rIns="254" bIns="254" rtlCol="0" anchor="t">
             <a:normAutofit/>
           </a:bodyPr>
           <a:lstStyle/>
@@ -11399,7 +11572,7 @@
               <a:buNone/>
             </a:pPr>
             <a:r>
-              <a:rPr lang="en-US" sz="1550" dirty="0">
+              <a:rPr lang="en-US" sz="1320" dirty="0">
                 <a:solidFill>
                   <a:srgbClr val="17364A"/>
                 </a:solidFill>
@@ -11407,9 +11580,9 @@
                 <a:ea typeface="Aptos" pitchFamily="34" charset="-122"/>
                 <a:cs typeface="Aptos" pitchFamily="34" charset="-120"/>
               </a:rPr>
-              <a:t>Use the assignment to test whether you can explain the concept, apply it to a realistic public health situation, and identify what would need review before the work moves forward.</a:t>
-            </a:r>
-            <a:endParaRPr lang="en-US" sz="1550" dirty="0"/>
+              <a:t>Use the assignment to test whether you can explain the concept, apply it to a realistic public health situation, and.</a:t>
+            </a:r>
+            <a:endParaRPr lang="en-US" sz="1320" dirty="0"/>
           </a:p>
         </p:txBody>
       </p:sp>
@@ -11710,21 +11883,24 @@
           <a:ln/>
         </p:spPr>
         <p:txBody>
-          <a:bodyPr wrap="square" lIns="635" tIns="635" rIns="635" bIns="635" rtlCol="0" anchor="t">
+          <a:bodyPr wrap="square" lIns="1016" tIns="1016" rIns="1016" bIns="1016" rtlCol="0" anchor="t">
             <a:normAutofit/>
           </a:bodyPr>
           <a:lstStyle/>
           <a:p>
+            <a:pPr indent="0" marL="0">
+              <a:buNone/>
+            </a:pPr>
             <a:r>
               <a:rPr lang="en-US" sz="2100" dirty="0">
                 <a:solidFill>
-                  <a:srgbClr val="17364A"/>
-                </a:solidFill>
-                <a:latin typeface="Aptos" pitchFamily="34" charset="0"/>
-                <a:ea typeface="Aptos" pitchFamily="34" charset="-122"/>
-                <a:cs typeface="Aptos" pitchFamily="34" charset="-120"/>
-              </a:rPr>
-              <a:t>The expected artifact is a privacy-preserving AI review worksheet with a brief summary of the proposed.</a:t>
+                  <a:srgbClr val="003A63"/>
+                </a:solidFill>
+                <a:latin typeface="Aptos" pitchFamily="34" charset="0"/>
+                <a:ea typeface="Aptos" pitchFamily="34" charset="-122"/>
+                <a:cs typeface="Aptos" pitchFamily="34" charset="-120"/>
+              </a:rPr>
+              <a:t>• The expected artifact is a privacy-preserving AI review worksheet with a brief summary of the.</a:t>
             </a:r>
             <a:endParaRPr lang="en-US" sz="2100" dirty="0"/>
           </a:p>
@@ -11804,17 +11980,17 @@
         </p:nvSpPr>
         <p:spPr>
           <a:xfrm>
-            <a:off x="7799832" y="1828800"/>
-            <a:ext cx="3145536" cy="685800"/>
-          </a:xfrm>
-          <a:prstGeom prst="rect">
-            <a:avLst/>
-          </a:prstGeom>
-          <a:noFill/>
-          <a:ln/>
-        </p:spPr>
-        <p:txBody>
-          <a:bodyPr wrap="square" lIns="0" tIns="0" rIns="0" bIns="0" rtlCol="0" anchor="t">
+            <a:off x="7799832" y="1801368"/>
+            <a:ext cx="3145536" cy="758952"/>
+          </a:xfrm>
+          <a:prstGeom prst="rect">
+            <a:avLst/>
+          </a:prstGeom>
+          <a:noFill/>
+          <a:ln/>
+        </p:spPr>
+        <p:txBody>
+          <a:bodyPr wrap="square" lIns="254" tIns="254" rIns="254" bIns="254" rtlCol="0" anchor="t">
             <a:normAutofit/>
           </a:bodyPr>
           <a:lstStyle/>
@@ -11823,7 +11999,7 @@
               <a:buNone/>
             </a:pPr>
             <a:r>
-              <a:rPr lang="en-US" sz="1550" dirty="0">
+              <a:rPr lang="en-US" sz="1320" dirty="0">
                 <a:solidFill>
                   <a:srgbClr val="17364A"/>
                 </a:solidFill>
@@ -11833,7 +12009,7 @@
               </a:rPr>
               <a:t>The expected artifact is a privacy-preserving AI review worksheet with a brief summary of the proposed.</a:t>
             </a:r>
-            <a:endParaRPr lang="en-US" sz="1550" dirty="0"/>
+            <a:endParaRPr lang="en-US" sz="1320" dirty="0"/>
           </a:p>
         </p:txBody>
       </p:sp>
@@ -11921,13 +12097,16 @@
           <a:ln/>
         </p:spPr>
         <p:txBody>
-          <a:bodyPr wrap="square" lIns="254" tIns="254" rIns="254" bIns="254" rtlCol="0" anchor="t">
+          <a:bodyPr wrap="square" lIns="508" tIns="508" rIns="508" bIns="508" rtlCol="0" anchor="t">
             <a:normAutofit/>
           </a:bodyPr>
           <a:lstStyle/>
           <a:p>
-            <a:r>
-              <a:rPr lang="en-US" sz="1380" dirty="0">
+            <a:pPr indent="0" marL="0">
+              <a:buNone/>
+            </a:pPr>
+            <a:r>
+              <a:rPr lang="en-US" sz="1220" dirty="0">
                 <a:solidFill>
                   <a:srgbClr val="17364A"/>
                 </a:solidFill>
@@ -11935,9 +12114,9 @@
                 <a:ea typeface="Aptos" pitchFamily="34" charset="-122"/>
                 <a:cs typeface="Aptos" pitchFamily="34" charset="-120"/>
               </a:rPr>
-              <a:t>The expected artifact is a privacy-preserving AI review worksheet with a brief summary of.</a:t>
-            </a:r>
-            <a:endParaRPr lang="en-US" sz="1380" dirty="0"/>
+              <a:t>The expected artifact is a privacy-preserving AI review worksheet.</a:t>
+            </a:r>
+            <a:endParaRPr lang="en-US" sz="1220" dirty="0"/>
           </a:p>
         </p:txBody>
       </p:sp>
@@ -12015,17 +12194,17 @@
         </p:nvSpPr>
         <p:spPr>
           <a:xfrm>
-            <a:off x="7799832" y="5001768"/>
-            <a:ext cx="3145536" cy="502920"/>
-          </a:xfrm>
-          <a:prstGeom prst="rect">
-            <a:avLst/>
-          </a:prstGeom>
-          <a:noFill/>
-          <a:ln/>
-        </p:spPr>
-        <p:txBody>
-          <a:bodyPr wrap="square" lIns="0" tIns="0" rIns="0" bIns="0" rtlCol="0" anchor="t">
+            <a:off x="7799832" y="4974336"/>
+            <a:ext cx="3145536" cy="576072"/>
+          </a:xfrm>
+          <a:prstGeom prst="rect">
+            <a:avLst/>
+          </a:prstGeom>
+          <a:noFill/>
+          <a:ln/>
+        </p:spPr>
+        <p:txBody>
+          <a:bodyPr wrap="square" lIns="254" tIns="254" rIns="254" bIns="254" rtlCol="0" anchor="t">
             <a:normAutofit/>
           </a:bodyPr>
           <a:lstStyle/>
@@ -12034,7 +12213,7 @@
               <a:buNone/>
             </a:pPr>
             <a:r>
-              <a:rPr lang="en-US" sz="1550" dirty="0">
+              <a:rPr lang="en-US" sz="1320" dirty="0">
                 <a:solidFill>
                   <a:srgbClr val="17364A"/>
                 </a:solidFill>
@@ -12042,9 +12221,9 @@
                 <a:ea typeface="Aptos" pitchFamily="34" charset="-122"/>
                 <a:cs typeface="Aptos" pitchFamily="34" charset="-120"/>
               </a:rPr>
-              <a:t>Identify what could go wrong, who could be affected, what safeguards are needed, and what evidence should be reviewed before use expands.</a:t>
-            </a:r>
-            <a:endParaRPr lang="en-US" sz="1550" dirty="0"/>
+              <a:t>Identify what could go wrong, who could be affected, what safeguards are needed, and what evidence should be reviewed.</a:t>
+            </a:r>
+            <a:endParaRPr lang="en-US" sz="1320" dirty="0"/>
           </a:p>
         </p:txBody>
       </p:sp>
@@ -12345,21 +12524,24 @@
           <a:ln/>
         </p:spPr>
         <p:txBody>
-          <a:bodyPr wrap="square" lIns="635" tIns="635" rIns="635" bIns="635" rtlCol="0" anchor="t">
+          <a:bodyPr wrap="square" lIns="1016" tIns="1016" rIns="1016" bIns="1016" rtlCol="0" anchor="t">
             <a:normAutofit/>
           </a:bodyPr>
           <a:lstStyle/>
           <a:p>
+            <a:pPr indent="0" marL="0">
+              <a:buNone/>
+            </a:pPr>
             <a:r>
               <a:rPr lang="en-US" sz="2100" dirty="0">
                 <a:solidFill>
-                  <a:srgbClr val="17364A"/>
-                </a:solidFill>
-                <a:latin typeface="Aptos" pitchFamily="34" charset="0"/>
-                <a:ea typeface="Aptos" pitchFamily="34" charset="-122"/>
-                <a:cs typeface="Aptos" pitchFamily="34" charset="-120"/>
-              </a:rPr>
-              <a:t>The expected artifact is a privacy-preserving AI review worksheet with a brief summary of the proposed.</a:t>
+                  <a:srgbClr val="003A63"/>
+                </a:solidFill>
+                <a:latin typeface="Aptos" pitchFamily="34" charset="0"/>
+                <a:ea typeface="Aptos" pitchFamily="34" charset="-122"/>
+                <a:cs typeface="Aptos" pitchFamily="34" charset="-120"/>
+              </a:rPr>
+              <a:t>• The expected artifact is a privacy-preserving AI review worksheet with a brief summary of the.</a:t>
             </a:r>
             <a:endParaRPr lang="en-US" sz="2100" dirty="0"/>
           </a:p>
@@ -12439,17 +12621,17 @@
         </p:nvSpPr>
         <p:spPr>
           <a:xfrm>
-            <a:off x="7799832" y="1828800"/>
-            <a:ext cx="3145536" cy="685800"/>
-          </a:xfrm>
-          <a:prstGeom prst="rect">
-            <a:avLst/>
-          </a:prstGeom>
-          <a:noFill/>
-          <a:ln/>
-        </p:spPr>
-        <p:txBody>
-          <a:bodyPr wrap="square" lIns="0" tIns="0" rIns="0" bIns="0" rtlCol="0" anchor="t">
+            <a:off x="7799832" y="1801368"/>
+            <a:ext cx="3145536" cy="758952"/>
+          </a:xfrm>
+          <a:prstGeom prst="rect">
+            <a:avLst/>
+          </a:prstGeom>
+          <a:noFill/>
+          <a:ln/>
+        </p:spPr>
+        <p:txBody>
+          <a:bodyPr wrap="square" lIns="254" tIns="254" rIns="254" bIns="254" rtlCol="0" anchor="t">
             <a:normAutofit/>
           </a:bodyPr>
           <a:lstStyle/>
@@ -12458,7 +12640,7 @@
               <a:buNone/>
             </a:pPr>
             <a:r>
-              <a:rPr lang="en-US" sz="1550" dirty="0">
+              <a:rPr lang="en-US" sz="1320" dirty="0">
                 <a:solidFill>
                   <a:srgbClr val="17364A"/>
                 </a:solidFill>
@@ -12468,7 +12650,7 @@
               </a:rPr>
               <a:t>The expected artifact is a privacy-preserving AI review worksheet with a brief summary of the proposed.</a:t>
             </a:r>
-            <a:endParaRPr lang="en-US" sz="1550" dirty="0"/>
+            <a:endParaRPr lang="en-US" sz="1320" dirty="0"/>
           </a:p>
         </p:txBody>
       </p:sp>
@@ -12556,13 +12738,16 @@
           <a:ln/>
         </p:spPr>
         <p:txBody>
-          <a:bodyPr wrap="square" lIns="254" tIns="254" rIns="254" bIns="254" rtlCol="0" anchor="t">
+          <a:bodyPr wrap="square" lIns="508" tIns="508" rIns="508" bIns="508" rtlCol="0" anchor="t">
             <a:normAutofit/>
           </a:bodyPr>
           <a:lstStyle/>
           <a:p>
-            <a:r>
-              <a:rPr lang="en-US" sz="1380" dirty="0">
+            <a:pPr indent="0" marL="0">
+              <a:buNone/>
+            </a:pPr>
+            <a:r>
+              <a:rPr lang="en-US" sz="1220" dirty="0">
                 <a:solidFill>
                   <a:srgbClr val="17364A"/>
                 </a:solidFill>
@@ -12570,9 +12755,9 @@
                 <a:ea typeface="Aptos" pitchFamily="34" charset="-122"/>
                 <a:cs typeface="Aptos" pitchFamily="34" charset="-120"/>
               </a:rPr>
-              <a:t>The expected artifact is a privacy-preserving AI review worksheet with a brief summary of.</a:t>
-            </a:r>
-            <a:endParaRPr lang="en-US" sz="1380" dirty="0"/>
+              <a:t>The expected artifact is a privacy-preserving AI review worksheet.</a:t>
+            </a:r>
+            <a:endParaRPr lang="en-US" sz="1220" dirty="0"/>
           </a:p>
         </p:txBody>
       </p:sp>
@@ -12650,17 +12835,17 @@
         </p:nvSpPr>
         <p:spPr>
           <a:xfrm>
-            <a:off x="7799832" y="5001768"/>
-            <a:ext cx="3145536" cy="502920"/>
-          </a:xfrm>
-          <a:prstGeom prst="rect">
-            <a:avLst/>
-          </a:prstGeom>
-          <a:noFill/>
-          <a:ln/>
-        </p:spPr>
-        <p:txBody>
-          <a:bodyPr wrap="square" lIns="0" tIns="0" rIns="0" bIns="0" rtlCol="0" anchor="t">
+            <a:off x="7799832" y="4974336"/>
+            <a:ext cx="3145536" cy="576072"/>
+          </a:xfrm>
+          <a:prstGeom prst="rect">
+            <a:avLst/>
+          </a:prstGeom>
+          <a:noFill/>
+          <a:ln/>
+        </p:spPr>
+        <p:txBody>
+          <a:bodyPr wrap="square" lIns="254" tIns="254" rIns="254" bIns="254" rtlCol="0" anchor="t">
             <a:normAutofit/>
           </a:bodyPr>
           <a:lstStyle/>
@@ -12669,7 +12854,7 @@
               <a:buNone/>
             </a:pPr>
             <a:r>
-              <a:rPr lang="en-US" sz="1550" dirty="0">
+              <a:rPr lang="en-US" sz="1320" dirty="0">
                 <a:solidFill>
                   <a:srgbClr val="17364A"/>
                 </a:solidFill>
@@ -12677,9 +12862,9 @@
                 <a:ea typeface="Aptos" pitchFamily="34" charset="-122"/>
                 <a:cs typeface="Aptos" pitchFamily="34" charset="-120"/>
               </a:rPr>
-              <a:t>Use the assignment to test whether you can explain the concept, apply it to a realistic public health situation, and identify what would need review before the work moves forward.</a:t>
-            </a:r>
-            <a:endParaRPr lang="en-US" sz="1550" dirty="0"/>
+              <a:t>Use the assignment to test whether you can explain the concept, apply it to a realistic public health situation, and.</a:t>
+            </a:r>
+            <a:endParaRPr lang="en-US" sz="1320" dirty="0"/>
           </a:p>
         </p:txBody>
       </p:sp>
@@ -12980,49 +13165,58 @@
           <a:ln/>
         </p:spPr>
         <p:txBody>
-          <a:bodyPr wrap="square" lIns="635" tIns="635" rIns="635" bIns="635" rtlCol="0" anchor="t">
+          <a:bodyPr wrap="square" lIns="1016" tIns="1016" rIns="1016" bIns="1016" rtlCol="0" anchor="t">
             <a:normAutofit/>
           </a:bodyPr>
           <a:lstStyle/>
           <a:p>
+            <a:pPr indent="0" marL="0">
+              <a:buNone/>
+            </a:pPr>
             <a:r>
               <a:rPr lang="en-US" sz="2100" dirty="0">
                 <a:solidFill>
-                  <a:srgbClr val="17364A"/>
-                </a:solidFill>
-                <a:latin typeface="Aptos" pitchFamily="34" charset="0"/>
-                <a:ea typeface="Aptos" pitchFamily="34" charset="-122"/>
-                <a:cs typeface="Aptos" pitchFamily="34" charset="-120"/>
-              </a:rPr>
-              <a:t>1. Which statement best describes de-identification in public health AI?</a:t>
+                  <a:srgbClr val="003A63"/>
+                </a:solidFill>
+                <a:latin typeface="Aptos" pitchFamily="34" charset="0"/>
+                <a:ea typeface="Aptos" pitchFamily="34" charset="-122"/>
+                <a:cs typeface="Aptos" pitchFamily="34" charset="-120"/>
+              </a:rPr>
+              <a:t>• 1. Which statement best describes de-identification in public health AI?</a:t>
             </a:r>
             <a:endParaRPr lang="en-US" sz="2100" dirty="0"/>
           </a:p>
           <a:p>
+            <a:pPr indent="0" marL="0">
+              <a:buNone/>
+            </a:pPr>
             <a:r>
               <a:rPr lang="en-US" sz="2100" dirty="0">
                 <a:solidFill>
-                  <a:srgbClr val="17364A"/>
-                </a:solidFill>
-                <a:latin typeface="Aptos" pitchFamily="34" charset="0"/>
-                <a:ea typeface="Aptos" pitchFamily="34" charset="-122"/>
-                <a:cs typeface="Aptos" pitchFamily="34" charset="-120"/>
-              </a:rPr>
-              <a:t>2. Why can AI increase re-identification risk?</a:t>
+                  <a:srgbClr val="003A63"/>
+                </a:solidFill>
+                <a:latin typeface="Aptos" pitchFamily="34" charset="0"/>
+                <a:ea typeface="Aptos" pitchFamily="34" charset="-122"/>
+                <a:cs typeface="Aptos" pitchFamily="34" charset="-120"/>
+              </a:rPr>
+              <a:t>• 2. Why can AI increase re-identification risk?</a:t>
             </a:r>
             <a:endParaRPr lang="en-US" sz="2100" dirty="0"/>
           </a:p>
           <a:p>
+            <a:pPr indent="0" marL="0">
+              <a:buNone/>
+            </a:pPr>
             <a:r>
               <a:rPr lang="en-US" sz="2100" dirty="0">
                 <a:solidFill>
-                  <a:srgbClr val="17364A"/>
-                </a:solidFill>
-                <a:latin typeface="Aptos" pitchFamily="34" charset="0"/>
-                <a:ea typeface="Aptos" pitchFamily="34" charset="-122"/>
-                <a:cs typeface="Aptos" pitchFamily="34" charset="-120"/>
-              </a:rPr>
-              <a:t>3. What is a strong privacy guardrail for an AI workflow?</a:t>
+                  <a:srgbClr val="003A63"/>
+                </a:solidFill>
+                <a:latin typeface="Aptos" pitchFamily="34" charset="0"/>
+                <a:ea typeface="Aptos" pitchFamily="34" charset="-122"/>
+                <a:cs typeface="Aptos" pitchFamily="34" charset="-120"/>
+              </a:rPr>
+              <a:t>• 3. What is a strong privacy guardrail for an AI workflow?</a:t>
             </a:r>
             <a:endParaRPr lang="en-US" sz="2100" dirty="0"/>
           </a:p>
@@ -13102,17 +13296,17 @@
         </p:nvSpPr>
         <p:spPr>
           <a:xfrm>
-            <a:off x="7799832" y="1828800"/>
-            <a:ext cx="3145536" cy="685800"/>
-          </a:xfrm>
-          <a:prstGeom prst="rect">
-            <a:avLst/>
-          </a:prstGeom>
-          <a:noFill/>
-          <a:ln/>
-        </p:spPr>
-        <p:txBody>
-          <a:bodyPr wrap="square" lIns="0" tIns="0" rIns="0" bIns="0" rtlCol="0" anchor="t">
+            <a:off x="7799832" y="1801368"/>
+            <a:ext cx="3145536" cy="758952"/>
+          </a:xfrm>
+          <a:prstGeom prst="rect">
+            <a:avLst/>
+          </a:prstGeom>
+          <a:noFill/>
+          <a:ln/>
+        </p:spPr>
+        <p:txBody>
+          <a:bodyPr wrap="square" lIns="254" tIns="254" rIns="254" bIns="254" rtlCol="0" anchor="t">
             <a:normAutofit/>
           </a:bodyPr>
           <a:lstStyle/>
@@ -13121,7 +13315,7 @@
               <a:buNone/>
             </a:pPr>
             <a:r>
-              <a:rPr lang="en-US" sz="1550" dirty="0">
+              <a:rPr lang="en-US" sz="1320" dirty="0">
                 <a:solidFill>
                   <a:srgbClr val="17364A"/>
                 </a:solidFill>
@@ -13131,7 +13325,7 @@
               </a:rPr>
               <a:t>1. Which statement best describes de-identification in public health AI?</a:t>
             </a:r>
-            <a:endParaRPr lang="en-US" sz="1550" dirty="0"/>
+            <a:endParaRPr lang="en-US" sz="1320" dirty="0"/>
           </a:p>
         </p:txBody>
       </p:sp>
@@ -13219,13 +13413,16 @@
           <a:ln/>
         </p:spPr>
         <p:txBody>
-          <a:bodyPr wrap="square" lIns="254" tIns="254" rIns="254" bIns="254" rtlCol="0" anchor="t">
+          <a:bodyPr wrap="square" lIns="508" tIns="508" rIns="508" bIns="508" rtlCol="0" anchor="t">
             <a:normAutofit/>
           </a:bodyPr>
           <a:lstStyle/>
           <a:p>
-            <a:r>
-              <a:rPr lang="en-US" sz="1380" dirty="0">
+            <a:pPr indent="0" marL="0">
+              <a:buNone/>
+            </a:pPr>
+            <a:r>
+              <a:rPr lang="en-US" sz="1220" dirty="0">
                 <a:solidFill>
                   <a:srgbClr val="17364A"/>
                 </a:solidFill>
@@ -13235,11 +13432,14 @@
               </a:rPr>
               <a:t>1.</a:t>
             </a:r>
-            <a:endParaRPr lang="en-US" sz="1380" dirty="0"/>
-          </a:p>
-          <a:p>
-            <a:r>
-              <a:rPr lang="en-US" sz="1380" dirty="0">
+            <a:endParaRPr lang="en-US" sz="1220" dirty="0"/>
+          </a:p>
+          <a:p>
+            <a:pPr indent="0" marL="0">
+              <a:buNone/>
+            </a:pPr>
+            <a:r>
+              <a:rPr lang="en-US" sz="1220" dirty="0">
                 <a:solidFill>
                   <a:srgbClr val="17364A"/>
                 </a:solidFill>
@@ -13247,13 +13447,16 @@
                 <a:ea typeface="Aptos" pitchFamily="34" charset="-122"/>
                 <a:cs typeface="Aptos" pitchFamily="34" charset="-120"/>
               </a:rPr>
-              <a:t>Which statement best describes de-identification in public health AI?</a:t>
-            </a:r>
-            <a:endParaRPr lang="en-US" sz="1380" dirty="0"/>
-          </a:p>
-          <a:p>
-            <a:r>
-              <a:rPr lang="en-US" sz="1380" dirty="0">
+              <a:t>Which statement best describes de-identification in public health.</a:t>
+            </a:r>
+            <a:endParaRPr lang="en-US" sz="1220" dirty="0"/>
+          </a:p>
+          <a:p>
+            <a:pPr indent="0" marL="0">
+              <a:buNone/>
+            </a:pPr>
+            <a:r>
+              <a:rPr lang="en-US" sz="1220" dirty="0">
                 <a:solidFill>
                   <a:srgbClr val="17364A"/>
                 </a:solidFill>
@@ -13263,7 +13466,7 @@
               </a:rPr>
               <a:t>2.</a:t>
             </a:r>
-            <a:endParaRPr lang="en-US" sz="1380" dirty="0"/>
+            <a:endParaRPr lang="en-US" sz="1220" dirty="0"/>
           </a:p>
         </p:txBody>
       </p:sp>
@@ -13341,17 +13544,17 @@
         </p:nvSpPr>
         <p:spPr>
           <a:xfrm>
-            <a:off x="7799832" y="5001768"/>
-            <a:ext cx="3145536" cy="502920"/>
-          </a:xfrm>
-          <a:prstGeom prst="rect">
-            <a:avLst/>
-          </a:prstGeom>
-          <a:noFill/>
-          <a:ln/>
-        </p:spPr>
-        <p:txBody>
-          <a:bodyPr wrap="square" lIns="0" tIns="0" rIns="0" bIns="0" rtlCol="0" anchor="t">
+            <a:off x="7799832" y="4974336"/>
+            <a:ext cx="3145536" cy="576072"/>
+          </a:xfrm>
+          <a:prstGeom prst="rect">
+            <a:avLst/>
+          </a:prstGeom>
+          <a:noFill/>
+          <a:ln/>
+        </p:spPr>
+        <p:txBody>
+          <a:bodyPr wrap="square" lIns="254" tIns="254" rIns="254" bIns="254" rtlCol="0" anchor="t">
             <a:normAutofit/>
           </a:bodyPr>
           <a:lstStyle/>
@@ -13360,7 +13563,7 @@
               <a:buNone/>
             </a:pPr>
             <a:r>
-              <a:rPr lang="en-US" sz="1550" dirty="0">
+              <a:rPr lang="en-US" sz="1320" dirty="0">
                 <a:solidFill>
                   <a:srgbClr val="17364A"/>
                 </a:solidFill>
@@ -13368,9 +13571,9 @@
                 <a:ea typeface="Aptos" pitchFamily="34" charset="-122"/>
                 <a:cs typeface="Aptos" pitchFamily="34" charset="-120"/>
               </a:rPr>
-              <a:t>Use the assignment to test whether you can explain the concept, apply it to a realistic public health situation, and identify what would need review before the work moves forward.</a:t>
-            </a:r>
-            <a:endParaRPr lang="en-US" sz="1550" dirty="0"/>
+              <a:t>Use the assignment to test whether you can explain the concept, apply it to a realistic public health situation, and.</a:t>
+            </a:r>
+            <a:endParaRPr lang="en-US" sz="1320" dirty="0"/>
           </a:p>
         </p:txBody>
       </p:sp>
@@ -13671,49 +13874,58 @@
           <a:ln/>
         </p:spPr>
         <p:txBody>
-          <a:bodyPr wrap="square" lIns="635" tIns="635" rIns="635" bIns="635" rtlCol="0" anchor="t">
+          <a:bodyPr wrap="square" lIns="1016" tIns="1016" rIns="1016" bIns="1016" rtlCol="0" anchor="t">
             <a:normAutofit/>
           </a:bodyPr>
           <a:lstStyle/>
           <a:p>
+            <a:pPr indent="0" marL="0">
+              <a:buNone/>
+            </a:pPr>
             <a:r>
               <a:rPr lang="en-US" sz="2100" dirty="0">
                 <a:solidFill>
-                  <a:srgbClr val="17364A"/>
-                </a:solidFill>
-                <a:latin typeface="Aptos" pitchFamily="34" charset="0"/>
-                <a:ea typeface="Aptos" pitchFamily="34" charset="-122"/>
-                <a:cs typeface="Aptos" pitchFamily="34" charset="-120"/>
-              </a:rPr>
-              <a:t>NIST Privacy Framework</a:t>
+                  <a:srgbClr val="003A63"/>
+                </a:solidFill>
+                <a:latin typeface="Aptos" pitchFamily="34" charset="0"/>
+                <a:ea typeface="Aptos" pitchFamily="34" charset="-122"/>
+                <a:cs typeface="Aptos" pitchFamily="34" charset="-120"/>
+              </a:rPr>
+              <a:t>• NIST Privacy Framework</a:t>
             </a:r>
             <a:endParaRPr lang="en-US" sz="2100" dirty="0"/>
           </a:p>
           <a:p>
+            <a:pPr indent="0" marL="0">
+              <a:buNone/>
+            </a:pPr>
             <a:r>
               <a:rPr lang="en-US" sz="2100" dirty="0">
                 <a:solidFill>
-                  <a:srgbClr val="17364A"/>
-                </a:solidFill>
-                <a:latin typeface="Aptos" pitchFamily="34" charset="0"/>
-                <a:ea typeface="Aptos" pitchFamily="34" charset="-122"/>
-                <a:cs typeface="Aptos" pitchFamily="34" charset="-120"/>
-              </a:rPr>
-              <a:t>NIST AI Risk Management Framework: https://www.nist.gov/itl/ai-risk-management-framework</a:t>
+                  <a:srgbClr val="003A63"/>
+                </a:solidFill>
+                <a:latin typeface="Aptos" pitchFamily="34" charset="0"/>
+                <a:ea typeface="Aptos" pitchFamily="34" charset="-122"/>
+                <a:cs typeface="Aptos" pitchFamily="34" charset="-120"/>
+              </a:rPr>
+              <a:t>• NIST AI Risk Management Framework: https://www.nist.gov/itl/ai-risk-management-framework</a:t>
             </a:r>
             <a:endParaRPr lang="en-US" sz="2100" dirty="0"/>
           </a:p>
           <a:p>
+            <a:pPr indent="0" marL="0">
+              <a:buNone/>
+            </a:pPr>
             <a:r>
               <a:rPr lang="en-US" sz="2100" dirty="0">
                 <a:solidFill>
-                  <a:srgbClr val="17364A"/>
-                </a:solidFill>
-                <a:latin typeface="Aptos" pitchFamily="34" charset="0"/>
-                <a:ea typeface="Aptos" pitchFamily="34" charset="-122"/>
-                <a:cs typeface="Aptos" pitchFamily="34" charset="-120"/>
-              </a:rPr>
-              <a:t>HHS HIPAA de-identification guidance</a:t>
+                  <a:srgbClr val="003A63"/>
+                </a:solidFill>
+                <a:latin typeface="Aptos" pitchFamily="34" charset="0"/>
+                <a:ea typeface="Aptos" pitchFamily="34" charset="-122"/>
+                <a:cs typeface="Aptos" pitchFamily="34" charset="-120"/>
+              </a:rPr>
+              <a:t>• HHS HIPAA de-identification guidance</a:t>
             </a:r>
             <a:endParaRPr lang="en-US" sz="2100" dirty="0"/>
           </a:p>
@@ -13793,17 +14005,17 @@
         </p:nvSpPr>
         <p:spPr>
           <a:xfrm>
-            <a:off x="7799832" y="1828800"/>
-            <a:ext cx="3145536" cy="685800"/>
-          </a:xfrm>
-          <a:prstGeom prst="rect">
-            <a:avLst/>
-          </a:prstGeom>
-          <a:noFill/>
-          <a:ln/>
-        </p:spPr>
-        <p:txBody>
-          <a:bodyPr wrap="square" lIns="0" tIns="0" rIns="0" bIns="0" rtlCol="0" anchor="t">
+            <a:off x="7799832" y="1801368"/>
+            <a:ext cx="3145536" cy="758952"/>
+          </a:xfrm>
+          <a:prstGeom prst="rect">
+            <a:avLst/>
+          </a:prstGeom>
+          <a:noFill/>
+          <a:ln/>
+        </p:spPr>
+        <p:txBody>
+          <a:bodyPr wrap="square" lIns="254" tIns="254" rIns="254" bIns="254" rtlCol="0" anchor="t">
             <a:normAutofit/>
           </a:bodyPr>
           <a:lstStyle/>
@@ -13812,7 +14024,7 @@
               <a:buNone/>
             </a:pPr>
             <a:r>
-              <a:rPr lang="en-US" sz="1550" dirty="0">
+              <a:rPr lang="en-US" sz="1320" dirty="0">
                 <a:solidFill>
                   <a:srgbClr val="17364A"/>
                 </a:solidFill>
@@ -13822,7 +14034,7 @@
               </a:rPr>
               <a:t>NIST Privacy Framework</a:t>
             </a:r>
-            <a:endParaRPr lang="en-US" sz="1550" dirty="0"/>
+            <a:endParaRPr lang="en-US" sz="1320" dirty="0"/>
           </a:p>
         </p:txBody>
       </p:sp>
@@ -13910,13 +14122,16 @@
           <a:ln/>
         </p:spPr>
         <p:txBody>
-          <a:bodyPr wrap="square" lIns="254" tIns="254" rIns="254" bIns="254" rtlCol="0" anchor="t">
+          <a:bodyPr wrap="square" lIns="508" tIns="508" rIns="508" bIns="508" rtlCol="0" anchor="t">
             <a:normAutofit/>
           </a:bodyPr>
           <a:lstStyle/>
           <a:p>
-            <a:r>
-              <a:rPr lang="en-US" sz="1380" dirty="0">
+            <a:pPr indent="0" marL="0">
+              <a:buNone/>
+            </a:pPr>
+            <a:r>
+              <a:rPr lang="en-US" sz="1220" dirty="0">
                 <a:solidFill>
                   <a:srgbClr val="17364A"/>
                 </a:solidFill>
@@ -13926,11 +14141,14 @@
               </a:rPr>
               <a:t>CDC data governance and public health data modernization resources</a:t>
             </a:r>
-            <a:endParaRPr lang="en-US" sz="1380" dirty="0"/>
-          </a:p>
-          <a:p>
-            <a:r>
-              <a:rPr lang="en-US" sz="1380" dirty="0">
+            <a:endParaRPr lang="en-US" sz="1220" dirty="0"/>
+          </a:p>
+          <a:p>
+            <a:pPr indent="0" marL="0">
+              <a:buNone/>
+            </a:pPr>
+            <a:r>
+              <a:rPr lang="en-US" sz="1220" dirty="0">
                 <a:solidFill>
                   <a:srgbClr val="17364A"/>
                 </a:solidFill>
@@ -13940,7 +14158,7 @@
               </a:rPr>
               <a:t>Agency privacy, legal, security, and records management policies</a:t>
             </a:r>
-            <a:endParaRPr lang="en-US" sz="1380" dirty="0"/>
+            <a:endParaRPr lang="en-US" sz="1220" dirty="0"/>
           </a:p>
         </p:txBody>
       </p:sp>
@@ -14018,17 +14236,17 @@
         </p:nvSpPr>
         <p:spPr>
           <a:xfrm>
-            <a:off x="7799832" y="5001768"/>
-            <a:ext cx="3145536" cy="502920"/>
-          </a:xfrm>
-          <a:prstGeom prst="rect">
-            <a:avLst/>
-          </a:prstGeom>
-          <a:noFill/>
-          <a:ln/>
-        </p:spPr>
-        <p:txBody>
-          <a:bodyPr wrap="square" lIns="0" tIns="0" rIns="0" bIns="0" rtlCol="0" anchor="t">
+            <a:off x="7799832" y="4974336"/>
+            <a:ext cx="3145536" cy="576072"/>
+          </a:xfrm>
+          <a:prstGeom prst="rect">
+            <a:avLst/>
+          </a:prstGeom>
+          <a:noFill/>
+          <a:ln/>
+        </p:spPr>
+        <p:txBody>
+          <a:bodyPr wrap="square" lIns="254" tIns="254" rIns="254" bIns="254" rtlCol="0" anchor="t">
             <a:normAutofit/>
           </a:bodyPr>
           <a:lstStyle/>
@@ -14037,7 +14255,7 @@
               <a:buNone/>
             </a:pPr>
             <a:r>
-              <a:rPr lang="en-US" sz="1550" dirty="0">
+              <a:rPr lang="en-US" sz="1320" dirty="0">
                 <a:solidFill>
                   <a:srgbClr val="17364A"/>
                 </a:solidFill>
@@ -14045,9 +14263,9 @@
                 <a:ea typeface="Aptos" pitchFamily="34" charset="-122"/>
                 <a:cs typeface="Aptos" pitchFamily="34" charset="-120"/>
               </a:rPr>
-              <a:t>Identify what could go wrong, who could be affected, what safeguards are needed, and what evidence should be reviewed before use expands.</a:t>
-            </a:r>
-            <a:endParaRPr lang="en-US" sz="1550" dirty="0"/>
+              <a:t>Identify what could go wrong, who could be affected, what safeguards are needed, and what evidence should be reviewed.</a:t>
+            </a:r>
+            <a:endParaRPr lang="en-US" sz="1320" dirty="0"/>
           </a:p>
         </p:txBody>
       </p:sp>
@@ -14348,63 +14566,75 @@
           <a:ln/>
         </p:spPr>
         <p:txBody>
-          <a:bodyPr wrap="square" lIns="635" tIns="635" rIns="635" bIns="635" rtlCol="0" anchor="t">
+          <a:bodyPr wrap="square" lIns="1016" tIns="1016" rIns="1016" bIns="1016" rtlCol="0" anchor="t">
             <a:normAutofit/>
           </a:bodyPr>
           <a:lstStyle/>
           <a:p>
+            <a:pPr indent="0" marL="0">
+              <a:buNone/>
+            </a:pPr>
             <a:r>
               <a:rPr lang="en-US" sz="1900" dirty="0">
                 <a:solidFill>
-                  <a:srgbClr val="17364A"/>
-                </a:solidFill>
-                <a:latin typeface="Aptos" pitchFamily="34" charset="0"/>
-                <a:ea typeface="Aptos" pitchFamily="34" charset="-122"/>
-                <a:cs typeface="Aptos" pitchFamily="34" charset="-120"/>
-              </a:rPr>
-              <a:t>Play 11: Build and Deploy AI Solutions - This lesson informs Play 11 by helping learners connect the lesson.</a:t>
+                  <a:srgbClr val="003A63"/>
+                </a:solidFill>
+                <a:latin typeface="Aptos" pitchFamily="34" charset="0"/>
+                <a:ea typeface="Aptos" pitchFamily="34" charset="-122"/>
+                <a:cs typeface="Aptos" pitchFamily="34" charset="-120"/>
+              </a:rPr>
+              <a:t>• Play 11: Build and Deploy AI Solutions - This lesson informs Play 11 by helping learners.</a:t>
             </a:r>
             <a:endParaRPr lang="en-US" sz="1900" dirty="0"/>
           </a:p>
           <a:p>
+            <a:pPr indent="0" marL="0">
+              <a:buNone/>
+            </a:pPr>
             <a:r>
               <a:rPr lang="en-US" sz="1900" dirty="0">
                 <a:solidFill>
-                  <a:srgbClr val="17364A"/>
-                </a:solidFill>
-                <a:latin typeface="Aptos" pitchFamily="34" charset="0"/>
-                <a:ea typeface="Aptos" pitchFamily="34" charset="-122"/>
-                <a:cs typeface="Aptos" pitchFamily="34" charset="-120"/>
-              </a:rPr>
-              <a:t>Play 2: Readiness Assessment - This lesson informs Play 2 by helping learners connect the lesson topic to.</a:t>
+                  <a:srgbClr val="003A63"/>
+                </a:solidFill>
+                <a:latin typeface="Aptos" pitchFamily="34" charset="0"/>
+                <a:ea typeface="Aptos" pitchFamily="34" charset="-122"/>
+                <a:cs typeface="Aptos" pitchFamily="34" charset="-120"/>
+              </a:rPr>
+              <a:t>• Play 2: Readiness Assessment - This lesson informs Play 2 by helping learners connect the.</a:t>
             </a:r>
             <a:endParaRPr lang="en-US" sz="1900" dirty="0"/>
           </a:p>
           <a:p>
+            <a:pPr indent="0" marL="0">
+              <a:buNone/>
+            </a:pPr>
             <a:r>
               <a:rPr lang="en-US" sz="1900" dirty="0">
                 <a:solidFill>
-                  <a:srgbClr val="17364A"/>
-                </a:solidFill>
-                <a:latin typeface="Aptos" pitchFamily="34" charset="0"/>
-                <a:ea typeface="Aptos" pitchFamily="34" charset="-122"/>
-                <a:cs typeface="Aptos" pitchFamily="34" charset="-120"/>
-              </a:rPr>
-              <a:t>Play 3: Establish AI Governance - This lesson informs Play 3 by helping learners connect the lesson topic to.</a:t>
+                  <a:srgbClr val="003A63"/>
+                </a:solidFill>
+                <a:latin typeface="Aptos" pitchFamily="34" charset="0"/>
+                <a:ea typeface="Aptos" pitchFamily="34" charset="-122"/>
+                <a:cs typeface="Aptos" pitchFamily="34" charset="-120"/>
+              </a:rPr>
+              <a:t>• Play 3: Establish AI Governance - This lesson informs Play 3 by helping learners connect the.</a:t>
             </a:r>
             <a:endParaRPr lang="en-US" sz="1900" dirty="0"/>
           </a:p>
           <a:p>
+            <a:pPr indent="0" marL="0">
+              <a:buNone/>
+            </a:pPr>
             <a:r>
               <a:rPr lang="en-US" sz="1900" dirty="0">
                 <a:solidFill>
-                  <a:srgbClr val="17364A"/>
-                </a:solidFill>
-                <a:latin typeface="Aptos" pitchFamily="34" charset="0"/>
-                <a:ea typeface="Aptos" pitchFamily="34" charset="-122"/>
-                <a:cs typeface="Aptos" pitchFamily="34" charset="-120"/>
-              </a:rPr>
-              <a:t>Play 1: Vision &amp; Guardrails - This lesson informs Play 1 by helping learners connect the lesson topic to.</a:t>
+                  <a:srgbClr val="003A63"/>
+                </a:solidFill>
+                <a:latin typeface="Aptos" pitchFamily="34" charset="0"/>
+                <a:ea typeface="Aptos" pitchFamily="34" charset="-122"/>
+                <a:cs typeface="Aptos" pitchFamily="34" charset="-120"/>
+              </a:rPr>
+              <a:t>• Play 1: Vision &amp; Guardrails - This lesson informs Play 1 by helping learners connect the.</a:t>
             </a:r>
             <a:endParaRPr lang="en-US" sz="1900" dirty="0"/>
           </a:p>
@@ -14484,17 +14714,17 @@
         </p:nvSpPr>
         <p:spPr>
           <a:xfrm>
-            <a:off x="8211312" y="1920240"/>
-            <a:ext cx="2734056" cy="1463040"/>
-          </a:xfrm>
-          <a:prstGeom prst="rect">
-            <a:avLst/>
-          </a:prstGeom>
-          <a:noFill/>
-          <a:ln/>
-        </p:spPr>
-        <p:txBody>
-          <a:bodyPr wrap="square" lIns="0" tIns="0" rIns="0" bIns="0" rtlCol="0" anchor="t">
+            <a:off x="8211312" y="1892808"/>
+            <a:ext cx="2734056" cy="1536192"/>
+          </a:xfrm>
+          <a:prstGeom prst="rect">
+            <a:avLst/>
+          </a:prstGeom>
+          <a:noFill/>
+          <a:ln/>
+        </p:spPr>
+        <p:txBody>
+          <a:bodyPr wrap="square" lIns="254" tIns="254" rIns="254" bIns="254" rtlCol="0" anchor="t">
             <a:normAutofit/>
           </a:bodyPr>
           <a:lstStyle/>
@@ -14503,7 +14733,7 @@
               <a:buNone/>
             </a:pPr>
             <a:r>
-              <a:rPr lang="en-US" sz="1550" dirty="0">
+              <a:rPr lang="en-US" sz="1320" dirty="0">
                 <a:solidFill>
                   <a:srgbClr val="17364A"/>
                 </a:solidFill>
@@ -14511,9 +14741,9 @@
                 <a:ea typeface="Aptos" pitchFamily="34" charset="-122"/>
                 <a:cs typeface="Aptos" pitchFamily="34" charset="-120"/>
               </a:rPr>
-              <a:t>Use the related plays to identify decisions, participants, timing, approvals, and documentation needed for responsible implementation.</a:t>
-            </a:r>
-            <a:endParaRPr lang="en-US" sz="1550" dirty="0"/>
+              <a:t>Use the related plays to identify decisions, participants, timing, approvals, and documentation needed for responsible.</a:t>
+            </a:r>
+            <a:endParaRPr lang="en-US" sz="1320" dirty="0"/>
           </a:p>
         </p:txBody>
       </p:sp>
@@ -14601,13 +14831,16 @@
           <a:ln/>
         </p:spPr>
         <p:txBody>
-          <a:bodyPr wrap="square" lIns="254" tIns="254" rIns="254" bIns="254" rtlCol="0" anchor="t">
+          <a:bodyPr wrap="square" lIns="508" tIns="508" rIns="508" bIns="508" rtlCol="0" anchor="t">
             <a:normAutofit/>
           </a:bodyPr>
           <a:lstStyle/>
           <a:p>
-            <a:r>
-              <a:rPr lang="en-US" sz="1380" dirty="0">
+            <a:pPr indent="0" marL="0">
+              <a:buNone/>
+            </a:pPr>
+            <a:r>
+              <a:rPr lang="en-US" sz="1220" dirty="0">
                 <a:solidFill>
                   <a:srgbClr val="17364A"/>
                 </a:solidFill>
@@ -14617,11 +14850,14 @@
               </a:rPr>
               <a:t>Locate the decision point in the playbook sequence.</a:t>
             </a:r>
-            <a:endParaRPr lang="en-US" sz="1380" dirty="0"/>
-          </a:p>
-          <a:p>
-            <a:r>
-              <a:rPr lang="en-US" sz="1380" dirty="0">
+            <a:endParaRPr lang="en-US" sz="1220" dirty="0"/>
+          </a:p>
+          <a:p>
+            <a:pPr indent="0" marL="0">
+              <a:buNone/>
+            </a:pPr>
+            <a:r>
+              <a:rPr lang="en-US" sz="1220" dirty="0">
                 <a:solidFill>
                   <a:srgbClr val="17364A"/>
                 </a:solidFill>
@@ -14631,11 +14867,14 @@
               </a:rPr>
               <a:t>Identify who should participate in the work.</a:t>
             </a:r>
-            <a:endParaRPr lang="en-US" sz="1380" dirty="0"/>
-          </a:p>
-          <a:p>
-            <a:r>
-              <a:rPr lang="en-US" sz="1380" dirty="0">
+            <a:endParaRPr lang="en-US" sz="1220" dirty="0"/>
+          </a:p>
+          <a:p>
+            <a:pPr indent="0" marL="0">
+              <a:buNone/>
+            </a:pPr>
+            <a:r>
+              <a:rPr lang="en-US" sz="1220" dirty="0">
                 <a:solidFill>
                   <a:srgbClr val="17364A"/>
                 </a:solidFill>
@@ -14645,7 +14884,7 @@
               </a:rPr>
               <a:t>Document the review, approval, or implementation step.</a:t>
             </a:r>
-            <a:endParaRPr lang="en-US" sz="1380" dirty="0"/>
+            <a:endParaRPr lang="en-US" sz="1220" dirty="0"/>
           </a:p>
         </p:txBody>
       </p:sp>
@@ -14946,63 +15185,75 @@
           <a:ln/>
         </p:spPr>
         <p:txBody>
-          <a:bodyPr wrap="square" lIns="635" tIns="635" rIns="635" bIns="635" rtlCol="0" anchor="t">
+          <a:bodyPr wrap="square" lIns="1016" tIns="1016" rIns="1016" bIns="1016" rtlCol="0" anchor="t">
             <a:normAutofit/>
           </a:bodyPr>
           <a:lstStyle/>
           <a:p>
+            <a:pPr indent="0" marL="0">
+              <a:buNone/>
+            </a:pPr>
             <a:r>
               <a:rPr lang="en-US" sz="1850" dirty="0">
                 <a:solidFill>
-                  <a:srgbClr val="17364A"/>
-                </a:solidFill>
-                <a:latin typeface="Aptos" pitchFamily="34" charset="0"/>
-                <a:ea typeface="Aptos" pitchFamily="34" charset="-122"/>
-                <a:cs typeface="Aptos" pitchFamily="34" charset="-120"/>
-              </a:rPr>
-              <a:t>Tool 4: AI Policy Landscape Scan (Worksheet) - Use AI Policy Landscape Scan to translate this lesson into a.</a:t>
+                  <a:srgbClr val="003A63"/>
+                </a:solidFill>
+                <a:latin typeface="Aptos" pitchFamily="34" charset="0"/>
+                <a:ea typeface="Aptos" pitchFamily="34" charset="-122"/>
+                <a:cs typeface="Aptos" pitchFamily="34" charset="-120"/>
+              </a:rPr>
+              <a:t>• Tool 4: AI Policy Landscape Scan (Worksheet) - Use AI Policy Landscape Scan to translate this.</a:t>
             </a:r>
             <a:endParaRPr lang="en-US" sz="1850" dirty="0"/>
           </a:p>
           <a:p>
+            <a:pPr indent="0" marL="0">
+              <a:buNone/>
+            </a:pPr>
             <a:r>
               <a:rPr lang="en-US" sz="1850" dirty="0">
                 <a:solidFill>
-                  <a:srgbClr val="17364A"/>
-                </a:solidFill>
-                <a:latin typeface="Aptos" pitchFamily="34" charset="0"/>
-                <a:ea typeface="Aptos" pitchFamily="34" charset="-122"/>
-                <a:cs typeface="Aptos" pitchFamily="34" charset="-120"/>
-              </a:rPr>
-              <a:t>Tool 5: AI Environmental and Resource Impact Review (Checklist) - Use AI Environmental and Resource Impact.</a:t>
+                  <a:srgbClr val="003A63"/>
+                </a:solidFill>
+                <a:latin typeface="Aptos" pitchFamily="34" charset="0"/>
+                <a:ea typeface="Aptos" pitchFamily="34" charset="-122"/>
+                <a:cs typeface="Aptos" pitchFamily="34" charset="-120"/>
+              </a:rPr>
+              <a:t>• Tool 5: AI Environmental and Resource Impact Review (Checklist) - Use AI Environmental and.</a:t>
             </a:r>
             <a:endParaRPr lang="en-US" sz="1850" dirty="0"/>
           </a:p>
           <a:p>
+            <a:pPr indent="0" marL="0">
+              <a:buNone/>
+            </a:pPr>
             <a:r>
               <a:rPr lang="en-US" sz="1850" dirty="0">
                 <a:solidFill>
-                  <a:srgbClr val="17364A"/>
-                </a:solidFill>
-                <a:latin typeface="Aptos" pitchFamily="34" charset="0"/>
-                <a:ea typeface="Aptos" pitchFamily="34" charset="-122"/>
-                <a:cs typeface="Aptos" pitchFamily="34" charset="-120"/>
-              </a:rPr>
-              <a:t>Tool 6: Human-Centered AI Decision Rule Checklist (Checklist) - Use Human-Centered AI Decision Rule.</a:t>
+                  <a:srgbClr val="003A63"/>
+                </a:solidFill>
+                <a:latin typeface="Aptos" pitchFamily="34" charset="0"/>
+                <a:ea typeface="Aptos" pitchFamily="34" charset="-122"/>
+                <a:cs typeface="Aptos" pitchFamily="34" charset="-120"/>
+              </a:rPr>
+              <a:t>• Tool 6: Human-Centered AI Decision Rule Checklist (Checklist) - Use Human-Centered AI Decision.</a:t>
             </a:r>
             <a:endParaRPr lang="en-US" sz="1850" dirty="0"/>
           </a:p>
           <a:p>
+            <a:pPr indent="0" marL="0">
+              <a:buNone/>
+            </a:pPr>
             <a:r>
               <a:rPr lang="en-US" sz="1850" dirty="0">
                 <a:solidFill>
-                  <a:srgbClr val="17364A"/>
-                </a:solidFill>
-                <a:latin typeface="Aptos" pitchFamily="34" charset="0"/>
-                <a:ea typeface="Aptos" pitchFamily="34" charset="-122"/>
-                <a:cs typeface="Aptos" pitchFamily="34" charset="-120"/>
-              </a:rPr>
-              <a:t>Tool 8: AI Project Charter (Planning) - Use AI Project Charter to translate this lesson into a documented.</a:t>
+                  <a:srgbClr val="003A63"/>
+                </a:solidFill>
+                <a:latin typeface="Aptos" pitchFamily="34" charset="0"/>
+                <a:ea typeface="Aptos" pitchFamily="34" charset="-122"/>
+                <a:cs typeface="Aptos" pitchFamily="34" charset="-120"/>
+              </a:rPr>
+              <a:t>• Tool 8: AI Project Charter (Planning) - Use AI Project Charter to translate this lesson into a.</a:t>
             </a:r>
             <a:endParaRPr lang="en-US" sz="1850" dirty="0"/>
           </a:p>
@@ -15082,17 +15333,17 @@
         </p:nvSpPr>
         <p:spPr>
           <a:xfrm>
-            <a:off x="8211312" y="1920240"/>
-            <a:ext cx="2734056" cy="1463040"/>
-          </a:xfrm>
-          <a:prstGeom prst="rect">
-            <a:avLst/>
-          </a:prstGeom>
-          <a:noFill/>
-          <a:ln/>
-        </p:spPr>
-        <p:txBody>
-          <a:bodyPr wrap="square" lIns="0" tIns="0" rIns="0" bIns="0" rtlCol="0" anchor="t">
+            <a:off x="8211312" y="1892808"/>
+            <a:ext cx="2734056" cy="1536192"/>
+          </a:xfrm>
+          <a:prstGeom prst="rect">
+            <a:avLst/>
+          </a:prstGeom>
+          <a:noFill/>
+          <a:ln/>
+        </p:spPr>
+        <p:txBody>
+          <a:bodyPr wrap="square" lIns="254" tIns="254" rIns="254" bIns="254" rtlCol="0" anchor="t">
             <a:normAutofit/>
           </a:bodyPr>
           <a:lstStyle/>
@@ -15101,7 +15352,7 @@
               <a:buNone/>
             </a:pPr>
             <a:r>
-              <a:rPr lang="en-US" sz="1550" dirty="0">
+              <a:rPr lang="en-US" sz="1320" dirty="0">
                 <a:solidFill>
                   <a:srgbClr val="17364A"/>
                 </a:solidFill>
@@ -15109,9 +15360,9 @@
                 <a:ea typeface="Aptos" pitchFamily="34" charset="-122"/>
                 <a:cs typeface="Aptos" pitchFamily="34" charset="-120"/>
               </a:rPr>
-              <a:t>Use linked tools when your department needs a structured worksheet, template, checklist, review process, or documentation artifact.</a:t>
-            </a:r>
-            <a:endParaRPr lang="en-US" sz="1550" dirty="0"/>
+              <a:t>Use linked tools when your department needs a structured worksheet, template, checklist, review process, or.</a:t>
+            </a:r>
+            <a:endParaRPr lang="en-US" sz="1320" dirty="0"/>
           </a:p>
         </p:txBody>
       </p:sp>
@@ -15199,13 +15450,16 @@
           <a:ln/>
         </p:spPr>
         <p:txBody>
-          <a:bodyPr wrap="square" lIns="254" tIns="254" rIns="254" bIns="254" rtlCol="0" anchor="t">
+          <a:bodyPr wrap="square" lIns="508" tIns="508" rIns="508" bIns="508" rtlCol="0" anchor="t">
             <a:normAutofit/>
           </a:bodyPr>
           <a:lstStyle/>
           <a:p>
-            <a:r>
-              <a:rPr lang="en-US" sz="1380" dirty="0">
+            <a:pPr indent="0" marL="0">
+              <a:buNone/>
+            </a:pPr>
+            <a:r>
+              <a:rPr lang="en-US" sz="1220" dirty="0">
                 <a:solidFill>
                   <a:srgbClr val="17364A"/>
                 </a:solidFill>
@@ -15215,11 +15469,14 @@
               </a:rPr>
               <a:t>Use a tool when no comparable local process exists.</a:t>
             </a:r>
-            <a:endParaRPr lang="en-US" sz="1380" dirty="0"/>
-          </a:p>
-          <a:p>
-            <a:r>
-              <a:rPr lang="en-US" sz="1380" dirty="0">
+            <a:endParaRPr lang="en-US" sz="1220" dirty="0"/>
+          </a:p>
+          <a:p>
+            <a:pPr indent="0" marL="0">
+              <a:buNone/>
+            </a:pPr>
+            <a:r>
+              <a:rPr lang="en-US" sz="1220" dirty="0">
                 <a:solidFill>
                   <a:srgbClr val="17364A"/>
                 </a:solidFill>
@@ -15227,13 +15484,16 @@
                 <a:ea typeface="Aptos" pitchFamily="34" charset="-122"/>
                 <a:cs typeface="Aptos" pitchFamily="34" charset="-120"/>
               </a:rPr>
-              <a:t>Adapt existing department templates when they already fit the purpose.</a:t>
-            </a:r>
-            <a:endParaRPr lang="en-US" sz="1380" dirty="0"/>
-          </a:p>
-          <a:p>
-            <a:r>
-              <a:rPr lang="en-US" sz="1380" dirty="0">
+              <a:t>Adapt existing department templates when they already fit the.</a:t>
+            </a:r>
+            <a:endParaRPr lang="en-US" sz="1220" dirty="0"/>
+          </a:p>
+          <a:p>
+            <a:pPr indent="0" marL="0">
+              <a:buNone/>
+            </a:pPr>
+            <a:r>
+              <a:rPr lang="en-US" sz="1220" dirty="0">
                 <a:solidFill>
                   <a:srgbClr val="17364A"/>
                 </a:solidFill>
@@ -15243,7 +15503,7 @@
               </a:rPr>
               <a:t>Save the completed artifact as evidence of the decision.</a:t>
             </a:r>
-            <a:endParaRPr lang="en-US" sz="1380" dirty="0"/>
+            <a:endParaRPr lang="en-US" sz="1220" dirty="0"/>
           </a:p>
         </p:txBody>
       </p:sp>
@@ -15544,49 +15804,58 @@
           <a:ln/>
         </p:spPr>
         <p:txBody>
-          <a:bodyPr wrap="square" lIns="635" tIns="635" rIns="635" bIns="635" rtlCol="0" anchor="t">
+          <a:bodyPr wrap="square" lIns="1016" tIns="1016" rIns="1016" bIns="1016" rtlCol="0" anchor="t">
             <a:normAutofit/>
           </a:bodyPr>
           <a:lstStyle/>
           <a:p>
+            <a:pPr indent="0" marL="0">
+              <a:buNone/>
+            </a:pPr>
             <a:r>
               <a:rPr lang="en-US" sz="2100" dirty="0">
                 <a:solidFill>
-                  <a:srgbClr val="17364A"/>
-                </a:solidFill>
-                <a:latin typeface="Aptos" pitchFamily="34" charset="0"/>
-                <a:ea typeface="Aptos" pitchFamily="34" charset="-122"/>
-                <a:cs typeface="Aptos" pitchFamily="34" charset="-120"/>
-              </a:rPr>
-              <a:t>Explain why AI can increase privacy and confidentiality risks in public health workflows.</a:t>
+                  <a:srgbClr val="003A63"/>
+                </a:solidFill>
+                <a:latin typeface="Aptos" pitchFamily="34" charset="0"/>
+                <a:ea typeface="Aptos" pitchFamily="34" charset="-122"/>
+                <a:cs typeface="Aptos" pitchFamily="34" charset="-120"/>
+              </a:rPr>
+              <a:t>• Explain why AI can increase privacy and confidentiality risks in public health workflows.</a:t>
             </a:r>
             <a:endParaRPr lang="en-US" sz="2100" dirty="0"/>
           </a:p>
           <a:p>
+            <a:pPr indent="0" marL="0">
+              <a:buNone/>
+            </a:pPr>
             <a:r>
               <a:rPr lang="en-US" sz="2100" dirty="0">
                 <a:solidFill>
-                  <a:srgbClr val="17364A"/>
-                </a:solidFill>
-                <a:latin typeface="Aptos" pitchFamily="34" charset="0"/>
-                <a:ea typeface="Aptos" pitchFamily="34" charset="-122"/>
-                <a:cs typeface="Aptos" pitchFamily="34" charset="-120"/>
-              </a:rPr>
-              <a:t>Distinguish between identifiable data, de-identified data, aggregated data, limited datasets, and.</a:t>
+                  <a:srgbClr val="003A63"/>
+                </a:solidFill>
+                <a:latin typeface="Aptos" pitchFamily="34" charset="0"/>
+                <a:ea typeface="Aptos" pitchFamily="34" charset="-122"/>
+                <a:cs typeface="Aptos" pitchFamily="34" charset="-120"/>
+              </a:rPr>
+              <a:t>• Distinguish between identifiable data, de-identified data, aggregated data, limited datasets,.</a:t>
             </a:r>
             <a:endParaRPr lang="en-US" sz="2100" dirty="0"/>
           </a:p>
           <a:p>
+            <a:pPr indent="0" marL="0">
+              <a:buNone/>
+            </a:pPr>
             <a:r>
               <a:rPr lang="en-US" sz="2100" dirty="0">
                 <a:solidFill>
-                  <a:srgbClr val="17364A"/>
-                </a:solidFill>
-                <a:latin typeface="Aptos" pitchFamily="34" charset="0"/>
-                <a:ea typeface="Aptos" pitchFamily="34" charset="-122"/>
-                <a:cs typeface="Aptos" pitchFamily="34" charset="-120"/>
-              </a:rPr>
-              <a:t>Identify technical and operational safeguards that reduce privacy risk, including data minimization,.</a:t>
+                  <a:srgbClr val="003A63"/>
+                </a:solidFill>
+                <a:latin typeface="Aptos" pitchFamily="34" charset="0"/>
+                <a:ea typeface="Aptos" pitchFamily="34" charset="-122"/>
+                <a:cs typeface="Aptos" pitchFamily="34" charset="-120"/>
+              </a:rPr>
+              <a:t>• Identify technical and operational safeguards that reduce privacy risk, including data.</a:t>
             </a:r>
             <a:endParaRPr lang="en-US" sz="2100" dirty="0"/>
           </a:p>
@@ -15666,17 +15935,17 @@
         </p:nvSpPr>
         <p:spPr>
           <a:xfrm>
-            <a:off x="7799832" y="1828800"/>
-            <a:ext cx="3145536" cy="685800"/>
-          </a:xfrm>
-          <a:prstGeom prst="rect">
-            <a:avLst/>
-          </a:prstGeom>
-          <a:noFill/>
-          <a:ln/>
-        </p:spPr>
-        <p:txBody>
-          <a:bodyPr wrap="square" lIns="0" tIns="0" rIns="0" bIns="0" rtlCol="0" anchor="t">
+            <a:off x="7799832" y="1801368"/>
+            <a:ext cx="3145536" cy="758952"/>
+          </a:xfrm>
+          <a:prstGeom prst="rect">
+            <a:avLst/>
+          </a:prstGeom>
+          <a:noFill/>
+          <a:ln/>
+        </p:spPr>
+        <p:txBody>
+          <a:bodyPr wrap="square" lIns="254" tIns="254" rIns="254" bIns="254" rtlCol="0" anchor="t">
             <a:normAutofit/>
           </a:bodyPr>
           <a:lstStyle/>
@@ -15685,7 +15954,7 @@
               <a:buNone/>
             </a:pPr>
             <a:r>
-              <a:rPr lang="en-US" sz="1550" dirty="0">
+              <a:rPr lang="en-US" sz="1320" dirty="0">
                 <a:solidFill>
                   <a:srgbClr val="17364A"/>
                 </a:solidFill>
@@ -15695,7 +15964,7 @@
               </a:rPr>
               <a:t>Explain why AI can increase privacy and confidentiality risks in public health workflows.</a:t>
             </a:r>
-            <a:endParaRPr lang="en-US" sz="1550" dirty="0"/>
+            <a:endParaRPr lang="en-US" sz="1320" dirty="0"/>
           </a:p>
         </p:txBody>
       </p:sp>
@@ -15783,13 +16052,16 @@
           <a:ln/>
         </p:spPr>
         <p:txBody>
-          <a:bodyPr wrap="square" lIns="254" tIns="254" rIns="254" bIns="254" rtlCol="0" anchor="t">
+          <a:bodyPr wrap="square" lIns="508" tIns="508" rIns="508" bIns="508" rtlCol="0" anchor="t">
             <a:normAutofit/>
           </a:bodyPr>
           <a:lstStyle/>
           <a:p>
-            <a:r>
-              <a:rPr lang="en-US" sz="1380" dirty="0">
+            <a:pPr indent="0" marL="0">
+              <a:buNone/>
+            </a:pPr>
+            <a:r>
+              <a:rPr lang="en-US" sz="1220" dirty="0">
                 <a:solidFill>
                   <a:srgbClr val="17364A"/>
                 </a:solidFill>
@@ -15797,13 +16069,16 @@
                 <a:ea typeface="Aptos" pitchFamily="34" charset="-122"/>
                 <a:cs typeface="Aptos" pitchFamily="34" charset="-120"/>
               </a:rPr>
-              <a:t>Distinguish between identifiable data, de-identified data, aggregated data, limited.</a:t>
-            </a:r>
-            <a:endParaRPr lang="en-US" sz="1380" dirty="0"/>
-          </a:p>
-          <a:p>
-            <a:r>
-              <a:rPr lang="en-US" sz="1380" dirty="0">
+              <a:t>Distinguish between identifiable data, de-identified data,.</a:t>
+            </a:r>
+            <a:endParaRPr lang="en-US" sz="1220" dirty="0"/>
+          </a:p>
+          <a:p>
+            <a:pPr indent="0" marL="0">
+              <a:buNone/>
+            </a:pPr>
+            <a:r>
+              <a:rPr lang="en-US" sz="1220" dirty="0">
                 <a:solidFill>
                   <a:srgbClr val="17364A"/>
                 </a:solidFill>
@@ -15811,13 +16086,16 @@
                 <a:ea typeface="Aptos" pitchFamily="34" charset="-122"/>
                 <a:cs typeface="Aptos" pitchFamily="34" charset="-120"/>
               </a:rPr>
-              <a:t>Identify technical and operational safeguards that reduce privacy risk, including data.</a:t>
-            </a:r>
-            <a:endParaRPr lang="en-US" sz="1380" dirty="0"/>
-          </a:p>
-          <a:p>
-            <a:r>
-              <a:rPr lang="en-US" sz="1380" dirty="0">
+              <a:t>Identify technical and operational safeguards that reduce privacy.</a:t>
+            </a:r>
+            <a:endParaRPr lang="en-US" sz="1220" dirty="0"/>
+          </a:p>
+          <a:p>
+            <a:pPr indent="0" marL="0">
+              <a:buNone/>
+            </a:pPr>
+            <a:r>
+              <a:rPr lang="en-US" sz="1220" dirty="0">
                 <a:solidFill>
                   <a:srgbClr val="17364A"/>
                 </a:solidFill>
@@ -15825,9 +16103,9 @@
                 <a:ea typeface="Aptos" pitchFamily="34" charset="-122"/>
                 <a:cs typeface="Aptos" pitchFamily="34" charset="-120"/>
               </a:rPr>
-              <a:t>Assess re-identification risk when public health data are linked, enriched, summarized, or.</a:t>
-            </a:r>
-            <a:endParaRPr lang="en-US" sz="1380" dirty="0"/>
+              <a:t>Assess re-identification risk when public health data are linked,.</a:t>
+            </a:r>
+            <a:endParaRPr lang="en-US" sz="1220" dirty="0"/>
           </a:p>
         </p:txBody>
       </p:sp>
@@ -15905,17 +16183,17 @@
         </p:nvSpPr>
         <p:spPr>
           <a:xfrm>
-            <a:off x="7799832" y="5001768"/>
-            <a:ext cx="3145536" cy="502920"/>
-          </a:xfrm>
-          <a:prstGeom prst="rect">
-            <a:avLst/>
-          </a:prstGeom>
-          <a:noFill/>
-          <a:ln/>
-        </p:spPr>
-        <p:txBody>
-          <a:bodyPr wrap="square" lIns="0" tIns="0" rIns="0" bIns="0" rtlCol="0" anchor="t">
+            <a:off x="7799832" y="4974336"/>
+            <a:ext cx="3145536" cy="576072"/>
+          </a:xfrm>
+          <a:prstGeom prst="rect">
+            <a:avLst/>
+          </a:prstGeom>
+          <a:noFill/>
+          <a:ln/>
+        </p:spPr>
+        <p:txBody>
+          <a:bodyPr wrap="square" lIns="254" tIns="254" rIns="254" bIns="254" rtlCol="0" anchor="t">
             <a:normAutofit/>
           </a:bodyPr>
           <a:lstStyle/>
@@ -15924,7 +16202,7 @@
               <a:buNone/>
             </a:pPr>
             <a:r>
-              <a:rPr lang="en-US" sz="1550" dirty="0">
+              <a:rPr lang="en-US" sz="1320" dirty="0">
                 <a:solidFill>
                   <a:srgbClr val="17364A"/>
                 </a:solidFill>
@@ -15932,9 +16210,9 @@
                 <a:ea typeface="Aptos" pitchFamily="34" charset="-122"/>
                 <a:cs typeface="Aptos" pitchFamily="34" charset="-120"/>
               </a:rPr>
-              <a:t>Use the assignment to test whether you can explain the concept, apply it to a realistic public health situation, and identify what would need review before the work moves forward.</a:t>
-            </a:r>
-            <a:endParaRPr lang="en-US" sz="1550" dirty="0"/>
+              <a:t>Use the assignment to test whether you can explain the concept, apply it to a realistic public health situation, and.</a:t>
+            </a:r>
+            <a:endParaRPr lang="en-US" sz="1320" dirty="0"/>
           </a:p>
         </p:txBody>
       </p:sp>
@@ -16235,21 +16513,24 @@
           <a:ln/>
         </p:spPr>
         <p:txBody>
-          <a:bodyPr wrap="square" lIns="635" tIns="635" rIns="635" bIns="635" rtlCol="0" anchor="t">
+          <a:bodyPr wrap="square" lIns="1016" tIns="1016" rIns="1016" bIns="1016" rtlCol="0" anchor="t">
             <a:normAutofit/>
           </a:bodyPr>
           <a:lstStyle/>
           <a:p>
+            <a:pPr indent="0" marL="0">
+              <a:buNone/>
+            </a:pPr>
             <a:r>
               <a:rPr lang="en-US" sz="2100" dirty="0">
                 <a:solidFill>
-                  <a:srgbClr val="17364A"/>
-                </a:solidFill>
-                <a:latin typeface="Aptos" pitchFamily="34" charset="0"/>
-                <a:ea typeface="Aptos" pitchFamily="34" charset="-122"/>
-                <a:cs typeface="Aptos" pitchFamily="34" charset="-120"/>
-              </a:rPr>
-              <a:t>Produce a privacy-preserving AI review worksheet for a real or realistic public health workflow.</a:t>
+                  <a:srgbClr val="003A63"/>
+                </a:solidFill>
+                <a:latin typeface="Aptos" pitchFamily="34" charset="0"/>
+                <a:ea typeface="Aptos" pitchFamily="34" charset="-122"/>
+                <a:cs typeface="Aptos" pitchFamily="34" charset="-120"/>
+              </a:rPr>
+              <a:t>• Produce a privacy-preserving AI review worksheet for a real or realistic public health workflow.</a:t>
             </a:r>
             <a:endParaRPr lang="en-US" sz="2100" dirty="0"/>
           </a:p>
@@ -16329,17 +16610,17 @@
         </p:nvSpPr>
         <p:spPr>
           <a:xfrm>
-            <a:off x="7799832" y="1828800"/>
-            <a:ext cx="3145536" cy="685800"/>
-          </a:xfrm>
-          <a:prstGeom prst="rect">
-            <a:avLst/>
-          </a:prstGeom>
-          <a:noFill/>
-          <a:ln/>
-        </p:spPr>
-        <p:txBody>
-          <a:bodyPr wrap="square" lIns="0" tIns="0" rIns="0" bIns="0" rtlCol="0" anchor="t">
+            <a:off x="7799832" y="1801368"/>
+            <a:ext cx="3145536" cy="758952"/>
+          </a:xfrm>
+          <a:prstGeom prst="rect">
+            <a:avLst/>
+          </a:prstGeom>
+          <a:noFill/>
+          <a:ln/>
+        </p:spPr>
+        <p:txBody>
+          <a:bodyPr wrap="square" lIns="254" tIns="254" rIns="254" bIns="254" rtlCol="0" anchor="t">
             <a:normAutofit/>
           </a:bodyPr>
           <a:lstStyle/>
@@ -16348,7 +16629,7 @@
               <a:buNone/>
             </a:pPr>
             <a:r>
-              <a:rPr lang="en-US" sz="1550" dirty="0">
+              <a:rPr lang="en-US" sz="1320" dirty="0">
                 <a:solidFill>
                   <a:srgbClr val="17364A"/>
                 </a:solidFill>
@@ -16358,7 +16639,7 @@
               </a:rPr>
               <a:t>Produce a privacy-preserving AI review worksheet for a real or realistic public health workflow.</a:t>
             </a:r>
-            <a:endParaRPr lang="en-US" sz="1550" dirty="0"/>
+            <a:endParaRPr lang="en-US" sz="1320" dirty="0"/>
           </a:p>
         </p:txBody>
       </p:sp>
@@ -16446,13 +16727,16 @@
           <a:ln/>
         </p:spPr>
         <p:txBody>
-          <a:bodyPr wrap="square" lIns="254" tIns="254" rIns="254" bIns="254" rtlCol="0" anchor="t">
+          <a:bodyPr wrap="square" lIns="508" tIns="508" rIns="508" bIns="508" rtlCol="0" anchor="t">
             <a:normAutofit/>
           </a:bodyPr>
           <a:lstStyle/>
           <a:p>
-            <a:r>
-              <a:rPr lang="en-US" sz="1380" dirty="0">
+            <a:pPr indent="0" marL="0">
+              <a:buNone/>
+            </a:pPr>
+            <a:r>
+              <a:rPr lang="en-US" sz="1220" dirty="0">
                 <a:solidFill>
                   <a:srgbClr val="17364A"/>
                 </a:solidFill>
@@ -16460,9 +16744,9 @@
                 <a:ea typeface="Aptos" pitchFamily="34" charset="-122"/>
                 <a:cs typeface="Aptos" pitchFamily="34" charset="-120"/>
               </a:rPr>
-              <a:t>Produce a privacy-preserving AI review worksheet for a real or realistic public health.</a:t>
-            </a:r>
-            <a:endParaRPr lang="en-US" sz="1380" dirty="0"/>
+              <a:t>Produce a privacy-preserving AI review worksheet for a real or.</a:t>
+            </a:r>
+            <a:endParaRPr lang="en-US" sz="1220" dirty="0"/>
           </a:p>
         </p:txBody>
       </p:sp>
@@ -16540,17 +16824,17 @@
         </p:nvSpPr>
         <p:spPr>
           <a:xfrm>
-            <a:off x="7799832" y="5001768"/>
-            <a:ext cx="3145536" cy="502920"/>
-          </a:xfrm>
-          <a:prstGeom prst="rect">
-            <a:avLst/>
-          </a:prstGeom>
-          <a:noFill/>
-          <a:ln/>
-        </p:spPr>
-        <p:txBody>
-          <a:bodyPr wrap="square" lIns="0" tIns="0" rIns="0" bIns="0" rtlCol="0" anchor="t">
+            <a:off x="7799832" y="4974336"/>
+            <a:ext cx="3145536" cy="576072"/>
+          </a:xfrm>
+          <a:prstGeom prst="rect">
+            <a:avLst/>
+          </a:prstGeom>
+          <a:noFill/>
+          <a:ln/>
+        </p:spPr>
+        <p:txBody>
+          <a:bodyPr wrap="square" lIns="254" tIns="254" rIns="254" bIns="254" rtlCol="0" anchor="t">
             <a:normAutofit/>
           </a:bodyPr>
           <a:lstStyle/>
@@ -16559,7 +16843,7 @@
               <a:buNone/>
             </a:pPr>
             <a:r>
-              <a:rPr lang="en-US" sz="1550" dirty="0">
+              <a:rPr lang="en-US" sz="1320" dirty="0">
                 <a:solidFill>
                   <a:srgbClr val="17364A"/>
                 </a:solidFill>
@@ -16567,9 +16851,9 @@
                 <a:ea typeface="Aptos" pitchFamily="34" charset="-122"/>
                 <a:cs typeface="Aptos" pitchFamily="34" charset="-120"/>
               </a:rPr>
-              <a:t>Use the assignment to test whether you can explain the concept, apply it to a realistic public health situation, and identify what would need review before the work moves forward.</a:t>
-            </a:r>
-            <a:endParaRPr lang="en-US" sz="1550" dirty="0"/>
+              <a:t>Use the assignment to test whether you can explain the concept, apply it to a realistic public health situation, and.</a:t>
+            </a:r>
+            <a:endParaRPr lang="en-US" sz="1320" dirty="0"/>
           </a:p>
         </p:txBody>
       </p:sp>
@@ -16870,49 +17154,58 @@
           <a:ln/>
         </p:spPr>
         <p:txBody>
-          <a:bodyPr wrap="square" lIns="635" tIns="635" rIns="635" bIns="635" rtlCol="0" anchor="t">
+          <a:bodyPr wrap="square" lIns="1016" tIns="1016" rIns="1016" bIns="1016" rtlCol="0" anchor="t">
             <a:normAutofit/>
           </a:bodyPr>
           <a:lstStyle/>
           <a:p>
+            <a:pPr indent="0" marL="0">
+              <a:buNone/>
+            </a:pPr>
             <a:r>
               <a:rPr lang="en-US" sz="2100" dirty="0">
                 <a:solidFill>
-                  <a:srgbClr val="17364A"/>
-                </a:solidFill>
-                <a:latin typeface="Aptos" pitchFamily="34" charset="0"/>
-                <a:ea typeface="Aptos" pitchFamily="34" charset="-122"/>
-                <a:cs typeface="Aptos" pitchFamily="34" charset="-120"/>
-              </a:rPr>
-              <a:t>Privacy-preserving AI is the set of technical, policy, and workflow practices that allow public health.</a:t>
+                  <a:srgbClr val="003A63"/>
+                </a:solidFill>
+                <a:latin typeface="Aptos" pitchFamily="34" charset="0"/>
+                <a:ea typeface="Aptos" pitchFamily="34" charset="-122"/>
+                <a:cs typeface="Aptos" pitchFamily="34" charset="-120"/>
+              </a:rPr>
+              <a:t>• Privacy-preserving AI is the set of technical, policy, and workflow practices that allow.</a:t>
             </a:r>
             <a:endParaRPr lang="en-US" sz="2100" dirty="0"/>
           </a:p>
           <a:p>
+            <a:pPr indent="0" marL="0">
+              <a:buNone/>
+            </a:pPr>
             <a:r>
               <a:rPr lang="en-US" sz="2100" dirty="0">
                 <a:solidFill>
-                  <a:srgbClr val="17364A"/>
-                </a:solidFill>
-                <a:latin typeface="Aptos" pitchFamily="34" charset="0"/>
-                <a:ea typeface="Aptos" pitchFamily="34" charset="-122"/>
-                <a:cs typeface="Aptos" pitchFamily="34" charset="-120"/>
-              </a:rPr>
-              <a:t>This module focuses on how privacy protections must be built into AI planning before data are.</a:t>
+                  <a:srgbClr val="003A63"/>
+                </a:solidFill>
+                <a:latin typeface="Aptos" pitchFamily="34" charset="0"/>
+                <a:ea typeface="Aptos" pitchFamily="34" charset="-122"/>
+                <a:cs typeface="Aptos" pitchFamily="34" charset="-120"/>
+              </a:rPr>
+              <a:t>• This module focuses on how privacy protections must be built into AI planning before data are.</a:t>
             </a:r>
             <a:endParaRPr lang="en-US" sz="2100" dirty="0"/>
           </a:p>
           <a:p>
+            <a:pPr indent="0" marL="0">
+              <a:buNone/>
+            </a:pPr>
             <a:r>
               <a:rPr lang="en-US" sz="2100" dirty="0">
                 <a:solidFill>
-                  <a:srgbClr val="17364A"/>
-                </a:solidFill>
-                <a:latin typeface="Aptos" pitchFamily="34" charset="0"/>
-                <a:ea typeface="Aptos" pitchFamily="34" charset="-122"/>
-                <a:cs typeface="Aptos" pitchFamily="34" charset="-120"/>
-              </a:rPr>
-              <a:t>Public health agencies often have legal authority to collect and use sensitive data, but authority to.</a:t>
+                  <a:srgbClr val="003A63"/>
+                </a:solidFill>
+                <a:latin typeface="Aptos" pitchFamily="34" charset="0"/>
+                <a:ea typeface="Aptos" pitchFamily="34" charset="-122"/>
+                <a:cs typeface="Aptos" pitchFamily="34" charset="-120"/>
+              </a:rPr>
+              <a:t>• Public health agencies often have legal authority to collect and use sensitive data, but.</a:t>
             </a:r>
             <a:endParaRPr lang="en-US" sz="2100" dirty="0"/>
           </a:p>
@@ -16992,17 +17285,17 @@
         </p:nvSpPr>
         <p:spPr>
           <a:xfrm>
-            <a:off x="7799832" y="1828800"/>
-            <a:ext cx="3145536" cy="685800"/>
-          </a:xfrm>
-          <a:prstGeom prst="rect">
-            <a:avLst/>
-          </a:prstGeom>
-          <a:noFill/>
-          <a:ln/>
-        </p:spPr>
-        <p:txBody>
-          <a:bodyPr wrap="square" lIns="0" tIns="0" rIns="0" bIns="0" rtlCol="0" anchor="t">
+            <a:off x="7799832" y="1801368"/>
+            <a:ext cx="3145536" cy="758952"/>
+          </a:xfrm>
+          <a:prstGeom prst="rect">
+            <a:avLst/>
+          </a:prstGeom>
+          <a:noFill/>
+          <a:ln/>
+        </p:spPr>
+        <p:txBody>
+          <a:bodyPr wrap="square" lIns="254" tIns="254" rIns="254" bIns="254" rtlCol="0" anchor="t">
             <a:normAutofit/>
           </a:bodyPr>
           <a:lstStyle/>
@@ -17011,7 +17304,7 @@
               <a:buNone/>
             </a:pPr>
             <a:r>
-              <a:rPr lang="en-US" sz="1550" dirty="0">
+              <a:rPr lang="en-US" sz="1320" dirty="0">
                 <a:solidFill>
                   <a:srgbClr val="17364A"/>
                 </a:solidFill>
@@ -17021,7 +17314,7 @@
               </a:rPr>
               <a:t>Privacy-preserving AI is the set of technical, policy, and workflow practices that allow public health.</a:t>
             </a:r>
-            <a:endParaRPr lang="en-US" sz="1550" dirty="0"/>
+            <a:endParaRPr lang="en-US" sz="1320" dirty="0"/>
           </a:p>
         </p:txBody>
       </p:sp>
@@ -17109,13 +17402,16 @@
           <a:ln/>
         </p:spPr>
         <p:txBody>
-          <a:bodyPr wrap="square" lIns="254" tIns="254" rIns="254" bIns="254" rtlCol="0" anchor="t">
+          <a:bodyPr wrap="square" lIns="508" tIns="508" rIns="508" bIns="508" rtlCol="0" anchor="t">
             <a:normAutofit/>
           </a:bodyPr>
           <a:lstStyle/>
           <a:p>
-            <a:r>
-              <a:rPr lang="en-US" sz="1380" dirty="0">
+            <a:pPr indent="0" marL="0">
+              <a:buNone/>
+            </a:pPr>
+            <a:r>
+              <a:rPr lang="en-US" sz="1220" dirty="0">
                 <a:solidFill>
                   <a:srgbClr val="17364A"/>
                 </a:solidFill>
@@ -17123,13 +17419,16 @@
                 <a:ea typeface="Aptos" pitchFamily="34" charset="-122"/>
                 <a:cs typeface="Aptos" pitchFamily="34" charset="-120"/>
               </a:rPr>
-              <a:t>Privacy-preserving AI is the set of technical, policy, and workflow practices that allow.</a:t>
-            </a:r>
-            <a:endParaRPr lang="en-US" sz="1380" dirty="0"/>
-          </a:p>
-          <a:p>
-            <a:r>
-              <a:rPr lang="en-US" sz="1380" dirty="0">
+              <a:t>Privacy-preserving AI is the set of technical, policy, and.</a:t>
+            </a:r>
+            <a:endParaRPr lang="en-US" sz="1220" dirty="0"/>
+          </a:p>
+          <a:p>
+            <a:pPr indent="0" marL="0">
+              <a:buNone/>
+            </a:pPr>
+            <a:r>
+              <a:rPr lang="en-US" sz="1220" dirty="0">
                 <a:solidFill>
                   <a:srgbClr val="17364A"/>
                 </a:solidFill>
@@ -17137,13 +17436,16 @@
                 <a:ea typeface="Aptos" pitchFamily="34" charset="-122"/>
                 <a:cs typeface="Aptos" pitchFamily="34" charset="-120"/>
               </a:rPr>
-              <a:t>This module focuses on how privacy protections must be built into AI planning before data.</a:t>
-            </a:r>
-            <a:endParaRPr lang="en-US" sz="1380" dirty="0"/>
-          </a:p>
-          <a:p>
-            <a:r>
-              <a:rPr lang="en-US" sz="1380" dirty="0">
+              <a:t>This module focuses on how privacy protections must be built into.</a:t>
+            </a:r>
+            <a:endParaRPr lang="en-US" sz="1220" dirty="0"/>
+          </a:p>
+          <a:p>
+            <a:pPr indent="0" marL="0">
+              <a:buNone/>
+            </a:pPr>
+            <a:r>
+              <a:rPr lang="en-US" sz="1220" dirty="0">
                 <a:solidFill>
                   <a:srgbClr val="17364A"/>
                 </a:solidFill>
@@ -17151,9 +17453,9 @@
                 <a:ea typeface="Aptos" pitchFamily="34" charset="-122"/>
                 <a:cs typeface="Aptos" pitchFamily="34" charset="-120"/>
               </a:rPr>
-              <a:t>Public health agencies often have legal authority to collect and use sensitive data, but.</a:t>
-            </a:r>
-            <a:endParaRPr lang="en-US" sz="1380" dirty="0"/>
+              <a:t>Public health agencies often have legal authority to collect and.</a:t>
+            </a:r>
+            <a:endParaRPr lang="en-US" sz="1220" dirty="0"/>
           </a:p>
         </p:txBody>
       </p:sp>
@@ -17231,17 +17533,17 @@
         </p:nvSpPr>
         <p:spPr>
           <a:xfrm>
-            <a:off x="7799832" y="5001768"/>
-            <a:ext cx="3145536" cy="502920"/>
-          </a:xfrm>
-          <a:prstGeom prst="rect">
-            <a:avLst/>
-          </a:prstGeom>
-          <a:noFill/>
-          <a:ln/>
-        </p:spPr>
-        <p:txBody>
-          <a:bodyPr wrap="square" lIns="0" tIns="0" rIns="0" bIns="0" rtlCol="0" anchor="t">
+            <a:off x="7799832" y="4974336"/>
+            <a:ext cx="3145536" cy="576072"/>
+          </a:xfrm>
+          <a:prstGeom prst="rect">
+            <a:avLst/>
+          </a:prstGeom>
+          <a:noFill/>
+          <a:ln/>
+        </p:spPr>
+        <p:txBody>
+          <a:bodyPr wrap="square" lIns="254" tIns="254" rIns="254" bIns="254" rtlCol="0" anchor="t">
             <a:normAutofit/>
           </a:bodyPr>
           <a:lstStyle/>
@@ -17250,7 +17552,7 @@
               <a:buNone/>
             </a:pPr>
             <a:r>
-              <a:rPr lang="en-US" sz="1550" dirty="0">
+              <a:rPr lang="en-US" sz="1320" dirty="0">
                 <a:solidFill>
                   <a:srgbClr val="17364A"/>
                 </a:solidFill>
@@ -17258,9 +17560,9 @@
                 <a:ea typeface="Aptos" pitchFamily="34" charset="-122"/>
                 <a:cs typeface="Aptos" pitchFamily="34" charset="-120"/>
               </a:rPr>
-              <a:t>Identify what could go wrong, who could be affected, what safeguards are needed, and what evidence should be reviewed before use expands.</a:t>
-            </a:r>
-            <a:endParaRPr lang="en-US" sz="1550" dirty="0"/>
+              <a:t>Identify what could go wrong, who could be affected, what safeguards are needed, and what evidence should be reviewed.</a:t>
+            </a:r>
+            <a:endParaRPr lang="en-US" sz="1320" dirty="0"/>
           </a:p>
         </p:txBody>
       </p:sp>
@@ -17561,49 +17863,58 @@
           <a:ln/>
         </p:spPr>
         <p:txBody>
-          <a:bodyPr wrap="square" lIns="635" tIns="635" rIns="635" bIns="635" rtlCol="0" anchor="t">
+          <a:bodyPr wrap="square" lIns="1016" tIns="1016" rIns="1016" bIns="1016" rtlCol="0" anchor="t">
             <a:normAutofit/>
           </a:bodyPr>
           <a:lstStyle/>
           <a:p>
+            <a:pPr indent="0" marL="0">
+              <a:buNone/>
+            </a:pPr>
             <a:r>
               <a:rPr lang="en-US" sz="2100" dirty="0">
                 <a:solidFill>
-                  <a:srgbClr val="17364A"/>
-                </a:solidFill>
-                <a:latin typeface="Aptos" pitchFamily="34" charset="0"/>
-                <a:ea typeface="Aptos" pitchFamily="34" charset="-122"/>
-                <a:cs typeface="Aptos" pitchFamily="34" charset="-120"/>
-              </a:rPr>
-              <a:t>This module provides national-level training guidance for public health agencies and partners.</a:t>
+                  <a:srgbClr val="003A63"/>
+                </a:solidFill>
+                <a:latin typeface="Aptos" pitchFamily="34" charset="0"/>
+                <a:ea typeface="Aptos" pitchFamily="34" charset="-122"/>
+                <a:cs typeface="Aptos" pitchFamily="34" charset="-120"/>
+              </a:rPr>
+              <a:t>• This module provides national-level training guidance for public health agencies and partners.</a:t>
             </a:r>
             <a:endParaRPr lang="en-US" sz="2100" dirty="0"/>
           </a:p>
           <a:p>
+            <a:pPr indent="0" marL="0">
+              <a:buNone/>
+            </a:pPr>
             <a:r>
               <a:rPr lang="en-US" sz="2100" dirty="0">
                 <a:solidFill>
-                  <a:srgbClr val="17364A"/>
-                </a:solidFill>
-                <a:latin typeface="Aptos" pitchFamily="34" charset="0"/>
-                <a:ea typeface="Aptos" pitchFamily="34" charset="-122"/>
-                <a:cs typeface="Aptos" pitchFamily="34" charset="-120"/>
-              </a:rPr>
-              <a:t>It is not legal advice and does not replace review by agency legal counsel, privacy officers,.</a:t>
+                  <a:srgbClr val="003A63"/>
+                </a:solidFill>
+                <a:latin typeface="Aptos" pitchFamily="34" charset="0"/>
+                <a:ea typeface="Aptos" pitchFamily="34" charset="-122"/>
+                <a:cs typeface="Aptos" pitchFamily="34" charset="-120"/>
+              </a:rPr>
+              <a:t>• It is not legal advice and does not replace review by agency legal counsel, privacy officers,.</a:t>
             </a:r>
             <a:endParaRPr lang="en-US" sz="2100" dirty="0"/>
           </a:p>
           <a:p>
+            <a:pPr indent="0" marL="0">
+              <a:buNone/>
+            </a:pPr>
             <a:r>
               <a:rPr lang="en-US" sz="2100" dirty="0">
                 <a:solidFill>
-                  <a:srgbClr val="17364A"/>
-                </a:solidFill>
-                <a:latin typeface="Aptos" pitchFamily="34" charset="0"/>
-                <a:ea typeface="Aptos" pitchFamily="34" charset="-122"/>
-                <a:cs typeface="Aptos" pitchFamily="34" charset="-120"/>
-              </a:rPr>
-              <a:t>Requirements may vary by state, locality, territory, Tribe, agency, funding source, data-sharing.</a:t>
+                  <a:srgbClr val="003A63"/>
+                </a:solidFill>
+                <a:latin typeface="Aptos" pitchFamily="34" charset="0"/>
+                <a:ea typeface="Aptos" pitchFamily="34" charset="-122"/>
+                <a:cs typeface="Aptos" pitchFamily="34" charset="-120"/>
+              </a:rPr>
+              <a:t>• Requirements may vary by state, locality, territory, Tribe, agency, funding source,.</a:t>
             </a:r>
             <a:endParaRPr lang="en-US" sz="2100" dirty="0"/>
           </a:p>
@@ -17683,17 +17994,17 @@
         </p:nvSpPr>
         <p:spPr>
           <a:xfrm>
-            <a:off x="7799832" y="1828800"/>
-            <a:ext cx="3145536" cy="685800"/>
-          </a:xfrm>
-          <a:prstGeom prst="rect">
-            <a:avLst/>
-          </a:prstGeom>
-          <a:noFill/>
-          <a:ln/>
-        </p:spPr>
-        <p:txBody>
-          <a:bodyPr wrap="square" lIns="0" tIns="0" rIns="0" bIns="0" rtlCol="0" anchor="t">
+            <a:off x="7799832" y="1801368"/>
+            <a:ext cx="3145536" cy="758952"/>
+          </a:xfrm>
+          <a:prstGeom prst="rect">
+            <a:avLst/>
+          </a:prstGeom>
+          <a:noFill/>
+          <a:ln/>
+        </p:spPr>
+        <p:txBody>
+          <a:bodyPr wrap="square" lIns="254" tIns="254" rIns="254" bIns="254" rtlCol="0" anchor="t">
             <a:normAutofit/>
           </a:bodyPr>
           <a:lstStyle/>
@@ -17702,7 +18013,7 @@
               <a:buNone/>
             </a:pPr>
             <a:r>
-              <a:rPr lang="en-US" sz="1550" dirty="0">
+              <a:rPr lang="en-US" sz="1320" dirty="0">
                 <a:solidFill>
                   <a:srgbClr val="17364A"/>
                 </a:solidFill>
@@ -17712,7 +18023,7 @@
               </a:rPr>
               <a:t>This module provides national-level training guidance for public health agencies and partners.</a:t>
             </a:r>
-            <a:endParaRPr lang="en-US" sz="1550" dirty="0"/>
+            <a:endParaRPr lang="en-US" sz="1320" dirty="0"/>
           </a:p>
         </p:txBody>
       </p:sp>
@@ -17800,13 +18111,16 @@
           <a:ln/>
         </p:spPr>
         <p:txBody>
-          <a:bodyPr wrap="square" lIns="254" tIns="254" rIns="254" bIns="254" rtlCol="0" anchor="t">
+          <a:bodyPr wrap="square" lIns="508" tIns="508" rIns="508" bIns="508" rtlCol="0" anchor="t">
             <a:normAutofit/>
           </a:bodyPr>
           <a:lstStyle/>
           <a:p>
-            <a:r>
-              <a:rPr lang="en-US" sz="1380" dirty="0">
+            <a:pPr indent="0" marL="0">
+              <a:buNone/>
+            </a:pPr>
+            <a:r>
+              <a:rPr lang="en-US" sz="1220" dirty="0">
                 <a:solidFill>
                   <a:srgbClr val="17364A"/>
                 </a:solidFill>
@@ -17814,13 +18128,16 @@
                 <a:ea typeface="Aptos" pitchFamily="34" charset="-122"/>
                 <a:cs typeface="Aptos" pitchFamily="34" charset="-120"/>
               </a:rPr>
-              <a:t>It is not legal advice and does not replace review by agency legal counsel, privacy.</a:t>
-            </a:r>
-            <a:endParaRPr lang="en-US" sz="1380" dirty="0"/>
-          </a:p>
-          <a:p>
-            <a:r>
-              <a:rPr lang="en-US" sz="1380" dirty="0">
+              <a:t>It is not legal advice and does not replace review by agency legal.</a:t>
+            </a:r>
+            <a:endParaRPr lang="en-US" sz="1220" dirty="0"/>
+          </a:p>
+          <a:p>
+            <a:pPr indent="0" marL="0">
+              <a:buNone/>
+            </a:pPr>
+            <a:r>
+              <a:rPr lang="en-US" sz="1220" dirty="0">
                 <a:solidFill>
                   <a:srgbClr val="17364A"/>
                 </a:solidFill>
@@ -17828,13 +18145,16 @@
                 <a:ea typeface="Aptos" pitchFamily="34" charset="-122"/>
                 <a:cs typeface="Aptos" pitchFamily="34" charset="-120"/>
               </a:rPr>
-              <a:t>Requirements may vary by state, locality, territory, Tribe, agency, funding source,.</a:t>
-            </a:r>
-            <a:endParaRPr lang="en-US" sz="1380" dirty="0"/>
-          </a:p>
-          <a:p>
-            <a:r>
-              <a:rPr lang="en-US" sz="1380" dirty="0">
+              <a:t>Requirements may vary by state, locality, territory, Tribe,.</a:t>
+            </a:r>
+            <a:endParaRPr lang="en-US" sz="1220" dirty="0"/>
+          </a:p>
+          <a:p>
+            <a:pPr indent="0" marL="0">
+              <a:buNone/>
+            </a:pPr>
+            <a:r>
+              <a:rPr lang="en-US" sz="1220" dirty="0">
                 <a:solidFill>
                   <a:srgbClr val="17364A"/>
                 </a:solidFill>
@@ -17842,9 +18162,9 @@
                 <a:ea typeface="Aptos" pitchFamily="34" charset="-122"/>
                 <a:cs typeface="Aptos" pitchFamily="34" charset="-120"/>
               </a:rPr>
-              <a:t>Learners should use this module to identify the issues that require review and should.</a:t>
-            </a:r>
-            <a:endParaRPr lang="en-US" sz="1380" dirty="0"/>
+              <a:t>Learners should use this module to identify the issues that.</a:t>
+            </a:r>
+            <a:endParaRPr lang="en-US" sz="1220" dirty="0"/>
           </a:p>
         </p:txBody>
       </p:sp>
@@ -17922,17 +18242,17 @@
         </p:nvSpPr>
         <p:spPr>
           <a:xfrm>
-            <a:off x="7799832" y="5001768"/>
-            <a:ext cx="3145536" cy="502920"/>
-          </a:xfrm>
-          <a:prstGeom prst="rect">
-            <a:avLst/>
-          </a:prstGeom>
-          <a:noFill/>
-          <a:ln/>
-        </p:spPr>
-        <p:txBody>
-          <a:bodyPr wrap="square" lIns="0" tIns="0" rIns="0" bIns="0" rtlCol="0" anchor="t">
+            <a:off x="7799832" y="4974336"/>
+            <a:ext cx="3145536" cy="576072"/>
+          </a:xfrm>
+          <a:prstGeom prst="rect">
+            <a:avLst/>
+          </a:prstGeom>
+          <a:noFill/>
+          <a:ln/>
+        </p:spPr>
+        <p:txBody>
+          <a:bodyPr wrap="square" lIns="254" tIns="254" rIns="254" bIns="254" rtlCol="0" anchor="t">
             <a:normAutofit/>
           </a:bodyPr>
           <a:lstStyle/>
@@ -17941,7 +18261,7 @@
               <a:buNone/>
             </a:pPr>
             <a:r>
-              <a:rPr lang="en-US" sz="1550" dirty="0">
+              <a:rPr lang="en-US" sz="1320" dirty="0">
                 <a:solidFill>
                   <a:srgbClr val="17364A"/>
                 </a:solidFill>
@@ -17949,9 +18269,9 @@
                 <a:ea typeface="Aptos" pitchFamily="34" charset="-122"/>
                 <a:cs typeface="Aptos" pitchFamily="34" charset="-120"/>
               </a:rPr>
-              <a:t>Translate this concept into clear decision rights, review steps, documentation expectations, and escalation paths before an AI-supported workflow is approved.</a:t>
-            </a:r>
-            <a:endParaRPr lang="en-US" sz="1550" dirty="0"/>
+              <a:t>Translate this concept into clear decision rights, review steps, documentation expectations, and escalation paths before.</a:t>
+            </a:r>
+            <a:endParaRPr lang="en-US" sz="1320" dirty="0"/>
           </a:p>
         </p:txBody>
       </p:sp>
@@ -18252,49 +18572,58 @@
           <a:ln/>
         </p:spPr>
         <p:txBody>
-          <a:bodyPr wrap="square" lIns="635" tIns="635" rIns="635" bIns="635" rtlCol="0" anchor="t">
+          <a:bodyPr wrap="square" lIns="1016" tIns="1016" rIns="1016" bIns="1016" rtlCol="0" anchor="t">
             <a:normAutofit/>
           </a:bodyPr>
           <a:lstStyle/>
           <a:p>
+            <a:pPr indent="0" marL="0">
+              <a:buNone/>
+            </a:pPr>
             <a:r>
               <a:rPr lang="en-US" sz="2100" dirty="0">
                 <a:solidFill>
-                  <a:srgbClr val="17364A"/>
-                </a:solidFill>
-                <a:latin typeface="Aptos" pitchFamily="34" charset="0"/>
-                <a:ea typeface="Aptos" pitchFamily="34" charset="-122"/>
-                <a:cs typeface="Aptos" pitchFamily="34" charset="-120"/>
-              </a:rPr>
-              <a:t>AI can change the privacy risk profile of a public health dataset even when the source data were.</a:t>
+                  <a:srgbClr val="003A63"/>
+                </a:solidFill>
+                <a:latin typeface="Aptos" pitchFamily="34" charset="0"/>
+                <a:ea typeface="Aptos" pitchFamily="34" charset="-122"/>
+                <a:cs typeface="Aptos" pitchFamily="34" charset="-120"/>
+              </a:rPr>
+              <a:t>• AI can change the privacy risk profile of a public health dataset even when the source data.</a:t>
             </a:r>
             <a:endParaRPr lang="en-US" sz="2100" dirty="0"/>
           </a:p>
           <a:p>
+            <a:pPr indent="0" marL="0">
+              <a:buNone/>
+            </a:pPr>
             <a:r>
               <a:rPr lang="en-US" sz="2100" dirty="0">
                 <a:solidFill>
-                  <a:srgbClr val="17364A"/>
-                </a:solidFill>
-                <a:latin typeface="Aptos" pitchFamily="34" charset="0"/>
-                <a:ea typeface="Aptos" pitchFamily="34" charset="-122"/>
-                <a:cs typeface="Aptos" pitchFamily="34" charset="-120"/>
-              </a:rPr>
-              <a:t>A dataset that seems low risk in one context may become more sensitive when linked to geospatial.</a:t>
+                  <a:srgbClr val="003A63"/>
+                </a:solidFill>
+                <a:latin typeface="Aptos" pitchFamily="34" charset="0"/>
+                <a:ea typeface="Aptos" pitchFamily="34" charset="-122"/>
+                <a:cs typeface="Aptos" pitchFamily="34" charset="-120"/>
+              </a:rPr>
+              <a:t>• A dataset that seems low risk in one context may become more sensitive when linked to.</a:t>
             </a:r>
             <a:endParaRPr lang="en-US" sz="2100" dirty="0"/>
           </a:p>
           <a:p>
+            <a:pPr indent="0" marL="0">
+              <a:buNone/>
+            </a:pPr>
             <a:r>
               <a:rPr lang="en-US" sz="2100" dirty="0">
                 <a:solidFill>
-                  <a:srgbClr val="17364A"/>
-                </a:solidFill>
-                <a:latin typeface="Aptos" pitchFamily="34" charset="0"/>
-                <a:ea typeface="Aptos" pitchFamily="34" charset="-122"/>
-                <a:cs typeface="Aptos" pitchFamily="34" charset="-120"/>
-              </a:rPr>
-              <a:t>Generative AI and retrieval systems can also reveal sensitive details through summaries, citations, or.</a:t>
+                  <a:srgbClr val="003A63"/>
+                </a:solidFill>
+                <a:latin typeface="Aptos" pitchFamily="34" charset="0"/>
+                <a:ea typeface="Aptos" pitchFamily="34" charset="-122"/>
+                <a:cs typeface="Aptos" pitchFamily="34" charset="-120"/>
+              </a:rPr>
+              <a:t>• Generative AI and retrieval systems can also reveal sensitive details through summaries,.</a:t>
             </a:r>
             <a:endParaRPr lang="en-US" sz="2100" dirty="0"/>
           </a:p>
@@ -18374,17 +18703,17 @@
         </p:nvSpPr>
         <p:spPr>
           <a:xfrm>
-            <a:off x="7799832" y="1828800"/>
-            <a:ext cx="3145536" cy="685800"/>
-          </a:xfrm>
-          <a:prstGeom prst="rect">
-            <a:avLst/>
-          </a:prstGeom>
-          <a:noFill/>
-          <a:ln/>
-        </p:spPr>
-        <p:txBody>
-          <a:bodyPr wrap="square" lIns="0" tIns="0" rIns="0" bIns="0" rtlCol="0" anchor="t">
+            <a:off x="7799832" y="1801368"/>
+            <a:ext cx="3145536" cy="758952"/>
+          </a:xfrm>
+          <a:prstGeom prst="rect">
+            <a:avLst/>
+          </a:prstGeom>
+          <a:noFill/>
+          <a:ln/>
+        </p:spPr>
+        <p:txBody>
+          <a:bodyPr wrap="square" lIns="254" tIns="254" rIns="254" bIns="254" rtlCol="0" anchor="t">
             <a:normAutofit/>
           </a:bodyPr>
           <a:lstStyle/>
@@ -18393,7 +18722,7 @@
               <a:buNone/>
             </a:pPr>
             <a:r>
-              <a:rPr lang="en-US" sz="1550" dirty="0">
+              <a:rPr lang="en-US" sz="1320" dirty="0">
                 <a:solidFill>
                   <a:srgbClr val="17364A"/>
                 </a:solidFill>
@@ -18403,7 +18732,7 @@
               </a:rPr>
               <a:t>AI can change the privacy risk profile of a public health dataset even when the source data were.</a:t>
             </a:r>
-            <a:endParaRPr lang="en-US" sz="1550" dirty="0"/>
+            <a:endParaRPr lang="en-US" sz="1320" dirty="0"/>
           </a:p>
         </p:txBody>
       </p:sp>
@@ -18491,13 +18820,16 @@
           <a:ln/>
         </p:spPr>
         <p:txBody>
-          <a:bodyPr wrap="square" lIns="254" tIns="254" rIns="254" bIns="254" rtlCol="0" anchor="t">
+          <a:bodyPr wrap="square" lIns="508" tIns="508" rIns="508" bIns="508" rtlCol="0" anchor="t">
             <a:normAutofit/>
           </a:bodyPr>
           <a:lstStyle/>
           <a:p>
-            <a:r>
-              <a:rPr lang="en-US" sz="1380" dirty="0">
+            <a:pPr indent="0" marL="0">
+              <a:buNone/>
+            </a:pPr>
+            <a:r>
+              <a:rPr lang="en-US" sz="1220" dirty="0">
                 <a:solidFill>
                   <a:srgbClr val="17364A"/>
                 </a:solidFill>
@@ -18505,13 +18837,16 @@
                 <a:ea typeface="Aptos" pitchFamily="34" charset="-122"/>
                 <a:cs typeface="Aptos" pitchFamily="34" charset="-120"/>
               </a:rPr>
-              <a:t>AI can change the privacy risk profile of a public health dataset even when the source.</a:t>
-            </a:r>
-            <a:endParaRPr lang="en-US" sz="1380" dirty="0"/>
-          </a:p>
-          <a:p>
-            <a:r>
-              <a:rPr lang="en-US" sz="1380" dirty="0">
+              <a:t>AI can change the privacy risk profile of a public health dataset.</a:t>
+            </a:r>
+            <a:endParaRPr lang="en-US" sz="1220" dirty="0"/>
+          </a:p>
+          <a:p>
+            <a:pPr indent="0" marL="0">
+              <a:buNone/>
+            </a:pPr>
+            <a:r>
+              <a:rPr lang="en-US" sz="1220" dirty="0">
                 <a:solidFill>
                   <a:srgbClr val="17364A"/>
                 </a:solidFill>
@@ -18519,13 +18854,16 @@
                 <a:ea typeface="Aptos" pitchFamily="34" charset="-122"/>
                 <a:cs typeface="Aptos" pitchFamily="34" charset="-120"/>
               </a:rPr>
-              <a:t>A dataset that seems low risk in one context may become more sensitive when linked to.</a:t>
-            </a:r>
-            <a:endParaRPr lang="en-US" sz="1380" dirty="0"/>
-          </a:p>
-          <a:p>
-            <a:r>
-              <a:rPr lang="en-US" sz="1380" dirty="0">
+              <a:t>A dataset that seems low risk in one context may become more.</a:t>
+            </a:r>
+            <a:endParaRPr lang="en-US" sz="1220" dirty="0"/>
+          </a:p>
+          <a:p>
+            <a:pPr indent="0" marL="0">
+              <a:buNone/>
+            </a:pPr>
+            <a:r>
+              <a:rPr lang="en-US" sz="1220" dirty="0">
                 <a:solidFill>
                   <a:srgbClr val="17364A"/>
                 </a:solidFill>
@@ -18533,9 +18871,9 @@
                 <a:ea typeface="Aptos" pitchFamily="34" charset="-122"/>
                 <a:cs typeface="Aptos" pitchFamily="34" charset="-120"/>
               </a:rPr>
-              <a:t>Generative AI and retrieval systems can also reveal sensitive details through summaries,.</a:t>
-            </a:r>
-            <a:endParaRPr lang="en-US" sz="1380" dirty="0"/>
+              <a:t>Generative AI and retrieval systems can also reveal sensitive.</a:t>
+            </a:r>
+            <a:endParaRPr lang="en-US" sz="1220" dirty="0"/>
           </a:p>
         </p:txBody>
       </p:sp>
@@ -18613,17 +18951,17 @@
         </p:nvSpPr>
         <p:spPr>
           <a:xfrm>
-            <a:off x="7799832" y="5001768"/>
-            <a:ext cx="3145536" cy="502920"/>
-          </a:xfrm>
-          <a:prstGeom prst="rect">
-            <a:avLst/>
-          </a:prstGeom>
-          <a:noFill/>
-          <a:ln/>
-        </p:spPr>
-        <p:txBody>
-          <a:bodyPr wrap="square" lIns="0" tIns="0" rIns="0" bIns="0" rtlCol="0" anchor="t">
+            <a:off x="7799832" y="4974336"/>
+            <a:ext cx="3145536" cy="576072"/>
+          </a:xfrm>
+          <a:prstGeom prst="rect">
+            <a:avLst/>
+          </a:prstGeom>
+          <a:noFill/>
+          <a:ln/>
+        </p:spPr>
+        <p:txBody>
+          <a:bodyPr wrap="square" lIns="254" tIns="254" rIns="254" bIns="254" rtlCol="0" anchor="t">
             <a:normAutofit/>
           </a:bodyPr>
           <a:lstStyle/>
@@ -18632,7 +18970,7 @@
               <a:buNone/>
             </a:pPr>
             <a:r>
-              <a:rPr lang="en-US" sz="1550" dirty="0">
+              <a:rPr lang="en-US" sz="1320" dirty="0">
                 <a:solidFill>
                   <a:srgbClr val="17364A"/>
                 </a:solidFill>
@@ -18640,9 +18978,9 @@
                 <a:ea typeface="Aptos" pitchFamily="34" charset="-122"/>
                 <a:cs typeface="Aptos" pitchFamily="34" charset="-120"/>
               </a:rPr>
-              <a:t>Identify what could go wrong, who could be affected, what safeguards are needed, and what evidence should be reviewed before use expands.</a:t>
-            </a:r>
-            <a:endParaRPr lang="en-US" sz="1550" dirty="0"/>
+              <a:t>Identify what could go wrong, who could be affected, what safeguards are needed, and what evidence should be reviewed.</a:t>
+            </a:r>
+            <a:endParaRPr lang="en-US" sz="1320" dirty="0"/>
           </a:p>
         </p:txBody>
       </p:sp>

--- a/downloads/presentations/modules/gov-310.pptx
+++ b/downloads/presentations/modules/gov-310.pptx
@@ -3599,11 +3599,11 @@
         <p:spPr>
           <a:xfrm>
             <a:off x="7635240" y="1325880"/>
-            <a:ext cx="3474720" cy="1325880"/>
+            <a:ext cx="3474720" cy="1255471"/>
           </a:xfrm>
           <a:prstGeom prst="roundRect">
             <a:avLst>
-              <a:gd name="adj" fmla="val 8276"/>
+              <a:gd name="adj" fmla="val 8740"/>
             </a:avLst>
           </a:prstGeom>
           <a:solidFill>
@@ -3665,7 +3665,7 @@
         <p:spPr>
           <a:xfrm>
             <a:off x="7799832" y="1801368"/>
-            <a:ext cx="3145536" cy="758952"/>
+            <a:ext cx="3145536" cy="688543"/>
           </a:xfrm>
           <a:prstGeom prst="rect">
             <a:avLst/>
@@ -3705,7 +3705,7 @@
         </p:nvSpPr>
         <p:spPr>
           <a:xfrm>
-            <a:off x="7635240" y="2788920"/>
+            <a:off x="7635240" y="2718511"/>
             <a:ext cx="3474720" cy="1536192"/>
           </a:xfrm>
           <a:prstGeom prst="roundRect">
@@ -3732,7 +3732,7 @@
         </p:nvSpPr>
         <p:spPr>
           <a:xfrm>
-            <a:off x="7799832" y="2935224"/>
+            <a:off x="7799832" y="2864815"/>
             <a:ext cx="3145536" cy="256032"/>
           </a:xfrm>
           <a:prstGeom prst="rect">
@@ -3771,7 +3771,7 @@
         </p:nvSpPr>
         <p:spPr>
           <a:xfrm>
-            <a:off x="7818120" y="3300984"/>
+            <a:off x="7818120" y="3230575"/>
             <a:ext cx="3090672" cy="877824"/>
           </a:xfrm>
           <a:prstGeom prst="rect">
@@ -3846,12 +3846,12 @@
         </p:nvSpPr>
         <p:spPr>
           <a:xfrm>
-            <a:off x="7635240" y="4498848"/>
-            <a:ext cx="3474720" cy="1143000"/>
+            <a:off x="7635240" y="4391863"/>
+            <a:ext cx="3474720" cy="1255471"/>
           </a:xfrm>
           <a:prstGeom prst="roundRect">
             <a:avLst>
-              <a:gd name="adj" fmla="val 9600"/>
+              <a:gd name="adj" fmla="val 8740"/>
             </a:avLst>
           </a:prstGeom>
           <a:solidFill>
@@ -3873,7 +3873,7 @@
         </p:nvSpPr>
         <p:spPr>
           <a:xfrm>
-            <a:off x="7799832" y="4645152"/>
+            <a:off x="7799832" y="4538167"/>
             <a:ext cx="3145536" cy="256032"/>
           </a:xfrm>
           <a:prstGeom prst="rect">
@@ -3912,8 +3912,8 @@
         </p:nvSpPr>
         <p:spPr>
           <a:xfrm>
-            <a:off x="7799832" y="4974336"/>
-            <a:ext cx="3145536" cy="576072"/>
+            <a:off x="7799832" y="4867351"/>
+            <a:ext cx="3145536" cy="688543"/>
           </a:xfrm>
           <a:prstGeom prst="rect">
             <a:avLst/>
@@ -3939,7 +3939,7 @@
                 <a:ea typeface="Aptos" pitchFamily="34" charset="-122"/>
                 <a:cs typeface="Aptos" pitchFamily="34" charset="-120"/>
               </a:rPr>
-              <a:t>Identify what could go wrong, who could be affected, what safeguards are needed, and what evidence should be reviewed.</a:t>
+              <a:t>Identify what could go wrong, who could be affected, what safeguards are needed, and what evidence should be reviewed before use.</a:t>
             </a:r>
             <a:endParaRPr lang="en-US" sz="1320" dirty="0"/>
           </a:p>
@@ -4308,11 +4308,11 @@
         <p:spPr>
           <a:xfrm>
             <a:off x="7635240" y="1325880"/>
-            <a:ext cx="3474720" cy="1325880"/>
+            <a:ext cx="3474720" cy="1255471"/>
           </a:xfrm>
           <a:prstGeom prst="roundRect">
             <a:avLst>
-              <a:gd name="adj" fmla="val 8276"/>
+              <a:gd name="adj" fmla="val 8740"/>
             </a:avLst>
           </a:prstGeom>
           <a:solidFill>
@@ -4374,7 +4374,7 @@
         <p:spPr>
           <a:xfrm>
             <a:off x="7799832" y="1801368"/>
-            <a:ext cx="3145536" cy="758952"/>
+            <a:ext cx="3145536" cy="688543"/>
           </a:xfrm>
           <a:prstGeom prst="rect">
             <a:avLst/>
@@ -4414,7 +4414,7 @@
         </p:nvSpPr>
         <p:spPr>
           <a:xfrm>
-            <a:off x="7635240" y="2788920"/>
+            <a:off x="7635240" y="2718511"/>
             <a:ext cx="3474720" cy="1536192"/>
           </a:xfrm>
           <a:prstGeom prst="roundRect">
@@ -4441,7 +4441,7 @@
         </p:nvSpPr>
         <p:spPr>
           <a:xfrm>
-            <a:off x="7799832" y="2935224"/>
+            <a:off x="7799832" y="2864815"/>
             <a:ext cx="3145536" cy="256032"/>
           </a:xfrm>
           <a:prstGeom prst="rect">
@@ -4480,7 +4480,7 @@
         </p:nvSpPr>
         <p:spPr>
           <a:xfrm>
-            <a:off x="7818120" y="3300984"/>
+            <a:off x="7818120" y="3230575"/>
             <a:ext cx="3090672" cy="877824"/>
           </a:xfrm>
           <a:prstGeom prst="rect">
@@ -4538,12 +4538,12 @@
         </p:nvSpPr>
         <p:spPr>
           <a:xfrm>
-            <a:off x="7635240" y="4498848"/>
-            <a:ext cx="3474720" cy="1143000"/>
+            <a:off x="7635240" y="4391863"/>
+            <a:ext cx="3474720" cy="1255471"/>
           </a:xfrm>
           <a:prstGeom prst="roundRect">
             <a:avLst>
-              <a:gd name="adj" fmla="val 9600"/>
+              <a:gd name="adj" fmla="val 8740"/>
             </a:avLst>
           </a:prstGeom>
           <a:solidFill>
@@ -4565,7 +4565,7 @@
         </p:nvSpPr>
         <p:spPr>
           <a:xfrm>
-            <a:off x="7799832" y="4645152"/>
+            <a:off x="7799832" y="4538167"/>
             <a:ext cx="3145536" cy="256032"/>
           </a:xfrm>
           <a:prstGeom prst="rect">
@@ -4604,8 +4604,8 @@
         </p:nvSpPr>
         <p:spPr>
           <a:xfrm>
-            <a:off x="7799832" y="4974336"/>
-            <a:ext cx="3145536" cy="576072"/>
+            <a:off x="7799832" y="4867351"/>
+            <a:ext cx="3145536" cy="688543"/>
           </a:xfrm>
           <a:prstGeom prst="rect">
             <a:avLst/>
@@ -4631,7 +4631,7 @@
                 <a:ea typeface="Aptos" pitchFamily="34" charset="-122"/>
                 <a:cs typeface="Aptos" pitchFamily="34" charset="-120"/>
               </a:rPr>
-              <a:t>Identify what could go wrong, who could be affected, what safeguards are needed, and what evidence should be reviewed.</a:t>
+              <a:t>Identify what could go wrong, who could be affected, what safeguards are needed, and what evidence should be reviewed before use.</a:t>
             </a:r>
             <a:endParaRPr lang="en-US" sz="1320" dirty="0"/>
           </a:p>
@@ -5000,11 +5000,11 @@
         <p:spPr>
           <a:xfrm>
             <a:off x="7635240" y="1325880"/>
-            <a:ext cx="3474720" cy="1325880"/>
+            <a:ext cx="3474720" cy="1255471"/>
           </a:xfrm>
           <a:prstGeom prst="roundRect">
             <a:avLst>
-              <a:gd name="adj" fmla="val 8276"/>
+              <a:gd name="adj" fmla="val 8740"/>
             </a:avLst>
           </a:prstGeom>
           <a:solidFill>
@@ -5066,7 +5066,7 @@
         <p:spPr>
           <a:xfrm>
             <a:off x="7799832" y="1801368"/>
-            <a:ext cx="3145536" cy="758952"/>
+            <a:ext cx="3145536" cy="688543"/>
           </a:xfrm>
           <a:prstGeom prst="rect">
             <a:avLst/>
@@ -5106,7 +5106,7 @@
         </p:nvSpPr>
         <p:spPr>
           <a:xfrm>
-            <a:off x="7635240" y="2788920"/>
+            <a:off x="7635240" y="2718511"/>
             <a:ext cx="3474720" cy="1536192"/>
           </a:xfrm>
           <a:prstGeom prst="roundRect">
@@ -5133,7 +5133,7 @@
         </p:nvSpPr>
         <p:spPr>
           <a:xfrm>
-            <a:off x="7799832" y="2935224"/>
+            <a:off x="7799832" y="2864815"/>
             <a:ext cx="3145536" cy="256032"/>
           </a:xfrm>
           <a:prstGeom prst="rect">
@@ -5172,7 +5172,7 @@
         </p:nvSpPr>
         <p:spPr>
           <a:xfrm>
-            <a:off x="7818120" y="3300984"/>
+            <a:off x="7818120" y="3230575"/>
             <a:ext cx="3090672" cy="877824"/>
           </a:xfrm>
           <a:prstGeom prst="rect">
@@ -5247,12 +5247,12 @@
         </p:nvSpPr>
         <p:spPr>
           <a:xfrm>
-            <a:off x="7635240" y="4498848"/>
-            <a:ext cx="3474720" cy="1143000"/>
+            <a:off x="7635240" y="4391863"/>
+            <a:ext cx="3474720" cy="1255471"/>
           </a:xfrm>
           <a:prstGeom prst="roundRect">
             <a:avLst>
-              <a:gd name="adj" fmla="val 9600"/>
+              <a:gd name="adj" fmla="val 8740"/>
             </a:avLst>
           </a:prstGeom>
           <a:solidFill>
@@ -5274,7 +5274,7 @@
         </p:nvSpPr>
         <p:spPr>
           <a:xfrm>
-            <a:off x="7799832" y="4645152"/>
+            <a:off x="7799832" y="4538167"/>
             <a:ext cx="3145536" cy="256032"/>
           </a:xfrm>
           <a:prstGeom prst="rect">
@@ -5313,8 +5313,8 @@
         </p:nvSpPr>
         <p:spPr>
           <a:xfrm>
-            <a:off x="7799832" y="4974336"/>
-            <a:ext cx="3145536" cy="576072"/>
+            <a:off x="7799832" y="4867351"/>
+            <a:ext cx="3145536" cy="688543"/>
           </a:xfrm>
           <a:prstGeom prst="rect">
             <a:avLst/>
@@ -5340,7 +5340,7 @@
                 <a:ea typeface="Aptos" pitchFamily="34" charset="-122"/>
                 <a:cs typeface="Aptos" pitchFamily="34" charset="-120"/>
               </a:rPr>
-              <a:t>Identify what could go wrong, who could be affected, what safeguards are needed, and what evidence should be reviewed.</a:t>
+              <a:t>Identify what could go wrong, who could be affected, what safeguards are needed, and what evidence should be reviewed before use.</a:t>
             </a:r>
             <a:endParaRPr lang="en-US" sz="1320" dirty="0"/>
           </a:p>
@@ -5709,11 +5709,11 @@
         <p:spPr>
           <a:xfrm>
             <a:off x="7635240" y="1325880"/>
-            <a:ext cx="3474720" cy="1325880"/>
+            <a:ext cx="3474720" cy="1207008"/>
           </a:xfrm>
           <a:prstGeom prst="roundRect">
             <a:avLst>
-              <a:gd name="adj" fmla="val 8276"/>
+              <a:gd name="adj" fmla="val 9091"/>
             </a:avLst>
           </a:prstGeom>
           <a:solidFill>
@@ -5775,7 +5775,7 @@
         <p:spPr>
           <a:xfrm>
             <a:off x="7799832" y="1801368"/>
-            <a:ext cx="3145536" cy="758952"/>
+            <a:ext cx="3145536" cy="640080"/>
           </a:xfrm>
           <a:prstGeom prst="rect">
             <a:avLst/>
@@ -5815,7 +5815,7 @@
         </p:nvSpPr>
         <p:spPr>
           <a:xfrm>
-            <a:off x="7635240" y="2788920"/>
+            <a:off x="7635240" y="2670048"/>
             <a:ext cx="3474720" cy="1536192"/>
           </a:xfrm>
           <a:prstGeom prst="roundRect">
@@ -5842,7 +5842,7 @@
         </p:nvSpPr>
         <p:spPr>
           <a:xfrm>
-            <a:off x="7799832" y="2935224"/>
+            <a:off x="7799832" y="2816352"/>
             <a:ext cx="3145536" cy="256032"/>
           </a:xfrm>
           <a:prstGeom prst="rect">
@@ -5881,7 +5881,7 @@
         </p:nvSpPr>
         <p:spPr>
           <a:xfrm>
-            <a:off x="7818120" y="3300984"/>
+            <a:off x="7818120" y="3182112"/>
             <a:ext cx="3090672" cy="877824"/>
           </a:xfrm>
           <a:prstGeom prst="rect">
@@ -5956,12 +5956,12 @@
         </p:nvSpPr>
         <p:spPr>
           <a:xfrm>
-            <a:off x="7635240" y="4498848"/>
-            <a:ext cx="3474720" cy="1143000"/>
+            <a:off x="7635240" y="4343400"/>
+            <a:ext cx="3474720" cy="1255471"/>
           </a:xfrm>
           <a:prstGeom prst="roundRect">
             <a:avLst>
-              <a:gd name="adj" fmla="val 9600"/>
+              <a:gd name="adj" fmla="val 8740"/>
             </a:avLst>
           </a:prstGeom>
           <a:solidFill>
@@ -5983,7 +5983,7 @@
         </p:nvSpPr>
         <p:spPr>
           <a:xfrm>
-            <a:off x="7799832" y="4645152"/>
+            <a:off x="7799832" y="4489704"/>
             <a:ext cx="3145536" cy="256032"/>
           </a:xfrm>
           <a:prstGeom prst="rect">
@@ -6022,8 +6022,8 @@
         </p:nvSpPr>
         <p:spPr>
           <a:xfrm>
-            <a:off x="7799832" y="4974336"/>
-            <a:ext cx="3145536" cy="576072"/>
+            <a:off x="7799832" y="4818888"/>
+            <a:ext cx="3145536" cy="688543"/>
           </a:xfrm>
           <a:prstGeom prst="rect">
             <a:avLst/>
@@ -6049,7 +6049,7 @@
                 <a:ea typeface="Aptos" pitchFamily="34" charset="-122"/>
                 <a:cs typeface="Aptos" pitchFamily="34" charset="-120"/>
               </a:rPr>
-              <a:t>Identify what could go wrong, who could be affected, what safeguards are needed, and what evidence should be reviewed.</a:t>
+              <a:t>Identify what could go wrong, who could be affected, what safeguards are needed, and what evidence should be reviewed before use.</a:t>
             </a:r>
             <a:endParaRPr lang="en-US" sz="1320" dirty="0"/>
           </a:p>
@@ -6418,11 +6418,11 @@
         <p:spPr>
           <a:xfrm>
             <a:off x="7635240" y="1325880"/>
-            <a:ext cx="3474720" cy="1325880"/>
+            <a:ext cx="3474720" cy="1207008"/>
           </a:xfrm>
           <a:prstGeom prst="roundRect">
             <a:avLst>
-              <a:gd name="adj" fmla="val 8276"/>
+              <a:gd name="adj" fmla="val 9091"/>
             </a:avLst>
           </a:prstGeom>
           <a:solidFill>
@@ -6484,7 +6484,7 @@
         <p:spPr>
           <a:xfrm>
             <a:off x="7799832" y="1801368"/>
-            <a:ext cx="3145536" cy="758952"/>
+            <a:ext cx="3145536" cy="640080"/>
           </a:xfrm>
           <a:prstGeom prst="rect">
             <a:avLst/>
@@ -6524,7 +6524,7 @@
         </p:nvSpPr>
         <p:spPr>
           <a:xfrm>
-            <a:off x="7635240" y="2788920"/>
+            <a:off x="7635240" y="2670048"/>
             <a:ext cx="3474720" cy="1536192"/>
           </a:xfrm>
           <a:prstGeom prst="roundRect">
@@ -6551,7 +6551,7 @@
         </p:nvSpPr>
         <p:spPr>
           <a:xfrm>
-            <a:off x="7799832" y="2935224"/>
+            <a:off x="7799832" y="2816352"/>
             <a:ext cx="3145536" cy="256032"/>
           </a:xfrm>
           <a:prstGeom prst="rect">
@@ -6590,7 +6590,7 @@
         </p:nvSpPr>
         <p:spPr>
           <a:xfrm>
-            <a:off x="7818120" y="3300984"/>
+            <a:off x="7818120" y="3182112"/>
             <a:ext cx="3090672" cy="877824"/>
           </a:xfrm>
           <a:prstGeom prst="rect">
@@ -6665,12 +6665,12 @@
         </p:nvSpPr>
         <p:spPr>
           <a:xfrm>
-            <a:off x="7635240" y="4498848"/>
-            <a:ext cx="3474720" cy="1143000"/>
+            <a:off x="7635240" y="4343400"/>
+            <a:ext cx="3474720" cy="1255471"/>
           </a:xfrm>
           <a:prstGeom prst="roundRect">
             <a:avLst>
-              <a:gd name="adj" fmla="val 9600"/>
+              <a:gd name="adj" fmla="val 8740"/>
             </a:avLst>
           </a:prstGeom>
           <a:solidFill>
@@ -6692,7 +6692,7 @@
         </p:nvSpPr>
         <p:spPr>
           <a:xfrm>
-            <a:off x="7799832" y="4645152"/>
+            <a:off x="7799832" y="4489704"/>
             <a:ext cx="3145536" cy="256032"/>
           </a:xfrm>
           <a:prstGeom prst="rect">
@@ -6731,8 +6731,8 @@
         </p:nvSpPr>
         <p:spPr>
           <a:xfrm>
-            <a:off x="7799832" y="4974336"/>
-            <a:ext cx="3145536" cy="576072"/>
+            <a:off x="7799832" y="4818888"/>
+            <a:ext cx="3145536" cy="688543"/>
           </a:xfrm>
           <a:prstGeom prst="rect">
             <a:avLst/>
@@ -6758,7 +6758,7 @@
                 <a:ea typeface="Aptos" pitchFamily="34" charset="-122"/>
                 <a:cs typeface="Aptos" pitchFamily="34" charset="-120"/>
               </a:rPr>
-              <a:t>Identify what could go wrong, who could be affected, what safeguards are needed, and what evidence should be reviewed.</a:t>
+              <a:t>Identify what could go wrong, who could be affected, what safeguards are needed, and what evidence should be reviewed before use.</a:t>
             </a:r>
             <a:endParaRPr lang="en-US" sz="1320" dirty="0"/>
           </a:p>
@@ -7127,11 +7127,11 @@
         <p:spPr>
           <a:xfrm>
             <a:off x="7635240" y="1325880"/>
-            <a:ext cx="3474720" cy="1325880"/>
+            <a:ext cx="3474720" cy="1207008"/>
           </a:xfrm>
           <a:prstGeom prst="roundRect">
             <a:avLst>
-              <a:gd name="adj" fmla="val 8276"/>
+              <a:gd name="adj" fmla="val 9091"/>
             </a:avLst>
           </a:prstGeom>
           <a:solidFill>
@@ -7193,7 +7193,7 @@
         <p:spPr>
           <a:xfrm>
             <a:off x="7799832" y="1801368"/>
-            <a:ext cx="3145536" cy="758952"/>
+            <a:ext cx="3145536" cy="640080"/>
           </a:xfrm>
           <a:prstGeom prst="rect">
             <a:avLst/>
@@ -7233,7 +7233,7 @@
         </p:nvSpPr>
         <p:spPr>
           <a:xfrm>
-            <a:off x="7635240" y="2788920"/>
+            <a:off x="7635240" y="2670048"/>
             <a:ext cx="3474720" cy="1536192"/>
           </a:xfrm>
           <a:prstGeom prst="roundRect">
@@ -7260,7 +7260,7 @@
         </p:nvSpPr>
         <p:spPr>
           <a:xfrm>
-            <a:off x="7799832" y="2935224"/>
+            <a:off x="7799832" y="2816352"/>
             <a:ext cx="3145536" cy="256032"/>
           </a:xfrm>
           <a:prstGeom prst="rect">
@@ -7299,7 +7299,7 @@
         </p:nvSpPr>
         <p:spPr>
           <a:xfrm>
-            <a:off x="7818120" y="3300984"/>
+            <a:off x="7818120" y="3182112"/>
             <a:ext cx="3090672" cy="877824"/>
           </a:xfrm>
           <a:prstGeom prst="rect">
@@ -7374,12 +7374,12 @@
         </p:nvSpPr>
         <p:spPr>
           <a:xfrm>
-            <a:off x="7635240" y="4498848"/>
-            <a:ext cx="3474720" cy="1143000"/>
+            <a:off x="7635240" y="4343400"/>
+            <a:ext cx="3474720" cy="1255471"/>
           </a:xfrm>
           <a:prstGeom prst="roundRect">
             <a:avLst>
-              <a:gd name="adj" fmla="val 9600"/>
+              <a:gd name="adj" fmla="val 8740"/>
             </a:avLst>
           </a:prstGeom>
           <a:solidFill>
@@ -7401,7 +7401,7 @@
         </p:nvSpPr>
         <p:spPr>
           <a:xfrm>
-            <a:off x="7799832" y="4645152"/>
+            <a:off x="7799832" y="4489704"/>
             <a:ext cx="3145536" cy="256032"/>
           </a:xfrm>
           <a:prstGeom prst="rect">
@@ -7440,8 +7440,8 @@
         </p:nvSpPr>
         <p:spPr>
           <a:xfrm>
-            <a:off x="7799832" y="4974336"/>
-            <a:ext cx="3145536" cy="576072"/>
+            <a:off x="7799832" y="4818888"/>
+            <a:ext cx="3145536" cy="688543"/>
           </a:xfrm>
           <a:prstGeom prst="rect">
             <a:avLst/>
@@ -7467,7 +7467,7 @@
                 <a:ea typeface="Aptos" pitchFamily="34" charset="-122"/>
                 <a:cs typeface="Aptos" pitchFamily="34" charset="-120"/>
               </a:rPr>
-              <a:t>Identify what could go wrong, who could be affected, what safeguards are needed, and what evidence should be reviewed.</a:t>
+              <a:t>Identify what could go wrong, who could be affected, what safeguards are needed, and what evidence should be reviewed before use.</a:t>
             </a:r>
             <a:endParaRPr lang="en-US" sz="1320" dirty="0"/>
           </a:p>
@@ -7836,11 +7836,11 @@
         <p:spPr>
           <a:xfrm>
             <a:off x="7635240" y="1325880"/>
-            <a:ext cx="3474720" cy="1325880"/>
+            <a:ext cx="3474720" cy="1207008"/>
           </a:xfrm>
           <a:prstGeom prst="roundRect">
             <a:avLst>
-              <a:gd name="adj" fmla="val 8276"/>
+              <a:gd name="adj" fmla="val 9091"/>
             </a:avLst>
           </a:prstGeom>
           <a:solidFill>
@@ -7902,7 +7902,7 @@
         <p:spPr>
           <a:xfrm>
             <a:off x="7799832" y="1801368"/>
-            <a:ext cx="3145536" cy="758952"/>
+            <a:ext cx="3145536" cy="640080"/>
           </a:xfrm>
           <a:prstGeom prst="rect">
             <a:avLst/>
@@ -7942,7 +7942,7 @@
         </p:nvSpPr>
         <p:spPr>
           <a:xfrm>
-            <a:off x="7635240" y="2788920"/>
+            <a:off x="7635240" y="2670048"/>
             <a:ext cx="3474720" cy="1536192"/>
           </a:xfrm>
           <a:prstGeom prst="roundRect">
@@ -7969,7 +7969,7 @@
         </p:nvSpPr>
         <p:spPr>
           <a:xfrm>
-            <a:off x="7799832" y="2935224"/>
+            <a:off x="7799832" y="2816352"/>
             <a:ext cx="3145536" cy="256032"/>
           </a:xfrm>
           <a:prstGeom prst="rect">
@@ -8008,7 +8008,7 @@
         </p:nvSpPr>
         <p:spPr>
           <a:xfrm>
-            <a:off x="7818120" y="3300984"/>
+            <a:off x="7818120" y="3182112"/>
             <a:ext cx="3090672" cy="877824"/>
           </a:xfrm>
           <a:prstGeom prst="rect">
@@ -8083,12 +8083,12 @@
         </p:nvSpPr>
         <p:spPr>
           <a:xfrm>
-            <a:off x="7635240" y="4498848"/>
-            <a:ext cx="3474720" cy="1143000"/>
+            <a:off x="7635240" y="4343400"/>
+            <a:ext cx="3474720" cy="1255471"/>
           </a:xfrm>
           <a:prstGeom prst="roundRect">
             <a:avLst>
-              <a:gd name="adj" fmla="val 9600"/>
+              <a:gd name="adj" fmla="val 8740"/>
             </a:avLst>
           </a:prstGeom>
           <a:solidFill>
@@ -8110,7 +8110,7 @@
         </p:nvSpPr>
         <p:spPr>
           <a:xfrm>
-            <a:off x="7799832" y="4645152"/>
+            <a:off x="7799832" y="4489704"/>
             <a:ext cx="3145536" cy="256032"/>
           </a:xfrm>
           <a:prstGeom prst="rect">
@@ -8149,8 +8149,8 @@
         </p:nvSpPr>
         <p:spPr>
           <a:xfrm>
-            <a:off x="7799832" y="4974336"/>
-            <a:ext cx="3145536" cy="576072"/>
+            <a:off x="7799832" y="4818888"/>
+            <a:ext cx="3145536" cy="688543"/>
           </a:xfrm>
           <a:prstGeom prst="rect">
             <a:avLst/>
@@ -8176,7 +8176,7 @@
                 <a:ea typeface="Aptos" pitchFamily="34" charset="-122"/>
                 <a:cs typeface="Aptos" pitchFamily="34" charset="-120"/>
               </a:rPr>
-              <a:t>Identify what could go wrong, who could be affected, what safeguards are needed, and what evidence should be reviewed.</a:t>
+              <a:t>Identify what could go wrong, who could be affected, what safeguards are needed, and what evidence should be reviewed before use.</a:t>
             </a:r>
             <a:endParaRPr lang="en-US" sz="1320" dirty="0"/>
           </a:p>
@@ -8545,11 +8545,11 @@
         <p:spPr>
           <a:xfrm>
             <a:off x="7635240" y="1325880"/>
-            <a:ext cx="3474720" cy="1325880"/>
+            <a:ext cx="3474720" cy="1255471"/>
           </a:xfrm>
           <a:prstGeom prst="roundRect">
             <a:avLst>
-              <a:gd name="adj" fmla="val 8276"/>
+              <a:gd name="adj" fmla="val 8740"/>
             </a:avLst>
           </a:prstGeom>
           <a:solidFill>
@@ -8611,7 +8611,7 @@
         <p:spPr>
           <a:xfrm>
             <a:off x="7799832" y="1801368"/>
-            <a:ext cx="3145536" cy="758952"/>
+            <a:ext cx="3145536" cy="688543"/>
           </a:xfrm>
           <a:prstGeom prst="rect">
             <a:avLst/>
@@ -8651,7 +8651,7 @@
         </p:nvSpPr>
         <p:spPr>
           <a:xfrm>
-            <a:off x="7635240" y="2788920"/>
+            <a:off x="7635240" y="2718511"/>
             <a:ext cx="3474720" cy="1536192"/>
           </a:xfrm>
           <a:prstGeom prst="roundRect">
@@ -8678,7 +8678,7 @@
         </p:nvSpPr>
         <p:spPr>
           <a:xfrm>
-            <a:off x="7799832" y="2935224"/>
+            <a:off x="7799832" y="2864815"/>
             <a:ext cx="3145536" cy="256032"/>
           </a:xfrm>
           <a:prstGeom prst="rect">
@@ -8717,7 +8717,7 @@
         </p:nvSpPr>
         <p:spPr>
           <a:xfrm>
-            <a:off x="7818120" y="3300984"/>
+            <a:off x="7818120" y="3230575"/>
             <a:ext cx="3090672" cy="877824"/>
           </a:xfrm>
           <a:prstGeom prst="rect">
@@ -8792,12 +8792,12 @@
         </p:nvSpPr>
         <p:spPr>
           <a:xfrm>
-            <a:off x="7635240" y="4498848"/>
-            <a:ext cx="3474720" cy="1143000"/>
+            <a:off x="7635240" y="4391863"/>
+            <a:ext cx="3474720" cy="1255471"/>
           </a:xfrm>
           <a:prstGeom prst="roundRect">
             <a:avLst>
-              <a:gd name="adj" fmla="val 9600"/>
+              <a:gd name="adj" fmla="val 8740"/>
             </a:avLst>
           </a:prstGeom>
           <a:solidFill>
@@ -8819,7 +8819,7 @@
         </p:nvSpPr>
         <p:spPr>
           <a:xfrm>
-            <a:off x="7799832" y="4645152"/>
+            <a:off x="7799832" y="4538167"/>
             <a:ext cx="3145536" cy="256032"/>
           </a:xfrm>
           <a:prstGeom prst="rect">
@@ -8858,8 +8858,8 @@
         </p:nvSpPr>
         <p:spPr>
           <a:xfrm>
-            <a:off x="7799832" y="4974336"/>
-            <a:ext cx="3145536" cy="576072"/>
+            <a:off x="7799832" y="4867351"/>
+            <a:ext cx="3145536" cy="688543"/>
           </a:xfrm>
           <a:prstGeom prst="rect">
             <a:avLst/>
@@ -8885,7 +8885,7 @@
                 <a:ea typeface="Aptos" pitchFamily="34" charset="-122"/>
                 <a:cs typeface="Aptos" pitchFamily="34" charset="-120"/>
               </a:rPr>
-              <a:t>Identify what could go wrong, who could be affected, what safeguards are needed, and what evidence should be reviewed.</a:t>
+              <a:t>Identify what could go wrong, who could be affected, what safeguards are needed, and what evidence should be reviewed before use.</a:t>
             </a:r>
             <a:endParaRPr lang="en-US" sz="1320" dirty="0"/>
           </a:p>
@@ -9254,11 +9254,11 @@
         <p:spPr>
           <a:xfrm>
             <a:off x="7635240" y="1325880"/>
-            <a:ext cx="3474720" cy="1325880"/>
+            <a:ext cx="3474720" cy="1255471"/>
           </a:xfrm>
           <a:prstGeom prst="roundRect">
             <a:avLst>
-              <a:gd name="adj" fmla="val 8276"/>
+              <a:gd name="adj" fmla="val 8740"/>
             </a:avLst>
           </a:prstGeom>
           <a:solidFill>
@@ -9320,7 +9320,7 @@
         <p:spPr>
           <a:xfrm>
             <a:off x="7799832" y="1801368"/>
-            <a:ext cx="3145536" cy="758952"/>
+            <a:ext cx="3145536" cy="688543"/>
           </a:xfrm>
           <a:prstGeom prst="rect">
             <a:avLst/>
@@ -9360,7 +9360,7 @@
         </p:nvSpPr>
         <p:spPr>
           <a:xfrm>
-            <a:off x="7635240" y="2788920"/>
+            <a:off x="7635240" y="2718511"/>
             <a:ext cx="3474720" cy="1536192"/>
           </a:xfrm>
           <a:prstGeom prst="roundRect">
@@ -9387,7 +9387,7 @@
         </p:nvSpPr>
         <p:spPr>
           <a:xfrm>
-            <a:off x="7799832" y="2935224"/>
+            <a:off x="7799832" y="2864815"/>
             <a:ext cx="3145536" cy="256032"/>
           </a:xfrm>
           <a:prstGeom prst="rect">
@@ -9426,7 +9426,7 @@
         </p:nvSpPr>
         <p:spPr>
           <a:xfrm>
-            <a:off x="7818120" y="3300984"/>
+            <a:off x="7818120" y="3230575"/>
             <a:ext cx="3090672" cy="877824"/>
           </a:xfrm>
           <a:prstGeom prst="rect">
@@ -9501,12 +9501,12 @@
         </p:nvSpPr>
         <p:spPr>
           <a:xfrm>
-            <a:off x="7635240" y="4498848"/>
-            <a:ext cx="3474720" cy="1143000"/>
+            <a:off x="7635240" y="4391863"/>
+            <a:ext cx="3474720" cy="1255471"/>
           </a:xfrm>
           <a:prstGeom prst="roundRect">
             <a:avLst>
-              <a:gd name="adj" fmla="val 9600"/>
+              <a:gd name="adj" fmla="val 8740"/>
             </a:avLst>
           </a:prstGeom>
           <a:solidFill>
@@ -9528,7 +9528,7 @@
         </p:nvSpPr>
         <p:spPr>
           <a:xfrm>
-            <a:off x="7799832" y="4645152"/>
+            <a:off x="7799832" y="4538167"/>
             <a:ext cx="3145536" cy="256032"/>
           </a:xfrm>
           <a:prstGeom prst="rect">
@@ -9567,8 +9567,8 @@
         </p:nvSpPr>
         <p:spPr>
           <a:xfrm>
-            <a:off x="7799832" y="4974336"/>
-            <a:ext cx="3145536" cy="576072"/>
+            <a:off x="7799832" y="4867351"/>
+            <a:ext cx="3145536" cy="688543"/>
           </a:xfrm>
           <a:prstGeom prst="rect">
             <a:avLst/>
@@ -9594,7 +9594,7 @@
                 <a:ea typeface="Aptos" pitchFamily="34" charset="-122"/>
                 <a:cs typeface="Aptos" pitchFamily="34" charset="-120"/>
               </a:rPr>
-              <a:t>Identify what could go wrong, who could be affected, what safeguards are needed, and what evidence should be reviewed.</a:t>
+              <a:t>Identify what could go wrong, who could be affected, what safeguards are needed, and what evidence should be reviewed before use.</a:t>
             </a:r>
             <a:endParaRPr lang="en-US" sz="1320" dirty="0"/>
           </a:p>
@@ -9946,11 +9946,11 @@
         <p:spPr>
           <a:xfrm>
             <a:off x="7635240" y="1325880"/>
-            <a:ext cx="3474720" cy="1325880"/>
+            <a:ext cx="3474720" cy="1207008"/>
           </a:xfrm>
           <a:prstGeom prst="roundRect">
             <a:avLst>
-              <a:gd name="adj" fmla="val 8276"/>
+              <a:gd name="adj" fmla="val 9091"/>
             </a:avLst>
           </a:prstGeom>
           <a:solidFill>
@@ -10012,7 +10012,7 @@
         <p:spPr>
           <a:xfrm>
             <a:off x="7799832" y="1801368"/>
-            <a:ext cx="3145536" cy="758952"/>
+            <a:ext cx="3145536" cy="640080"/>
           </a:xfrm>
           <a:prstGeom prst="rect">
             <a:avLst/>
@@ -10052,7 +10052,7 @@
         </p:nvSpPr>
         <p:spPr>
           <a:xfrm>
-            <a:off x="7635240" y="2788920"/>
+            <a:off x="7635240" y="2670048"/>
             <a:ext cx="3474720" cy="1536192"/>
           </a:xfrm>
           <a:prstGeom prst="roundRect">
@@ -10079,7 +10079,7 @@
         </p:nvSpPr>
         <p:spPr>
           <a:xfrm>
-            <a:off x="7799832" y="2935224"/>
+            <a:off x="7799832" y="2816352"/>
             <a:ext cx="3145536" cy="256032"/>
           </a:xfrm>
           <a:prstGeom prst="rect">
@@ -10118,7 +10118,7 @@
         </p:nvSpPr>
         <p:spPr>
           <a:xfrm>
-            <a:off x="7818120" y="3300984"/>
+            <a:off x="7818120" y="3182112"/>
             <a:ext cx="3090672" cy="877824"/>
           </a:xfrm>
           <a:prstGeom prst="rect">
@@ -10176,12 +10176,12 @@
         </p:nvSpPr>
         <p:spPr>
           <a:xfrm>
-            <a:off x="7635240" y="4498848"/>
-            <a:ext cx="3474720" cy="1143000"/>
+            <a:off x="7635240" y="4343400"/>
+            <a:ext cx="3474720" cy="1255471"/>
           </a:xfrm>
           <a:prstGeom prst="roundRect">
             <a:avLst>
-              <a:gd name="adj" fmla="val 9600"/>
+              <a:gd name="adj" fmla="val 8740"/>
             </a:avLst>
           </a:prstGeom>
           <a:solidFill>
@@ -10203,7 +10203,7 @@
         </p:nvSpPr>
         <p:spPr>
           <a:xfrm>
-            <a:off x="7799832" y="4645152"/>
+            <a:off x="7799832" y="4489704"/>
             <a:ext cx="3145536" cy="256032"/>
           </a:xfrm>
           <a:prstGeom prst="rect">
@@ -10242,8 +10242,8 @@
         </p:nvSpPr>
         <p:spPr>
           <a:xfrm>
-            <a:off x="7799832" y="4974336"/>
-            <a:ext cx="3145536" cy="576072"/>
+            <a:off x="7799832" y="4818888"/>
+            <a:ext cx="3145536" cy="688543"/>
           </a:xfrm>
           <a:prstGeom prst="rect">
             <a:avLst/>
@@ -10269,7 +10269,7 @@
                 <a:ea typeface="Aptos" pitchFamily="34" charset="-122"/>
                 <a:cs typeface="Aptos" pitchFamily="34" charset="-120"/>
               </a:rPr>
-              <a:t>Identify what could go wrong, who could be affected, what safeguards are needed, and what evidence should be reviewed.</a:t>
+              <a:t>Identify what could go wrong, who could be affected, what safeguards are needed, and what evidence should be reviewed before use.</a:t>
             </a:r>
             <a:endParaRPr lang="en-US" sz="1320" dirty="0"/>
           </a:p>
@@ -11240,11 +11240,11 @@
         <p:spPr>
           <a:xfrm>
             <a:off x="7635240" y="1325880"/>
-            <a:ext cx="3474720" cy="1325880"/>
+            <a:ext cx="3474720" cy="1207008"/>
           </a:xfrm>
           <a:prstGeom prst="roundRect">
             <a:avLst>
-              <a:gd name="adj" fmla="val 8276"/>
+              <a:gd name="adj" fmla="val 9091"/>
             </a:avLst>
           </a:prstGeom>
           <a:solidFill>
@@ -11306,7 +11306,7 @@
         <p:spPr>
           <a:xfrm>
             <a:off x="7799832" y="1801368"/>
-            <a:ext cx="3145536" cy="758952"/>
+            <a:ext cx="3145536" cy="640080"/>
           </a:xfrm>
           <a:prstGeom prst="rect">
             <a:avLst/>
@@ -11332,7 +11332,7 @@
                 <a:ea typeface="Aptos" pitchFamily="34" charset="-122"/>
                 <a:cs typeface="Aptos" pitchFamily="34" charset="-120"/>
               </a:rPr>
-              <a:t>Create a privacy-preserving AI review worksheet for one proposed public health AI workflow.</a:t>
+              <a:t>Create a privacy-preserving AI review worksheet for one proposed public health AI.</a:t>
             </a:r>
             <a:endParaRPr lang="en-US" sz="1320" dirty="0"/>
           </a:p>
@@ -11346,12 +11346,12 @@
         </p:nvSpPr>
         <p:spPr>
           <a:xfrm>
-            <a:off x="7635240" y="2788920"/>
-            <a:ext cx="3474720" cy="1536192"/>
+            <a:off x="7635240" y="2670048"/>
+            <a:ext cx="3474720" cy="1377086"/>
           </a:xfrm>
           <a:prstGeom prst="roundRect">
             <a:avLst>
-              <a:gd name="adj" fmla="val 7143"/>
+              <a:gd name="adj" fmla="val 7968"/>
             </a:avLst>
           </a:prstGeom>
           <a:solidFill>
@@ -11373,7 +11373,7 @@
         </p:nvSpPr>
         <p:spPr>
           <a:xfrm>
-            <a:off x="7799832" y="2935224"/>
+            <a:off x="7799832" y="2816352"/>
             <a:ext cx="3145536" cy="256032"/>
           </a:xfrm>
           <a:prstGeom prst="rect">
@@ -11412,8 +11412,8 @@
         </p:nvSpPr>
         <p:spPr>
           <a:xfrm>
-            <a:off x="7818120" y="3300984"/>
-            <a:ext cx="3090672" cy="877824"/>
+            <a:off x="7818120" y="3182112"/>
+            <a:ext cx="3090672" cy="718718"/>
           </a:xfrm>
           <a:prstGeom prst="rect">
             <a:avLst/>
@@ -11487,12 +11487,12 @@
         </p:nvSpPr>
         <p:spPr>
           <a:xfrm>
-            <a:off x="7635240" y="4498848"/>
-            <a:ext cx="3474720" cy="1143000"/>
+            <a:off x="7635240" y="4184294"/>
+            <a:ext cx="3474720" cy="1466698"/>
           </a:xfrm>
           <a:prstGeom prst="roundRect">
             <a:avLst>
-              <a:gd name="adj" fmla="val 9600"/>
+              <a:gd name="adj" fmla="val 7481"/>
             </a:avLst>
           </a:prstGeom>
           <a:solidFill>
@@ -11514,7 +11514,7 @@
         </p:nvSpPr>
         <p:spPr>
           <a:xfrm>
-            <a:off x="7799832" y="4645152"/>
+            <a:off x="7799832" y="4330598"/>
             <a:ext cx="3145536" cy="256032"/>
           </a:xfrm>
           <a:prstGeom prst="rect">
@@ -11553,8 +11553,8 @@
         </p:nvSpPr>
         <p:spPr>
           <a:xfrm>
-            <a:off x="7799832" y="4974336"/>
-            <a:ext cx="3145536" cy="576072"/>
+            <a:off x="7799832" y="4659782"/>
+            <a:ext cx="3145536" cy="899770"/>
           </a:xfrm>
           <a:prstGeom prst="rect">
             <a:avLst/>
@@ -11580,7 +11580,7 @@
                 <a:ea typeface="Aptos" pitchFamily="34" charset="-122"/>
                 <a:cs typeface="Aptos" pitchFamily="34" charset="-120"/>
               </a:rPr>
-              <a:t>Use the assignment to test whether you can explain the concept, apply it to a realistic public health situation, and.</a:t>
+              <a:t>Use the assignment to test whether you can explain the concept, apply it to a realistic public health situation, and identify what would need review before the work moves forward.</a:t>
             </a:r>
             <a:endParaRPr lang="en-US" sz="1320" dirty="0"/>
           </a:p>
@@ -11915,11 +11915,11 @@
         <p:spPr>
           <a:xfrm>
             <a:off x="7635240" y="1325880"/>
-            <a:ext cx="3474720" cy="1325880"/>
+            <a:ext cx="3474720" cy="1255471"/>
           </a:xfrm>
           <a:prstGeom prst="roundRect">
             <a:avLst>
-              <a:gd name="adj" fmla="val 8276"/>
+              <a:gd name="adj" fmla="val 8740"/>
             </a:avLst>
           </a:prstGeom>
           <a:solidFill>
@@ -11981,7 +11981,7 @@
         <p:spPr>
           <a:xfrm>
             <a:off x="7799832" y="1801368"/>
-            <a:ext cx="3145536" cy="758952"/>
+            <a:ext cx="3145536" cy="688543"/>
           </a:xfrm>
           <a:prstGeom prst="rect">
             <a:avLst/>
@@ -12021,7 +12021,7 @@
         </p:nvSpPr>
         <p:spPr>
           <a:xfrm>
-            <a:off x="7635240" y="2788920"/>
+            <a:off x="7635240" y="2718511"/>
             <a:ext cx="3474720" cy="1536192"/>
           </a:xfrm>
           <a:prstGeom prst="roundRect">
@@ -12048,7 +12048,7 @@
         </p:nvSpPr>
         <p:spPr>
           <a:xfrm>
-            <a:off x="7799832" y="2935224"/>
+            <a:off x="7799832" y="2864815"/>
             <a:ext cx="3145536" cy="256032"/>
           </a:xfrm>
           <a:prstGeom prst="rect">
@@ -12087,7 +12087,7 @@
         </p:nvSpPr>
         <p:spPr>
           <a:xfrm>
-            <a:off x="7818120" y="3300984"/>
+            <a:off x="7818120" y="3230575"/>
             <a:ext cx="3090672" cy="877824"/>
           </a:xfrm>
           <a:prstGeom prst="rect">
@@ -12128,12 +12128,12 @@
         </p:nvSpPr>
         <p:spPr>
           <a:xfrm>
-            <a:off x="7635240" y="4498848"/>
-            <a:ext cx="3474720" cy="1143000"/>
+            <a:off x="7635240" y="4391863"/>
+            <a:ext cx="3474720" cy="1255471"/>
           </a:xfrm>
           <a:prstGeom prst="roundRect">
             <a:avLst>
-              <a:gd name="adj" fmla="val 9600"/>
+              <a:gd name="adj" fmla="val 8740"/>
             </a:avLst>
           </a:prstGeom>
           <a:solidFill>
@@ -12155,7 +12155,7 @@
         </p:nvSpPr>
         <p:spPr>
           <a:xfrm>
-            <a:off x="7799832" y="4645152"/>
+            <a:off x="7799832" y="4538167"/>
             <a:ext cx="3145536" cy="256032"/>
           </a:xfrm>
           <a:prstGeom prst="rect">
@@ -12194,8 +12194,8 @@
         </p:nvSpPr>
         <p:spPr>
           <a:xfrm>
-            <a:off x="7799832" y="4974336"/>
-            <a:ext cx="3145536" cy="576072"/>
+            <a:off x="7799832" y="4867351"/>
+            <a:ext cx="3145536" cy="688543"/>
           </a:xfrm>
           <a:prstGeom prst="rect">
             <a:avLst/>
@@ -12221,7 +12221,7 @@
                 <a:ea typeface="Aptos" pitchFamily="34" charset="-122"/>
                 <a:cs typeface="Aptos" pitchFamily="34" charset="-120"/>
               </a:rPr>
-              <a:t>Identify what could go wrong, who could be affected, what safeguards are needed, and what evidence should be reviewed.</a:t>
+              <a:t>Identify what could go wrong, who could be affected, what safeguards are needed, and what evidence should be reviewed before use.</a:t>
             </a:r>
             <a:endParaRPr lang="en-US" sz="1320" dirty="0"/>
           </a:p>
@@ -12556,11 +12556,11 @@
         <p:spPr>
           <a:xfrm>
             <a:off x="7635240" y="1325880"/>
-            <a:ext cx="3474720" cy="1325880"/>
+            <a:ext cx="3474720" cy="1255471"/>
           </a:xfrm>
           <a:prstGeom prst="roundRect">
             <a:avLst>
-              <a:gd name="adj" fmla="val 8276"/>
+              <a:gd name="adj" fmla="val 8740"/>
             </a:avLst>
           </a:prstGeom>
           <a:solidFill>
@@ -12622,7 +12622,7 @@
         <p:spPr>
           <a:xfrm>
             <a:off x="7799832" y="1801368"/>
-            <a:ext cx="3145536" cy="758952"/>
+            <a:ext cx="3145536" cy="688543"/>
           </a:xfrm>
           <a:prstGeom prst="rect">
             <a:avLst/>
@@ -12662,12 +12662,12 @@
         </p:nvSpPr>
         <p:spPr>
           <a:xfrm>
-            <a:off x="7635240" y="2788920"/>
-            <a:ext cx="3474720" cy="1536192"/>
+            <a:off x="7635240" y="2718511"/>
+            <a:ext cx="3474720" cy="1328623"/>
           </a:xfrm>
           <a:prstGeom prst="roundRect">
             <a:avLst>
-              <a:gd name="adj" fmla="val 7143"/>
+              <a:gd name="adj" fmla="val 8259"/>
             </a:avLst>
           </a:prstGeom>
           <a:solidFill>
@@ -12689,7 +12689,7 @@
         </p:nvSpPr>
         <p:spPr>
           <a:xfrm>
-            <a:off x="7799832" y="2935224"/>
+            <a:off x="7799832" y="2864815"/>
             <a:ext cx="3145536" cy="256032"/>
           </a:xfrm>
           <a:prstGeom prst="rect">
@@ -12728,8 +12728,8 @@
         </p:nvSpPr>
         <p:spPr>
           <a:xfrm>
-            <a:off x="7818120" y="3300984"/>
-            <a:ext cx="3090672" cy="877824"/>
+            <a:off x="7818120" y="3230575"/>
+            <a:ext cx="3090672" cy="670255"/>
           </a:xfrm>
           <a:prstGeom prst="rect">
             <a:avLst/>
@@ -12769,12 +12769,12 @@
         </p:nvSpPr>
         <p:spPr>
           <a:xfrm>
-            <a:off x="7635240" y="4498848"/>
-            <a:ext cx="3474720" cy="1143000"/>
+            <a:off x="7635240" y="4184294"/>
+            <a:ext cx="3474720" cy="1466698"/>
           </a:xfrm>
           <a:prstGeom prst="roundRect">
             <a:avLst>
-              <a:gd name="adj" fmla="val 9600"/>
+              <a:gd name="adj" fmla="val 7481"/>
             </a:avLst>
           </a:prstGeom>
           <a:solidFill>
@@ -12796,7 +12796,7 @@
         </p:nvSpPr>
         <p:spPr>
           <a:xfrm>
-            <a:off x="7799832" y="4645152"/>
+            <a:off x="7799832" y="4330598"/>
             <a:ext cx="3145536" cy="256032"/>
           </a:xfrm>
           <a:prstGeom prst="rect">
@@ -12835,8 +12835,8 @@
         </p:nvSpPr>
         <p:spPr>
           <a:xfrm>
-            <a:off x="7799832" y="4974336"/>
-            <a:ext cx="3145536" cy="576072"/>
+            <a:off x="7799832" y="4659782"/>
+            <a:ext cx="3145536" cy="899770"/>
           </a:xfrm>
           <a:prstGeom prst="rect">
             <a:avLst/>
@@ -12862,7 +12862,7 @@
                 <a:ea typeface="Aptos" pitchFamily="34" charset="-122"/>
                 <a:cs typeface="Aptos" pitchFamily="34" charset="-120"/>
               </a:rPr>
-              <a:t>Use the assignment to test whether you can explain the concept, apply it to a realistic public health situation, and.</a:t>
+              <a:t>Use the assignment to test whether you can explain the concept, apply it to a realistic public health situation, and identify what would need review before the work moves forward.</a:t>
             </a:r>
             <a:endParaRPr lang="en-US" sz="1320" dirty="0"/>
           </a:p>
@@ -13231,11 +13231,11 @@
         <p:spPr>
           <a:xfrm>
             <a:off x="7635240" y="1325880"/>
-            <a:ext cx="3474720" cy="1325880"/>
+            <a:ext cx="3474720" cy="1207008"/>
           </a:xfrm>
           <a:prstGeom prst="roundRect">
             <a:avLst>
-              <a:gd name="adj" fmla="val 8276"/>
+              <a:gd name="adj" fmla="val 9091"/>
             </a:avLst>
           </a:prstGeom>
           <a:solidFill>
@@ -13297,7 +13297,7 @@
         <p:spPr>
           <a:xfrm>
             <a:off x="7799832" y="1801368"/>
-            <a:ext cx="3145536" cy="758952"/>
+            <a:ext cx="3145536" cy="640080"/>
           </a:xfrm>
           <a:prstGeom prst="rect">
             <a:avLst/>
@@ -13337,12 +13337,12 @@
         </p:nvSpPr>
         <p:spPr>
           <a:xfrm>
-            <a:off x="7635240" y="2788920"/>
-            <a:ext cx="3474720" cy="1536192"/>
+            <a:off x="7635240" y="2670048"/>
+            <a:ext cx="3474720" cy="1377086"/>
           </a:xfrm>
           <a:prstGeom prst="roundRect">
             <a:avLst>
-              <a:gd name="adj" fmla="val 7143"/>
+              <a:gd name="adj" fmla="val 7968"/>
             </a:avLst>
           </a:prstGeom>
           <a:solidFill>
@@ -13364,7 +13364,7 @@
         </p:nvSpPr>
         <p:spPr>
           <a:xfrm>
-            <a:off x="7799832" y="2935224"/>
+            <a:off x="7799832" y="2816352"/>
             <a:ext cx="3145536" cy="256032"/>
           </a:xfrm>
           <a:prstGeom prst="rect">
@@ -13403,8 +13403,8 @@
         </p:nvSpPr>
         <p:spPr>
           <a:xfrm>
-            <a:off x="7818120" y="3300984"/>
-            <a:ext cx="3090672" cy="877824"/>
+            <a:off x="7818120" y="3182112"/>
+            <a:ext cx="3090672" cy="718718"/>
           </a:xfrm>
           <a:prstGeom prst="rect">
             <a:avLst/>
@@ -13478,12 +13478,12 @@
         </p:nvSpPr>
         <p:spPr>
           <a:xfrm>
-            <a:off x="7635240" y="4498848"/>
-            <a:ext cx="3474720" cy="1143000"/>
+            <a:off x="7635240" y="4184294"/>
+            <a:ext cx="3474720" cy="1466698"/>
           </a:xfrm>
           <a:prstGeom prst="roundRect">
             <a:avLst>
-              <a:gd name="adj" fmla="val 9600"/>
+              <a:gd name="adj" fmla="val 7481"/>
             </a:avLst>
           </a:prstGeom>
           <a:solidFill>
@@ -13505,7 +13505,7 @@
         </p:nvSpPr>
         <p:spPr>
           <a:xfrm>
-            <a:off x="7799832" y="4645152"/>
+            <a:off x="7799832" y="4330598"/>
             <a:ext cx="3145536" cy="256032"/>
           </a:xfrm>
           <a:prstGeom prst="rect">
@@ -13544,8 +13544,8 @@
         </p:nvSpPr>
         <p:spPr>
           <a:xfrm>
-            <a:off x="7799832" y="4974336"/>
-            <a:ext cx="3145536" cy="576072"/>
+            <a:off x="7799832" y="4659782"/>
+            <a:ext cx="3145536" cy="899770"/>
           </a:xfrm>
           <a:prstGeom prst="rect">
             <a:avLst/>
@@ -13571,7 +13571,7 @@
                 <a:ea typeface="Aptos" pitchFamily="34" charset="-122"/>
                 <a:cs typeface="Aptos" pitchFamily="34" charset="-120"/>
               </a:rPr>
-              <a:t>Use the assignment to test whether you can explain the concept, apply it to a realistic public health situation, and.</a:t>
+              <a:t>Use the assignment to test whether you can explain the concept, apply it to a realistic public health situation, and identify what would need review before the work moves forward.</a:t>
             </a:r>
             <a:endParaRPr lang="en-US" sz="1320" dirty="0"/>
           </a:p>
@@ -13940,11 +13940,11 @@
         <p:spPr>
           <a:xfrm>
             <a:off x="7635240" y="1325880"/>
-            <a:ext cx="3474720" cy="1325880"/>
+            <a:ext cx="3474720" cy="1207008"/>
           </a:xfrm>
           <a:prstGeom prst="roundRect">
             <a:avLst>
-              <a:gd name="adj" fmla="val 8276"/>
+              <a:gd name="adj" fmla="val 9091"/>
             </a:avLst>
           </a:prstGeom>
           <a:solidFill>
@@ -14006,7 +14006,7 @@
         <p:spPr>
           <a:xfrm>
             <a:off x="7799832" y="1801368"/>
-            <a:ext cx="3145536" cy="758952"/>
+            <a:ext cx="3145536" cy="640080"/>
           </a:xfrm>
           <a:prstGeom prst="rect">
             <a:avLst/>
@@ -14046,7 +14046,7 @@
         </p:nvSpPr>
         <p:spPr>
           <a:xfrm>
-            <a:off x="7635240" y="2788920"/>
+            <a:off x="7635240" y="2670048"/>
             <a:ext cx="3474720" cy="1536192"/>
           </a:xfrm>
           <a:prstGeom prst="roundRect">
@@ -14073,7 +14073,7 @@
         </p:nvSpPr>
         <p:spPr>
           <a:xfrm>
-            <a:off x="7799832" y="2935224"/>
+            <a:off x="7799832" y="2816352"/>
             <a:ext cx="3145536" cy="256032"/>
           </a:xfrm>
           <a:prstGeom prst="rect">
@@ -14112,7 +14112,7 @@
         </p:nvSpPr>
         <p:spPr>
           <a:xfrm>
-            <a:off x="7818120" y="3300984"/>
+            <a:off x="7818120" y="3182112"/>
             <a:ext cx="3090672" cy="877824"/>
           </a:xfrm>
           <a:prstGeom prst="rect">
@@ -14170,12 +14170,12 @@
         </p:nvSpPr>
         <p:spPr>
           <a:xfrm>
-            <a:off x="7635240" y="4498848"/>
-            <a:ext cx="3474720" cy="1143000"/>
+            <a:off x="7635240" y="4343400"/>
+            <a:ext cx="3474720" cy="1255471"/>
           </a:xfrm>
           <a:prstGeom prst="roundRect">
             <a:avLst>
-              <a:gd name="adj" fmla="val 9600"/>
+              <a:gd name="adj" fmla="val 8740"/>
             </a:avLst>
           </a:prstGeom>
           <a:solidFill>
@@ -14197,7 +14197,7 @@
         </p:nvSpPr>
         <p:spPr>
           <a:xfrm>
-            <a:off x="7799832" y="4645152"/>
+            <a:off x="7799832" y="4489704"/>
             <a:ext cx="3145536" cy="256032"/>
           </a:xfrm>
           <a:prstGeom prst="rect">
@@ -14236,8 +14236,8 @@
         </p:nvSpPr>
         <p:spPr>
           <a:xfrm>
-            <a:off x="7799832" y="4974336"/>
-            <a:ext cx="3145536" cy="576072"/>
+            <a:off x="7799832" y="4818888"/>
+            <a:ext cx="3145536" cy="688543"/>
           </a:xfrm>
           <a:prstGeom prst="rect">
             <a:avLst/>
@@ -14263,7 +14263,7 @@
                 <a:ea typeface="Aptos" pitchFamily="34" charset="-122"/>
                 <a:cs typeface="Aptos" pitchFamily="34" charset="-120"/>
               </a:rPr>
-              <a:t>Identify what could go wrong, who could be affected, what safeguards are needed, and what evidence should be reviewed.</a:t>
+              <a:t>Identify what could go wrong, who could be affected, what safeguards are needed, and what evidence should be reviewed before use.</a:t>
             </a:r>
             <a:endParaRPr lang="en-US" sz="1320" dirty="0"/>
           </a:p>
@@ -14741,7 +14741,7 @@
                 <a:ea typeface="Aptos" pitchFamily="34" charset="-122"/>
                 <a:cs typeface="Aptos" pitchFamily="34" charset="-120"/>
               </a:rPr>
-              <a:t>Use the related plays to identify decisions, participants, timing, approvals, and documentation needed for responsible.</a:t>
+              <a:t>Use the related plays to identify decisions, participants, timing, approvals, and documentation needed for responsible implementation.</a:t>
             </a:r>
             <a:endParaRPr lang="en-US" sz="1320" dirty="0"/>
           </a:p>
@@ -15360,7 +15360,7 @@
                 <a:ea typeface="Aptos" pitchFamily="34" charset="-122"/>
                 <a:cs typeface="Aptos" pitchFamily="34" charset="-120"/>
               </a:rPr>
-              <a:t>Use linked tools when your department needs a structured worksheet, template, checklist, review process, or.</a:t>
+              <a:t>Use linked tools when your department needs a structured worksheet, template, checklist, review process, or documentation artifact.</a:t>
             </a:r>
             <a:endParaRPr lang="en-US" sz="1320" dirty="0"/>
           </a:p>
@@ -15870,11 +15870,11 @@
         <p:spPr>
           <a:xfrm>
             <a:off x="7635240" y="1325880"/>
-            <a:ext cx="3474720" cy="1325880"/>
+            <a:ext cx="3474720" cy="1207008"/>
           </a:xfrm>
           <a:prstGeom prst="roundRect">
             <a:avLst>
-              <a:gd name="adj" fmla="val 8276"/>
+              <a:gd name="adj" fmla="val 9091"/>
             </a:avLst>
           </a:prstGeom>
           <a:solidFill>
@@ -15936,7 +15936,7 @@
         <p:spPr>
           <a:xfrm>
             <a:off x="7799832" y="1801368"/>
-            <a:ext cx="3145536" cy="758952"/>
+            <a:ext cx="3145536" cy="640080"/>
           </a:xfrm>
           <a:prstGeom prst="rect">
             <a:avLst/>
@@ -15962,7 +15962,7 @@
                 <a:ea typeface="Aptos" pitchFamily="34" charset="-122"/>
                 <a:cs typeface="Aptos" pitchFamily="34" charset="-120"/>
               </a:rPr>
-              <a:t>Explain why AI can increase privacy and confidentiality risks in public health workflows.</a:t>
+              <a:t>Explain why AI can increase privacy and confidentiality risks in public health.</a:t>
             </a:r>
             <a:endParaRPr lang="en-US" sz="1320" dirty="0"/>
           </a:p>
@@ -15976,12 +15976,12 @@
         </p:nvSpPr>
         <p:spPr>
           <a:xfrm>
-            <a:off x="7635240" y="2788920"/>
-            <a:ext cx="3474720" cy="1536192"/>
+            <a:off x="7635240" y="2670048"/>
+            <a:ext cx="3474720" cy="1377086"/>
           </a:xfrm>
           <a:prstGeom prst="roundRect">
             <a:avLst>
-              <a:gd name="adj" fmla="val 7143"/>
+              <a:gd name="adj" fmla="val 7968"/>
             </a:avLst>
           </a:prstGeom>
           <a:solidFill>
@@ -16003,7 +16003,7 @@
         </p:nvSpPr>
         <p:spPr>
           <a:xfrm>
-            <a:off x="7799832" y="2935224"/>
+            <a:off x="7799832" y="2816352"/>
             <a:ext cx="3145536" cy="256032"/>
           </a:xfrm>
           <a:prstGeom prst="rect">
@@ -16042,8 +16042,8 @@
         </p:nvSpPr>
         <p:spPr>
           <a:xfrm>
-            <a:off x="7818120" y="3300984"/>
-            <a:ext cx="3090672" cy="877824"/>
+            <a:off x="7818120" y="3182112"/>
+            <a:ext cx="3090672" cy="718718"/>
           </a:xfrm>
           <a:prstGeom prst="rect">
             <a:avLst/>
@@ -16117,12 +16117,12 @@
         </p:nvSpPr>
         <p:spPr>
           <a:xfrm>
-            <a:off x="7635240" y="4498848"/>
-            <a:ext cx="3474720" cy="1143000"/>
+            <a:off x="7635240" y="4184294"/>
+            <a:ext cx="3474720" cy="1466698"/>
           </a:xfrm>
           <a:prstGeom prst="roundRect">
             <a:avLst>
-              <a:gd name="adj" fmla="val 9600"/>
+              <a:gd name="adj" fmla="val 7481"/>
             </a:avLst>
           </a:prstGeom>
           <a:solidFill>
@@ -16144,7 +16144,7 @@
         </p:nvSpPr>
         <p:spPr>
           <a:xfrm>
-            <a:off x="7799832" y="4645152"/>
+            <a:off x="7799832" y="4330598"/>
             <a:ext cx="3145536" cy="256032"/>
           </a:xfrm>
           <a:prstGeom prst="rect">
@@ -16183,8 +16183,8 @@
         </p:nvSpPr>
         <p:spPr>
           <a:xfrm>
-            <a:off x="7799832" y="4974336"/>
-            <a:ext cx="3145536" cy="576072"/>
+            <a:off x="7799832" y="4659782"/>
+            <a:ext cx="3145536" cy="899770"/>
           </a:xfrm>
           <a:prstGeom prst="rect">
             <a:avLst/>
@@ -16210,7 +16210,7 @@
                 <a:ea typeface="Aptos" pitchFamily="34" charset="-122"/>
                 <a:cs typeface="Aptos" pitchFamily="34" charset="-120"/>
               </a:rPr>
-              <a:t>Use the assignment to test whether you can explain the concept, apply it to a realistic public health situation, and.</a:t>
+              <a:t>Use the assignment to test whether you can explain the concept, apply it to a realistic public health situation, and identify what would need review before the work moves forward.</a:t>
             </a:r>
             <a:endParaRPr lang="en-US" sz="1320" dirty="0"/>
           </a:p>
@@ -16545,11 +16545,11 @@
         <p:spPr>
           <a:xfrm>
             <a:off x="7635240" y="1325880"/>
-            <a:ext cx="3474720" cy="1325880"/>
+            <a:ext cx="3474720" cy="1255471"/>
           </a:xfrm>
           <a:prstGeom prst="roundRect">
             <a:avLst>
-              <a:gd name="adj" fmla="val 8276"/>
+              <a:gd name="adj" fmla="val 8740"/>
             </a:avLst>
           </a:prstGeom>
           <a:solidFill>
@@ -16611,7 +16611,7 @@
         <p:spPr>
           <a:xfrm>
             <a:off x="7799832" y="1801368"/>
-            <a:ext cx="3145536" cy="758952"/>
+            <a:ext cx="3145536" cy="688543"/>
           </a:xfrm>
           <a:prstGeom prst="rect">
             <a:avLst/>
@@ -16651,12 +16651,12 @@
         </p:nvSpPr>
         <p:spPr>
           <a:xfrm>
-            <a:off x="7635240" y="2788920"/>
-            <a:ext cx="3474720" cy="1536192"/>
+            <a:off x="7635240" y="2718511"/>
+            <a:ext cx="3474720" cy="1328623"/>
           </a:xfrm>
           <a:prstGeom prst="roundRect">
             <a:avLst>
-              <a:gd name="adj" fmla="val 7143"/>
+              <a:gd name="adj" fmla="val 8259"/>
             </a:avLst>
           </a:prstGeom>
           <a:solidFill>
@@ -16678,7 +16678,7 @@
         </p:nvSpPr>
         <p:spPr>
           <a:xfrm>
-            <a:off x="7799832" y="2935224"/>
+            <a:off x="7799832" y="2864815"/>
             <a:ext cx="3145536" cy="256032"/>
           </a:xfrm>
           <a:prstGeom prst="rect">
@@ -16717,8 +16717,8 @@
         </p:nvSpPr>
         <p:spPr>
           <a:xfrm>
-            <a:off x="7818120" y="3300984"/>
-            <a:ext cx="3090672" cy="877824"/>
+            <a:off x="7818120" y="3230575"/>
+            <a:ext cx="3090672" cy="670255"/>
           </a:xfrm>
           <a:prstGeom prst="rect">
             <a:avLst/>
@@ -16758,12 +16758,12 @@
         </p:nvSpPr>
         <p:spPr>
           <a:xfrm>
-            <a:off x="7635240" y="4498848"/>
-            <a:ext cx="3474720" cy="1143000"/>
+            <a:off x="7635240" y="4184294"/>
+            <a:ext cx="3474720" cy="1466698"/>
           </a:xfrm>
           <a:prstGeom prst="roundRect">
             <a:avLst>
-              <a:gd name="adj" fmla="val 9600"/>
+              <a:gd name="adj" fmla="val 7481"/>
             </a:avLst>
           </a:prstGeom>
           <a:solidFill>
@@ -16785,7 +16785,7 @@
         </p:nvSpPr>
         <p:spPr>
           <a:xfrm>
-            <a:off x="7799832" y="4645152"/>
+            <a:off x="7799832" y="4330598"/>
             <a:ext cx="3145536" cy="256032"/>
           </a:xfrm>
           <a:prstGeom prst="rect">
@@ -16824,8 +16824,8 @@
         </p:nvSpPr>
         <p:spPr>
           <a:xfrm>
-            <a:off x="7799832" y="4974336"/>
-            <a:ext cx="3145536" cy="576072"/>
+            <a:off x="7799832" y="4659782"/>
+            <a:ext cx="3145536" cy="899770"/>
           </a:xfrm>
           <a:prstGeom prst="rect">
             <a:avLst/>
@@ -16851,7 +16851,7 @@
                 <a:ea typeface="Aptos" pitchFamily="34" charset="-122"/>
                 <a:cs typeface="Aptos" pitchFamily="34" charset="-120"/>
               </a:rPr>
-              <a:t>Use the assignment to test whether you can explain the concept, apply it to a realistic public health situation, and.</a:t>
+              <a:t>Use the assignment to test whether you can explain the concept, apply it to a realistic public health situation, and identify what would need review before the work moves forward.</a:t>
             </a:r>
             <a:endParaRPr lang="en-US" sz="1320" dirty="0"/>
           </a:p>
@@ -17220,11 +17220,11 @@
         <p:spPr>
           <a:xfrm>
             <a:off x="7635240" y="1325880"/>
-            <a:ext cx="3474720" cy="1325880"/>
+            <a:ext cx="3474720" cy="1255471"/>
           </a:xfrm>
           <a:prstGeom prst="roundRect">
             <a:avLst>
-              <a:gd name="adj" fmla="val 8276"/>
+              <a:gd name="adj" fmla="val 8740"/>
             </a:avLst>
           </a:prstGeom>
           <a:solidFill>
@@ -17286,7 +17286,7 @@
         <p:spPr>
           <a:xfrm>
             <a:off x="7799832" y="1801368"/>
-            <a:ext cx="3145536" cy="758952"/>
+            <a:ext cx="3145536" cy="688543"/>
           </a:xfrm>
           <a:prstGeom prst="rect">
             <a:avLst/>
@@ -17326,7 +17326,7 @@
         </p:nvSpPr>
         <p:spPr>
           <a:xfrm>
-            <a:off x="7635240" y="2788920"/>
+            <a:off x="7635240" y="2718511"/>
             <a:ext cx="3474720" cy="1536192"/>
           </a:xfrm>
           <a:prstGeom prst="roundRect">
@@ -17353,8 +17353,8 @@
         </p:nvSpPr>
         <p:spPr>
           <a:xfrm>
-            <a:off x="7799832" y="2935224"/>
-            <a:ext cx="3145536" cy="256032"/>
+            <a:off x="7799832" y="2846527"/>
+            <a:ext cx="3145536" cy="237744"/>
           </a:xfrm>
           <a:prstGeom prst="rect">
             <a:avLst/>
@@ -17370,7 +17370,7 @@
               <a:buNone/>
             </a:pPr>
             <a:r>
-              <a:rPr lang="en-US" sz="1300" b="1" dirty="0">
+              <a:rPr lang="en-US" sz="1250" b="1" dirty="0">
                 <a:solidFill>
                   <a:srgbClr val="0068B7"/>
                 </a:solidFill>
@@ -17378,101 +17378,317 @@
                 <a:ea typeface="Aptos" pitchFamily="34" charset="-122"/>
                 <a:cs typeface="Aptos" pitchFamily="34" charset="-120"/>
               </a:rPr>
-              <a:t>Concept checkpoints</a:t>
-            </a:r>
-            <a:endParaRPr lang="en-US" sz="1300" dirty="0"/>
-          </a:p>
-        </p:txBody>
-      </p:sp>
-      <p:sp>
-        <p:nvSpPr>
-          <p:cNvPr id="15" name="Text 13"/>
-          <p:cNvSpPr/>
-          <p:nvPr/>
-        </p:nvSpPr>
-        <p:spPr>
-          <a:xfrm>
-            <a:off x="7818120" y="3300984"/>
-            <a:ext cx="3090672" cy="877824"/>
-          </a:xfrm>
-          <a:prstGeom prst="rect">
-            <a:avLst/>
-          </a:prstGeom>
-          <a:noFill/>
-          <a:ln/>
-        </p:spPr>
-        <p:txBody>
-          <a:bodyPr wrap="square" lIns="508" tIns="508" rIns="508" bIns="508" rtlCol="0" anchor="t">
+              <a:t>Risk control loop</a:t>
+            </a:r>
+            <a:endParaRPr lang="en-US" sz="1250" dirty="0"/>
+          </a:p>
+        </p:txBody>
+      </p:sp>
+      <p:sp>
+        <p:nvSpPr>
+          <p:cNvPr id="15" name="Shape 13"/>
+          <p:cNvSpPr/>
+          <p:nvPr/>
+        </p:nvSpPr>
+        <p:spPr>
+          <a:xfrm>
+            <a:off x="8763000" y="3399739"/>
+            <a:ext cx="164592" cy="0"/>
+          </a:xfrm>
+          <a:prstGeom prst="line">
+            <a:avLst/>
+          </a:prstGeom>
+          <a:noFill/>
+          <a:ln w="15240">
+            <a:solidFill>
+              <a:srgbClr val="8ABBD8"/>
+            </a:solidFill>
+            <a:prstDash val="solid"/>
+          </a:ln>
+        </p:spPr>
+      </p:sp>
+      <p:sp>
+        <p:nvSpPr>
+          <p:cNvPr id="16" name="Shape 14"/>
+          <p:cNvSpPr/>
+          <p:nvPr/>
+        </p:nvSpPr>
+        <p:spPr>
+          <a:xfrm>
+            <a:off x="7872984" y="3248863"/>
+            <a:ext cx="890016" cy="301752"/>
+          </a:xfrm>
+          <a:prstGeom prst="roundRect">
+            <a:avLst>
+              <a:gd name="adj" fmla="val 24242"/>
+            </a:avLst>
+          </a:prstGeom>
+          <a:solidFill>
+            <a:srgbClr val="0068B7"/>
+          </a:solidFill>
+          <a:ln w="12700">
+            <a:solidFill>
+              <a:srgbClr val="0068B7"/>
+            </a:solidFill>
+            <a:prstDash val="solid"/>
+          </a:ln>
+        </p:spPr>
+      </p:sp>
+      <p:sp>
+        <p:nvSpPr>
+          <p:cNvPr id="17" name="Text 15"/>
+          <p:cNvSpPr/>
+          <p:nvPr/>
+        </p:nvSpPr>
+        <p:spPr>
+          <a:xfrm>
+            <a:off x="7909560" y="3322015"/>
+            <a:ext cx="816864" cy="146304"/>
+          </a:xfrm>
+          <a:prstGeom prst="rect">
+            <a:avLst/>
+          </a:prstGeom>
+          <a:noFill/>
+          <a:ln/>
+        </p:spPr>
+        <p:txBody>
+          <a:bodyPr wrap="square" lIns="0" tIns="0" rIns="0" bIns="0" rtlCol="0" anchor="ctr">
             <a:normAutofit/>
           </a:bodyPr>
           <a:lstStyle/>
           <a:p>
-            <a:pPr indent="0" marL="0">
-              <a:buNone/>
-            </a:pPr>
-            <a:r>
-              <a:rPr lang="en-US" sz="1220" dirty="0">
-                <a:solidFill>
-                  <a:srgbClr val="17364A"/>
-                </a:solidFill>
-                <a:latin typeface="Aptos" pitchFamily="34" charset="0"/>
-                <a:ea typeface="Aptos" pitchFamily="34" charset="-122"/>
-                <a:cs typeface="Aptos" pitchFamily="34" charset="-120"/>
-              </a:rPr>
-              <a:t>Privacy-preserving AI is the set of technical, policy, and.</a:t>
-            </a:r>
-            <a:endParaRPr lang="en-US" sz="1220" dirty="0"/>
-          </a:p>
-          <a:p>
-            <a:pPr indent="0" marL="0">
-              <a:buNone/>
-            </a:pPr>
-            <a:r>
-              <a:rPr lang="en-US" sz="1220" dirty="0">
-                <a:solidFill>
-                  <a:srgbClr val="17364A"/>
-                </a:solidFill>
-                <a:latin typeface="Aptos" pitchFamily="34" charset="0"/>
-                <a:ea typeface="Aptos" pitchFamily="34" charset="-122"/>
-                <a:cs typeface="Aptos" pitchFamily="34" charset="-120"/>
-              </a:rPr>
-              <a:t>This module focuses on how privacy protections must be built into.</a:t>
-            </a:r>
-            <a:endParaRPr lang="en-US" sz="1220" dirty="0"/>
-          </a:p>
-          <a:p>
-            <a:pPr indent="0" marL="0">
-              <a:buNone/>
-            </a:pPr>
-            <a:r>
-              <a:rPr lang="en-US" sz="1220" dirty="0">
-                <a:solidFill>
-                  <a:srgbClr val="17364A"/>
-                </a:solidFill>
-                <a:latin typeface="Aptos" pitchFamily="34" charset="0"/>
-                <a:ea typeface="Aptos" pitchFamily="34" charset="-122"/>
-                <a:cs typeface="Aptos" pitchFamily="34" charset="-120"/>
-              </a:rPr>
-              <a:t>Public health agencies often have legal authority to collect and.</a:t>
-            </a:r>
-            <a:endParaRPr lang="en-US" sz="1220" dirty="0"/>
-          </a:p>
-        </p:txBody>
-      </p:sp>
-      <p:sp>
-        <p:nvSpPr>
-          <p:cNvPr id="16" name="Shape 14"/>
-          <p:cNvSpPr/>
-          <p:nvPr/>
-        </p:nvSpPr>
-        <p:spPr>
-          <a:xfrm>
-            <a:off x="7635240" y="4498848"/>
-            <a:ext cx="3474720" cy="1143000"/>
+            <a:pPr algn="ctr" indent="0" marL="0">
+              <a:buNone/>
+            </a:pPr>
+            <a:r>
+              <a:rPr lang="en-US" sz="880" b="1" dirty="0">
+                <a:solidFill>
+                  <a:srgbClr val="FFFFFF"/>
+                </a:solidFill>
+                <a:latin typeface="Aptos" pitchFamily="34" charset="0"/>
+                <a:ea typeface="Aptos" pitchFamily="34" charset="-122"/>
+                <a:cs typeface="Aptos" pitchFamily="34" charset="-120"/>
+              </a:rPr>
+              <a:t>Identify</a:t>
+            </a:r>
+            <a:endParaRPr lang="en-US" sz="880" dirty="0"/>
+          </a:p>
+        </p:txBody>
+      </p:sp>
+      <p:sp>
+        <p:nvSpPr>
+          <p:cNvPr id="18" name="Shape 16"/>
+          <p:cNvSpPr/>
+          <p:nvPr/>
+        </p:nvSpPr>
+        <p:spPr>
+          <a:xfrm>
+            <a:off x="9817608" y="3399739"/>
+            <a:ext cx="164592" cy="0"/>
+          </a:xfrm>
+          <a:prstGeom prst="line">
+            <a:avLst/>
+          </a:prstGeom>
+          <a:noFill/>
+          <a:ln w="15240">
+            <a:solidFill>
+              <a:srgbClr val="8ABBD8"/>
+            </a:solidFill>
+            <a:prstDash val="solid"/>
+          </a:ln>
+        </p:spPr>
+      </p:sp>
+      <p:sp>
+        <p:nvSpPr>
+          <p:cNvPr id="19" name="Shape 17"/>
+          <p:cNvSpPr/>
+          <p:nvPr/>
+        </p:nvSpPr>
+        <p:spPr>
+          <a:xfrm>
+            <a:off x="8927592" y="3248863"/>
+            <a:ext cx="890016" cy="301752"/>
           </a:xfrm>
           <a:prstGeom prst="roundRect">
             <a:avLst>
-              <a:gd name="adj" fmla="val 9600"/>
+              <a:gd name="adj" fmla="val 24242"/>
+            </a:avLst>
+          </a:prstGeom>
+          <a:solidFill>
+            <a:srgbClr val="2F8A28"/>
+          </a:solidFill>
+          <a:ln w="12700">
+            <a:solidFill>
+              <a:srgbClr val="2F8A28"/>
+            </a:solidFill>
+            <a:prstDash val="solid"/>
+          </a:ln>
+        </p:spPr>
+      </p:sp>
+      <p:sp>
+        <p:nvSpPr>
+          <p:cNvPr id="20" name="Text 18"/>
+          <p:cNvSpPr/>
+          <p:nvPr/>
+        </p:nvSpPr>
+        <p:spPr>
+          <a:xfrm>
+            <a:off x="8964168" y="3322015"/>
+            <a:ext cx="816864" cy="146304"/>
+          </a:xfrm>
+          <a:prstGeom prst="rect">
+            <a:avLst/>
+          </a:prstGeom>
+          <a:noFill/>
+          <a:ln/>
+        </p:spPr>
+        <p:txBody>
+          <a:bodyPr wrap="square" lIns="0" tIns="0" rIns="0" bIns="0" rtlCol="0" anchor="ctr">
+            <a:normAutofit/>
+          </a:bodyPr>
+          <a:lstStyle/>
+          <a:p>
+            <a:pPr algn="ctr" indent="0" marL="0">
+              <a:buNone/>
+            </a:pPr>
+            <a:r>
+              <a:rPr lang="en-US" sz="880" b="1" dirty="0">
+                <a:solidFill>
+                  <a:srgbClr val="FFFFFF"/>
+                </a:solidFill>
+                <a:latin typeface="Aptos" pitchFamily="34" charset="0"/>
+                <a:ea typeface="Aptos" pitchFamily="34" charset="-122"/>
+                <a:cs typeface="Aptos" pitchFamily="34" charset="-120"/>
+              </a:rPr>
+              <a:t>Control</a:t>
+            </a:r>
+            <a:endParaRPr lang="en-US" sz="880" dirty="0"/>
+          </a:p>
+        </p:txBody>
+      </p:sp>
+      <p:sp>
+        <p:nvSpPr>
+          <p:cNvPr id="21" name="Shape 19"/>
+          <p:cNvSpPr/>
+          <p:nvPr/>
+        </p:nvSpPr>
+        <p:spPr>
+          <a:xfrm>
+            <a:off x="9982200" y="3248863"/>
+            <a:ext cx="890016" cy="301752"/>
+          </a:xfrm>
+          <a:prstGeom prst="roundRect">
+            <a:avLst>
+              <a:gd name="adj" fmla="val 24242"/>
+            </a:avLst>
+          </a:prstGeom>
+          <a:solidFill>
+            <a:srgbClr val="6A4CA3"/>
+          </a:solidFill>
+          <a:ln w="12700">
+            <a:solidFill>
+              <a:srgbClr val="6A4CA3"/>
+            </a:solidFill>
+            <a:prstDash val="solid"/>
+          </a:ln>
+        </p:spPr>
+      </p:sp>
+      <p:sp>
+        <p:nvSpPr>
+          <p:cNvPr id="22" name="Text 20"/>
+          <p:cNvSpPr/>
+          <p:nvPr/>
+        </p:nvSpPr>
+        <p:spPr>
+          <a:xfrm>
+            <a:off x="10018776" y="3322015"/>
+            <a:ext cx="816864" cy="146304"/>
+          </a:xfrm>
+          <a:prstGeom prst="rect">
+            <a:avLst/>
+          </a:prstGeom>
+          <a:noFill/>
+          <a:ln/>
+        </p:spPr>
+        <p:txBody>
+          <a:bodyPr wrap="square" lIns="0" tIns="0" rIns="0" bIns="0" rtlCol="0" anchor="ctr">
+            <a:normAutofit/>
+          </a:bodyPr>
+          <a:lstStyle/>
+          <a:p>
+            <a:pPr algn="ctr" indent="0" marL="0">
+              <a:buNone/>
+            </a:pPr>
+            <a:r>
+              <a:rPr lang="en-US" sz="880" b="1" dirty="0">
+                <a:solidFill>
+                  <a:srgbClr val="FFFFFF"/>
+                </a:solidFill>
+                <a:latin typeface="Aptos" pitchFamily="34" charset="0"/>
+                <a:ea typeface="Aptos" pitchFamily="34" charset="-122"/>
+                <a:cs typeface="Aptos" pitchFamily="34" charset="-120"/>
+              </a:rPr>
+              <a:t>Monitor</a:t>
+            </a:r>
+            <a:endParaRPr lang="en-US" sz="880" dirty="0"/>
+          </a:p>
+        </p:txBody>
+      </p:sp>
+      <p:sp>
+        <p:nvSpPr>
+          <p:cNvPr id="23" name="Text 21"/>
+          <p:cNvSpPr/>
+          <p:nvPr/>
+        </p:nvSpPr>
+        <p:spPr>
+          <a:xfrm>
+            <a:off x="7854696" y="3742639"/>
+            <a:ext cx="3035808" cy="365760"/>
+          </a:xfrm>
+          <a:prstGeom prst="rect">
+            <a:avLst/>
+          </a:prstGeom>
+          <a:noFill/>
+          <a:ln/>
+        </p:spPr>
+        <p:txBody>
+          <a:bodyPr wrap="square" lIns="254" tIns="254" rIns="254" bIns="254" rtlCol="0" anchor="t">
+            <a:normAutofit/>
+          </a:bodyPr>
+          <a:lstStyle/>
+          <a:p>
+            <a:pPr indent="0" marL="0">
+              <a:buNone/>
+            </a:pPr>
+            <a:r>
+              <a:rPr lang="en-US" sz="1120" dirty="0">
+                <a:solidFill>
+                  <a:srgbClr val="17364A"/>
+                </a:solidFill>
+                <a:latin typeface="Aptos" pitchFamily="34" charset="0"/>
+                <a:ea typeface="Aptos" pitchFamily="34" charset="-122"/>
+                <a:cs typeface="Aptos" pitchFamily="34" charset="-120"/>
+              </a:rPr>
+              <a:t>Responsible use depends on finding risks early, applying safeguards, and watching for drift or harm over time.</a:t>
+            </a:r>
+            <a:endParaRPr lang="en-US" sz="1120" dirty="0"/>
+          </a:p>
+        </p:txBody>
+      </p:sp>
+      <p:sp>
+        <p:nvSpPr>
+          <p:cNvPr id="24" name="Shape 22"/>
+          <p:cNvSpPr/>
+          <p:nvPr/>
+        </p:nvSpPr>
+        <p:spPr>
+          <a:xfrm>
+            <a:off x="7635240" y="4391863"/>
+            <a:ext cx="3474720" cy="1255471"/>
+          </a:xfrm>
+          <a:prstGeom prst="roundRect">
+            <a:avLst>
+              <a:gd name="adj" fmla="val 8740"/>
             </a:avLst>
           </a:prstGeom>
           <a:solidFill>
@@ -17488,13 +17704,13 @@
       </p:sp>
       <p:sp>
         <p:nvSpPr>
-          <p:cNvPr id="17" name="Text 15"/>
-          <p:cNvSpPr/>
-          <p:nvPr/>
-        </p:nvSpPr>
-        <p:spPr>
-          <a:xfrm>
-            <a:off x="7799832" y="4645152"/>
+          <p:cNvPr id="25" name="Text 23"/>
+          <p:cNvSpPr/>
+          <p:nvPr/>
+        </p:nvSpPr>
+        <p:spPr>
+          <a:xfrm>
+            <a:off x="7799832" y="4538167"/>
             <a:ext cx="3145536" cy="256032"/>
           </a:xfrm>
           <a:prstGeom prst="rect">
@@ -17527,14 +17743,14 @@
       </p:sp>
       <p:sp>
         <p:nvSpPr>
-          <p:cNvPr id="18" name="Text 16"/>
-          <p:cNvSpPr/>
-          <p:nvPr/>
-        </p:nvSpPr>
-        <p:spPr>
-          <a:xfrm>
-            <a:off x="7799832" y="4974336"/>
-            <a:ext cx="3145536" cy="576072"/>
+          <p:cNvPr id="26" name="Text 24"/>
+          <p:cNvSpPr/>
+          <p:nvPr/>
+        </p:nvSpPr>
+        <p:spPr>
+          <a:xfrm>
+            <a:off x="7799832" y="4867351"/>
+            <a:ext cx="3145536" cy="688543"/>
           </a:xfrm>
           <a:prstGeom prst="rect">
             <a:avLst/>
@@ -17560,7 +17776,7 @@
                 <a:ea typeface="Aptos" pitchFamily="34" charset="-122"/>
                 <a:cs typeface="Aptos" pitchFamily="34" charset="-120"/>
               </a:rPr>
-              <a:t>Identify what could go wrong, who could be affected, what safeguards are needed, and what evidence should be reviewed.</a:t>
+              <a:t>Identify what could go wrong, who could be affected, what safeguards are needed, and what evidence should be reviewed before use.</a:t>
             </a:r>
             <a:endParaRPr lang="en-US" sz="1320" dirty="0"/>
           </a:p>
@@ -17929,11 +18145,11 @@
         <p:spPr>
           <a:xfrm>
             <a:off x="7635240" y="1325880"/>
-            <a:ext cx="3474720" cy="1325880"/>
+            <a:ext cx="3474720" cy="1207008"/>
           </a:xfrm>
           <a:prstGeom prst="roundRect">
             <a:avLst>
-              <a:gd name="adj" fmla="val 8276"/>
+              <a:gd name="adj" fmla="val 9091"/>
             </a:avLst>
           </a:prstGeom>
           <a:solidFill>
@@ -17995,7 +18211,7 @@
         <p:spPr>
           <a:xfrm>
             <a:off x="7799832" y="1801368"/>
-            <a:ext cx="3145536" cy="758952"/>
+            <a:ext cx="3145536" cy="640080"/>
           </a:xfrm>
           <a:prstGeom prst="rect">
             <a:avLst/>
@@ -18021,7 +18237,7 @@
                 <a:ea typeface="Aptos" pitchFamily="34" charset="-122"/>
                 <a:cs typeface="Aptos" pitchFamily="34" charset="-120"/>
               </a:rPr>
-              <a:t>This module provides national-level training guidance for public health agencies and partners.</a:t>
+              <a:t>This module provides national-level training guidance for public health agencies and.</a:t>
             </a:r>
             <a:endParaRPr lang="en-US" sz="1320" dirty="0"/>
           </a:p>
@@ -18035,12 +18251,12 @@
         </p:nvSpPr>
         <p:spPr>
           <a:xfrm>
-            <a:off x="7635240" y="2788920"/>
-            <a:ext cx="3474720" cy="1536192"/>
+            <a:off x="7635240" y="2670048"/>
+            <a:ext cx="3474720" cy="1377086"/>
           </a:xfrm>
           <a:prstGeom prst="roundRect">
             <a:avLst>
-              <a:gd name="adj" fmla="val 7143"/>
+              <a:gd name="adj" fmla="val 7968"/>
             </a:avLst>
           </a:prstGeom>
           <a:solidFill>
@@ -18062,8 +18278,8 @@
         </p:nvSpPr>
         <p:spPr>
           <a:xfrm>
-            <a:off x="7799832" y="2935224"/>
-            <a:ext cx="3145536" cy="256032"/>
+            <a:off x="7799832" y="2798064"/>
+            <a:ext cx="3145536" cy="237744"/>
           </a:xfrm>
           <a:prstGeom prst="rect">
             <a:avLst/>
@@ -18079,7 +18295,7 @@
               <a:buNone/>
             </a:pPr>
             <a:r>
-              <a:rPr lang="en-US" sz="1300" b="1" dirty="0">
+              <a:rPr lang="en-US" sz="1250" b="1" dirty="0">
                 <a:solidFill>
                   <a:srgbClr val="0068B7"/>
                 </a:solidFill>
@@ -18087,101 +18303,317 @@
                 <a:ea typeface="Aptos" pitchFamily="34" charset="-122"/>
                 <a:cs typeface="Aptos" pitchFamily="34" charset="-120"/>
               </a:rPr>
-              <a:t>Concept checkpoints</a:t>
-            </a:r>
-            <a:endParaRPr lang="en-US" sz="1300" dirty="0"/>
-          </a:p>
-        </p:txBody>
-      </p:sp>
-      <p:sp>
-        <p:nvSpPr>
-          <p:cNvPr id="15" name="Text 13"/>
-          <p:cNvSpPr/>
-          <p:nvPr/>
-        </p:nvSpPr>
-        <p:spPr>
-          <a:xfrm>
-            <a:off x="7818120" y="3300984"/>
-            <a:ext cx="3090672" cy="877824"/>
-          </a:xfrm>
-          <a:prstGeom prst="rect">
-            <a:avLst/>
-          </a:prstGeom>
-          <a:noFill/>
-          <a:ln/>
-        </p:spPr>
-        <p:txBody>
-          <a:bodyPr wrap="square" lIns="508" tIns="508" rIns="508" bIns="508" rtlCol="0" anchor="t">
+              <a:t>Governance pathway</a:t>
+            </a:r>
+            <a:endParaRPr lang="en-US" sz="1250" dirty="0"/>
+          </a:p>
+        </p:txBody>
+      </p:sp>
+      <p:sp>
+        <p:nvSpPr>
+          <p:cNvPr id="15" name="Shape 13"/>
+          <p:cNvSpPr/>
+          <p:nvPr/>
+        </p:nvSpPr>
+        <p:spPr>
+          <a:xfrm>
+            <a:off x="8763000" y="3351276"/>
+            <a:ext cx="164592" cy="0"/>
+          </a:xfrm>
+          <a:prstGeom prst="line">
+            <a:avLst/>
+          </a:prstGeom>
+          <a:noFill/>
+          <a:ln w="15240">
+            <a:solidFill>
+              <a:srgbClr val="8ABBD8"/>
+            </a:solidFill>
+            <a:prstDash val="solid"/>
+          </a:ln>
+        </p:spPr>
+      </p:sp>
+      <p:sp>
+        <p:nvSpPr>
+          <p:cNvPr id="16" name="Shape 14"/>
+          <p:cNvSpPr/>
+          <p:nvPr/>
+        </p:nvSpPr>
+        <p:spPr>
+          <a:xfrm>
+            <a:off x="7872984" y="3200400"/>
+            <a:ext cx="890016" cy="301752"/>
+          </a:xfrm>
+          <a:prstGeom prst="roundRect">
+            <a:avLst>
+              <a:gd name="adj" fmla="val 24242"/>
+            </a:avLst>
+          </a:prstGeom>
+          <a:solidFill>
+            <a:srgbClr val="0068B7"/>
+          </a:solidFill>
+          <a:ln w="12700">
+            <a:solidFill>
+              <a:srgbClr val="0068B7"/>
+            </a:solidFill>
+            <a:prstDash val="solid"/>
+          </a:ln>
+        </p:spPr>
+      </p:sp>
+      <p:sp>
+        <p:nvSpPr>
+          <p:cNvPr id="17" name="Text 15"/>
+          <p:cNvSpPr/>
+          <p:nvPr/>
+        </p:nvSpPr>
+        <p:spPr>
+          <a:xfrm>
+            <a:off x="7909560" y="3273552"/>
+            <a:ext cx="816864" cy="146304"/>
+          </a:xfrm>
+          <a:prstGeom prst="rect">
+            <a:avLst/>
+          </a:prstGeom>
+          <a:noFill/>
+          <a:ln/>
+        </p:spPr>
+        <p:txBody>
+          <a:bodyPr wrap="square" lIns="0" tIns="0" rIns="0" bIns="0" rtlCol="0" anchor="ctr">
             <a:normAutofit/>
           </a:bodyPr>
           <a:lstStyle/>
           <a:p>
-            <a:pPr indent="0" marL="0">
-              <a:buNone/>
-            </a:pPr>
-            <a:r>
-              <a:rPr lang="en-US" sz="1220" dirty="0">
-                <a:solidFill>
-                  <a:srgbClr val="17364A"/>
-                </a:solidFill>
-                <a:latin typeface="Aptos" pitchFamily="34" charset="0"/>
-                <a:ea typeface="Aptos" pitchFamily="34" charset="-122"/>
-                <a:cs typeface="Aptos" pitchFamily="34" charset="-120"/>
-              </a:rPr>
-              <a:t>It is not legal advice and does not replace review by agency legal.</a:t>
-            </a:r>
-            <a:endParaRPr lang="en-US" sz="1220" dirty="0"/>
-          </a:p>
-          <a:p>
-            <a:pPr indent="0" marL="0">
-              <a:buNone/>
-            </a:pPr>
-            <a:r>
-              <a:rPr lang="en-US" sz="1220" dirty="0">
-                <a:solidFill>
-                  <a:srgbClr val="17364A"/>
-                </a:solidFill>
-                <a:latin typeface="Aptos" pitchFamily="34" charset="0"/>
-                <a:ea typeface="Aptos" pitchFamily="34" charset="-122"/>
-                <a:cs typeface="Aptos" pitchFamily="34" charset="-120"/>
-              </a:rPr>
-              <a:t>Requirements may vary by state, locality, territory, Tribe,.</a:t>
-            </a:r>
-            <a:endParaRPr lang="en-US" sz="1220" dirty="0"/>
-          </a:p>
-          <a:p>
-            <a:pPr indent="0" marL="0">
-              <a:buNone/>
-            </a:pPr>
-            <a:r>
-              <a:rPr lang="en-US" sz="1220" dirty="0">
-                <a:solidFill>
-                  <a:srgbClr val="17364A"/>
-                </a:solidFill>
-                <a:latin typeface="Aptos" pitchFamily="34" charset="0"/>
-                <a:ea typeface="Aptos" pitchFamily="34" charset="-122"/>
-                <a:cs typeface="Aptos" pitchFamily="34" charset="-120"/>
-              </a:rPr>
-              <a:t>Learners should use this module to identify the issues that.</a:t>
-            </a:r>
-            <a:endParaRPr lang="en-US" sz="1220" dirty="0"/>
-          </a:p>
-        </p:txBody>
-      </p:sp>
-      <p:sp>
-        <p:nvSpPr>
-          <p:cNvPr id="16" name="Shape 14"/>
-          <p:cNvSpPr/>
-          <p:nvPr/>
-        </p:nvSpPr>
-        <p:spPr>
-          <a:xfrm>
-            <a:off x="7635240" y="4498848"/>
-            <a:ext cx="3474720" cy="1143000"/>
+            <a:pPr algn="ctr" indent="0" marL="0">
+              <a:buNone/>
+            </a:pPr>
+            <a:r>
+              <a:rPr lang="en-US" sz="880" b="1" dirty="0">
+                <a:solidFill>
+                  <a:srgbClr val="FFFFFF"/>
+                </a:solidFill>
+                <a:latin typeface="Aptos" pitchFamily="34" charset="0"/>
+                <a:ea typeface="Aptos" pitchFamily="34" charset="-122"/>
+                <a:cs typeface="Aptos" pitchFamily="34" charset="-120"/>
+              </a:rPr>
+              <a:t>Submit</a:t>
+            </a:r>
+            <a:endParaRPr lang="en-US" sz="880" dirty="0"/>
+          </a:p>
+        </p:txBody>
+      </p:sp>
+      <p:sp>
+        <p:nvSpPr>
+          <p:cNvPr id="18" name="Shape 16"/>
+          <p:cNvSpPr/>
+          <p:nvPr/>
+        </p:nvSpPr>
+        <p:spPr>
+          <a:xfrm>
+            <a:off x="9817608" y="3351276"/>
+            <a:ext cx="164592" cy="0"/>
+          </a:xfrm>
+          <a:prstGeom prst="line">
+            <a:avLst/>
+          </a:prstGeom>
+          <a:noFill/>
+          <a:ln w="15240">
+            <a:solidFill>
+              <a:srgbClr val="8ABBD8"/>
+            </a:solidFill>
+            <a:prstDash val="solid"/>
+          </a:ln>
+        </p:spPr>
+      </p:sp>
+      <p:sp>
+        <p:nvSpPr>
+          <p:cNvPr id="19" name="Shape 17"/>
+          <p:cNvSpPr/>
+          <p:nvPr/>
+        </p:nvSpPr>
+        <p:spPr>
+          <a:xfrm>
+            <a:off x="8927592" y="3200400"/>
+            <a:ext cx="890016" cy="301752"/>
           </a:xfrm>
           <a:prstGeom prst="roundRect">
             <a:avLst>
-              <a:gd name="adj" fmla="val 9600"/>
+              <a:gd name="adj" fmla="val 24242"/>
+            </a:avLst>
+          </a:prstGeom>
+          <a:solidFill>
+            <a:srgbClr val="2F8A28"/>
+          </a:solidFill>
+          <a:ln w="12700">
+            <a:solidFill>
+              <a:srgbClr val="2F8A28"/>
+            </a:solidFill>
+            <a:prstDash val="solid"/>
+          </a:ln>
+        </p:spPr>
+      </p:sp>
+      <p:sp>
+        <p:nvSpPr>
+          <p:cNvPr id="20" name="Text 18"/>
+          <p:cNvSpPr/>
+          <p:nvPr/>
+        </p:nvSpPr>
+        <p:spPr>
+          <a:xfrm>
+            <a:off x="8964168" y="3273552"/>
+            <a:ext cx="816864" cy="146304"/>
+          </a:xfrm>
+          <a:prstGeom prst="rect">
+            <a:avLst/>
+          </a:prstGeom>
+          <a:noFill/>
+          <a:ln/>
+        </p:spPr>
+        <p:txBody>
+          <a:bodyPr wrap="square" lIns="0" tIns="0" rIns="0" bIns="0" rtlCol="0" anchor="ctr">
+            <a:normAutofit/>
+          </a:bodyPr>
+          <a:lstStyle/>
+          <a:p>
+            <a:pPr algn="ctr" indent="0" marL="0">
+              <a:buNone/>
+            </a:pPr>
+            <a:r>
+              <a:rPr lang="en-US" sz="880" b="1" dirty="0">
+                <a:solidFill>
+                  <a:srgbClr val="FFFFFF"/>
+                </a:solidFill>
+                <a:latin typeface="Aptos" pitchFamily="34" charset="0"/>
+                <a:ea typeface="Aptos" pitchFamily="34" charset="-122"/>
+                <a:cs typeface="Aptos" pitchFamily="34" charset="-120"/>
+              </a:rPr>
+              <a:t>Review</a:t>
+            </a:r>
+            <a:endParaRPr lang="en-US" sz="880" dirty="0"/>
+          </a:p>
+        </p:txBody>
+      </p:sp>
+      <p:sp>
+        <p:nvSpPr>
+          <p:cNvPr id="21" name="Shape 19"/>
+          <p:cNvSpPr/>
+          <p:nvPr/>
+        </p:nvSpPr>
+        <p:spPr>
+          <a:xfrm>
+            <a:off x="9982200" y="3200400"/>
+            <a:ext cx="890016" cy="301752"/>
+          </a:xfrm>
+          <a:prstGeom prst="roundRect">
+            <a:avLst>
+              <a:gd name="adj" fmla="val 24242"/>
+            </a:avLst>
+          </a:prstGeom>
+          <a:solidFill>
+            <a:srgbClr val="6A4CA3"/>
+          </a:solidFill>
+          <a:ln w="12700">
+            <a:solidFill>
+              <a:srgbClr val="6A4CA3"/>
+            </a:solidFill>
+            <a:prstDash val="solid"/>
+          </a:ln>
+        </p:spPr>
+      </p:sp>
+      <p:sp>
+        <p:nvSpPr>
+          <p:cNvPr id="22" name="Text 20"/>
+          <p:cNvSpPr/>
+          <p:nvPr/>
+        </p:nvSpPr>
+        <p:spPr>
+          <a:xfrm>
+            <a:off x="10018776" y="3273552"/>
+            <a:ext cx="816864" cy="146304"/>
+          </a:xfrm>
+          <a:prstGeom prst="rect">
+            <a:avLst/>
+          </a:prstGeom>
+          <a:noFill/>
+          <a:ln/>
+        </p:spPr>
+        <p:txBody>
+          <a:bodyPr wrap="square" lIns="0" tIns="0" rIns="0" bIns="0" rtlCol="0" anchor="ctr">
+            <a:normAutofit/>
+          </a:bodyPr>
+          <a:lstStyle/>
+          <a:p>
+            <a:pPr algn="ctr" indent="0" marL="0">
+              <a:buNone/>
+            </a:pPr>
+            <a:r>
+              <a:rPr lang="en-US" sz="880" b="1" dirty="0">
+                <a:solidFill>
+                  <a:srgbClr val="FFFFFF"/>
+                </a:solidFill>
+                <a:latin typeface="Aptos" pitchFamily="34" charset="0"/>
+                <a:ea typeface="Aptos" pitchFamily="34" charset="-122"/>
+                <a:cs typeface="Aptos" pitchFamily="34" charset="-120"/>
+              </a:rPr>
+              <a:t>Oversee</a:t>
+            </a:r>
+            <a:endParaRPr lang="en-US" sz="880" dirty="0"/>
+          </a:p>
+        </p:txBody>
+      </p:sp>
+      <p:sp>
+        <p:nvSpPr>
+          <p:cNvPr id="23" name="Text 21"/>
+          <p:cNvSpPr/>
+          <p:nvPr/>
+        </p:nvSpPr>
+        <p:spPr>
+          <a:xfrm>
+            <a:off x="7854696" y="3694176"/>
+            <a:ext cx="3035808" cy="206654"/>
+          </a:xfrm>
+          <a:prstGeom prst="rect">
+            <a:avLst/>
+          </a:prstGeom>
+          <a:noFill/>
+          <a:ln/>
+        </p:spPr>
+        <p:txBody>
+          <a:bodyPr wrap="square" lIns="254" tIns="254" rIns="254" bIns="254" rtlCol="0" anchor="t">
+            <a:normAutofit/>
+          </a:bodyPr>
+          <a:lstStyle/>
+          <a:p>
+            <a:pPr indent="0" marL="0">
+              <a:buNone/>
+            </a:pPr>
+            <a:r>
+              <a:rPr lang="en-US" sz="1120" dirty="0">
+                <a:solidFill>
+                  <a:srgbClr val="17364A"/>
+                </a:solidFill>
+                <a:latin typeface="Aptos" pitchFamily="34" charset="0"/>
+                <a:ea typeface="Aptos" pitchFamily="34" charset="-122"/>
+                <a:cs typeface="Aptos" pitchFamily="34" charset="-120"/>
+              </a:rPr>
+              <a:t>A proposed AI use should move through documented review before it becomes an operational workflow.</a:t>
+            </a:r>
+            <a:endParaRPr lang="en-US" sz="1120" dirty="0"/>
+          </a:p>
+        </p:txBody>
+      </p:sp>
+      <p:sp>
+        <p:nvSpPr>
+          <p:cNvPr id="24" name="Shape 22"/>
+          <p:cNvSpPr/>
+          <p:nvPr/>
+        </p:nvSpPr>
+        <p:spPr>
+          <a:xfrm>
+            <a:off x="7635240" y="4184294"/>
+            <a:ext cx="3474720" cy="1466698"/>
+          </a:xfrm>
+          <a:prstGeom prst="roundRect">
+            <a:avLst>
+              <a:gd name="adj" fmla="val 7481"/>
             </a:avLst>
           </a:prstGeom>
           <a:solidFill>
@@ -18197,13 +18629,13 @@
       </p:sp>
       <p:sp>
         <p:nvSpPr>
-          <p:cNvPr id="17" name="Text 15"/>
-          <p:cNvSpPr/>
-          <p:nvPr/>
-        </p:nvSpPr>
-        <p:spPr>
-          <a:xfrm>
-            <a:off x="7799832" y="4645152"/>
+          <p:cNvPr id="25" name="Text 23"/>
+          <p:cNvSpPr/>
+          <p:nvPr/>
+        </p:nvSpPr>
+        <p:spPr>
+          <a:xfrm>
+            <a:off x="7799832" y="4330598"/>
             <a:ext cx="3145536" cy="256032"/>
           </a:xfrm>
           <a:prstGeom prst="rect">
@@ -18236,14 +18668,14 @@
       </p:sp>
       <p:sp>
         <p:nvSpPr>
-          <p:cNvPr id="18" name="Text 16"/>
-          <p:cNvSpPr/>
-          <p:nvPr/>
-        </p:nvSpPr>
-        <p:spPr>
-          <a:xfrm>
-            <a:off x="7799832" y="4974336"/>
-            <a:ext cx="3145536" cy="576072"/>
+          <p:cNvPr id="26" name="Text 24"/>
+          <p:cNvSpPr/>
+          <p:nvPr/>
+        </p:nvSpPr>
+        <p:spPr>
+          <a:xfrm>
+            <a:off x="7799832" y="4659782"/>
+            <a:ext cx="3145536" cy="899770"/>
           </a:xfrm>
           <a:prstGeom prst="rect">
             <a:avLst/>
@@ -18269,7 +18701,7 @@
                 <a:ea typeface="Aptos" pitchFamily="34" charset="-122"/>
                 <a:cs typeface="Aptos" pitchFamily="34" charset="-120"/>
               </a:rPr>
-              <a:t>Translate this concept into clear decision rights, review steps, documentation expectations, and escalation paths before.</a:t>
+              <a:t>Translate this concept into clear decision rights, review steps, documentation expectations, and escalation paths before an AI-supported workflow is approved.</a:t>
             </a:r>
             <a:endParaRPr lang="en-US" sz="1320" dirty="0"/>
           </a:p>
@@ -18638,11 +19070,11 @@
         <p:spPr>
           <a:xfrm>
             <a:off x="7635240" y="1325880"/>
-            <a:ext cx="3474720" cy="1325880"/>
+            <a:ext cx="3474720" cy="1255471"/>
           </a:xfrm>
           <a:prstGeom prst="roundRect">
             <a:avLst>
-              <a:gd name="adj" fmla="val 8276"/>
+              <a:gd name="adj" fmla="val 8740"/>
             </a:avLst>
           </a:prstGeom>
           <a:solidFill>
@@ -18704,7 +19136,7 @@
         <p:spPr>
           <a:xfrm>
             <a:off x="7799832" y="1801368"/>
-            <a:ext cx="3145536" cy="758952"/>
+            <a:ext cx="3145536" cy="688543"/>
           </a:xfrm>
           <a:prstGeom prst="rect">
             <a:avLst/>
@@ -18744,7 +19176,7 @@
         </p:nvSpPr>
         <p:spPr>
           <a:xfrm>
-            <a:off x="7635240" y="2788920"/>
+            <a:off x="7635240" y="2718511"/>
             <a:ext cx="3474720" cy="1536192"/>
           </a:xfrm>
           <a:prstGeom prst="roundRect">
@@ -18771,8 +19203,8 @@
         </p:nvSpPr>
         <p:spPr>
           <a:xfrm>
-            <a:off x="7799832" y="2935224"/>
-            <a:ext cx="3145536" cy="256032"/>
+            <a:off x="7799832" y="2846527"/>
+            <a:ext cx="3145536" cy="237744"/>
           </a:xfrm>
           <a:prstGeom prst="rect">
             <a:avLst/>
@@ -18788,7 +19220,7 @@
               <a:buNone/>
             </a:pPr>
             <a:r>
-              <a:rPr lang="en-US" sz="1300" b="1" dirty="0">
+              <a:rPr lang="en-US" sz="1250" b="1" dirty="0">
                 <a:solidFill>
                   <a:srgbClr val="0068B7"/>
                 </a:solidFill>
@@ -18796,101 +19228,317 @@
                 <a:ea typeface="Aptos" pitchFamily="34" charset="-122"/>
                 <a:cs typeface="Aptos" pitchFamily="34" charset="-120"/>
               </a:rPr>
-              <a:t>Concept checkpoints</a:t>
-            </a:r>
-            <a:endParaRPr lang="en-US" sz="1300" dirty="0"/>
-          </a:p>
-        </p:txBody>
-      </p:sp>
-      <p:sp>
-        <p:nvSpPr>
-          <p:cNvPr id="15" name="Text 13"/>
-          <p:cNvSpPr/>
-          <p:nvPr/>
-        </p:nvSpPr>
-        <p:spPr>
-          <a:xfrm>
-            <a:off x="7818120" y="3300984"/>
-            <a:ext cx="3090672" cy="877824"/>
-          </a:xfrm>
-          <a:prstGeom prst="rect">
-            <a:avLst/>
-          </a:prstGeom>
-          <a:noFill/>
-          <a:ln/>
-        </p:spPr>
-        <p:txBody>
-          <a:bodyPr wrap="square" lIns="508" tIns="508" rIns="508" bIns="508" rtlCol="0" anchor="t">
+              <a:t>Risk control loop</a:t>
+            </a:r>
+            <a:endParaRPr lang="en-US" sz="1250" dirty="0"/>
+          </a:p>
+        </p:txBody>
+      </p:sp>
+      <p:sp>
+        <p:nvSpPr>
+          <p:cNvPr id="15" name="Shape 13"/>
+          <p:cNvSpPr/>
+          <p:nvPr/>
+        </p:nvSpPr>
+        <p:spPr>
+          <a:xfrm>
+            <a:off x="8763000" y="3399739"/>
+            <a:ext cx="164592" cy="0"/>
+          </a:xfrm>
+          <a:prstGeom prst="line">
+            <a:avLst/>
+          </a:prstGeom>
+          <a:noFill/>
+          <a:ln w="15240">
+            <a:solidFill>
+              <a:srgbClr val="8ABBD8"/>
+            </a:solidFill>
+            <a:prstDash val="solid"/>
+          </a:ln>
+        </p:spPr>
+      </p:sp>
+      <p:sp>
+        <p:nvSpPr>
+          <p:cNvPr id="16" name="Shape 14"/>
+          <p:cNvSpPr/>
+          <p:nvPr/>
+        </p:nvSpPr>
+        <p:spPr>
+          <a:xfrm>
+            <a:off x="7872984" y="3248863"/>
+            <a:ext cx="890016" cy="301752"/>
+          </a:xfrm>
+          <a:prstGeom prst="roundRect">
+            <a:avLst>
+              <a:gd name="adj" fmla="val 24242"/>
+            </a:avLst>
+          </a:prstGeom>
+          <a:solidFill>
+            <a:srgbClr val="0068B7"/>
+          </a:solidFill>
+          <a:ln w="12700">
+            <a:solidFill>
+              <a:srgbClr val="0068B7"/>
+            </a:solidFill>
+            <a:prstDash val="solid"/>
+          </a:ln>
+        </p:spPr>
+      </p:sp>
+      <p:sp>
+        <p:nvSpPr>
+          <p:cNvPr id="17" name="Text 15"/>
+          <p:cNvSpPr/>
+          <p:nvPr/>
+        </p:nvSpPr>
+        <p:spPr>
+          <a:xfrm>
+            <a:off x="7909560" y="3322015"/>
+            <a:ext cx="816864" cy="146304"/>
+          </a:xfrm>
+          <a:prstGeom prst="rect">
+            <a:avLst/>
+          </a:prstGeom>
+          <a:noFill/>
+          <a:ln/>
+        </p:spPr>
+        <p:txBody>
+          <a:bodyPr wrap="square" lIns="0" tIns="0" rIns="0" bIns="0" rtlCol="0" anchor="ctr">
             <a:normAutofit/>
           </a:bodyPr>
           <a:lstStyle/>
           <a:p>
-            <a:pPr indent="0" marL="0">
-              <a:buNone/>
-            </a:pPr>
-            <a:r>
-              <a:rPr lang="en-US" sz="1220" dirty="0">
-                <a:solidFill>
-                  <a:srgbClr val="17364A"/>
-                </a:solidFill>
-                <a:latin typeface="Aptos" pitchFamily="34" charset="0"/>
-                <a:ea typeface="Aptos" pitchFamily="34" charset="-122"/>
-                <a:cs typeface="Aptos" pitchFamily="34" charset="-120"/>
-              </a:rPr>
-              <a:t>AI can change the privacy risk profile of a public health dataset.</a:t>
-            </a:r>
-            <a:endParaRPr lang="en-US" sz="1220" dirty="0"/>
-          </a:p>
-          <a:p>
-            <a:pPr indent="0" marL="0">
-              <a:buNone/>
-            </a:pPr>
-            <a:r>
-              <a:rPr lang="en-US" sz="1220" dirty="0">
-                <a:solidFill>
-                  <a:srgbClr val="17364A"/>
-                </a:solidFill>
-                <a:latin typeface="Aptos" pitchFamily="34" charset="0"/>
-                <a:ea typeface="Aptos" pitchFamily="34" charset="-122"/>
-                <a:cs typeface="Aptos" pitchFamily="34" charset="-120"/>
-              </a:rPr>
-              <a:t>A dataset that seems low risk in one context may become more.</a:t>
-            </a:r>
-            <a:endParaRPr lang="en-US" sz="1220" dirty="0"/>
-          </a:p>
-          <a:p>
-            <a:pPr indent="0" marL="0">
-              <a:buNone/>
-            </a:pPr>
-            <a:r>
-              <a:rPr lang="en-US" sz="1220" dirty="0">
-                <a:solidFill>
-                  <a:srgbClr val="17364A"/>
-                </a:solidFill>
-                <a:latin typeface="Aptos" pitchFamily="34" charset="0"/>
-                <a:ea typeface="Aptos" pitchFamily="34" charset="-122"/>
-                <a:cs typeface="Aptos" pitchFamily="34" charset="-120"/>
-              </a:rPr>
-              <a:t>Generative AI and retrieval systems can also reveal sensitive.</a:t>
-            </a:r>
-            <a:endParaRPr lang="en-US" sz="1220" dirty="0"/>
-          </a:p>
-        </p:txBody>
-      </p:sp>
-      <p:sp>
-        <p:nvSpPr>
-          <p:cNvPr id="16" name="Shape 14"/>
-          <p:cNvSpPr/>
-          <p:nvPr/>
-        </p:nvSpPr>
-        <p:spPr>
-          <a:xfrm>
-            <a:off x="7635240" y="4498848"/>
-            <a:ext cx="3474720" cy="1143000"/>
+            <a:pPr algn="ctr" indent="0" marL="0">
+              <a:buNone/>
+            </a:pPr>
+            <a:r>
+              <a:rPr lang="en-US" sz="880" b="1" dirty="0">
+                <a:solidFill>
+                  <a:srgbClr val="FFFFFF"/>
+                </a:solidFill>
+                <a:latin typeface="Aptos" pitchFamily="34" charset="0"/>
+                <a:ea typeface="Aptos" pitchFamily="34" charset="-122"/>
+                <a:cs typeface="Aptos" pitchFamily="34" charset="-120"/>
+              </a:rPr>
+              <a:t>Identify</a:t>
+            </a:r>
+            <a:endParaRPr lang="en-US" sz="880" dirty="0"/>
+          </a:p>
+        </p:txBody>
+      </p:sp>
+      <p:sp>
+        <p:nvSpPr>
+          <p:cNvPr id="18" name="Shape 16"/>
+          <p:cNvSpPr/>
+          <p:nvPr/>
+        </p:nvSpPr>
+        <p:spPr>
+          <a:xfrm>
+            <a:off x="9817608" y="3399739"/>
+            <a:ext cx="164592" cy="0"/>
+          </a:xfrm>
+          <a:prstGeom prst="line">
+            <a:avLst/>
+          </a:prstGeom>
+          <a:noFill/>
+          <a:ln w="15240">
+            <a:solidFill>
+              <a:srgbClr val="8ABBD8"/>
+            </a:solidFill>
+            <a:prstDash val="solid"/>
+          </a:ln>
+        </p:spPr>
+      </p:sp>
+      <p:sp>
+        <p:nvSpPr>
+          <p:cNvPr id="19" name="Shape 17"/>
+          <p:cNvSpPr/>
+          <p:nvPr/>
+        </p:nvSpPr>
+        <p:spPr>
+          <a:xfrm>
+            <a:off x="8927592" y="3248863"/>
+            <a:ext cx="890016" cy="301752"/>
           </a:xfrm>
           <a:prstGeom prst="roundRect">
             <a:avLst>
-              <a:gd name="adj" fmla="val 9600"/>
+              <a:gd name="adj" fmla="val 24242"/>
+            </a:avLst>
+          </a:prstGeom>
+          <a:solidFill>
+            <a:srgbClr val="2F8A28"/>
+          </a:solidFill>
+          <a:ln w="12700">
+            <a:solidFill>
+              <a:srgbClr val="2F8A28"/>
+            </a:solidFill>
+            <a:prstDash val="solid"/>
+          </a:ln>
+        </p:spPr>
+      </p:sp>
+      <p:sp>
+        <p:nvSpPr>
+          <p:cNvPr id="20" name="Text 18"/>
+          <p:cNvSpPr/>
+          <p:nvPr/>
+        </p:nvSpPr>
+        <p:spPr>
+          <a:xfrm>
+            <a:off x="8964168" y="3322015"/>
+            <a:ext cx="816864" cy="146304"/>
+          </a:xfrm>
+          <a:prstGeom prst="rect">
+            <a:avLst/>
+          </a:prstGeom>
+          <a:noFill/>
+          <a:ln/>
+        </p:spPr>
+        <p:txBody>
+          <a:bodyPr wrap="square" lIns="0" tIns="0" rIns="0" bIns="0" rtlCol="0" anchor="ctr">
+            <a:normAutofit/>
+          </a:bodyPr>
+          <a:lstStyle/>
+          <a:p>
+            <a:pPr algn="ctr" indent="0" marL="0">
+              <a:buNone/>
+            </a:pPr>
+            <a:r>
+              <a:rPr lang="en-US" sz="880" b="1" dirty="0">
+                <a:solidFill>
+                  <a:srgbClr val="FFFFFF"/>
+                </a:solidFill>
+                <a:latin typeface="Aptos" pitchFamily="34" charset="0"/>
+                <a:ea typeface="Aptos" pitchFamily="34" charset="-122"/>
+                <a:cs typeface="Aptos" pitchFamily="34" charset="-120"/>
+              </a:rPr>
+              <a:t>Control</a:t>
+            </a:r>
+            <a:endParaRPr lang="en-US" sz="880" dirty="0"/>
+          </a:p>
+        </p:txBody>
+      </p:sp>
+      <p:sp>
+        <p:nvSpPr>
+          <p:cNvPr id="21" name="Shape 19"/>
+          <p:cNvSpPr/>
+          <p:nvPr/>
+        </p:nvSpPr>
+        <p:spPr>
+          <a:xfrm>
+            <a:off x="9982200" y="3248863"/>
+            <a:ext cx="890016" cy="301752"/>
+          </a:xfrm>
+          <a:prstGeom prst="roundRect">
+            <a:avLst>
+              <a:gd name="adj" fmla="val 24242"/>
+            </a:avLst>
+          </a:prstGeom>
+          <a:solidFill>
+            <a:srgbClr val="6A4CA3"/>
+          </a:solidFill>
+          <a:ln w="12700">
+            <a:solidFill>
+              <a:srgbClr val="6A4CA3"/>
+            </a:solidFill>
+            <a:prstDash val="solid"/>
+          </a:ln>
+        </p:spPr>
+      </p:sp>
+      <p:sp>
+        <p:nvSpPr>
+          <p:cNvPr id="22" name="Text 20"/>
+          <p:cNvSpPr/>
+          <p:nvPr/>
+        </p:nvSpPr>
+        <p:spPr>
+          <a:xfrm>
+            <a:off x="10018776" y="3322015"/>
+            <a:ext cx="816864" cy="146304"/>
+          </a:xfrm>
+          <a:prstGeom prst="rect">
+            <a:avLst/>
+          </a:prstGeom>
+          <a:noFill/>
+          <a:ln/>
+        </p:spPr>
+        <p:txBody>
+          <a:bodyPr wrap="square" lIns="0" tIns="0" rIns="0" bIns="0" rtlCol="0" anchor="ctr">
+            <a:normAutofit/>
+          </a:bodyPr>
+          <a:lstStyle/>
+          <a:p>
+            <a:pPr algn="ctr" indent="0" marL="0">
+              <a:buNone/>
+            </a:pPr>
+            <a:r>
+              <a:rPr lang="en-US" sz="880" b="1" dirty="0">
+                <a:solidFill>
+                  <a:srgbClr val="FFFFFF"/>
+                </a:solidFill>
+                <a:latin typeface="Aptos" pitchFamily="34" charset="0"/>
+                <a:ea typeface="Aptos" pitchFamily="34" charset="-122"/>
+                <a:cs typeface="Aptos" pitchFamily="34" charset="-120"/>
+              </a:rPr>
+              <a:t>Monitor</a:t>
+            </a:r>
+            <a:endParaRPr lang="en-US" sz="880" dirty="0"/>
+          </a:p>
+        </p:txBody>
+      </p:sp>
+      <p:sp>
+        <p:nvSpPr>
+          <p:cNvPr id="23" name="Text 21"/>
+          <p:cNvSpPr/>
+          <p:nvPr/>
+        </p:nvSpPr>
+        <p:spPr>
+          <a:xfrm>
+            <a:off x="7854696" y="3742639"/>
+            <a:ext cx="3035808" cy="365760"/>
+          </a:xfrm>
+          <a:prstGeom prst="rect">
+            <a:avLst/>
+          </a:prstGeom>
+          <a:noFill/>
+          <a:ln/>
+        </p:spPr>
+        <p:txBody>
+          <a:bodyPr wrap="square" lIns="254" tIns="254" rIns="254" bIns="254" rtlCol="0" anchor="t">
+            <a:normAutofit/>
+          </a:bodyPr>
+          <a:lstStyle/>
+          <a:p>
+            <a:pPr indent="0" marL="0">
+              <a:buNone/>
+            </a:pPr>
+            <a:r>
+              <a:rPr lang="en-US" sz="1120" dirty="0">
+                <a:solidFill>
+                  <a:srgbClr val="17364A"/>
+                </a:solidFill>
+                <a:latin typeface="Aptos" pitchFamily="34" charset="0"/>
+                <a:ea typeface="Aptos" pitchFamily="34" charset="-122"/>
+                <a:cs typeface="Aptos" pitchFamily="34" charset="-120"/>
+              </a:rPr>
+              <a:t>Responsible use depends on finding risks early, applying safeguards, and watching for drift or harm over time.</a:t>
+            </a:r>
+            <a:endParaRPr lang="en-US" sz="1120" dirty="0"/>
+          </a:p>
+        </p:txBody>
+      </p:sp>
+      <p:sp>
+        <p:nvSpPr>
+          <p:cNvPr id="24" name="Shape 22"/>
+          <p:cNvSpPr/>
+          <p:nvPr/>
+        </p:nvSpPr>
+        <p:spPr>
+          <a:xfrm>
+            <a:off x="7635240" y="4391863"/>
+            <a:ext cx="3474720" cy="1255471"/>
+          </a:xfrm>
+          <a:prstGeom prst="roundRect">
+            <a:avLst>
+              <a:gd name="adj" fmla="val 8740"/>
             </a:avLst>
           </a:prstGeom>
           <a:solidFill>
@@ -18906,13 +19554,13 @@
       </p:sp>
       <p:sp>
         <p:nvSpPr>
-          <p:cNvPr id="17" name="Text 15"/>
-          <p:cNvSpPr/>
-          <p:nvPr/>
-        </p:nvSpPr>
-        <p:spPr>
-          <a:xfrm>
-            <a:off x="7799832" y="4645152"/>
+          <p:cNvPr id="25" name="Text 23"/>
+          <p:cNvSpPr/>
+          <p:nvPr/>
+        </p:nvSpPr>
+        <p:spPr>
+          <a:xfrm>
+            <a:off x="7799832" y="4538167"/>
             <a:ext cx="3145536" cy="256032"/>
           </a:xfrm>
           <a:prstGeom prst="rect">
@@ -18945,14 +19593,14 @@
       </p:sp>
       <p:sp>
         <p:nvSpPr>
-          <p:cNvPr id="18" name="Text 16"/>
-          <p:cNvSpPr/>
-          <p:nvPr/>
-        </p:nvSpPr>
-        <p:spPr>
-          <a:xfrm>
-            <a:off x="7799832" y="4974336"/>
-            <a:ext cx="3145536" cy="576072"/>
+          <p:cNvPr id="26" name="Text 24"/>
+          <p:cNvSpPr/>
+          <p:nvPr/>
+        </p:nvSpPr>
+        <p:spPr>
+          <a:xfrm>
+            <a:off x="7799832" y="4867351"/>
+            <a:ext cx="3145536" cy="688543"/>
           </a:xfrm>
           <a:prstGeom prst="rect">
             <a:avLst/>
@@ -18978,7 +19626,7 @@
                 <a:ea typeface="Aptos" pitchFamily="34" charset="-122"/>
                 <a:cs typeface="Aptos" pitchFamily="34" charset="-120"/>
               </a:rPr>
-              <a:t>Identify what could go wrong, who could be affected, what safeguards are needed, and what evidence should be reviewed.</a:t>
+              <a:t>Identify what could go wrong, who could be affected, what safeguards are needed, and what evidence should be reviewed before use.</a:t>
             </a:r>
             <a:endParaRPr lang="en-US" sz="1320" dirty="0"/>
           </a:p>

--- a/downloads/presentations/modules/gov-310.pptx
+++ b/downloads/presentations/modules/gov-310.pptx
@@ -3523,8 +3523,8 @@
         </p:nvSpPr>
         <p:spPr>
           <a:xfrm>
-            <a:off x="868680" y="1508760"/>
-            <a:ext cx="6309360" cy="4160520"/>
+            <a:off x="822960" y="1463040"/>
+            <a:ext cx="6565392" cy="4343400"/>
           </a:xfrm>
           <a:prstGeom prst="rect">
             <a:avLst/>
@@ -3542,7 +3542,7 @@
               <a:buNone/>
             </a:pPr>
             <a:r>
-              <a:rPr lang="en-US" sz="2100" dirty="0">
+              <a:rPr lang="en-US" sz="1920" dirty="0">
                 <a:solidFill>
                   <a:srgbClr val="003A63"/>
                 </a:solidFill>
@@ -3550,16 +3550,16 @@
                 <a:ea typeface="Aptos" pitchFamily="34" charset="-122"/>
                 <a:cs typeface="Aptos" pitchFamily="34" charset="-120"/>
               </a:rPr>
-              <a:t>• De-identification is the process of reducing the risk that data can be connected to a specific.</a:t>
-            </a:r>
-            <a:endParaRPr lang="en-US" sz="2100" dirty="0"/>
-          </a:p>
-          <a:p>
-            <a:pPr indent="0" marL="0">
-              <a:buNone/>
-            </a:pPr>
-            <a:r>
-              <a:rPr lang="en-US" sz="2100" dirty="0">
+              <a:t>• De-identification is the process of reducing the risk that data can be.</a:t>
+            </a:r>
+            <a:endParaRPr lang="en-US" sz="1920" dirty="0"/>
+          </a:p>
+          <a:p>
+            <a:pPr indent="0" marL="0">
+              <a:buNone/>
+            </a:pPr>
+            <a:r>
+              <a:rPr lang="en-US" sz="1920" dirty="0">
                 <a:solidFill>
                   <a:srgbClr val="003A63"/>
                 </a:solidFill>
@@ -3567,16 +3567,16 @@
                 <a:ea typeface="Aptos" pitchFamily="34" charset="-122"/>
                 <a:cs typeface="Aptos" pitchFamily="34" charset="-120"/>
               </a:rPr>
-              <a:t>• In public health practice, de-identification must be interpreted carefully because rare.</a:t>
-            </a:r>
-            <a:endParaRPr lang="en-US" sz="2100" dirty="0"/>
-          </a:p>
-          <a:p>
-            <a:pPr indent="0" marL="0">
-              <a:buNone/>
-            </a:pPr>
-            <a:r>
-              <a:rPr lang="en-US" sz="2100" dirty="0">
+              <a:t>• In public health practice, de-identification must be interpreted carefully.</a:t>
+            </a:r>
+            <a:endParaRPr lang="en-US" sz="1920" dirty="0"/>
+          </a:p>
+          <a:p>
+            <a:pPr indent="0" marL="0">
+              <a:buNone/>
+            </a:pPr>
+            <a:r>
+              <a:rPr lang="en-US" sz="1920" dirty="0">
                 <a:solidFill>
                   <a:srgbClr val="003A63"/>
                 </a:solidFill>
@@ -3584,9 +3584,9 @@
                 <a:ea typeface="Aptos" pitchFamily="34" charset="-122"/>
                 <a:cs typeface="Aptos" pitchFamily="34" charset="-120"/>
               </a:rPr>
-              <a:t>• A dataset can appear anonymous but still be linkable to individuals when combined with other.</a:t>
-            </a:r>
-            <a:endParaRPr lang="en-US" sz="2100" dirty="0"/>
+              <a:t>• A dataset can appear anonymous but still be linkable to individuals when.</a:t>
+            </a:r>
+            <a:endParaRPr lang="en-US" sz="1920" dirty="0"/>
           </a:p>
         </p:txBody>
       </p:sp>
@@ -3598,12 +3598,12 @@
         </p:nvSpPr>
         <p:spPr>
           <a:xfrm>
-            <a:off x="7635240" y="1325880"/>
-            <a:ext cx="3474720" cy="1255471"/>
+            <a:off x="7543800" y="1325880"/>
+            <a:ext cx="3611880" cy="1261872"/>
           </a:xfrm>
           <a:prstGeom prst="roundRect">
             <a:avLst>
-              <a:gd name="adj" fmla="val 8740"/>
+              <a:gd name="adj" fmla="val 8696"/>
             </a:avLst>
           </a:prstGeom>
           <a:solidFill>
@@ -3625,8 +3625,8 @@
         </p:nvSpPr>
         <p:spPr>
           <a:xfrm>
-            <a:off x="7799832" y="1472184"/>
-            <a:ext cx="3145536" cy="256032"/>
+            <a:off x="7708392" y="1453896"/>
+            <a:ext cx="3282696" cy="228600"/>
           </a:xfrm>
           <a:prstGeom prst="rect">
             <a:avLst/>
@@ -3642,7 +3642,7 @@
               <a:buNone/>
             </a:pPr>
             <a:r>
-              <a:rPr lang="en-US" sz="1300" b="1" dirty="0">
+              <a:rPr lang="en-US" sz="1220" b="1" dirty="0">
                 <a:solidFill>
                   <a:srgbClr val="0068B7"/>
                 </a:solidFill>
@@ -3652,7 +3652,7 @@
               </a:rPr>
               <a:t>Risk check</a:t>
             </a:r>
-            <a:endParaRPr lang="en-US" sz="1300" dirty="0"/>
+            <a:endParaRPr lang="en-US" sz="1220" dirty="0"/>
           </a:p>
         </p:txBody>
       </p:sp>
@@ -3664,8 +3664,8 @@
         </p:nvSpPr>
         <p:spPr>
           <a:xfrm>
-            <a:off x="7799832" y="1801368"/>
-            <a:ext cx="3145536" cy="688543"/>
+            <a:off x="7708392" y="1764792"/>
+            <a:ext cx="3282696" cy="749808"/>
           </a:xfrm>
           <a:prstGeom prst="rect">
             <a:avLst/>
@@ -3683,7 +3683,7 @@
               <a:buNone/>
             </a:pPr>
             <a:r>
-              <a:rPr lang="en-US" sz="1320" dirty="0">
+              <a:rPr lang="en-US" sz="1220" dirty="0">
                 <a:solidFill>
                   <a:srgbClr val="17364A"/>
                 </a:solidFill>
@@ -3691,9 +3691,9 @@
                 <a:ea typeface="Aptos" pitchFamily="34" charset="-122"/>
                 <a:cs typeface="Aptos" pitchFamily="34" charset="-120"/>
               </a:rPr>
-              <a:t>De-identification is the process of reducing the risk that data can be connected to a specific person.</a:t>
-            </a:r>
-            <a:endParaRPr lang="en-US" sz="1320" dirty="0"/>
+              <a:t>De-identification is the process of reducing the risk that data can be connected.</a:t>
+            </a:r>
+            <a:endParaRPr lang="en-US" sz="1220" dirty="0"/>
           </a:p>
         </p:txBody>
       </p:sp>
@@ -3705,12 +3705,12 @@
         </p:nvSpPr>
         <p:spPr>
           <a:xfrm>
-            <a:off x="7635240" y="2718511"/>
-            <a:ext cx="3474720" cy="1536192"/>
+            <a:off x="7543800" y="2724912"/>
+            <a:ext cx="3611880" cy="1527048"/>
           </a:xfrm>
           <a:prstGeom prst="roundRect">
             <a:avLst>
-              <a:gd name="adj" fmla="val 7143"/>
+              <a:gd name="adj" fmla="val 7186"/>
             </a:avLst>
           </a:prstGeom>
           <a:solidFill>
@@ -3732,8 +3732,8 @@
         </p:nvSpPr>
         <p:spPr>
           <a:xfrm>
-            <a:off x="7799832" y="2864815"/>
-            <a:ext cx="3145536" cy="256032"/>
+            <a:off x="7708392" y="2852928"/>
+            <a:ext cx="3282696" cy="228600"/>
           </a:xfrm>
           <a:prstGeom prst="rect">
             <a:avLst/>
@@ -3749,7 +3749,7 @@
               <a:buNone/>
             </a:pPr>
             <a:r>
-              <a:rPr lang="en-US" sz="1300" b="1" dirty="0">
+              <a:rPr lang="en-US" sz="1220" b="1" dirty="0">
                 <a:solidFill>
                   <a:srgbClr val="0068B7"/>
                 </a:solidFill>
@@ -3759,7 +3759,7 @@
               </a:rPr>
               <a:t>Concept checkpoints</a:t>
             </a:r>
-            <a:endParaRPr lang="en-US" sz="1300" dirty="0"/>
+            <a:endParaRPr lang="en-US" sz="1220" dirty="0"/>
           </a:p>
         </p:txBody>
       </p:sp>
@@ -3771,8 +3771,8 @@
         </p:nvSpPr>
         <p:spPr>
           <a:xfrm>
-            <a:off x="7818120" y="3230575"/>
-            <a:ext cx="3090672" cy="877824"/>
+            <a:off x="7726680" y="3182112"/>
+            <a:ext cx="3227832" cy="960120"/>
           </a:xfrm>
           <a:prstGeom prst="rect">
             <a:avLst/>
@@ -3790,7 +3790,7 @@
               <a:buNone/>
             </a:pPr>
             <a:r>
-              <a:rPr lang="en-US" sz="1220" dirty="0">
+              <a:rPr lang="en-US" sz="1140" dirty="0">
                 <a:solidFill>
                   <a:srgbClr val="17364A"/>
                 </a:solidFill>
@@ -3798,16 +3798,16 @@
                 <a:ea typeface="Aptos" pitchFamily="34" charset="-122"/>
                 <a:cs typeface="Aptos" pitchFamily="34" charset="-120"/>
               </a:rPr>
-              <a:t>In public health practice, de-identification must be interpreted.</a:t>
-            </a:r>
-            <a:endParaRPr lang="en-US" sz="1220" dirty="0"/>
-          </a:p>
-          <a:p>
-            <a:pPr indent="0" marL="0">
-              <a:buNone/>
-            </a:pPr>
-            <a:r>
-              <a:rPr lang="en-US" sz="1220" dirty="0">
+              <a:t>In public health practice, de-identification must.</a:t>
+            </a:r>
+            <a:endParaRPr lang="en-US" sz="1140" dirty="0"/>
+          </a:p>
+          <a:p>
+            <a:pPr indent="0" marL="0">
+              <a:buNone/>
+            </a:pPr>
+            <a:r>
+              <a:rPr lang="en-US" sz="1140" dirty="0">
                 <a:solidFill>
                   <a:srgbClr val="17364A"/>
                 </a:solidFill>
@@ -3815,16 +3815,16 @@
                 <a:ea typeface="Aptos" pitchFamily="34" charset="-122"/>
                 <a:cs typeface="Aptos" pitchFamily="34" charset="-120"/>
               </a:rPr>
-              <a:t>Re-identification risk is the possibility that a person,.</a:t>
-            </a:r>
-            <a:endParaRPr lang="en-US" sz="1220" dirty="0"/>
-          </a:p>
-          <a:p>
-            <a:pPr indent="0" marL="0">
-              <a:buNone/>
-            </a:pPr>
-            <a:r>
-              <a:rPr lang="en-US" sz="1220" dirty="0">
+              <a:t>Re-identification risk is the possibility that a.</a:t>
+            </a:r>
+            <a:endParaRPr lang="en-US" sz="1140" dirty="0"/>
+          </a:p>
+          <a:p>
+            <a:pPr indent="0" marL="0">
+              <a:buNone/>
+            </a:pPr>
+            <a:r>
+              <a:rPr lang="en-US" sz="1140" dirty="0">
                 <a:solidFill>
                   <a:srgbClr val="17364A"/>
                 </a:solidFill>
@@ -3832,9 +3832,9 @@
                 <a:ea typeface="Aptos" pitchFamily="34" charset="-122"/>
                 <a:cs typeface="Aptos" pitchFamily="34" charset="-120"/>
               </a:rPr>
-              <a:t>AI can increase this risk by making patterns easier to discover,.</a:t>
-            </a:r>
-            <a:endParaRPr lang="en-US" sz="1220" dirty="0"/>
+              <a:t>AI can increase this risk by making patterns.</a:t>
+            </a:r>
+            <a:endParaRPr lang="en-US" sz="1140" dirty="0"/>
           </a:p>
         </p:txBody>
       </p:sp>
@@ -3846,12 +3846,12 @@
         </p:nvSpPr>
         <p:spPr>
           <a:xfrm>
-            <a:off x="7635240" y="4391863"/>
-            <a:ext cx="3474720" cy="1255471"/>
+            <a:off x="7543800" y="4389120"/>
+            <a:ext cx="3611880" cy="1261872"/>
           </a:xfrm>
           <a:prstGeom prst="roundRect">
             <a:avLst>
-              <a:gd name="adj" fmla="val 8740"/>
+              <a:gd name="adj" fmla="val 8696"/>
             </a:avLst>
           </a:prstGeom>
           <a:solidFill>
@@ -3873,8 +3873,8 @@
         </p:nvSpPr>
         <p:spPr>
           <a:xfrm>
-            <a:off x="7799832" y="4538167"/>
-            <a:ext cx="3145536" cy="256032"/>
+            <a:off x="7708392" y="4517136"/>
+            <a:ext cx="3282696" cy="228600"/>
           </a:xfrm>
           <a:prstGeom prst="rect">
             <a:avLst/>
@@ -3890,7 +3890,7 @@
               <a:buNone/>
             </a:pPr>
             <a:r>
-              <a:rPr lang="en-US" sz="1300" b="1" dirty="0">
+              <a:rPr lang="en-US" sz="1220" b="1" dirty="0">
                 <a:solidFill>
                   <a:srgbClr val="0068B7"/>
                 </a:solidFill>
@@ -3900,7 +3900,7 @@
               </a:rPr>
               <a:t>Safeguard to plan</a:t>
             </a:r>
-            <a:endParaRPr lang="en-US" sz="1300" dirty="0"/>
+            <a:endParaRPr lang="en-US" sz="1220" dirty="0"/>
           </a:p>
         </p:txBody>
       </p:sp>
@@ -3912,8 +3912,8 @@
         </p:nvSpPr>
         <p:spPr>
           <a:xfrm>
-            <a:off x="7799832" y="4867351"/>
-            <a:ext cx="3145536" cy="688543"/>
+            <a:off x="7708392" y="4828032"/>
+            <a:ext cx="3282696" cy="749808"/>
           </a:xfrm>
           <a:prstGeom prst="rect">
             <a:avLst/>
@@ -3931,7 +3931,7 @@
               <a:buNone/>
             </a:pPr>
             <a:r>
-              <a:rPr lang="en-US" sz="1320" dirty="0">
+              <a:rPr lang="en-US" sz="1220" dirty="0">
                 <a:solidFill>
                   <a:srgbClr val="17364A"/>
                 </a:solidFill>
@@ -3939,9 +3939,9 @@
                 <a:ea typeface="Aptos" pitchFamily="34" charset="-122"/>
                 <a:cs typeface="Aptos" pitchFamily="34" charset="-120"/>
               </a:rPr>
-              <a:t>Identify what could go wrong, who could be affected, what safeguards are needed, and what evidence should be reviewed before use.</a:t>
-            </a:r>
-            <a:endParaRPr lang="en-US" sz="1320" dirty="0"/>
+              <a:t>Identify what could go wrong, who could be affected, what safeguards are needed,.</a:t>
+            </a:r>
+            <a:endParaRPr lang="en-US" sz="1220" dirty="0"/>
           </a:p>
         </p:txBody>
       </p:sp>
@@ -4232,8 +4232,8 @@
         </p:nvSpPr>
         <p:spPr>
           <a:xfrm>
-            <a:off x="868680" y="1508760"/>
-            <a:ext cx="6309360" cy="4160520"/>
+            <a:off x="822960" y="1463040"/>
+            <a:ext cx="6565392" cy="4343400"/>
           </a:xfrm>
           <a:prstGeom prst="rect">
             <a:avLst/>
@@ -4251,7 +4251,7 @@
               <a:buNone/>
             </a:pPr>
             <a:r>
-              <a:rPr lang="en-US" sz="2100" dirty="0">
+              <a:rPr lang="en-US" sz="1920" dirty="0">
                 <a:solidFill>
                   <a:srgbClr val="003A63"/>
                 </a:solidFill>
@@ -4259,16 +4259,16 @@
                 <a:ea typeface="Aptos" pitchFamily="34" charset="-122"/>
                 <a:cs typeface="Aptos" pitchFamily="34" charset="-120"/>
               </a:rPr>
-              <a:t>• Differential privacy is a statistical approach that adds carefully calibrated noise to outputs.</a:t>
-            </a:r>
-            <a:endParaRPr lang="en-US" sz="2100" dirty="0"/>
-          </a:p>
-          <a:p>
-            <a:pPr indent="0" marL="0">
-              <a:buNone/>
-            </a:pPr>
-            <a:r>
-              <a:rPr lang="en-US" sz="2100" dirty="0">
+              <a:t>• Differential privacy is a statistical approach that adds carefully.</a:t>
+            </a:r>
+            <a:endParaRPr lang="en-US" sz="1920" dirty="0"/>
+          </a:p>
+          <a:p>
+            <a:pPr indent="0" marL="0">
+              <a:buNone/>
+            </a:pPr>
+            <a:r>
+              <a:rPr lang="en-US" sz="1920" dirty="0">
                 <a:solidFill>
                   <a:srgbClr val="003A63"/>
                 </a:solidFill>
@@ -4276,16 +4276,16 @@
                 <a:ea typeface="Aptos" pitchFamily="34" charset="-122"/>
                 <a:cs typeface="Aptos" pitchFamily="34" charset="-120"/>
               </a:rPr>
-              <a:t>• It can be useful for public reporting or statistical release, but it does not solve all.</a:t>
-            </a:r>
-            <a:endParaRPr lang="en-US" sz="2100" dirty="0"/>
-          </a:p>
-          <a:p>
-            <a:pPr indent="0" marL="0">
-              <a:buNone/>
-            </a:pPr>
-            <a:r>
-              <a:rPr lang="en-US" sz="2100" dirty="0">
+              <a:t>• It can be useful for public reporting or statistical release, but it does.</a:t>
+            </a:r>
+            <a:endParaRPr lang="en-US" sz="1920" dirty="0"/>
+          </a:p>
+          <a:p>
+            <a:pPr indent="0" marL="0">
+              <a:buNone/>
+            </a:pPr>
+            <a:r>
+              <a:rPr lang="en-US" sz="1920" dirty="0">
                 <a:solidFill>
                   <a:srgbClr val="003A63"/>
                 </a:solidFill>
@@ -4293,9 +4293,9 @@
                 <a:ea typeface="Aptos" pitchFamily="34" charset="-122"/>
                 <a:cs typeface="Aptos" pitchFamily="34" charset="-120"/>
               </a:rPr>
-              <a:t>• Public health staff need to understand that differential privacy involves tradeoffs between.</a:t>
-            </a:r>
-            <a:endParaRPr lang="en-US" sz="2100" dirty="0"/>
+              <a:t>• Public health staff need to understand that differential privacy involves.</a:t>
+            </a:r>
+            <a:endParaRPr lang="en-US" sz="1920" dirty="0"/>
           </a:p>
         </p:txBody>
       </p:sp>
@@ -4307,12 +4307,12 @@
         </p:nvSpPr>
         <p:spPr>
           <a:xfrm>
-            <a:off x="7635240" y="1325880"/>
-            <a:ext cx="3474720" cy="1255471"/>
+            <a:off x="7543800" y="1325880"/>
+            <a:ext cx="3611880" cy="1261872"/>
           </a:xfrm>
           <a:prstGeom prst="roundRect">
             <a:avLst>
-              <a:gd name="adj" fmla="val 8740"/>
+              <a:gd name="adj" fmla="val 8696"/>
             </a:avLst>
           </a:prstGeom>
           <a:solidFill>
@@ -4334,8 +4334,8 @@
         </p:nvSpPr>
         <p:spPr>
           <a:xfrm>
-            <a:off x="7799832" y="1472184"/>
-            <a:ext cx="3145536" cy="256032"/>
+            <a:off x="7708392" y="1453896"/>
+            <a:ext cx="3282696" cy="228600"/>
           </a:xfrm>
           <a:prstGeom prst="rect">
             <a:avLst/>
@@ -4351,7 +4351,7 @@
               <a:buNone/>
             </a:pPr>
             <a:r>
-              <a:rPr lang="en-US" sz="1300" b="1" dirty="0">
+              <a:rPr lang="en-US" sz="1220" b="1" dirty="0">
                 <a:solidFill>
                   <a:srgbClr val="0068B7"/>
                 </a:solidFill>
@@ -4361,7 +4361,7 @@
               </a:rPr>
               <a:t>Risk check</a:t>
             </a:r>
-            <a:endParaRPr lang="en-US" sz="1300" dirty="0"/>
+            <a:endParaRPr lang="en-US" sz="1220" dirty="0"/>
           </a:p>
         </p:txBody>
       </p:sp>
@@ -4373,8 +4373,8 @@
         </p:nvSpPr>
         <p:spPr>
           <a:xfrm>
-            <a:off x="7799832" y="1801368"/>
-            <a:ext cx="3145536" cy="688543"/>
+            <a:off x="7708392" y="1764792"/>
+            <a:ext cx="3282696" cy="749808"/>
           </a:xfrm>
           <a:prstGeom prst="rect">
             <a:avLst/>
@@ -4392,7 +4392,7 @@
               <a:buNone/>
             </a:pPr>
             <a:r>
-              <a:rPr lang="en-US" sz="1320" dirty="0">
+              <a:rPr lang="en-US" sz="1220" dirty="0">
                 <a:solidFill>
                   <a:srgbClr val="17364A"/>
                 </a:solidFill>
@@ -4400,9 +4400,9 @@
                 <a:ea typeface="Aptos" pitchFamily="34" charset="-122"/>
                 <a:cs typeface="Aptos" pitchFamily="34" charset="-120"/>
               </a:rPr>
-              <a:t>Differential privacy is a statistical approach that adds carefully calibrated noise to outputs to.</a:t>
-            </a:r>
-            <a:endParaRPr lang="en-US" sz="1320" dirty="0"/>
+              <a:t>Differential privacy is a statistical approach that adds carefully calibrated.</a:t>
+            </a:r>
+            <a:endParaRPr lang="en-US" sz="1220" dirty="0"/>
           </a:p>
         </p:txBody>
       </p:sp>
@@ -4414,12 +4414,12 @@
         </p:nvSpPr>
         <p:spPr>
           <a:xfrm>
-            <a:off x="7635240" y="2718511"/>
-            <a:ext cx="3474720" cy="1536192"/>
+            <a:off x="7543800" y="2724912"/>
+            <a:ext cx="3611880" cy="1527048"/>
           </a:xfrm>
           <a:prstGeom prst="roundRect">
             <a:avLst>
-              <a:gd name="adj" fmla="val 7143"/>
+              <a:gd name="adj" fmla="val 7186"/>
             </a:avLst>
           </a:prstGeom>
           <a:solidFill>
@@ -4441,8 +4441,8 @@
         </p:nvSpPr>
         <p:spPr>
           <a:xfrm>
-            <a:off x="7799832" y="2864815"/>
-            <a:ext cx="3145536" cy="256032"/>
+            <a:off x="7708392" y="2852928"/>
+            <a:ext cx="3282696" cy="228600"/>
           </a:xfrm>
           <a:prstGeom prst="rect">
             <a:avLst/>
@@ -4458,7 +4458,7 @@
               <a:buNone/>
             </a:pPr>
             <a:r>
-              <a:rPr lang="en-US" sz="1300" b="1" dirty="0">
+              <a:rPr lang="en-US" sz="1220" b="1" dirty="0">
                 <a:solidFill>
                   <a:srgbClr val="0068B7"/>
                 </a:solidFill>
@@ -4468,7 +4468,7 @@
               </a:rPr>
               <a:t>Concept checkpoints</a:t>
             </a:r>
-            <a:endParaRPr lang="en-US" sz="1300" dirty="0"/>
+            <a:endParaRPr lang="en-US" sz="1220" dirty="0"/>
           </a:p>
         </p:txBody>
       </p:sp>
@@ -4480,8 +4480,8 @@
         </p:nvSpPr>
         <p:spPr>
           <a:xfrm>
-            <a:off x="7818120" y="3230575"/>
-            <a:ext cx="3090672" cy="877824"/>
+            <a:off x="7726680" y="3182112"/>
+            <a:ext cx="3227832" cy="960120"/>
           </a:xfrm>
           <a:prstGeom prst="rect">
             <a:avLst/>
@@ -4499,7 +4499,7 @@
               <a:buNone/>
             </a:pPr>
             <a:r>
-              <a:rPr lang="en-US" sz="1220" dirty="0">
+              <a:rPr lang="en-US" sz="1140" dirty="0">
                 <a:solidFill>
                   <a:srgbClr val="17364A"/>
                 </a:solidFill>
@@ -4507,16 +4507,16 @@
                 <a:ea typeface="Aptos" pitchFamily="34" charset="-122"/>
                 <a:cs typeface="Aptos" pitchFamily="34" charset="-120"/>
               </a:rPr>
-              <a:t>Differential privacy is a statistical approach that adds carefully.</a:t>
-            </a:r>
-            <a:endParaRPr lang="en-US" sz="1220" dirty="0"/>
-          </a:p>
-          <a:p>
-            <a:pPr indent="0" marL="0">
-              <a:buNone/>
-            </a:pPr>
-            <a:r>
-              <a:rPr lang="en-US" sz="1220" dirty="0">
+              <a:t>Differential privacy is a statistical approach.</a:t>
+            </a:r>
+            <a:endParaRPr lang="en-US" sz="1140" dirty="0"/>
+          </a:p>
+          <a:p>
+            <a:pPr indent="0" marL="0">
+              <a:buNone/>
+            </a:pPr>
+            <a:r>
+              <a:rPr lang="en-US" sz="1140" dirty="0">
                 <a:solidFill>
                   <a:srgbClr val="17364A"/>
                 </a:solidFill>
@@ -4524,9 +4524,9 @@
                 <a:ea typeface="Aptos" pitchFamily="34" charset="-122"/>
                 <a:cs typeface="Aptos" pitchFamily="34" charset="-120"/>
               </a:rPr>
-              <a:t>Public health staff need to understand that differential privacy.</a:t>
-            </a:r>
-            <a:endParaRPr lang="en-US" sz="1220" dirty="0"/>
+              <a:t>Public health staff need to understand that.</a:t>
+            </a:r>
+            <a:endParaRPr lang="en-US" sz="1140" dirty="0"/>
           </a:p>
         </p:txBody>
       </p:sp>
@@ -4538,12 +4538,12 @@
         </p:nvSpPr>
         <p:spPr>
           <a:xfrm>
-            <a:off x="7635240" y="4391863"/>
-            <a:ext cx="3474720" cy="1255471"/>
+            <a:off x="7543800" y="4389120"/>
+            <a:ext cx="3611880" cy="1261872"/>
           </a:xfrm>
           <a:prstGeom prst="roundRect">
             <a:avLst>
-              <a:gd name="adj" fmla="val 8740"/>
+              <a:gd name="adj" fmla="val 8696"/>
             </a:avLst>
           </a:prstGeom>
           <a:solidFill>
@@ -4565,8 +4565,8 @@
         </p:nvSpPr>
         <p:spPr>
           <a:xfrm>
-            <a:off x="7799832" y="4538167"/>
-            <a:ext cx="3145536" cy="256032"/>
+            <a:off x="7708392" y="4517136"/>
+            <a:ext cx="3282696" cy="228600"/>
           </a:xfrm>
           <a:prstGeom prst="rect">
             <a:avLst/>
@@ -4582,7 +4582,7 @@
               <a:buNone/>
             </a:pPr>
             <a:r>
-              <a:rPr lang="en-US" sz="1300" b="1" dirty="0">
+              <a:rPr lang="en-US" sz="1220" b="1" dirty="0">
                 <a:solidFill>
                   <a:srgbClr val="0068B7"/>
                 </a:solidFill>
@@ -4592,7 +4592,7 @@
               </a:rPr>
               <a:t>Safeguard to plan</a:t>
             </a:r>
-            <a:endParaRPr lang="en-US" sz="1300" dirty="0"/>
+            <a:endParaRPr lang="en-US" sz="1220" dirty="0"/>
           </a:p>
         </p:txBody>
       </p:sp>
@@ -4604,8 +4604,8 @@
         </p:nvSpPr>
         <p:spPr>
           <a:xfrm>
-            <a:off x="7799832" y="4867351"/>
-            <a:ext cx="3145536" cy="688543"/>
+            <a:off x="7708392" y="4828032"/>
+            <a:ext cx="3282696" cy="749808"/>
           </a:xfrm>
           <a:prstGeom prst="rect">
             <a:avLst/>
@@ -4623,7 +4623,7 @@
               <a:buNone/>
             </a:pPr>
             <a:r>
-              <a:rPr lang="en-US" sz="1320" dirty="0">
+              <a:rPr lang="en-US" sz="1220" dirty="0">
                 <a:solidFill>
                   <a:srgbClr val="17364A"/>
                 </a:solidFill>
@@ -4631,9 +4631,9 @@
                 <a:ea typeface="Aptos" pitchFamily="34" charset="-122"/>
                 <a:cs typeface="Aptos" pitchFamily="34" charset="-120"/>
               </a:rPr>
-              <a:t>Identify what could go wrong, who could be affected, what safeguards are needed, and what evidence should be reviewed before use.</a:t>
-            </a:r>
-            <a:endParaRPr lang="en-US" sz="1320" dirty="0"/>
+              <a:t>Identify what could go wrong, who could be affected, what safeguards are needed,.</a:t>
+            </a:r>
+            <a:endParaRPr lang="en-US" sz="1220" dirty="0"/>
           </a:p>
         </p:txBody>
       </p:sp>
@@ -4924,8 +4924,8 @@
         </p:nvSpPr>
         <p:spPr>
           <a:xfrm>
-            <a:off x="868680" y="1508760"/>
-            <a:ext cx="6309360" cy="4160520"/>
+            <a:off x="822960" y="1463040"/>
+            <a:ext cx="6565392" cy="4343400"/>
           </a:xfrm>
           <a:prstGeom prst="rect">
             <a:avLst/>
@@ -4943,7 +4943,7 @@
               <a:buNone/>
             </a:pPr>
             <a:r>
-              <a:rPr lang="en-US" sz="2100" dirty="0">
+              <a:rPr lang="en-US" sz="1920" dirty="0">
                 <a:solidFill>
                   <a:srgbClr val="003A63"/>
                 </a:solidFill>
@@ -4951,16 +4951,16 @@
                 <a:ea typeface="Aptos" pitchFamily="34" charset="-122"/>
                 <a:cs typeface="Aptos" pitchFamily="34" charset="-120"/>
               </a:rPr>
-              <a:t>• Consider a health department that wants to use AI to summarize disease investigation notes and.</a:t>
-            </a:r>
-            <a:endParaRPr lang="en-US" sz="2100" dirty="0"/>
-          </a:p>
-          <a:p>
-            <a:pPr indent="0" marL="0">
-              <a:buNone/>
-            </a:pPr>
-            <a:r>
-              <a:rPr lang="en-US" sz="2100" dirty="0">
+              <a:t>• Consider a health department that wants to use AI to summarize disease.</a:t>
+            </a:r>
+            <a:endParaRPr lang="en-US" sz="1920" dirty="0"/>
+          </a:p>
+          <a:p>
+            <a:pPr indent="0" marL="0">
+              <a:buNone/>
+            </a:pPr>
+            <a:r>
+              <a:rPr lang="en-US" sz="1920" dirty="0">
                 <a:solidFill>
                   <a:srgbClr val="003A63"/>
                 </a:solidFill>
@@ -4968,16 +4968,16 @@
                 <a:ea typeface="Aptos" pitchFamily="34" charset="-122"/>
                 <a:cs typeface="Aptos" pitchFamily="34" charset="-120"/>
               </a:rPr>
-              <a:t>• The notes may include symptoms, dates, employer names, schools, shelters, correctional.</a:t>
-            </a:r>
-            <a:endParaRPr lang="en-US" sz="2100" dirty="0"/>
-          </a:p>
-          <a:p>
-            <a:pPr indent="0" marL="0">
-              <a:buNone/>
-            </a:pPr>
-            <a:r>
-              <a:rPr lang="en-US" sz="2100" dirty="0">
+              <a:t>• The notes may include symptoms, dates, employer names, schools, shelters,.</a:t>
+            </a:r>
+            <a:endParaRPr lang="en-US" sz="1920" dirty="0"/>
+          </a:p>
+          <a:p>
+            <a:pPr indent="0" marL="0">
+              <a:buNone/>
+            </a:pPr>
+            <a:r>
+              <a:rPr lang="en-US" sz="1920" dirty="0">
                 <a:solidFill>
                   <a:srgbClr val="003A63"/>
                 </a:solidFill>
@@ -4985,9 +4985,9 @@
                 <a:ea typeface="Aptos" pitchFamily="34" charset="-122"/>
                 <a:cs typeface="Aptos" pitchFamily="34" charset="-120"/>
               </a:rPr>
-              <a:t>• Even if the AI system is internal, the agency must define who can access the notes, whether.</a:t>
-            </a:r>
-            <a:endParaRPr lang="en-US" sz="2100" dirty="0"/>
+              <a:t>• Even if the AI system is internal, the agency must define who can access the.</a:t>
+            </a:r>
+            <a:endParaRPr lang="en-US" sz="1920" dirty="0"/>
           </a:p>
         </p:txBody>
       </p:sp>
@@ -4999,12 +4999,12 @@
         </p:nvSpPr>
         <p:spPr>
           <a:xfrm>
-            <a:off x="7635240" y="1325880"/>
-            <a:ext cx="3474720" cy="1255471"/>
+            <a:off x="7543800" y="1325880"/>
+            <a:ext cx="3611880" cy="1261872"/>
           </a:xfrm>
           <a:prstGeom prst="roundRect">
             <a:avLst>
-              <a:gd name="adj" fmla="val 8740"/>
+              <a:gd name="adj" fmla="val 8696"/>
             </a:avLst>
           </a:prstGeom>
           <a:solidFill>
@@ -5026,8 +5026,8 @@
         </p:nvSpPr>
         <p:spPr>
           <a:xfrm>
-            <a:off x="7799832" y="1472184"/>
-            <a:ext cx="3145536" cy="256032"/>
+            <a:off x="7708392" y="1453896"/>
+            <a:ext cx="3282696" cy="228600"/>
           </a:xfrm>
           <a:prstGeom prst="rect">
             <a:avLst/>
@@ -5043,7 +5043,7 @@
               <a:buNone/>
             </a:pPr>
             <a:r>
-              <a:rPr lang="en-US" sz="1300" b="1" dirty="0">
+              <a:rPr lang="en-US" sz="1220" b="1" dirty="0">
                 <a:solidFill>
                   <a:srgbClr val="0068B7"/>
                 </a:solidFill>
@@ -5053,7 +5053,7 @@
               </a:rPr>
               <a:t>Risk check</a:t>
             </a:r>
-            <a:endParaRPr lang="en-US" sz="1300" dirty="0"/>
+            <a:endParaRPr lang="en-US" sz="1220" dirty="0"/>
           </a:p>
         </p:txBody>
       </p:sp>
@@ -5065,8 +5065,8 @@
         </p:nvSpPr>
         <p:spPr>
           <a:xfrm>
-            <a:off x="7799832" y="1801368"/>
-            <a:ext cx="3145536" cy="688543"/>
+            <a:off x="7708392" y="1764792"/>
+            <a:ext cx="3282696" cy="749808"/>
           </a:xfrm>
           <a:prstGeom prst="rect">
             <a:avLst/>
@@ -5084,7 +5084,7 @@
               <a:buNone/>
             </a:pPr>
             <a:r>
-              <a:rPr lang="en-US" sz="1320" dirty="0">
+              <a:rPr lang="en-US" sz="1220" dirty="0">
                 <a:solidFill>
                   <a:srgbClr val="17364A"/>
                 </a:solidFill>
@@ -5092,9 +5092,9 @@
                 <a:ea typeface="Aptos" pitchFamily="34" charset="-122"/>
                 <a:cs typeface="Aptos" pitchFamily="34" charset="-120"/>
               </a:rPr>
-              <a:t>Consider a health department that wants to use AI to summarize disease investigation notes and identify.</a:t>
-            </a:r>
-            <a:endParaRPr lang="en-US" sz="1320" dirty="0"/>
+              <a:t>Consider a health department that wants to use AI to summarize disease.</a:t>
+            </a:r>
+            <a:endParaRPr lang="en-US" sz="1220" dirty="0"/>
           </a:p>
         </p:txBody>
       </p:sp>
@@ -5106,12 +5106,12 @@
         </p:nvSpPr>
         <p:spPr>
           <a:xfrm>
-            <a:off x="7635240" y="2718511"/>
-            <a:ext cx="3474720" cy="1536192"/>
+            <a:off x="7543800" y="2724912"/>
+            <a:ext cx="3611880" cy="1527048"/>
           </a:xfrm>
           <a:prstGeom prst="roundRect">
             <a:avLst>
-              <a:gd name="adj" fmla="val 7143"/>
+              <a:gd name="adj" fmla="val 7186"/>
             </a:avLst>
           </a:prstGeom>
           <a:solidFill>
@@ -5133,8 +5133,8 @@
         </p:nvSpPr>
         <p:spPr>
           <a:xfrm>
-            <a:off x="7799832" y="2864815"/>
-            <a:ext cx="3145536" cy="256032"/>
+            <a:off x="7708392" y="2852928"/>
+            <a:ext cx="3282696" cy="228600"/>
           </a:xfrm>
           <a:prstGeom prst="rect">
             <a:avLst/>
@@ -5150,7 +5150,7 @@
               <a:buNone/>
             </a:pPr>
             <a:r>
-              <a:rPr lang="en-US" sz="1300" b="1" dirty="0">
+              <a:rPr lang="en-US" sz="1220" b="1" dirty="0">
                 <a:solidFill>
                   <a:srgbClr val="0068B7"/>
                 </a:solidFill>
@@ -5160,7 +5160,7 @@
               </a:rPr>
               <a:t>Concept checkpoints</a:t>
             </a:r>
-            <a:endParaRPr lang="en-US" sz="1300" dirty="0"/>
+            <a:endParaRPr lang="en-US" sz="1220" dirty="0"/>
           </a:p>
         </p:txBody>
       </p:sp>
@@ -5172,8 +5172,8 @@
         </p:nvSpPr>
         <p:spPr>
           <a:xfrm>
-            <a:off x="7818120" y="3230575"/>
-            <a:ext cx="3090672" cy="877824"/>
+            <a:off x="7726680" y="3182112"/>
+            <a:ext cx="3227832" cy="960120"/>
           </a:xfrm>
           <a:prstGeom prst="rect">
             <a:avLst/>
@@ -5191,7 +5191,7 @@
               <a:buNone/>
             </a:pPr>
             <a:r>
-              <a:rPr lang="en-US" sz="1220" dirty="0">
+              <a:rPr lang="en-US" sz="1140" dirty="0">
                 <a:solidFill>
                   <a:srgbClr val="17364A"/>
                 </a:solidFill>
@@ -5199,16 +5199,16 @@
                 <a:ea typeface="Aptos" pitchFamily="34" charset="-122"/>
                 <a:cs typeface="Aptos" pitchFamily="34" charset="-120"/>
               </a:rPr>
-              <a:t>Consider a health department that wants to use AI to summarize.</a:t>
-            </a:r>
-            <a:endParaRPr lang="en-US" sz="1220" dirty="0"/>
-          </a:p>
-          <a:p>
-            <a:pPr indent="0" marL="0">
-              <a:buNone/>
-            </a:pPr>
-            <a:r>
-              <a:rPr lang="en-US" sz="1220" dirty="0">
+              <a:t>Consider a health department that wants to use AI.</a:t>
+            </a:r>
+            <a:endParaRPr lang="en-US" sz="1140" dirty="0"/>
+          </a:p>
+          <a:p>
+            <a:pPr indent="0" marL="0">
+              <a:buNone/>
+            </a:pPr>
+            <a:r>
+              <a:rPr lang="en-US" sz="1140" dirty="0">
                 <a:solidFill>
                   <a:srgbClr val="17364A"/>
                 </a:solidFill>
@@ -5216,16 +5216,16 @@
                 <a:ea typeface="Aptos" pitchFamily="34" charset="-122"/>
                 <a:cs typeface="Aptos" pitchFamily="34" charset="-120"/>
               </a:rPr>
-              <a:t>The notes may include symptoms, dates, employer names, schools,.</a:t>
-            </a:r>
-            <a:endParaRPr lang="en-US" sz="1220" dirty="0"/>
-          </a:p>
-          <a:p>
-            <a:pPr indent="0" marL="0">
-              <a:buNone/>
-            </a:pPr>
-            <a:r>
-              <a:rPr lang="en-US" sz="1220" dirty="0">
+              <a:t>The notes may include symptoms, dates, employer.</a:t>
+            </a:r>
+            <a:endParaRPr lang="en-US" sz="1140" dirty="0"/>
+          </a:p>
+          <a:p>
+            <a:pPr indent="0" marL="0">
+              <a:buNone/>
+            </a:pPr>
+            <a:r>
+              <a:rPr lang="en-US" sz="1140" dirty="0">
                 <a:solidFill>
                   <a:srgbClr val="17364A"/>
                 </a:solidFill>
@@ -5233,9 +5233,9 @@
                 <a:ea typeface="Aptos" pitchFamily="34" charset="-122"/>
                 <a:cs typeface="Aptos" pitchFamily="34" charset="-120"/>
               </a:rPr>
-              <a:t>Even if the AI system is internal, the agency must define who can.</a:t>
-            </a:r>
-            <a:endParaRPr lang="en-US" sz="1220" dirty="0"/>
+              <a:t>Even if the AI system is internal, the agency must.</a:t>
+            </a:r>
+            <a:endParaRPr lang="en-US" sz="1140" dirty="0"/>
           </a:p>
         </p:txBody>
       </p:sp>
@@ -5247,12 +5247,12 @@
         </p:nvSpPr>
         <p:spPr>
           <a:xfrm>
-            <a:off x="7635240" y="4391863"/>
-            <a:ext cx="3474720" cy="1255471"/>
+            <a:off x="7543800" y="4389120"/>
+            <a:ext cx="3611880" cy="1261872"/>
           </a:xfrm>
           <a:prstGeom prst="roundRect">
             <a:avLst>
-              <a:gd name="adj" fmla="val 8740"/>
+              <a:gd name="adj" fmla="val 8696"/>
             </a:avLst>
           </a:prstGeom>
           <a:solidFill>
@@ -5274,8 +5274,8 @@
         </p:nvSpPr>
         <p:spPr>
           <a:xfrm>
-            <a:off x="7799832" y="4538167"/>
-            <a:ext cx="3145536" cy="256032"/>
+            <a:off x="7708392" y="4517136"/>
+            <a:ext cx="3282696" cy="228600"/>
           </a:xfrm>
           <a:prstGeom prst="rect">
             <a:avLst/>
@@ -5291,7 +5291,7 @@
               <a:buNone/>
             </a:pPr>
             <a:r>
-              <a:rPr lang="en-US" sz="1300" b="1" dirty="0">
+              <a:rPr lang="en-US" sz="1220" b="1" dirty="0">
                 <a:solidFill>
                   <a:srgbClr val="0068B7"/>
                 </a:solidFill>
@@ -5301,7 +5301,7 @@
               </a:rPr>
               <a:t>Safeguard to plan</a:t>
             </a:r>
-            <a:endParaRPr lang="en-US" sz="1300" dirty="0"/>
+            <a:endParaRPr lang="en-US" sz="1220" dirty="0"/>
           </a:p>
         </p:txBody>
       </p:sp>
@@ -5313,8 +5313,8 @@
         </p:nvSpPr>
         <p:spPr>
           <a:xfrm>
-            <a:off x="7799832" y="4867351"/>
-            <a:ext cx="3145536" cy="688543"/>
+            <a:off x="7708392" y="4828032"/>
+            <a:ext cx="3282696" cy="749808"/>
           </a:xfrm>
           <a:prstGeom prst="rect">
             <a:avLst/>
@@ -5332,7 +5332,7 @@
               <a:buNone/>
             </a:pPr>
             <a:r>
-              <a:rPr lang="en-US" sz="1320" dirty="0">
+              <a:rPr lang="en-US" sz="1220" dirty="0">
                 <a:solidFill>
                   <a:srgbClr val="17364A"/>
                 </a:solidFill>
@@ -5340,9 +5340,9 @@
                 <a:ea typeface="Aptos" pitchFamily="34" charset="-122"/>
                 <a:cs typeface="Aptos" pitchFamily="34" charset="-120"/>
               </a:rPr>
-              <a:t>Identify what could go wrong, who could be affected, what safeguards are needed, and what evidence should be reviewed before use.</a:t>
-            </a:r>
-            <a:endParaRPr lang="en-US" sz="1320" dirty="0"/>
+              <a:t>Identify what could go wrong, who could be affected, what safeguards are needed,.</a:t>
+            </a:r>
+            <a:endParaRPr lang="en-US" sz="1220" dirty="0"/>
           </a:p>
         </p:txBody>
       </p:sp>
@@ -5633,8 +5633,8 @@
         </p:nvSpPr>
         <p:spPr>
           <a:xfrm>
-            <a:off x="868680" y="1508760"/>
-            <a:ext cx="6309360" cy="4160520"/>
+            <a:off x="822960" y="1463040"/>
+            <a:ext cx="6565392" cy="4343400"/>
           </a:xfrm>
           <a:prstGeom prst="rect">
             <a:avLst/>
@@ -5652,7 +5652,7 @@
               <a:buNone/>
             </a:pPr>
             <a:r>
-              <a:rPr lang="en-US" sz="2100" dirty="0">
+              <a:rPr lang="en-US" sz="1920" dirty="0">
                 <a:solidFill>
                   <a:srgbClr val="003A63"/>
                 </a:solidFill>
@@ -5662,14 +5662,14 @@
               </a:rPr>
               <a:t>• Privacy-preserving AI begins with data classification.</a:t>
             </a:r>
-            <a:endParaRPr lang="en-US" sz="2100" dirty="0"/>
-          </a:p>
-          <a:p>
-            <a:pPr indent="0" marL="0">
-              <a:buNone/>
-            </a:pPr>
-            <a:r>
-              <a:rPr lang="en-US" sz="2100" dirty="0">
+            <a:endParaRPr lang="en-US" sz="1920" dirty="0"/>
+          </a:p>
+          <a:p>
+            <a:pPr indent="0" marL="0">
+              <a:buNone/>
+            </a:pPr>
+            <a:r>
+              <a:rPr lang="en-US" sz="1920" dirty="0">
                 <a:solidFill>
                   <a:srgbClr val="003A63"/>
                 </a:solidFill>
@@ -5677,16 +5677,16 @@
                 <a:ea typeface="Aptos" pitchFamily="34" charset="-122"/>
                 <a:cs typeface="Aptos" pitchFamily="34" charset="-120"/>
               </a:rPr>
-              <a:t>• Staff should identify whether the workflow uses protected health information, personally.</a:t>
-            </a:r>
-            <a:endParaRPr lang="en-US" sz="2100" dirty="0"/>
-          </a:p>
-          <a:p>
-            <a:pPr indent="0" marL="0">
-              <a:buNone/>
-            </a:pPr>
-            <a:r>
-              <a:rPr lang="en-US" sz="2100" dirty="0">
+              <a:t>• Staff should identify whether the workflow uses protected health.</a:t>
+            </a:r>
+            <a:endParaRPr lang="en-US" sz="1920" dirty="0"/>
+          </a:p>
+          <a:p>
+            <a:pPr indent="0" marL="0">
+              <a:buNone/>
+            </a:pPr>
+            <a:r>
+              <a:rPr lang="en-US" sz="1920" dirty="0">
                 <a:solidFill>
                   <a:srgbClr val="003A63"/>
                 </a:solidFill>
@@ -5694,9 +5694,9 @@
                 <a:ea typeface="Aptos" pitchFamily="34" charset="-122"/>
                 <a:cs typeface="Aptos" pitchFamily="34" charset="-120"/>
               </a:rPr>
-              <a:t>• Classification should be tied to rules for storage, access, sharing, retention, and approved.</a:t>
-            </a:r>
-            <a:endParaRPr lang="en-US" sz="2100" dirty="0"/>
+              <a:t>• Classification should be tied to rules for storage, access, sharing,.</a:t>
+            </a:r>
+            <a:endParaRPr lang="en-US" sz="1920" dirty="0"/>
           </a:p>
         </p:txBody>
       </p:sp>
@@ -5708,12 +5708,12 @@
         </p:nvSpPr>
         <p:spPr>
           <a:xfrm>
-            <a:off x="7635240" y="1325880"/>
-            <a:ext cx="3474720" cy="1207008"/>
+            <a:off x="7543800" y="1325880"/>
+            <a:ext cx="3611880" cy="1261872"/>
           </a:xfrm>
           <a:prstGeom prst="roundRect">
             <a:avLst>
-              <a:gd name="adj" fmla="val 9091"/>
+              <a:gd name="adj" fmla="val 8696"/>
             </a:avLst>
           </a:prstGeom>
           <a:solidFill>
@@ -5735,8 +5735,8 @@
         </p:nvSpPr>
         <p:spPr>
           <a:xfrm>
-            <a:off x="7799832" y="1472184"/>
-            <a:ext cx="3145536" cy="256032"/>
+            <a:off x="7708392" y="1453896"/>
+            <a:ext cx="3282696" cy="228600"/>
           </a:xfrm>
           <a:prstGeom prst="rect">
             <a:avLst/>
@@ -5752,7 +5752,7 @@
               <a:buNone/>
             </a:pPr>
             <a:r>
-              <a:rPr lang="en-US" sz="1300" b="1" dirty="0">
+              <a:rPr lang="en-US" sz="1220" b="1" dirty="0">
                 <a:solidFill>
                   <a:srgbClr val="0068B7"/>
                 </a:solidFill>
@@ -5762,7 +5762,7 @@
               </a:rPr>
               <a:t>Risk check</a:t>
             </a:r>
-            <a:endParaRPr lang="en-US" sz="1300" dirty="0"/>
+            <a:endParaRPr lang="en-US" sz="1220" dirty="0"/>
           </a:p>
         </p:txBody>
       </p:sp>
@@ -5774,8 +5774,8 @@
         </p:nvSpPr>
         <p:spPr>
           <a:xfrm>
-            <a:off x="7799832" y="1801368"/>
-            <a:ext cx="3145536" cy="640080"/>
+            <a:off x="7708392" y="1764792"/>
+            <a:ext cx="3282696" cy="749808"/>
           </a:xfrm>
           <a:prstGeom prst="rect">
             <a:avLst/>
@@ -5793,7 +5793,7 @@
               <a:buNone/>
             </a:pPr>
             <a:r>
-              <a:rPr lang="en-US" sz="1320" dirty="0">
+              <a:rPr lang="en-US" sz="1220" dirty="0">
                 <a:solidFill>
                   <a:srgbClr val="17364A"/>
                 </a:solidFill>
@@ -5803,7 +5803,7 @@
               </a:rPr>
               <a:t>Privacy-preserving AI begins with data classification.</a:t>
             </a:r>
-            <a:endParaRPr lang="en-US" sz="1320" dirty="0"/>
+            <a:endParaRPr lang="en-US" sz="1220" dirty="0"/>
           </a:p>
         </p:txBody>
       </p:sp>
@@ -5815,12 +5815,12 @@
         </p:nvSpPr>
         <p:spPr>
           <a:xfrm>
-            <a:off x="7635240" y="2670048"/>
-            <a:ext cx="3474720" cy="1536192"/>
+            <a:off x="7543800" y="2724912"/>
+            <a:ext cx="3611880" cy="1527048"/>
           </a:xfrm>
           <a:prstGeom prst="roundRect">
             <a:avLst>
-              <a:gd name="adj" fmla="val 7143"/>
+              <a:gd name="adj" fmla="val 7186"/>
             </a:avLst>
           </a:prstGeom>
           <a:solidFill>
@@ -5842,8 +5842,8 @@
         </p:nvSpPr>
         <p:spPr>
           <a:xfrm>
-            <a:off x="7799832" y="2816352"/>
-            <a:ext cx="3145536" cy="256032"/>
+            <a:off x="7708392" y="2852928"/>
+            <a:ext cx="3282696" cy="228600"/>
           </a:xfrm>
           <a:prstGeom prst="rect">
             <a:avLst/>
@@ -5859,7 +5859,7 @@
               <a:buNone/>
             </a:pPr>
             <a:r>
-              <a:rPr lang="en-US" sz="1300" b="1" dirty="0">
+              <a:rPr lang="en-US" sz="1220" b="1" dirty="0">
                 <a:solidFill>
                   <a:srgbClr val="0068B7"/>
                 </a:solidFill>
@@ -5869,7 +5869,7 @@
               </a:rPr>
               <a:t>Concept checkpoints</a:t>
             </a:r>
-            <a:endParaRPr lang="en-US" sz="1300" dirty="0"/>
+            <a:endParaRPr lang="en-US" sz="1220" dirty="0"/>
           </a:p>
         </p:txBody>
       </p:sp>
@@ -5881,8 +5881,8 @@
         </p:nvSpPr>
         <p:spPr>
           <a:xfrm>
-            <a:off x="7818120" y="3182112"/>
-            <a:ext cx="3090672" cy="877824"/>
+            <a:off x="7726680" y="3182112"/>
+            <a:ext cx="3227832" cy="960120"/>
           </a:xfrm>
           <a:prstGeom prst="rect">
             <a:avLst/>
@@ -5900,7 +5900,7 @@
               <a:buNone/>
             </a:pPr>
             <a:r>
-              <a:rPr lang="en-US" sz="1220" dirty="0">
+              <a:rPr lang="en-US" sz="1140" dirty="0">
                 <a:solidFill>
                   <a:srgbClr val="17364A"/>
                 </a:solidFill>
@@ -5908,16 +5908,16 @@
                 <a:ea typeface="Aptos" pitchFamily="34" charset="-122"/>
                 <a:cs typeface="Aptos" pitchFamily="34" charset="-120"/>
               </a:rPr>
-              <a:t>Staff should identify whether the workflow uses protected health.</a:t>
-            </a:r>
-            <a:endParaRPr lang="en-US" sz="1220" dirty="0"/>
-          </a:p>
-          <a:p>
-            <a:pPr indent="0" marL="0">
-              <a:buNone/>
-            </a:pPr>
-            <a:r>
-              <a:rPr lang="en-US" sz="1220" dirty="0">
+              <a:t>Staff should identify whether the workflow uses.</a:t>
+            </a:r>
+            <a:endParaRPr lang="en-US" sz="1140" dirty="0"/>
+          </a:p>
+          <a:p>
+            <a:pPr indent="0" marL="0">
+              <a:buNone/>
+            </a:pPr>
+            <a:r>
+              <a:rPr lang="en-US" sz="1140" dirty="0">
                 <a:solidFill>
                   <a:srgbClr val="17364A"/>
                 </a:solidFill>
@@ -5925,16 +5925,16 @@
                 <a:ea typeface="Aptos" pitchFamily="34" charset="-122"/>
                 <a:cs typeface="Aptos" pitchFamily="34" charset="-120"/>
               </a:rPr>
-              <a:t>A public AI tool may be acceptable for public guidance documents.</a:t>
-            </a:r>
-            <a:endParaRPr lang="en-US" sz="1220" dirty="0"/>
-          </a:p>
-          <a:p>
-            <a:pPr indent="0" marL="0">
-              <a:buNone/>
-            </a:pPr>
-            <a:r>
-              <a:rPr lang="en-US" sz="1220" dirty="0">
+              <a:t>A public AI tool may be acceptable for public.</a:t>
+            </a:r>
+            <a:endParaRPr lang="en-US" sz="1140" dirty="0"/>
+          </a:p>
+          <a:p>
+            <a:pPr indent="0" marL="0">
+              <a:buNone/>
+            </a:pPr>
+            <a:r>
+              <a:rPr lang="en-US" sz="1140" dirty="0">
                 <a:solidFill>
                   <a:srgbClr val="17364A"/>
                 </a:solidFill>
@@ -5942,9 +5942,9 @@
                 <a:ea typeface="Aptos" pitchFamily="34" charset="-122"/>
                 <a:cs typeface="Aptos" pitchFamily="34" charset="-120"/>
               </a:rPr>
-              <a:t>The next step is determining the minimum necessary data for the AI.</a:t>
-            </a:r>
-            <a:endParaRPr lang="en-US" sz="1220" dirty="0"/>
+              <a:t>The next step is determining the minimum necessary.</a:t>
+            </a:r>
+            <a:endParaRPr lang="en-US" sz="1140" dirty="0"/>
           </a:p>
         </p:txBody>
       </p:sp>
@@ -5956,12 +5956,12 @@
         </p:nvSpPr>
         <p:spPr>
           <a:xfrm>
-            <a:off x="7635240" y="4343400"/>
-            <a:ext cx="3474720" cy="1255471"/>
+            <a:off x="7543800" y="4389120"/>
+            <a:ext cx="3611880" cy="1261872"/>
           </a:xfrm>
           <a:prstGeom prst="roundRect">
             <a:avLst>
-              <a:gd name="adj" fmla="val 8740"/>
+              <a:gd name="adj" fmla="val 8696"/>
             </a:avLst>
           </a:prstGeom>
           <a:solidFill>
@@ -5983,8 +5983,8 @@
         </p:nvSpPr>
         <p:spPr>
           <a:xfrm>
-            <a:off x="7799832" y="4489704"/>
-            <a:ext cx="3145536" cy="256032"/>
+            <a:off x="7708392" y="4517136"/>
+            <a:ext cx="3282696" cy="228600"/>
           </a:xfrm>
           <a:prstGeom prst="rect">
             <a:avLst/>
@@ -6000,7 +6000,7 @@
               <a:buNone/>
             </a:pPr>
             <a:r>
-              <a:rPr lang="en-US" sz="1300" b="1" dirty="0">
+              <a:rPr lang="en-US" sz="1220" b="1" dirty="0">
                 <a:solidFill>
                   <a:srgbClr val="0068B7"/>
                 </a:solidFill>
@@ -6010,7 +6010,7 @@
               </a:rPr>
               <a:t>Safeguard to plan</a:t>
             </a:r>
-            <a:endParaRPr lang="en-US" sz="1300" dirty="0"/>
+            <a:endParaRPr lang="en-US" sz="1220" dirty="0"/>
           </a:p>
         </p:txBody>
       </p:sp>
@@ -6022,8 +6022,8 @@
         </p:nvSpPr>
         <p:spPr>
           <a:xfrm>
-            <a:off x="7799832" y="4818888"/>
-            <a:ext cx="3145536" cy="688543"/>
+            <a:off x="7708392" y="4828032"/>
+            <a:ext cx="3282696" cy="749808"/>
           </a:xfrm>
           <a:prstGeom prst="rect">
             <a:avLst/>
@@ -6041,7 +6041,7 @@
               <a:buNone/>
             </a:pPr>
             <a:r>
-              <a:rPr lang="en-US" sz="1320" dirty="0">
+              <a:rPr lang="en-US" sz="1220" dirty="0">
                 <a:solidFill>
                   <a:srgbClr val="17364A"/>
                 </a:solidFill>
@@ -6049,9 +6049,9 @@
                 <a:ea typeface="Aptos" pitchFamily="34" charset="-122"/>
                 <a:cs typeface="Aptos" pitchFamily="34" charset="-120"/>
               </a:rPr>
-              <a:t>Identify what could go wrong, who could be affected, what safeguards are needed, and what evidence should be reviewed before use.</a:t>
-            </a:r>
-            <a:endParaRPr lang="en-US" sz="1320" dirty="0"/>
+              <a:t>Identify what could go wrong, who could be affected, what safeguards are needed,.</a:t>
+            </a:r>
+            <a:endParaRPr lang="en-US" sz="1220" dirty="0"/>
           </a:p>
         </p:txBody>
       </p:sp>
@@ -6342,8 +6342,8 @@
         </p:nvSpPr>
         <p:spPr>
           <a:xfrm>
-            <a:off x="868680" y="1508760"/>
-            <a:ext cx="6309360" cy="4160520"/>
+            <a:off x="822960" y="1463040"/>
+            <a:ext cx="6565392" cy="4343400"/>
           </a:xfrm>
           <a:prstGeom prst="rect">
             <a:avLst/>
@@ -6361,7 +6361,7 @@
               <a:buNone/>
             </a:pPr>
             <a:r>
-              <a:rPr lang="en-US" sz="2100" dirty="0">
+              <a:rPr lang="en-US" sz="1920" dirty="0">
                 <a:solidFill>
                   <a:srgbClr val="003A63"/>
                 </a:solidFill>
@@ -6371,14 +6371,14 @@
               </a:rPr>
               <a:t>• Privacy controls must also apply to outputs.</a:t>
             </a:r>
-            <a:endParaRPr lang="en-US" sz="2100" dirty="0"/>
-          </a:p>
-          <a:p>
-            <a:pPr indent="0" marL="0">
-              <a:buNone/>
-            </a:pPr>
-            <a:r>
-              <a:rPr lang="en-US" sz="2100" dirty="0">
+            <a:endParaRPr lang="en-US" sz="1920" dirty="0"/>
+          </a:p>
+          <a:p>
+            <a:pPr indent="0" marL="0">
+              <a:buNone/>
+            </a:pPr>
+            <a:r>
+              <a:rPr lang="en-US" sz="1920" dirty="0">
                 <a:solidFill>
                   <a:srgbClr val="003A63"/>
                 </a:solidFill>
@@ -6386,16 +6386,16 @@
                 <a:ea typeface="Aptos" pitchFamily="34" charset="-122"/>
                 <a:cs typeface="Aptos" pitchFamily="34" charset="-120"/>
               </a:rPr>
-              <a:t>• An AI-generated summary, risk score, cluster report, or dashboard can reveal sensitive.</a:t>
-            </a:r>
-            <a:endParaRPr lang="en-US" sz="2100" dirty="0"/>
-          </a:p>
-          <a:p>
-            <a:pPr indent="0" marL="0">
-              <a:buNone/>
-            </a:pPr>
-            <a:r>
-              <a:rPr lang="en-US" sz="2100" dirty="0">
+              <a:t>• An AI-generated summary, risk score, cluster report, or dashboard can reveal.</a:t>
+            </a:r>
+            <a:endParaRPr lang="en-US" sz="1920" dirty="0"/>
+          </a:p>
+          <a:p>
+            <a:pPr indent="0" marL="0">
+              <a:buNone/>
+            </a:pPr>
+            <a:r>
+              <a:rPr lang="en-US" sz="1920" dirty="0">
                 <a:solidFill>
                   <a:srgbClr val="003A63"/>
                 </a:solidFill>
@@ -6403,9 +6403,9 @@
                 <a:ea typeface="Aptos" pitchFamily="34" charset="-122"/>
                 <a:cs typeface="Aptos" pitchFamily="34" charset="-120"/>
               </a:rPr>
-              <a:t>• Output review should consider small cells, unusual combinations of attributes, identifiable.</a:t>
-            </a:r>
-            <a:endParaRPr lang="en-US" sz="2100" dirty="0"/>
+              <a:t>• Output review should consider small cells, unusual combinations of.</a:t>
+            </a:r>
+            <a:endParaRPr lang="en-US" sz="1920" dirty="0"/>
           </a:p>
         </p:txBody>
       </p:sp>
@@ -6417,12 +6417,12 @@
         </p:nvSpPr>
         <p:spPr>
           <a:xfrm>
-            <a:off x="7635240" y="1325880"/>
-            <a:ext cx="3474720" cy="1207008"/>
+            <a:off x="7543800" y="1325880"/>
+            <a:ext cx="3611880" cy="1261872"/>
           </a:xfrm>
           <a:prstGeom prst="roundRect">
             <a:avLst>
-              <a:gd name="adj" fmla="val 9091"/>
+              <a:gd name="adj" fmla="val 8696"/>
             </a:avLst>
           </a:prstGeom>
           <a:solidFill>
@@ -6444,8 +6444,8 @@
         </p:nvSpPr>
         <p:spPr>
           <a:xfrm>
-            <a:off x="7799832" y="1472184"/>
-            <a:ext cx="3145536" cy="256032"/>
+            <a:off x="7708392" y="1453896"/>
+            <a:ext cx="3282696" cy="228600"/>
           </a:xfrm>
           <a:prstGeom prst="rect">
             <a:avLst/>
@@ -6461,7 +6461,7 @@
               <a:buNone/>
             </a:pPr>
             <a:r>
-              <a:rPr lang="en-US" sz="1300" b="1" dirty="0">
+              <a:rPr lang="en-US" sz="1220" b="1" dirty="0">
                 <a:solidFill>
                   <a:srgbClr val="0068B7"/>
                 </a:solidFill>
@@ -6471,7 +6471,7 @@
               </a:rPr>
               <a:t>Risk check</a:t>
             </a:r>
-            <a:endParaRPr lang="en-US" sz="1300" dirty="0"/>
+            <a:endParaRPr lang="en-US" sz="1220" dirty="0"/>
           </a:p>
         </p:txBody>
       </p:sp>
@@ -6483,8 +6483,8 @@
         </p:nvSpPr>
         <p:spPr>
           <a:xfrm>
-            <a:off x="7799832" y="1801368"/>
-            <a:ext cx="3145536" cy="640080"/>
+            <a:off x="7708392" y="1764792"/>
+            <a:ext cx="3282696" cy="749808"/>
           </a:xfrm>
           <a:prstGeom prst="rect">
             <a:avLst/>
@@ -6502,7 +6502,7 @@
               <a:buNone/>
             </a:pPr>
             <a:r>
-              <a:rPr lang="en-US" sz="1320" dirty="0">
+              <a:rPr lang="en-US" sz="1220" dirty="0">
                 <a:solidFill>
                   <a:srgbClr val="17364A"/>
                 </a:solidFill>
@@ -6512,7 +6512,7 @@
               </a:rPr>
               <a:t>Privacy controls must also apply to outputs.</a:t>
             </a:r>
-            <a:endParaRPr lang="en-US" sz="1320" dirty="0"/>
+            <a:endParaRPr lang="en-US" sz="1220" dirty="0"/>
           </a:p>
         </p:txBody>
       </p:sp>
@@ -6524,12 +6524,12 @@
         </p:nvSpPr>
         <p:spPr>
           <a:xfrm>
-            <a:off x="7635240" y="2670048"/>
-            <a:ext cx="3474720" cy="1536192"/>
+            <a:off x="7543800" y="2724912"/>
+            <a:ext cx="3611880" cy="1527048"/>
           </a:xfrm>
           <a:prstGeom prst="roundRect">
             <a:avLst>
-              <a:gd name="adj" fmla="val 7143"/>
+              <a:gd name="adj" fmla="val 7186"/>
             </a:avLst>
           </a:prstGeom>
           <a:solidFill>
@@ -6551,8 +6551,8 @@
         </p:nvSpPr>
         <p:spPr>
           <a:xfrm>
-            <a:off x="7799832" y="2816352"/>
-            <a:ext cx="3145536" cy="256032"/>
+            <a:off x="7708392" y="2852928"/>
+            <a:ext cx="3282696" cy="228600"/>
           </a:xfrm>
           <a:prstGeom prst="rect">
             <a:avLst/>
@@ -6568,7 +6568,7 @@
               <a:buNone/>
             </a:pPr>
             <a:r>
-              <a:rPr lang="en-US" sz="1300" b="1" dirty="0">
+              <a:rPr lang="en-US" sz="1220" b="1" dirty="0">
                 <a:solidFill>
                   <a:srgbClr val="0068B7"/>
                 </a:solidFill>
@@ -6578,7 +6578,7 @@
               </a:rPr>
               <a:t>Concept checkpoints</a:t>
             </a:r>
-            <a:endParaRPr lang="en-US" sz="1300" dirty="0"/>
+            <a:endParaRPr lang="en-US" sz="1220" dirty="0"/>
           </a:p>
         </p:txBody>
       </p:sp>
@@ -6590,8 +6590,8 @@
         </p:nvSpPr>
         <p:spPr>
           <a:xfrm>
-            <a:off x="7818120" y="3182112"/>
-            <a:ext cx="3090672" cy="877824"/>
+            <a:off x="7726680" y="3182112"/>
+            <a:ext cx="3227832" cy="960120"/>
           </a:xfrm>
           <a:prstGeom prst="rect">
             <a:avLst/>
@@ -6609,7 +6609,7 @@
               <a:buNone/>
             </a:pPr>
             <a:r>
-              <a:rPr lang="en-US" sz="1220" dirty="0">
+              <a:rPr lang="en-US" sz="1140" dirty="0">
                 <a:solidFill>
                   <a:srgbClr val="17364A"/>
                 </a:solidFill>
@@ -6617,16 +6617,16 @@
                 <a:ea typeface="Aptos" pitchFamily="34" charset="-122"/>
                 <a:cs typeface="Aptos" pitchFamily="34" charset="-120"/>
               </a:rPr>
-              <a:t>An AI-generated summary, risk score, cluster report, or dashboard.</a:t>
-            </a:r>
-            <a:endParaRPr lang="en-US" sz="1220" dirty="0"/>
-          </a:p>
-          <a:p>
-            <a:pPr indent="0" marL="0">
-              <a:buNone/>
-            </a:pPr>
-            <a:r>
-              <a:rPr lang="en-US" sz="1220" dirty="0">
+              <a:t>An AI-generated summary, risk score, cluster.</a:t>
+            </a:r>
+            <a:endParaRPr lang="en-US" sz="1140" dirty="0"/>
+          </a:p>
+          <a:p>
+            <a:pPr indent="0" marL="0">
+              <a:buNone/>
+            </a:pPr>
+            <a:r>
+              <a:rPr lang="en-US" sz="1140" dirty="0">
                 <a:solidFill>
                   <a:srgbClr val="17364A"/>
                 </a:solidFill>
@@ -6634,16 +6634,16 @@
                 <a:ea typeface="Aptos" pitchFamily="34" charset="-122"/>
                 <a:cs typeface="Aptos" pitchFamily="34" charset="-120"/>
               </a:rPr>
-              <a:t>Output review should consider small cells, unusual combinations of.</a:t>
-            </a:r>
-            <a:endParaRPr lang="en-US" sz="1220" dirty="0"/>
-          </a:p>
-          <a:p>
-            <a:pPr indent="0" marL="0">
-              <a:buNone/>
-            </a:pPr>
-            <a:r>
-              <a:rPr lang="en-US" sz="1220" dirty="0">
+              <a:t>Output review should consider small cells, unusual.</a:t>
+            </a:r>
+            <a:endParaRPr lang="en-US" sz="1140" dirty="0"/>
+          </a:p>
+          <a:p>
+            <a:pPr indent="0" marL="0">
+              <a:buNone/>
+            </a:pPr>
+            <a:r>
+              <a:rPr lang="en-US" sz="1140" dirty="0">
                 <a:solidFill>
                   <a:srgbClr val="17364A"/>
                 </a:solidFill>
@@ -6651,9 +6651,9 @@
                 <a:ea typeface="Aptos" pitchFamily="34" charset="-122"/>
                 <a:cs typeface="Aptos" pitchFamily="34" charset="-120"/>
               </a:rPr>
-              <a:t>Logs should document who generated outputs, what data were used,.</a:t>
-            </a:r>
-            <a:endParaRPr lang="en-US" sz="1220" dirty="0"/>
+              <a:t>Logs should document who generated outputs, what.</a:t>
+            </a:r>
+            <a:endParaRPr lang="en-US" sz="1140" dirty="0"/>
           </a:p>
         </p:txBody>
       </p:sp>
@@ -6665,12 +6665,12 @@
         </p:nvSpPr>
         <p:spPr>
           <a:xfrm>
-            <a:off x="7635240" y="4343400"/>
-            <a:ext cx="3474720" cy="1255471"/>
+            <a:off x="7543800" y="4389120"/>
+            <a:ext cx="3611880" cy="1261872"/>
           </a:xfrm>
           <a:prstGeom prst="roundRect">
             <a:avLst>
-              <a:gd name="adj" fmla="val 8740"/>
+              <a:gd name="adj" fmla="val 8696"/>
             </a:avLst>
           </a:prstGeom>
           <a:solidFill>
@@ -6692,8 +6692,8 @@
         </p:nvSpPr>
         <p:spPr>
           <a:xfrm>
-            <a:off x="7799832" y="4489704"/>
-            <a:ext cx="3145536" cy="256032"/>
+            <a:off x="7708392" y="4517136"/>
+            <a:ext cx="3282696" cy="228600"/>
           </a:xfrm>
           <a:prstGeom prst="rect">
             <a:avLst/>
@@ -6709,7 +6709,7 @@
               <a:buNone/>
             </a:pPr>
             <a:r>
-              <a:rPr lang="en-US" sz="1300" b="1" dirty="0">
+              <a:rPr lang="en-US" sz="1220" b="1" dirty="0">
                 <a:solidFill>
                   <a:srgbClr val="0068B7"/>
                 </a:solidFill>
@@ -6719,7 +6719,7 @@
               </a:rPr>
               <a:t>Safeguard to plan</a:t>
             </a:r>
-            <a:endParaRPr lang="en-US" sz="1300" dirty="0"/>
+            <a:endParaRPr lang="en-US" sz="1220" dirty="0"/>
           </a:p>
         </p:txBody>
       </p:sp>
@@ -6731,8 +6731,8 @@
         </p:nvSpPr>
         <p:spPr>
           <a:xfrm>
-            <a:off x="7799832" y="4818888"/>
-            <a:ext cx="3145536" cy="688543"/>
+            <a:off x="7708392" y="4828032"/>
+            <a:ext cx="3282696" cy="749808"/>
           </a:xfrm>
           <a:prstGeom prst="rect">
             <a:avLst/>
@@ -6750,7 +6750,7 @@
               <a:buNone/>
             </a:pPr>
             <a:r>
-              <a:rPr lang="en-US" sz="1320" dirty="0">
+              <a:rPr lang="en-US" sz="1220" dirty="0">
                 <a:solidFill>
                   <a:srgbClr val="17364A"/>
                 </a:solidFill>
@@ -6758,9 +6758,9 @@
                 <a:ea typeface="Aptos" pitchFamily="34" charset="-122"/>
                 <a:cs typeface="Aptos" pitchFamily="34" charset="-120"/>
               </a:rPr>
-              <a:t>Identify what could go wrong, who could be affected, what safeguards are needed, and what evidence should be reviewed before use.</a:t>
-            </a:r>
-            <a:endParaRPr lang="en-US" sz="1320" dirty="0"/>
+              <a:t>Identify what could go wrong, who could be affected, what safeguards are needed,.</a:t>
+            </a:r>
+            <a:endParaRPr lang="en-US" sz="1220" dirty="0"/>
           </a:p>
         </p:txBody>
       </p:sp>
@@ -7051,8 +7051,8 @@
         </p:nvSpPr>
         <p:spPr>
           <a:xfrm>
-            <a:off x="868680" y="1508760"/>
-            <a:ext cx="6309360" cy="4160520"/>
+            <a:off x="822960" y="1463040"/>
+            <a:ext cx="6565392" cy="4343400"/>
           </a:xfrm>
           <a:prstGeom prst="rect">
             <a:avLst/>
@@ -7070,7 +7070,7 @@
               <a:buNone/>
             </a:pPr>
             <a:r>
-              <a:rPr lang="en-US" sz="2100" dirty="0">
+              <a:rPr lang="en-US" sz="1920" dirty="0">
                 <a:solidFill>
                   <a:srgbClr val="003A63"/>
                 </a:solidFill>
@@ -7080,14 +7080,14 @@
               </a:rPr>
               <a:t>• A major failure mode is assuming that de-identification is permanent.</a:t>
             </a:r>
-            <a:endParaRPr lang="en-US" sz="2100" dirty="0"/>
-          </a:p>
-          <a:p>
-            <a:pPr indent="0" marL="0">
-              <a:buNone/>
-            </a:pPr>
-            <a:r>
-              <a:rPr lang="en-US" sz="2100" dirty="0">
+            <a:endParaRPr lang="en-US" sz="1920" dirty="0"/>
+          </a:p>
+          <a:p>
+            <a:pPr indent="0" marL="0">
+              <a:buNone/>
+            </a:pPr>
+            <a:r>
+              <a:rPr lang="en-US" sz="1920" dirty="0">
                 <a:solidFill>
                   <a:srgbClr val="003A63"/>
                 </a:solidFill>
@@ -7095,16 +7095,16 @@
                 <a:ea typeface="Aptos" pitchFamily="34" charset="-122"/>
                 <a:cs typeface="Aptos" pitchFamily="34" charset="-120"/>
               </a:rPr>
-              <a:t>• Data that are de-identified for one purpose may be re-identifiable in another context,.</a:t>
-            </a:r>
-            <a:endParaRPr lang="en-US" sz="2100" dirty="0"/>
-          </a:p>
-          <a:p>
-            <a:pPr indent="0" marL="0">
-              <a:buNone/>
-            </a:pPr>
-            <a:r>
-              <a:rPr lang="en-US" sz="2100" dirty="0">
+              <a:t>• Data that are de-identified for one purpose may be re-identifiable in.</a:t>
+            </a:r>
+            <a:endParaRPr lang="en-US" sz="1920" dirty="0"/>
+          </a:p>
+          <a:p>
+            <a:pPr indent="0" marL="0">
+              <a:buNone/>
+            </a:pPr>
+            <a:r>
+              <a:rPr lang="en-US" sz="1920" dirty="0">
                 <a:solidFill>
                   <a:srgbClr val="003A63"/>
                 </a:solidFill>
@@ -7112,9 +7112,9 @@
                 <a:ea typeface="Aptos" pitchFamily="34" charset="-122"/>
                 <a:cs typeface="Aptos" pitchFamily="34" charset="-120"/>
               </a:rPr>
-              <a:t>• A guardrail is to perform use-case-specific privacy review and to document assumptions about.</a:t>
-            </a:r>
-            <a:endParaRPr lang="en-US" sz="2100" dirty="0"/>
+              <a:t>• A guardrail is to perform use-case-specific privacy review and to document.</a:t>
+            </a:r>
+            <a:endParaRPr lang="en-US" sz="1920" dirty="0"/>
           </a:p>
         </p:txBody>
       </p:sp>
@@ -7126,12 +7126,12 @@
         </p:nvSpPr>
         <p:spPr>
           <a:xfrm>
-            <a:off x="7635240" y="1325880"/>
-            <a:ext cx="3474720" cy="1207008"/>
+            <a:off x="7543800" y="1325880"/>
+            <a:ext cx="3611880" cy="1261872"/>
           </a:xfrm>
           <a:prstGeom prst="roundRect">
             <a:avLst>
-              <a:gd name="adj" fmla="val 9091"/>
+              <a:gd name="adj" fmla="val 8696"/>
             </a:avLst>
           </a:prstGeom>
           <a:solidFill>
@@ -7153,8 +7153,8 @@
         </p:nvSpPr>
         <p:spPr>
           <a:xfrm>
-            <a:off x="7799832" y="1472184"/>
-            <a:ext cx="3145536" cy="256032"/>
+            <a:off x="7708392" y="1453896"/>
+            <a:ext cx="3282696" cy="228600"/>
           </a:xfrm>
           <a:prstGeom prst="rect">
             <a:avLst/>
@@ -7170,7 +7170,7 @@
               <a:buNone/>
             </a:pPr>
             <a:r>
-              <a:rPr lang="en-US" sz="1300" b="1" dirty="0">
+              <a:rPr lang="en-US" sz="1220" b="1" dirty="0">
                 <a:solidFill>
                   <a:srgbClr val="0068B7"/>
                 </a:solidFill>
@@ -7180,7 +7180,7 @@
               </a:rPr>
               <a:t>Risk check</a:t>
             </a:r>
-            <a:endParaRPr lang="en-US" sz="1300" dirty="0"/>
+            <a:endParaRPr lang="en-US" sz="1220" dirty="0"/>
           </a:p>
         </p:txBody>
       </p:sp>
@@ -7192,8 +7192,8 @@
         </p:nvSpPr>
         <p:spPr>
           <a:xfrm>
-            <a:off x="7799832" y="1801368"/>
-            <a:ext cx="3145536" cy="640080"/>
+            <a:off x="7708392" y="1764792"/>
+            <a:ext cx="3282696" cy="749808"/>
           </a:xfrm>
           <a:prstGeom prst="rect">
             <a:avLst/>
@@ -7211,7 +7211,7 @@
               <a:buNone/>
             </a:pPr>
             <a:r>
-              <a:rPr lang="en-US" sz="1320" dirty="0">
+              <a:rPr lang="en-US" sz="1220" dirty="0">
                 <a:solidFill>
                   <a:srgbClr val="17364A"/>
                 </a:solidFill>
@@ -7221,7 +7221,7 @@
               </a:rPr>
               <a:t>A major failure mode is assuming that de-identification is permanent.</a:t>
             </a:r>
-            <a:endParaRPr lang="en-US" sz="1320" dirty="0"/>
+            <a:endParaRPr lang="en-US" sz="1220" dirty="0"/>
           </a:p>
         </p:txBody>
       </p:sp>
@@ -7233,12 +7233,12 @@
         </p:nvSpPr>
         <p:spPr>
           <a:xfrm>
-            <a:off x="7635240" y="2670048"/>
-            <a:ext cx="3474720" cy="1536192"/>
+            <a:off x="7543800" y="2724912"/>
+            <a:ext cx="3611880" cy="1527048"/>
           </a:xfrm>
           <a:prstGeom prst="roundRect">
             <a:avLst>
-              <a:gd name="adj" fmla="val 7143"/>
+              <a:gd name="adj" fmla="val 7186"/>
             </a:avLst>
           </a:prstGeom>
           <a:solidFill>
@@ -7260,8 +7260,8 @@
         </p:nvSpPr>
         <p:spPr>
           <a:xfrm>
-            <a:off x="7799832" y="2816352"/>
-            <a:ext cx="3145536" cy="256032"/>
+            <a:off x="7708392" y="2852928"/>
+            <a:ext cx="3282696" cy="228600"/>
           </a:xfrm>
           <a:prstGeom prst="rect">
             <a:avLst/>
@@ -7277,7 +7277,7 @@
               <a:buNone/>
             </a:pPr>
             <a:r>
-              <a:rPr lang="en-US" sz="1300" b="1" dirty="0">
+              <a:rPr lang="en-US" sz="1220" b="1" dirty="0">
                 <a:solidFill>
                   <a:srgbClr val="0068B7"/>
                 </a:solidFill>
@@ -7287,7 +7287,7 @@
               </a:rPr>
               <a:t>Concept checkpoints</a:t>
             </a:r>
-            <a:endParaRPr lang="en-US" sz="1300" dirty="0"/>
+            <a:endParaRPr lang="en-US" sz="1220" dirty="0"/>
           </a:p>
         </p:txBody>
       </p:sp>
@@ -7299,8 +7299,8 @@
         </p:nvSpPr>
         <p:spPr>
           <a:xfrm>
-            <a:off x="7818120" y="3182112"/>
-            <a:ext cx="3090672" cy="877824"/>
+            <a:off x="7726680" y="3182112"/>
+            <a:ext cx="3227832" cy="960120"/>
           </a:xfrm>
           <a:prstGeom prst="rect">
             <a:avLst/>
@@ -7318,7 +7318,7 @@
               <a:buNone/>
             </a:pPr>
             <a:r>
-              <a:rPr lang="en-US" sz="1220" dirty="0">
+              <a:rPr lang="en-US" sz="1140" dirty="0">
                 <a:solidFill>
                   <a:srgbClr val="17364A"/>
                 </a:solidFill>
@@ -7326,16 +7326,16 @@
                 <a:ea typeface="Aptos" pitchFamily="34" charset="-122"/>
                 <a:cs typeface="Aptos" pitchFamily="34" charset="-120"/>
               </a:rPr>
-              <a:t>Data that are de-identified for one purpose may be re-identifiable.</a:t>
-            </a:r>
-            <a:endParaRPr lang="en-US" sz="1220" dirty="0"/>
-          </a:p>
-          <a:p>
-            <a:pPr indent="0" marL="0">
-              <a:buNone/>
-            </a:pPr>
-            <a:r>
-              <a:rPr lang="en-US" sz="1220" dirty="0">
+              <a:t>Data that are de-identified for one purpose may be.</a:t>
+            </a:r>
+            <a:endParaRPr lang="en-US" sz="1140" dirty="0"/>
+          </a:p>
+          <a:p>
+            <a:pPr indent="0" marL="0">
+              <a:buNone/>
+            </a:pPr>
+            <a:r>
+              <a:rPr lang="en-US" sz="1140" dirty="0">
                 <a:solidFill>
                   <a:srgbClr val="17364A"/>
                 </a:solidFill>
@@ -7343,16 +7343,16 @@
                 <a:ea typeface="Aptos" pitchFamily="34" charset="-122"/>
                 <a:cs typeface="Aptos" pitchFamily="34" charset="-120"/>
               </a:rPr>
-              <a:t>A guardrail is to perform use-case-specific privacy review and to.</a:t>
-            </a:r>
-            <a:endParaRPr lang="en-US" sz="1220" dirty="0"/>
-          </a:p>
-          <a:p>
-            <a:pPr indent="0" marL="0">
-              <a:buNone/>
-            </a:pPr>
-            <a:r>
-              <a:rPr lang="en-US" sz="1220" dirty="0">
+              <a:t>A guardrail is to perform use-case-specific.</a:t>
+            </a:r>
+            <a:endParaRPr lang="en-US" sz="1140" dirty="0"/>
+          </a:p>
+          <a:p>
+            <a:pPr indent="0" marL="0">
+              <a:buNone/>
+            </a:pPr>
+            <a:r>
+              <a:rPr lang="en-US" sz="1140" dirty="0">
                 <a:solidFill>
                   <a:srgbClr val="17364A"/>
                 </a:solidFill>
@@ -7360,9 +7360,9 @@
                 <a:ea typeface="Aptos" pitchFamily="34" charset="-122"/>
                 <a:cs typeface="Aptos" pitchFamily="34" charset="-120"/>
               </a:rPr>
-              <a:t>Another failure mode is exposing sensitive data to unapproved AI.</a:t>
-            </a:r>
-            <a:endParaRPr lang="en-US" sz="1220" dirty="0"/>
+              <a:t>Another failure mode is exposing sensitive data to.</a:t>
+            </a:r>
+            <a:endParaRPr lang="en-US" sz="1140" dirty="0"/>
           </a:p>
         </p:txBody>
       </p:sp>
@@ -7374,12 +7374,12 @@
         </p:nvSpPr>
         <p:spPr>
           <a:xfrm>
-            <a:off x="7635240" y="4343400"/>
-            <a:ext cx="3474720" cy="1255471"/>
+            <a:off x="7543800" y="4389120"/>
+            <a:ext cx="3611880" cy="1261872"/>
           </a:xfrm>
           <a:prstGeom prst="roundRect">
             <a:avLst>
-              <a:gd name="adj" fmla="val 8740"/>
+              <a:gd name="adj" fmla="val 8696"/>
             </a:avLst>
           </a:prstGeom>
           <a:solidFill>
@@ -7401,8 +7401,8 @@
         </p:nvSpPr>
         <p:spPr>
           <a:xfrm>
-            <a:off x="7799832" y="4489704"/>
-            <a:ext cx="3145536" cy="256032"/>
+            <a:off x="7708392" y="4517136"/>
+            <a:ext cx="3282696" cy="228600"/>
           </a:xfrm>
           <a:prstGeom prst="rect">
             <a:avLst/>
@@ -7418,7 +7418,7 @@
               <a:buNone/>
             </a:pPr>
             <a:r>
-              <a:rPr lang="en-US" sz="1300" b="1" dirty="0">
+              <a:rPr lang="en-US" sz="1220" b="1" dirty="0">
                 <a:solidFill>
                   <a:srgbClr val="0068B7"/>
                 </a:solidFill>
@@ -7428,7 +7428,7 @@
               </a:rPr>
               <a:t>Safeguard to plan</a:t>
             </a:r>
-            <a:endParaRPr lang="en-US" sz="1300" dirty="0"/>
+            <a:endParaRPr lang="en-US" sz="1220" dirty="0"/>
           </a:p>
         </p:txBody>
       </p:sp>
@@ -7440,8 +7440,8 @@
         </p:nvSpPr>
         <p:spPr>
           <a:xfrm>
-            <a:off x="7799832" y="4818888"/>
-            <a:ext cx="3145536" cy="688543"/>
+            <a:off x="7708392" y="4828032"/>
+            <a:ext cx="3282696" cy="749808"/>
           </a:xfrm>
           <a:prstGeom prst="rect">
             <a:avLst/>
@@ -7459,7 +7459,7 @@
               <a:buNone/>
             </a:pPr>
             <a:r>
-              <a:rPr lang="en-US" sz="1320" dirty="0">
+              <a:rPr lang="en-US" sz="1220" dirty="0">
                 <a:solidFill>
                   <a:srgbClr val="17364A"/>
                 </a:solidFill>
@@ -7467,9 +7467,9 @@
                 <a:ea typeface="Aptos" pitchFamily="34" charset="-122"/>
                 <a:cs typeface="Aptos" pitchFamily="34" charset="-120"/>
               </a:rPr>
-              <a:t>Identify what could go wrong, who could be affected, what safeguards are needed, and what evidence should be reviewed before use.</a:t>
-            </a:r>
-            <a:endParaRPr lang="en-US" sz="1320" dirty="0"/>
+              <a:t>Identify what could go wrong, who could be affected, what safeguards are needed,.</a:t>
+            </a:r>
+            <a:endParaRPr lang="en-US" sz="1220" dirty="0"/>
           </a:p>
         </p:txBody>
       </p:sp>
@@ -7760,8 +7760,8 @@
         </p:nvSpPr>
         <p:spPr>
           <a:xfrm>
-            <a:off x="868680" y="1508760"/>
-            <a:ext cx="6309360" cy="4160520"/>
+            <a:off x="822960" y="1463040"/>
+            <a:ext cx="6565392" cy="4343400"/>
           </a:xfrm>
           <a:prstGeom prst="rect">
             <a:avLst/>
@@ -7779,7 +7779,7 @@
               <a:buNone/>
             </a:pPr>
             <a:r>
-              <a:rPr lang="en-US" sz="2100" dirty="0">
+              <a:rPr lang="en-US" sz="1920" dirty="0">
                 <a:solidFill>
                   <a:srgbClr val="003A63"/>
                 </a:solidFill>
@@ -7789,14 +7789,14 @@
               </a:rPr>
               <a:t>• Privacy risk can also arise from vendor relationships.</a:t>
             </a:r>
-            <a:endParaRPr lang="en-US" sz="2100" dirty="0"/>
-          </a:p>
-          <a:p>
-            <a:pPr indent="0" marL="0">
-              <a:buNone/>
-            </a:pPr>
-            <a:r>
-              <a:rPr lang="en-US" sz="2100" dirty="0">
+            <a:endParaRPr lang="en-US" sz="1920" dirty="0"/>
+          </a:p>
+          <a:p>
+            <a:pPr indent="0" marL="0">
+              <a:buNone/>
+            </a:pPr>
+            <a:r>
+              <a:rPr lang="en-US" sz="1920" dirty="0">
                 <a:solidFill>
                   <a:srgbClr val="003A63"/>
                 </a:solidFill>
@@ -7806,14 +7806,14 @@
               </a:rPr>
               <a:t>• Vendors may request sample data for testing or model tuning.</a:t>
             </a:r>
-            <a:endParaRPr lang="en-US" sz="2100" dirty="0"/>
-          </a:p>
-          <a:p>
-            <a:pPr indent="0" marL="0">
-              <a:buNone/>
-            </a:pPr>
-            <a:r>
-              <a:rPr lang="en-US" sz="2100" dirty="0">
+            <a:endParaRPr lang="en-US" sz="1920" dirty="0"/>
+          </a:p>
+          <a:p>
+            <a:pPr indent="0" marL="0">
+              <a:buNone/>
+            </a:pPr>
+            <a:r>
+              <a:rPr lang="en-US" sz="1920" dirty="0">
                 <a:solidFill>
                   <a:srgbClr val="003A63"/>
                 </a:solidFill>
@@ -7821,9 +7821,9 @@
                 <a:ea typeface="Aptos" pitchFamily="34" charset="-122"/>
                 <a:cs typeface="Aptos" pitchFamily="34" charset="-120"/>
               </a:rPr>
-              <a:t>• Agencies should use synthetic, masked, or minimized data whenever possible and should require.</a:t>
-            </a:r>
-            <a:endParaRPr lang="en-US" sz="2100" dirty="0"/>
+              <a:t>• Agencies should use synthetic, masked, or minimized data whenever possible.</a:t>
+            </a:r>
+            <a:endParaRPr lang="en-US" sz="1920" dirty="0"/>
           </a:p>
         </p:txBody>
       </p:sp>
@@ -7835,12 +7835,12 @@
         </p:nvSpPr>
         <p:spPr>
           <a:xfrm>
-            <a:off x="7635240" y="1325880"/>
-            <a:ext cx="3474720" cy="1207008"/>
+            <a:off x="7543800" y="1325880"/>
+            <a:ext cx="3611880" cy="1261872"/>
           </a:xfrm>
           <a:prstGeom prst="roundRect">
             <a:avLst>
-              <a:gd name="adj" fmla="val 9091"/>
+              <a:gd name="adj" fmla="val 8696"/>
             </a:avLst>
           </a:prstGeom>
           <a:solidFill>
@@ -7862,8 +7862,8 @@
         </p:nvSpPr>
         <p:spPr>
           <a:xfrm>
-            <a:off x="7799832" y="1472184"/>
-            <a:ext cx="3145536" cy="256032"/>
+            <a:off x="7708392" y="1453896"/>
+            <a:ext cx="3282696" cy="228600"/>
           </a:xfrm>
           <a:prstGeom prst="rect">
             <a:avLst/>
@@ -7879,7 +7879,7 @@
               <a:buNone/>
             </a:pPr>
             <a:r>
-              <a:rPr lang="en-US" sz="1300" b="1" dirty="0">
+              <a:rPr lang="en-US" sz="1220" b="1" dirty="0">
                 <a:solidFill>
                   <a:srgbClr val="0068B7"/>
                 </a:solidFill>
@@ -7889,7 +7889,7 @@
               </a:rPr>
               <a:t>Risk check</a:t>
             </a:r>
-            <a:endParaRPr lang="en-US" sz="1300" dirty="0"/>
+            <a:endParaRPr lang="en-US" sz="1220" dirty="0"/>
           </a:p>
         </p:txBody>
       </p:sp>
@@ -7901,8 +7901,8 @@
         </p:nvSpPr>
         <p:spPr>
           <a:xfrm>
-            <a:off x="7799832" y="1801368"/>
-            <a:ext cx="3145536" cy="640080"/>
+            <a:off x="7708392" y="1764792"/>
+            <a:ext cx="3282696" cy="749808"/>
           </a:xfrm>
           <a:prstGeom prst="rect">
             <a:avLst/>
@@ -7920,7 +7920,7 @@
               <a:buNone/>
             </a:pPr>
             <a:r>
-              <a:rPr lang="en-US" sz="1320" dirty="0">
+              <a:rPr lang="en-US" sz="1220" dirty="0">
                 <a:solidFill>
                   <a:srgbClr val="17364A"/>
                 </a:solidFill>
@@ -7930,7 +7930,7 @@
               </a:rPr>
               <a:t>Privacy risk can also arise from vendor relationships.</a:t>
             </a:r>
-            <a:endParaRPr lang="en-US" sz="1320" dirty="0"/>
+            <a:endParaRPr lang="en-US" sz="1220" dirty="0"/>
           </a:p>
         </p:txBody>
       </p:sp>
@@ -7942,12 +7942,12 @@
         </p:nvSpPr>
         <p:spPr>
           <a:xfrm>
-            <a:off x="7635240" y="2670048"/>
-            <a:ext cx="3474720" cy="1536192"/>
+            <a:off x="7543800" y="2724912"/>
+            <a:ext cx="3611880" cy="1527048"/>
           </a:xfrm>
           <a:prstGeom prst="roundRect">
             <a:avLst>
-              <a:gd name="adj" fmla="val 7143"/>
+              <a:gd name="adj" fmla="val 7186"/>
             </a:avLst>
           </a:prstGeom>
           <a:solidFill>
@@ -7969,8 +7969,8 @@
         </p:nvSpPr>
         <p:spPr>
           <a:xfrm>
-            <a:off x="7799832" y="2816352"/>
-            <a:ext cx="3145536" cy="256032"/>
+            <a:off x="7708392" y="2852928"/>
+            <a:ext cx="3282696" cy="228600"/>
           </a:xfrm>
           <a:prstGeom prst="rect">
             <a:avLst/>
@@ -7986,7 +7986,7 @@
               <a:buNone/>
             </a:pPr>
             <a:r>
-              <a:rPr lang="en-US" sz="1300" b="1" dirty="0">
+              <a:rPr lang="en-US" sz="1220" b="1" dirty="0">
                 <a:solidFill>
                   <a:srgbClr val="0068B7"/>
                 </a:solidFill>
@@ -7996,7 +7996,7 @@
               </a:rPr>
               <a:t>Concept checkpoints</a:t>
             </a:r>
-            <a:endParaRPr lang="en-US" sz="1300" dirty="0"/>
+            <a:endParaRPr lang="en-US" sz="1220" dirty="0"/>
           </a:p>
         </p:txBody>
       </p:sp>
@@ -8008,8 +8008,8 @@
         </p:nvSpPr>
         <p:spPr>
           <a:xfrm>
-            <a:off x="7818120" y="3182112"/>
-            <a:ext cx="3090672" cy="877824"/>
+            <a:off x="7726680" y="3182112"/>
+            <a:ext cx="3227832" cy="960120"/>
           </a:xfrm>
           <a:prstGeom prst="rect">
             <a:avLst/>
@@ -8027,7 +8027,7 @@
               <a:buNone/>
             </a:pPr>
             <a:r>
-              <a:rPr lang="en-US" sz="1220" dirty="0">
+              <a:rPr lang="en-US" sz="1140" dirty="0">
                 <a:solidFill>
                   <a:srgbClr val="17364A"/>
                 </a:solidFill>
@@ -8035,16 +8035,16 @@
                 <a:ea typeface="Aptos" pitchFamily="34" charset="-122"/>
                 <a:cs typeface="Aptos" pitchFamily="34" charset="-120"/>
               </a:rPr>
-              <a:t>Privacy risk can also arise from vendor relationships.</a:t>
-            </a:r>
-            <a:endParaRPr lang="en-US" sz="1220" dirty="0"/>
-          </a:p>
-          <a:p>
-            <a:pPr indent="0" marL="0">
-              <a:buNone/>
-            </a:pPr>
-            <a:r>
-              <a:rPr lang="en-US" sz="1220" dirty="0">
+              <a:t>Privacy risk can also arise from vendor.</a:t>
+            </a:r>
+            <a:endParaRPr lang="en-US" sz="1140" dirty="0"/>
+          </a:p>
+          <a:p>
+            <a:pPr indent="0" marL="0">
+              <a:buNone/>
+            </a:pPr>
+            <a:r>
+              <a:rPr lang="en-US" sz="1140" dirty="0">
                 <a:solidFill>
                   <a:srgbClr val="17364A"/>
                 </a:solidFill>
@@ -8052,16 +8052,16 @@
                 <a:ea typeface="Aptos" pitchFamily="34" charset="-122"/>
                 <a:cs typeface="Aptos" pitchFamily="34" charset="-120"/>
               </a:rPr>
-              <a:t>Vendors may request sample data for testing or model tuning.</a:t>
-            </a:r>
-            <a:endParaRPr lang="en-US" sz="1220" dirty="0"/>
-          </a:p>
-          <a:p>
-            <a:pPr indent="0" marL="0">
-              <a:buNone/>
-            </a:pPr>
-            <a:r>
-              <a:rPr lang="en-US" sz="1220" dirty="0">
+              <a:t>Vendors may request sample data for testing or.</a:t>
+            </a:r>
+            <a:endParaRPr lang="en-US" sz="1140" dirty="0"/>
+          </a:p>
+          <a:p>
+            <a:pPr indent="0" marL="0">
+              <a:buNone/>
+            </a:pPr>
+            <a:r>
+              <a:rPr lang="en-US" sz="1140" dirty="0">
                 <a:solidFill>
                   <a:srgbClr val="17364A"/>
                 </a:solidFill>
@@ -8069,9 +8069,9 @@
                 <a:ea typeface="Aptos" pitchFamily="34" charset="-122"/>
                 <a:cs typeface="Aptos" pitchFamily="34" charset="-120"/>
               </a:rPr>
-              <a:t>Agencies should use synthetic, masked, or minimized data whenever.</a:t>
-            </a:r>
-            <a:endParaRPr lang="en-US" sz="1220" dirty="0"/>
+              <a:t>Agencies should use synthetic, masked, or.</a:t>
+            </a:r>
+            <a:endParaRPr lang="en-US" sz="1140" dirty="0"/>
           </a:p>
         </p:txBody>
       </p:sp>
@@ -8083,12 +8083,12 @@
         </p:nvSpPr>
         <p:spPr>
           <a:xfrm>
-            <a:off x="7635240" y="4343400"/>
-            <a:ext cx="3474720" cy="1255471"/>
+            <a:off x="7543800" y="4389120"/>
+            <a:ext cx="3611880" cy="1261872"/>
           </a:xfrm>
           <a:prstGeom prst="roundRect">
             <a:avLst>
-              <a:gd name="adj" fmla="val 8740"/>
+              <a:gd name="adj" fmla="val 8696"/>
             </a:avLst>
           </a:prstGeom>
           <a:solidFill>
@@ -8110,8 +8110,8 @@
         </p:nvSpPr>
         <p:spPr>
           <a:xfrm>
-            <a:off x="7799832" y="4489704"/>
-            <a:ext cx="3145536" cy="256032"/>
+            <a:off x="7708392" y="4517136"/>
+            <a:ext cx="3282696" cy="228600"/>
           </a:xfrm>
           <a:prstGeom prst="rect">
             <a:avLst/>
@@ -8127,7 +8127,7 @@
               <a:buNone/>
             </a:pPr>
             <a:r>
-              <a:rPr lang="en-US" sz="1300" b="1" dirty="0">
+              <a:rPr lang="en-US" sz="1220" b="1" dirty="0">
                 <a:solidFill>
                   <a:srgbClr val="0068B7"/>
                 </a:solidFill>
@@ -8137,7 +8137,7 @@
               </a:rPr>
               <a:t>Safeguard to plan</a:t>
             </a:r>
-            <a:endParaRPr lang="en-US" sz="1300" dirty="0"/>
+            <a:endParaRPr lang="en-US" sz="1220" dirty="0"/>
           </a:p>
         </p:txBody>
       </p:sp>
@@ -8149,8 +8149,8 @@
         </p:nvSpPr>
         <p:spPr>
           <a:xfrm>
-            <a:off x="7799832" y="4818888"/>
-            <a:ext cx="3145536" cy="688543"/>
+            <a:off x="7708392" y="4828032"/>
+            <a:ext cx="3282696" cy="749808"/>
           </a:xfrm>
           <a:prstGeom prst="rect">
             <a:avLst/>
@@ -8168,7 +8168,7 @@
               <a:buNone/>
             </a:pPr>
             <a:r>
-              <a:rPr lang="en-US" sz="1320" dirty="0">
+              <a:rPr lang="en-US" sz="1220" dirty="0">
                 <a:solidFill>
                   <a:srgbClr val="17364A"/>
                 </a:solidFill>
@@ -8176,9 +8176,9 @@
                 <a:ea typeface="Aptos" pitchFamily="34" charset="-122"/>
                 <a:cs typeface="Aptos" pitchFamily="34" charset="-120"/>
               </a:rPr>
-              <a:t>Identify what could go wrong, who could be affected, what safeguards are needed, and what evidence should be reviewed before use.</a:t>
-            </a:r>
-            <a:endParaRPr lang="en-US" sz="1320" dirty="0"/>
+              <a:t>Identify what could go wrong, who could be affected, what safeguards are needed,.</a:t>
+            </a:r>
+            <a:endParaRPr lang="en-US" sz="1220" dirty="0"/>
           </a:p>
         </p:txBody>
       </p:sp>
@@ -8469,8 +8469,8 @@
         </p:nvSpPr>
         <p:spPr>
           <a:xfrm>
-            <a:off x="868680" y="1508760"/>
-            <a:ext cx="6309360" cy="4160520"/>
+            <a:off x="822960" y="1463040"/>
+            <a:ext cx="6565392" cy="4343400"/>
           </a:xfrm>
           <a:prstGeom prst="rect">
             <a:avLst/>
@@ -8488,7 +8488,7 @@
               <a:buNone/>
             </a:pPr>
             <a:r>
-              <a:rPr lang="en-US" sz="2100" dirty="0">
+              <a:rPr lang="en-US" sz="1920" dirty="0">
                 <a:solidFill>
                   <a:srgbClr val="003A63"/>
                 </a:solidFill>
@@ -8496,16 +8496,16 @@
                 <a:ea typeface="Aptos" pitchFamily="34" charset="-122"/>
                 <a:cs typeface="Aptos" pitchFamily="34" charset="-120"/>
               </a:rPr>
-              <a:t>• For generative AI, privacy-preserving design means controlling what data can be placed in.</a:t>
-            </a:r>
-            <a:endParaRPr lang="en-US" sz="2100" dirty="0"/>
-          </a:p>
-          <a:p>
-            <a:pPr indent="0" marL="0">
-              <a:buNone/>
-            </a:pPr>
-            <a:r>
-              <a:rPr lang="en-US" sz="2100" dirty="0">
+              <a:t>• For generative AI, privacy-preserving design means controlling what data can.</a:t>
+            </a:r>
+            <a:endParaRPr lang="en-US" sz="1920" dirty="0"/>
+          </a:p>
+          <a:p>
+            <a:pPr indent="0" marL="0">
+              <a:buNone/>
+            </a:pPr>
+            <a:r>
+              <a:rPr lang="en-US" sz="1920" dirty="0">
                 <a:solidFill>
                   <a:srgbClr val="003A63"/>
                 </a:solidFill>
@@ -8513,16 +8513,16 @@
                 <a:ea typeface="Aptos" pitchFamily="34" charset="-122"/>
                 <a:cs typeface="Aptos" pitchFamily="34" charset="-120"/>
               </a:rPr>
-              <a:t>• Prompt templates should make prohibited content clear and should encourage use of.</a:t>
-            </a:r>
-            <a:endParaRPr lang="en-US" sz="2100" dirty="0"/>
-          </a:p>
-          <a:p>
-            <a:pPr indent="0" marL="0">
-              <a:buNone/>
-            </a:pPr>
-            <a:r>
-              <a:rPr lang="en-US" sz="2100" dirty="0">
+              <a:t>• Prompt templates should make prohibited content clear and should encourage.</a:t>
+            </a:r>
+            <a:endParaRPr lang="en-US" sz="1920" dirty="0"/>
+          </a:p>
+          <a:p>
+            <a:pPr indent="0" marL="0">
+              <a:buNone/>
+            </a:pPr>
+            <a:r>
+              <a:rPr lang="en-US" sz="1920" dirty="0">
                 <a:solidFill>
                   <a:srgbClr val="003A63"/>
                 </a:solidFill>
@@ -8530,9 +8530,9 @@
                 <a:ea typeface="Aptos" pitchFamily="34" charset="-122"/>
                 <a:cs typeface="Aptos" pitchFamily="34" charset="-120"/>
               </a:rPr>
-              <a:t>• For predictive analytics, privacy concerns include which features are used, whether sensitive.</a:t>
-            </a:r>
-            <a:endParaRPr lang="en-US" sz="2100" dirty="0"/>
+              <a:t>• For predictive analytics, privacy concerns include which features are used,.</a:t>
+            </a:r>
+            <a:endParaRPr lang="en-US" sz="1920" dirty="0"/>
           </a:p>
         </p:txBody>
       </p:sp>
@@ -8544,12 +8544,12 @@
         </p:nvSpPr>
         <p:spPr>
           <a:xfrm>
-            <a:off x="7635240" y="1325880"/>
-            <a:ext cx="3474720" cy="1255471"/>
+            <a:off x="7543800" y="1325880"/>
+            <a:ext cx="3611880" cy="1261872"/>
           </a:xfrm>
           <a:prstGeom prst="roundRect">
             <a:avLst>
-              <a:gd name="adj" fmla="val 8740"/>
+              <a:gd name="adj" fmla="val 8696"/>
             </a:avLst>
           </a:prstGeom>
           <a:solidFill>
@@ -8571,8 +8571,8 @@
         </p:nvSpPr>
         <p:spPr>
           <a:xfrm>
-            <a:off x="7799832" y="1472184"/>
-            <a:ext cx="3145536" cy="256032"/>
+            <a:off x="7708392" y="1453896"/>
+            <a:ext cx="3282696" cy="228600"/>
           </a:xfrm>
           <a:prstGeom prst="rect">
             <a:avLst/>
@@ -8588,7 +8588,7 @@
               <a:buNone/>
             </a:pPr>
             <a:r>
-              <a:rPr lang="en-US" sz="1300" b="1" dirty="0">
+              <a:rPr lang="en-US" sz="1220" b="1" dirty="0">
                 <a:solidFill>
                   <a:srgbClr val="0068B7"/>
                 </a:solidFill>
@@ -8598,7 +8598,7 @@
               </a:rPr>
               <a:t>Risk check</a:t>
             </a:r>
-            <a:endParaRPr lang="en-US" sz="1300" dirty="0"/>
+            <a:endParaRPr lang="en-US" sz="1220" dirty="0"/>
           </a:p>
         </p:txBody>
       </p:sp>
@@ -8610,8 +8610,8 @@
         </p:nvSpPr>
         <p:spPr>
           <a:xfrm>
-            <a:off x="7799832" y="1801368"/>
-            <a:ext cx="3145536" cy="688543"/>
+            <a:off x="7708392" y="1764792"/>
+            <a:ext cx="3282696" cy="749808"/>
           </a:xfrm>
           <a:prstGeom prst="rect">
             <a:avLst/>
@@ -8629,7 +8629,7 @@
               <a:buNone/>
             </a:pPr>
             <a:r>
-              <a:rPr lang="en-US" sz="1320" dirty="0">
+              <a:rPr lang="en-US" sz="1220" dirty="0">
                 <a:solidFill>
                   <a:srgbClr val="17364A"/>
                 </a:solidFill>
@@ -8637,9 +8637,9 @@
                 <a:ea typeface="Aptos" pitchFamily="34" charset="-122"/>
                 <a:cs typeface="Aptos" pitchFamily="34" charset="-120"/>
               </a:rPr>
-              <a:t>For generative AI, privacy-preserving design means controlling what data can be placed in prompts, what.</a:t>
-            </a:r>
-            <a:endParaRPr lang="en-US" sz="1320" dirty="0"/>
+              <a:t>For generative AI, privacy-preserving design means controlling what data can be.</a:t>
+            </a:r>
+            <a:endParaRPr lang="en-US" sz="1220" dirty="0"/>
           </a:p>
         </p:txBody>
       </p:sp>
@@ -8651,12 +8651,12 @@
         </p:nvSpPr>
         <p:spPr>
           <a:xfrm>
-            <a:off x="7635240" y="2718511"/>
-            <a:ext cx="3474720" cy="1536192"/>
+            <a:off x="7543800" y="2724912"/>
+            <a:ext cx="3611880" cy="1527048"/>
           </a:xfrm>
           <a:prstGeom prst="roundRect">
             <a:avLst>
-              <a:gd name="adj" fmla="val 7143"/>
+              <a:gd name="adj" fmla="val 7186"/>
             </a:avLst>
           </a:prstGeom>
           <a:solidFill>
@@ -8678,8 +8678,8 @@
         </p:nvSpPr>
         <p:spPr>
           <a:xfrm>
-            <a:off x="7799832" y="2864815"/>
-            <a:ext cx="3145536" cy="256032"/>
+            <a:off x="7708392" y="2852928"/>
+            <a:ext cx="3282696" cy="228600"/>
           </a:xfrm>
           <a:prstGeom prst="rect">
             <a:avLst/>
@@ -8695,7 +8695,7 @@
               <a:buNone/>
             </a:pPr>
             <a:r>
-              <a:rPr lang="en-US" sz="1300" b="1" dirty="0">
+              <a:rPr lang="en-US" sz="1220" b="1" dirty="0">
                 <a:solidFill>
                   <a:srgbClr val="0068B7"/>
                 </a:solidFill>
@@ -8705,7 +8705,7 @@
               </a:rPr>
               <a:t>Concept checkpoints</a:t>
             </a:r>
-            <a:endParaRPr lang="en-US" sz="1300" dirty="0"/>
+            <a:endParaRPr lang="en-US" sz="1220" dirty="0"/>
           </a:p>
         </p:txBody>
       </p:sp>
@@ -8717,8 +8717,8 @@
         </p:nvSpPr>
         <p:spPr>
           <a:xfrm>
-            <a:off x="7818120" y="3230575"/>
-            <a:ext cx="3090672" cy="877824"/>
+            <a:off x="7726680" y="3182112"/>
+            <a:ext cx="3227832" cy="960120"/>
           </a:xfrm>
           <a:prstGeom prst="rect">
             <a:avLst/>
@@ -8736,7 +8736,7 @@
               <a:buNone/>
             </a:pPr>
             <a:r>
-              <a:rPr lang="en-US" sz="1220" dirty="0">
+              <a:rPr lang="en-US" sz="1140" dirty="0">
                 <a:solidFill>
                   <a:srgbClr val="17364A"/>
                 </a:solidFill>
@@ -8744,16 +8744,16 @@
                 <a:ea typeface="Aptos" pitchFamily="34" charset="-122"/>
                 <a:cs typeface="Aptos" pitchFamily="34" charset="-120"/>
               </a:rPr>
-              <a:t>For generative AI, privacy-preserving design means controlling.</a:t>
-            </a:r>
-            <a:endParaRPr lang="en-US" sz="1220" dirty="0"/>
-          </a:p>
-          <a:p>
-            <a:pPr indent="0" marL="0">
-              <a:buNone/>
-            </a:pPr>
-            <a:r>
-              <a:rPr lang="en-US" sz="1220" dirty="0">
+              <a:t>For generative AI, privacy-preserving design means.</a:t>
+            </a:r>
+            <a:endParaRPr lang="en-US" sz="1140" dirty="0"/>
+          </a:p>
+          <a:p>
+            <a:pPr indent="0" marL="0">
+              <a:buNone/>
+            </a:pPr>
+            <a:r>
+              <a:rPr lang="en-US" sz="1140" dirty="0">
                 <a:solidFill>
                   <a:srgbClr val="17364A"/>
                 </a:solidFill>
@@ -8761,16 +8761,16 @@
                 <a:ea typeface="Aptos" pitchFamily="34" charset="-122"/>
                 <a:cs typeface="Aptos" pitchFamily="34" charset="-120"/>
               </a:rPr>
-              <a:t>Prompt templates should make prohibited content clear and should.</a:t>
-            </a:r>
-            <a:endParaRPr lang="en-US" sz="1220" dirty="0"/>
-          </a:p>
-          <a:p>
-            <a:pPr indent="0" marL="0">
-              <a:buNone/>
-            </a:pPr>
-            <a:r>
-              <a:rPr lang="en-US" sz="1220" dirty="0">
+              <a:t>Prompt templates should make prohibited content.</a:t>
+            </a:r>
+            <a:endParaRPr lang="en-US" sz="1140" dirty="0"/>
+          </a:p>
+          <a:p>
+            <a:pPr indent="0" marL="0">
+              <a:buNone/>
+            </a:pPr>
+            <a:r>
+              <a:rPr lang="en-US" sz="1140" dirty="0">
                 <a:solidFill>
                   <a:srgbClr val="17364A"/>
                 </a:solidFill>
@@ -8778,9 +8778,9 @@
                 <a:ea typeface="Aptos" pitchFamily="34" charset="-122"/>
                 <a:cs typeface="Aptos" pitchFamily="34" charset="-120"/>
               </a:rPr>
-              <a:t>For predictive analytics, privacy concerns include which features.</a:t>
-            </a:r>
-            <a:endParaRPr lang="en-US" sz="1220" dirty="0"/>
+              <a:t>For predictive analytics, privacy concerns include.</a:t>
+            </a:r>
+            <a:endParaRPr lang="en-US" sz="1140" dirty="0"/>
           </a:p>
         </p:txBody>
       </p:sp>
@@ -8792,12 +8792,12 @@
         </p:nvSpPr>
         <p:spPr>
           <a:xfrm>
-            <a:off x="7635240" y="4391863"/>
-            <a:ext cx="3474720" cy="1255471"/>
+            <a:off x="7543800" y="4389120"/>
+            <a:ext cx="3611880" cy="1261872"/>
           </a:xfrm>
           <a:prstGeom prst="roundRect">
             <a:avLst>
-              <a:gd name="adj" fmla="val 8740"/>
+              <a:gd name="adj" fmla="val 8696"/>
             </a:avLst>
           </a:prstGeom>
           <a:solidFill>
@@ -8819,8 +8819,8 @@
         </p:nvSpPr>
         <p:spPr>
           <a:xfrm>
-            <a:off x="7799832" y="4538167"/>
-            <a:ext cx="3145536" cy="256032"/>
+            <a:off x="7708392" y="4517136"/>
+            <a:ext cx="3282696" cy="228600"/>
           </a:xfrm>
           <a:prstGeom prst="rect">
             <a:avLst/>
@@ -8836,7 +8836,7 @@
               <a:buNone/>
             </a:pPr>
             <a:r>
-              <a:rPr lang="en-US" sz="1300" b="1" dirty="0">
+              <a:rPr lang="en-US" sz="1220" b="1" dirty="0">
                 <a:solidFill>
                   <a:srgbClr val="0068B7"/>
                 </a:solidFill>
@@ -8846,7 +8846,7 @@
               </a:rPr>
               <a:t>Safeguard to plan</a:t>
             </a:r>
-            <a:endParaRPr lang="en-US" sz="1300" dirty="0"/>
+            <a:endParaRPr lang="en-US" sz="1220" dirty="0"/>
           </a:p>
         </p:txBody>
       </p:sp>
@@ -8858,8 +8858,8 @@
         </p:nvSpPr>
         <p:spPr>
           <a:xfrm>
-            <a:off x="7799832" y="4867351"/>
-            <a:ext cx="3145536" cy="688543"/>
+            <a:off x="7708392" y="4828032"/>
+            <a:ext cx="3282696" cy="749808"/>
           </a:xfrm>
           <a:prstGeom prst="rect">
             <a:avLst/>
@@ -8877,7 +8877,7 @@
               <a:buNone/>
             </a:pPr>
             <a:r>
-              <a:rPr lang="en-US" sz="1320" dirty="0">
+              <a:rPr lang="en-US" sz="1220" dirty="0">
                 <a:solidFill>
                   <a:srgbClr val="17364A"/>
                 </a:solidFill>
@@ -8885,9 +8885,9 @@
                 <a:ea typeface="Aptos" pitchFamily="34" charset="-122"/>
                 <a:cs typeface="Aptos" pitchFamily="34" charset="-120"/>
               </a:rPr>
-              <a:t>Identify what could go wrong, who could be affected, what safeguards are needed, and what evidence should be reviewed before use.</a:t>
-            </a:r>
-            <a:endParaRPr lang="en-US" sz="1320" dirty="0"/>
+              <a:t>Identify what could go wrong, who could be affected, what safeguards are needed,.</a:t>
+            </a:r>
+            <a:endParaRPr lang="en-US" sz="1220" dirty="0"/>
           </a:p>
         </p:txBody>
       </p:sp>
@@ -9178,8 +9178,8 @@
         </p:nvSpPr>
         <p:spPr>
           <a:xfrm>
-            <a:off x="868680" y="1508760"/>
-            <a:ext cx="6309360" cy="4160520"/>
+            <a:off x="822960" y="1463040"/>
+            <a:ext cx="6565392" cy="4343400"/>
           </a:xfrm>
           <a:prstGeom prst="rect">
             <a:avLst/>
@@ -9197,7 +9197,7 @@
               <a:buNone/>
             </a:pPr>
             <a:r>
-              <a:rPr lang="en-US" sz="2100" dirty="0">
+              <a:rPr lang="en-US" sz="1920" dirty="0">
                 <a:solidFill>
                   <a:srgbClr val="003A63"/>
                 </a:solidFill>
@@ -9205,16 +9205,16 @@
                 <a:ea typeface="Aptos" pitchFamily="34" charset="-122"/>
                 <a:cs typeface="Aptos" pitchFamily="34" charset="-120"/>
               </a:rPr>
-              <a:t>• Which AI use cases in your agency require identifiable or sensitive data, and which could be.</a:t>
-            </a:r>
-            <a:endParaRPr lang="en-US" sz="2100" dirty="0"/>
-          </a:p>
-          <a:p>
-            <a:pPr indent="0" marL="0">
-              <a:buNone/>
-            </a:pPr>
-            <a:r>
-              <a:rPr lang="en-US" sz="2100" dirty="0">
+              <a:t>• Which AI use cases in your agency require identifiable or sensitive data,.</a:t>
+            </a:r>
+            <a:endParaRPr lang="en-US" sz="1920" dirty="0"/>
+          </a:p>
+          <a:p>
+            <a:pPr indent="0" marL="0">
+              <a:buNone/>
+            </a:pPr>
+            <a:r>
+              <a:rPr lang="en-US" sz="1920" dirty="0">
                 <a:solidFill>
                   <a:srgbClr val="003A63"/>
                 </a:solidFill>
@@ -9224,14 +9224,14 @@
               </a:rPr>
               <a:t>• What data elements create the greatest re-identification risk in your context?</a:t>
             </a:r>
-            <a:endParaRPr lang="en-US" sz="2100" dirty="0"/>
-          </a:p>
-          <a:p>
-            <a:pPr indent="0" marL="0">
-              <a:buNone/>
-            </a:pPr>
-            <a:r>
-              <a:rPr lang="en-US" sz="2100" dirty="0">
+            <a:endParaRPr lang="en-US" sz="1920" dirty="0"/>
+          </a:p>
+          <a:p>
+            <a:pPr indent="0" marL="0">
+              <a:buNone/>
+            </a:pPr>
+            <a:r>
+              <a:rPr lang="en-US" sz="1920" dirty="0">
                 <a:solidFill>
                   <a:srgbClr val="003A63"/>
                 </a:solidFill>
@@ -9239,9 +9239,9 @@
                 <a:ea typeface="Aptos" pitchFamily="34" charset="-122"/>
                 <a:cs typeface="Aptos" pitchFamily="34" charset="-120"/>
               </a:rPr>
-              <a:t>• How are free-text fields reviewed before they are used in AI-supported workflows?</a:t>
-            </a:r>
-            <a:endParaRPr lang="en-US" sz="2100" dirty="0"/>
+              <a:t>• How are free-text fields reviewed before they are used in AI-supported.</a:t>
+            </a:r>
+            <a:endParaRPr lang="en-US" sz="1920" dirty="0"/>
           </a:p>
         </p:txBody>
       </p:sp>
@@ -9253,12 +9253,12 @@
         </p:nvSpPr>
         <p:spPr>
           <a:xfrm>
-            <a:off x="7635240" y="1325880"/>
-            <a:ext cx="3474720" cy="1255471"/>
+            <a:off x="7543800" y="1325880"/>
+            <a:ext cx="3611880" cy="1261872"/>
           </a:xfrm>
           <a:prstGeom prst="roundRect">
             <a:avLst>
-              <a:gd name="adj" fmla="val 8740"/>
+              <a:gd name="adj" fmla="val 8696"/>
             </a:avLst>
           </a:prstGeom>
           <a:solidFill>
@@ -9280,8 +9280,8 @@
         </p:nvSpPr>
         <p:spPr>
           <a:xfrm>
-            <a:off x="7799832" y="1472184"/>
-            <a:ext cx="3145536" cy="256032"/>
+            <a:off x="7708392" y="1453896"/>
+            <a:ext cx="3282696" cy="228600"/>
           </a:xfrm>
           <a:prstGeom prst="rect">
             <a:avLst/>
@@ -9297,7 +9297,7 @@
               <a:buNone/>
             </a:pPr>
             <a:r>
-              <a:rPr lang="en-US" sz="1300" b="1" dirty="0">
+              <a:rPr lang="en-US" sz="1220" b="1" dirty="0">
                 <a:solidFill>
                   <a:srgbClr val="0068B7"/>
                 </a:solidFill>
@@ -9307,7 +9307,7 @@
               </a:rPr>
               <a:t>Risk check</a:t>
             </a:r>
-            <a:endParaRPr lang="en-US" sz="1300" dirty="0"/>
+            <a:endParaRPr lang="en-US" sz="1220" dirty="0"/>
           </a:p>
         </p:txBody>
       </p:sp>
@@ -9319,8 +9319,8 @@
         </p:nvSpPr>
         <p:spPr>
           <a:xfrm>
-            <a:off x="7799832" y="1801368"/>
-            <a:ext cx="3145536" cy="688543"/>
+            <a:off x="7708392" y="1764792"/>
+            <a:ext cx="3282696" cy="749808"/>
           </a:xfrm>
           <a:prstGeom prst="rect">
             <a:avLst/>
@@ -9338,7 +9338,7 @@
               <a:buNone/>
             </a:pPr>
             <a:r>
-              <a:rPr lang="en-US" sz="1320" dirty="0">
+              <a:rPr lang="en-US" sz="1220" dirty="0">
                 <a:solidFill>
                   <a:srgbClr val="17364A"/>
                 </a:solidFill>
@@ -9346,9 +9346,9 @@
                 <a:ea typeface="Aptos" pitchFamily="34" charset="-122"/>
                 <a:cs typeface="Aptos" pitchFamily="34" charset="-120"/>
               </a:rPr>
-              <a:t>Which AI use cases in your agency require identifiable or sensitive data, and which could be completed.</a:t>
-            </a:r>
-            <a:endParaRPr lang="en-US" sz="1320" dirty="0"/>
+              <a:t>Which AI use cases in your agency require identifiable or sensitive data, and.</a:t>
+            </a:r>
+            <a:endParaRPr lang="en-US" sz="1220" dirty="0"/>
           </a:p>
         </p:txBody>
       </p:sp>
@@ -9360,12 +9360,12 @@
         </p:nvSpPr>
         <p:spPr>
           <a:xfrm>
-            <a:off x="7635240" y="2718511"/>
-            <a:ext cx="3474720" cy="1536192"/>
+            <a:off x="7543800" y="2724912"/>
+            <a:ext cx="3611880" cy="1527048"/>
           </a:xfrm>
           <a:prstGeom prst="roundRect">
             <a:avLst>
-              <a:gd name="adj" fmla="val 7143"/>
+              <a:gd name="adj" fmla="val 7186"/>
             </a:avLst>
           </a:prstGeom>
           <a:solidFill>
@@ -9387,8 +9387,8 @@
         </p:nvSpPr>
         <p:spPr>
           <a:xfrm>
-            <a:off x="7799832" y="2864815"/>
-            <a:ext cx="3145536" cy="256032"/>
+            <a:off x="7708392" y="2852928"/>
+            <a:ext cx="3282696" cy="228600"/>
           </a:xfrm>
           <a:prstGeom prst="rect">
             <a:avLst/>
@@ -9404,7 +9404,7 @@
               <a:buNone/>
             </a:pPr>
             <a:r>
-              <a:rPr lang="en-US" sz="1300" b="1" dirty="0">
+              <a:rPr lang="en-US" sz="1220" b="1" dirty="0">
                 <a:solidFill>
                   <a:srgbClr val="0068B7"/>
                 </a:solidFill>
@@ -9414,7 +9414,7 @@
               </a:rPr>
               <a:t>Concept checkpoints</a:t>
             </a:r>
-            <a:endParaRPr lang="en-US" sz="1300" dirty="0"/>
+            <a:endParaRPr lang="en-US" sz="1220" dirty="0"/>
           </a:p>
         </p:txBody>
       </p:sp>
@@ -9426,8 +9426,8 @@
         </p:nvSpPr>
         <p:spPr>
           <a:xfrm>
-            <a:off x="7818120" y="3230575"/>
-            <a:ext cx="3090672" cy="877824"/>
+            <a:off x="7726680" y="3182112"/>
+            <a:ext cx="3227832" cy="960120"/>
           </a:xfrm>
           <a:prstGeom prst="rect">
             <a:avLst/>
@@ -9445,7 +9445,7 @@
               <a:buNone/>
             </a:pPr>
             <a:r>
-              <a:rPr lang="en-US" sz="1220" dirty="0">
+              <a:rPr lang="en-US" sz="1140" dirty="0">
                 <a:solidFill>
                   <a:srgbClr val="17364A"/>
                 </a:solidFill>
@@ -9453,16 +9453,16 @@
                 <a:ea typeface="Aptos" pitchFamily="34" charset="-122"/>
                 <a:cs typeface="Aptos" pitchFamily="34" charset="-120"/>
               </a:rPr>
-              <a:t>Which AI use cases in your agency require identifiable or.</a:t>
-            </a:r>
-            <a:endParaRPr lang="en-US" sz="1220" dirty="0"/>
-          </a:p>
-          <a:p>
-            <a:pPr indent="0" marL="0">
-              <a:buNone/>
-            </a:pPr>
-            <a:r>
-              <a:rPr lang="en-US" sz="1220" dirty="0">
+              <a:t>Which AI use cases in your agency require.</a:t>
+            </a:r>
+            <a:endParaRPr lang="en-US" sz="1140" dirty="0"/>
+          </a:p>
+          <a:p>
+            <a:pPr indent="0" marL="0">
+              <a:buNone/>
+            </a:pPr>
+            <a:r>
+              <a:rPr lang="en-US" sz="1140" dirty="0">
                 <a:solidFill>
                   <a:srgbClr val="17364A"/>
                 </a:solidFill>
@@ -9470,16 +9470,16 @@
                 <a:ea typeface="Aptos" pitchFamily="34" charset="-122"/>
                 <a:cs typeface="Aptos" pitchFamily="34" charset="-120"/>
               </a:rPr>
-              <a:t>What data elements create the greatest re-identification risk in.</a:t>
-            </a:r>
-            <a:endParaRPr lang="en-US" sz="1220" dirty="0"/>
-          </a:p>
-          <a:p>
-            <a:pPr indent="0" marL="0">
-              <a:buNone/>
-            </a:pPr>
-            <a:r>
-              <a:rPr lang="en-US" sz="1220" dirty="0">
+              <a:t>What data elements create the greatest.</a:t>
+            </a:r>
+            <a:endParaRPr lang="en-US" sz="1140" dirty="0"/>
+          </a:p>
+          <a:p>
+            <a:pPr indent="0" marL="0">
+              <a:buNone/>
+            </a:pPr>
+            <a:r>
+              <a:rPr lang="en-US" sz="1140" dirty="0">
                 <a:solidFill>
                   <a:srgbClr val="17364A"/>
                 </a:solidFill>
@@ -9487,9 +9487,9 @@
                 <a:ea typeface="Aptos" pitchFamily="34" charset="-122"/>
                 <a:cs typeface="Aptos" pitchFamily="34" charset="-120"/>
               </a:rPr>
-              <a:t>How are free-text fields reviewed before they are used in.</a:t>
-            </a:r>
-            <a:endParaRPr lang="en-US" sz="1220" dirty="0"/>
+              <a:t>How are free-text fields reviewed before they are.</a:t>
+            </a:r>
+            <a:endParaRPr lang="en-US" sz="1140" dirty="0"/>
           </a:p>
         </p:txBody>
       </p:sp>
@@ -9501,12 +9501,12 @@
         </p:nvSpPr>
         <p:spPr>
           <a:xfrm>
-            <a:off x="7635240" y="4391863"/>
-            <a:ext cx="3474720" cy="1255471"/>
+            <a:off x="7543800" y="4389120"/>
+            <a:ext cx="3611880" cy="1261872"/>
           </a:xfrm>
           <a:prstGeom prst="roundRect">
             <a:avLst>
-              <a:gd name="adj" fmla="val 8740"/>
+              <a:gd name="adj" fmla="val 8696"/>
             </a:avLst>
           </a:prstGeom>
           <a:solidFill>
@@ -9528,8 +9528,8 @@
         </p:nvSpPr>
         <p:spPr>
           <a:xfrm>
-            <a:off x="7799832" y="4538167"/>
-            <a:ext cx="3145536" cy="256032"/>
+            <a:off x="7708392" y="4517136"/>
+            <a:ext cx="3282696" cy="228600"/>
           </a:xfrm>
           <a:prstGeom prst="rect">
             <a:avLst/>
@@ -9545,7 +9545,7 @@
               <a:buNone/>
             </a:pPr>
             <a:r>
-              <a:rPr lang="en-US" sz="1300" b="1" dirty="0">
+              <a:rPr lang="en-US" sz="1220" b="1" dirty="0">
                 <a:solidFill>
                   <a:srgbClr val="0068B7"/>
                 </a:solidFill>
@@ -9555,7 +9555,7 @@
               </a:rPr>
               <a:t>Safeguard to plan</a:t>
             </a:r>
-            <a:endParaRPr lang="en-US" sz="1300" dirty="0"/>
+            <a:endParaRPr lang="en-US" sz="1220" dirty="0"/>
           </a:p>
         </p:txBody>
       </p:sp>
@@ -9567,8 +9567,8 @@
         </p:nvSpPr>
         <p:spPr>
           <a:xfrm>
-            <a:off x="7799832" y="4867351"/>
-            <a:ext cx="3145536" cy="688543"/>
+            <a:off x="7708392" y="4828032"/>
+            <a:ext cx="3282696" cy="749808"/>
           </a:xfrm>
           <a:prstGeom prst="rect">
             <a:avLst/>
@@ -9586,7 +9586,7 @@
               <a:buNone/>
             </a:pPr>
             <a:r>
-              <a:rPr lang="en-US" sz="1320" dirty="0">
+              <a:rPr lang="en-US" sz="1220" dirty="0">
                 <a:solidFill>
                   <a:srgbClr val="17364A"/>
                 </a:solidFill>
@@ -9594,9 +9594,9 @@
                 <a:ea typeface="Aptos" pitchFamily="34" charset="-122"/>
                 <a:cs typeface="Aptos" pitchFamily="34" charset="-120"/>
               </a:rPr>
-              <a:t>Identify what could go wrong, who could be affected, what safeguards are needed, and what evidence should be reviewed before use.</a:t>
-            </a:r>
-            <a:endParaRPr lang="en-US" sz="1320" dirty="0"/>
+              <a:t>Identify what could go wrong, who could be affected, what safeguards are needed,.</a:t>
+            </a:r>
+            <a:endParaRPr lang="en-US" sz="1220" dirty="0"/>
           </a:p>
         </p:txBody>
       </p:sp>
@@ -9887,8 +9887,8 @@
         </p:nvSpPr>
         <p:spPr>
           <a:xfrm>
-            <a:off x="868680" y="1508760"/>
-            <a:ext cx="6309360" cy="4160520"/>
+            <a:off x="822960" y="1463040"/>
+            <a:ext cx="6565392" cy="4343400"/>
           </a:xfrm>
           <a:prstGeom prst="rect">
             <a:avLst/>
@@ -9906,7 +9906,7 @@
               <a:buNone/>
             </a:pPr>
             <a:r>
-              <a:rPr lang="en-US" sz="2100" dirty="0">
+              <a:rPr lang="en-US" sz="1920" dirty="0">
                 <a:solidFill>
                   <a:srgbClr val="003A63"/>
                 </a:solidFill>
@@ -9914,16 +9914,16 @@
                 <a:ea typeface="Aptos" pitchFamily="34" charset="-122"/>
                 <a:cs typeface="Aptos" pitchFamily="34" charset="-120"/>
               </a:rPr>
-              <a:t>• Which outputs could reveal sensitive information even if the input data are controlled?</a:t>
-            </a:r>
-            <a:endParaRPr lang="en-US" sz="2100" dirty="0"/>
-          </a:p>
-          <a:p>
-            <a:pPr indent="0" marL="0">
-              <a:buNone/>
-            </a:pPr>
-            <a:r>
-              <a:rPr lang="en-US" sz="2100" dirty="0">
+              <a:t>• Which outputs could reveal sensitive information even if the input data are.</a:t>
+            </a:r>
+            <a:endParaRPr lang="en-US" sz="1920" dirty="0"/>
+          </a:p>
+          <a:p>
+            <a:pPr indent="0" marL="0">
+              <a:buNone/>
+            </a:pPr>
+            <a:r>
+              <a:rPr lang="en-US" sz="1920" dirty="0">
                 <a:solidFill>
                   <a:srgbClr val="003A63"/>
                 </a:solidFill>
@@ -9933,7 +9933,7 @@
               </a:rPr>
               <a:t>• Who has authority to approve privacy-preserving AI controls for a workflow?</a:t>
             </a:r>
-            <a:endParaRPr lang="en-US" sz="2100" dirty="0"/>
+            <a:endParaRPr lang="en-US" sz="1920" dirty="0"/>
           </a:p>
         </p:txBody>
       </p:sp>
@@ -9945,12 +9945,12 @@
         </p:nvSpPr>
         <p:spPr>
           <a:xfrm>
-            <a:off x="7635240" y="1325880"/>
-            <a:ext cx="3474720" cy="1207008"/>
+            <a:off x="7543800" y="1325880"/>
+            <a:ext cx="3611880" cy="1261872"/>
           </a:xfrm>
           <a:prstGeom prst="roundRect">
             <a:avLst>
-              <a:gd name="adj" fmla="val 9091"/>
+              <a:gd name="adj" fmla="val 8696"/>
             </a:avLst>
           </a:prstGeom>
           <a:solidFill>
@@ -9972,8 +9972,8 @@
         </p:nvSpPr>
         <p:spPr>
           <a:xfrm>
-            <a:off x="7799832" y="1472184"/>
-            <a:ext cx="3145536" cy="256032"/>
+            <a:off x="7708392" y="1453896"/>
+            <a:ext cx="3282696" cy="228600"/>
           </a:xfrm>
           <a:prstGeom prst="rect">
             <a:avLst/>
@@ -9989,7 +9989,7 @@
               <a:buNone/>
             </a:pPr>
             <a:r>
-              <a:rPr lang="en-US" sz="1300" b="1" dirty="0">
+              <a:rPr lang="en-US" sz="1220" b="1" dirty="0">
                 <a:solidFill>
                   <a:srgbClr val="0068B7"/>
                 </a:solidFill>
@@ -9999,7 +9999,7 @@
               </a:rPr>
               <a:t>Risk check</a:t>
             </a:r>
-            <a:endParaRPr lang="en-US" sz="1300" dirty="0"/>
+            <a:endParaRPr lang="en-US" sz="1220" dirty="0"/>
           </a:p>
         </p:txBody>
       </p:sp>
@@ -10011,8 +10011,8 @@
         </p:nvSpPr>
         <p:spPr>
           <a:xfrm>
-            <a:off x="7799832" y="1801368"/>
-            <a:ext cx="3145536" cy="640080"/>
+            <a:off x="7708392" y="1764792"/>
+            <a:ext cx="3282696" cy="749808"/>
           </a:xfrm>
           <a:prstGeom prst="rect">
             <a:avLst/>
@@ -10030,7 +10030,7 @@
               <a:buNone/>
             </a:pPr>
             <a:r>
-              <a:rPr lang="en-US" sz="1320" dirty="0">
+              <a:rPr lang="en-US" sz="1220" dirty="0">
                 <a:solidFill>
                   <a:srgbClr val="17364A"/>
                 </a:solidFill>
@@ -10038,9 +10038,9 @@
                 <a:ea typeface="Aptos" pitchFamily="34" charset="-122"/>
                 <a:cs typeface="Aptos" pitchFamily="34" charset="-120"/>
               </a:rPr>
-              <a:t>Which outputs could reveal sensitive information even if the input data are controlled?</a:t>
-            </a:r>
-            <a:endParaRPr lang="en-US" sz="1320" dirty="0"/>
+              <a:t>Which outputs could reveal sensitive information even if the input data are.</a:t>
+            </a:r>
+            <a:endParaRPr lang="en-US" sz="1220" dirty="0"/>
           </a:p>
         </p:txBody>
       </p:sp>
@@ -10052,12 +10052,12 @@
         </p:nvSpPr>
         <p:spPr>
           <a:xfrm>
-            <a:off x="7635240" y="2670048"/>
-            <a:ext cx="3474720" cy="1536192"/>
+            <a:off x="7543800" y="2724912"/>
+            <a:ext cx="3611880" cy="1527048"/>
           </a:xfrm>
           <a:prstGeom prst="roundRect">
             <a:avLst>
-              <a:gd name="adj" fmla="val 7143"/>
+              <a:gd name="adj" fmla="val 7186"/>
             </a:avLst>
           </a:prstGeom>
           <a:solidFill>
@@ -10079,8 +10079,8 @@
         </p:nvSpPr>
         <p:spPr>
           <a:xfrm>
-            <a:off x="7799832" y="2816352"/>
-            <a:ext cx="3145536" cy="256032"/>
+            <a:off x="7708392" y="2852928"/>
+            <a:ext cx="3282696" cy="228600"/>
           </a:xfrm>
           <a:prstGeom prst="rect">
             <a:avLst/>
@@ -10096,7 +10096,7 @@
               <a:buNone/>
             </a:pPr>
             <a:r>
-              <a:rPr lang="en-US" sz="1300" b="1" dirty="0">
+              <a:rPr lang="en-US" sz="1220" b="1" dirty="0">
                 <a:solidFill>
                   <a:srgbClr val="0068B7"/>
                 </a:solidFill>
@@ -10106,7 +10106,7 @@
               </a:rPr>
               <a:t>Concept checkpoints</a:t>
             </a:r>
-            <a:endParaRPr lang="en-US" sz="1300" dirty="0"/>
+            <a:endParaRPr lang="en-US" sz="1220" dirty="0"/>
           </a:p>
         </p:txBody>
       </p:sp>
@@ -10118,8 +10118,8 @@
         </p:nvSpPr>
         <p:spPr>
           <a:xfrm>
-            <a:off x="7818120" y="3182112"/>
-            <a:ext cx="3090672" cy="877824"/>
+            <a:off x="7726680" y="3182112"/>
+            <a:ext cx="3227832" cy="960120"/>
           </a:xfrm>
           <a:prstGeom prst="rect">
             <a:avLst/>
@@ -10137,7 +10137,7 @@
               <a:buNone/>
             </a:pPr>
             <a:r>
-              <a:rPr lang="en-US" sz="1220" dirty="0">
+              <a:rPr lang="en-US" sz="1140" dirty="0">
                 <a:solidFill>
                   <a:srgbClr val="17364A"/>
                 </a:solidFill>
@@ -10145,16 +10145,16 @@
                 <a:ea typeface="Aptos" pitchFamily="34" charset="-122"/>
                 <a:cs typeface="Aptos" pitchFamily="34" charset="-120"/>
               </a:rPr>
-              <a:t>Which outputs could reveal sensitive information even if the input.</a:t>
-            </a:r>
-            <a:endParaRPr lang="en-US" sz="1220" dirty="0"/>
-          </a:p>
-          <a:p>
-            <a:pPr indent="0" marL="0">
-              <a:buNone/>
-            </a:pPr>
-            <a:r>
-              <a:rPr lang="en-US" sz="1220" dirty="0">
+              <a:t>Which outputs could reveal sensitive information.</a:t>
+            </a:r>
+            <a:endParaRPr lang="en-US" sz="1140" dirty="0"/>
+          </a:p>
+          <a:p>
+            <a:pPr indent="0" marL="0">
+              <a:buNone/>
+            </a:pPr>
+            <a:r>
+              <a:rPr lang="en-US" sz="1140" dirty="0">
                 <a:solidFill>
                   <a:srgbClr val="17364A"/>
                 </a:solidFill>
@@ -10162,9 +10162,9 @@
                 <a:ea typeface="Aptos" pitchFamily="34" charset="-122"/>
                 <a:cs typeface="Aptos" pitchFamily="34" charset="-120"/>
               </a:rPr>
-              <a:t>Who has authority to approve privacy-preserving AI controls for a.</a:t>
-            </a:r>
-            <a:endParaRPr lang="en-US" sz="1220" dirty="0"/>
+              <a:t>Who has authority to approve privacy-preserving AI.</a:t>
+            </a:r>
+            <a:endParaRPr lang="en-US" sz="1140" dirty="0"/>
           </a:p>
         </p:txBody>
       </p:sp>
@@ -10176,12 +10176,12 @@
         </p:nvSpPr>
         <p:spPr>
           <a:xfrm>
-            <a:off x="7635240" y="4343400"/>
-            <a:ext cx="3474720" cy="1255471"/>
+            <a:off x="7543800" y="4389120"/>
+            <a:ext cx="3611880" cy="1261872"/>
           </a:xfrm>
           <a:prstGeom prst="roundRect">
             <a:avLst>
-              <a:gd name="adj" fmla="val 8740"/>
+              <a:gd name="adj" fmla="val 8696"/>
             </a:avLst>
           </a:prstGeom>
           <a:solidFill>
@@ -10203,8 +10203,8 @@
         </p:nvSpPr>
         <p:spPr>
           <a:xfrm>
-            <a:off x="7799832" y="4489704"/>
-            <a:ext cx="3145536" cy="256032"/>
+            <a:off x="7708392" y="4517136"/>
+            <a:ext cx="3282696" cy="228600"/>
           </a:xfrm>
           <a:prstGeom prst="rect">
             <a:avLst/>
@@ -10220,7 +10220,7 @@
               <a:buNone/>
             </a:pPr>
             <a:r>
-              <a:rPr lang="en-US" sz="1300" b="1" dirty="0">
+              <a:rPr lang="en-US" sz="1220" b="1" dirty="0">
                 <a:solidFill>
                   <a:srgbClr val="0068B7"/>
                 </a:solidFill>
@@ -10230,7 +10230,7 @@
               </a:rPr>
               <a:t>Safeguard to plan</a:t>
             </a:r>
-            <a:endParaRPr lang="en-US" sz="1300" dirty="0"/>
+            <a:endParaRPr lang="en-US" sz="1220" dirty="0"/>
           </a:p>
         </p:txBody>
       </p:sp>
@@ -10242,8 +10242,8 @@
         </p:nvSpPr>
         <p:spPr>
           <a:xfrm>
-            <a:off x="7799832" y="4818888"/>
-            <a:ext cx="3145536" cy="688543"/>
+            <a:off x="7708392" y="4828032"/>
+            <a:ext cx="3282696" cy="749808"/>
           </a:xfrm>
           <a:prstGeom prst="rect">
             <a:avLst/>
@@ -10261,7 +10261,7 @@
               <a:buNone/>
             </a:pPr>
             <a:r>
-              <a:rPr lang="en-US" sz="1320" dirty="0">
+              <a:rPr lang="en-US" sz="1220" dirty="0">
                 <a:solidFill>
                   <a:srgbClr val="17364A"/>
                 </a:solidFill>
@@ -10269,9 +10269,9 @@
                 <a:ea typeface="Aptos" pitchFamily="34" charset="-122"/>
                 <a:cs typeface="Aptos" pitchFamily="34" charset="-120"/>
               </a:rPr>
-              <a:t>Identify what could go wrong, who could be affected, what safeguards are needed, and what evidence should be reviewed before use.</a:t>
-            </a:r>
-            <a:endParaRPr lang="en-US" sz="1320" dirty="0"/>
+              <a:t>Identify what could go wrong, who could be affected, what safeguards are needed,.</a:t>
+            </a:r>
+            <a:endParaRPr lang="en-US" sz="1220" dirty="0"/>
           </a:p>
         </p:txBody>
       </p:sp>
@@ -10589,7 +10589,7 @@
                 <a:ea typeface="Aptos" pitchFamily="34" charset="-122"/>
                 <a:cs typeface="Aptos" pitchFamily="34" charset="-120"/>
               </a:rPr>
-              <a:t>• Privacy-preserving AI is the set of technical, policy, and workflow practices that allow.</a:t>
+              <a:t>• Privacy-preserving AI is the set of technical, policy, and workflow.</a:t>
             </a:r>
             <a:endParaRPr lang="en-US" sz="2100" dirty="0"/>
           </a:p>
@@ -10606,7 +10606,7 @@
                 <a:ea typeface="Aptos" pitchFamily="34" charset="-122"/>
                 <a:cs typeface="Aptos" pitchFamily="34" charset="-120"/>
               </a:rPr>
-              <a:t>• This module focuses on how privacy protections must be built into AI planning before data are.</a:t>
+              <a:t>• This module focuses on how privacy protections must be built into AI.</a:t>
             </a:r>
             <a:endParaRPr lang="en-US" sz="2100" dirty="0"/>
           </a:p>
@@ -10623,7 +10623,7 @@
                 <a:ea typeface="Aptos" pitchFamily="34" charset="-122"/>
                 <a:cs typeface="Aptos" pitchFamily="34" charset="-120"/>
               </a:rPr>
-              <a:t>• Public health agencies often have legal authority to collect and use sensitive data, but.</a:t>
+              <a:t>• Public health agencies often have legal authority to collect and use.</a:t>
             </a:r>
             <a:endParaRPr lang="en-US" sz="2100" dirty="0"/>
           </a:p>
@@ -10664,8 +10664,8 @@
         </p:nvSpPr>
         <p:spPr>
           <a:xfrm>
-            <a:off x="8074152" y="1563624"/>
-            <a:ext cx="2825496" cy="256032"/>
+            <a:off x="8074152" y="1545336"/>
+            <a:ext cx="2825496" cy="228600"/>
           </a:xfrm>
           <a:prstGeom prst="rect">
             <a:avLst/>
@@ -10681,7 +10681,7 @@
               <a:buNone/>
             </a:pPr>
             <a:r>
-              <a:rPr lang="en-US" sz="1300" b="1" dirty="0">
+              <a:rPr lang="en-US" sz="1220" b="1" dirty="0">
                 <a:solidFill>
                   <a:srgbClr val="0068B7"/>
                 </a:solidFill>
@@ -10691,7 +10691,7 @@
               </a:rPr>
               <a:t>Module details</a:t>
             </a:r>
-            <a:endParaRPr lang="en-US" sz="1300" dirty="0"/>
+            <a:endParaRPr lang="en-US" sz="1220" dirty="0"/>
           </a:p>
         </p:txBody>
       </p:sp>
@@ -10703,8 +10703,8 @@
         </p:nvSpPr>
         <p:spPr>
           <a:xfrm>
-            <a:off x="8074152" y="1892808"/>
-            <a:ext cx="2825496" cy="1353312"/>
+            <a:off x="8074152" y="1856232"/>
+            <a:ext cx="2825496" cy="1408176"/>
           </a:xfrm>
           <a:prstGeom prst="rect">
             <a:avLst/>
@@ -10722,7 +10722,7 @@
               <a:buNone/>
             </a:pPr>
             <a:r>
-              <a:rPr lang="en-US" sz="1320" dirty="0">
+              <a:rPr lang="en-US" sz="1220" dirty="0">
                 <a:solidFill>
                   <a:srgbClr val="17364A"/>
                 </a:solidFill>
@@ -10730,9 +10730,9 @@
                 <a:ea typeface="Aptos" pitchFamily="34" charset="-122"/>
                 <a:cs typeface="Aptos" pitchFamily="34" charset="-120"/>
               </a:rPr>
-              <a:t>Level: intermediate/practitioner Primary track: Governance and Security Track Appears in tracks: operations-data-quality</a:t>
-            </a:r>
-            <a:endParaRPr lang="en-US" sz="1320" dirty="0"/>
+              <a:t>Level: intermediate/practitioner Primary track: Governance and Security Track.</a:t>
+            </a:r>
+            <a:endParaRPr lang="en-US" sz="1220" dirty="0"/>
           </a:p>
         </p:txBody>
       </p:sp>
@@ -10771,8 +10771,8 @@
         </p:nvSpPr>
         <p:spPr>
           <a:xfrm>
-            <a:off x="8074152" y="3822192"/>
-            <a:ext cx="2825496" cy="256032"/>
+            <a:off x="8074152" y="3803904"/>
+            <a:ext cx="2825496" cy="228600"/>
           </a:xfrm>
           <a:prstGeom prst="rect">
             <a:avLst/>
@@ -10788,7 +10788,7 @@
               <a:buNone/>
             </a:pPr>
             <a:r>
-              <a:rPr lang="en-US" sz="1300" b="1" dirty="0">
+              <a:rPr lang="en-US" sz="1220" b="1" dirty="0">
                 <a:solidFill>
                   <a:srgbClr val="0068B7"/>
                 </a:solidFill>
@@ -10798,7 +10798,7 @@
               </a:rPr>
               <a:t>Learning sequence</a:t>
             </a:r>
-            <a:endParaRPr lang="en-US" sz="1300" dirty="0"/>
+            <a:endParaRPr lang="en-US" sz="1220" dirty="0"/>
           </a:p>
         </p:txBody>
       </p:sp>
@@ -10810,8 +10810,8 @@
         </p:nvSpPr>
         <p:spPr>
           <a:xfrm>
-            <a:off x="8092440" y="4187952"/>
-            <a:ext cx="2770632" cy="1033272"/>
+            <a:off x="8092440" y="4133088"/>
+            <a:ext cx="2770632" cy="1124712"/>
           </a:xfrm>
           <a:prstGeom prst="rect">
             <a:avLst/>
@@ -10829,7 +10829,7 @@
               <a:buNone/>
             </a:pPr>
             <a:r>
-              <a:rPr lang="en-US" sz="1220" dirty="0">
+              <a:rPr lang="en-US" sz="1140" dirty="0">
                 <a:solidFill>
                   <a:srgbClr val="17364A"/>
                 </a:solidFill>
@@ -10839,14 +10839,14 @@
               </a:rPr>
               <a:t>Read the module for shared vocabulary and context.</a:t>
             </a:r>
-            <a:endParaRPr lang="en-US" sz="1220" dirty="0"/>
-          </a:p>
-          <a:p>
-            <a:pPr indent="0" marL="0">
-              <a:buNone/>
-            </a:pPr>
-            <a:r>
-              <a:rPr lang="en-US" sz="1220" dirty="0">
+            <a:endParaRPr lang="en-US" sz="1140" dirty="0"/>
+          </a:p>
+          <a:p>
+            <a:pPr indent="0" marL="0">
+              <a:buNone/>
+            </a:pPr>
+            <a:r>
+              <a:rPr lang="en-US" sz="1140" dirty="0">
                 <a:solidFill>
                   <a:srgbClr val="17364A"/>
                 </a:solidFill>
@@ -10854,16 +10854,16 @@
                 <a:ea typeface="Aptos" pitchFamily="34" charset="-122"/>
                 <a:cs typeface="Aptos" pitchFamily="34" charset="-120"/>
               </a:rPr>
-              <a:t>Complete the practical exercise to apply the concept.</a:t>
-            </a:r>
-            <a:endParaRPr lang="en-US" sz="1220" dirty="0"/>
-          </a:p>
-          <a:p>
-            <a:pPr indent="0" marL="0">
-              <a:buNone/>
-            </a:pPr>
-            <a:r>
-              <a:rPr lang="en-US" sz="1220" dirty="0">
+              <a:t>Complete the practical exercise to apply the.</a:t>
+            </a:r>
+            <a:endParaRPr lang="en-US" sz="1140" dirty="0"/>
+          </a:p>
+          <a:p>
+            <a:pPr indent="0" marL="0">
+              <a:buNone/>
+            </a:pPr>
+            <a:r>
+              <a:rPr lang="en-US" sz="1140" dirty="0">
                 <a:solidFill>
                   <a:srgbClr val="17364A"/>
                 </a:solidFill>
@@ -10873,7 +10873,7 @@
               </a:rPr>
               <a:t>Use the notes and references for deeper review.</a:t>
             </a:r>
-            <a:endParaRPr lang="en-US" sz="1220" dirty="0"/>
+            <a:endParaRPr lang="en-US" sz="1140" dirty="0"/>
           </a:p>
         </p:txBody>
       </p:sp>
@@ -11164,8 +11164,8 @@
         </p:nvSpPr>
         <p:spPr>
           <a:xfrm>
-            <a:off x="868680" y="1508760"/>
-            <a:ext cx="6309360" cy="4160520"/>
+            <a:off x="822960" y="1463040"/>
+            <a:ext cx="6565392" cy="4343400"/>
           </a:xfrm>
           <a:prstGeom prst="rect">
             <a:avLst/>
@@ -11183,7 +11183,7 @@
               <a:buNone/>
             </a:pPr>
             <a:r>
-              <a:rPr lang="en-US" sz="2100" dirty="0">
+              <a:rPr lang="en-US" sz="1920" dirty="0">
                 <a:solidFill>
                   <a:srgbClr val="003A63"/>
                 </a:solidFill>
@@ -11191,16 +11191,16 @@
                 <a:ea typeface="Aptos" pitchFamily="34" charset="-122"/>
                 <a:cs typeface="Aptos" pitchFamily="34" charset="-120"/>
               </a:rPr>
-              <a:t>• Create a privacy-preserving AI review worksheet for one proposed public health AI workflow.</a:t>
-            </a:r>
-            <a:endParaRPr lang="en-US" sz="2100" dirty="0"/>
-          </a:p>
-          <a:p>
-            <a:pPr indent="0" marL="0">
-              <a:buNone/>
-            </a:pPr>
-            <a:r>
-              <a:rPr lang="en-US" sz="2100" dirty="0">
+              <a:t>• Create a privacy-preserving AI review worksheet for one proposed public.</a:t>
+            </a:r>
+            <a:endParaRPr lang="en-US" sz="1920" dirty="0"/>
+          </a:p>
+          <a:p>
+            <a:pPr indent="0" marL="0">
+              <a:buNone/>
+            </a:pPr>
+            <a:r>
+              <a:rPr lang="en-US" sz="1920" dirty="0">
                 <a:solidFill>
                   <a:srgbClr val="003A63"/>
                 </a:solidFill>
@@ -11208,16 +11208,16 @@
                 <a:ea typeface="Aptos" pitchFamily="34" charset="-122"/>
                 <a:cs typeface="Aptos" pitchFamily="34" charset="-120"/>
               </a:rPr>
-              <a:t>• The worksheet should identify the data involved, the sensitivity level, the minimum necessary.</a:t>
-            </a:r>
-            <a:endParaRPr lang="en-US" sz="2100" dirty="0"/>
-          </a:p>
-          <a:p>
-            <a:pPr indent="0" marL="0">
-              <a:buNone/>
-            </a:pPr>
-            <a:r>
-              <a:rPr lang="en-US" sz="2100" dirty="0">
+              <a:t>• The worksheet should identify the data involved, the sensitivity level, the.</a:t>
+            </a:r>
+            <a:endParaRPr lang="en-US" sz="1920" dirty="0"/>
+          </a:p>
+          <a:p>
+            <a:pPr indent="0" marL="0">
+              <a:buNone/>
+            </a:pPr>
+            <a:r>
+              <a:rPr lang="en-US" sz="1920" dirty="0">
                 <a:solidFill>
                   <a:srgbClr val="003A63"/>
                 </a:solidFill>
@@ -11225,9 +11225,9 @@
                 <a:ea typeface="Aptos" pitchFamily="34" charset="-122"/>
                 <a:cs typeface="Aptos" pitchFamily="34" charset="-120"/>
               </a:rPr>
-              <a:t>• The exercise should also identify residual risks and questions that need privacy, legal,.</a:t>
-            </a:r>
-            <a:endParaRPr lang="en-US" sz="2100" dirty="0"/>
+              <a:t>• The exercise should also identify residual risks and questions that need.</a:t>
+            </a:r>
+            <a:endParaRPr lang="en-US" sz="1920" dirty="0"/>
           </a:p>
         </p:txBody>
       </p:sp>
@@ -11239,12 +11239,12 @@
         </p:nvSpPr>
         <p:spPr>
           <a:xfrm>
-            <a:off x="7635240" y="1325880"/>
-            <a:ext cx="3474720" cy="1207008"/>
+            <a:off x="7543800" y="1325880"/>
+            <a:ext cx="3611880" cy="1261872"/>
           </a:xfrm>
           <a:prstGeom prst="roundRect">
             <a:avLst>
-              <a:gd name="adj" fmla="val 9091"/>
+              <a:gd name="adj" fmla="val 8696"/>
             </a:avLst>
           </a:prstGeom>
           <a:solidFill>
@@ -11266,8 +11266,8 @@
         </p:nvSpPr>
         <p:spPr>
           <a:xfrm>
-            <a:off x="7799832" y="1472184"/>
-            <a:ext cx="3145536" cy="256032"/>
+            <a:off x="7708392" y="1453896"/>
+            <a:ext cx="3282696" cy="228600"/>
           </a:xfrm>
           <a:prstGeom prst="rect">
             <a:avLst/>
@@ -11283,7 +11283,7 @@
               <a:buNone/>
             </a:pPr>
             <a:r>
-              <a:rPr lang="en-US" sz="1300" b="1" dirty="0">
+              <a:rPr lang="en-US" sz="1220" b="1" dirty="0">
                 <a:solidFill>
                   <a:srgbClr val="0068B7"/>
                 </a:solidFill>
@@ -11293,7 +11293,7 @@
               </a:rPr>
               <a:t>Risk check</a:t>
             </a:r>
-            <a:endParaRPr lang="en-US" sz="1300" dirty="0"/>
+            <a:endParaRPr lang="en-US" sz="1220" dirty="0"/>
           </a:p>
         </p:txBody>
       </p:sp>
@@ -11305,8 +11305,8 @@
         </p:nvSpPr>
         <p:spPr>
           <a:xfrm>
-            <a:off x="7799832" y="1801368"/>
-            <a:ext cx="3145536" cy="640080"/>
+            <a:off x="7708392" y="1764792"/>
+            <a:ext cx="3282696" cy="749808"/>
           </a:xfrm>
           <a:prstGeom prst="rect">
             <a:avLst/>
@@ -11324,7 +11324,7 @@
               <a:buNone/>
             </a:pPr>
             <a:r>
-              <a:rPr lang="en-US" sz="1320" dirty="0">
+              <a:rPr lang="en-US" sz="1220" dirty="0">
                 <a:solidFill>
                   <a:srgbClr val="17364A"/>
                 </a:solidFill>
@@ -11332,9 +11332,9 @@
                 <a:ea typeface="Aptos" pitchFamily="34" charset="-122"/>
                 <a:cs typeface="Aptos" pitchFamily="34" charset="-120"/>
               </a:rPr>
-              <a:t>Create a privacy-preserving AI review worksheet for one proposed public health AI.</a:t>
-            </a:r>
-            <a:endParaRPr lang="en-US" sz="1320" dirty="0"/>
+              <a:t>Create a privacy-preserving AI review worksheet for one proposed public health.</a:t>
+            </a:r>
+            <a:endParaRPr lang="en-US" sz="1220" dirty="0"/>
           </a:p>
         </p:txBody>
       </p:sp>
@@ -11346,12 +11346,12 @@
         </p:nvSpPr>
         <p:spPr>
           <a:xfrm>
-            <a:off x="7635240" y="2670048"/>
-            <a:ext cx="3474720" cy="1377086"/>
+            <a:off x="7543800" y="2724912"/>
+            <a:ext cx="3611880" cy="1527048"/>
           </a:xfrm>
           <a:prstGeom prst="roundRect">
             <a:avLst>
-              <a:gd name="adj" fmla="val 7968"/>
+              <a:gd name="adj" fmla="val 7186"/>
             </a:avLst>
           </a:prstGeom>
           <a:solidFill>
@@ -11373,8 +11373,8 @@
         </p:nvSpPr>
         <p:spPr>
           <a:xfrm>
-            <a:off x="7799832" y="2816352"/>
-            <a:ext cx="3145536" cy="256032"/>
+            <a:off x="7708392" y="2852928"/>
+            <a:ext cx="3282696" cy="228600"/>
           </a:xfrm>
           <a:prstGeom prst="rect">
             <a:avLst/>
@@ -11390,7 +11390,7 @@
               <a:buNone/>
             </a:pPr>
             <a:r>
-              <a:rPr lang="en-US" sz="1300" b="1" dirty="0">
+              <a:rPr lang="en-US" sz="1220" b="1" dirty="0">
                 <a:solidFill>
                   <a:srgbClr val="0068B7"/>
                 </a:solidFill>
@@ -11400,7 +11400,7 @@
               </a:rPr>
               <a:t>Concept checkpoints</a:t>
             </a:r>
-            <a:endParaRPr lang="en-US" sz="1300" dirty="0"/>
+            <a:endParaRPr lang="en-US" sz="1220" dirty="0"/>
           </a:p>
         </p:txBody>
       </p:sp>
@@ -11412,8 +11412,8 @@
         </p:nvSpPr>
         <p:spPr>
           <a:xfrm>
-            <a:off x="7818120" y="3182112"/>
-            <a:ext cx="3090672" cy="718718"/>
+            <a:off x="7726680" y="3182112"/>
+            <a:ext cx="3227832" cy="960120"/>
           </a:xfrm>
           <a:prstGeom prst="rect">
             <a:avLst/>
@@ -11431,7 +11431,7 @@
               <a:buNone/>
             </a:pPr>
             <a:r>
-              <a:rPr lang="en-US" sz="1220" dirty="0">
+              <a:rPr lang="en-US" sz="1140" dirty="0">
                 <a:solidFill>
                   <a:srgbClr val="17364A"/>
                 </a:solidFill>
@@ -11439,16 +11439,16 @@
                 <a:ea typeface="Aptos" pitchFamily="34" charset="-122"/>
                 <a:cs typeface="Aptos" pitchFamily="34" charset="-120"/>
               </a:rPr>
-              <a:t>The worksheet should identify the data involved, the sensitivity.</a:t>
-            </a:r>
-            <a:endParaRPr lang="en-US" sz="1220" dirty="0"/>
-          </a:p>
-          <a:p>
-            <a:pPr indent="0" marL="0">
-              <a:buNone/>
-            </a:pPr>
-            <a:r>
-              <a:rPr lang="en-US" sz="1220" dirty="0">
+              <a:t>The worksheet should identify the data involved,.</a:t>
+            </a:r>
+            <a:endParaRPr lang="en-US" sz="1140" dirty="0"/>
+          </a:p>
+          <a:p>
+            <a:pPr indent="0" marL="0">
+              <a:buNone/>
+            </a:pPr>
+            <a:r>
+              <a:rPr lang="en-US" sz="1140" dirty="0">
                 <a:solidFill>
                   <a:srgbClr val="17364A"/>
                 </a:solidFill>
@@ -11456,16 +11456,16 @@
                 <a:ea typeface="Aptos" pitchFamily="34" charset="-122"/>
                 <a:cs typeface="Aptos" pitchFamily="34" charset="-120"/>
               </a:rPr>
-              <a:t>The exercise should also identify residual risks and questions.</a:t>
-            </a:r>
-            <a:endParaRPr lang="en-US" sz="1220" dirty="0"/>
-          </a:p>
-          <a:p>
-            <a:pPr indent="0" marL="0">
-              <a:buNone/>
-            </a:pPr>
-            <a:r>
-              <a:rPr lang="en-US" sz="1220" dirty="0">
+              <a:t>The exercise should also identify residual risks.</a:t>
+            </a:r>
+            <a:endParaRPr lang="en-US" sz="1140" dirty="0"/>
+          </a:p>
+          <a:p>
+            <a:pPr indent="0" marL="0">
+              <a:buNone/>
+            </a:pPr>
+            <a:r>
+              <a:rPr lang="en-US" sz="1140" dirty="0">
                 <a:solidFill>
                   <a:srgbClr val="17364A"/>
                 </a:solidFill>
@@ -11473,9 +11473,9 @@
                 <a:ea typeface="Aptos" pitchFamily="34" charset="-122"/>
                 <a:cs typeface="Aptos" pitchFamily="34" charset="-120"/>
               </a:rPr>
-              <a:t>Learners should pay special attention to free text, small-area.</a:t>
-            </a:r>
-            <a:endParaRPr lang="en-US" sz="1220" dirty="0"/>
+              <a:t>Learners should pay special attention to free.</a:t>
+            </a:r>
+            <a:endParaRPr lang="en-US" sz="1140" dirty="0"/>
           </a:p>
         </p:txBody>
       </p:sp>
@@ -11487,12 +11487,12 @@
         </p:nvSpPr>
         <p:spPr>
           <a:xfrm>
-            <a:off x="7635240" y="4184294"/>
-            <a:ext cx="3474720" cy="1466698"/>
+            <a:off x="7543800" y="4389120"/>
+            <a:ext cx="3611880" cy="1261872"/>
           </a:xfrm>
           <a:prstGeom prst="roundRect">
             <a:avLst>
-              <a:gd name="adj" fmla="val 7481"/>
+              <a:gd name="adj" fmla="val 8696"/>
             </a:avLst>
           </a:prstGeom>
           <a:solidFill>
@@ -11514,8 +11514,8 @@
         </p:nvSpPr>
         <p:spPr>
           <a:xfrm>
-            <a:off x="7799832" y="4330598"/>
-            <a:ext cx="3145536" cy="256032"/>
+            <a:off x="7708392" y="4517136"/>
+            <a:ext cx="3282696" cy="228600"/>
           </a:xfrm>
           <a:prstGeom prst="rect">
             <a:avLst/>
@@ -11531,7 +11531,7 @@
               <a:buNone/>
             </a:pPr>
             <a:r>
-              <a:rPr lang="en-US" sz="1300" b="1" dirty="0">
+              <a:rPr lang="en-US" sz="1220" b="1" dirty="0">
                 <a:solidFill>
                   <a:srgbClr val="0068B7"/>
                 </a:solidFill>
@@ -11541,7 +11541,7 @@
               </a:rPr>
               <a:t>Safeguard to plan</a:t>
             </a:r>
-            <a:endParaRPr lang="en-US" sz="1300" dirty="0"/>
+            <a:endParaRPr lang="en-US" sz="1220" dirty="0"/>
           </a:p>
         </p:txBody>
       </p:sp>
@@ -11553,8 +11553,8 @@
         </p:nvSpPr>
         <p:spPr>
           <a:xfrm>
-            <a:off x="7799832" y="4659782"/>
-            <a:ext cx="3145536" cy="899770"/>
+            <a:off x="7708392" y="4828032"/>
+            <a:ext cx="3282696" cy="749808"/>
           </a:xfrm>
           <a:prstGeom prst="rect">
             <a:avLst/>
@@ -11572,7 +11572,7 @@
               <a:buNone/>
             </a:pPr>
             <a:r>
-              <a:rPr lang="en-US" sz="1320" dirty="0">
+              <a:rPr lang="en-US" sz="1220" dirty="0">
                 <a:solidFill>
                   <a:srgbClr val="17364A"/>
                 </a:solidFill>
@@ -11580,9 +11580,9 @@
                 <a:ea typeface="Aptos" pitchFamily="34" charset="-122"/>
                 <a:cs typeface="Aptos" pitchFamily="34" charset="-120"/>
               </a:rPr>
-              <a:t>Use the assignment to test whether you can explain the concept, apply it to a realistic public health situation, and identify what would need review before the work moves forward.</a:t>
-            </a:r>
-            <a:endParaRPr lang="en-US" sz="1320" dirty="0"/>
+              <a:t>Use the assignment to test whether you can explain the concept, apply it to a.</a:t>
+            </a:r>
+            <a:endParaRPr lang="en-US" sz="1220" dirty="0"/>
           </a:p>
         </p:txBody>
       </p:sp>
@@ -11873,8 +11873,8 @@
         </p:nvSpPr>
         <p:spPr>
           <a:xfrm>
-            <a:off x="868680" y="1508760"/>
-            <a:ext cx="6309360" cy="4160520"/>
+            <a:off x="822960" y="1463040"/>
+            <a:ext cx="6565392" cy="4343400"/>
           </a:xfrm>
           <a:prstGeom prst="rect">
             <a:avLst/>
@@ -11892,7 +11892,7 @@
               <a:buNone/>
             </a:pPr>
             <a:r>
-              <a:rPr lang="en-US" sz="2100" dirty="0">
+              <a:rPr lang="en-US" sz="1920" dirty="0">
                 <a:solidFill>
                   <a:srgbClr val="003A63"/>
                 </a:solidFill>
@@ -11900,9 +11900,9 @@
                 <a:ea typeface="Aptos" pitchFamily="34" charset="-122"/>
                 <a:cs typeface="Aptos" pitchFamily="34" charset="-120"/>
               </a:rPr>
-              <a:t>• The expected artifact is a privacy-preserving AI review worksheet with a brief summary of the.</a:t>
-            </a:r>
-            <a:endParaRPr lang="en-US" sz="2100" dirty="0"/>
+              <a:t>• The expected artifact is a privacy-preserving AI review worksheet with a.</a:t>
+            </a:r>
+            <a:endParaRPr lang="en-US" sz="1920" dirty="0"/>
           </a:p>
         </p:txBody>
       </p:sp>
@@ -11914,12 +11914,12 @@
         </p:nvSpPr>
         <p:spPr>
           <a:xfrm>
-            <a:off x="7635240" y="1325880"/>
-            <a:ext cx="3474720" cy="1255471"/>
+            <a:off x="7543800" y="1325880"/>
+            <a:ext cx="3611880" cy="1261872"/>
           </a:xfrm>
           <a:prstGeom prst="roundRect">
             <a:avLst>
-              <a:gd name="adj" fmla="val 8740"/>
+              <a:gd name="adj" fmla="val 8696"/>
             </a:avLst>
           </a:prstGeom>
           <a:solidFill>
@@ -11941,8 +11941,8 @@
         </p:nvSpPr>
         <p:spPr>
           <a:xfrm>
-            <a:off x="7799832" y="1472184"/>
-            <a:ext cx="3145536" cy="256032"/>
+            <a:off x="7708392" y="1453896"/>
+            <a:ext cx="3282696" cy="228600"/>
           </a:xfrm>
           <a:prstGeom prst="rect">
             <a:avLst/>
@@ -11958,7 +11958,7 @@
               <a:buNone/>
             </a:pPr>
             <a:r>
-              <a:rPr lang="en-US" sz="1300" b="1" dirty="0">
+              <a:rPr lang="en-US" sz="1220" b="1" dirty="0">
                 <a:solidFill>
                   <a:srgbClr val="0068B7"/>
                 </a:solidFill>
@@ -11968,7 +11968,7 @@
               </a:rPr>
               <a:t>Risk check</a:t>
             </a:r>
-            <a:endParaRPr lang="en-US" sz="1300" dirty="0"/>
+            <a:endParaRPr lang="en-US" sz="1220" dirty="0"/>
           </a:p>
         </p:txBody>
       </p:sp>
@@ -11980,8 +11980,8 @@
         </p:nvSpPr>
         <p:spPr>
           <a:xfrm>
-            <a:off x="7799832" y="1801368"/>
-            <a:ext cx="3145536" cy="688543"/>
+            <a:off x="7708392" y="1764792"/>
+            <a:ext cx="3282696" cy="749808"/>
           </a:xfrm>
           <a:prstGeom prst="rect">
             <a:avLst/>
@@ -11999,7 +11999,7 @@
               <a:buNone/>
             </a:pPr>
             <a:r>
-              <a:rPr lang="en-US" sz="1320" dirty="0">
+              <a:rPr lang="en-US" sz="1220" dirty="0">
                 <a:solidFill>
                   <a:srgbClr val="17364A"/>
                 </a:solidFill>
@@ -12007,9 +12007,9 @@
                 <a:ea typeface="Aptos" pitchFamily="34" charset="-122"/>
                 <a:cs typeface="Aptos" pitchFamily="34" charset="-120"/>
               </a:rPr>
-              <a:t>The expected artifact is a privacy-preserving AI review worksheet with a brief summary of the proposed.</a:t>
-            </a:r>
-            <a:endParaRPr lang="en-US" sz="1320" dirty="0"/>
+              <a:t>The expected artifact is a privacy-preserving AI review worksheet with a brief.</a:t>
+            </a:r>
+            <a:endParaRPr lang="en-US" sz="1220" dirty="0"/>
           </a:p>
         </p:txBody>
       </p:sp>
@@ -12021,12 +12021,12 @@
         </p:nvSpPr>
         <p:spPr>
           <a:xfrm>
-            <a:off x="7635240" y="2718511"/>
-            <a:ext cx="3474720" cy="1536192"/>
+            <a:off x="7543800" y="2724912"/>
+            <a:ext cx="3611880" cy="1527048"/>
           </a:xfrm>
           <a:prstGeom prst="roundRect">
             <a:avLst>
-              <a:gd name="adj" fmla="val 7143"/>
+              <a:gd name="adj" fmla="val 7186"/>
             </a:avLst>
           </a:prstGeom>
           <a:solidFill>
@@ -12048,8 +12048,8 @@
         </p:nvSpPr>
         <p:spPr>
           <a:xfrm>
-            <a:off x="7799832" y="2864815"/>
-            <a:ext cx="3145536" cy="256032"/>
+            <a:off x="7708392" y="2852928"/>
+            <a:ext cx="3282696" cy="228600"/>
           </a:xfrm>
           <a:prstGeom prst="rect">
             <a:avLst/>
@@ -12065,7 +12065,7 @@
               <a:buNone/>
             </a:pPr>
             <a:r>
-              <a:rPr lang="en-US" sz="1300" b="1" dirty="0">
+              <a:rPr lang="en-US" sz="1220" b="1" dirty="0">
                 <a:solidFill>
                   <a:srgbClr val="0068B7"/>
                 </a:solidFill>
@@ -12075,7 +12075,7 @@
               </a:rPr>
               <a:t>Concept checkpoints</a:t>
             </a:r>
-            <a:endParaRPr lang="en-US" sz="1300" dirty="0"/>
+            <a:endParaRPr lang="en-US" sz="1220" dirty="0"/>
           </a:p>
         </p:txBody>
       </p:sp>
@@ -12087,8 +12087,8 @@
         </p:nvSpPr>
         <p:spPr>
           <a:xfrm>
-            <a:off x="7818120" y="3230575"/>
-            <a:ext cx="3090672" cy="877824"/>
+            <a:off x="7726680" y="3182112"/>
+            <a:ext cx="3227832" cy="960120"/>
           </a:xfrm>
           <a:prstGeom prst="rect">
             <a:avLst/>
@@ -12106,7 +12106,7 @@
               <a:buNone/>
             </a:pPr>
             <a:r>
-              <a:rPr lang="en-US" sz="1220" dirty="0">
+              <a:rPr lang="en-US" sz="1140" dirty="0">
                 <a:solidFill>
                   <a:srgbClr val="17364A"/>
                 </a:solidFill>
@@ -12114,9 +12114,9 @@
                 <a:ea typeface="Aptos" pitchFamily="34" charset="-122"/>
                 <a:cs typeface="Aptos" pitchFamily="34" charset="-120"/>
               </a:rPr>
-              <a:t>The expected artifact is a privacy-preserving AI review worksheet.</a:t>
-            </a:r>
-            <a:endParaRPr lang="en-US" sz="1220" dirty="0"/>
+              <a:t>The expected artifact is a privacy-preserving AI.</a:t>
+            </a:r>
+            <a:endParaRPr lang="en-US" sz="1140" dirty="0"/>
           </a:p>
         </p:txBody>
       </p:sp>
@@ -12128,12 +12128,12 @@
         </p:nvSpPr>
         <p:spPr>
           <a:xfrm>
-            <a:off x="7635240" y="4391863"/>
-            <a:ext cx="3474720" cy="1255471"/>
+            <a:off x="7543800" y="4389120"/>
+            <a:ext cx="3611880" cy="1261872"/>
           </a:xfrm>
           <a:prstGeom prst="roundRect">
             <a:avLst>
-              <a:gd name="adj" fmla="val 8740"/>
+              <a:gd name="adj" fmla="val 8696"/>
             </a:avLst>
           </a:prstGeom>
           <a:solidFill>
@@ -12155,8 +12155,8 @@
         </p:nvSpPr>
         <p:spPr>
           <a:xfrm>
-            <a:off x="7799832" y="4538167"/>
-            <a:ext cx="3145536" cy="256032"/>
+            <a:off x="7708392" y="4517136"/>
+            <a:ext cx="3282696" cy="228600"/>
           </a:xfrm>
           <a:prstGeom prst="rect">
             <a:avLst/>
@@ -12172,7 +12172,7 @@
               <a:buNone/>
             </a:pPr>
             <a:r>
-              <a:rPr lang="en-US" sz="1300" b="1" dirty="0">
+              <a:rPr lang="en-US" sz="1220" b="1" dirty="0">
                 <a:solidFill>
                   <a:srgbClr val="0068B7"/>
                 </a:solidFill>
@@ -12182,7 +12182,7 @@
               </a:rPr>
               <a:t>Safeguard to plan</a:t>
             </a:r>
-            <a:endParaRPr lang="en-US" sz="1300" dirty="0"/>
+            <a:endParaRPr lang="en-US" sz="1220" dirty="0"/>
           </a:p>
         </p:txBody>
       </p:sp>
@@ -12194,8 +12194,8 @@
         </p:nvSpPr>
         <p:spPr>
           <a:xfrm>
-            <a:off x="7799832" y="4867351"/>
-            <a:ext cx="3145536" cy="688543"/>
+            <a:off x="7708392" y="4828032"/>
+            <a:ext cx="3282696" cy="749808"/>
           </a:xfrm>
           <a:prstGeom prst="rect">
             <a:avLst/>
@@ -12213,7 +12213,7 @@
               <a:buNone/>
             </a:pPr>
             <a:r>
-              <a:rPr lang="en-US" sz="1320" dirty="0">
+              <a:rPr lang="en-US" sz="1220" dirty="0">
                 <a:solidFill>
                   <a:srgbClr val="17364A"/>
                 </a:solidFill>
@@ -12221,9 +12221,9 @@
                 <a:ea typeface="Aptos" pitchFamily="34" charset="-122"/>
                 <a:cs typeface="Aptos" pitchFamily="34" charset="-120"/>
               </a:rPr>
-              <a:t>Identify what could go wrong, who could be affected, what safeguards are needed, and what evidence should be reviewed before use.</a:t>
-            </a:r>
-            <a:endParaRPr lang="en-US" sz="1320" dirty="0"/>
+              <a:t>Identify what could go wrong, who could be affected, what safeguards are needed,.</a:t>
+            </a:r>
+            <a:endParaRPr lang="en-US" sz="1220" dirty="0"/>
           </a:p>
         </p:txBody>
       </p:sp>
@@ -12514,8 +12514,8 @@
         </p:nvSpPr>
         <p:spPr>
           <a:xfrm>
-            <a:off x="868680" y="1508760"/>
-            <a:ext cx="6309360" cy="4160520"/>
+            <a:off x="822960" y="1463040"/>
+            <a:ext cx="6565392" cy="4343400"/>
           </a:xfrm>
           <a:prstGeom prst="rect">
             <a:avLst/>
@@ -12533,7 +12533,7 @@
               <a:buNone/>
             </a:pPr>
             <a:r>
-              <a:rPr lang="en-US" sz="2100" dirty="0">
+              <a:rPr lang="en-US" sz="1920" dirty="0">
                 <a:solidFill>
                   <a:srgbClr val="003A63"/>
                 </a:solidFill>
@@ -12541,9 +12541,9 @@
                 <a:ea typeface="Aptos" pitchFamily="34" charset="-122"/>
                 <a:cs typeface="Aptos" pitchFamily="34" charset="-120"/>
               </a:rPr>
-              <a:t>• The expected artifact is a privacy-preserving AI review worksheet with a brief summary of the.</a:t>
-            </a:r>
-            <a:endParaRPr lang="en-US" sz="2100" dirty="0"/>
+              <a:t>• The expected artifact is a privacy-preserving AI review worksheet with a.</a:t>
+            </a:r>
+            <a:endParaRPr lang="en-US" sz="1920" dirty="0"/>
           </a:p>
         </p:txBody>
       </p:sp>
@@ -12555,12 +12555,12 @@
         </p:nvSpPr>
         <p:spPr>
           <a:xfrm>
-            <a:off x="7635240" y="1325880"/>
-            <a:ext cx="3474720" cy="1255471"/>
+            <a:off x="7543800" y="1325880"/>
+            <a:ext cx="3611880" cy="1261872"/>
           </a:xfrm>
           <a:prstGeom prst="roundRect">
             <a:avLst>
-              <a:gd name="adj" fmla="val 8740"/>
+              <a:gd name="adj" fmla="val 8696"/>
             </a:avLst>
           </a:prstGeom>
           <a:solidFill>
@@ -12582,8 +12582,8 @@
         </p:nvSpPr>
         <p:spPr>
           <a:xfrm>
-            <a:off x="7799832" y="1472184"/>
-            <a:ext cx="3145536" cy="256032"/>
+            <a:off x="7708392" y="1453896"/>
+            <a:ext cx="3282696" cy="228600"/>
           </a:xfrm>
           <a:prstGeom prst="rect">
             <a:avLst/>
@@ -12599,7 +12599,7 @@
               <a:buNone/>
             </a:pPr>
             <a:r>
-              <a:rPr lang="en-US" sz="1300" b="1" dirty="0">
+              <a:rPr lang="en-US" sz="1220" b="1" dirty="0">
                 <a:solidFill>
                   <a:srgbClr val="0068B7"/>
                 </a:solidFill>
@@ -12609,7 +12609,7 @@
               </a:rPr>
               <a:t>Risk check</a:t>
             </a:r>
-            <a:endParaRPr lang="en-US" sz="1300" dirty="0"/>
+            <a:endParaRPr lang="en-US" sz="1220" dirty="0"/>
           </a:p>
         </p:txBody>
       </p:sp>
@@ -12621,8 +12621,8 @@
         </p:nvSpPr>
         <p:spPr>
           <a:xfrm>
-            <a:off x="7799832" y="1801368"/>
-            <a:ext cx="3145536" cy="688543"/>
+            <a:off x="7708392" y="1764792"/>
+            <a:ext cx="3282696" cy="749808"/>
           </a:xfrm>
           <a:prstGeom prst="rect">
             <a:avLst/>
@@ -12640,7 +12640,7 @@
               <a:buNone/>
             </a:pPr>
             <a:r>
-              <a:rPr lang="en-US" sz="1320" dirty="0">
+              <a:rPr lang="en-US" sz="1220" dirty="0">
                 <a:solidFill>
                   <a:srgbClr val="17364A"/>
                 </a:solidFill>
@@ -12648,9 +12648,9 @@
                 <a:ea typeface="Aptos" pitchFamily="34" charset="-122"/>
                 <a:cs typeface="Aptos" pitchFamily="34" charset="-120"/>
               </a:rPr>
-              <a:t>The expected artifact is a privacy-preserving AI review worksheet with a brief summary of the proposed.</a:t>
-            </a:r>
-            <a:endParaRPr lang="en-US" sz="1320" dirty="0"/>
+              <a:t>The expected artifact is a privacy-preserving AI review worksheet with a brief.</a:t>
+            </a:r>
+            <a:endParaRPr lang="en-US" sz="1220" dirty="0"/>
           </a:p>
         </p:txBody>
       </p:sp>
@@ -12662,12 +12662,12 @@
         </p:nvSpPr>
         <p:spPr>
           <a:xfrm>
-            <a:off x="7635240" y="2718511"/>
-            <a:ext cx="3474720" cy="1328623"/>
+            <a:off x="7543800" y="2724912"/>
+            <a:ext cx="3611880" cy="1527048"/>
           </a:xfrm>
           <a:prstGeom prst="roundRect">
             <a:avLst>
-              <a:gd name="adj" fmla="val 8259"/>
+              <a:gd name="adj" fmla="val 7186"/>
             </a:avLst>
           </a:prstGeom>
           <a:solidFill>
@@ -12689,8 +12689,8 @@
         </p:nvSpPr>
         <p:spPr>
           <a:xfrm>
-            <a:off x="7799832" y="2864815"/>
-            <a:ext cx="3145536" cy="256032"/>
+            <a:off x="7708392" y="2852928"/>
+            <a:ext cx="3282696" cy="228600"/>
           </a:xfrm>
           <a:prstGeom prst="rect">
             <a:avLst/>
@@ -12706,7 +12706,7 @@
               <a:buNone/>
             </a:pPr>
             <a:r>
-              <a:rPr lang="en-US" sz="1300" b="1" dirty="0">
+              <a:rPr lang="en-US" sz="1220" b="1" dirty="0">
                 <a:solidFill>
                   <a:srgbClr val="0068B7"/>
                 </a:solidFill>
@@ -12716,7 +12716,7 @@
               </a:rPr>
               <a:t>Concept checkpoints</a:t>
             </a:r>
-            <a:endParaRPr lang="en-US" sz="1300" dirty="0"/>
+            <a:endParaRPr lang="en-US" sz="1220" dirty="0"/>
           </a:p>
         </p:txBody>
       </p:sp>
@@ -12728,8 +12728,8 @@
         </p:nvSpPr>
         <p:spPr>
           <a:xfrm>
-            <a:off x="7818120" y="3230575"/>
-            <a:ext cx="3090672" cy="670255"/>
+            <a:off x="7726680" y="3182112"/>
+            <a:ext cx="3227832" cy="960120"/>
           </a:xfrm>
           <a:prstGeom prst="rect">
             <a:avLst/>
@@ -12747,7 +12747,7 @@
               <a:buNone/>
             </a:pPr>
             <a:r>
-              <a:rPr lang="en-US" sz="1220" dirty="0">
+              <a:rPr lang="en-US" sz="1140" dirty="0">
                 <a:solidFill>
                   <a:srgbClr val="17364A"/>
                 </a:solidFill>
@@ -12755,9 +12755,9 @@
                 <a:ea typeface="Aptos" pitchFamily="34" charset="-122"/>
                 <a:cs typeface="Aptos" pitchFamily="34" charset="-120"/>
               </a:rPr>
-              <a:t>The expected artifact is a privacy-preserving AI review worksheet.</a:t>
-            </a:r>
-            <a:endParaRPr lang="en-US" sz="1220" dirty="0"/>
+              <a:t>The expected artifact is a privacy-preserving AI.</a:t>
+            </a:r>
+            <a:endParaRPr lang="en-US" sz="1140" dirty="0"/>
           </a:p>
         </p:txBody>
       </p:sp>
@@ -12769,12 +12769,12 @@
         </p:nvSpPr>
         <p:spPr>
           <a:xfrm>
-            <a:off x="7635240" y="4184294"/>
-            <a:ext cx="3474720" cy="1466698"/>
+            <a:off x="7543800" y="4389120"/>
+            <a:ext cx="3611880" cy="1261872"/>
           </a:xfrm>
           <a:prstGeom prst="roundRect">
             <a:avLst>
-              <a:gd name="adj" fmla="val 7481"/>
+              <a:gd name="adj" fmla="val 8696"/>
             </a:avLst>
           </a:prstGeom>
           <a:solidFill>
@@ -12796,8 +12796,8 @@
         </p:nvSpPr>
         <p:spPr>
           <a:xfrm>
-            <a:off x="7799832" y="4330598"/>
-            <a:ext cx="3145536" cy="256032"/>
+            <a:off x="7708392" y="4517136"/>
+            <a:ext cx="3282696" cy="228600"/>
           </a:xfrm>
           <a:prstGeom prst="rect">
             <a:avLst/>
@@ -12813,7 +12813,7 @@
               <a:buNone/>
             </a:pPr>
             <a:r>
-              <a:rPr lang="en-US" sz="1300" b="1" dirty="0">
+              <a:rPr lang="en-US" sz="1220" b="1" dirty="0">
                 <a:solidFill>
                   <a:srgbClr val="0068B7"/>
                 </a:solidFill>
@@ -12823,7 +12823,7 @@
               </a:rPr>
               <a:t>Safeguard to plan</a:t>
             </a:r>
-            <a:endParaRPr lang="en-US" sz="1300" dirty="0"/>
+            <a:endParaRPr lang="en-US" sz="1220" dirty="0"/>
           </a:p>
         </p:txBody>
       </p:sp>
@@ -12835,8 +12835,8 @@
         </p:nvSpPr>
         <p:spPr>
           <a:xfrm>
-            <a:off x="7799832" y="4659782"/>
-            <a:ext cx="3145536" cy="899770"/>
+            <a:off x="7708392" y="4828032"/>
+            <a:ext cx="3282696" cy="749808"/>
           </a:xfrm>
           <a:prstGeom prst="rect">
             <a:avLst/>
@@ -12854,7 +12854,7 @@
               <a:buNone/>
             </a:pPr>
             <a:r>
-              <a:rPr lang="en-US" sz="1320" dirty="0">
+              <a:rPr lang="en-US" sz="1220" dirty="0">
                 <a:solidFill>
                   <a:srgbClr val="17364A"/>
                 </a:solidFill>
@@ -12862,9 +12862,9 @@
                 <a:ea typeface="Aptos" pitchFamily="34" charset="-122"/>
                 <a:cs typeface="Aptos" pitchFamily="34" charset="-120"/>
               </a:rPr>
-              <a:t>Use the assignment to test whether you can explain the concept, apply it to a realistic public health situation, and identify what would need review before the work moves forward.</a:t>
-            </a:r>
-            <a:endParaRPr lang="en-US" sz="1320" dirty="0"/>
+              <a:t>Use the assignment to test whether you can explain the concept, apply it to a.</a:t>
+            </a:r>
+            <a:endParaRPr lang="en-US" sz="1220" dirty="0"/>
           </a:p>
         </p:txBody>
       </p:sp>
@@ -13155,8 +13155,8 @@
         </p:nvSpPr>
         <p:spPr>
           <a:xfrm>
-            <a:off x="868680" y="1508760"/>
-            <a:ext cx="6309360" cy="4160520"/>
+            <a:off x="822960" y="1463040"/>
+            <a:ext cx="6565392" cy="4343400"/>
           </a:xfrm>
           <a:prstGeom prst="rect">
             <a:avLst/>
@@ -13174,7 +13174,7 @@
               <a:buNone/>
             </a:pPr>
             <a:r>
-              <a:rPr lang="en-US" sz="2100" dirty="0">
+              <a:rPr lang="en-US" sz="1920" dirty="0">
                 <a:solidFill>
                   <a:srgbClr val="003A63"/>
                 </a:solidFill>
@@ -13184,14 +13184,14 @@
               </a:rPr>
               <a:t>• 1. Which statement best describes de-identification in public health AI?</a:t>
             </a:r>
-            <a:endParaRPr lang="en-US" sz="2100" dirty="0"/>
-          </a:p>
-          <a:p>
-            <a:pPr indent="0" marL="0">
-              <a:buNone/>
-            </a:pPr>
-            <a:r>
-              <a:rPr lang="en-US" sz="2100" dirty="0">
+            <a:endParaRPr lang="en-US" sz="1920" dirty="0"/>
+          </a:p>
+          <a:p>
+            <a:pPr indent="0" marL="0">
+              <a:buNone/>
+            </a:pPr>
+            <a:r>
+              <a:rPr lang="en-US" sz="1920" dirty="0">
                 <a:solidFill>
                   <a:srgbClr val="003A63"/>
                 </a:solidFill>
@@ -13201,14 +13201,14 @@
               </a:rPr>
               <a:t>• 2. Why can AI increase re-identification risk?</a:t>
             </a:r>
-            <a:endParaRPr lang="en-US" sz="2100" dirty="0"/>
-          </a:p>
-          <a:p>
-            <a:pPr indent="0" marL="0">
-              <a:buNone/>
-            </a:pPr>
-            <a:r>
-              <a:rPr lang="en-US" sz="2100" dirty="0">
+            <a:endParaRPr lang="en-US" sz="1920" dirty="0"/>
+          </a:p>
+          <a:p>
+            <a:pPr indent="0" marL="0">
+              <a:buNone/>
+            </a:pPr>
+            <a:r>
+              <a:rPr lang="en-US" sz="1920" dirty="0">
                 <a:solidFill>
                   <a:srgbClr val="003A63"/>
                 </a:solidFill>
@@ -13218,7 +13218,7 @@
               </a:rPr>
               <a:t>• 3. What is a strong privacy guardrail for an AI workflow?</a:t>
             </a:r>
-            <a:endParaRPr lang="en-US" sz="2100" dirty="0"/>
+            <a:endParaRPr lang="en-US" sz="1920" dirty="0"/>
           </a:p>
         </p:txBody>
       </p:sp>
@@ -13230,12 +13230,12 @@
         </p:nvSpPr>
         <p:spPr>
           <a:xfrm>
-            <a:off x="7635240" y="1325880"/>
-            <a:ext cx="3474720" cy="1207008"/>
+            <a:off x="7543800" y="1325880"/>
+            <a:ext cx="3611880" cy="1261872"/>
           </a:xfrm>
           <a:prstGeom prst="roundRect">
             <a:avLst>
-              <a:gd name="adj" fmla="val 9091"/>
+              <a:gd name="adj" fmla="val 8696"/>
             </a:avLst>
           </a:prstGeom>
           <a:solidFill>
@@ -13257,8 +13257,8 @@
         </p:nvSpPr>
         <p:spPr>
           <a:xfrm>
-            <a:off x="7799832" y="1472184"/>
-            <a:ext cx="3145536" cy="256032"/>
+            <a:off x="7708392" y="1453896"/>
+            <a:ext cx="3282696" cy="228600"/>
           </a:xfrm>
           <a:prstGeom prst="rect">
             <a:avLst/>
@@ -13274,7 +13274,7 @@
               <a:buNone/>
             </a:pPr>
             <a:r>
-              <a:rPr lang="en-US" sz="1300" b="1" dirty="0">
+              <a:rPr lang="en-US" sz="1220" b="1" dirty="0">
                 <a:solidFill>
                   <a:srgbClr val="0068B7"/>
                 </a:solidFill>
@@ -13284,7 +13284,7 @@
               </a:rPr>
               <a:t>Risk check</a:t>
             </a:r>
-            <a:endParaRPr lang="en-US" sz="1300" dirty="0"/>
+            <a:endParaRPr lang="en-US" sz="1220" dirty="0"/>
           </a:p>
         </p:txBody>
       </p:sp>
@@ -13296,8 +13296,8 @@
         </p:nvSpPr>
         <p:spPr>
           <a:xfrm>
-            <a:off x="7799832" y="1801368"/>
-            <a:ext cx="3145536" cy="640080"/>
+            <a:off x="7708392" y="1764792"/>
+            <a:ext cx="3282696" cy="749808"/>
           </a:xfrm>
           <a:prstGeom prst="rect">
             <a:avLst/>
@@ -13315,7 +13315,7 @@
               <a:buNone/>
             </a:pPr>
             <a:r>
-              <a:rPr lang="en-US" sz="1320" dirty="0">
+              <a:rPr lang="en-US" sz="1220" dirty="0">
                 <a:solidFill>
                   <a:srgbClr val="17364A"/>
                 </a:solidFill>
@@ -13325,7 +13325,7 @@
               </a:rPr>
               <a:t>1. Which statement best describes de-identification in public health AI?</a:t>
             </a:r>
-            <a:endParaRPr lang="en-US" sz="1320" dirty="0"/>
+            <a:endParaRPr lang="en-US" sz="1220" dirty="0"/>
           </a:p>
         </p:txBody>
       </p:sp>
@@ -13337,12 +13337,12 @@
         </p:nvSpPr>
         <p:spPr>
           <a:xfrm>
-            <a:off x="7635240" y="2670048"/>
-            <a:ext cx="3474720" cy="1377086"/>
+            <a:off x="7543800" y="2724912"/>
+            <a:ext cx="3611880" cy="1527048"/>
           </a:xfrm>
           <a:prstGeom prst="roundRect">
             <a:avLst>
-              <a:gd name="adj" fmla="val 7968"/>
+              <a:gd name="adj" fmla="val 7186"/>
             </a:avLst>
           </a:prstGeom>
           <a:solidFill>
@@ -13364,8 +13364,8 @@
         </p:nvSpPr>
         <p:spPr>
           <a:xfrm>
-            <a:off x="7799832" y="2816352"/>
-            <a:ext cx="3145536" cy="256032"/>
+            <a:off x="7708392" y="2852928"/>
+            <a:ext cx="3282696" cy="228600"/>
           </a:xfrm>
           <a:prstGeom prst="rect">
             <a:avLst/>
@@ -13381,7 +13381,7 @@
               <a:buNone/>
             </a:pPr>
             <a:r>
-              <a:rPr lang="en-US" sz="1300" b="1" dirty="0">
+              <a:rPr lang="en-US" sz="1220" b="1" dirty="0">
                 <a:solidFill>
                   <a:srgbClr val="0068B7"/>
                 </a:solidFill>
@@ -13391,7 +13391,7 @@
               </a:rPr>
               <a:t>Concept checkpoints</a:t>
             </a:r>
-            <a:endParaRPr lang="en-US" sz="1300" dirty="0"/>
+            <a:endParaRPr lang="en-US" sz="1220" dirty="0"/>
           </a:p>
         </p:txBody>
       </p:sp>
@@ -13403,8 +13403,8 @@
         </p:nvSpPr>
         <p:spPr>
           <a:xfrm>
-            <a:off x="7818120" y="3182112"/>
-            <a:ext cx="3090672" cy="718718"/>
+            <a:off x="7726680" y="3182112"/>
+            <a:ext cx="3227832" cy="960120"/>
           </a:xfrm>
           <a:prstGeom prst="rect">
             <a:avLst/>
@@ -13422,7 +13422,7 @@
               <a:buNone/>
             </a:pPr>
             <a:r>
-              <a:rPr lang="en-US" sz="1220" dirty="0">
+              <a:rPr lang="en-US" sz="1140" dirty="0">
                 <a:solidFill>
                   <a:srgbClr val="17364A"/>
                 </a:solidFill>
@@ -13432,14 +13432,14 @@
               </a:rPr>
               <a:t>1.</a:t>
             </a:r>
-            <a:endParaRPr lang="en-US" sz="1220" dirty="0"/>
-          </a:p>
-          <a:p>
-            <a:pPr indent="0" marL="0">
-              <a:buNone/>
-            </a:pPr>
-            <a:r>
-              <a:rPr lang="en-US" sz="1220" dirty="0">
+            <a:endParaRPr lang="en-US" sz="1140" dirty="0"/>
+          </a:p>
+          <a:p>
+            <a:pPr indent="0" marL="0">
+              <a:buNone/>
+            </a:pPr>
+            <a:r>
+              <a:rPr lang="en-US" sz="1140" dirty="0">
                 <a:solidFill>
                   <a:srgbClr val="17364A"/>
                 </a:solidFill>
@@ -13447,16 +13447,16 @@
                 <a:ea typeface="Aptos" pitchFamily="34" charset="-122"/>
                 <a:cs typeface="Aptos" pitchFamily="34" charset="-120"/>
               </a:rPr>
-              <a:t>Which statement best describes de-identification in public health.</a:t>
-            </a:r>
-            <a:endParaRPr lang="en-US" sz="1220" dirty="0"/>
-          </a:p>
-          <a:p>
-            <a:pPr indent="0" marL="0">
-              <a:buNone/>
-            </a:pPr>
-            <a:r>
-              <a:rPr lang="en-US" sz="1220" dirty="0">
+              <a:t>Which statement best describes de-identification.</a:t>
+            </a:r>
+            <a:endParaRPr lang="en-US" sz="1140" dirty="0"/>
+          </a:p>
+          <a:p>
+            <a:pPr indent="0" marL="0">
+              <a:buNone/>
+            </a:pPr>
+            <a:r>
+              <a:rPr lang="en-US" sz="1140" dirty="0">
                 <a:solidFill>
                   <a:srgbClr val="17364A"/>
                 </a:solidFill>
@@ -13466,7 +13466,7 @@
               </a:rPr>
               <a:t>2.</a:t>
             </a:r>
-            <a:endParaRPr lang="en-US" sz="1220" dirty="0"/>
+            <a:endParaRPr lang="en-US" sz="1140" dirty="0"/>
           </a:p>
         </p:txBody>
       </p:sp>
@@ -13478,12 +13478,12 @@
         </p:nvSpPr>
         <p:spPr>
           <a:xfrm>
-            <a:off x="7635240" y="4184294"/>
-            <a:ext cx="3474720" cy="1466698"/>
+            <a:off x="7543800" y="4389120"/>
+            <a:ext cx="3611880" cy="1261872"/>
           </a:xfrm>
           <a:prstGeom prst="roundRect">
             <a:avLst>
-              <a:gd name="adj" fmla="val 7481"/>
+              <a:gd name="adj" fmla="val 8696"/>
             </a:avLst>
           </a:prstGeom>
           <a:solidFill>
@@ -13505,8 +13505,8 @@
         </p:nvSpPr>
         <p:spPr>
           <a:xfrm>
-            <a:off x="7799832" y="4330598"/>
-            <a:ext cx="3145536" cy="256032"/>
+            <a:off x="7708392" y="4517136"/>
+            <a:ext cx="3282696" cy="228600"/>
           </a:xfrm>
           <a:prstGeom prst="rect">
             <a:avLst/>
@@ -13522,7 +13522,7 @@
               <a:buNone/>
             </a:pPr>
             <a:r>
-              <a:rPr lang="en-US" sz="1300" b="1" dirty="0">
+              <a:rPr lang="en-US" sz="1220" b="1" dirty="0">
                 <a:solidFill>
                   <a:srgbClr val="0068B7"/>
                 </a:solidFill>
@@ -13532,7 +13532,7 @@
               </a:rPr>
               <a:t>Safeguard to plan</a:t>
             </a:r>
-            <a:endParaRPr lang="en-US" sz="1300" dirty="0"/>
+            <a:endParaRPr lang="en-US" sz="1220" dirty="0"/>
           </a:p>
         </p:txBody>
       </p:sp>
@@ -13544,8 +13544,8 @@
         </p:nvSpPr>
         <p:spPr>
           <a:xfrm>
-            <a:off x="7799832" y="4659782"/>
-            <a:ext cx="3145536" cy="899770"/>
+            <a:off x="7708392" y="4828032"/>
+            <a:ext cx="3282696" cy="749808"/>
           </a:xfrm>
           <a:prstGeom prst="rect">
             <a:avLst/>
@@ -13563,7 +13563,7 @@
               <a:buNone/>
             </a:pPr>
             <a:r>
-              <a:rPr lang="en-US" sz="1320" dirty="0">
+              <a:rPr lang="en-US" sz="1220" dirty="0">
                 <a:solidFill>
                   <a:srgbClr val="17364A"/>
                 </a:solidFill>
@@ -13571,9 +13571,9 @@
                 <a:ea typeface="Aptos" pitchFamily="34" charset="-122"/>
                 <a:cs typeface="Aptos" pitchFamily="34" charset="-120"/>
               </a:rPr>
-              <a:t>Use the assignment to test whether you can explain the concept, apply it to a realistic public health situation, and identify what would need review before the work moves forward.</a:t>
-            </a:r>
-            <a:endParaRPr lang="en-US" sz="1320" dirty="0"/>
+              <a:t>Use the assignment to test whether you can explain the concept, apply it to a.</a:t>
+            </a:r>
+            <a:endParaRPr lang="en-US" sz="1220" dirty="0"/>
           </a:p>
         </p:txBody>
       </p:sp>
@@ -13864,8 +13864,8 @@
         </p:nvSpPr>
         <p:spPr>
           <a:xfrm>
-            <a:off x="868680" y="1508760"/>
-            <a:ext cx="6309360" cy="4160520"/>
+            <a:off x="822960" y="1463040"/>
+            <a:ext cx="6565392" cy="4343400"/>
           </a:xfrm>
           <a:prstGeom prst="rect">
             <a:avLst/>
@@ -13883,7 +13883,7 @@
               <a:buNone/>
             </a:pPr>
             <a:r>
-              <a:rPr lang="en-US" sz="2100" dirty="0">
+              <a:rPr lang="en-US" sz="1920" dirty="0">
                 <a:solidFill>
                   <a:srgbClr val="003A63"/>
                 </a:solidFill>
@@ -13893,14 +13893,14 @@
               </a:rPr>
               <a:t>• NIST Privacy Framework</a:t>
             </a:r>
-            <a:endParaRPr lang="en-US" sz="2100" dirty="0"/>
-          </a:p>
-          <a:p>
-            <a:pPr indent="0" marL="0">
-              <a:buNone/>
-            </a:pPr>
-            <a:r>
-              <a:rPr lang="en-US" sz="2100" dirty="0">
+            <a:endParaRPr lang="en-US" sz="1920" dirty="0"/>
+          </a:p>
+          <a:p>
+            <a:pPr indent="0" marL="0">
+              <a:buNone/>
+            </a:pPr>
+            <a:r>
+              <a:rPr lang="en-US" sz="1920" dirty="0">
                 <a:solidFill>
                   <a:srgbClr val="003A63"/>
                 </a:solidFill>
@@ -13908,16 +13908,16 @@
                 <a:ea typeface="Aptos" pitchFamily="34" charset="-122"/>
                 <a:cs typeface="Aptos" pitchFamily="34" charset="-120"/>
               </a:rPr>
-              <a:t>• NIST AI Risk Management Framework: https://www.nist.gov/itl/ai-risk-management-framework</a:t>
-            </a:r>
-            <a:endParaRPr lang="en-US" sz="2100" dirty="0"/>
-          </a:p>
-          <a:p>
-            <a:pPr indent="0" marL="0">
-              <a:buNone/>
-            </a:pPr>
-            <a:r>
-              <a:rPr lang="en-US" sz="2100" dirty="0">
+              <a:t>• NIST AI Risk Management Framework:.</a:t>
+            </a:r>
+            <a:endParaRPr lang="en-US" sz="1920" dirty="0"/>
+          </a:p>
+          <a:p>
+            <a:pPr indent="0" marL="0">
+              <a:buNone/>
+            </a:pPr>
+            <a:r>
+              <a:rPr lang="en-US" sz="1920" dirty="0">
                 <a:solidFill>
                   <a:srgbClr val="003A63"/>
                 </a:solidFill>
@@ -13927,7 +13927,7 @@
               </a:rPr>
               <a:t>• HHS HIPAA de-identification guidance</a:t>
             </a:r>
-            <a:endParaRPr lang="en-US" sz="2100" dirty="0"/>
+            <a:endParaRPr lang="en-US" sz="1920" dirty="0"/>
           </a:p>
         </p:txBody>
       </p:sp>
@@ -13939,12 +13939,12 @@
         </p:nvSpPr>
         <p:spPr>
           <a:xfrm>
-            <a:off x="7635240" y="1325880"/>
-            <a:ext cx="3474720" cy="1207008"/>
+            <a:off x="7543800" y="1325880"/>
+            <a:ext cx="3611880" cy="1261872"/>
           </a:xfrm>
           <a:prstGeom prst="roundRect">
             <a:avLst>
-              <a:gd name="adj" fmla="val 9091"/>
+              <a:gd name="adj" fmla="val 8696"/>
             </a:avLst>
           </a:prstGeom>
           <a:solidFill>
@@ -13966,8 +13966,8 @@
         </p:nvSpPr>
         <p:spPr>
           <a:xfrm>
-            <a:off x="7799832" y="1472184"/>
-            <a:ext cx="3145536" cy="256032"/>
+            <a:off x="7708392" y="1453896"/>
+            <a:ext cx="3282696" cy="228600"/>
           </a:xfrm>
           <a:prstGeom prst="rect">
             <a:avLst/>
@@ -13983,7 +13983,7 @@
               <a:buNone/>
             </a:pPr>
             <a:r>
-              <a:rPr lang="en-US" sz="1300" b="1" dirty="0">
+              <a:rPr lang="en-US" sz="1220" b="1" dirty="0">
                 <a:solidFill>
                   <a:srgbClr val="0068B7"/>
                 </a:solidFill>
@@ -13993,7 +13993,7 @@
               </a:rPr>
               <a:t>Risk check</a:t>
             </a:r>
-            <a:endParaRPr lang="en-US" sz="1300" dirty="0"/>
+            <a:endParaRPr lang="en-US" sz="1220" dirty="0"/>
           </a:p>
         </p:txBody>
       </p:sp>
@@ -14005,8 +14005,8 @@
         </p:nvSpPr>
         <p:spPr>
           <a:xfrm>
-            <a:off x="7799832" y="1801368"/>
-            <a:ext cx="3145536" cy="640080"/>
+            <a:off x="7708392" y="1764792"/>
+            <a:ext cx="3282696" cy="749808"/>
           </a:xfrm>
           <a:prstGeom prst="rect">
             <a:avLst/>
@@ -14024,7 +14024,7 @@
               <a:buNone/>
             </a:pPr>
             <a:r>
-              <a:rPr lang="en-US" sz="1320" dirty="0">
+              <a:rPr lang="en-US" sz="1220" dirty="0">
                 <a:solidFill>
                   <a:srgbClr val="17364A"/>
                 </a:solidFill>
@@ -14034,7 +14034,7 @@
               </a:rPr>
               <a:t>NIST Privacy Framework</a:t>
             </a:r>
-            <a:endParaRPr lang="en-US" sz="1320" dirty="0"/>
+            <a:endParaRPr lang="en-US" sz="1220" dirty="0"/>
           </a:p>
         </p:txBody>
       </p:sp>
@@ -14046,12 +14046,12 @@
         </p:nvSpPr>
         <p:spPr>
           <a:xfrm>
-            <a:off x="7635240" y="2670048"/>
-            <a:ext cx="3474720" cy="1536192"/>
+            <a:off x="7543800" y="2724912"/>
+            <a:ext cx="3611880" cy="1527048"/>
           </a:xfrm>
           <a:prstGeom prst="roundRect">
             <a:avLst>
-              <a:gd name="adj" fmla="val 7143"/>
+              <a:gd name="adj" fmla="val 7186"/>
             </a:avLst>
           </a:prstGeom>
           <a:solidFill>
@@ -14073,8 +14073,8 @@
         </p:nvSpPr>
         <p:spPr>
           <a:xfrm>
-            <a:off x="7799832" y="2816352"/>
-            <a:ext cx="3145536" cy="256032"/>
+            <a:off x="7708392" y="2852928"/>
+            <a:ext cx="3282696" cy="228600"/>
           </a:xfrm>
           <a:prstGeom prst="rect">
             <a:avLst/>
@@ -14090,7 +14090,7 @@
               <a:buNone/>
             </a:pPr>
             <a:r>
-              <a:rPr lang="en-US" sz="1300" b="1" dirty="0">
+              <a:rPr lang="en-US" sz="1220" b="1" dirty="0">
                 <a:solidFill>
                   <a:srgbClr val="0068B7"/>
                 </a:solidFill>
@@ -14100,7 +14100,7 @@
               </a:rPr>
               <a:t>Concept checkpoints</a:t>
             </a:r>
-            <a:endParaRPr lang="en-US" sz="1300" dirty="0"/>
+            <a:endParaRPr lang="en-US" sz="1220" dirty="0"/>
           </a:p>
         </p:txBody>
       </p:sp>
@@ -14112,8 +14112,8 @@
         </p:nvSpPr>
         <p:spPr>
           <a:xfrm>
-            <a:off x="7818120" y="3182112"/>
-            <a:ext cx="3090672" cy="877824"/>
+            <a:off x="7726680" y="3182112"/>
+            <a:ext cx="3227832" cy="960120"/>
           </a:xfrm>
           <a:prstGeom prst="rect">
             <a:avLst/>
@@ -14131,7 +14131,7 @@
               <a:buNone/>
             </a:pPr>
             <a:r>
-              <a:rPr lang="en-US" sz="1220" dirty="0">
+              <a:rPr lang="en-US" sz="1140" dirty="0">
                 <a:solidFill>
                   <a:srgbClr val="17364A"/>
                 </a:solidFill>
@@ -14139,16 +14139,16 @@
                 <a:ea typeface="Aptos" pitchFamily="34" charset="-122"/>
                 <a:cs typeface="Aptos" pitchFamily="34" charset="-120"/>
               </a:rPr>
-              <a:t>CDC data governance and public health data modernization resources</a:t>
-            </a:r>
-            <a:endParaRPr lang="en-US" sz="1220" dirty="0"/>
-          </a:p>
-          <a:p>
-            <a:pPr indent="0" marL="0">
-              <a:buNone/>
-            </a:pPr>
-            <a:r>
-              <a:rPr lang="en-US" sz="1220" dirty="0">
+              <a:t>CDC data governance and public health data.</a:t>
+            </a:r>
+            <a:endParaRPr lang="en-US" sz="1140" dirty="0"/>
+          </a:p>
+          <a:p>
+            <a:pPr indent="0" marL="0">
+              <a:buNone/>
+            </a:pPr>
+            <a:r>
+              <a:rPr lang="en-US" sz="1140" dirty="0">
                 <a:solidFill>
                   <a:srgbClr val="17364A"/>
                 </a:solidFill>
@@ -14156,9 +14156,9 @@
                 <a:ea typeface="Aptos" pitchFamily="34" charset="-122"/>
                 <a:cs typeface="Aptos" pitchFamily="34" charset="-120"/>
               </a:rPr>
-              <a:t>Agency privacy, legal, security, and records management policies</a:t>
-            </a:r>
-            <a:endParaRPr lang="en-US" sz="1220" dirty="0"/>
+              <a:t>Agency privacy, legal, security, and records.</a:t>
+            </a:r>
+            <a:endParaRPr lang="en-US" sz="1140" dirty="0"/>
           </a:p>
         </p:txBody>
       </p:sp>
@@ -14170,12 +14170,12 @@
         </p:nvSpPr>
         <p:spPr>
           <a:xfrm>
-            <a:off x="7635240" y="4343400"/>
-            <a:ext cx="3474720" cy="1255471"/>
+            <a:off x="7543800" y="4389120"/>
+            <a:ext cx="3611880" cy="1261872"/>
           </a:xfrm>
           <a:prstGeom prst="roundRect">
             <a:avLst>
-              <a:gd name="adj" fmla="val 8740"/>
+              <a:gd name="adj" fmla="val 8696"/>
             </a:avLst>
           </a:prstGeom>
           <a:solidFill>
@@ -14197,8 +14197,8 @@
         </p:nvSpPr>
         <p:spPr>
           <a:xfrm>
-            <a:off x="7799832" y="4489704"/>
-            <a:ext cx="3145536" cy="256032"/>
+            <a:off x="7708392" y="4517136"/>
+            <a:ext cx="3282696" cy="228600"/>
           </a:xfrm>
           <a:prstGeom prst="rect">
             <a:avLst/>
@@ -14214,7 +14214,7 @@
               <a:buNone/>
             </a:pPr>
             <a:r>
-              <a:rPr lang="en-US" sz="1300" b="1" dirty="0">
+              <a:rPr lang="en-US" sz="1220" b="1" dirty="0">
                 <a:solidFill>
                   <a:srgbClr val="0068B7"/>
                 </a:solidFill>
@@ -14224,7 +14224,7 @@
               </a:rPr>
               <a:t>Safeguard to plan</a:t>
             </a:r>
-            <a:endParaRPr lang="en-US" sz="1300" dirty="0"/>
+            <a:endParaRPr lang="en-US" sz="1220" dirty="0"/>
           </a:p>
         </p:txBody>
       </p:sp>
@@ -14236,8 +14236,8 @@
         </p:nvSpPr>
         <p:spPr>
           <a:xfrm>
-            <a:off x="7799832" y="4818888"/>
-            <a:ext cx="3145536" cy="688543"/>
+            <a:off x="7708392" y="4828032"/>
+            <a:ext cx="3282696" cy="749808"/>
           </a:xfrm>
           <a:prstGeom prst="rect">
             <a:avLst/>
@@ -14255,7 +14255,7 @@
               <a:buNone/>
             </a:pPr>
             <a:r>
-              <a:rPr lang="en-US" sz="1320" dirty="0">
+              <a:rPr lang="en-US" sz="1220" dirty="0">
                 <a:solidFill>
                   <a:srgbClr val="17364A"/>
                 </a:solidFill>
@@ -14263,9 +14263,9 @@
                 <a:ea typeface="Aptos" pitchFamily="34" charset="-122"/>
                 <a:cs typeface="Aptos" pitchFamily="34" charset="-120"/>
               </a:rPr>
-              <a:t>Identify what could go wrong, who could be affected, what safeguards are needed, and what evidence should be reviewed before use.</a:t>
-            </a:r>
-            <a:endParaRPr lang="en-US" sz="1320" dirty="0"/>
+              <a:t>Identify what could go wrong, who could be affected, what safeguards are needed,.</a:t>
+            </a:r>
+            <a:endParaRPr lang="en-US" sz="1220" dirty="0"/>
           </a:p>
         </p:txBody>
       </p:sp>
@@ -14583,7 +14583,7 @@
                 <a:ea typeface="Aptos" pitchFamily="34" charset="-122"/>
                 <a:cs typeface="Aptos" pitchFamily="34" charset="-120"/>
               </a:rPr>
-              <a:t>• Play 11: Build and Deploy AI Solutions - This lesson informs Play 11 by helping learners.</a:t>
+              <a:t>• Play 11: Build and Deploy AI Solutions - This lesson informs Play 11 by.</a:t>
             </a:r>
             <a:endParaRPr lang="en-US" sz="1900" dirty="0"/>
           </a:p>
@@ -14600,7 +14600,7 @@
                 <a:ea typeface="Aptos" pitchFamily="34" charset="-122"/>
                 <a:cs typeface="Aptos" pitchFamily="34" charset="-120"/>
               </a:rPr>
-              <a:t>• Play 2: Readiness Assessment - This lesson informs Play 2 by helping learners connect the.</a:t>
+              <a:t>• Play 2: Readiness Assessment - This lesson informs Play 2 by helping.</a:t>
             </a:r>
             <a:endParaRPr lang="en-US" sz="1900" dirty="0"/>
           </a:p>
@@ -14617,7 +14617,7 @@
                 <a:ea typeface="Aptos" pitchFamily="34" charset="-122"/>
                 <a:cs typeface="Aptos" pitchFamily="34" charset="-120"/>
               </a:rPr>
-              <a:t>• Play 3: Establish AI Governance - This lesson informs Play 3 by helping learners connect the.</a:t>
+              <a:t>• Play 3: Establish AI Governance - This lesson informs Play 3 by helping.</a:t>
             </a:r>
             <a:endParaRPr lang="en-US" sz="1900" dirty="0"/>
           </a:p>
@@ -14634,7 +14634,7 @@
                 <a:ea typeface="Aptos" pitchFamily="34" charset="-122"/>
                 <a:cs typeface="Aptos" pitchFamily="34" charset="-120"/>
               </a:rPr>
-              <a:t>• Play 1: Vision &amp; Guardrails - This lesson informs Play 1 by helping learners connect the.</a:t>
+              <a:t>• Play 1: Vision &amp; Guardrails - This lesson informs Play 1 by helping learners.</a:t>
             </a:r>
             <a:endParaRPr lang="en-US" sz="1900" dirty="0"/>
           </a:p>
@@ -14675,8 +14675,8 @@
         </p:nvSpPr>
         <p:spPr>
           <a:xfrm>
-            <a:off x="8211312" y="1563624"/>
-            <a:ext cx="2734056" cy="256032"/>
+            <a:off x="8211312" y="1545336"/>
+            <a:ext cx="2734056" cy="228600"/>
           </a:xfrm>
           <a:prstGeom prst="rect">
             <a:avLst/>
@@ -14692,7 +14692,7 @@
               <a:buNone/>
             </a:pPr>
             <a:r>
-              <a:rPr lang="en-US" sz="1300" b="1" dirty="0">
+              <a:rPr lang="en-US" sz="1220" b="1" dirty="0">
                 <a:solidFill>
                   <a:srgbClr val="0068B7"/>
                 </a:solidFill>
@@ -14702,7 +14702,7 @@
               </a:rPr>
               <a:t>Apply the lesson</a:t>
             </a:r>
-            <a:endParaRPr lang="en-US" sz="1300" dirty="0"/>
+            <a:endParaRPr lang="en-US" sz="1220" dirty="0"/>
           </a:p>
         </p:txBody>
       </p:sp>
@@ -14714,8 +14714,8 @@
         </p:nvSpPr>
         <p:spPr>
           <a:xfrm>
-            <a:off x="8211312" y="1892808"/>
-            <a:ext cx="2734056" cy="1536192"/>
+            <a:off x="8211312" y="1856232"/>
+            <a:ext cx="2734056" cy="1591056"/>
           </a:xfrm>
           <a:prstGeom prst="rect">
             <a:avLst/>
@@ -14733,7 +14733,7 @@
               <a:buNone/>
             </a:pPr>
             <a:r>
-              <a:rPr lang="en-US" sz="1320" dirty="0">
+              <a:rPr lang="en-US" sz="1220" dirty="0">
                 <a:solidFill>
                   <a:srgbClr val="17364A"/>
                 </a:solidFill>
@@ -14741,9 +14741,9 @@
                 <a:ea typeface="Aptos" pitchFamily="34" charset="-122"/>
                 <a:cs typeface="Aptos" pitchFamily="34" charset="-120"/>
               </a:rPr>
-              <a:t>Use the related plays to identify decisions, participants, timing, approvals, and documentation needed for responsible implementation.</a:t>
-            </a:r>
-            <a:endParaRPr lang="en-US" sz="1320" dirty="0"/>
+              <a:t>Use the related plays to identify decisions, participants, timing, approvals,.</a:t>
+            </a:r>
+            <a:endParaRPr lang="en-US" sz="1220" dirty="0"/>
           </a:p>
         </p:txBody>
       </p:sp>
@@ -14782,8 +14782,8 @@
         </p:nvSpPr>
         <p:spPr>
           <a:xfrm>
-            <a:off x="8211312" y="3941064"/>
-            <a:ext cx="2734056" cy="256032"/>
+            <a:off x="8211312" y="3922776"/>
+            <a:ext cx="2734056" cy="228600"/>
           </a:xfrm>
           <a:prstGeom prst="rect">
             <a:avLst/>
@@ -14799,7 +14799,7 @@
               <a:buNone/>
             </a:pPr>
             <a:r>
-              <a:rPr lang="en-US" sz="1300" b="1" dirty="0">
+              <a:rPr lang="en-US" sz="1220" b="1" dirty="0">
                 <a:solidFill>
                   <a:srgbClr val="0068B7"/>
                 </a:solidFill>
@@ -14809,7 +14809,7 @@
               </a:rPr>
               <a:t>Use the play links to</a:t>
             </a:r>
-            <a:endParaRPr lang="en-US" sz="1300" dirty="0"/>
+            <a:endParaRPr lang="en-US" sz="1220" dirty="0"/>
           </a:p>
         </p:txBody>
       </p:sp>
@@ -14821,8 +14821,8 @@
         </p:nvSpPr>
         <p:spPr>
           <a:xfrm>
-            <a:off x="8229600" y="4306824"/>
-            <a:ext cx="2679192" cy="941832"/>
+            <a:off x="8229600" y="4251960"/>
+            <a:ext cx="2679192" cy="1033272"/>
           </a:xfrm>
           <a:prstGeom prst="rect">
             <a:avLst/>
@@ -14840,7 +14840,7 @@
               <a:buNone/>
             </a:pPr>
             <a:r>
-              <a:rPr lang="en-US" sz="1220" dirty="0">
+              <a:rPr lang="en-US" sz="1140" dirty="0">
                 <a:solidFill>
                   <a:srgbClr val="17364A"/>
                 </a:solidFill>
@@ -14850,14 +14850,14 @@
               </a:rPr>
               <a:t>Locate the decision point in the playbook sequence.</a:t>
             </a:r>
-            <a:endParaRPr lang="en-US" sz="1220" dirty="0"/>
-          </a:p>
-          <a:p>
-            <a:pPr indent="0" marL="0">
-              <a:buNone/>
-            </a:pPr>
-            <a:r>
-              <a:rPr lang="en-US" sz="1220" dirty="0">
+            <a:endParaRPr lang="en-US" sz="1140" dirty="0"/>
+          </a:p>
+          <a:p>
+            <a:pPr indent="0" marL="0">
+              <a:buNone/>
+            </a:pPr>
+            <a:r>
+              <a:rPr lang="en-US" sz="1140" dirty="0">
                 <a:solidFill>
                   <a:srgbClr val="17364A"/>
                 </a:solidFill>
@@ -14867,14 +14867,14 @@
               </a:rPr>
               <a:t>Identify who should participate in the work.</a:t>
             </a:r>
-            <a:endParaRPr lang="en-US" sz="1220" dirty="0"/>
-          </a:p>
-          <a:p>
-            <a:pPr indent="0" marL="0">
-              <a:buNone/>
-            </a:pPr>
-            <a:r>
-              <a:rPr lang="en-US" sz="1220" dirty="0">
+            <a:endParaRPr lang="en-US" sz="1140" dirty="0"/>
+          </a:p>
+          <a:p>
+            <a:pPr indent="0" marL="0">
+              <a:buNone/>
+            </a:pPr>
+            <a:r>
+              <a:rPr lang="en-US" sz="1140" dirty="0">
                 <a:solidFill>
                   <a:srgbClr val="17364A"/>
                 </a:solidFill>
@@ -14882,9 +14882,9 @@
                 <a:ea typeface="Aptos" pitchFamily="34" charset="-122"/>
                 <a:cs typeface="Aptos" pitchFamily="34" charset="-120"/>
               </a:rPr>
-              <a:t>Document the review, approval, or implementation step.</a:t>
-            </a:r>
-            <a:endParaRPr lang="en-US" sz="1220" dirty="0"/>
+              <a:t>Document the review, approval, or implementation.</a:t>
+            </a:r>
+            <a:endParaRPr lang="en-US" sz="1140" dirty="0"/>
           </a:p>
         </p:txBody>
       </p:sp>
@@ -15202,7 +15202,7 @@
                 <a:ea typeface="Aptos" pitchFamily="34" charset="-122"/>
                 <a:cs typeface="Aptos" pitchFamily="34" charset="-120"/>
               </a:rPr>
-              <a:t>• Tool 4: AI Policy Landscape Scan (Worksheet) - Use AI Policy Landscape Scan to translate this.</a:t>
+              <a:t>• Tool 4: AI Policy Landscape Scan (Worksheet) - Use AI Policy Landscape Scan.</a:t>
             </a:r>
             <a:endParaRPr lang="en-US" sz="1850" dirty="0"/>
           </a:p>
@@ -15219,7 +15219,7 @@
                 <a:ea typeface="Aptos" pitchFamily="34" charset="-122"/>
                 <a:cs typeface="Aptos" pitchFamily="34" charset="-120"/>
               </a:rPr>
-              <a:t>• Tool 5: AI Environmental and Resource Impact Review (Checklist) - Use AI Environmental and.</a:t>
+              <a:t>• Tool 5: AI Environmental and Resource Impact Review (Checklist) - Use AI.</a:t>
             </a:r>
             <a:endParaRPr lang="en-US" sz="1850" dirty="0"/>
           </a:p>
@@ -15236,7 +15236,7 @@
                 <a:ea typeface="Aptos" pitchFamily="34" charset="-122"/>
                 <a:cs typeface="Aptos" pitchFamily="34" charset="-120"/>
               </a:rPr>
-              <a:t>• Tool 6: Human-Centered AI Decision Rule Checklist (Checklist) - Use Human-Centered AI Decision.</a:t>
+              <a:t>• Tool 6: Human-Centered AI Decision Rule Checklist (Checklist) - Use.</a:t>
             </a:r>
             <a:endParaRPr lang="en-US" sz="1850" dirty="0"/>
           </a:p>
@@ -15253,7 +15253,7 @@
                 <a:ea typeface="Aptos" pitchFamily="34" charset="-122"/>
                 <a:cs typeface="Aptos" pitchFamily="34" charset="-120"/>
               </a:rPr>
-              <a:t>• Tool 8: AI Project Charter (Planning) - Use AI Project Charter to translate this lesson into a.</a:t>
+              <a:t>• Tool 8: AI Project Charter (Planning) - Use AI Project Charter to translate.</a:t>
             </a:r>
             <a:endParaRPr lang="en-US" sz="1850" dirty="0"/>
           </a:p>
@@ -15294,8 +15294,8 @@
         </p:nvSpPr>
         <p:spPr>
           <a:xfrm>
-            <a:off x="8211312" y="1563624"/>
-            <a:ext cx="2734056" cy="256032"/>
+            <a:off x="8211312" y="1545336"/>
+            <a:ext cx="2734056" cy="228600"/>
           </a:xfrm>
           <a:prstGeom prst="rect">
             <a:avLst/>
@@ -15311,7 +15311,7 @@
               <a:buNone/>
             </a:pPr>
             <a:r>
-              <a:rPr lang="en-US" sz="1300" b="1" dirty="0">
+              <a:rPr lang="en-US" sz="1220" b="1" dirty="0">
                 <a:solidFill>
                   <a:srgbClr val="0068B7"/>
                 </a:solidFill>
@@ -15321,7 +15321,7 @@
               </a:rPr>
               <a:t>Use the tools</a:t>
             </a:r>
-            <a:endParaRPr lang="en-US" sz="1300" dirty="0"/>
+            <a:endParaRPr lang="en-US" sz="1220" dirty="0"/>
           </a:p>
         </p:txBody>
       </p:sp>
@@ -15333,8 +15333,8 @@
         </p:nvSpPr>
         <p:spPr>
           <a:xfrm>
-            <a:off x="8211312" y="1892808"/>
-            <a:ext cx="2734056" cy="1536192"/>
+            <a:off x="8211312" y="1856232"/>
+            <a:ext cx="2734056" cy="1591056"/>
           </a:xfrm>
           <a:prstGeom prst="rect">
             <a:avLst/>
@@ -15352,7 +15352,7 @@
               <a:buNone/>
             </a:pPr>
             <a:r>
-              <a:rPr lang="en-US" sz="1320" dirty="0">
+              <a:rPr lang="en-US" sz="1220" dirty="0">
                 <a:solidFill>
                   <a:srgbClr val="17364A"/>
                 </a:solidFill>
@@ -15360,9 +15360,9 @@
                 <a:ea typeface="Aptos" pitchFamily="34" charset="-122"/>
                 <a:cs typeface="Aptos" pitchFamily="34" charset="-120"/>
               </a:rPr>
-              <a:t>Use linked tools when your department needs a structured worksheet, template, checklist, review process, or documentation artifact.</a:t>
-            </a:r>
-            <a:endParaRPr lang="en-US" sz="1320" dirty="0"/>
+              <a:t>Use linked tools when your department needs a structured worksheet, template,.</a:t>
+            </a:r>
+            <a:endParaRPr lang="en-US" sz="1220" dirty="0"/>
           </a:p>
         </p:txBody>
       </p:sp>
@@ -15401,8 +15401,8 @@
         </p:nvSpPr>
         <p:spPr>
           <a:xfrm>
-            <a:off x="8211312" y="3941064"/>
-            <a:ext cx="2734056" cy="256032"/>
+            <a:off x="8211312" y="3922776"/>
+            <a:ext cx="2734056" cy="228600"/>
           </a:xfrm>
           <a:prstGeom prst="rect">
             <a:avLst/>
@@ -15418,7 +15418,7 @@
               <a:buNone/>
             </a:pPr>
             <a:r>
-              <a:rPr lang="en-US" sz="1300" b="1" dirty="0">
+              <a:rPr lang="en-US" sz="1220" b="1" dirty="0">
                 <a:solidFill>
                   <a:srgbClr val="0068B7"/>
                 </a:solidFill>
@@ -15428,7 +15428,7 @@
               </a:rPr>
               <a:t>Tool selection cues</a:t>
             </a:r>
-            <a:endParaRPr lang="en-US" sz="1300" dirty="0"/>
+            <a:endParaRPr lang="en-US" sz="1220" dirty="0"/>
           </a:p>
         </p:txBody>
       </p:sp>
@@ -15440,8 +15440,8 @@
         </p:nvSpPr>
         <p:spPr>
           <a:xfrm>
-            <a:off x="8229600" y="4306824"/>
-            <a:ext cx="2679192" cy="941832"/>
+            <a:off x="8229600" y="4251960"/>
+            <a:ext cx="2679192" cy="1033272"/>
           </a:xfrm>
           <a:prstGeom prst="rect">
             <a:avLst/>
@@ -15459,7 +15459,7 @@
               <a:buNone/>
             </a:pPr>
             <a:r>
-              <a:rPr lang="en-US" sz="1220" dirty="0">
+              <a:rPr lang="en-US" sz="1140" dirty="0">
                 <a:solidFill>
                   <a:srgbClr val="17364A"/>
                 </a:solidFill>
@@ -15469,14 +15469,14 @@
               </a:rPr>
               <a:t>Use a tool when no comparable local process exists.</a:t>
             </a:r>
-            <a:endParaRPr lang="en-US" sz="1220" dirty="0"/>
-          </a:p>
-          <a:p>
-            <a:pPr indent="0" marL="0">
-              <a:buNone/>
-            </a:pPr>
-            <a:r>
-              <a:rPr lang="en-US" sz="1220" dirty="0">
+            <a:endParaRPr lang="en-US" sz="1140" dirty="0"/>
+          </a:p>
+          <a:p>
+            <a:pPr indent="0" marL="0">
+              <a:buNone/>
+            </a:pPr>
+            <a:r>
+              <a:rPr lang="en-US" sz="1140" dirty="0">
                 <a:solidFill>
                   <a:srgbClr val="17364A"/>
                 </a:solidFill>
@@ -15484,16 +15484,16 @@
                 <a:ea typeface="Aptos" pitchFamily="34" charset="-122"/>
                 <a:cs typeface="Aptos" pitchFamily="34" charset="-120"/>
               </a:rPr>
-              <a:t>Adapt existing department templates when they already fit the.</a:t>
-            </a:r>
-            <a:endParaRPr lang="en-US" sz="1220" dirty="0"/>
-          </a:p>
-          <a:p>
-            <a:pPr indent="0" marL="0">
-              <a:buNone/>
-            </a:pPr>
-            <a:r>
-              <a:rPr lang="en-US" sz="1220" dirty="0">
+              <a:t>Adapt existing department templates when they.</a:t>
+            </a:r>
+            <a:endParaRPr lang="en-US" sz="1140" dirty="0"/>
+          </a:p>
+          <a:p>
+            <a:pPr indent="0" marL="0">
+              <a:buNone/>
+            </a:pPr>
+            <a:r>
+              <a:rPr lang="en-US" sz="1140" dirty="0">
                 <a:solidFill>
                   <a:srgbClr val="17364A"/>
                 </a:solidFill>
@@ -15501,9 +15501,9 @@
                 <a:ea typeface="Aptos" pitchFamily="34" charset="-122"/>
                 <a:cs typeface="Aptos" pitchFamily="34" charset="-120"/>
               </a:rPr>
-              <a:t>Save the completed artifact as evidence of the decision.</a:t>
-            </a:r>
-            <a:endParaRPr lang="en-US" sz="1220" dirty="0"/>
+              <a:t>Save the completed artifact as evidence of the.</a:t>
+            </a:r>
+            <a:endParaRPr lang="en-US" sz="1140" dirty="0"/>
           </a:p>
         </p:txBody>
       </p:sp>
@@ -15794,8 +15794,8 @@
         </p:nvSpPr>
         <p:spPr>
           <a:xfrm>
-            <a:off x="868680" y="1508760"/>
-            <a:ext cx="6309360" cy="4160520"/>
+            <a:off x="822960" y="1463040"/>
+            <a:ext cx="6565392" cy="4343400"/>
           </a:xfrm>
           <a:prstGeom prst="rect">
             <a:avLst/>
@@ -15813,7 +15813,7 @@
               <a:buNone/>
             </a:pPr>
             <a:r>
-              <a:rPr lang="en-US" sz="2100" dirty="0">
+              <a:rPr lang="en-US" sz="1920" dirty="0">
                 <a:solidFill>
                   <a:srgbClr val="003A63"/>
                 </a:solidFill>
@@ -15821,16 +15821,16 @@
                 <a:ea typeface="Aptos" pitchFamily="34" charset="-122"/>
                 <a:cs typeface="Aptos" pitchFamily="34" charset="-120"/>
               </a:rPr>
-              <a:t>• Explain why AI can increase privacy and confidentiality risks in public health workflows.</a:t>
-            </a:r>
-            <a:endParaRPr lang="en-US" sz="2100" dirty="0"/>
-          </a:p>
-          <a:p>
-            <a:pPr indent="0" marL="0">
-              <a:buNone/>
-            </a:pPr>
-            <a:r>
-              <a:rPr lang="en-US" sz="2100" dirty="0">
+              <a:t>• Explain why AI can increase privacy and confidentiality risks in public.</a:t>
+            </a:r>
+            <a:endParaRPr lang="en-US" sz="1920" dirty="0"/>
+          </a:p>
+          <a:p>
+            <a:pPr indent="0" marL="0">
+              <a:buNone/>
+            </a:pPr>
+            <a:r>
+              <a:rPr lang="en-US" sz="1920" dirty="0">
                 <a:solidFill>
                   <a:srgbClr val="003A63"/>
                 </a:solidFill>
@@ -15838,16 +15838,16 @@
                 <a:ea typeface="Aptos" pitchFamily="34" charset="-122"/>
                 <a:cs typeface="Aptos" pitchFamily="34" charset="-120"/>
               </a:rPr>
-              <a:t>• Distinguish between identifiable data, de-identified data, aggregated data, limited datasets,.</a:t>
-            </a:r>
-            <a:endParaRPr lang="en-US" sz="2100" dirty="0"/>
-          </a:p>
-          <a:p>
-            <a:pPr indent="0" marL="0">
-              <a:buNone/>
-            </a:pPr>
-            <a:r>
-              <a:rPr lang="en-US" sz="2100" dirty="0">
+              <a:t>• Distinguish between identifiable data, de-identified data, aggregated data,.</a:t>
+            </a:r>
+            <a:endParaRPr lang="en-US" sz="1920" dirty="0"/>
+          </a:p>
+          <a:p>
+            <a:pPr indent="0" marL="0">
+              <a:buNone/>
+            </a:pPr>
+            <a:r>
+              <a:rPr lang="en-US" sz="1920" dirty="0">
                 <a:solidFill>
                   <a:srgbClr val="003A63"/>
                 </a:solidFill>
@@ -15855,9 +15855,9 @@
                 <a:ea typeface="Aptos" pitchFamily="34" charset="-122"/>
                 <a:cs typeface="Aptos" pitchFamily="34" charset="-120"/>
               </a:rPr>
-              <a:t>• Identify technical and operational safeguards that reduce privacy risk, including data.</a:t>
-            </a:r>
-            <a:endParaRPr lang="en-US" sz="2100" dirty="0"/>
+              <a:t>• Identify technical and operational safeguards that reduce privacy risk,.</a:t>
+            </a:r>
+            <a:endParaRPr lang="en-US" sz="1920" dirty="0"/>
           </a:p>
         </p:txBody>
       </p:sp>
@@ -15869,12 +15869,12 @@
         </p:nvSpPr>
         <p:spPr>
           <a:xfrm>
-            <a:off x="7635240" y="1325880"/>
-            <a:ext cx="3474720" cy="1207008"/>
+            <a:off x="7543800" y="1325880"/>
+            <a:ext cx="3611880" cy="1261872"/>
           </a:xfrm>
           <a:prstGeom prst="roundRect">
             <a:avLst>
-              <a:gd name="adj" fmla="val 9091"/>
+              <a:gd name="adj" fmla="val 8696"/>
             </a:avLst>
           </a:prstGeom>
           <a:solidFill>
@@ -15896,8 +15896,8 @@
         </p:nvSpPr>
         <p:spPr>
           <a:xfrm>
-            <a:off x="7799832" y="1472184"/>
-            <a:ext cx="3145536" cy="256032"/>
+            <a:off x="7708392" y="1453896"/>
+            <a:ext cx="3282696" cy="228600"/>
           </a:xfrm>
           <a:prstGeom prst="rect">
             <a:avLst/>
@@ -15913,7 +15913,7 @@
               <a:buNone/>
             </a:pPr>
             <a:r>
-              <a:rPr lang="en-US" sz="1300" b="1" dirty="0">
+              <a:rPr lang="en-US" sz="1220" b="1" dirty="0">
                 <a:solidFill>
                   <a:srgbClr val="0068B7"/>
                 </a:solidFill>
@@ -15923,7 +15923,7 @@
               </a:rPr>
               <a:t>Risk check</a:t>
             </a:r>
-            <a:endParaRPr lang="en-US" sz="1300" dirty="0"/>
+            <a:endParaRPr lang="en-US" sz="1220" dirty="0"/>
           </a:p>
         </p:txBody>
       </p:sp>
@@ -15935,8 +15935,8 @@
         </p:nvSpPr>
         <p:spPr>
           <a:xfrm>
-            <a:off x="7799832" y="1801368"/>
-            <a:ext cx="3145536" cy="640080"/>
+            <a:off x="7708392" y="1764792"/>
+            <a:ext cx="3282696" cy="749808"/>
           </a:xfrm>
           <a:prstGeom prst="rect">
             <a:avLst/>
@@ -15954,7 +15954,7 @@
               <a:buNone/>
             </a:pPr>
             <a:r>
-              <a:rPr lang="en-US" sz="1320" dirty="0">
+              <a:rPr lang="en-US" sz="1220" dirty="0">
                 <a:solidFill>
                   <a:srgbClr val="17364A"/>
                 </a:solidFill>
@@ -15964,7 +15964,7 @@
               </a:rPr>
               <a:t>Explain why AI can increase privacy and confidentiality risks in public health.</a:t>
             </a:r>
-            <a:endParaRPr lang="en-US" sz="1320" dirty="0"/>
+            <a:endParaRPr lang="en-US" sz="1220" dirty="0"/>
           </a:p>
         </p:txBody>
       </p:sp>
@@ -15976,12 +15976,12 @@
         </p:nvSpPr>
         <p:spPr>
           <a:xfrm>
-            <a:off x="7635240" y="2670048"/>
-            <a:ext cx="3474720" cy="1377086"/>
+            <a:off x="7543800" y="2724912"/>
+            <a:ext cx="3611880" cy="1527048"/>
           </a:xfrm>
           <a:prstGeom prst="roundRect">
             <a:avLst>
-              <a:gd name="adj" fmla="val 7968"/>
+              <a:gd name="adj" fmla="val 7186"/>
             </a:avLst>
           </a:prstGeom>
           <a:solidFill>
@@ -16003,8 +16003,8 @@
         </p:nvSpPr>
         <p:spPr>
           <a:xfrm>
-            <a:off x="7799832" y="2816352"/>
-            <a:ext cx="3145536" cy="256032"/>
+            <a:off x="7708392" y="2852928"/>
+            <a:ext cx="3282696" cy="228600"/>
           </a:xfrm>
           <a:prstGeom prst="rect">
             <a:avLst/>
@@ -16020,7 +16020,7 @@
               <a:buNone/>
             </a:pPr>
             <a:r>
-              <a:rPr lang="en-US" sz="1300" b="1" dirty="0">
+              <a:rPr lang="en-US" sz="1220" b="1" dirty="0">
                 <a:solidFill>
                   <a:srgbClr val="0068B7"/>
                 </a:solidFill>
@@ -16030,7 +16030,7 @@
               </a:rPr>
               <a:t>Concept checkpoints</a:t>
             </a:r>
-            <a:endParaRPr lang="en-US" sz="1300" dirty="0"/>
+            <a:endParaRPr lang="en-US" sz="1220" dirty="0"/>
           </a:p>
         </p:txBody>
       </p:sp>
@@ -16042,8 +16042,8 @@
         </p:nvSpPr>
         <p:spPr>
           <a:xfrm>
-            <a:off x="7818120" y="3182112"/>
-            <a:ext cx="3090672" cy="718718"/>
+            <a:off x="7726680" y="3182112"/>
+            <a:ext cx="3227832" cy="960120"/>
           </a:xfrm>
           <a:prstGeom prst="rect">
             <a:avLst/>
@@ -16061,7 +16061,7 @@
               <a:buNone/>
             </a:pPr>
             <a:r>
-              <a:rPr lang="en-US" sz="1220" dirty="0">
+              <a:rPr lang="en-US" sz="1140" dirty="0">
                 <a:solidFill>
                   <a:srgbClr val="17364A"/>
                 </a:solidFill>
@@ -16069,16 +16069,16 @@
                 <a:ea typeface="Aptos" pitchFamily="34" charset="-122"/>
                 <a:cs typeface="Aptos" pitchFamily="34" charset="-120"/>
               </a:rPr>
-              <a:t>Distinguish between identifiable data, de-identified data,.</a:t>
-            </a:r>
-            <a:endParaRPr lang="en-US" sz="1220" dirty="0"/>
-          </a:p>
-          <a:p>
-            <a:pPr indent="0" marL="0">
-              <a:buNone/>
-            </a:pPr>
-            <a:r>
-              <a:rPr lang="en-US" sz="1220" dirty="0">
+              <a:t>Distinguish between identifiable data,.</a:t>
+            </a:r>
+            <a:endParaRPr lang="en-US" sz="1140" dirty="0"/>
+          </a:p>
+          <a:p>
+            <a:pPr indent="0" marL="0">
+              <a:buNone/>
+            </a:pPr>
+            <a:r>
+              <a:rPr lang="en-US" sz="1140" dirty="0">
                 <a:solidFill>
                   <a:srgbClr val="17364A"/>
                 </a:solidFill>
@@ -16086,16 +16086,16 @@
                 <a:ea typeface="Aptos" pitchFamily="34" charset="-122"/>
                 <a:cs typeface="Aptos" pitchFamily="34" charset="-120"/>
               </a:rPr>
-              <a:t>Identify technical and operational safeguards that reduce privacy.</a:t>
-            </a:r>
-            <a:endParaRPr lang="en-US" sz="1220" dirty="0"/>
-          </a:p>
-          <a:p>
-            <a:pPr indent="0" marL="0">
-              <a:buNone/>
-            </a:pPr>
-            <a:r>
-              <a:rPr lang="en-US" sz="1220" dirty="0">
+              <a:t>Identify technical and operational safeguards that.</a:t>
+            </a:r>
+            <a:endParaRPr lang="en-US" sz="1140" dirty="0"/>
+          </a:p>
+          <a:p>
+            <a:pPr indent="0" marL="0">
+              <a:buNone/>
+            </a:pPr>
+            <a:r>
+              <a:rPr lang="en-US" sz="1140" dirty="0">
                 <a:solidFill>
                   <a:srgbClr val="17364A"/>
                 </a:solidFill>
@@ -16103,9 +16103,9 @@
                 <a:ea typeface="Aptos" pitchFamily="34" charset="-122"/>
                 <a:cs typeface="Aptos" pitchFamily="34" charset="-120"/>
               </a:rPr>
-              <a:t>Assess re-identification risk when public health data are linked,.</a:t>
-            </a:r>
-            <a:endParaRPr lang="en-US" sz="1220" dirty="0"/>
+              <a:t>Assess re-identification risk when public health.</a:t>
+            </a:r>
+            <a:endParaRPr lang="en-US" sz="1140" dirty="0"/>
           </a:p>
         </p:txBody>
       </p:sp>
@@ -16117,12 +16117,12 @@
         </p:nvSpPr>
         <p:spPr>
           <a:xfrm>
-            <a:off x="7635240" y="4184294"/>
-            <a:ext cx="3474720" cy="1466698"/>
+            <a:off x="7543800" y="4389120"/>
+            <a:ext cx="3611880" cy="1261872"/>
           </a:xfrm>
           <a:prstGeom prst="roundRect">
             <a:avLst>
-              <a:gd name="adj" fmla="val 7481"/>
+              <a:gd name="adj" fmla="val 8696"/>
             </a:avLst>
           </a:prstGeom>
           <a:solidFill>
@@ -16144,8 +16144,8 @@
         </p:nvSpPr>
         <p:spPr>
           <a:xfrm>
-            <a:off x="7799832" y="4330598"/>
-            <a:ext cx="3145536" cy="256032"/>
+            <a:off x="7708392" y="4517136"/>
+            <a:ext cx="3282696" cy="228600"/>
           </a:xfrm>
           <a:prstGeom prst="rect">
             <a:avLst/>
@@ -16161,7 +16161,7 @@
               <a:buNone/>
             </a:pPr>
             <a:r>
-              <a:rPr lang="en-US" sz="1300" b="1" dirty="0">
+              <a:rPr lang="en-US" sz="1220" b="1" dirty="0">
                 <a:solidFill>
                   <a:srgbClr val="0068B7"/>
                 </a:solidFill>
@@ -16171,7 +16171,7 @@
               </a:rPr>
               <a:t>Safeguard to plan</a:t>
             </a:r>
-            <a:endParaRPr lang="en-US" sz="1300" dirty="0"/>
+            <a:endParaRPr lang="en-US" sz="1220" dirty="0"/>
           </a:p>
         </p:txBody>
       </p:sp>
@@ -16183,8 +16183,8 @@
         </p:nvSpPr>
         <p:spPr>
           <a:xfrm>
-            <a:off x="7799832" y="4659782"/>
-            <a:ext cx="3145536" cy="899770"/>
+            <a:off x="7708392" y="4828032"/>
+            <a:ext cx="3282696" cy="749808"/>
           </a:xfrm>
           <a:prstGeom prst="rect">
             <a:avLst/>
@@ -16202,7 +16202,7 @@
               <a:buNone/>
             </a:pPr>
             <a:r>
-              <a:rPr lang="en-US" sz="1320" dirty="0">
+              <a:rPr lang="en-US" sz="1220" dirty="0">
                 <a:solidFill>
                   <a:srgbClr val="17364A"/>
                 </a:solidFill>
@@ -16210,9 +16210,9 @@
                 <a:ea typeface="Aptos" pitchFamily="34" charset="-122"/>
                 <a:cs typeface="Aptos" pitchFamily="34" charset="-120"/>
               </a:rPr>
-              <a:t>Use the assignment to test whether you can explain the concept, apply it to a realistic public health situation, and identify what would need review before the work moves forward.</a:t>
-            </a:r>
-            <a:endParaRPr lang="en-US" sz="1320" dirty="0"/>
+              <a:t>Use the assignment to test whether you can explain the concept, apply it to a.</a:t>
+            </a:r>
+            <a:endParaRPr lang="en-US" sz="1220" dirty="0"/>
           </a:p>
         </p:txBody>
       </p:sp>
@@ -16503,8 +16503,8 @@
         </p:nvSpPr>
         <p:spPr>
           <a:xfrm>
-            <a:off x="868680" y="1508760"/>
-            <a:ext cx="6309360" cy="4160520"/>
+            <a:off x="822960" y="1463040"/>
+            <a:ext cx="6565392" cy="4343400"/>
           </a:xfrm>
           <a:prstGeom prst="rect">
             <a:avLst/>
@@ -16522,7 +16522,7 @@
               <a:buNone/>
             </a:pPr>
             <a:r>
-              <a:rPr lang="en-US" sz="2100" dirty="0">
+              <a:rPr lang="en-US" sz="1920" dirty="0">
                 <a:solidFill>
                   <a:srgbClr val="003A63"/>
                 </a:solidFill>
@@ -16530,9 +16530,9 @@
                 <a:ea typeface="Aptos" pitchFamily="34" charset="-122"/>
                 <a:cs typeface="Aptos" pitchFamily="34" charset="-120"/>
               </a:rPr>
-              <a:t>• Produce a privacy-preserving AI review worksheet for a real or realistic public health workflow.</a:t>
-            </a:r>
-            <a:endParaRPr lang="en-US" sz="2100" dirty="0"/>
+              <a:t>• Produce a privacy-preserving AI review worksheet for a real or realistic.</a:t>
+            </a:r>
+            <a:endParaRPr lang="en-US" sz="1920" dirty="0"/>
           </a:p>
         </p:txBody>
       </p:sp>
@@ -16544,12 +16544,12 @@
         </p:nvSpPr>
         <p:spPr>
           <a:xfrm>
-            <a:off x="7635240" y="1325880"/>
-            <a:ext cx="3474720" cy="1255471"/>
+            <a:off x="7543800" y="1325880"/>
+            <a:ext cx="3611880" cy="1261872"/>
           </a:xfrm>
           <a:prstGeom prst="roundRect">
             <a:avLst>
-              <a:gd name="adj" fmla="val 8740"/>
+              <a:gd name="adj" fmla="val 8696"/>
             </a:avLst>
           </a:prstGeom>
           <a:solidFill>
@@ -16571,8 +16571,8 @@
         </p:nvSpPr>
         <p:spPr>
           <a:xfrm>
-            <a:off x="7799832" y="1472184"/>
-            <a:ext cx="3145536" cy="256032"/>
+            <a:off x="7708392" y="1453896"/>
+            <a:ext cx="3282696" cy="228600"/>
           </a:xfrm>
           <a:prstGeom prst="rect">
             <a:avLst/>
@@ -16588,7 +16588,7 @@
               <a:buNone/>
             </a:pPr>
             <a:r>
-              <a:rPr lang="en-US" sz="1300" b="1" dirty="0">
+              <a:rPr lang="en-US" sz="1220" b="1" dirty="0">
                 <a:solidFill>
                   <a:srgbClr val="0068B7"/>
                 </a:solidFill>
@@ -16598,7 +16598,7 @@
               </a:rPr>
               <a:t>Risk check</a:t>
             </a:r>
-            <a:endParaRPr lang="en-US" sz="1300" dirty="0"/>
+            <a:endParaRPr lang="en-US" sz="1220" dirty="0"/>
           </a:p>
         </p:txBody>
       </p:sp>
@@ -16610,8 +16610,8 @@
         </p:nvSpPr>
         <p:spPr>
           <a:xfrm>
-            <a:off x="7799832" y="1801368"/>
-            <a:ext cx="3145536" cy="688543"/>
+            <a:off x="7708392" y="1764792"/>
+            <a:ext cx="3282696" cy="749808"/>
           </a:xfrm>
           <a:prstGeom prst="rect">
             <a:avLst/>
@@ -16629,7 +16629,7 @@
               <a:buNone/>
             </a:pPr>
             <a:r>
-              <a:rPr lang="en-US" sz="1320" dirty="0">
+              <a:rPr lang="en-US" sz="1220" dirty="0">
                 <a:solidFill>
                   <a:srgbClr val="17364A"/>
                 </a:solidFill>
@@ -16637,9 +16637,9 @@
                 <a:ea typeface="Aptos" pitchFamily="34" charset="-122"/>
                 <a:cs typeface="Aptos" pitchFamily="34" charset="-120"/>
               </a:rPr>
-              <a:t>Produce a privacy-preserving AI review worksheet for a real or realistic public health workflow.</a:t>
-            </a:r>
-            <a:endParaRPr lang="en-US" sz="1320" dirty="0"/>
+              <a:t>Produce a privacy-preserving AI review worksheet for a real or realistic public.</a:t>
+            </a:r>
+            <a:endParaRPr lang="en-US" sz="1220" dirty="0"/>
           </a:p>
         </p:txBody>
       </p:sp>
@@ -16651,12 +16651,12 @@
         </p:nvSpPr>
         <p:spPr>
           <a:xfrm>
-            <a:off x="7635240" y="2718511"/>
-            <a:ext cx="3474720" cy="1328623"/>
+            <a:off x="7543800" y="2724912"/>
+            <a:ext cx="3611880" cy="1527048"/>
           </a:xfrm>
           <a:prstGeom prst="roundRect">
             <a:avLst>
-              <a:gd name="adj" fmla="val 8259"/>
+              <a:gd name="adj" fmla="val 7186"/>
             </a:avLst>
           </a:prstGeom>
           <a:solidFill>
@@ -16678,8 +16678,8 @@
         </p:nvSpPr>
         <p:spPr>
           <a:xfrm>
-            <a:off x="7799832" y="2864815"/>
-            <a:ext cx="3145536" cy="256032"/>
+            <a:off x="7708392" y="2852928"/>
+            <a:ext cx="3282696" cy="228600"/>
           </a:xfrm>
           <a:prstGeom prst="rect">
             <a:avLst/>
@@ -16695,7 +16695,7 @@
               <a:buNone/>
             </a:pPr>
             <a:r>
-              <a:rPr lang="en-US" sz="1300" b="1" dirty="0">
+              <a:rPr lang="en-US" sz="1220" b="1" dirty="0">
                 <a:solidFill>
                   <a:srgbClr val="0068B7"/>
                 </a:solidFill>
@@ -16705,7 +16705,7 @@
               </a:rPr>
               <a:t>Concept checkpoints</a:t>
             </a:r>
-            <a:endParaRPr lang="en-US" sz="1300" dirty="0"/>
+            <a:endParaRPr lang="en-US" sz="1220" dirty="0"/>
           </a:p>
         </p:txBody>
       </p:sp>
@@ -16717,8 +16717,8 @@
         </p:nvSpPr>
         <p:spPr>
           <a:xfrm>
-            <a:off x="7818120" y="3230575"/>
-            <a:ext cx="3090672" cy="670255"/>
+            <a:off x="7726680" y="3182112"/>
+            <a:ext cx="3227832" cy="960120"/>
           </a:xfrm>
           <a:prstGeom prst="rect">
             <a:avLst/>
@@ -16736,7 +16736,7 @@
               <a:buNone/>
             </a:pPr>
             <a:r>
-              <a:rPr lang="en-US" sz="1220" dirty="0">
+              <a:rPr lang="en-US" sz="1140" dirty="0">
                 <a:solidFill>
                   <a:srgbClr val="17364A"/>
                 </a:solidFill>
@@ -16744,9 +16744,9 @@
                 <a:ea typeface="Aptos" pitchFamily="34" charset="-122"/>
                 <a:cs typeface="Aptos" pitchFamily="34" charset="-120"/>
               </a:rPr>
-              <a:t>Produce a privacy-preserving AI review worksheet for a real or.</a:t>
-            </a:r>
-            <a:endParaRPr lang="en-US" sz="1220" dirty="0"/>
+              <a:t>Produce a privacy-preserving AI review worksheet.</a:t>
+            </a:r>
+            <a:endParaRPr lang="en-US" sz="1140" dirty="0"/>
           </a:p>
         </p:txBody>
       </p:sp>
@@ -16758,12 +16758,12 @@
         </p:nvSpPr>
         <p:spPr>
           <a:xfrm>
-            <a:off x="7635240" y="4184294"/>
-            <a:ext cx="3474720" cy="1466698"/>
+            <a:off x="7543800" y="4389120"/>
+            <a:ext cx="3611880" cy="1261872"/>
           </a:xfrm>
           <a:prstGeom prst="roundRect">
             <a:avLst>
-              <a:gd name="adj" fmla="val 7481"/>
+              <a:gd name="adj" fmla="val 8696"/>
             </a:avLst>
           </a:prstGeom>
           <a:solidFill>
@@ -16785,8 +16785,8 @@
         </p:nvSpPr>
         <p:spPr>
           <a:xfrm>
-            <a:off x="7799832" y="4330598"/>
-            <a:ext cx="3145536" cy="256032"/>
+            <a:off x="7708392" y="4517136"/>
+            <a:ext cx="3282696" cy="228600"/>
           </a:xfrm>
           <a:prstGeom prst="rect">
             <a:avLst/>
@@ -16802,7 +16802,7 @@
               <a:buNone/>
             </a:pPr>
             <a:r>
-              <a:rPr lang="en-US" sz="1300" b="1" dirty="0">
+              <a:rPr lang="en-US" sz="1220" b="1" dirty="0">
                 <a:solidFill>
                   <a:srgbClr val="0068B7"/>
                 </a:solidFill>
@@ -16812,7 +16812,7 @@
               </a:rPr>
               <a:t>Safeguard to plan</a:t>
             </a:r>
-            <a:endParaRPr lang="en-US" sz="1300" dirty="0"/>
+            <a:endParaRPr lang="en-US" sz="1220" dirty="0"/>
           </a:p>
         </p:txBody>
       </p:sp>
@@ -16824,8 +16824,8 @@
         </p:nvSpPr>
         <p:spPr>
           <a:xfrm>
-            <a:off x="7799832" y="4659782"/>
-            <a:ext cx="3145536" cy="899770"/>
+            <a:off x="7708392" y="4828032"/>
+            <a:ext cx="3282696" cy="749808"/>
           </a:xfrm>
           <a:prstGeom prst="rect">
             <a:avLst/>
@@ -16843,7 +16843,7 @@
               <a:buNone/>
             </a:pPr>
             <a:r>
-              <a:rPr lang="en-US" sz="1320" dirty="0">
+              <a:rPr lang="en-US" sz="1220" dirty="0">
                 <a:solidFill>
                   <a:srgbClr val="17364A"/>
                 </a:solidFill>
@@ -16851,9 +16851,9 @@
                 <a:ea typeface="Aptos" pitchFamily="34" charset="-122"/>
                 <a:cs typeface="Aptos" pitchFamily="34" charset="-120"/>
               </a:rPr>
-              <a:t>Use the assignment to test whether you can explain the concept, apply it to a realistic public health situation, and identify what would need review before the work moves forward.</a:t>
-            </a:r>
-            <a:endParaRPr lang="en-US" sz="1320" dirty="0"/>
+              <a:t>Use the assignment to test whether you can explain the concept, apply it to a.</a:t>
+            </a:r>
+            <a:endParaRPr lang="en-US" sz="1220" dirty="0"/>
           </a:p>
         </p:txBody>
       </p:sp>
@@ -17144,8 +17144,8 @@
         </p:nvSpPr>
         <p:spPr>
           <a:xfrm>
-            <a:off x="868680" y="1508760"/>
-            <a:ext cx="6309360" cy="4160520"/>
+            <a:off x="822960" y="1463040"/>
+            <a:ext cx="6565392" cy="4343400"/>
           </a:xfrm>
           <a:prstGeom prst="rect">
             <a:avLst/>
@@ -17163,7 +17163,7 @@
               <a:buNone/>
             </a:pPr>
             <a:r>
-              <a:rPr lang="en-US" sz="2100" dirty="0">
+              <a:rPr lang="en-US" sz="1920" dirty="0">
                 <a:solidFill>
                   <a:srgbClr val="003A63"/>
                 </a:solidFill>
@@ -17171,16 +17171,16 @@
                 <a:ea typeface="Aptos" pitchFamily="34" charset="-122"/>
                 <a:cs typeface="Aptos" pitchFamily="34" charset="-120"/>
               </a:rPr>
-              <a:t>• Privacy-preserving AI is the set of technical, policy, and workflow practices that allow.</a:t>
-            </a:r>
-            <a:endParaRPr lang="en-US" sz="2100" dirty="0"/>
-          </a:p>
-          <a:p>
-            <a:pPr indent="0" marL="0">
-              <a:buNone/>
-            </a:pPr>
-            <a:r>
-              <a:rPr lang="en-US" sz="2100" dirty="0">
+              <a:t>• Privacy-preserving AI is the set of technical, policy, and workflow.</a:t>
+            </a:r>
+            <a:endParaRPr lang="en-US" sz="1920" dirty="0"/>
+          </a:p>
+          <a:p>
+            <a:pPr indent="0" marL="0">
+              <a:buNone/>
+            </a:pPr>
+            <a:r>
+              <a:rPr lang="en-US" sz="1920" dirty="0">
                 <a:solidFill>
                   <a:srgbClr val="003A63"/>
                 </a:solidFill>
@@ -17188,16 +17188,16 @@
                 <a:ea typeface="Aptos" pitchFamily="34" charset="-122"/>
                 <a:cs typeface="Aptos" pitchFamily="34" charset="-120"/>
               </a:rPr>
-              <a:t>• This module focuses on how privacy protections must be built into AI planning before data are.</a:t>
-            </a:r>
-            <a:endParaRPr lang="en-US" sz="2100" dirty="0"/>
-          </a:p>
-          <a:p>
-            <a:pPr indent="0" marL="0">
-              <a:buNone/>
-            </a:pPr>
-            <a:r>
-              <a:rPr lang="en-US" sz="2100" dirty="0">
+              <a:t>• This module focuses on how privacy protections must be built into AI.</a:t>
+            </a:r>
+            <a:endParaRPr lang="en-US" sz="1920" dirty="0"/>
+          </a:p>
+          <a:p>
+            <a:pPr indent="0" marL="0">
+              <a:buNone/>
+            </a:pPr>
+            <a:r>
+              <a:rPr lang="en-US" sz="1920" dirty="0">
                 <a:solidFill>
                   <a:srgbClr val="003A63"/>
                 </a:solidFill>
@@ -17205,9 +17205,9 @@
                 <a:ea typeface="Aptos" pitchFamily="34" charset="-122"/>
                 <a:cs typeface="Aptos" pitchFamily="34" charset="-120"/>
               </a:rPr>
-              <a:t>• Public health agencies often have legal authority to collect and use sensitive data, but.</a:t>
-            </a:r>
-            <a:endParaRPr lang="en-US" sz="2100" dirty="0"/>
+              <a:t>• Public health agencies often have legal authority to collect and use.</a:t>
+            </a:r>
+            <a:endParaRPr lang="en-US" sz="1920" dirty="0"/>
           </a:p>
         </p:txBody>
       </p:sp>
@@ -17219,12 +17219,12 @@
         </p:nvSpPr>
         <p:spPr>
           <a:xfrm>
-            <a:off x="7635240" y="1325880"/>
-            <a:ext cx="3474720" cy="1255471"/>
+            <a:off x="7543800" y="1325880"/>
+            <a:ext cx="3611880" cy="1261872"/>
           </a:xfrm>
           <a:prstGeom prst="roundRect">
             <a:avLst>
-              <a:gd name="adj" fmla="val 8740"/>
+              <a:gd name="adj" fmla="val 8696"/>
             </a:avLst>
           </a:prstGeom>
           <a:solidFill>
@@ -17246,8 +17246,8 @@
         </p:nvSpPr>
         <p:spPr>
           <a:xfrm>
-            <a:off x="7799832" y="1472184"/>
-            <a:ext cx="3145536" cy="256032"/>
+            <a:off x="7708392" y="1453896"/>
+            <a:ext cx="3282696" cy="228600"/>
           </a:xfrm>
           <a:prstGeom prst="rect">
             <a:avLst/>
@@ -17263,7 +17263,7 @@
               <a:buNone/>
             </a:pPr>
             <a:r>
-              <a:rPr lang="en-US" sz="1300" b="1" dirty="0">
+              <a:rPr lang="en-US" sz="1220" b="1" dirty="0">
                 <a:solidFill>
                   <a:srgbClr val="0068B7"/>
                 </a:solidFill>
@@ -17273,7 +17273,7 @@
               </a:rPr>
               <a:t>Risk check</a:t>
             </a:r>
-            <a:endParaRPr lang="en-US" sz="1300" dirty="0"/>
+            <a:endParaRPr lang="en-US" sz="1220" dirty="0"/>
           </a:p>
         </p:txBody>
       </p:sp>
@@ -17285,8 +17285,8 @@
         </p:nvSpPr>
         <p:spPr>
           <a:xfrm>
-            <a:off x="7799832" y="1801368"/>
-            <a:ext cx="3145536" cy="688543"/>
+            <a:off x="7708392" y="1764792"/>
+            <a:ext cx="3282696" cy="749808"/>
           </a:xfrm>
           <a:prstGeom prst="rect">
             <a:avLst/>
@@ -17304,7 +17304,7 @@
               <a:buNone/>
             </a:pPr>
             <a:r>
-              <a:rPr lang="en-US" sz="1320" dirty="0">
+              <a:rPr lang="en-US" sz="1220" dirty="0">
                 <a:solidFill>
                   <a:srgbClr val="17364A"/>
                 </a:solidFill>
@@ -17312,9 +17312,9 @@
                 <a:ea typeface="Aptos" pitchFamily="34" charset="-122"/>
                 <a:cs typeface="Aptos" pitchFamily="34" charset="-120"/>
               </a:rPr>
-              <a:t>Privacy-preserving AI is the set of technical, policy, and workflow practices that allow public health.</a:t>
-            </a:r>
-            <a:endParaRPr lang="en-US" sz="1320" dirty="0"/>
+              <a:t>Privacy-preserving AI is the set of technical, policy, and workflow practices.</a:t>
+            </a:r>
+            <a:endParaRPr lang="en-US" sz="1220" dirty="0"/>
           </a:p>
         </p:txBody>
       </p:sp>
@@ -17326,12 +17326,12 @@
         </p:nvSpPr>
         <p:spPr>
           <a:xfrm>
-            <a:off x="7635240" y="2718511"/>
-            <a:ext cx="3474720" cy="1536192"/>
+            <a:off x="7543800" y="2724912"/>
+            <a:ext cx="3611880" cy="1527048"/>
           </a:xfrm>
           <a:prstGeom prst="roundRect">
             <a:avLst>
-              <a:gd name="adj" fmla="val 7143"/>
+              <a:gd name="adj" fmla="val 7186"/>
             </a:avLst>
           </a:prstGeom>
           <a:solidFill>
@@ -17353,24 +17353,26 @@
         </p:nvSpPr>
         <p:spPr>
           <a:xfrm>
-            <a:off x="7799832" y="2846527"/>
-            <a:ext cx="3145536" cy="237744"/>
-          </a:xfrm>
-          <a:prstGeom prst="rect">
-            <a:avLst/>
-          </a:prstGeom>
-          <a:noFill/>
-          <a:ln/>
-        </p:spPr>
-        <p:txBody>
-          <a:bodyPr wrap="square" lIns="0" tIns="0" rIns="0" bIns="0" rtlCol="0" anchor="ctr"/>
-          <a:lstStyle/>
-          <a:p>
-            <a:pPr indent="0" marL="0">
-              <a:buNone/>
-            </a:pPr>
-            <a:r>
-              <a:rPr lang="en-US" sz="1250" b="1" dirty="0">
+            <a:off x="7708392" y="2852928"/>
+            <a:ext cx="3282696" cy="219456"/>
+          </a:xfrm>
+          <a:prstGeom prst="rect">
+            <a:avLst/>
+          </a:prstGeom>
+          <a:noFill/>
+          <a:ln/>
+        </p:spPr>
+        <p:txBody>
+          <a:bodyPr wrap="square" lIns="0" tIns="0" rIns="0" bIns="0" rtlCol="0" anchor="ctr">
+            <a:normAutofit/>
+          </a:bodyPr>
+          <a:lstStyle/>
+          <a:p>
+            <a:pPr indent="0" marL="0">
+              <a:buNone/>
+            </a:pPr>
+            <a:r>
+              <a:rPr lang="en-US" sz="1160" b="1" dirty="0">
                 <a:solidFill>
                   <a:srgbClr val="0068B7"/>
                 </a:solidFill>
@@ -17380,7 +17382,7 @@
               </a:rPr>
               <a:t>Risk control loop</a:t>
             </a:r>
-            <a:endParaRPr lang="en-US" sz="1250" dirty="0"/>
+            <a:endParaRPr lang="en-US" sz="1160" dirty="0"/>
           </a:p>
         </p:txBody>
       </p:sp>
@@ -17392,7 +17394,7 @@
         </p:nvSpPr>
         <p:spPr>
           <a:xfrm>
-            <a:off x="8763000" y="3399739"/>
+            <a:off x="8717280" y="3406140"/>
             <a:ext cx="164592" cy="0"/>
           </a:xfrm>
           <a:prstGeom prst="line">
@@ -17415,8 +17417,8 @@
         </p:nvSpPr>
         <p:spPr>
           <a:xfrm>
-            <a:off x="7872984" y="3248863"/>
-            <a:ext cx="890016" cy="301752"/>
+            <a:off x="7781544" y="3255264"/>
+            <a:ext cx="935736" cy="301752"/>
           </a:xfrm>
           <a:prstGeom prst="roundRect">
             <a:avLst>
@@ -17442,8 +17444,8 @@
         </p:nvSpPr>
         <p:spPr>
           <a:xfrm>
-            <a:off x="7909560" y="3322015"/>
-            <a:ext cx="816864" cy="146304"/>
+            <a:off x="7818120" y="3328416"/>
+            <a:ext cx="862584" cy="146304"/>
           </a:xfrm>
           <a:prstGeom prst="rect">
             <a:avLst/>
@@ -17483,7 +17485,7 @@
         </p:nvSpPr>
         <p:spPr>
           <a:xfrm>
-            <a:off x="9817608" y="3399739"/>
+            <a:off x="9817608" y="3406140"/>
             <a:ext cx="164592" cy="0"/>
           </a:xfrm>
           <a:prstGeom prst="line">
@@ -17506,8 +17508,8 @@
         </p:nvSpPr>
         <p:spPr>
           <a:xfrm>
-            <a:off x="8927592" y="3248863"/>
-            <a:ext cx="890016" cy="301752"/>
+            <a:off x="8881872" y="3255264"/>
+            <a:ext cx="935736" cy="301752"/>
           </a:xfrm>
           <a:prstGeom prst="roundRect">
             <a:avLst>
@@ -17533,8 +17535,8 @@
         </p:nvSpPr>
         <p:spPr>
           <a:xfrm>
-            <a:off x="8964168" y="3322015"/>
-            <a:ext cx="816864" cy="146304"/>
+            <a:off x="8918448" y="3328416"/>
+            <a:ext cx="862584" cy="146304"/>
           </a:xfrm>
           <a:prstGeom prst="rect">
             <a:avLst/>
@@ -17574,8 +17576,8 @@
         </p:nvSpPr>
         <p:spPr>
           <a:xfrm>
-            <a:off x="9982200" y="3248863"/>
-            <a:ext cx="890016" cy="301752"/>
+            <a:off x="9982200" y="3255264"/>
+            <a:ext cx="935736" cy="301752"/>
           </a:xfrm>
           <a:prstGeom prst="roundRect">
             <a:avLst>
@@ -17601,8 +17603,8 @@
         </p:nvSpPr>
         <p:spPr>
           <a:xfrm>
-            <a:off x="10018776" y="3322015"/>
-            <a:ext cx="816864" cy="146304"/>
+            <a:off x="10018776" y="3328416"/>
+            <a:ext cx="862584" cy="146304"/>
           </a:xfrm>
           <a:prstGeom prst="rect">
             <a:avLst/>
@@ -17642,8 +17644,8 @@
         </p:nvSpPr>
         <p:spPr>
           <a:xfrm>
-            <a:off x="7854696" y="3742639"/>
-            <a:ext cx="3035808" cy="365760"/>
+            <a:off x="7763256" y="3749040"/>
+            <a:ext cx="3172968" cy="356616"/>
           </a:xfrm>
           <a:prstGeom prst="rect">
             <a:avLst/>
@@ -17661,7 +17663,7 @@
               <a:buNone/>
             </a:pPr>
             <a:r>
-              <a:rPr lang="en-US" sz="1120" dirty="0">
+              <a:rPr lang="en-US" sz="1040" dirty="0">
                 <a:solidFill>
                   <a:srgbClr val="17364A"/>
                 </a:solidFill>
@@ -17669,9 +17671,9 @@
                 <a:ea typeface="Aptos" pitchFamily="34" charset="-122"/>
                 <a:cs typeface="Aptos" pitchFamily="34" charset="-120"/>
               </a:rPr>
-              <a:t>Responsible use depends on finding risks early, applying safeguards, and watching for drift or harm over time.</a:t>
-            </a:r>
-            <a:endParaRPr lang="en-US" sz="1120" dirty="0"/>
+              <a:t>Responsible use depends on finding risks early, applying safeguards,.</a:t>
+            </a:r>
+            <a:endParaRPr lang="en-US" sz="1040" dirty="0"/>
           </a:p>
         </p:txBody>
       </p:sp>
@@ -17683,12 +17685,12 @@
         </p:nvSpPr>
         <p:spPr>
           <a:xfrm>
-            <a:off x="7635240" y="4391863"/>
-            <a:ext cx="3474720" cy="1255471"/>
+            <a:off x="7543800" y="4389120"/>
+            <a:ext cx="3611880" cy="1261872"/>
           </a:xfrm>
           <a:prstGeom prst="roundRect">
             <a:avLst>
-              <a:gd name="adj" fmla="val 8740"/>
+              <a:gd name="adj" fmla="val 8696"/>
             </a:avLst>
           </a:prstGeom>
           <a:solidFill>
@@ -17710,8 +17712,8 @@
         </p:nvSpPr>
         <p:spPr>
           <a:xfrm>
-            <a:off x="7799832" y="4538167"/>
-            <a:ext cx="3145536" cy="256032"/>
+            <a:off x="7708392" y="4517136"/>
+            <a:ext cx="3282696" cy="228600"/>
           </a:xfrm>
           <a:prstGeom prst="rect">
             <a:avLst/>
@@ -17727,7 +17729,7 @@
               <a:buNone/>
             </a:pPr>
             <a:r>
-              <a:rPr lang="en-US" sz="1300" b="1" dirty="0">
+              <a:rPr lang="en-US" sz="1220" b="1" dirty="0">
                 <a:solidFill>
                   <a:srgbClr val="0068B7"/>
                 </a:solidFill>
@@ -17737,7 +17739,7 @@
               </a:rPr>
               <a:t>Safeguard to plan</a:t>
             </a:r>
-            <a:endParaRPr lang="en-US" sz="1300" dirty="0"/>
+            <a:endParaRPr lang="en-US" sz="1220" dirty="0"/>
           </a:p>
         </p:txBody>
       </p:sp>
@@ -17749,8 +17751,8 @@
         </p:nvSpPr>
         <p:spPr>
           <a:xfrm>
-            <a:off x="7799832" y="4867351"/>
-            <a:ext cx="3145536" cy="688543"/>
+            <a:off x="7708392" y="4828032"/>
+            <a:ext cx="3282696" cy="749808"/>
           </a:xfrm>
           <a:prstGeom prst="rect">
             <a:avLst/>
@@ -17768,7 +17770,7 @@
               <a:buNone/>
             </a:pPr>
             <a:r>
-              <a:rPr lang="en-US" sz="1320" dirty="0">
+              <a:rPr lang="en-US" sz="1220" dirty="0">
                 <a:solidFill>
                   <a:srgbClr val="17364A"/>
                 </a:solidFill>
@@ -17776,9 +17778,9 @@
                 <a:ea typeface="Aptos" pitchFamily="34" charset="-122"/>
                 <a:cs typeface="Aptos" pitchFamily="34" charset="-120"/>
               </a:rPr>
-              <a:t>Identify what could go wrong, who could be affected, what safeguards are needed, and what evidence should be reviewed before use.</a:t>
-            </a:r>
-            <a:endParaRPr lang="en-US" sz="1320" dirty="0"/>
+              <a:t>Identify what could go wrong, who could be affected, what safeguards are needed,.</a:t>
+            </a:r>
+            <a:endParaRPr lang="en-US" sz="1220" dirty="0"/>
           </a:p>
         </p:txBody>
       </p:sp>
@@ -18069,8 +18071,8 @@
         </p:nvSpPr>
         <p:spPr>
           <a:xfrm>
-            <a:off x="868680" y="1508760"/>
-            <a:ext cx="6309360" cy="4160520"/>
+            <a:off x="822960" y="1463040"/>
+            <a:ext cx="6565392" cy="4343400"/>
           </a:xfrm>
           <a:prstGeom prst="rect">
             <a:avLst/>
@@ -18088,7 +18090,7 @@
               <a:buNone/>
             </a:pPr>
             <a:r>
-              <a:rPr lang="en-US" sz="2100" dirty="0">
+              <a:rPr lang="en-US" sz="1920" dirty="0">
                 <a:solidFill>
                   <a:srgbClr val="003A63"/>
                 </a:solidFill>
@@ -18096,16 +18098,16 @@
                 <a:ea typeface="Aptos" pitchFamily="34" charset="-122"/>
                 <a:cs typeface="Aptos" pitchFamily="34" charset="-120"/>
               </a:rPr>
-              <a:t>• This module provides national-level training guidance for public health agencies and partners.</a:t>
-            </a:r>
-            <a:endParaRPr lang="en-US" sz="2100" dirty="0"/>
-          </a:p>
-          <a:p>
-            <a:pPr indent="0" marL="0">
-              <a:buNone/>
-            </a:pPr>
-            <a:r>
-              <a:rPr lang="en-US" sz="2100" dirty="0">
+              <a:t>• This module provides national-level training guidance for public health.</a:t>
+            </a:r>
+            <a:endParaRPr lang="en-US" sz="1920" dirty="0"/>
+          </a:p>
+          <a:p>
+            <a:pPr indent="0" marL="0">
+              <a:buNone/>
+            </a:pPr>
+            <a:r>
+              <a:rPr lang="en-US" sz="1920" dirty="0">
                 <a:solidFill>
                   <a:srgbClr val="003A63"/>
                 </a:solidFill>
@@ -18113,16 +18115,16 @@
                 <a:ea typeface="Aptos" pitchFamily="34" charset="-122"/>
                 <a:cs typeface="Aptos" pitchFamily="34" charset="-120"/>
               </a:rPr>
-              <a:t>• It is not legal advice and does not replace review by agency legal counsel, privacy officers,.</a:t>
-            </a:r>
-            <a:endParaRPr lang="en-US" sz="2100" dirty="0"/>
-          </a:p>
-          <a:p>
-            <a:pPr indent="0" marL="0">
-              <a:buNone/>
-            </a:pPr>
-            <a:r>
-              <a:rPr lang="en-US" sz="2100" dirty="0">
+              <a:t>• It is not legal advice and does not replace review by agency legal counsel,.</a:t>
+            </a:r>
+            <a:endParaRPr lang="en-US" sz="1920" dirty="0"/>
+          </a:p>
+          <a:p>
+            <a:pPr indent="0" marL="0">
+              <a:buNone/>
+            </a:pPr>
+            <a:r>
+              <a:rPr lang="en-US" sz="1920" dirty="0">
                 <a:solidFill>
                   <a:srgbClr val="003A63"/>
                 </a:solidFill>
@@ -18130,9 +18132,9 @@
                 <a:ea typeface="Aptos" pitchFamily="34" charset="-122"/>
                 <a:cs typeface="Aptos" pitchFamily="34" charset="-120"/>
               </a:rPr>
-              <a:t>• Requirements may vary by state, locality, territory, Tribe, agency, funding source,.</a:t>
-            </a:r>
-            <a:endParaRPr lang="en-US" sz="2100" dirty="0"/>
+              <a:t>• Requirements may vary by state, locality, territory, Tribe, agency, funding.</a:t>
+            </a:r>
+            <a:endParaRPr lang="en-US" sz="1920" dirty="0"/>
           </a:p>
         </p:txBody>
       </p:sp>
@@ -18144,12 +18146,12 @@
         </p:nvSpPr>
         <p:spPr>
           <a:xfrm>
-            <a:off x="7635240" y="1325880"/>
-            <a:ext cx="3474720" cy="1207008"/>
+            <a:off x="7543800" y="1325880"/>
+            <a:ext cx="3611880" cy="1261872"/>
           </a:xfrm>
           <a:prstGeom prst="roundRect">
             <a:avLst>
-              <a:gd name="adj" fmla="val 9091"/>
+              <a:gd name="adj" fmla="val 8696"/>
             </a:avLst>
           </a:prstGeom>
           <a:solidFill>
@@ -18171,8 +18173,8 @@
         </p:nvSpPr>
         <p:spPr>
           <a:xfrm>
-            <a:off x="7799832" y="1472184"/>
-            <a:ext cx="3145536" cy="256032"/>
+            <a:off x="7708392" y="1453896"/>
+            <a:ext cx="3282696" cy="228600"/>
           </a:xfrm>
           <a:prstGeom prst="rect">
             <a:avLst/>
@@ -18188,7 +18190,7 @@
               <a:buNone/>
             </a:pPr>
             <a:r>
-              <a:rPr lang="en-US" sz="1300" b="1" dirty="0">
+              <a:rPr lang="en-US" sz="1220" b="1" dirty="0">
                 <a:solidFill>
                   <a:srgbClr val="0068B7"/>
                 </a:solidFill>
@@ -18198,7 +18200,7 @@
               </a:rPr>
               <a:t>Governance lens</a:t>
             </a:r>
-            <a:endParaRPr lang="en-US" sz="1300" dirty="0"/>
+            <a:endParaRPr lang="en-US" sz="1220" dirty="0"/>
           </a:p>
         </p:txBody>
       </p:sp>
@@ -18210,8 +18212,8 @@
         </p:nvSpPr>
         <p:spPr>
           <a:xfrm>
-            <a:off x="7799832" y="1801368"/>
-            <a:ext cx="3145536" cy="640080"/>
+            <a:off x="7708392" y="1764792"/>
+            <a:ext cx="3282696" cy="749808"/>
           </a:xfrm>
           <a:prstGeom prst="rect">
             <a:avLst/>
@@ -18229,7 +18231,7 @@
               <a:buNone/>
             </a:pPr>
             <a:r>
-              <a:rPr lang="en-US" sz="1320" dirty="0">
+              <a:rPr lang="en-US" sz="1220" dirty="0">
                 <a:solidFill>
                   <a:srgbClr val="17364A"/>
                 </a:solidFill>
@@ -18237,9 +18239,9 @@
                 <a:ea typeface="Aptos" pitchFamily="34" charset="-122"/>
                 <a:cs typeface="Aptos" pitchFamily="34" charset="-120"/>
               </a:rPr>
-              <a:t>This module provides national-level training guidance for public health agencies and.</a:t>
-            </a:r>
-            <a:endParaRPr lang="en-US" sz="1320" dirty="0"/>
+              <a:t>This module provides national-level training guidance for public health agencies.</a:t>
+            </a:r>
+            <a:endParaRPr lang="en-US" sz="1220" dirty="0"/>
           </a:p>
         </p:txBody>
       </p:sp>
@@ -18251,12 +18253,12 @@
         </p:nvSpPr>
         <p:spPr>
           <a:xfrm>
-            <a:off x="7635240" y="2670048"/>
-            <a:ext cx="3474720" cy="1377086"/>
+            <a:off x="7543800" y="2724912"/>
+            <a:ext cx="3611880" cy="1527048"/>
           </a:xfrm>
           <a:prstGeom prst="roundRect">
             <a:avLst>
-              <a:gd name="adj" fmla="val 7968"/>
+              <a:gd name="adj" fmla="val 7186"/>
             </a:avLst>
           </a:prstGeom>
           <a:solidFill>
@@ -18278,24 +18280,26 @@
         </p:nvSpPr>
         <p:spPr>
           <a:xfrm>
-            <a:off x="7799832" y="2798064"/>
-            <a:ext cx="3145536" cy="237744"/>
-          </a:xfrm>
-          <a:prstGeom prst="rect">
-            <a:avLst/>
-          </a:prstGeom>
-          <a:noFill/>
-          <a:ln/>
-        </p:spPr>
-        <p:txBody>
-          <a:bodyPr wrap="square" lIns="0" tIns="0" rIns="0" bIns="0" rtlCol="0" anchor="ctr"/>
-          <a:lstStyle/>
-          <a:p>
-            <a:pPr indent="0" marL="0">
-              <a:buNone/>
-            </a:pPr>
-            <a:r>
-              <a:rPr lang="en-US" sz="1250" b="1" dirty="0">
+            <a:off x="7708392" y="2852928"/>
+            <a:ext cx="3282696" cy="219456"/>
+          </a:xfrm>
+          <a:prstGeom prst="rect">
+            <a:avLst/>
+          </a:prstGeom>
+          <a:noFill/>
+          <a:ln/>
+        </p:spPr>
+        <p:txBody>
+          <a:bodyPr wrap="square" lIns="0" tIns="0" rIns="0" bIns="0" rtlCol="0" anchor="ctr">
+            <a:normAutofit/>
+          </a:bodyPr>
+          <a:lstStyle/>
+          <a:p>
+            <a:pPr indent="0" marL="0">
+              <a:buNone/>
+            </a:pPr>
+            <a:r>
+              <a:rPr lang="en-US" sz="1160" b="1" dirty="0">
                 <a:solidFill>
                   <a:srgbClr val="0068B7"/>
                 </a:solidFill>
@@ -18305,7 +18309,7 @@
               </a:rPr>
               <a:t>Governance pathway</a:t>
             </a:r>
-            <a:endParaRPr lang="en-US" sz="1250" dirty="0"/>
+            <a:endParaRPr lang="en-US" sz="1160" dirty="0"/>
           </a:p>
         </p:txBody>
       </p:sp>
@@ -18317,7 +18321,7 @@
         </p:nvSpPr>
         <p:spPr>
           <a:xfrm>
-            <a:off x="8763000" y="3351276"/>
+            <a:off x="8717280" y="3406140"/>
             <a:ext cx="164592" cy="0"/>
           </a:xfrm>
           <a:prstGeom prst="line">
@@ -18340,8 +18344,8 @@
         </p:nvSpPr>
         <p:spPr>
           <a:xfrm>
-            <a:off x="7872984" y="3200400"/>
-            <a:ext cx="890016" cy="301752"/>
+            <a:off x="7781544" y="3255264"/>
+            <a:ext cx="935736" cy="301752"/>
           </a:xfrm>
           <a:prstGeom prst="roundRect">
             <a:avLst>
@@ -18367,8 +18371,8 @@
         </p:nvSpPr>
         <p:spPr>
           <a:xfrm>
-            <a:off x="7909560" y="3273552"/>
-            <a:ext cx="816864" cy="146304"/>
+            <a:off x="7818120" y="3328416"/>
+            <a:ext cx="862584" cy="146304"/>
           </a:xfrm>
           <a:prstGeom prst="rect">
             <a:avLst/>
@@ -18408,7 +18412,7 @@
         </p:nvSpPr>
         <p:spPr>
           <a:xfrm>
-            <a:off x="9817608" y="3351276"/>
+            <a:off x="9817608" y="3406140"/>
             <a:ext cx="164592" cy="0"/>
           </a:xfrm>
           <a:prstGeom prst="line">
@@ -18431,8 +18435,8 @@
         </p:nvSpPr>
         <p:spPr>
           <a:xfrm>
-            <a:off x="8927592" y="3200400"/>
-            <a:ext cx="890016" cy="301752"/>
+            <a:off x="8881872" y="3255264"/>
+            <a:ext cx="935736" cy="301752"/>
           </a:xfrm>
           <a:prstGeom prst="roundRect">
             <a:avLst>
@@ -18458,8 +18462,8 @@
         </p:nvSpPr>
         <p:spPr>
           <a:xfrm>
-            <a:off x="8964168" y="3273552"/>
-            <a:ext cx="816864" cy="146304"/>
+            <a:off x="8918448" y="3328416"/>
+            <a:ext cx="862584" cy="146304"/>
           </a:xfrm>
           <a:prstGeom prst="rect">
             <a:avLst/>
@@ -18499,8 +18503,8 @@
         </p:nvSpPr>
         <p:spPr>
           <a:xfrm>
-            <a:off x="9982200" y="3200400"/>
-            <a:ext cx="890016" cy="301752"/>
+            <a:off x="9982200" y="3255264"/>
+            <a:ext cx="935736" cy="301752"/>
           </a:xfrm>
           <a:prstGeom prst="roundRect">
             <a:avLst>
@@ -18526,8 +18530,8 @@
         </p:nvSpPr>
         <p:spPr>
           <a:xfrm>
-            <a:off x="10018776" y="3273552"/>
-            <a:ext cx="816864" cy="146304"/>
+            <a:off x="10018776" y="3328416"/>
+            <a:ext cx="862584" cy="146304"/>
           </a:xfrm>
           <a:prstGeom prst="rect">
             <a:avLst/>
@@ -18567,8 +18571,8 @@
         </p:nvSpPr>
         <p:spPr>
           <a:xfrm>
-            <a:off x="7854696" y="3694176"/>
-            <a:ext cx="3035808" cy="206654"/>
+            <a:off x="7763256" y="3749040"/>
+            <a:ext cx="3172968" cy="356616"/>
           </a:xfrm>
           <a:prstGeom prst="rect">
             <a:avLst/>
@@ -18586,7 +18590,7 @@
               <a:buNone/>
             </a:pPr>
             <a:r>
-              <a:rPr lang="en-US" sz="1120" dirty="0">
+              <a:rPr lang="en-US" sz="1040" dirty="0">
                 <a:solidFill>
                   <a:srgbClr val="17364A"/>
                 </a:solidFill>
@@ -18594,9 +18598,9 @@
                 <a:ea typeface="Aptos" pitchFamily="34" charset="-122"/>
                 <a:cs typeface="Aptos" pitchFamily="34" charset="-120"/>
               </a:rPr>
-              <a:t>A proposed AI use should move through documented review before it becomes an operational workflow.</a:t>
-            </a:r>
-            <a:endParaRPr lang="en-US" sz="1120" dirty="0"/>
+              <a:t>A proposed AI use should move through documented review before it.</a:t>
+            </a:r>
+            <a:endParaRPr lang="en-US" sz="1040" dirty="0"/>
           </a:p>
         </p:txBody>
       </p:sp>
@@ -18608,12 +18612,12 @@
         </p:nvSpPr>
         <p:spPr>
           <a:xfrm>
-            <a:off x="7635240" y="4184294"/>
-            <a:ext cx="3474720" cy="1466698"/>
+            <a:off x="7543800" y="4389120"/>
+            <a:ext cx="3611880" cy="1261872"/>
           </a:xfrm>
           <a:prstGeom prst="roundRect">
             <a:avLst>
-              <a:gd name="adj" fmla="val 7481"/>
+              <a:gd name="adj" fmla="val 8696"/>
             </a:avLst>
           </a:prstGeom>
           <a:solidFill>
@@ -18635,8 +18639,8 @@
         </p:nvSpPr>
         <p:spPr>
           <a:xfrm>
-            <a:off x="7799832" y="4330598"/>
-            <a:ext cx="3145536" cy="256032"/>
+            <a:off x="7708392" y="4517136"/>
+            <a:ext cx="3282696" cy="228600"/>
           </a:xfrm>
           <a:prstGeom prst="rect">
             <a:avLst/>
@@ -18652,7 +18656,7 @@
               <a:buNone/>
             </a:pPr>
             <a:r>
-              <a:rPr lang="en-US" sz="1300" b="1" dirty="0">
+              <a:rPr lang="en-US" sz="1220" b="1" dirty="0">
                 <a:solidFill>
                   <a:srgbClr val="0068B7"/>
                 </a:solidFill>
@@ -18662,7 +18666,7 @@
               </a:rPr>
               <a:t>What to document</a:t>
             </a:r>
-            <a:endParaRPr lang="en-US" sz="1300" dirty="0"/>
+            <a:endParaRPr lang="en-US" sz="1220" dirty="0"/>
           </a:p>
         </p:txBody>
       </p:sp>
@@ -18674,8 +18678,8 @@
         </p:nvSpPr>
         <p:spPr>
           <a:xfrm>
-            <a:off x="7799832" y="4659782"/>
-            <a:ext cx="3145536" cy="899770"/>
+            <a:off x="7708392" y="4828032"/>
+            <a:ext cx="3282696" cy="749808"/>
           </a:xfrm>
           <a:prstGeom prst="rect">
             <a:avLst/>
@@ -18693,7 +18697,7 @@
               <a:buNone/>
             </a:pPr>
             <a:r>
-              <a:rPr lang="en-US" sz="1320" dirty="0">
+              <a:rPr lang="en-US" sz="1220" dirty="0">
                 <a:solidFill>
                   <a:srgbClr val="17364A"/>
                 </a:solidFill>
@@ -18701,9 +18705,9 @@
                 <a:ea typeface="Aptos" pitchFamily="34" charset="-122"/>
                 <a:cs typeface="Aptos" pitchFamily="34" charset="-120"/>
               </a:rPr>
-              <a:t>Translate this concept into clear decision rights, review steps, documentation expectations, and escalation paths before an AI-supported workflow is approved.</a:t>
-            </a:r>
-            <a:endParaRPr lang="en-US" sz="1320" dirty="0"/>
+              <a:t>Translate this concept into clear decision rights, review steps, documentation.</a:t>
+            </a:r>
+            <a:endParaRPr lang="en-US" sz="1220" dirty="0"/>
           </a:p>
         </p:txBody>
       </p:sp>
@@ -18994,8 +18998,8 @@
         </p:nvSpPr>
         <p:spPr>
           <a:xfrm>
-            <a:off x="868680" y="1508760"/>
-            <a:ext cx="6309360" cy="4160520"/>
+            <a:off x="822960" y="1463040"/>
+            <a:ext cx="6565392" cy="4343400"/>
           </a:xfrm>
           <a:prstGeom prst="rect">
             <a:avLst/>
@@ -19013,7 +19017,7 @@
               <a:buNone/>
             </a:pPr>
             <a:r>
-              <a:rPr lang="en-US" sz="2100" dirty="0">
+              <a:rPr lang="en-US" sz="1920" dirty="0">
                 <a:solidFill>
                   <a:srgbClr val="003A63"/>
                 </a:solidFill>
@@ -19021,16 +19025,16 @@
                 <a:ea typeface="Aptos" pitchFamily="34" charset="-122"/>
                 <a:cs typeface="Aptos" pitchFamily="34" charset="-120"/>
               </a:rPr>
-              <a:t>• AI can change the privacy risk profile of a public health dataset even when the source data.</a:t>
-            </a:r>
-            <a:endParaRPr lang="en-US" sz="2100" dirty="0"/>
-          </a:p>
-          <a:p>
-            <a:pPr indent="0" marL="0">
-              <a:buNone/>
-            </a:pPr>
-            <a:r>
-              <a:rPr lang="en-US" sz="2100" dirty="0">
+              <a:t>• AI can change the privacy risk profile of a public health dataset even when.</a:t>
+            </a:r>
+            <a:endParaRPr lang="en-US" sz="1920" dirty="0"/>
+          </a:p>
+          <a:p>
+            <a:pPr indent="0" marL="0">
+              <a:buNone/>
+            </a:pPr>
+            <a:r>
+              <a:rPr lang="en-US" sz="1920" dirty="0">
                 <a:solidFill>
                   <a:srgbClr val="003A63"/>
                 </a:solidFill>
@@ -19038,16 +19042,16 @@
                 <a:ea typeface="Aptos" pitchFamily="34" charset="-122"/>
                 <a:cs typeface="Aptos" pitchFamily="34" charset="-120"/>
               </a:rPr>
-              <a:t>• A dataset that seems low risk in one context may become more sensitive when linked to.</a:t>
-            </a:r>
-            <a:endParaRPr lang="en-US" sz="2100" dirty="0"/>
-          </a:p>
-          <a:p>
-            <a:pPr indent="0" marL="0">
-              <a:buNone/>
-            </a:pPr>
-            <a:r>
-              <a:rPr lang="en-US" sz="2100" dirty="0">
+              <a:t>• A dataset that seems low risk in one context may become more sensitive when.</a:t>
+            </a:r>
+            <a:endParaRPr lang="en-US" sz="1920" dirty="0"/>
+          </a:p>
+          <a:p>
+            <a:pPr indent="0" marL="0">
+              <a:buNone/>
+            </a:pPr>
+            <a:r>
+              <a:rPr lang="en-US" sz="1920" dirty="0">
                 <a:solidFill>
                   <a:srgbClr val="003A63"/>
                 </a:solidFill>
@@ -19055,9 +19059,9 @@
                 <a:ea typeface="Aptos" pitchFamily="34" charset="-122"/>
                 <a:cs typeface="Aptos" pitchFamily="34" charset="-120"/>
               </a:rPr>
-              <a:t>• Generative AI and retrieval systems can also reveal sensitive details through summaries,.</a:t>
-            </a:r>
-            <a:endParaRPr lang="en-US" sz="2100" dirty="0"/>
+              <a:t>• Generative AI and retrieval systems can also reveal sensitive details.</a:t>
+            </a:r>
+            <a:endParaRPr lang="en-US" sz="1920" dirty="0"/>
           </a:p>
         </p:txBody>
       </p:sp>
@@ -19069,12 +19073,12 @@
         </p:nvSpPr>
         <p:spPr>
           <a:xfrm>
-            <a:off x="7635240" y="1325880"/>
-            <a:ext cx="3474720" cy="1255471"/>
+            <a:off x="7543800" y="1325880"/>
+            <a:ext cx="3611880" cy="1261872"/>
           </a:xfrm>
           <a:prstGeom prst="roundRect">
             <a:avLst>
-              <a:gd name="adj" fmla="val 8740"/>
+              <a:gd name="adj" fmla="val 8696"/>
             </a:avLst>
           </a:prstGeom>
           <a:solidFill>
@@ -19096,8 +19100,8 @@
         </p:nvSpPr>
         <p:spPr>
           <a:xfrm>
-            <a:off x="7799832" y="1472184"/>
-            <a:ext cx="3145536" cy="256032"/>
+            <a:off x="7708392" y="1453896"/>
+            <a:ext cx="3282696" cy="228600"/>
           </a:xfrm>
           <a:prstGeom prst="rect">
             <a:avLst/>
@@ -19113,7 +19117,7 @@
               <a:buNone/>
             </a:pPr>
             <a:r>
-              <a:rPr lang="en-US" sz="1300" b="1" dirty="0">
+              <a:rPr lang="en-US" sz="1220" b="1" dirty="0">
                 <a:solidFill>
                   <a:srgbClr val="0068B7"/>
                 </a:solidFill>
@@ -19123,7 +19127,7 @@
               </a:rPr>
               <a:t>Risk check</a:t>
             </a:r>
-            <a:endParaRPr lang="en-US" sz="1300" dirty="0"/>
+            <a:endParaRPr lang="en-US" sz="1220" dirty="0"/>
           </a:p>
         </p:txBody>
       </p:sp>
@@ -19135,8 +19139,8 @@
         </p:nvSpPr>
         <p:spPr>
           <a:xfrm>
-            <a:off x="7799832" y="1801368"/>
-            <a:ext cx="3145536" cy="688543"/>
+            <a:off x="7708392" y="1764792"/>
+            <a:ext cx="3282696" cy="749808"/>
           </a:xfrm>
           <a:prstGeom prst="rect">
             <a:avLst/>
@@ -19154,7 +19158,7 @@
               <a:buNone/>
             </a:pPr>
             <a:r>
-              <a:rPr lang="en-US" sz="1320" dirty="0">
+              <a:rPr lang="en-US" sz="1220" dirty="0">
                 <a:solidFill>
                   <a:srgbClr val="17364A"/>
                 </a:solidFill>
@@ -19162,9 +19166,9 @@
                 <a:ea typeface="Aptos" pitchFamily="34" charset="-122"/>
                 <a:cs typeface="Aptos" pitchFamily="34" charset="-120"/>
               </a:rPr>
-              <a:t>AI can change the privacy risk profile of a public health dataset even when the source data were.</a:t>
-            </a:r>
-            <a:endParaRPr lang="en-US" sz="1320" dirty="0"/>
+              <a:t>AI can change the privacy risk profile of a public health dataset even when the.</a:t>
+            </a:r>
+            <a:endParaRPr lang="en-US" sz="1220" dirty="0"/>
           </a:p>
         </p:txBody>
       </p:sp>
@@ -19176,12 +19180,12 @@
         </p:nvSpPr>
         <p:spPr>
           <a:xfrm>
-            <a:off x="7635240" y="2718511"/>
-            <a:ext cx="3474720" cy="1536192"/>
+            <a:off x="7543800" y="2724912"/>
+            <a:ext cx="3611880" cy="1527048"/>
           </a:xfrm>
           <a:prstGeom prst="roundRect">
             <a:avLst>
-              <a:gd name="adj" fmla="val 7143"/>
+              <a:gd name="adj" fmla="val 7186"/>
             </a:avLst>
           </a:prstGeom>
           <a:solidFill>
@@ -19203,24 +19207,26 @@
         </p:nvSpPr>
         <p:spPr>
           <a:xfrm>
-            <a:off x="7799832" y="2846527"/>
-            <a:ext cx="3145536" cy="237744"/>
-          </a:xfrm>
-          <a:prstGeom prst="rect">
-            <a:avLst/>
-          </a:prstGeom>
-          <a:noFill/>
-          <a:ln/>
-        </p:spPr>
-        <p:txBody>
-          <a:bodyPr wrap="square" lIns="0" tIns="0" rIns="0" bIns="0" rtlCol="0" anchor="ctr"/>
-          <a:lstStyle/>
-          <a:p>
-            <a:pPr indent="0" marL="0">
-              <a:buNone/>
-            </a:pPr>
-            <a:r>
-              <a:rPr lang="en-US" sz="1250" b="1" dirty="0">
+            <a:off x="7708392" y="2852928"/>
+            <a:ext cx="3282696" cy="219456"/>
+          </a:xfrm>
+          <a:prstGeom prst="rect">
+            <a:avLst/>
+          </a:prstGeom>
+          <a:noFill/>
+          <a:ln/>
+        </p:spPr>
+        <p:txBody>
+          <a:bodyPr wrap="square" lIns="0" tIns="0" rIns="0" bIns="0" rtlCol="0" anchor="ctr">
+            <a:normAutofit/>
+          </a:bodyPr>
+          <a:lstStyle/>
+          <a:p>
+            <a:pPr indent="0" marL="0">
+              <a:buNone/>
+            </a:pPr>
+            <a:r>
+              <a:rPr lang="en-US" sz="1160" b="1" dirty="0">
                 <a:solidFill>
                   <a:srgbClr val="0068B7"/>
                 </a:solidFill>
@@ -19230,7 +19236,7 @@
               </a:rPr>
               <a:t>Risk control loop</a:t>
             </a:r>
-            <a:endParaRPr lang="en-US" sz="1250" dirty="0"/>
+            <a:endParaRPr lang="en-US" sz="1160" dirty="0"/>
           </a:p>
         </p:txBody>
       </p:sp>
@@ -19242,7 +19248,7 @@
         </p:nvSpPr>
         <p:spPr>
           <a:xfrm>
-            <a:off x="8763000" y="3399739"/>
+            <a:off x="8717280" y="3406140"/>
             <a:ext cx="164592" cy="0"/>
           </a:xfrm>
           <a:prstGeom prst="line">
@@ -19265,8 +19271,8 @@
         </p:nvSpPr>
         <p:spPr>
           <a:xfrm>
-            <a:off x="7872984" y="3248863"/>
-            <a:ext cx="890016" cy="301752"/>
+            <a:off x="7781544" y="3255264"/>
+            <a:ext cx="935736" cy="301752"/>
           </a:xfrm>
           <a:prstGeom prst="roundRect">
             <a:avLst>
@@ -19292,8 +19298,8 @@
         </p:nvSpPr>
         <p:spPr>
           <a:xfrm>
-            <a:off x="7909560" y="3322015"/>
-            <a:ext cx="816864" cy="146304"/>
+            <a:off x="7818120" y="3328416"/>
+            <a:ext cx="862584" cy="146304"/>
           </a:xfrm>
           <a:prstGeom prst="rect">
             <a:avLst/>
@@ -19333,7 +19339,7 @@
         </p:nvSpPr>
         <p:spPr>
           <a:xfrm>
-            <a:off x="9817608" y="3399739"/>
+            <a:off x="9817608" y="3406140"/>
             <a:ext cx="164592" cy="0"/>
           </a:xfrm>
           <a:prstGeom prst="line">
@@ -19356,8 +19362,8 @@
         </p:nvSpPr>
         <p:spPr>
           <a:xfrm>
-            <a:off x="8927592" y="3248863"/>
-            <a:ext cx="890016" cy="301752"/>
+            <a:off x="8881872" y="3255264"/>
+            <a:ext cx="935736" cy="301752"/>
           </a:xfrm>
           <a:prstGeom prst="roundRect">
             <a:avLst>
@@ -19383,8 +19389,8 @@
         </p:nvSpPr>
         <p:spPr>
           <a:xfrm>
-            <a:off x="8964168" y="3322015"/>
-            <a:ext cx="816864" cy="146304"/>
+            <a:off x="8918448" y="3328416"/>
+            <a:ext cx="862584" cy="146304"/>
           </a:xfrm>
           <a:prstGeom prst="rect">
             <a:avLst/>
@@ -19424,8 +19430,8 @@
         </p:nvSpPr>
         <p:spPr>
           <a:xfrm>
-            <a:off x="9982200" y="3248863"/>
-            <a:ext cx="890016" cy="301752"/>
+            <a:off x="9982200" y="3255264"/>
+            <a:ext cx="935736" cy="301752"/>
           </a:xfrm>
           <a:prstGeom prst="roundRect">
             <a:avLst>
@@ -19451,8 +19457,8 @@
         </p:nvSpPr>
         <p:spPr>
           <a:xfrm>
-            <a:off x="10018776" y="3322015"/>
-            <a:ext cx="816864" cy="146304"/>
+            <a:off x="10018776" y="3328416"/>
+            <a:ext cx="862584" cy="146304"/>
           </a:xfrm>
           <a:prstGeom prst="rect">
             <a:avLst/>
@@ -19492,8 +19498,8 @@
         </p:nvSpPr>
         <p:spPr>
           <a:xfrm>
-            <a:off x="7854696" y="3742639"/>
-            <a:ext cx="3035808" cy="365760"/>
+            <a:off x="7763256" y="3749040"/>
+            <a:ext cx="3172968" cy="356616"/>
           </a:xfrm>
           <a:prstGeom prst="rect">
             <a:avLst/>
@@ -19511,7 +19517,7 @@
               <a:buNone/>
             </a:pPr>
             <a:r>
-              <a:rPr lang="en-US" sz="1120" dirty="0">
+              <a:rPr lang="en-US" sz="1040" dirty="0">
                 <a:solidFill>
                   <a:srgbClr val="17364A"/>
                 </a:solidFill>
@@ -19519,9 +19525,9 @@
                 <a:ea typeface="Aptos" pitchFamily="34" charset="-122"/>
                 <a:cs typeface="Aptos" pitchFamily="34" charset="-120"/>
               </a:rPr>
-              <a:t>Responsible use depends on finding risks early, applying safeguards, and watching for drift or harm over time.</a:t>
-            </a:r>
-            <a:endParaRPr lang="en-US" sz="1120" dirty="0"/>
+              <a:t>Responsible use depends on finding risks early, applying safeguards,.</a:t>
+            </a:r>
+            <a:endParaRPr lang="en-US" sz="1040" dirty="0"/>
           </a:p>
         </p:txBody>
       </p:sp>
@@ -19533,12 +19539,12 @@
         </p:nvSpPr>
         <p:spPr>
           <a:xfrm>
-            <a:off x="7635240" y="4391863"/>
-            <a:ext cx="3474720" cy="1255471"/>
+            <a:off x="7543800" y="4389120"/>
+            <a:ext cx="3611880" cy="1261872"/>
           </a:xfrm>
           <a:prstGeom prst="roundRect">
             <a:avLst>
-              <a:gd name="adj" fmla="val 8740"/>
+              <a:gd name="adj" fmla="val 8696"/>
             </a:avLst>
           </a:prstGeom>
           <a:solidFill>
@@ -19560,8 +19566,8 @@
         </p:nvSpPr>
         <p:spPr>
           <a:xfrm>
-            <a:off x="7799832" y="4538167"/>
-            <a:ext cx="3145536" cy="256032"/>
+            <a:off x="7708392" y="4517136"/>
+            <a:ext cx="3282696" cy="228600"/>
           </a:xfrm>
           <a:prstGeom prst="rect">
             <a:avLst/>
@@ -19577,7 +19583,7 @@
               <a:buNone/>
             </a:pPr>
             <a:r>
-              <a:rPr lang="en-US" sz="1300" b="1" dirty="0">
+              <a:rPr lang="en-US" sz="1220" b="1" dirty="0">
                 <a:solidFill>
                   <a:srgbClr val="0068B7"/>
                 </a:solidFill>
@@ -19587,7 +19593,7 @@
               </a:rPr>
               <a:t>Safeguard to plan</a:t>
             </a:r>
-            <a:endParaRPr lang="en-US" sz="1300" dirty="0"/>
+            <a:endParaRPr lang="en-US" sz="1220" dirty="0"/>
           </a:p>
         </p:txBody>
       </p:sp>
@@ -19599,8 +19605,8 @@
         </p:nvSpPr>
         <p:spPr>
           <a:xfrm>
-            <a:off x="7799832" y="4867351"/>
-            <a:ext cx="3145536" cy="688543"/>
+            <a:off x="7708392" y="4828032"/>
+            <a:ext cx="3282696" cy="749808"/>
           </a:xfrm>
           <a:prstGeom prst="rect">
             <a:avLst/>
@@ -19618,7 +19624,7 @@
               <a:buNone/>
             </a:pPr>
             <a:r>
-              <a:rPr lang="en-US" sz="1320" dirty="0">
+              <a:rPr lang="en-US" sz="1220" dirty="0">
                 <a:solidFill>
                   <a:srgbClr val="17364A"/>
                 </a:solidFill>
@@ -19626,9 +19632,9 @@
                 <a:ea typeface="Aptos" pitchFamily="34" charset="-122"/>
                 <a:cs typeface="Aptos" pitchFamily="34" charset="-120"/>
               </a:rPr>
-              <a:t>Identify what could go wrong, who could be affected, what safeguards are needed, and what evidence should be reviewed before use.</a:t>
-            </a:r>
-            <a:endParaRPr lang="en-US" sz="1320" dirty="0"/>
+              <a:t>Identify what could go wrong, who could be affected, what safeguards are needed,.</a:t>
+            </a:r>
+            <a:endParaRPr lang="en-US" sz="1220" dirty="0"/>
           </a:p>
         </p:txBody>
       </p:sp>

--- a/downloads/presentations/modules/gov-310.pptx
+++ b/downloads/presentations/modules/gov-310.pptx
@@ -13182,7 +13182,7 @@
                 <a:ea typeface="Aptos" pitchFamily="34" charset="-122"/>
                 <a:cs typeface="Aptos" pitchFamily="34" charset="-120"/>
               </a:rPr>
-              <a:t>• 1. Which statement best describes de-identification in public health AI?</a:t>
+              <a:t>1. Which statement best describes de-identification in public health AI?</a:t>
             </a:r>
             <a:endParaRPr lang="en-US" sz="1920" dirty="0"/>
           </a:p>
@@ -13199,7 +13199,7 @@
                 <a:ea typeface="Aptos" pitchFamily="34" charset="-122"/>
                 <a:cs typeface="Aptos" pitchFamily="34" charset="-120"/>
               </a:rPr>
-              <a:t>• 2. Why can AI increase re-identification risk?</a:t>
+              <a:t>2. Why can AI increase re-identification risk?</a:t>
             </a:r>
             <a:endParaRPr lang="en-US" sz="1920" dirty="0"/>
           </a:p>
@@ -13216,7 +13216,7 @@
                 <a:ea typeface="Aptos" pitchFamily="34" charset="-122"/>
                 <a:cs typeface="Aptos" pitchFamily="34" charset="-120"/>
               </a:rPr>
-              <a:t>• 3. What is a strong privacy guardrail for an AI workflow?</a:t>
+              <a:t>3. What is a strong privacy guardrail for an AI workflow?</a:t>
             </a:r>
             <a:endParaRPr lang="en-US" sz="1920" dirty="0"/>
           </a:p>
@@ -13323,7 +13323,7 @@
                 <a:ea typeface="Aptos" pitchFamily="34" charset="-122"/>
                 <a:cs typeface="Aptos" pitchFamily="34" charset="-120"/>
               </a:rPr>
-              <a:t>1. Which statement best describes de-identification in public health AI?</a:t>
+              <a:t>Which statement best describes de-identification in public health AI?</a:t>
             </a:r>
             <a:endParaRPr lang="en-US" sz="1220" dirty="0"/>
           </a:p>
@@ -13430,41 +13430,7 @@
                 <a:ea typeface="Aptos" pitchFamily="34" charset="-122"/>
                 <a:cs typeface="Aptos" pitchFamily="34" charset="-120"/>
               </a:rPr>
-              <a:t>1.</a:t>
-            </a:r>
-            <a:endParaRPr lang="en-US" sz="1140" dirty="0"/>
-          </a:p>
-          <a:p>
-            <a:pPr indent="0" marL="0">
-              <a:buNone/>
-            </a:pPr>
-            <a:r>
-              <a:rPr lang="en-US" sz="1140" dirty="0">
-                <a:solidFill>
-                  <a:srgbClr val="17364A"/>
-                </a:solidFill>
-                <a:latin typeface="Aptos" pitchFamily="34" charset="0"/>
-                <a:ea typeface="Aptos" pitchFamily="34" charset="-122"/>
-                <a:cs typeface="Aptos" pitchFamily="34" charset="-120"/>
-              </a:rPr>
               <a:t>Which statement best describes de-identification.</a:t>
-            </a:r>
-            <a:endParaRPr lang="en-US" sz="1140" dirty="0"/>
-          </a:p>
-          <a:p>
-            <a:pPr indent="0" marL="0">
-              <a:buNone/>
-            </a:pPr>
-            <a:r>
-              <a:rPr lang="en-US" sz="1140" dirty="0">
-                <a:solidFill>
-                  <a:srgbClr val="17364A"/>
-                </a:solidFill>
-                <a:latin typeface="Aptos" pitchFamily="34" charset="0"/>
-                <a:ea typeface="Aptos" pitchFamily="34" charset="-122"/>
-                <a:cs typeface="Aptos" pitchFamily="34" charset="-120"/>
-              </a:rPr>
-              <a:t>2.</a:t>
             </a:r>
             <a:endParaRPr lang="en-US" sz="1140" dirty="0"/>
           </a:p>
